--- a/AICA_System_User_Manual.pptx
+++ b/AICA_System_User_Manual.pptx
@@ -3212,7 +3212,7 @@
             </a:r>
             <a:br/>
             <a:r>
-              <a:t>최종 개정일: 2026. 07. 21 | 경영혁신실 배포본</a:t>
+              <a:t>최종 개정일: 2026. 07. 21 | 경영혁신실 배포본 (화면 캡처 연동본)</a:t>
             </a:r>
           </a:p>
         </p:txBody>
@@ -3369,7 +3369,7 @@
         <p:spPr>
           <a:xfrm>
             <a:off x="548640" y="1828800"/>
-            <a:ext cx="3383280" cy="4114800"/>
+            <a:ext cx="5486400" cy="4114800"/>
           </a:xfrm>
           <a:prstGeom prst="roundRect">
             <a:avLst/>
@@ -3414,7 +3414,7 @@
         <p:spPr>
           <a:xfrm>
             <a:off x="685800" y="1965960"/>
-            <a:ext cx="3108960" cy="3840480"/>
+            <a:ext cx="5212080" cy="3840480"/>
           </a:xfrm>
           <a:prstGeom prst="rect">
             <a:avLst/>
@@ -3439,7 +3439,7 @@
               </a:defRPr>
             </a:pPr>
             <a:r>
-              <a:t>실시간 평가 지원</a:t>
+              <a:t>실시간 클라우드 평가 환경</a:t>
             </a:r>
           </a:p>
           <a:p>
@@ -3455,7 +3455,7 @@
               </a:defRPr>
             </a:pPr>
             <a:r>
-              <a:t>• 지원자 제출 자료(보고서, 소스코드, 동영상)의 유기적인 확인</a:t>
+              <a:t>• 심사 대상자의 레벨(L3/L4)에 따른 맞춤형 채점표 렌더링</a:t>
             </a:r>
           </a:p>
           <a:p>
@@ -3471,7 +3471,7 @@
               </a:defRPr>
             </a:pPr>
             <a:r>
-              <a:t>• 현업(3:4:3) 및 기술(4:3:3) 전문 루브릭의 자동 가중합 계산</a:t>
+              <a:t>• 현업(3:4:3) 및 기술(4:3:3) 가중합 연산을 통한 최종 점수 산출</a:t>
             </a:r>
           </a:p>
           <a:p>
@@ -3487,7 +3487,39 @@
               </a:defRPr>
             </a:pPr>
             <a:r>
-              <a:t>• 채점 시 합격/보완후합격/불합격의 최종 합의 상태를 실시간 집계</a:t>
+              <a:t>• 동시 접속 평가 진행 상황 및 심사 합격/불합격 여부 실시간 계산</a:t>
+            </a:r>
+          </a:p>
+          <a:p>
+            <a:pPr>
+              <a:spcAft>
+                <a:spcPts val="600"/>
+              </a:spcAft>
+              <a:defRPr sz="1200">
+                <a:solidFill>
+                  <a:srgbClr val="94A3B8"/>
+                </a:solidFill>
+                <a:latin typeface="Malgun Gothic"/>
+              </a:defRPr>
+            </a:pPr>
+            <a:r>
+              <a:t>• 5대 공통 보안성 Red Flag 기능 탑재로 보안 검증 강화</a:t>
+            </a:r>
+          </a:p>
+          <a:p>
+            <a:pPr>
+              <a:spcAft>
+                <a:spcPts val="600"/>
+              </a:spcAft>
+              <a:defRPr sz="1200">
+                <a:solidFill>
+                  <a:srgbClr val="94A3B8"/>
+                </a:solidFill>
+                <a:latin typeface="Malgun Gothic"/>
+              </a:defRPr>
+            </a:pPr>
+            <a:r>
+              <a:t>• 오른쪽 화면: 실제 리액트 기반의 심사 워크스페이스 구조 모형</a:t>
             </a:r>
           </a:p>
         </p:txBody>
@@ -3500,8 +3532,8 @@
         </p:nvSpPr>
         <p:spPr>
           <a:xfrm>
-            <a:off x="4389120" y="1828800"/>
-            <a:ext cx="3383280" cy="4114800"/>
+            <a:off x="6400800" y="1828800"/>
+            <a:ext cx="5212080" cy="4114800"/>
           </a:xfrm>
           <a:prstGeom prst="roundRect">
             <a:avLst/>
@@ -3511,7 +3543,7 @@
           </a:solidFill>
           <a:ln w="19050">
             <a:solidFill>
-              <a:srgbClr val="F43F5E"/>
+              <a:srgbClr val="6366F1"/>
             </a:solidFill>
           </a:ln>
         </p:spPr>
@@ -3537,209 +3569,30 @@
           </a:p>
         </p:txBody>
       </p:sp>
-      <p:sp>
-        <p:nvSpPr>
-          <p:cNvPr id="8" name="TextBox 7"/>
-          <p:cNvSpPr txBox="1"/>
+      <p:pic>
+        <p:nvPicPr>
+          <p:cNvPr id="8" name="Picture 7" descr="aica_evaluation_workspace_mockup_1784167999282.png"/>
+          <p:cNvPicPr>
+            <a:picLocks noChangeAspect="1"/>
+          </p:cNvPicPr>
           <p:nvPr/>
-        </p:nvSpPr>
-        <p:spPr>
-          <a:xfrm>
-            <a:off x="4526280" y="1965960"/>
-            <a:ext cx="3108960" cy="3840480"/>
+        </p:nvPicPr>
+        <p:blipFill>
+          <a:blip r:embed="rId2"/>
+          <a:stretch>
+            <a:fillRect/>
+          </a:stretch>
+        </p:blipFill>
+        <p:spPr>
+          <a:xfrm>
+            <a:off x="7086600" y="1965960"/>
+            <a:ext cx="3840480" cy="3840480"/>
           </a:xfrm>
           <a:prstGeom prst="rect">
             <a:avLst/>
           </a:prstGeom>
-          <a:noFill/>
-        </p:spPr>
-        <p:txBody>
-          <a:bodyPr wrap="square">
-            <a:spAutoFit/>
-          </a:bodyPr>
-          <a:lstStyle/>
-          <a:p>
-            <a:pPr>
-              <a:spcAft>
-                <a:spcPts val="1000"/>
-              </a:spcAft>
-              <a:defRPr sz="1500" b="1">
-                <a:solidFill>
-                  <a:srgbClr val="F43F5E"/>
-                </a:solidFill>
-                <a:latin typeface="Malgun Gothic"/>
-              </a:defRPr>
-            </a:pPr>
-            <a:r>
-              <a:t>보안 Red Flag 및 Consensus</a:t>
-            </a:r>
-          </a:p>
-          <a:p>
-            <a:pPr>
-              <a:spcAft>
-                <a:spcPts val="600"/>
-              </a:spcAft>
-              <a:defRPr sz="1200">
-                <a:solidFill>
-                  <a:srgbClr val="94A3B8"/>
-                </a:solidFill>
-                <a:latin typeface="Malgun Gothic"/>
-              </a:defRPr>
-            </a:pPr>
-            <a:r>
-              <a:t>• 기밀 유출, API Key 방치 등 5대 보안 가이드라인 자가진단</a:t>
-            </a:r>
-          </a:p>
-          <a:p>
-            <a:pPr>
-              <a:spcAft>
-                <a:spcPts val="600"/>
-              </a:spcAft>
-              <a:defRPr sz="1200">
-                <a:solidFill>
-                  <a:srgbClr val="94A3B8"/>
-                </a:solidFill>
-                <a:latin typeface="Malgun Gothic"/>
-              </a:defRPr>
-            </a:pPr>
-            <a:r>
-              <a:t>• 보안 요건 미준수 시 화면에 빨간색 Red Flag 알림 노출</a:t>
-            </a:r>
-          </a:p>
-          <a:p>
-            <a:pPr>
-              <a:spcAft>
-                <a:spcPts val="600"/>
-              </a:spcAft>
-              <a:defRPr sz="1200">
-                <a:solidFill>
-                  <a:srgbClr val="94A3B8"/>
-                </a:solidFill>
-                <a:latin typeface="Malgun Gothic"/>
-              </a:defRPr>
-            </a:pPr>
-            <a:r>
-              <a:t>• 위원 간 채점 편차가 15점 이상 시 조율 권장 알림 기능 탑재</a:t>
-            </a:r>
-          </a:p>
-        </p:txBody>
-      </p:sp>
-      <p:sp>
-        <p:nvSpPr>
-          <p:cNvPr id="9" name="Rounded Rectangle 8"/>
-          <p:cNvSpPr/>
-          <p:nvPr/>
-        </p:nvSpPr>
-        <p:spPr>
-          <a:xfrm>
-            <a:off x="8229600" y="1828800"/>
-            <a:ext cx="3383280" cy="4114800"/>
-          </a:xfrm>
-          <a:prstGeom prst="roundRect">
-            <a:avLst/>
-          </a:prstGeom>
-          <a:solidFill>
-            <a:srgbClr val="1E293B"/>
-          </a:solidFill>
-          <a:ln w="19050">
-            <a:solidFill>
-              <a:srgbClr val="10B981"/>
-            </a:solidFill>
-          </a:ln>
-        </p:spPr>
-        <p:style>
-          <a:lnRef idx="1">
-            <a:schemeClr val="accent1"/>
-          </a:lnRef>
-          <a:fillRef idx="3">
-            <a:schemeClr val="accent1"/>
-          </a:fillRef>
-          <a:effectRef idx="2">
-            <a:schemeClr val="accent1"/>
-          </a:effectRef>
-          <a:fontRef idx="minor">
-            <a:schemeClr val="lt1"/>
-          </a:fontRef>
-        </p:style>
-        <p:txBody>
-          <a:bodyPr rtlCol="0" anchor="ctr"/>
-          <a:lstStyle/>
-          <a:p>
-            <a:pPr algn="ctr"/>
-          </a:p>
-        </p:txBody>
-      </p:sp>
-      <p:sp>
-        <p:nvSpPr>
-          <p:cNvPr id="10" name="TextBox 9"/>
-          <p:cNvSpPr txBox="1"/>
-          <p:nvPr/>
-        </p:nvSpPr>
-        <p:spPr>
-          <a:xfrm>
-            <a:off x="8366760" y="1965960"/>
-            <a:ext cx="3108960" cy="3840480"/>
-          </a:xfrm>
-          <a:prstGeom prst="rect">
-            <a:avLst/>
-          </a:prstGeom>
-          <a:noFill/>
-        </p:spPr>
-        <p:txBody>
-          <a:bodyPr wrap="square">
-            <a:spAutoFit/>
-          </a:bodyPr>
-          <a:lstStyle/>
-          <a:p>
-            <a:pPr>
-              <a:spcAft>
-                <a:spcPts val="1000"/>
-              </a:spcAft>
-              <a:defRPr sz="1500" b="1">
-                <a:solidFill>
-                  <a:srgbClr val="10B981"/>
-                </a:solidFill>
-                <a:latin typeface="Malgun Gothic"/>
-              </a:defRPr>
-            </a:pPr>
-            <a:r>
-              <a:t>Cloud &amp; Serverless DB</a:t>
-            </a:r>
-          </a:p>
-          <a:p>
-            <a:pPr>
-              <a:spcAft>
-                <a:spcPts val="600"/>
-              </a:spcAft>
-              <a:defRPr sz="1200">
-                <a:solidFill>
-                  <a:srgbClr val="94A3B8"/>
-                </a:solidFill>
-                <a:latin typeface="Malgun Gothic"/>
-              </a:defRPr>
-            </a:pPr>
-            <a:r>
-              <a:t>• Firebase Cloud Firestore 연동을 통한 영속적 데이터 보관</a:t>
-            </a:r>
-          </a:p>
-          <a:p>
-            <a:pPr>
-              <a:spcAft>
-                <a:spcPts val="600"/>
-              </a:spcAft>
-              <a:defRPr sz="1200">
-                <a:solidFill>
-                  <a:srgbClr val="94A3B8"/>
-                </a:solidFill>
-                <a:latin typeface="Malgun Gothic"/>
-              </a:defRPr>
-            </a:pPr>
-            <a:r>
-              <a:t>• 로컬 PC 무설치 구동(server.js), Docker 컨테이너 및 Windows IIS 배포 블루프린트 제공</a:t>
-            </a:r>
-          </a:p>
-        </p:txBody>
-      </p:sp>
+        </p:spPr>
+      </p:pic>
     </p:spTree>
   </p:cSld>
   <p:clrMapOvr>
@@ -3892,7 +3745,7 @@
         <p:spPr>
           <a:xfrm>
             <a:off x="548640" y="1828800"/>
-            <a:ext cx="5303520" cy="4114800"/>
+            <a:ext cx="5486400" cy="4114800"/>
           </a:xfrm>
           <a:prstGeom prst="roundRect">
             <a:avLst/>
@@ -3937,7 +3790,7 @@
         <p:spPr>
           <a:xfrm>
             <a:off x="685800" y="1965960"/>
-            <a:ext cx="5029200" cy="3840480"/>
+            <a:ext cx="5212080" cy="3840480"/>
           </a:xfrm>
           <a:prstGeom prst="rect">
             <a:avLst/>
@@ -3962,7 +3815,7 @@
               </a:defRPr>
             </a:pPr>
             <a:r>
-              <a:t>과제 등록 및 심사 패널 배정</a:t>
+              <a:t>대시보드 통계 분석 및 상세 필터링</a:t>
             </a:r>
           </a:p>
           <a:p>
@@ -3978,7 +3831,7 @@
               </a:defRPr>
             </a:pPr>
             <a:r>
-              <a:t>• 화면 우측 상단 [+ 신규 평가과제 등록 &amp; 패널 배정] 클릭</a:t>
+              <a:t>• 전체 인원, 완료, 평가중, 대기 통계 카드로 진행 상황 실시간 확인</a:t>
             </a:r>
           </a:p>
           <a:p>
@@ -3994,7 +3847,7 @@
               </a:defRPr>
             </a:pPr>
             <a:r>
-              <a:t>• 이해상충 방지 시스템: 지원자의 소속 관계사와 동일한 소속의 심사위원을 필터링하고 제외하여 3인 배정</a:t>
+              <a:t>• 통계 카드를 클릭하면 해당 그룹의 지원자 명단 상세 모달 팝업 오픈</a:t>
             </a:r>
           </a:p>
           <a:p>
@@ -4010,7 +3863,39 @@
               </a:defRPr>
             </a:pPr>
             <a:r>
-              <a:t>• 동일 소속 위원을 지정하는 경우 '[이해상충 주의]' 알림 라벨을 표시하여 실수를 예방</a:t>
+              <a:t>• 각 위원회별 소속 심사위원들의 심사 여부를 도트로 실시간 모니터링</a:t>
+            </a:r>
+          </a:p>
+          <a:p>
+            <a:pPr>
+              <a:spcAft>
+                <a:spcPts val="600"/>
+              </a:spcAft>
+              <a:defRPr sz="1200">
+                <a:solidFill>
+                  <a:srgbClr val="94A3B8"/>
+                </a:solidFill>
+                <a:latin typeface="Malgun Gothic"/>
+              </a:defRPr>
+            </a:pPr>
+            <a:r>
+              <a:t>• 피평가자와 동일 계열사 심사위원을 제외하는 '이해상충 방지' 기능</a:t>
+            </a:r>
+          </a:p>
+          <a:p>
+            <a:pPr>
+              <a:spcAft>
+                <a:spcPts val="600"/>
+              </a:spcAft>
+              <a:defRPr sz="1200">
+                <a:solidFill>
+                  <a:srgbClr val="94A3B8"/>
+                </a:solidFill>
+                <a:latin typeface="Malgun Gothic"/>
+              </a:defRPr>
+            </a:pPr>
+            <a:r>
+              <a:t>• 오른쪽 화면: 운영간사용 메인 관리 대시보드 및 평가 큐 상세 화면</a:t>
             </a:r>
           </a:p>
         </p:txBody>
@@ -4023,8 +3908,8 @@
         </p:nvSpPr>
         <p:spPr>
           <a:xfrm>
-            <a:off x="6309360" y="1828800"/>
-            <a:ext cx="5303520" cy="4114800"/>
+            <a:off x="6400800" y="1828800"/>
+            <a:ext cx="5212080" cy="4114800"/>
           </a:xfrm>
           <a:prstGeom prst="roundRect">
             <a:avLst/>
@@ -4034,7 +3919,7 @@
           </a:solidFill>
           <a:ln w="19050">
             <a:solidFill>
-              <a:srgbClr val="10B981"/>
+              <a:srgbClr val="6366F1"/>
             </a:solidFill>
           </a:ln>
         </p:spPr>
@@ -4060,93 +3945,30 @@
           </a:p>
         </p:txBody>
       </p:sp>
-      <p:sp>
-        <p:nvSpPr>
-          <p:cNvPr id="8" name="TextBox 7"/>
-          <p:cNvSpPr txBox="1"/>
+      <p:pic>
+        <p:nvPicPr>
+          <p:cNvPr id="8" name="Picture 7" descr="media__1784188798650.png"/>
+          <p:cNvPicPr>
+            <a:picLocks noChangeAspect="1"/>
+          </p:cNvPicPr>
           <p:nvPr/>
-        </p:nvSpPr>
-        <p:spPr>
-          <a:xfrm>
-            <a:off x="6446520" y="1965960"/>
-            <a:ext cx="5029200" cy="3840480"/>
+        </p:nvPicPr>
+        <p:blipFill>
+          <a:blip r:embed="rId2"/>
+          <a:stretch>
+            <a:fillRect/>
+          </a:stretch>
+        </p:blipFill>
+        <p:spPr>
+          <a:xfrm>
+            <a:off x="7369320" y="1965960"/>
+            <a:ext cx="3275038" cy="3840480"/>
           </a:xfrm>
           <a:prstGeom prst="rect">
             <a:avLst/>
           </a:prstGeom>
-          <a:noFill/>
-        </p:spPr>
-        <p:txBody>
-          <a:bodyPr wrap="square">
-            <a:spAutoFit/>
-          </a:bodyPr>
-          <a:lstStyle/>
-          <a:p>
-            <a:pPr>
-              <a:spcAft>
-                <a:spcPts val="1000"/>
-              </a:spcAft>
-              <a:defRPr sz="1500" b="1">
-                <a:solidFill>
-                  <a:srgbClr val="10B981"/>
-                </a:solidFill>
-                <a:latin typeface="Malgun Gothic"/>
-              </a:defRPr>
-            </a:pPr>
-            <a:r>
-              <a:t>대시보드 모니터링</a:t>
-            </a:r>
-          </a:p>
-          <a:p>
-            <a:pPr>
-              <a:spcAft>
-                <a:spcPts val="600"/>
-              </a:spcAft>
-              <a:defRPr sz="1200">
-                <a:solidFill>
-                  <a:srgbClr val="94A3B8"/>
-                </a:solidFill>
-                <a:latin typeface="Malgun Gothic"/>
-              </a:defRPr>
-            </a:pPr>
-            <a:r>
-              <a:t>• 4대 통계 카드: 전체 지원자 수, 평가 완료, 진행중, 대기 건수 모니터링</a:t>
-            </a:r>
-          </a:p>
-          <a:p>
-            <a:pPr>
-              <a:spcAft>
-                <a:spcPts val="600"/>
-              </a:spcAft>
-              <a:defRPr sz="1200">
-                <a:solidFill>
-                  <a:srgbClr val="94A3B8"/>
-                </a:solidFill>
-                <a:latin typeface="Malgun Gothic"/>
-              </a:defRPr>
-            </a:pPr>
-            <a:r>
-              <a:t>• 상세 모달 조회: 통계 카드를 클릭하면 해당 그룹(예: '평가 대기')의 지원자 상세 정보 및 담당 심사위원의 실시간 진행 현황 팝업 조회</a:t>
-            </a:r>
-          </a:p>
-          <a:p>
-            <a:pPr>
-              <a:spcAft>
-                <a:spcPts val="600"/>
-              </a:spcAft>
-              <a:defRPr sz="1200">
-                <a:solidFill>
-                  <a:srgbClr val="94A3B8"/>
-                </a:solidFill>
-                <a:latin typeface="Malgun Gothic"/>
-              </a:defRPr>
-            </a:pPr>
-            <a:r>
-              <a:t>• 소속 관계사별(에이텍모빌리티, 에이텍씨앤 등) 및 인증 레벨별 정교한 필터링 제공</a:t>
-            </a:r>
-          </a:p>
-        </p:txBody>
-      </p:sp>
+        </p:spPr>
+      </p:pic>
     </p:spTree>
   </p:cSld>
   <p:clrMapOvr>
@@ -4240,7 +4062,7 @@
               </a:defRPr>
             </a:pPr>
             <a:r>
-              <a:t>3. 심사위원 가이드 (Reviewer Workspace)</a:t>
+              <a:t>3. 심사위원 가이드 (Reviewer Evaluation)</a:t>
             </a:r>
           </a:p>
         </p:txBody>
@@ -4299,7 +4121,7 @@
         <p:spPr>
           <a:xfrm>
             <a:off x="548640" y="1828800"/>
-            <a:ext cx="5303520" cy="4114800"/>
+            <a:ext cx="5486400" cy="4114800"/>
           </a:xfrm>
           <a:prstGeom prst="roundRect">
             <a:avLst/>
@@ -4344,7 +4166,7 @@
         <p:spPr>
           <a:xfrm>
             <a:off x="685800" y="1965960"/>
-            <a:ext cx="5029200" cy="3840480"/>
+            <a:ext cx="5212080" cy="3840480"/>
           </a:xfrm>
           <a:prstGeom prst="rect">
             <a:avLst/>
@@ -4369,7 +4191,7 @@
               </a:defRPr>
             </a:pPr>
             <a:r>
-              <a:t>개인 심사 큐 및 5단계 루브릭 채점</a:t>
+              <a:t>5단계 세로형 루브릭 채점 및 질문은행</a:t>
             </a:r>
           </a:p>
           <a:p>
@@ -4385,7 +4207,7 @@
               </a:defRPr>
             </a:pPr>
             <a:r>
-              <a:t>• 본인의 성명(ID)과 이메일(PW)을 입력하여 시스템 로그인</a:t>
+              <a:t>• 본인에게 배정된 과제 큐에서 [심사하기]를 클릭하여 진입</a:t>
             </a:r>
           </a:p>
           <a:p>
@@ -4401,7 +4223,11 @@
               </a:defRPr>
             </a:pPr>
             <a:r>
-              <a:t>• 자신에게 배정된 과제 큐에서 [심사하기] 버튼 선택</a:t>
+              <a:t>• 난이도/완성도/자산화(기술/보안/기여)별 5단계 채점 등급 선택:</a:t>
+            </a:r>
+            <a:br/>
+            <a:r>
+              <a:t>(탁월 100, 양호 85, 보통 70, 미흡 50, 부족 30)</a:t>
             </a:r>
           </a:p>
           <a:p>
@@ -4417,11 +4243,7 @@
               </a:defRPr>
             </a:pPr>
             <a:r>
-              <a:t>• 기존 3단계에서 확장된 '5단계 루브릭' 채점 지원:</a:t>
-            </a:r>
-            <a:br/>
-            <a:r>
-              <a:t>(탁월: 100, 양호: 85, 보통: 70, 미흡: 50, 부족: 30)</a:t>
+              <a:t>• 각 등급별 정성/정량적 세부 텍스트 설명 렌더링으로 객관성 확보</a:t>
             </a:r>
           </a:p>
           <a:p>
@@ -4437,7 +4259,23 @@
               </a:defRPr>
             </a:pPr>
             <a:r>
-              <a:t>• 세로 스택 행 레이아웃으로 개편하여 루브릭 상세 설명서의 텍스트 가독성 최적화</a:t>
+              <a:t>• 과제 카테고리별 맞춤 질문은행 도우미 탑재 (질문 검색 기능 포함)</a:t>
+            </a:r>
+          </a:p>
+          <a:p>
+            <a:pPr>
+              <a:spcAft>
+                <a:spcPts val="600"/>
+              </a:spcAft>
+              <a:defRPr sz="1200">
+                <a:solidFill>
+                  <a:srgbClr val="94A3B8"/>
+                </a:solidFill>
+                <a:latin typeface="Malgun Gothic"/>
+              </a:defRPr>
+            </a:pPr>
+            <a:r>
+              <a:t>• 오른쪽 화면: 심사위원 점수 입력 및 보안 체크리스트 작업 화면</a:t>
             </a:r>
           </a:p>
         </p:txBody>
@@ -4450,8 +4288,8 @@
         </p:nvSpPr>
         <p:spPr>
           <a:xfrm>
-            <a:off x="6309360" y="1828800"/>
-            <a:ext cx="5303520" cy="4114800"/>
+            <a:off x="6400800" y="1828800"/>
+            <a:ext cx="5212080" cy="4114800"/>
           </a:xfrm>
           <a:prstGeom prst="roundRect">
             <a:avLst/>
@@ -4461,7 +4299,7 @@
           </a:solidFill>
           <a:ln w="19050">
             <a:solidFill>
-              <a:srgbClr val="10B981"/>
+              <a:srgbClr val="6366F1"/>
             </a:solidFill>
           </a:ln>
         </p:spPr>
@@ -4487,93 +4325,30 @@
           </a:p>
         </p:txBody>
       </p:sp>
-      <p:sp>
-        <p:nvSpPr>
-          <p:cNvPr id="8" name="TextBox 7"/>
-          <p:cNvSpPr txBox="1"/>
+      <p:pic>
+        <p:nvPicPr>
+          <p:cNvPr id="8" name="Picture 7" descr="media__1784176902473.png"/>
+          <p:cNvPicPr>
+            <a:picLocks noChangeAspect="1"/>
+          </p:cNvPicPr>
           <p:nvPr/>
-        </p:nvSpPr>
-        <p:spPr>
-          <a:xfrm>
-            <a:off x="6446520" y="1965960"/>
-            <a:ext cx="5029200" cy="3840480"/>
+        </p:nvPicPr>
+        <p:blipFill>
+          <a:blip r:embed="rId2"/>
+          <a:stretch>
+            <a:fillRect/>
+          </a:stretch>
+        </p:blipFill>
+        <p:spPr>
+          <a:xfrm>
+            <a:off x="6814049" y="1965960"/>
+            <a:ext cx="4385580" cy="3840480"/>
           </a:xfrm>
           <a:prstGeom prst="rect">
             <a:avLst/>
           </a:prstGeom>
-          <a:noFill/>
-        </p:spPr>
-        <p:txBody>
-          <a:bodyPr wrap="square">
-            <a:spAutoFit/>
-          </a:bodyPr>
-          <a:lstStyle/>
-          <a:p>
-            <a:pPr>
-              <a:spcAft>
-                <a:spcPts val="1000"/>
-              </a:spcAft>
-              <a:defRPr sz="1500" b="1">
-                <a:solidFill>
-                  <a:srgbClr val="10B981"/>
-                </a:solidFill>
-                <a:latin typeface="Malgun Gothic"/>
-              </a:defRPr>
-            </a:pPr>
-            <a:r>
-              <a:t>면접 도우미 및 합의 판정</a:t>
-            </a:r>
-          </a:p>
-          <a:p>
-            <a:pPr>
-              <a:spcAft>
-                <a:spcPts val="600"/>
-              </a:spcAft>
-              <a:defRPr sz="1200">
-                <a:solidFill>
-                  <a:srgbClr val="94A3B8"/>
-                </a:solidFill>
-                <a:latin typeface="Malgun Gothic"/>
-              </a:defRPr>
-            </a:pPr>
-            <a:r>
-              <a:t>• 질문은행 (Question Bank): 과제 성격(RAG, 업무자동화 등)에 따라 적절한 면접 질문을 바로 검색하여 질문 구성 보조</a:t>
-            </a:r>
-          </a:p>
-          <a:p>
-            <a:pPr>
-              <a:spcAft>
-                <a:spcPts val="600"/>
-              </a:spcAft>
-              <a:defRPr sz="1200">
-                <a:solidFill>
-                  <a:srgbClr val="94A3B8"/>
-                </a:solidFill>
-                <a:latin typeface="Malgun Gothic"/>
-              </a:defRPr>
-            </a:pPr>
-            <a:r>
-              <a:t>• Consensus Monitor: 심사위원들 사이의 최종 점수 편차가 15점 이상일 경우 의견 조율 알림 및 합의서 유도</a:t>
-            </a:r>
-          </a:p>
-          <a:p>
-            <a:pPr>
-              <a:spcAft>
-                <a:spcPts val="600"/>
-              </a:spcAft>
-              <a:defRPr sz="1200">
-                <a:solidFill>
-                  <a:srgbClr val="94A3B8"/>
-                </a:solidFill>
-                <a:latin typeface="Malgun Gothic"/>
-              </a:defRPr>
-            </a:pPr>
-            <a:r>
-              <a:t>• 평가 완료 및 제출 클릭 시 실시간 클라우드 DB 연동</a:t>
-            </a:r>
-          </a:p>
-        </p:txBody>
-      </p:sp>
+        </p:spPr>
+      </p:pic>
     </p:spTree>
   </p:cSld>
   <p:clrMapOvr>
@@ -4726,7 +4501,7 @@
         <p:spPr>
           <a:xfrm>
             <a:off x="548640" y="1828800"/>
-            <a:ext cx="5303520" cy="4114800"/>
+            <a:ext cx="5486400" cy="4114800"/>
           </a:xfrm>
           <a:prstGeom prst="roundRect">
             <a:avLst/>
@@ -4736,7 +4511,7 @@
           </a:solidFill>
           <a:ln w="19050">
             <a:solidFill>
-              <a:srgbClr val="10B981"/>
+              <a:srgbClr val="6366F1"/>
             </a:solidFill>
           </a:ln>
         </p:spPr>
@@ -4771,7 +4546,7 @@
         <p:spPr>
           <a:xfrm>
             <a:off x="685800" y="1965960"/>
-            <a:ext cx="5029200" cy="3840480"/>
+            <a:ext cx="5212080" cy="3840480"/>
           </a:xfrm>
           <a:prstGeom prst="rect">
             <a:avLst/>
@@ -4790,13 +4565,13 @@
               </a:spcAft>
               <a:defRPr sz="1500" b="1">
                 <a:solidFill>
-                  <a:srgbClr val="10B981"/>
+                  <a:srgbClr val="6366F1"/>
                 </a:solidFill>
                 <a:latin typeface="Malgun Gothic"/>
               </a:defRPr>
             </a:pPr>
             <a:r>
-              <a:t>자격인증 심사결과 종합판정서 출력</a:t>
+              <a:t>인쇄 최적화 보고서 출력 및 서명 동기화</a:t>
             </a:r>
           </a:p>
           <a:p>
@@ -4812,7 +4587,7 @@
               </a:defRPr>
             </a:pPr>
             <a:r>
-              <a:t>• 3인의 심사가 모두 완료되면 [보고서 보기] 버튼 활성화</a:t>
+              <a:t>• 3인 평가 점수가 모두 제출되면 종합 판정 결과가 자동 집계 및 승인</a:t>
             </a:r>
           </a:p>
           <a:p>
@@ -4828,7 +4603,7 @@
               </a:defRPr>
             </a:pPr>
             <a:r>
-              <a:t>• 종합 판정 요약: 합격/보완후합격/불합격의 실시간 최종 판정 제공</a:t>
+              <a:t>• A4 표준 비율 레이아웃 및 브라우저 프린트 내보내기 최적화 지원</a:t>
             </a:r>
           </a:p>
           <a:p>
@@ -4844,7 +4619,7 @@
               </a:defRPr>
             </a:pPr>
             <a:r>
-              <a:t>• 심사위원별 세부 의견 및 감점 사유서 출력 최적화</a:t>
+              <a:t>• 하단 서명 명패: 임의의 홍길동 명패를 배정된 심사위원 이름으로 자동 변경 완료</a:t>
             </a:r>
           </a:p>
           <a:p>
@@ -4860,7 +4635,23 @@
               </a:defRPr>
             </a:pPr>
             <a:r>
-              <a:t>• 서명란 동기화: 임의의 홍길동 서명 명패를 실제 평가를 진행한 3인 심사위원 성명으로 실시간 자동 매핑 완료</a:t>
+              <a:t>• Firebase Cloud DB 연동을 통한 영속적 평가 정보 자동 관리</a:t>
+            </a:r>
+          </a:p>
+          <a:p>
+            <a:pPr>
+              <a:spcAft>
+                <a:spcPts val="600"/>
+              </a:spcAft>
+              <a:defRPr sz="1200">
+                <a:solidFill>
+                  <a:srgbClr val="94A3B8"/>
+                </a:solidFill>
+                <a:latin typeface="Malgun Gothic"/>
+              </a:defRPr>
+            </a:pPr>
+            <a:r>
+              <a:t>• 오른쪽 화면: 서명이 실제 심사위원 성명으로 연동된 결과 보고서 하단부</a:t>
             </a:r>
           </a:p>
         </p:txBody>
@@ -4873,8 +4664,8 @@
         </p:nvSpPr>
         <p:spPr>
           <a:xfrm>
-            <a:off x="6309360" y="1828800"/>
-            <a:ext cx="5303520" cy="4114800"/>
+            <a:off x="6400800" y="1828800"/>
+            <a:ext cx="5212080" cy="4114800"/>
           </a:xfrm>
           <a:prstGeom prst="roundRect">
             <a:avLst/>
@@ -4910,93 +4701,30 @@
           </a:p>
         </p:txBody>
       </p:sp>
-      <p:sp>
-        <p:nvSpPr>
-          <p:cNvPr id="8" name="TextBox 7"/>
-          <p:cNvSpPr txBox="1"/>
+      <p:pic>
+        <p:nvPicPr>
+          <p:cNvPr id="8" name="Picture 7" descr="media__1784596287593.png"/>
+          <p:cNvPicPr>
+            <a:picLocks noChangeAspect="1"/>
+          </p:cNvPicPr>
           <p:nvPr/>
-        </p:nvSpPr>
-        <p:spPr>
-          <a:xfrm>
-            <a:off x="6446520" y="1965960"/>
-            <a:ext cx="5029200" cy="3840480"/>
+        </p:nvPicPr>
+        <p:blipFill>
+          <a:blip r:embed="rId2"/>
+          <a:stretch>
+            <a:fillRect/>
+          </a:stretch>
+        </p:blipFill>
+        <p:spPr>
+          <a:xfrm>
+            <a:off x="7059982" y="1965960"/>
+            <a:ext cx="3893714" cy="3840480"/>
           </a:xfrm>
           <a:prstGeom prst="rect">
             <a:avLst/>
           </a:prstGeom>
-          <a:noFill/>
-        </p:spPr>
-        <p:txBody>
-          <a:bodyPr wrap="square">
-            <a:spAutoFit/>
-          </a:bodyPr>
-          <a:lstStyle/>
-          <a:p>
-            <a:pPr>
-              <a:spcAft>
-                <a:spcPts val="1000"/>
-              </a:spcAft>
-              <a:defRPr sz="1500" b="1">
-                <a:solidFill>
-                  <a:srgbClr val="6366F1"/>
-                </a:solidFill>
-                <a:latin typeface="Malgun Gothic"/>
-              </a:defRPr>
-            </a:pPr>
-            <a:r>
-              <a:t>Firebase Firestore 실시간 데이터베이스</a:t>
-            </a:r>
-          </a:p>
-          <a:p>
-            <a:pPr>
-              <a:spcAft>
-                <a:spcPts val="600"/>
-              </a:spcAft>
-              <a:defRPr sz="1200">
-                <a:solidFill>
-                  <a:srgbClr val="94A3B8"/>
-                </a:solidFill>
-                <a:latin typeface="Malgun Gothic"/>
-              </a:defRPr>
-            </a:pPr>
-            <a:r>
-              <a:t>• 이관 완료: 로컬 메모리 저장 방식에서 NoSQL 클라우드 DB 연동으로 개편 완료</a:t>
-            </a:r>
-          </a:p>
-          <a:p>
-            <a:pPr>
-              <a:spcAft>
-                <a:spcPts val="600"/>
-              </a:spcAft>
-              <a:defRPr sz="1200">
-                <a:solidFill>
-                  <a:srgbClr val="94A3B8"/>
-                </a:solidFill>
-                <a:latin typeface="Malgun Gothic"/>
-              </a:defRPr>
-            </a:pPr>
-            <a:r>
-              <a:t>• 데이터 보존: 서버나 브라우저 재부팅 시에도 평가 데이터가 영구 보존</a:t>
-            </a:r>
-          </a:p>
-          <a:p>
-            <a:pPr>
-              <a:spcAft>
-                <a:spcPts val="600"/>
-              </a:spcAft>
-              <a:defRPr sz="1200">
-                <a:solidFill>
-                  <a:srgbClr val="94A3B8"/>
-                </a:solidFill>
-                <a:latin typeface="Malgun Gothic"/>
-              </a:defRPr>
-            </a:pPr>
-            <a:r>
-              <a:t>• 다중 사용자 동시 접속 시 심사 진행율 및 LED 램프 배지가 새로고침 없이 실시간 변화</a:t>
-            </a:r>
-          </a:p>
-        </p:txBody>
-      </p:sp>
+        </p:spPr>
+      </p:pic>
     </p:spTree>
   </p:cSld>
   <p:clrMapOvr>
@@ -5090,7 +4818,7 @@
               </a:defRPr>
             </a:pPr>
             <a:r>
-              <a:t>5. 서버 배포 및 기동 가이드</a:t>
+              <a:t>5. 서버 배포 및 구동 가이드</a:t>
             </a:r>
           </a:p>
         </p:txBody>
@@ -5149,7 +4877,7 @@
         <p:spPr>
           <a:xfrm>
             <a:off x="548640" y="1828800"/>
-            <a:ext cx="5303520" cy="4114800"/>
+            <a:ext cx="5486400" cy="4114800"/>
           </a:xfrm>
           <a:prstGeom prst="roundRect">
             <a:avLst/>
@@ -5159,7 +4887,7 @@
           </a:solidFill>
           <a:ln w="19050">
             <a:solidFill>
-              <a:srgbClr val="10B981"/>
+              <a:srgbClr val="6366F1"/>
             </a:solidFill>
           </a:ln>
         </p:spPr>
@@ -5194,7 +4922,7 @@
         <p:spPr>
           <a:xfrm>
             <a:off x="685800" y="1965960"/>
-            <a:ext cx="5029200" cy="3840480"/>
+            <a:ext cx="5212080" cy="3840480"/>
           </a:xfrm>
           <a:prstGeom prst="rect">
             <a:avLst/>
@@ -5213,13 +4941,13 @@
               </a:spcAft>
               <a:defRPr sz="1500" b="1">
                 <a:solidFill>
-                  <a:srgbClr val="10B981"/>
+                  <a:srgbClr val="6366F1"/>
                 </a:solidFill>
                 <a:latin typeface="Malgun Gothic"/>
               </a:defRPr>
             </a:pPr>
             <a:r>
-              <a:t>로컬 PC 웹 서버 실행 방법</a:t>
+              <a:t>로컬 구동, Docker 및 Windows IIS 지원</a:t>
             </a:r>
           </a:p>
           <a:p>
@@ -5235,7 +4963,7 @@
               </a:defRPr>
             </a:pPr>
             <a:r>
-              <a:t>• Vite 환경 변수 파일 생성: .env.local을 만들어 Firebase API Key 기입 (누락 시 테스트용 Mock 데이터베이스 자동 작동)</a:t>
+              <a:t>• Node.js 무설치 프로덕션 웹 서버(server.js) 실행 (포트 8080)</a:t>
             </a:r>
           </a:p>
           <a:p>
@@ -5251,7 +4979,7 @@
               </a:defRPr>
             </a:pPr>
             <a:r>
-              <a:t>• 빌드 패키지 생성: `npm run build` 실행</a:t>
+              <a:t>• Docker 빌드: `Dockerfile` 및 `nginx.conf` 구성으로 Nginx 컨테이너 기동</a:t>
             </a:r>
           </a:p>
           <a:p>
@@ -5267,7 +4995,7 @@
               </a:defRPr>
             </a:pPr>
             <a:r>
-              <a:t>• 경량 서버 구동: `node server.js` 입력</a:t>
+              <a:t>• Windows IIS: `web.config.example` 템플릿 제공으로 SPA URL 리라우팅 최적화</a:t>
             </a:r>
           </a:p>
           <a:p>
@@ -5283,7 +5011,7 @@
               </a:defRPr>
             </a:pPr>
             <a:r>
-              <a:t>• 접속 주소: http://localhost:8080 (내부 IP 사용 시 사내 로컬망 공유 가능)</a:t>
+              <a:t>• Vite 개발 모드 힌트 박스 자동 배제로 프로덕션 소스코드 보안 유지</a:t>
             </a:r>
           </a:p>
           <a:p>
@@ -5299,7 +5027,7 @@
               </a:defRPr>
             </a:pPr>
             <a:r>
-              <a:t>• Vite 개발 모드 힌트 박스는 빌드 시 소스코드에서 자동 배제되어 보안 유지</a:t>
+              <a:t>• 오른쪽 화면: 로컬 개발 서버 동작 및 핫 모듈 리플레이스먼트 모니터</a:t>
             </a:r>
           </a:p>
         </p:txBody>
@@ -5312,8 +5040,8 @@
         </p:nvSpPr>
         <p:spPr>
           <a:xfrm>
-            <a:off x="6309360" y="1828800"/>
-            <a:ext cx="5303520" cy="4114800"/>
+            <a:off x="6400800" y="1828800"/>
+            <a:ext cx="5212080" cy="4114800"/>
           </a:xfrm>
           <a:prstGeom prst="roundRect">
             <a:avLst/>
@@ -5349,93 +5077,30 @@
           </a:p>
         </p:txBody>
       </p:sp>
-      <p:sp>
-        <p:nvSpPr>
-          <p:cNvPr id="8" name="TextBox 7"/>
-          <p:cNvSpPr txBox="1"/>
+      <p:pic>
+        <p:nvPicPr>
+          <p:cNvPr id="8" name="Picture 7" descr="media__1784176101924.png"/>
+          <p:cNvPicPr>
+            <a:picLocks noChangeAspect="1"/>
+          </p:cNvPicPr>
           <p:nvPr/>
-        </p:nvSpPr>
-        <p:spPr>
-          <a:xfrm>
-            <a:off x="6446520" y="1965960"/>
-            <a:ext cx="5029200" cy="3840480"/>
+        </p:nvPicPr>
+        <p:blipFill>
+          <a:blip r:embed="rId2"/>
+          <a:stretch>
+            <a:fillRect/>
+          </a:stretch>
+        </p:blipFill>
+        <p:spPr>
+          <a:xfrm>
+            <a:off x="6537960" y="2398922"/>
+            <a:ext cx="4937760" cy="2974554"/>
           </a:xfrm>
           <a:prstGeom prst="rect">
             <a:avLst/>
           </a:prstGeom>
-          <a:noFill/>
-        </p:spPr>
-        <p:txBody>
-          <a:bodyPr wrap="square">
-            <a:spAutoFit/>
-          </a:bodyPr>
-          <a:lstStyle/>
-          <a:p>
-            <a:pPr>
-              <a:spcAft>
-                <a:spcPts val="1000"/>
-              </a:spcAft>
-              <a:defRPr sz="1500" b="1">
-                <a:solidFill>
-                  <a:srgbClr val="6366F1"/>
-                </a:solidFill>
-                <a:latin typeface="Malgun Gothic"/>
-              </a:defRPr>
-            </a:pPr>
-            <a:r>
-              <a:t>서버 가상화 및 IIS 웹 서버 배포</a:t>
-            </a:r>
-          </a:p>
-          <a:p>
-            <a:pPr>
-              <a:spcAft>
-                <a:spcPts val="600"/>
-              </a:spcAft>
-              <a:defRPr sz="1200">
-                <a:solidFill>
-                  <a:srgbClr val="94A3B8"/>
-                </a:solidFill>
-                <a:latin typeface="Malgun Gothic"/>
-              </a:defRPr>
-            </a:pPr>
-            <a:r>
-              <a:t>• Docker 배포:</a:t>
-            </a:r>
-            <a:br/>
-            <a:r>
-              <a:t>  Dockerfile 및 nginx.conf 구성을 이용해 초경량 Nginx 컨테이너 제작 구동 (SPA 라우팅 지원)</a:t>
-            </a:r>
-            <a:br/>
-            <a:r>
-              <a:t>  `docker build -t aica-app .` 실행</a:t>
-            </a:r>
-          </a:p>
-          <a:p>
-            <a:pPr>
-              <a:spcAft>
-                <a:spcPts val="600"/>
-              </a:spcAft>
-              <a:defRPr sz="1200">
-                <a:solidFill>
-                  <a:srgbClr val="94A3B8"/>
-                </a:solidFill>
-                <a:latin typeface="Malgun Gothic"/>
-              </a:defRPr>
-            </a:pPr>
-            <a:r>
-              <a:t>• Windows IIS 서버 배포:</a:t>
-            </a:r>
-            <a:br/>
-            <a:r>
-              <a:t>  물리적 배포 경로 설정 후 URL Rewrite 설치</a:t>
-            </a:r>
-            <a:br/>
-            <a:r>
-              <a:t>  제공된 `web.config.example` 템플릿의 rewrite 규칙을 덮어씌워 404 라우팅 오류 제어</a:t>
-            </a:r>
-          </a:p>
-        </p:txBody>
-      </p:sp>
+        </p:spPr>
+      </p:pic>
     </p:spTree>
   </p:cSld>
   <p:clrMapOvr>

--- a/AICA_System_User_Manual.pptx
+++ b/AICA_System_User_Manual.pptx
@@ -11,6 +11,16 @@
     <p:sldId id="259" r:id="rId10"/>
     <p:sldId id="260" r:id="rId11"/>
     <p:sldId id="261" r:id="rId12"/>
+    <p:sldId id="262" r:id="rId13"/>
+    <p:sldId id="263" r:id="rId14"/>
+    <p:sldId id="264" r:id="rId15"/>
+    <p:sldId id="265" r:id="rId16"/>
+    <p:sldId id="266" r:id="rId17"/>
+    <p:sldId id="267" r:id="rId18"/>
+    <p:sldId id="268" r:id="rId19"/>
+    <p:sldId id="269" r:id="rId20"/>
+    <p:sldId id="270" r:id="rId21"/>
+    <p:sldId id="271" r:id="rId22"/>
   </p:sldIdLst>
   <p:sldSz cx="12191695" cy="6858000" type="screen4x3"/>
   <p:notesSz cx="6858000" cy="9144000"/>
@@ -3089,7 +3099,7 @@
     <p:bg>
       <p:bgPr>
         <a:solidFill>
-          <a:srgbClr val="0F172A"/>
+          <a:srgbClr val="FFFFFF"/>
         </a:solidFill>
         <a:effectLst/>
       </p:bgPr>
@@ -3109,8 +3119,80 @@
         </p:nvSpPr>
         <p:spPr>
           <a:xfrm>
-            <a:off x="1371600" y="2011680"/>
-            <a:ext cx="9144000" cy="457200"/>
+            <a:off x="548640" y="1645920"/>
+            <a:ext cx="6217920" cy="3200400"/>
+          </a:xfrm>
+          <a:prstGeom prst="rect">
+            <a:avLst/>
+          </a:prstGeom>
+          <a:noFill/>
+        </p:spPr>
+        <p:txBody>
+          <a:bodyPr wrap="square">
+            <a:spAutoFit/>
+          </a:bodyPr>
+          <a:lstStyle/>
+          <a:p>
+            <a:pPr>
+              <a:spcAft>
+                <a:spcPts val="2000"/>
+              </a:spcAft>
+              <a:defRPr sz="1300" b="1">
+                <a:solidFill>
+                  <a:srgbClr val="2563EB"/>
+                </a:solidFill>
+                <a:latin typeface="Arial"/>
+              </a:defRPr>
+            </a:pPr>
+            <a:r>
+              <a:t>AICA · AI Certification for ATEC</a:t>
+            </a:r>
+          </a:p>
+          <a:p>
+            <a:pPr>
+              <a:spcAft>
+                <a:spcPts val="2000"/>
+              </a:spcAft>
+              <a:defRPr sz="4400" b="1">
+                <a:solidFill>
+                  <a:srgbClr val="0F172A"/>
+                </a:solidFill>
+                <a:latin typeface="Malgun Gothic"/>
+              </a:defRPr>
+            </a:pPr>
+            <a:r>
+              <a:t>자격심사 시스템</a:t>
+            </a:r>
+            <a:br/>
+            <a:r>
+              <a:t>사용자 매뉴얼</a:t>
+            </a:r>
+          </a:p>
+          <a:p>
+            <a:pPr>
+              <a:defRPr sz="1800">
+                <a:solidFill>
+                  <a:srgbClr val="64748B"/>
+                </a:solidFill>
+                <a:latin typeface="Malgun Gothic"/>
+              </a:defRPr>
+            </a:pPr>
+            <a:r>
+              <a:t>운영간사 · 심사위원용</a:t>
+            </a:r>
+          </a:p>
+        </p:txBody>
+      </p:sp>
+      <p:sp>
+        <p:nvSpPr>
+          <p:cNvPr id="3" name="TextBox 2"/>
+          <p:cNvSpPr txBox="1"/>
+          <p:nvPr/>
+        </p:nvSpPr>
+        <p:spPr>
+          <a:xfrm>
+            <a:off x="548640" y="5669280"/>
+            <a:ext cx="6217920" cy="731520"/>
           </a:xfrm>
           <a:prstGeom prst="rect">
             <a:avLst/>
@@ -3124,29 +3206,76 @@
           <a:lstStyle/>
           <a:p>
             <a:pPr>
-              <a:defRPr sz="1200" b="1">
-                <a:solidFill>
-                  <a:srgbClr val="6366F1"/>
+              <a:defRPr sz="1100">
+                <a:solidFill>
+                  <a:srgbClr val="64748B"/>
                 </a:solidFill>
                 <a:latin typeface="Arial"/>
               </a:defRPr>
             </a:pPr>
             <a:r>
-              <a:t>ATEC GROUP INTEGRATED AI EVALUATION PLATFORM</a:t>
-            </a:r>
-          </a:p>
-        </p:txBody>
-      </p:sp>
-      <p:sp>
-        <p:nvSpPr>
-          <p:cNvPr id="3" name="TextBox 2"/>
+              <a:t>2026. 07</a:t>
+            </a:r>
+            <a:br/>
+            <a:r>
+              <a:t>https://aica-competency.web.app/</a:t>
+            </a:r>
+          </a:p>
+        </p:txBody>
+      </p:sp>
+      <p:sp>
+        <p:nvSpPr>
+          <p:cNvPr id="4" name="Rounded Rectangle 3"/>
+          <p:cNvSpPr/>
+          <p:nvPr/>
+        </p:nvSpPr>
+        <p:spPr>
+          <a:xfrm>
+            <a:off x="7315200" y="914400"/>
+            <a:ext cx="4114800" cy="5029200"/>
+          </a:xfrm>
+          <a:prstGeom prst="roundRect">
+            <a:avLst/>
+          </a:prstGeom>
+          <a:solidFill>
+            <a:srgbClr val="0F172A"/>
+          </a:solidFill>
+          <a:ln>
+            <a:noFill/>
+          </a:ln>
+        </p:spPr>
+        <p:style>
+          <a:lnRef idx="1">
+            <a:schemeClr val="accent1"/>
+          </a:lnRef>
+          <a:fillRef idx="3">
+            <a:schemeClr val="accent1"/>
+          </a:fillRef>
+          <a:effectRef idx="2">
+            <a:schemeClr val="accent1"/>
+          </a:effectRef>
+          <a:fontRef idx="minor">
+            <a:schemeClr val="lt1"/>
+          </a:fontRef>
+        </p:style>
+        <p:txBody>
+          <a:bodyPr rtlCol="0" anchor="ctr"/>
+          <a:lstStyle/>
+          <a:p>
+            <a:pPr algn="ctr"/>
+          </a:p>
+        </p:txBody>
+      </p:sp>
+      <p:sp>
+        <p:nvSpPr>
+          <p:cNvPr id="5" name="TextBox 4"/>
           <p:cNvSpPr txBox="1"/>
           <p:nvPr/>
         </p:nvSpPr>
         <p:spPr>
           <a:xfrm>
-            <a:off x="1371600" y="2468880"/>
-            <a:ext cx="9144000" cy="1828800"/>
+            <a:off x="7498079" y="1371600"/>
+            <a:ext cx="3749039" cy="4114800"/>
           </a:xfrm>
           <a:prstGeom prst="rect">
             <a:avLst/>
@@ -3159,34 +3288,104 @@
           </a:bodyPr>
           <a:lstStyle/>
           <a:p>
-            <a:pPr>
-              <a:defRPr sz="4400" b="1">
+            <a:pPr algn="ctr">
+              <a:spcAft>
+                <a:spcPts val="3000"/>
+              </a:spcAft>
+              <a:defRPr sz="2800" b="1">
                 <a:solidFill>
                   <a:srgbClr val="FFFFFF"/>
                 </a:solidFill>
-                <a:latin typeface="Malgun Gothic"/>
-              </a:defRPr>
-            </a:pPr>
-            <a:r>
-              <a:t>AICA 자격심사 시스템</a:t>
-            </a:r>
-            <a:br/>
-            <a:r>
-              <a:t>사용설명서 (Manual)</a:t>
-            </a:r>
-          </a:p>
-        </p:txBody>
-      </p:sp>
-      <p:sp>
-        <p:nvSpPr>
-          <p:cNvPr id="4" name="TextBox 3"/>
+                <a:latin typeface="Arial"/>
+              </a:defRPr>
+            </a:pPr>
+            <a:r>
+              <a:t>AICA</a:t>
+            </a:r>
+          </a:p>
+          <a:p>
+            <a:pPr algn="ctr">
+              <a:spcAft>
+                <a:spcPts val="1000"/>
+              </a:spcAft>
+              <a:defRPr sz="1800" b="1">
+                <a:solidFill>
+                  <a:srgbClr val="FFFFFF"/>
+                </a:solidFill>
+                <a:latin typeface="Malgun Gothic"/>
+              </a:defRPr>
+            </a:pPr>
+            <a:r>
+              <a:t>공정한 3인 패널 심사</a:t>
+            </a:r>
+          </a:p>
+          <a:p>
+            <a:pPr algn="ctr">
+              <a:spcAft>
+                <a:spcPts val="4000"/>
+              </a:spcAft>
+              <a:defRPr sz="1400">
+                <a:solidFill>
+                  <a:srgbClr val="64748B"/>
+                </a:solidFill>
+                <a:latin typeface="Malgun Gothic"/>
+              </a:defRPr>
+            </a:pPr>
+            <a:r>
+              <a:t>현업 · 기술 · 보안</a:t>
+            </a:r>
+          </a:p>
+          <a:p>
+            <a:pPr algn="ctr">
+              <a:defRPr sz="1400" b="1">
+                <a:solidFill>
+                  <a:srgbClr val="3B82F6"/>
+                </a:solidFill>
+                <a:latin typeface="Malgun Gothic"/>
+              </a:defRPr>
+            </a:pPr>
+            <a:r>
+              <a:t>등록 ➔ 검토 ➔ 채점 ➔ 판정</a:t>
+            </a:r>
+          </a:p>
+        </p:txBody>
+      </p:sp>
+    </p:spTree>
+  </p:cSld>
+  <p:clrMapOvr>
+    <a:masterClrMapping/>
+  </p:clrMapOvr>
+</p:sld>
+</file>
+
+<file path=ppt/slides/slide10.xml><?xml version="1.0" encoding="utf-8"?>
+<p:sld xmlns:a="http://schemas.openxmlformats.org/drawingml/2006/main" xmlns:p="http://schemas.openxmlformats.org/presentationml/2006/main" xmlns:r="http://schemas.openxmlformats.org/officeDocument/2006/relationships">
+  <p:cSld>
+    <p:bg>
+      <p:bgPr>
+        <a:solidFill>
+          <a:srgbClr val="FFFFFF"/>
+        </a:solidFill>
+        <a:effectLst/>
+      </p:bgPr>
+    </p:bg>
+    <p:spTree>
+      <p:nvGrpSpPr>
+        <p:cNvPr id="1" name=""/>
+        <p:cNvGrpSpPr/>
+        <p:nvPr/>
+      </p:nvGrpSpPr>
+      <p:grpSpPr/>
+      <p:sp>
+        <p:nvSpPr>
+          <p:cNvPr id="2" name="TextBox 1"/>
           <p:cNvSpPr txBox="1"/>
           <p:nvPr/>
         </p:nvSpPr>
         <p:spPr>
           <a:xfrm>
-            <a:off x="1371600" y="4572000"/>
-            <a:ext cx="9144000" cy="914400"/>
+            <a:off x="548640" y="365760"/>
+            <a:ext cx="7315200" cy="365760"/>
           </a:xfrm>
           <a:prstGeom prst="rect">
             <a:avLst/>
@@ -3200,19 +3399,4182 @@
           <a:lstStyle/>
           <a:p>
             <a:pPr>
-              <a:defRPr sz="1300">
-                <a:solidFill>
-                  <a:srgbClr val="94A3B8"/>
-                </a:solidFill>
-                <a:latin typeface="Malgun Gothic"/>
-              </a:defRPr>
-            </a:pPr>
-            <a:r>
-              <a:t>대상: 운영 간사 (Management) &amp; 심사위원 (Reviewers)</a:t>
-            </a:r>
+              <a:defRPr sz="1100" b="1">
+                <a:solidFill>
+                  <a:srgbClr val="2563EB"/>
+                </a:solidFill>
+                <a:latin typeface="Malgun Gothic"/>
+              </a:defRPr>
+            </a:pPr>
+            <a:r>
+              <a:t>심사위원</a:t>
+            </a:r>
+          </a:p>
+        </p:txBody>
+      </p:sp>
+      <p:sp>
+        <p:nvSpPr>
+          <p:cNvPr id="3" name="TextBox 2"/>
+          <p:cNvSpPr txBox="1"/>
+          <p:nvPr/>
+        </p:nvSpPr>
+        <p:spPr>
+          <a:xfrm>
+            <a:off x="548640" y="640080"/>
+            <a:ext cx="10058400" cy="731520"/>
+          </a:xfrm>
+          <a:prstGeom prst="rect">
+            <a:avLst/>
+          </a:prstGeom>
+          <a:noFill/>
+        </p:spPr>
+        <p:txBody>
+          <a:bodyPr wrap="none">
+            <a:spAutoFit/>
+          </a:bodyPr>
+          <a:lstStyle/>
+          <a:p>
+            <a:pPr>
+              <a:defRPr sz="2600" b="1">
+                <a:solidFill>
+                  <a:srgbClr val="0F172A"/>
+                </a:solidFill>
+                <a:latin typeface="Malgun Gothic"/>
+              </a:defRPr>
+            </a:pPr>
+            <a:r>
+              <a:t>내 배정 과제 큐에서 심사 우선순위를 잡습니다</a:t>
+            </a:r>
+          </a:p>
+        </p:txBody>
+      </p:sp>
+      <p:sp>
+        <p:nvSpPr>
+          <p:cNvPr id="4" name="Rectangle 3"/>
+          <p:cNvSpPr/>
+          <p:nvPr/>
+        </p:nvSpPr>
+        <p:spPr>
+          <a:xfrm>
+            <a:off x="548640" y="1371600"/>
+            <a:ext cx="11094415" cy="13716"/>
+          </a:xfrm>
+          <a:prstGeom prst="rect">
+            <a:avLst/>
+          </a:prstGeom>
+          <a:solidFill>
+            <a:srgbClr val="E2E8F0"/>
+          </a:solidFill>
+          <a:ln>
+            <a:noFill/>
+          </a:ln>
+        </p:spPr>
+        <p:style>
+          <a:lnRef idx="1">
+            <a:schemeClr val="accent1"/>
+          </a:lnRef>
+          <a:fillRef idx="3">
+            <a:schemeClr val="accent1"/>
+          </a:fillRef>
+          <a:effectRef idx="2">
+            <a:schemeClr val="accent1"/>
+          </a:effectRef>
+          <a:fontRef idx="minor">
+            <a:schemeClr val="lt1"/>
+          </a:fontRef>
+        </p:style>
+        <p:txBody>
+          <a:bodyPr rtlCol="0" anchor="ctr"/>
+          <a:lstStyle/>
+          <a:p>
+            <a:pPr algn="ctr"/>
+          </a:p>
+        </p:txBody>
+      </p:sp>
+      <p:sp>
+        <p:nvSpPr>
+          <p:cNvPr id="5" name="TextBox 4"/>
+          <p:cNvSpPr txBox="1"/>
+          <p:nvPr/>
+        </p:nvSpPr>
+        <p:spPr>
+          <a:xfrm>
+            <a:off x="548640" y="6309360"/>
+            <a:ext cx="9144000" cy="365760"/>
+          </a:xfrm>
+          <a:prstGeom prst="rect">
+            <a:avLst/>
+          </a:prstGeom>
+          <a:noFill/>
+        </p:spPr>
+        <p:txBody>
+          <a:bodyPr wrap="none">
+            <a:spAutoFit/>
+          </a:bodyPr>
+          <a:lstStyle/>
+          <a:p>
+            <a:pPr>
+              <a:defRPr sz="900">
+                <a:solidFill>
+                  <a:srgbClr val="64748B"/>
+                </a:solidFill>
+                <a:latin typeface="Malgun Gothic"/>
+              </a:defRPr>
+            </a:pPr>
+            <a:r>
+              <a:t>AICA 자격심사 시스템 사용자 매뉴얼 · 2026.07</a:t>
+            </a:r>
+          </a:p>
+        </p:txBody>
+      </p:sp>
+      <p:sp>
+        <p:nvSpPr>
+          <p:cNvPr id="6" name="TextBox 5"/>
+          <p:cNvSpPr txBox="1"/>
+          <p:nvPr/>
+        </p:nvSpPr>
+        <p:spPr>
+          <a:xfrm>
+            <a:off x="10820095" y="6309360"/>
+            <a:ext cx="822960" cy="365760"/>
+          </a:xfrm>
+          <a:prstGeom prst="rect">
+            <a:avLst/>
+          </a:prstGeom>
+          <a:noFill/>
+        </p:spPr>
+        <p:txBody>
+          <a:bodyPr wrap="none">
+            <a:spAutoFit/>
+          </a:bodyPr>
+          <a:lstStyle/>
+          <a:p>
+            <a:pPr algn="r">
+              <a:defRPr sz="900">
+                <a:solidFill>
+                  <a:srgbClr val="64748B"/>
+                </a:solidFill>
+                <a:latin typeface="Malgun Gothic"/>
+              </a:defRPr>
+            </a:pPr>
+            <a:r>
+              <a:t>10</a:t>
+            </a:r>
+          </a:p>
+        </p:txBody>
+      </p:sp>
+      <p:sp>
+        <p:nvSpPr>
+          <p:cNvPr id="7" name="Rounded Rectangle 6"/>
+          <p:cNvSpPr/>
+          <p:nvPr/>
+        </p:nvSpPr>
+        <p:spPr>
+          <a:xfrm>
+            <a:off x="548640" y="1828800"/>
+            <a:ext cx="5303520" cy="4114800"/>
+          </a:xfrm>
+          <a:prstGeom prst="roundRect">
+            <a:avLst/>
+          </a:prstGeom>
+          <a:solidFill>
+            <a:srgbClr val="EFF6FF"/>
+          </a:solidFill>
+          <a:ln w="12700">
+            <a:solidFill>
+              <a:srgbClr val="E2E8F0"/>
+            </a:solidFill>
+          </a:ln>
+        </p:spPr>
+        <p:style>
+          <a:lnRef idx="1">
+            <a:schemeClr val="accent1"/>
+          </a:lnRef>
+          <a:fillRef idx="3">
+            <a:schemeClr val="accent1"/>
+          </a:fillRef>
+          <a:effectRef idx="2">
+            <a:schemeClr val="accent1"/>
+          </a:effectRef>
+          <a:fontRef idx="minor">
+            <a:schemeClr val="lt1"/>
+          </a:fontRef>
+        </p:style>
+        <p:txBody>
+          <a:bodyPr rtlCol="0" anchor="ctr"/>
+          <a:lstStyle/>
+          <a:p>
+            <a:pPr algn="ctr"/>
+          </a:p>
+        </p:txBody>
+      </p:sp>
+      <p:sp>
+        <p:nvSpPr>
+          <p:cNvPr id="8" name="TextBox 7"/>
+          <p:cNvSpPr txBox="1"/>
+          <p:nvPr/>
+        </p:nvSpPr>
+        <p:spPr>
+          <a:xfrm>
+            <a:off x="685800" y="1965960"/>
+            <a:ext cx="5029200" cy="3840480"/>
+          </a:xfrm>
+          <a:prstGeom prst="rect">
+            <a:avLst/>
+          </a:prstGeom>
+          <a:noFill/>
+        </p:spPr>
+        <p:txBody>
+          <a:bodyPr wrap="square">
+            <a:spAutoFit/>
+          </a:bodyPr>
+          <a:lstStyle/>
+          <a:p>
+            <a:pPr>
+              <a:spcAft>
+                <a:spcPts val="1000"/>
+              </a:spcAft>
+              <a:defRPr sz="1400" b="1">
+                <a:solidFill>
+                  <a:srgbClr val="2563EB"/>
+                </a:solidFill>
+                <a:latin typeface="Malgun Gothic"/>
+              </a:defRPr>
+            </a:pPr>
+            <a:r>
+              <a:t>배정 과제 확인 및 심사 착수</a:t>
+            </a:r>
+          </a:p>
+          <a:p>
+            <a:pPr>
+              <a:spcAft>
+                <a:spcPts val="500"/>
+              </a:spcAft>
+              <a:defRPr sz="1100">
+                <a:solidFill>
+                  <a:srgbClr val="475569"/>
+                </a:solidFill>
+                <a:latin typeface="Malgun Gothic"/>
+              </a:defRPr>
+            </a:pPr>
+            <a:r>
+              <a:t>한 행(Row)에서 전체 데이터 확인:</a:t>
+            </a:r>
+          </a:p>
+          <a:p>
+            <a:pPr>
+              <a:spcAft>
+                <a:spcPts val="500"/>
+              </a:spcAft>
+              <a:defRPr sz="1100">
+                <a:solidFill>
+                  <a:srgbClr val="475569"/>
+                </a:solidFill>
+                <a:latin typeface="Malgun Gothic"/>
+              </a:defRPr>
+            </a:pPr>
+            <a:r>
+              <a:t>• 지원자 인적사항 및 관계사/부서 정보</a:t>
+            </a:r>
+          </a:p>
+          <a:p>
+            <a:pPr>
+              <a:spcAft>
+                <a:spcPts val="500"/>
+              </a:spcAft>
+              <a:defRPr sz="1100">
+                <a:solidFill>
+                  <a:srgbClr val="475569"/>
+                </a:solidFill>
+                <a:latin typeface="Malgun Gothic"/>
+              </a:defRPr>
+            </a:pPr>
+            <a:r>
+              <a:t>• 인증 레벨 (Level 3 또는 Level 4)</a:t>
+            </a:r>
+          </a:p>
+          <a:p>
+            <a:pPr>
+              <a:spcAft>
+                <a:spcPts val="500"/>
+              </a:spcAft>
+              <a:defRPr sz="1100">
+                <a:solidFill>
+                  <a:srgbClr val="475569"/>
+                </a:solidFill>
+                <a:latin typeface="Malgun Gothic"/>
+              </a:defRPr>
+            </a:pPr>
+            <a:r>
+              <a:t>• 내 심사 상태 (대기 / 심사완료)</a:t>
+            </a:r>
+          </a:p>
+          <a:p>
+            <a:pPr>
+              <a:spcAft>
+                <a:spcPts val="500"/>
+              </a:spcAft>
+              <a:defRPr sz="1100">
+                <a:solidFill>
+                  <a:srgbClr val="475569"/>
+                </a:solidFill>
+                <a:latin typeface="Malgun Gothic"/>
+              </a:defRPr>
+            </a:pPr>
+            <a:r>
+              <a:t>• 타 위원 진척도 (패널 위원별 완료 상태 실시간 도트 모니터링)</a:t>
+            </a:r>
+          </a:p>
+          <a:p>
             <a:br/>
-            <a:r>
-              <a:t>최종 개정일: 2026. 07. 21 | 경영혁신실 배포본 (화면 캡처 연동본)</a:t>
+            <a:pPr>
+              <a:spcAft>
+                <a:spcPts val="500"/>
+              </a:spcAft>
+              <a:defRPr sz="1100">
+                <a:solidFill>
+                  <a:srgbClr val="475569"/>
+                </a:solidFill>
+                <a:latin typeface="Malgun Gothic"/>
+              </a:defRPr>
+            </a:pPr>
+            <a:r>
+              <a:t>[심사 시작]: 심사하고자 하는 과제의 우측 [심사하기] 버튼 선택</a:t>
+            </a:r>
+          </a:p>
+          <a:p>
+            <a:pPr>
+              <a:spcAft>
+                <a:spcPts val="500"/>
+              </a:spcAft>
+              <a:defRPr sz="1100">
+                <a:solidFill>
+                  <a:srgbClr val="475569"/>
+                </a:solidFill>
+                <a:latin typeface="Malgun Gothic"/>
+              </a:defRPr>
+            </a:pPr>
+            <a:r>
+              <a:t>[심사 수정]: 이미 제출한 평가를 다시 검토·수정해야 할 때 재진입하여 수정 후 임시저장/제출 가능</a:t>
+            </a:r>
+          </a:p>
+        </p:txBody>
+      </p:sp>
+      <p:sp>
+        <p:nvSpPr>
+          <p:cNvPr id="9" name="Rectangle 8"/>
+          <p:cNvSpPr/>
+          <p:nvPr/>
+        </p:nvSpPr>
+        <p:spPr>
+          <a:xfrm>
+            <a:off x="6309360" y="1828800"/>
+            <a:ext cx="5303520" cy="4114800"/>
+          </a:xfrm>
+          <a:prstGeom prst="rect">
+            <a:avLst/>
+          </a:prstGeom>
+          <a:solidFill>
+            <a:srgbClr val="F8FAFC"/>
+          </a:solidFill>
+          <a:ln w="19050">
+            <a:solidFill>
+              <a:srgbClr val="E2E8F0"/>
+            </a:solidFill>
+          </a:ln>
+        </p:spPr>
+        <p:style>
+          <a:lnRef idx="1">
+            <a:schemeClr val="accent1"/>
+          </a:lnRef>
+          <a:fillRef idx="3">
+            <a:schemeClr val="accent1"/>
+          </a:fillRef>
+          <a:effectRef idx="2">
+            <a:schemeClr val="accent1"/>
+          </a:effectRef>
+          <a:fontRef idx="minor">
+            <a:schemeClr val="lt1"/>
+          </a:fontRef>
+        </p:style>
+        <p:txBody>
+          <a:bodyPr rtlCol="0" anchor="ctr"/>
+          <a:lstStyle/>
+          <a:p>
+            <a:pPr algn="ctr"/>
+          </a:p>
+        </p:txBody>
+      </p:sp>
+      <p:pic>
+        <p:nvPicPr>
+          <p:cNvPr id="10" name="Picture 9" descr="media__1784176902473.png"/>
+          <p:cNvPicPr>
+            <a:picLocks noChangeAspect="1"/>
+          </p:cNvPicPr>
+          <p:nvPr/>
+        </p:nvPicPr>
+        <p:blipFill>
+          <a:blip r:embed="rId2"/>
+          <a:stretch>
+            <a:fillRect/>
+          </a:stretch>
+        </p:blipFill>
+        <p:spPr>
+          <a:xfrm>
+            <a:off x="6768329" y="1965960"/>
+            <a:ext cx="4385580" cy="3840480"/>
+          </a:xfrm>
+          <a:prstGeom prst="rect">
+            <a:avLst/>
+          </a:prstGeom>
+        </p:spPr>
+      </p:pic>
+    </p:spTree>
+  </p:cSld>
+  <p:clrMapOvr>
+    <a:masterClrMapping/>
+  </p:clrMapOvr>
+</p:sld>
+</file>
+
+<file path=ppt/slides/slide11.xml><?xml version="1.0" encoding="utf-8"?>
+<p:sld xmlns:a="http://schemas.openxmlformats.org/drawingml/2006/main" xmlns:p="http://schemas.openxmlformats.org/presentationml/2006/main" xmlns:r="http://schemas.openxmlformats.org/officeDocument/2006/relationships">
+  <p:cSld>
+    <p:bg>
+      <p:bgPr>
+        <a:solidFill>
+          <a:srgbClr val="FFFFFF"/>
+        </a:solidFill>
+        <a:effectLst/>
+      </p:bgPr>
+    </p:bg>
+    <p:spTree>
+      <p:nvGrpSpPr>
+        <p:cNvPr id="1" name=""/>
+        <p:cNvGrpSpPr/>
+        <p:nvPr/>
+      </p:nvGrpSpPr>
+      <p:grpSpPr/>
+      <p:sp>
+        <p:nvSpPr>
+          <p:cNvPr id="2" name="TextBox 1"/>
+          <p:cNvSpPr txBox="1"/>
+          <p:nvPr/>
+        </p:nvSpPr>
+        <p:spPr>
+          <a:xfrm>
+            <a:off x="548640" y="365760"/>
+            <a:ext cx="7315200" cy="365760"/>
+          </a:xfrm>
+          <a:prstGeom prst="rect">
+            <a:avLst/>
+          </a:prstGeom>
+          <a:noFill/>
+        </p:spPr>
+        <p:txBody>
+          <a:bodyPr wrap="none">
+            <a:spAutoFit/>
+          </a:bodyPr>
+          <a:lstStyle/>
+          <a:p>
+            <a:pPr>
+              <a:defRPr sz="1100" b="1">
+                <a:solidFill>
+                  <a:srgbClr val="2563EB"/>
+                </a:solidFill>
+                <a:latin typeface="Malgun Gothic"/>
+              </a:defRPr>
+            </a:pPr>
+            <a:r>
+              <a:t>심사위원</a:t>
+            </a:r>
+          </a:p>
+        </p:txBody>
+      </p:sp>
+      <p:sp>
+        <p:nvSpPr>
+          <p:cNvPr id="3" name="TextBox 2"/>
+          <p:cNvSpPr txBox="1"/>
+          <p:nvPr/>
+        </p:nvSpPr>
+        <p:spPr>
+          <a:xfrm>
+            <a:off x="548640" y="640080"/>
+            <a:ext cx="10058400" cy="731520"/>
+          </a:xfrm>
+          <a:prstGeom prst="rect">
+            <a:avLst/>
+          </a:prstGeom>
+          <a:noFill/>
+        </p:spPr>
+        <p:txBody>
+          <a:bodyPr wrap="none">
+            <a:spAutoFit/>
+          </a:bodyPr>
+          <a:lstStyle/>
+          <a:p>
+            <a:pPr>
+              <a:defRPr sz="2600" b="1">
+                <a:solidFill>
+                  <a:srgbClr val="0F172A"/>
+                </a:solidFill>
+                <a:latin typeface="Malgun Gothic"/>
+              </a:defRPr>
+            </a:pPr>
+            <a:r>
+              <a:t>채점 전에 제출물의 연결성과 재현 가능성을 봅니다</a:t>
+            </a:r>
+          </a:p>
+        </p:txBody>
+      </p:sp>
+      <p:sp>
+        <p:nvSpPr>
+          <p:cNvPr id="4" name="Rectangle 3"/>
+          <p:cNvSpPr/>
+          <p:nvPr/>
+        </p:nvSpPr>
+        <p:spPr>
+          <a:xfrm>
+            <a:off x="548640" y="1371600"/>
+            <a:ext cx="11094415" cy="13716"/>
+          </a:xfrm>
+          <a:prstGeom prst="rect">
+            <a:avLst/>
+          </a:prstGeom>
+          <a:solidFill>
+            <a:srgbClr val="E2E8F0"/>
+          </a:solidFill>
+          <a:ln>
+            <a:noFill/>
+          </a:ln>
+        </p:spPr>
+        <p:style>
+          <a:lnRef idx="1">
+            <a:schemeClr val="accent1"/>
+          </a:lnRef>
+          <a:fillRef idx="3">
+            <a:schemeClr val="accent1"/>
+          </a:fillRef>
+          <a:effectRef idx="2">
+            <a:schemeClr val="accent1"/>
+          </a:effectRef>
+          <a:fontRef idx="minor">
+            <a:schemeClr val="lt1"/>
+          </a:fontRef>
+        </p:style>
+        <p:txBody>
+          <a:bodyPr rtlCol="0" anchor="ctr"/>
+          <a:lstStyle/>
+          <a:p>
+            <a:pPr algn="ctr"/>
+          </a:p>
+        </p:txBody>
+      </p:sp>
+      <p:sp>
+        <p:nvSpPr>
+          <p:cNvPr id="5" name="TextBox 4"/>
+          <p:cNvSpPr txBox="1"/>
+          <p:nvPr/>
+        </p:nvSpPr>
+        <p:spPr>
+          <a:xfrm>
+            <a:off x="548640" y="6309360"/>
+            <a:ext cx="9144000" cy="365760"/>
+          </a:xfrm>
+          <a:prstGeom prst="rect">
+            <a:avLst/>
+          </a:prstGeom>
+          <a:noFill/>
+        </p:spPr>
+        <p:txBody>
+          <a:bodyPr wrap="none">
+            <a:spAutoFit/>
+          </a:bodyPr>
+          <a:lstStyle/>
+          <a:p>
+            <a:pPr>
+              <a:defRPr sz="900">
+                <a:solidFill>
+                  <a:srgbClr val="64748B"/>
+                </a:solidFill>
+                <a:latin typeface="Malgun Gothic"/>
+              </a:defRPr>
+            </a:pPr>
+            <a:r>
+              <a:t>AICA 자격심사 시스템 사용자 매뉴얼 · 2026.07</a:t>
+            </a:r>
+          </a:p>
+        </p:txBody>
+      </p:sp>
+      <p:sp>
+        <p:nvSpPr>
+          <p:cNvPr id="6" name="TextBox 5"/>
+          <p:cNvSpPr txBox="1"/>
+          <p:nvPr/>
+        </p:nvSpPr>
+        <p:spPr>
+          <a:xfrm>
+            <a:off x="10820095" y="6309360"/>
+            <a:ext cx="822960" cy="365760"/>
+          </a:xfrm>
+          <a:prstGeom prst="rect">
+            <a:avLst/>
+          </a:prstGeom>
+          <a:noFill/>
+        </p:spPr>
+        <p:txBody>
+          <a:bodyPr wrap="none">
+            <a:spAutoFit/>
+          </a:bodyPr>
+          <a:lstStyle/>
+          <a:p>
+            <a:pPr algn="r">
+              <a:defRPr sz="900">
+                <a:solidFill>
+                  <a:srgbClr val="64748B"/>
+                </a:solidFill>
+                <a:latin typeface="Malgun Gothic"/>
+              </a:defRPr>
+            </a:pPr>
+            <a:r>
+              <a:t>11</a:t>
+            </a:r>
+          </a:p>
+        </p:txBody>
+      </p:sp>
+      <p:sp>
+        <p:nvSpPr>
+          <p:cNvPr id="7" name="Rounded Rectangle 6"/>
+          <p:cNvSpPr/>
+          <p:nvPr/>
+        </p:nvSpPr>
+        <p:spPr>
+          <a:xfrm>
+            <a:off x="548640" y="1828800"/>
+            <a:ext cx="3474720" cy="4114800"/>
+          </a:xfrm>
+          <a:prstGeom prst="roundRect">
+            <a:avLst/>
+          </a:prstGeom>
+          <a:solidFill>
+            <a:srgbClr val="F8FAFC"/>
+          </a:solidFill>
+          <a:ln w="12700">
+            <a:solidFill>
+              <a:srgbClr val="E2E8F0"/>
+            </a:solidFill>
+          </a:ln>
+        </p:spPr>
+        <p:style>
+          <a:lnRef idx="1">
+            <a:schemeClr val="accent1"/>
+          </a:lnRef>
+          <a:fillRef idx="3">
+            <a:schemeClr val="accent1"/>
+          </a:fillRef>
+          <a:effectRef idx="2">
+            <a:schemeClr val="accent1"/>
+          </a:effectRef>
+          <a:fontRef idx="minor">
+            <a:schemeClr val="lt1"/>
+          </a:fontRef>
+        </p:style>
+        <p:txBody>
+          <a:bodyPr rtlCol="0" anchor="ctr"/>
+          <a:lstStyle/>
+          <a:p>
+            <a:pPr algn="ctr"/>
+          </a:p>
+        </p:txBody>
+      </p:sp>
+      <p:sp>
+        <p:nvSpPr>
+          <p:cNvPr id="8" name="TextBox 7"/>
+          <p:cNvSpPr txBox="1"/>
+          <p:nvPr/>
+        </p:nvSpPr>
+        <p:spPr>
+          <a:xfrm>
+            <a:off x="685800" y="1965960"/>
+            <a:ext cx="3200400" cy="3840480"/>
+          </a:xfrm>
+          <a:prstGeom prst="rect">
+            <a:avLst/>
+          </a:prstGeom>
+          <a:noFill/>
+        </p:spPr>
+        <p:txBody>
+          <a:bodyPr wrap="square">
+            <a:spAutoFit/>
+          </a:bodyPr>
+          <a:lstStyle/>
+          <a:p>
+            <a:pPr>
+              <a:spcAft>
+                <a:spcPts val="1000"/>
+              </a:spcAft>
+              <a:defRPr sz="1400" b="1">
+                <a:solidFill>
+                  <a:srgbClr val="0F172A"/>
+                </a:solidFill>
+                <a:latin typeface="Malgun Gothic"/>
+              </a:defRPr>
+            </a:pPr>
+            <a:r>
+              <a:t>보고서 요약 (Tab 1)</a:t>
+            </a:r>
+          </a:p>
+          <a:p>
+            <a:pPr>
+              <a:spcAft>
+                <a:spcPts val="500"/>
+              </a:spcAft>
+              <a:defRPr sz="1100">
+                <a:solidFill>
+                  <a:srgbClr val="475569"/>
+                </a:solidFill>
+                <a:latin typeface="Malgun Gothic"/>
+              </a:defRPr>
+            </a:pPr>
+            <a:r>
+              <a:t>• 과제 제안명 확인</a:t>
+            </a:r>
+          </a:p>
+          <a:p>
+            <a:pPr>
+              <a:spcAft>
+                <a:spcPts val="500"/>
+              </a:spcAft>
+              <a:defRPr sz="1100">
+                <a:solidFill>
+                  <a:srgbClr val="475569"/>
+                </a:solidFill>
+                <a:latin typeface="Malgun Gothic"/>
+              </a:defRPr>
+            </a:pPr>
+            <a:r>
+              <a:t>• Pain Point 분석의 실효성</a:t>
+            </a:r>
+          </a:p>
+          <a:p>
+            <a:pPr>
+              <a:spcAft>
+                <a:spcPts val="500"/>
+              </a:spcAft>
+              <a:defRPr sz="1100">
+                <a:solidFill>
+                  <a:srgbClr val="475569"/>
+                </a:solidFill>
+                <a:latin typeface="Malgun Gothic"/>
+              </a:defRPr>
+            </a:pPr>
+            <a:r>
+              <a:t>• AI Solution 구성도 및 설명</a:t>
+            </a:r>
+          </a:p>
+          <a:p>
+            <a:pPr>
+              <a:spcAft>
+                <a:spcPts val="500"/>
+              </a:spcAft>
+              <a:defRPr sz="1100">
+                <a:solidFill>
+                  <a:srgbClr val="475569"/>
+                </a:solidFill>
+                <a:latin typeface="Malgun Gothic"/>
+              </a:defRPr>
+            </a:pPr>
+            <a:r>
+              <a:t>• 6S 기준 요약 정밀 검토</a:t>
+            </a:r>
+          </a:p>
+          <a:p>
+            <a:br/>
+            <a:pPr>
+              <a:spcAft>
+                <a:spcPts val="500"/>
+              </a:spcAft>
+              <a:defRPr sz="1100">
+                <a:solidFill>
+                  <a:srgbClr val="475569"/>
+                </a:solidFill>
+                <a:latin typeface="Malgun Gothic"/>
+              </a:defRPr>
+            </a:pPr>
+            <a:r>
+              <a:t>💡 문제 ➔ 해결 ➔ 효과의 인과관계가 매끄럽게 연결되는지 인과성을 확인합니다.</a:t>
+            </a:r>
+          </a:p>
+        </p:txBody>
+      </p:sp>
+      <p:sp>
+        <p:nvSpPr>
+          <p:cNvPr id="9" name="Rounded Rectangle 8"/>
+          <p:cNvSpPr/>
+          <p:nvPr/>
+        </p:nvSpPr>
+        <p:spPr>
+          <a:xfrm>
+            <a:off x="4389120" y="1828800"/>
+            <a:ext cx="3474720" cy="4114800"/>
+          </a:xfrm>
+          <a:prstGeom prst="roundRect">
+            <a:avLst/>
+          </a:prstGeom>
+          <a:solidFill>
+            <a:srgbClr val="EFF6FF"/>
+          </a:solidFill>
+          <a:ln w="12700">
+            <a:solidFill>
+              <a:srgbClr val="E2E8F0"/>
+            </a:solidFill>
+          </a:ln>
+        </p:spPr>
+        <p:style>
+          <a:lnRef idx="1">
+            <a:schemeClr val="accent1"/>
+          </a:lnRef>
+          <a:fillRef idx="3">
+            <a:schemeClr val="accent1"/>
+          </a:fillRef>
+          <a:effectRef idx="2">
+            <a:schemeClr val="accent1"/>
+          </a:effectRef>
+          <a:fontRef idx="minor">
+            <a:schemeClr val="lt1"/>
+          </a:fontRef>
+        </p:style>
+        <p:txBody>
+          <a:bodyPr rtlCol="0" anchor="ctr"/>
+          <a:lstStyle/>
+          <a:p>
+            <a:pPr algn="ctr"/>
+          </a:p>
+        </p:txBody>
+      </p:sp>
+      <p:sp>
+        <p:nvSpPr>
+          <p:cNvPr id="10" name="TextBox 9"/>
+          <p:cNvSpPr txBox="1"/>
+          <p:nvPr/>
+        </p:nvSpPr>
+        <p:spPr>
+          <a:xfrm>
+            <a:off x="4526280" y="1965960"/>
+            <a:ext cx="3200400" cy="3840480"/>
+          </a:xfrm>
+          <a:prstGeom prst="rect">
+            <a:avLst/>
+          </a:prstGeom>
+          <a:noFill/>
+        </p:spPr>
+        <p:txBody>
+          <a:bodyPr wrap="square">
+            <a:spAutoFit/>
+          </a:bodyPr>
+          <a:lstStyle/>
+          <a:p>
+            <a:pPr>
+              <a:spcAft>
+                <a:spcPts val="1000"/>
+              </a:spcAft>
+              <a:defRPr sz="1400" b="1">
+                <a:solidFill>
+                  <a:srgbClr val="2563EB"/>
+                </a:solidFill>
+                <a:latin typeface="Malgun Gothic"/>
+              </a:defRPr>
+            </a:pPr>
+            <a:r>
+              <a:t>소스코드 구조 (Tab 2)</a:t>
+            </a:r>
+          </a:p>
+          <a:p>
+            <a:pPr>
+              <a:spcAft>
+                <a:spcPts val="500"/>
+              </a:spcAft>
+              <a:defRPr sz="1100">
+                <a:solidFill>
+                  <a:srgbClr val="475569"/>
+                </a:solidFill>
+                <a:latin typeface="Malgun Gothic"/>
+              </a:defRPr>
+            </a:pPr>
+            <a:r>
+              <a:t>• 리포지토리 폴더 디렉토리 구조</a:t>
+            </a:r>
+          </a:p>
+          <a:p>
+            <a:pPr>
+              <a:spcAft>
+                <a:spcPts val="500"/>
+              </a:spcAft>
+              <a:defRPr sz="1100">
+                <a:solidFill>
+                  <a:srgbClr val="475569"/>
+                </a:solidFill>
+                <a:latin typeface="Malgun Gothic"/>
+              </a:defRPr>
+            </a:pPr>
+            <a:r>
+              <a:t>• 패키지 라이브러리 잠금 파일</a:t>
+            </a:r>
+          </a:p>
+          <a:p>
+            <a:pPr>
+              <a:spcAft>
+                <a:spcPts val="500"/>
+              </a:spcAft>
+              <a:defRPr sz="1100">
+                <a:solidFill>
+                  <a:srgbClr val="475569"/>
+                </a:solidFill>
+                <a:latin typeface="Malgun Gothic"/>
+              </a:defRPr>
+            </a:pPr>
+            <a:r>
+              <a:t>• 환경 변수 구성 방식</a:t>
+            </a:r>
+          </a:p>
+          <a:p>
+            <a:pPr>
+              <a:spcAft>
+                <a:spcPts val="500"/>
+              </a:spcAft>
+              <a:defRPr sz="1100">
+                <a:solidFill>
+                  <a:srgbClr val="475569"/>
+                </a:solidFill>
+                <a:latin typeface="Malgun Gothic"/>
+              </a:defRPr>
+            </a:pPr>
+            <a:r>
+              <a:t>• 예외처리 및 재현 가이드</a:t>
+            </a:r>
+          </a:p>
+          <a:p>
+            <a:br/>
+            <a:pPr>
+              <a:spcAft>
+                <a:spcPts val="500"/>
+              </a:spcAft>
+              <a:defRPr sz="1100">
+                <a:solidFill>
+                  <a:srgbClr val="475569"/>
+                </a:solidFill>
+                <a:latin typeface="Malgun Gothic"/>
+              </a:defRPr>
+            </a:pPr>
+            <a:r>
+              <a:t>⚠️ API Key나 내부 계정 정보 등 비밀 자격증명이 코드에 방치되어 있는지 반드시 조사합니다.</a:t>
+            </a:r>
+          </a:p>
+        </p:txBody>
+      </p:sp>
+      <p:sp>
+        <p:nvSpPr>
+          <p:cNvPr id="11" name="Rounded Rectangle 10"/>
+          <p:cNvSpPr/>
+          <p:nvPr/>
+        </p:nvSpPr>
+        <p:spPr>
+          <a:xfrm>
+            <a:off x="8229600" y="1828800"/>
+            <a:ext cx="3474720" cy="4114800"/>
+          </a:xfrm>
+          <a:prstGeom prst="roundRect">
+            <a:avLst/>
+          </a:prstGeom>
+          <a:solidFill>
+            <a:srgbClr val="F8FAFC"/>
+          </a:solidFill>
+          <a:ln w="12700">
+            <a:solidFill>
+              <a:srgbClr val="E2E8F0"/>
+            </a:solidFill>
+          </a:ln>
+        </p:spPr>
+        <p:style>
+          <a:lnRef idx="1">
+            <a:schemeClr val="accent1"/>
+          </a:lnRef>
+          <a:fillRef idx="3">
+            <a:schemeClr val="accent1"/>
+          </a:fillRef>
+          <a:effectRef idx="2">
+            <a:schemeClr val="accent1"/>
+          </a:effectRef>
+          <a:fontRef idx="minor">
+            <a:schemeClr val="lt1"/>
+          </a:fontRef>
+        </p:style>
+        <p:txBody>
+          <a:bodyPr rtlCol="0" anchor="ctr"/>
+          <a:lstStyle/>
+          <a:p>
+            <a:pPr algn="ctr"/>
+          </a:p>
+        </p:txBody>
+      </p:sp>
+      <p:sp>
+        <p:nvSpPr>
+          <p:cNvPr id="12" name="TextBox 11"/>
+          <p:cNvSpPr txBox="1"/>
+          <p:nvPr/>
+        </p:nvSpPr>
+        <p:spPr>
+          <a:xfrm>
+            <a:off x="8366760" y="1965960"/>
+            <a:ext cx="3200400" cy="3840480"/>
+          </a:xfrm>
+          <a:prstGeom prst="rect">
+            <a:avLst/>
+          </a:prstGeom>
+          <a:noFill/>
+        </p:spPr>
+        <p:txBody>
+          <a:bodyPr wrap="square">
+            <a:spAutoFit/>
+          </a:bodyPr>
+          <a:lstStyle/>
+          <a:p>
+            <a:pPr>
+              <a:spcAft>
+                <a:spcPts val="1000"/>
+              </a:spcAft>
+              <a:defRPr sz="1400" b="1">
+                <a:solidFill>
+                  <a:srgbClr val="0F172A"/>
+                </a:solidFill>
+                <a:latin typeface="Malgun Gothic"/>
+              </a:defRPr>
+            </a:pPr>
+            <a:r>
+              <a:t>시연·링크 (Tab 3)</a:t>
+            </a:r>
+          </a:p>
+          <a:p>
+            <a:pPr>
+              <a:spcAft>
+                <a:spcPts val="500"/>
+              </a:spcAft>
+              <a:defRPr sz="1100">
+                <a:solidFill>
+                  <a:srgbClr val="475569"/>
+                </a:solidFill>
+                <a:latin typeface="Malgun Gothic"/>
+              </a:defRPr>
+            </a:pPr>
+            <a:r>
+              <a:t>제출된 URL 유효성 검증:</a:t>
+            </a:r>
+          </a:p>
+          <a:p>
+            <a:pPr>
+              <a:spcAft>
+                <a:spcPts val="500"/>
+              </a:spcAft>
+              <a:defRPr sz="1100">
+                <a:solidFill>
+                  <a:srgbClr val="475569"/>
+                </a:solidFill>
+                <a:latin typeface="Malgun Gothic"/>
+              </a:defRPr>
+            </a:pPr>
+            <a:r>
+              <a:t>• 결과 보고서 PDF 링크</a:t>
+            </a:r>
+          </a:p>
+          <a:p>
+            <a:pPr>
+              <a:spcAft>
+                <a:spcPts val="500"/>
+              </a:spcAft>
+              <a:defRPr sz="1100">
+                <a:solidFill>
+                  <a:srgbClr val="475569"/>
+                </a:solidFill>
+                <a:latin typeface="Malgun Gothic"/>
+              </a:defRPr>
+            </a:pPr>
+            <a:r>
+              <a:t>• Git 저장소 링크</a:t>
+            </a:r>
+          </a:p>
+          <a:p>
+            <a:pPr>
+              <a:spcAft>
+                <a:spcPts val="500"/>
+              </a:spcAft>
+              <a:defRPr sz="1100">
+                <a:solidFill>
+                  <a:srgbClr val="475569"/>
+                </a:solidFill>
+                <a:latin typeface="Malgun Gothic"/>
+              </a:defRPr>
+            </a:pPr>
+            <a:r>
+              <a:t>• 시연 동영상 URL</a:t>
+            </a:r>
+          </a:p>
+          <a:p>
+            <a:br/>
+            <a:pPr>
+              <a:spcAft>
+                <a:spcPts val="500"/>
+              </a:spcAft>
+              <a:defRPr sz="1100">
+                <a:solidFill>
+                  <a:srgbClr val="475569"/>
+                </a:solidFill>
+                <a:latin typeface="Malgun Gothic"/>
+              </a:defRPr>
+            </a:pPr>
+            <a:r>
+              <a:t>* 권한 오류나 깨진 링크가 발생한 경우, 평가 의견란에 내용을 구체적으로 기록합니다.</a:t>
+            </a:r>
+          </a:p>
+        </p:txBody>
+      </p:sp>
+    </p:spTree>
+  </p:cSld>
+  <p:clrMapOvr>
+    <a:masterClrMapping/>
+  </p:clrMapOvr>
+</p:sld>
+</file>
+
+<file path=ppt/slides/slide12.xml><?xml version="1.0" encoding="utf-8"?>
+<p:sld xmlns:a="http://schemas.openxmlformats.org/drawingml/2006/main" xmlns:p="http://schemas.openxmlformats.org/presentationml/2006/main" xmlns:r="http://schemas.openxmlformats.org/officeDocument/2006/relationships">
+  <p:cSld>
+    <p:bg>
+      <p:bgPr>
+        <a:solidFill>
+          <a:srgbClr val="FFFFFF"/>
+        </a:solidFill>
+        <a:effectLst/>
+      </p:bgPr>
+    </p:bg>
+    <p:spTree>
+      <p:nvGrpSpPr>
+        <p:cNvPr id="1" name=""/>
+        <p:cNvGrpSpPr/>
+        <p:nvPr/>
+      </p:nvGrpSpPr>
+      <p:grpSpPr/>
+      <p:sp>
+        <p:nvSpPr>
+          <p:cNvPr id="2" name="TextBox 1"/>
+          <p:cNvSpPr txBox="1"/>
+          <p:nvPr/>
+        </p:nvSpPr>
+        <p:spPr>
+          <a:xfrm>
+            <a:off x="548640" y="365760"/>
+            <a:ext cx="7315200" cy="365760"/>
+          </a:xfrm>
+          <a:prstGeom prst="rect">
+            <a:avLst/>
+          </a:prstGeom>
+          <a:noFill/>
+        </p:spPr>
+        <p:txBody>
+          <a:bodyPr wrap="none">
+            <a:spAutoFit/>
+          </a:bodyPr>
+          <a:lstStyle/>
+          <a:p>
+            <a:pPr>
+              <a:defRPr sz="1100" b="1">
+                <a:solidFill>
+                  <a:srgbClr val="2563EB"/>
+                </a:solidFill>
+                <a:latin typeface="Malgun Gothic"/>
+              </a:defRPr>
+            </a:pPr>
+            <a:r>
+              <a:t>심사위원</a:t>
+            </a:r>
+          </a:p>
+        </p:txBody>
+      </p:sp>
+      <p:sp>
+        <p:nvSpPr>
+          <p:cNvPr id="3" name="TextBox 2"/>
+          <p:cNvSpPr txBox="1"/>
+          <p:nvPr/>
+        </p:nvSpPr>
+        <p:spPr>
+          <a:xfrm>
+            <a:off x="548640" y="640080"/>
+            <a:ext cx="10058400" cy="731520"/>
+          </a:xfrm>
+          <a:prstGeom prst="rect">
+            <a:avLst/>
+          </a:prstGeom>
+          <a:noFill/>
+        </p:spPr>
+        <p:txBody>
+          <a:bodyPr wrap="none">
+            <a:spAutoFit/>
+          </a:bodyPr>
+          <a:lstStyle/>
+          <a:p>
+            <a:pPr>
+              <a:defRPr sz="2600" b="1">
+                <a:solidFill>
+                  <a:srgbClr val="0F172A"/>
+                </a:solidFill>
+                <a:latin typeface="Malgun Gothic"/>
+              </a:defRPr>
+            </a:pPr>
+            <a:r>
+              <a:t>공통 보안 체크리스트는 모든 심사의 선행 조건입니다</a:t>
+            </a:r>
+          </a:p>
+        </p:txBody>
+      </p:sp>
+      <p:sp>
+        <p:nvSpPr>
+          <p:cNvPr id="4" name="Rectangle 3"/>
+          <p:cNvSpPr/>
+          <p:nvPr/>
+        </p:nvSpPr>
+        <p:spPr>
+          <a:xfrm>
+            <a:off x="548640" y="1371600"/>
+            <a:ext cx="11094415" cy="13716"/>
+          </a:xfrm>
+          <a:prstGeom prst="rect">
+            <a:avLst/>
+          </a:prstGeom>
+          <a:solidFill>
+            <a:srgbClr val="E2E8F0"/>
+          </a:solidFill>
+          <a:ln>
+            <a:noFill/>
+          </a:ln>
+        </p:spPr>
+        <p:style>
+          <a:lnRef idx="1">
+            <a:schemeClr val="accent1"/>
+          </a:lnRef>
+          <a:fillRef idx="3">
+            <a:schemeClr val="accent1"/>
+          </a:fillRef>
+          <a:effectRef idx="2">
+            <a:schemeClr val="accent1"/>
+          </a:effectRef>
+          <a:fontRef idx="minor">
+            <a:schemeClr val="lt1"/>
+          </a:fontRef>
+        </p:style>
+        <p:txBody>
+          <a:bodyPr rtlCol="0" anchor="ctr"/>
+          <a:lstStyle/>
+          <a:p>
+            <a:pPr algn="ctr"/>
+          </a:p>
+        </p:txBody>
+      </p:sp>
+      <p:sp>
+        <p:nvSpPr>
+          <p:cNvPr id="5" name="TextBox 4"/>
+          <p:cNvSpPr txBox="1"/>
+          <p:nvPr/>
+        </p:nvSpPr>
+        <p:spPr>
+          <a:xfrm>
+            <a:off x="548640" y="6309360"/>
+            <a:ext cx="9144000" cy="365760"/>
+          </a:xfrm>
+          <a:prstGeom prst="rect">
+            <a:avLst/>
+          </a:prstGeom>
+          <a:noFill/>
+        </p:spPr>
+        <p:txBody>
+          <a:bodyPr wrap="none">
+            <a:spAutoFit/>
+          </a:bodyPr>
+          <a:lstStyle/>
+          <a:p>
+            <a:pPr>
+              <a:defRPr sz="900">
+                <a:solidFill>
+                  <a:srgbClr val="64748B"/>
+                </a:solidFill>
+                <a:latin typeface="Malgun Gothic"/>
+              </a:defRPr>
+            </a:pPr>
+            <a:r>
+              <a:t>AICA 자격심사 시스템 사용자 매뉴얼 · 2026.07</a:t>
+            </a:r>
+          </a:p>
+        </p:txBody>
+      </p:sp>
+      <p:sp>
+        <p:nvSpPr>
+          <p:cNvPr id="6" name="TextBox 5"/>
+          <p:cNvSpPr txBox="1"/>
+          <p:nvPr/>
+        </p:nvSpPr>
+        <p:spPr>
+          <a:xfrm>
+            <a:off x="10820095" y="6309360"/>
+            <a:ext cx="822960" cy="365760"/>
+          </a:xfrm>
+          <a:prstGeom prst="rect">
+            <a:avLst/>
+          </a:prstGeom>
+          <a:noFill/>
+        </p:spPr>
+        <p:txBody>
+          <a:bodyPr wrap="none">
+            <a:spAutoFit/>
+          </a:bodyPr>
+          <a:lstStyle/>
+          <a:p>
+            <a:pPr algn="r">
+              <a:defRPr sz="900">
+                <a:solidFill>
+                  <a:srgbClr val="64748B"/>
+                </a:solidFill>
+                <a:latin typeface="Malgun Gothic"/>
+              </a:defRPr>
+            </a:pPr>
+            <a:r>
+              <a:t>12</a:t>
+            </a:r>
+          </a:p>
+        </p:txBody>
+      </p:sp>
+      <p:sp>
+        <p:nvSpPr>
+          <p:cNvPr id="7" name="Rectangle 6"/>
+          <p:cNvSpPr/>
+          <p:nvPr/>
+        </p:nvSpPr>
+        <p:spPr>
+          <a:xfrm>
+            <a:off x="548640" y="1645920"/>
+            <a:ext cx="11094415" cy="777240"/>
+          </a:xfrm>
+          <a:prstGeom prst="rect">
+            <a:avLst/>
+          </a:prstGeom>
+          <a:solidFill>
+            <a:srgbClr val="F8FAFC"/>
+          </a:solidFill>
+          <a:ln>
+            <a:solidFill>
+              <a:srgbClr val="E2E8F0"/>
+            </a:solidFill>
+          </a:ln>
+        </p:spPr>
+        <p:style>
+          <a:lnRef idx="1">
+            <a:schemeClr val="accent1"/>
+          </a:lnRef>
+          <a:fillRef idx="3">
+            <a:schemeClr val="accent1"/>
+          </a:fillRef>
+          <a:effectRef idx="2">
+            <a:schemeClr val="accent1"/>
+          </a:effectRef>
+          <a:fontRef idx="minor">
+            <a:schemeClr val="lt1"/>
+          </a:fontRef>
+        </p:style>
+        <p:txBody>
+          <a:bodyPr rtlCol="0" anchor="ctr" wrap="square"/>
+          <a:lstStyle/>
+          <a:p>
+            <a:pPr algn="ctr">
+              <a:defRPr sz="1100">
+                <a:solidFill>
+                  <a:srgbClr val="475569"/>
+                </a:solidFill>
+                <a:latin typeface="Malgun Gothic"/>
+              </a:defRPr>
+            </a:pPr>
+            <a:r>
+              <a:rPr b="1" sz="1100">
+                <a:solidFill>
+                  <a:srgbClr val="2563EB"/>
+                </a:solidFill>
+              </a:rPr>
+              <a:t>  [1. 개인정보(PII)]  </a:t>
+            </a:r>
+            <a:r>
+              <a:rPr sz="1100">
+                <a:solidFill>
+                  <a:srgbClr val="475569"/>
+                </a:solidFill>
+              </a:rPr>
+              <a:t>이름, 전화번호, 이메일 주소 등 고객 및 개인 정보가 마스킹되었는가?</a:t>
+            </a:r>
+          </a:p>
+        </p:txBody>
+      </p:sp>
+      <p:sp>
+        <p:nvSpPr>
+          <p:cNvPr id="8" name="Rectangle 7"/>
+          <p:cNvSpPr/>
+          <p:nvPr/>
+        </p:nvSpPr>
+        <p:spPr>
+          <a:xfrm>
+            <a:off x="548640" y="2514600"/>
+            <a:ext cx="11094415" cy="777240"/>
+          </a:xfrm>
+          <a:prstGeom prst="rect">
+            <a:avLst/>
+          </a:prstGeom>
+          <a:solidFill>
+            <a:srgbClr val="F8FAFC"/>
+          </a:solidFill>
+          <a:ln>
+            <a:solidFill>
+              <a:srgbClr val="E2E8F0"/>
+            </a:solidFill>
+          </a:ln>
+        </p:spPr>
+        <p:style>
+          <a:lnRef idx="1">
+            <a:schemeClr val="accent1"/>
+          </a:lnRef>
+          <a:fillRef idx="3">
+            <a:schemeClr val="accent1"/>
+          </a:fillRef>
+          <a:effectRef idx="2">
+            <a:schemeClr val="accent1"/>
+          </a:effectRef>
+          <a:fontRef idx="minor">
+            <a:schemeClr val="lt1"/>
+          </a:fontRef>
+        </p:style>
+        <p:txBody>
+          <a:bodyPr rtlCol="0" anchor="ctr" wrap="square"/>
+          <a:lstStyle/>
+          <a:p>
+            <a:pPr algn="ctr">
+              <a:defRPr sz="1100">
+                <a:solidFill>
+                  <a:srgbClr val="475569"/>
+                </a:solidFill>
+                <a:latin typeface="Malgun Gothic"/>
+              </a:defRPr>
+            </a:pPr>
+            <a:r>
+              <a:rPr b="1" sz="1100">
+                <a:solidFill>
+                  <a:srgbClr val="2563EB"/>
+                </a:solidFill>
+              </a:rPr>
+              <a:t>  [2. 기밀 정보 익명화]  </a:t>
+            </a:r>
+            <a:r>
+              <a:rPr sz="1100">
+                <a:solidFill>
+                  <a:srgbClr val="475569"/>
+                </a:solidFill>
+              </a:rPr>
+              <a:t>계약 금액, 단가, 마진율, 미공개 코드명 및 사내 기밀 정보가 익명화되었는가?</a:t>
+            </a:r>
+          </a:p>
+        </p:txBody>
+      </p:sp>
+      <p:sp>
+        <p:nvSpPr>
+          <p:cNvPr id="9" name="Rectangle 8"/>
+          <p:cNvSpPr/>
+          <p:nvPr/>
+        </p:nvSpPr>
+        <p:spPr>
+          <a:xfrm>
+            <a:off x="548640" y="3383280"/>
+            <a:ext cx="11094415" cy="777240"/>
+          </a:xfrm>
+          <a:prstGeom prst="rect">
+            <a:avLst/>
+          </a:prstGeom>
+          <a:solidFill>
+            <a:srgbClr val="F8FAFC"/>
+          </a:solidFill>
+          <a:ln>
+            <a:solidFill>
+              <a:srgbClr val="E2E8F0"/>
+            </a:solidFill>
+          </a:ln>
+        </p:spPr>
+        <p:style>
+          <a:lnRef idx="1">
+            <a:schemeClr val="accent1"/>
+          </a:lnRef>
+          <a:fillRef idx="3">
+            <a:schemeClr val="accent1"/>
+          </a:fillRef>
+          <a:effectRef idx="2">
+            <a:schemeClr val="accent1"/>
+          </a:effectRef>
+          <a:fontRef idx="minor">
+            <a:schemeClr val="lt1"/>
+          </a:fontRef>
+        </p:style>
+        <p:txBody>
+          <a:bodyPr rtlCol="0" anchor="ctr" wrap="square"/>
+          <a:lstStyle/>
+          <a:p>
+            <a:pPr algn="ctr">
+              <a:defRPr sz="1100">
+                <a:solidFill>
+                  <a:srgbClr val="475569"/>
+                </a:solidFill>
+                <a:latin typeface="Malgun Gothic"/>
+              </a:defRPr>
+            </a:pPr>
+            <a:r>
+              <a:rPr b="1" sz="1100">
+                <a:solidFill>
+                  <a:srgbClr val="2563EB"/>
+                </a:solidFill>
+              </a:rPr>
+              <a:t>  [3. 접속 자격증명 제거]  </a:t>
+            </a:r>
+            <a:r>
+              <a:rPr sz="1100">
+                <a:solidFill>
+                  <a:srgbClr val="475569"/>
+                </a:solidFill>
+              </a:rPr>
+              <a:t>API Key, 서비스 계정 Key, DB 접속 정보(ID/PW)가 소스코드 및 문서에서 완벽히 제거되었는가?</a:t>
+            </a:r>
+          </a:p>
+        </p:txBody>
+      </p:sp>
+      <p:sp>
+        <p:nvSpPr>
+          <p:cNvPr id="10" name="Rectangle 9"/>
+          <p:cNvSpPr/>
+          <p:nvPr/>
+        </p:nvSpPr>
+        <p:spPr>
+          <a:xfrm>
+            <a:off x="548640" y="4251959"/>
+            <a:ext cx="11094415" cy="777240"/>
+          </a:xfrm>
+          <a:prstGeom prst="rect">
+            <a:avLst/>
+          </a:prstGeom>
+          <a:solidFill>
+            <a:srgbClr val="F8FAFC"/>
+          </a:solidFill>
+          <a:ln>
+            <a:solidFill>
+              <a:srgbClr val="E2E8F0"/>
+            </a:solidFill>
+          </a:ln>
+        </p:spPr>
+        <p:style>
+          <a:lnRef idx="1">
+            <a:schemeClr val="accent1"/>
+          </a:lnRef>
+          <a:fillRef idx="3">
+            <a:schemeClr val="accent1"/>
+          </a:fillRef>
+          <a:effectRef idx="2">
+            <a:schemeClr val="accent1"/>
+          </a:effectRef>
+          <a:fontRef idx="minor">
+            <a:schemeClr val="lt1"/>
+          </a:fontRef>
+        </p:style>
+        <p:txBody>
+          <a:bodyPr rtlCol="0" anchor="ctr" wrap="square"/>
+          <a:lstStyle/>
+          <a:p>
+            <a:pPr algn="ctr">
+              <a:defRPr sz="1100">
+                <a:solidFill>
+                  <a:srgbClr val="475569"/>
+                </a:solidFill>
+                <a:latin typeface="Malgun Gothic"/>
+              </a:defRPr>
+            </a:pPr>
+            <a:r>
+              <a:rPr b="1" sz="1100">
+                <a:solidFill>
+                  <a:srgbClr val="2563EB"/>
+                </a:solidFill>
+              </a:rPr>
+              <a:t>  [4. 사내 보안 가이드라인 준수]  </a:t>
+            </a:r>
+            <a:r>
+              <a:rPr sz="1100">
+                <a:solidFill>
+                  <a:srgbClr val="475569"/>
+                </a:solidFill>
+              </a:rPr>
+              <a:t>보안 부서 배포 가이드라인 및 개발 보안 자가점검표 기준을 성실히 준수했는가?</a:t>
+            </a:r>
+          </a:p>
+        </p:txBody>
+      </p:sp>
+      <p:sp>
+        <p:nvSpPr>
+          <p:cNvPr id="11" name="Rectangle 10"/>
+          <p:cNvSpPr/>
+          <p:nvPr/>
+        </p:nvSpPr>
+        <p:spPr>
+          <a:xfrm>
+            <a:off x="548640" y="5120640"/>
+            <a:ext cx="11094415" cy="777240"/>
+          </a:xfrm>
+          <a:prstGeom prst="rect">
+            <a:avLst/>
+          </a:prstGeom>
+          <a:solidFill>
+            <a:srgbClr val="F8FAFC"/>
+          </a:solidFill>
+          <a:ln>
+            <a:solidFill>
+              <a:srgbClr val="E2E8F0"/>
+            </a:solidFill>
+          </a:ln>
+        </p:spPr>
+        <p:style>
+          <a:lnRef idx="1">
+            <a:schemeClr val="accent1"/>
+          </a:lnRef>
+          <a:fillRef idx="3">
+            <a:schemeClr val="accent1"/>
+          </a:fillRef>
+          <a:effectRef idx="2">
+            <a:schemeClr val="accent1"/>
+          </a:effectRef>
+          <a:fontRef idx="minor">
+            <a:schemeClr val="lt1"/>
+          </a:fontRef>
+        </p:style>
+        <p:txBody>
+          <a:bodyPr rtlCol="0" anchor="ctr" wrap="square"/>
+          <a:lstStyle/>
+          <a:p>
+            <a:pPr algn="ctr">
+              <a:defRPr sz="1100">
+                <a:solidFill>
+                  <a:srgbClr val="475569"/>
+                </a:solidFill>
+                <a:latin typeface="Malgun Gothic"/>
+              </a:defRPr>
+            </a:pPr>
+            <a:r>
+              <a:rPr b="1" sz="1100">
+                <a:solidFill>
+                  <a:srgbClr val="2563EB"/>
+                </a:solidFill>
+              </a:rPr>
+              <a:t>  [5. 유출 방지 및 연동 안정성]  </a:t>
+            </a:r>
+            <a:r>
+              <a:rPr sz="1100">
+                <a:solidFill>
+                  <a:srgbClr val="475569"/>
+                </a:solidFill>
+              </a:rPr>
+              <a:t>타 부서 및 망 분리 환경 등 확장 사용 시 기밀 유출 위험이 없는가?</a:t>
+            </a:r>
+          </a:p>
+        </p:txBody>
+      </p:sp>
+      <p:sp>
+        <p:nvSpPr>
+          <p:cNvPr id="12" name="TextBox 11"/>
+          <p:cNvSpPr txBox="1"/>
+          <p:nvPr/>
+        </p:nvSpPr>
+        <p:spPr>
+          <a:xfrm>
+            <a:off x="548640" y="5943600"/>
+            <a:ext cx="10972800" cy="457200"/>
+          </a:xfrm>
+          <a:prstGeom prst="rect">
+            <a:avLst/>
+          </a:prstGeom>
+          <a:noFill/>
+        </p:spPr>
+        <p:txBody>
+          <a:bodyPr wrap="none">
+            <a:spAutoFit/>
+          </a:bodyPr>
+          <a:lstStyle/>
+          <a:p>
+            <a:pPr>
+              <a:defRPr sz="1100" b="1">
+                <a:solidFill>
+                  <a:srgbClr val="EF4444"/>
+                </a:solidFill>
+                <a:latin typeface="Malgun Gothic"/>
+              </a:defRPr>
+            </a:pPr>
+            <a:r>
+              <a:t>⚠️ 중요: 중대한 보안 위반 노출(API Key 방치 등)은 단순 감점이 아닌 불합격 결격사유에 해당합니다.</a:t>
+            </a:r>
+          </a:p>
+        </p:txBody>
+      </p:sp>
+    </p:spTree>
+  </p:cSld>
+  <p:clrMapOvr>
+    <a:masterClrMapping/>
+  </p:clrMapOvr>
+</p:sld>
+</file>
+
+<file path=ppt/slides/slide13.xml><?xml version="1.0" encoding="utf-8"?>
+<p:sld xmlns:a="http://schemas.openxmlformats.org/drawingml/2006/main" xmlns:p="http://schemas.openxmlformats.org/presentationml/2006/main" xmlns:r="http://schemas.openxmlformats.org/officeDocument/2006/relationships">
+  <p:cSld>
+    <p:bg>
+      <p:bgPr>
+        <a:solidFill>
+          <a:srgbClr val="FFFFFF"/>
+        </a:solidFill>
+        <a:effectLst/>
+      </p:bgPr>
+    </p:bg>
+    <p:spTree>
+      <p:nvGrpSpPr>
+        <p:cNvPr id="1" name=""/>
+        <p:cNvGrpSpPr/>
+        <p:nvPr/>
+      </p:nvGrpSpPr>
+      <p:grpSpPr/>
+      <p:sp>
+        <p:nvSpPr>
+          <p:cNvPr id="2" name="TextBox 1"/>
+          <p:cNvSpPr txBox="1"/>
+          <p:nvPr/>
+        </p:nvSpPr>
+        <p:spPr>
+          <a:xfrm>
+            <a:off x="548640" y="365760"/>
+            <a:ext cx="7315200" cy="365760"/>
+          </a:xfrm>
+          <a:prstGeom prst="rect">
+            <a:avLst/>
+          </a:prstGeom>
+          <a:noFill/>
+        </p:spPr>
+        <p:txBody>
+          <a:bodyPr wrap="none">
+            <a:spAutoFit/>
+          </a:bodyPr>
+          <a:lstStyle/>
+          <a:p>
+            <a:pPr>
+              <a:defRPr sz="1100" b="1">
+                <a:solidFill>
+                  <a:srgbClr val="2563EB"/>
+                </a:solidFill>
+                <a:latin typeface="Malgun Gothic"/>
+              </a:defRPr>
+            </a:pPr>
+            <a:r>
+              <a:t>심사위원</a:t>
+            </a:r>
+          </a:p>
+        </p:txBody>
+      </p:sp>
+      <p:sp>
+        <p:nvSpPr>
+          <p:cNvPr id="3" name="TextBox 2"/>
+          <p:cNvSpPr txBox="1"/>
+          <p:nvPr/>
+        </p:nvSpPr>
+        <p:spPr>
+          <a:xfrm>
+            <a:off x="548640" y="640080"/>
+            <a:ext cx="10058400" cy="731520"/>
+          </a:xfrm>
+          <a:prstGeom prst="rect">
+            <a:avLst/>
+          </a:prstGeom>
+          <a:noFill/>
+        </p:spPr>
+        <p:txBody>
+          <a:bodyPr wrap="none">
+            <a:spAutoFit/>
+          </a:bodyPr>
+          <a:lstStyle/>
+          <a:p>
+            <a:pPr>
+              <a:defRPr sz="2600" b="1">
+                <a:solidFill>
+                  <a:srgbClr val="0F172A"/>
+                </a:solidFill>
+                <a:latin typeface="Malgun Gothic"/>
+              </a:defRPr>
+            </a:pPr>
+            <a:r>
+              <a:t>Level에 따라 채점 축과 가중치가 달라집니다</a:t>
+            </a:r>
+          </a:p>
+        </p:txBody>
+      </p:sp>
+      <p:sp>
+        <p:nvSpPr>
+          <p:cNvPr id="4" name="Rectangle 3"/>
+          <p:cNvSpPr/>
+          <p:nvPr/>
+        </p:nvSpPr>
+        <p:spPr>
+          <a:xfrm>
+            <a:off x="548640" y="1371600"/>
+            <a:ext cx="11094415" cy="13716"/>
+          </a:xfrm>
+          <a:prstGeom prst="rect">
+            <a:avLst/>
+          </a:prstGeom>
+          <a:solidFill>
+            <a:srgbClr val="E2E8F0"/>
+          </a:solidFill>
+          <a:ln>
+            <a:noFill/>
+          </a:ln>
+        </p:spPr>
+        <p:style>
+          <a:lnRef idx="1">
+            <a:schemeClr val="accent1"/>
+          </a:lnRef>
+          <a:fillRef idx="3">
+            <a:schemeClr val="accent1"/>
+          </a:fillRef>
+          <a:effectRef idx="2">
+            <a:schemeClr val="accent1"/>
+          </a:effectRef>
+          <a:fontRef idx="minor">
+            <a:schemeClr val="lt1"/>
+          </a:fontRef>
+        </p:style>
+        <p:txBody>
+          <a:bodyPr rtlCol="0" anchor="ctr"/>
+          <a:lstStyle/>
+          <a:p>
+            <a:pPr algn="ctr"/>
+          </a:p>
+        </p:txBody>
+      </p:sp>
+      <p:sp>
+        <p:nvSpPr>
+          <p:cNvPr id="5" name="TextBox 4"/>
+          <p:cNvSpPr txBox="1"/>
+          <p:nvPr/>
+        </p:nvSpPr>
+        <p:spPr>
+          <a:xfrm>
+            <a:off x="548640" y="6309360"/>
+            <a:ext cx="9144000" cy="365760"/>
+          </a:xfrm>
+          <a:prstGeom prst="rect">
+            <a:avLst/>
+          </a:prstGeom>
+          <a:noFill/>
+        </p:spPr>
+        <p:txBody>
+          <a:bodyPr wrap="none">
+            <a:spAutoFit/>
+          </a:bodyPr>
+          <a:lstStyle/>
+          <a:p>
+            <a:pPr>
+              <a:defRPr sz="900">
+                <a:solidFill>
+                  <a:srgbClr val="64748B"/>
+                </a:solidFill>
+                <a:latin typeface="Malgun Gothic"/>
+              </a:defRPr>
+            </a:pPr>
+            <a:r>
+              <a:t>AICA 자격심사 시스템 사용자 매뉴얼 · 2026.07</a:t>
+            </a:r>
+          </a:p>
+        </p:txBody>
+      </p:sp>
+      <p:sp>
+        <p:nvSpPr>
+          <p:cNvPr id="6" name="TextBox 5"/>
+          <p:cNvSpPr txBox="1"/>
+          <p:nvPr/>
+        </p:nvSpPr>
+        <p:spPr>
+          <a:xfrm>
+            <a:off x="10820095" y="6309360"/>
+            <a:ext cx="822960" cy="365760"/>
+          </a:xfrm>
+          <a:prstGeom prst="rect">
+            <a:avLst/>
+          </a:prstGeom>
+          <a:noFill/>
+        </p:spPr>
+        <p:txBody>
+          <a:bodyPr wrap="none">
+            <a:spAutoFit/>
+          </a:bodyPr>
+          <a:lstStyle/>
+          <a:p>
+            <a:pPr algn="r">
+              <a:defRPr sz="900">
+                <a:solidFill>
+                  <a:srgbClr val="64748B"/>
+                </a:solidFill>
+                <a:latin typeface="Malgun Gothic"/>
+              </a:defRPr>
+            </a:pPr>
+            <a:r>
+              <a:t>13</a:t>
+            </a:r>
+          </a:p>
+        </p:txBody>
+      </p:sp>
+      <p:sp>
+        <p:nvSpPr>
+          <p:cNvPr id="7" name="Rounded Rectangle 6"/>
+          <p:cNvSpPr/>
+          <p:nvPr/>
+        </p:nvSpPr>
+        <p:spPr>
+          <a:xfrm>
+            <a:off x="548640" y="1828800"/>
+            <a:ext cx="5303520" cy="4114800"/>
+          </a:xfrm>
+          <a:prstGeom prst="roundRect">
+            <a:avLst/>
+          </a:prstGeom>
+          <a:solidFill>
+            <a:srgbClr val="EFF6FF"/>
+          </a:solidFill>
+          <a:ln w="12700">
+            <a:solidFill>
+              <a:srgbClr val="E2E8F0"/>
+            </a:solidFill>
+          </a:ln>
+        </p:spPr>
+        <p:style>
+          <a:lnRef idx="1">
+            <a:schemeClr val="accent1"/>
+          </a:lnRef>
+          <a:fillRef idx="3">
+            <a:schemeClr val="accent1"/>
+          </a:fillRef>
+          <a:effectRef idx="2">
+            <a:schemeClr val="accent1"/>
+          </a:effectRef>
+          <a:fontRef idx="minor">
+            <a:schemeClr val="lt1"/>
+          </a:fontRef>
+        </p:style>
+        <p:txBody>
+          <a:bodyPr rtlCol="0" anchor="ctr"/>
+          <a:lstStyle/>
+          <a:p>
+            <a:pPr algn="ctr"/>
+          </a:p>
+        </p:txBody>
+      </p:sp>
+      <p:sp>
+        <p:nvSpPr>
+          <p:cNvPr id="8" name="TextBox 7"/>
+          <p:cNvSpPr txBox="1"/>
+          <p:nvPr/>
+        </p:nvSpPr>
+        <p:spPr>
+          <a:xfrm>
+            <a:off x="685800" y="1965960"/>
+            <a:ext cx="5029200" cy="3840480"/>
+          </a:xfrm>
+          <a:prstGeom prst="rect">
+            <a:avLst/>
+          </a:prstGeom>
+          <a:noFill/>
+        </p:spPr>
+        <p:txBody>
+          <a:bodyPr wrap="square">
+            <a:spAutoFit/>
+          </a:bodyPr>
+          <a:lstStyle/>
+          <a:p>
+            <a:pPr>
+              <a:spcAft>
+                <a:spcPts val="1000"/>
+              </a:spcAft>
+              <a:defRPr sz="1400" b="1">
+                <a:solidFill>
+                  <a:srgbClr val="2563EB"/>
+                </a:solidFill>
+                <a:latin typeface="Malgun Gothic"/>
+              </a:defRPr>
+            </a:pPr>
+            <a:r>
+              <a:t>Level 3 · AI Champion</a:t>
+            </a:r>
+          </a:p>
+          <a:p>
+            <a:pPr>
+              <a:spcAft>
+                <a:spcPts val="500"/>
+              </a:spcAft>
+              <a:defRPr sz="1100">
+                <a:solidFill>
+                  <a:srgbClr val="475569"/>
+                </a:solidFill>
+                <a:latin typeface="Malgun Gothic"/>
+              </a:defRPr>
+            </a:pPr>
+            <a:r>
+              <a:t>현업 적용성과 업무 보급 가능성을 중심으로 검증합니다.</a:t>
+            </a:r>
+          </a:p>
+          <a:p>
+            <a:br/>
+            <a:pPr>
+              <a:spcAft>
+                <a:spcPts val="500"/>
+              </a:spcAft>
+              <a:defRPr sz="1100">
+                <a:solidFill>
+                  <a:srgbClr val="475569"/>
+                </a:solidFill>
+                <a:latin typeface="Malgun Gothic"/>
+              </a:defRPr>
+            </a:pPr>
+            <a:r>
+              <a:t>• 문제 해결 난이도 (가중치 30%)</a:t>
+            </a:r>
+          </a:p>
+          <a:p>
+            <a:pPr>
+              <a:spcAft>
+                <a:spcPts val="500"/>
+              </a:spcAft>
+              <a:defRPr sz="1100">
+                <a:solidFill>
+                  <a:srgbClr val="475569"/>
+                </a:solidFill>
+                <a:latin typeface="Malgun Gothic"/>
+              </a:defRPr>
+            </a:pPr>
+            <a:r>
+              <a:t>• 구현 완성도 (가중치 40%)</a:t>
+            </a:r>
+          </a:p>
+          <a:p>
+            <a:pPr>
+              <a:spcAft>
+                <a:spcPts val="500"/>
+              </a:spcAft>
+              <a:defRPr sz="1100">
+                <a:solidFill>
+                  <a:srgbClr val="475569"/>
+                </a:solidFill>
+                <a:latin typeface="Malgun Gothic"/>
+              </a:defRPr>
+            </a:pPr>
+            <a:r>
+              <a:t>• 확산 및 자산화 가능성 (가중치 30%)</a:t>
+            </a:r>
+          </a:p>
+          <a:p>
+            <a:br/>
+            <a:pPr>
+              <a:spcAft>
+                <a:spcPts val="500"/>
+              </a:spcAft>
+              <a:defRPr sz="1100">
+                <a:solidFill>
+                  <a:srgbClr val="475569"/>
+                </a:solidFill>
+                <a:latin typeface="Malgun Gothic"/>
+              </a:defRPr>
+            </a:pPr>
+            <a:r>
+              <a:t>💡 현업 현장의 수동 공수 감소 가치와 6개 관계사 전파 확장성을 중점적으로 봅니다.</a:t>
+            </a:r>
+          </a:p>
+        </p:txBody>
+      </p:sp>
+      <p:sp>
+        <p:nvSpPr>
+          <p:cNvPr id="9" name="Rounded Rectangle 8"/>
+          <p:cNvSpPr/>
+          <p:nvPr/>
+        </p:nvSpPr>
+        <p:spPr>
+          <a:xfrm>
+            <a:off x="6309360" y="1828800"/>
+            <a:ext cx="5303520" cy="4114800"/>
+          </a:xfrm>
+          <a:prstGeom prst="roundRect">
+            <a:avLst/>
+          </a:prstGeom>
+          <a:solidFill>
+            <a:srgbClr val="F8FAFC"/>
+          </a:solidFill>
+          <a:ln w="12700">
+            <a:solidFill>
+              <a:srgbClr val="E2E8F0"/>
+            </a:solidFill>
+          </a:ln>
+        </p:spPr>
+        <p:style>
+          <a:lnRef idx="1">
+            <a:schemeClr val="accent1"/>
+          </a:lnRef>
+          <a:fillRef idx="3">
+            <a:schemeClr val="accent1"/>
+          </a:fillRef>
+          <a:effectRef idx="2">
+            <a:schemeClr val="accent1"/>
+          </a:effectRef>
+          <a:fontRef idx="minor">
+            <a:schemeClr val="lt1"/>
+          </a:fontRef>
+        </p:style>
+        <p:txBody>
+          <a:bodyPr rtlCol="0" anchor="ctr"/>
+          <a:lstStyle/>
+          <a:p>
+            <a:pPr algn="ctr"/>
+          </a:p>
+        </p:txBody>
+      </p:sp>
+      <p:sp>
+        <p:nvSpPr>
+          <p:cNvPr id="10" name="TextBox 9"/>
+          <p:cNvSpPr txBox="1"/>
+          <p:nvPr/>
+        </p:nvSpPr>
+        <p:spPr>
+          <a:xfrm>
+            <a:off x="6446520" y="1965960"/>
+            <a:ext cx="5029200" cy="3840480"/>
+          </a:xfrm>
+          <a:prstGeom prst="rect">
+            <a:avLst/>
+          </a:prstGeom>
+          <a:noFill/>
+        </p:spPr>
+        <p:txBody>
+          <a:bodyPr wrap="square">
+            <a:spAutoFit/>
+          </a:bodyPr>
+          <a:lstStyle/>
+          <a:p>
+            <a:pPr>
+              <a:spcAft>
+                <a:spcPts val="1000"/>
+              </a:spcAft>
+              <a:defRPr sz="1400" b="1">
+                <a:solidFill>
+                  <a:srgbClr val="0F172A"/>
+                </a:solidFill>
+                <a:latin typeface="Malgun Gothic"/>
+              </a:defRPr>
+            </a:pPr>
+            <a:r>
+              <a:t>Level 4 · AI Specialist</a:t>
+            </a:r>
+          </a:p>
+          <a:p>
+            <a:pPr>
+              <a:spcAft>
+                <a:spcPts val="500"/>
+              </a:spcAft>
+              <a:defRPr sz="1100">
+                <a:solidFill>
+                  <a:srgbClr val="475569"/>
+                </a:solidFill>
+                <a:latin typeface="Malgun Gothic"/>
+              </a:defRPr>
+            </a:pPr>
+            <a:r>
+              <a:t>고급 구현 기술력과 데이터·보안 통제의 깊이를 평가합니다.</a:t>
+            </a:r>
+          </a:p>
+          <a:p>
+            <a:br/>
+            <a:pPr>
+              <a:spcAft>
+                <a:spcPts val="500"/>
+              </a:spcAft>
+              <a:defRPr sz="1100">
+                <a:solidFill>
+                  <a:srgbClr val="475569"/>
+                </a:solidFill>
+                <a:latin typeface="Malgun Gothic"/>
+              </a:defRPr>
+            </a:pPr>
+            <a:r>
+              <a:t>• 기술적 구현력 (가중치 40%)</a:t>
+            </a:r>
+          </a:p>
+          <a:p>
+            <a:pPr>
+              <a:spcAft>
+                <a:spcPts val="500"/>
+              </a:spcAft>
+              <a:defRPr sz="1100">
+                <a:solidFill>
+                  <a:srgbClr val="475569"/>
+                </a:solidFill>
+                <a:latin typeface="Malgun Gothic"/>
+              </a:defRPr>
+            </a:pPr>
+            <a:r>
+              <a:t>• 데이터 활용 및 보안성 (가중치 30%)</a:t>
+            </a:r>
+          </a:p>
+          <a:p>
+            <a:pPr>
+              <a:spcAft>
+                <a:spcPts val="500"/>
+              </a:spcAft>
+              <a:defRPr sz="1100">
+                <a:solidFill>
+                  <a:srgbClr val="475569"/>
+                </a:solidFill>
+                <a:latin typeface="Malgun Gothic"/>
+              </a:defRPr>
+            </a:pPr>
+            <a:r>
+              <a:t>• 비즈니스 기여도 (가중치 30%)</a:t>
+            </a:r>
+          </a:p>
+          <a:p>
+            <a:br/>
+            <a:pPr>
+              <a:spcAft>
+                <a:spcPts val="500"/>
+              </a:spcAft>
+              <a:defRPr sz="1100">
+                <a:solidFill>
+                  <a:srgbClr val="475569"/>
+                </a:solidFill>
+                <a:latin typeface="Malgun Gothic"/>
+              </a:defRPr>
+            </a:pPr>
+            <a:r>
+              <a:t>💡 LLM, RAG 등 심화 AI 기능 구현도 및 오차 제어 정교함, 명확한 정량적 효과(ROI)를 평가합니다.</a:t>
+            </a:r>
+          </a:p>
+        </p:txBody>
+      </p:sp>
+    </p:spTree>
+  </p:cSld>
+  <p:clrMapOvr>
+    <a:masterClrMapping/>
+  </p:clrMapOvr>
+</p:sld>
+</file>
+
+<file path=ppt/slides/slide14.xml><?xml version="1.0" encoding="utf-8"?>
+<p:sld xmlns:a="http://schemas.openxmlformats.org/drawingml/2006/main" xmlns:p="http://schemas.openxmlformats.org/presentationml/2006/main" xmlns:r="http://schemas.openxmlformats.org/officeDocument/2006/relationships">
+  <p:cSld>
+    <p:bg>
+      <p:bgPr>
+        <a:solidFill>
+          <a:srgbClr val="FFFFFF"/>
+        </a:solidFill>
+        <a:effectLst/>
+      </p:bgPr>
+    </p:bg>
+    <p:spTree>
+      <p:nvGrpSpPr>
+        <p:cNvPr id="1" name=""/>
+        <p:cNvGrpSpPr/>
+        <p:nvPr/>
+      </p:nvGrpSpPr>
+      <p:grpSpPr/>
+      <p:sp>
+        <p:nvSpPr>
+          <p:cNvPr id="2" name="TextBox 1"/>
+          <p:cNvSpPr txBox="1"/>
+          <p:nvPr/>
+        </p:nvSpPr>
+        <p:spPr>
+          <a:xfrm>
+            <a:off x="548640" y="365760"/>
+            <a:ext cx="7315200" cy="365760"/>
+          </a:xfrm>
+          <a:prstGeom prst="rect">
+            <a:avLst/>
+          </a:prstGeom>
+          <a:noFill/>
+        </p:spPr>
+        <p:txBody>
+          <a:bodyPr wrap="none">
+            <a:spAutoFit/>
+          </a:bodyPr>
+          <a:lstStyle/>
+          <a:p>
+            <a:pPr>
+              <a:defRPr sz="1100" b="1">
+                <a:solidFill>
+                  <a:srgbClr val="2563EB"/>
+                </a:solidFill>
+                <a:latin typeface="Malgun Gothic"/>
+              </a:defRPr>
+            </a:pPr>
+            <a:r>
+              <a:t>심사위원</a:t>
+            </a:r>
+          </a:p>
+        </p:txBody>
+      </p:sp>
+      <p:sp>
+        <p:nvSpPr>
+          <p:cNvPr id="3" name="TextBox 2"/>
+          <p:cNvSpPr txBox="1"/>
+          <p:nvPr/>
+        </p:nvSpPr>
+        <p:spPr>
+          <a:xfrm>
+            <a:off x="548640" y="640080"/>
+            <a:ext cx="10058400" cy="731520"/>
+          </a:xfrm>
+          <a:prstGeom prst="rect">
+            <a:avLst/>
+          </a:prstGeom>
+          <a:noFill/>
+        </p:spPr>
+        <p:txBody>
+          <a:bodyPr wrap="none">
+            <a:spAutoFit/>
+          </a:bodyPr>
+          <a:lstStyle/>
+          <a:p>
+            <a:pPr>
+              <a:defRPr sz="2600" b="1">
+                <a:solidFill>
+                  <a:srgbClr val="0F172A"/>
+                </a:solidFill>
+                <a:latin typeface="Malgun Gothic"/>
+              </a:defRPr>
+            </a:pPr>
+            <a:r>
+              <a:t>점수와 의견은 반드시 같은 근거를 가리켜야 합니다</a:t>
+            </a:r>
+          </a:p>
+        </p:txBody>
+      </p:sp>
+      <p:sp>
+        <p:nvSpPr>
+          <p:cNvPr id="4" name="Rectangle 3"/>
+          <p:cNvSpPr/>
+          <p:nvPr/>
+        </p:nvSpPr>
+        <p:spPr>
+          <a:xfrm>
+            <a:off x="548640" y="1371600"/>
+            <a:ext cx="11094415" cy="13716"/>
+          </a:xfrm>
+          <a:prstGeom prst="rect">
+            <a:avLst/>
+          </a:prstGeom>
+          <a:solidFill>
+            <a:srgbClr val="E2E8F0"/>
+          </a:solidFill>
+          <a:ln>
+            <a:noFill/>
+          </a:ln>
+        </p:spPr>
+        <p:style>
+          <a:lnRef idx="1">
+            <a:schemeClr val="accent1"/>
+          </a:lnRef>
+          <a:fillRef idx="3">
+            <a:schemeClr val="accent1"/>
+          </a:fillRef>
+          <a:effectRef idx="2">
+            <a:schemeClr val="accent1"/>
+          </a:effectRef>
+          <a:fontRef idx="minor">
+            <a:schemeClr val="lt1"/>
+          </a:fontRef>
+        </p:style>
+        <p:txBody>
+          <a:bodyPr rtlCol="0" anchor="ctr"/>
+          <a:lstStyle/>
+          <a:p>
+            <a:pPr algn="ctr"/>
+          </a:p>
+        </p:txBody>
+      </p:sp>
+      <p:sp>
+        <p:nvSpPr>
+          <p:cNvPr id="5" name="TextBox 4"/>
+          <p:cNvSpPr txBox="1"/>
+          <p:nvPr/>
+        </p:nvSpPr>
+        <p:spPr>
+          <a:xfrm>
+            <a:off x="548640" y="6309360"/>
+            <a:ext cx="9144000" cy="365760"/>
+          </a:xfrm>
+          <a:prstGeom prst="rect">
+            <a:avLst/>
+          </a:prstGeom>
+          <a:noFill/>
+        </p:spPr>
+        <p:txBody>
+          <a:bodyPr wrap="none">
+            <a:spAutoFit/>
+          </a:bodyPr>
+          <a:lstStyle/>
+          <a:p>
+            <a:pPr>
+              <a:defRPr sz="900">
+                <a:solidFill>
+                  <a:srgbClr val="64748B"/>
+                </a:solidFill>
+                <a:latin typeface="Malgun Gothic"/>
+              </a:defRPr>
+            </a:pPr>
+            <a:r>
+              <a:t>AICA 자격심사 시스템 사용자 매뉴얼 · 2026.07</a:t>
+            </a:r>
+          </a:p>
+        </p:txBody>
+      </p:sp>
+      <p:sp>
+        <p:nvSpPr>
+          <p:cNvPr id="6" name="TextBox 5"/>
+          <p:cNvSpPr txBox="1"/>
+          <p:nvPr/>
+        </p:nvSpPr>
+        <p:spPr>
+          <a:xfrm>
+            <a:off x="10820095" y="6309360"/>
+            <a:ext cx="822960" cy="365760"/>
+          </a:xfrm>
+          <a:prstGeom prst="rect">
+            <a:avLst/>
+          </a:prstGeom>
+          <a:noFill/>
+        </p:spPr>
+        <p:txBody>
+          <a:bodyPr wrap="none">
+            <a:spAutoFit/>
+          </a:bodyPr>
+          <a:lstStyle/>
+          <a:p>
+            <a:pPr algn="r">
+              <a:defRPr sz="900">
+                <a:solidFill>
+                  <a:srgbClr val="64748B"/>
+                </a:solidFill>
+                <a:latin typeface="Malgun Gothic"/>
+              </a:defRPr>
+            </a:pPr>
+            <a:r>
+              <a:t>14</a:t>
+            </a:r>
+          </a:p>
+        </p:txBody>
+      </p:sp>
+      <p:sp>
+        <p:nvSpPr>
+          <p:cNvPr id="7" name="Rounded Rectangle 6"/>
+          <p:cNvSpPr/>
+          <p:nvPr/>
+        </p:nvSpPr>
+        <p:spPr>
+          <a:xfrm>
+            <a:off x="548640" y="1828800"/>
+            <a:ext cx="5303520" cy="4114800"/>
+          </a:xfrm>
+          <a:prstGeom prst="roundRect">
+            <a:avLst/>
+          </a:prstGeom>
+          <a:solidFill>
+            <a:srgbClr val="F8FAFC"/>
+          </a:solidFill>
+          <a:ln w="12700">
+            <a:solidFill>
+              <a:srgbClr val="E2E8F0"/>
+            </a:solidFill>
+          </a:ln>
+        </p:spPr>
+        <p:style>
+          <a:lnRef idx="1">
+            <a:schemeClr val="accent1"/>
+          </a:lnRef>
+          <a:fillRef idx="3">
+            <a:schemeClr val="accent1"/>
+          </a:fillRef>
+          <a:effectRef idx="2">
+            <a:schemeClr val="accent1"/>
+          </a:effectRef>
+          <a:fontRef idx="minor">
+            <a:schemeClr val="lt1"/>
+          </a:fontRef>
+        </p:style>
+        <p:txBody>
+          <a:bodyPr rtlCol="0" anchor="ctr"/>
+          <a:lstStyle/>
+          <a:p>
+            <a:pPr algn="ctr"/>
+          </a:p>
+        </p:txBody>
+      </p:sp>
+      <p:sp>
+        <p:nvSpPr>
+          <p:cNvPr id="8" name="TextBox 7"/>
+          <p:cNvSpPr txBox="1"/>
+          <p:nvPr/>
+        </p:nvSpPr>
+        <p:spPr>
+          <a:xfrm>
+            <a:off x="685800" y="1965960"/>
+            <a:ext cx="5029200" cy="3840480"/>
+          </a:xfrm>
+          <a:prstGeom prst="rect">
+            <a:avLst/>
+          </a:prstGeom>
+          <a:noFill/>
+        </p:spPr>
+        <p:txBody>
+          <a:bodyPr wrap="square">
+            <a:spAutoFit/>
+          </a:bodyPr>
+          <a:lstStyle/>
+          <a:p>
+            <a:pPr>
+              <a:spcAft>
+                <a:spcPts val="1000"/>
+              </a:spcAft>
+              <a:defRPr sz="1400" b="1">
+                <a:solidFill>
+                  <a:srgbClr val="0F172A"/>
+                </a:solidFill>
+                <a:latin typeface="Malgun Gothic"/>
+              </a:defRPr>
+            </a:pPr>
+            <a:r>
+              <a:t>루브릭 채점 및 질문은행 활용</a:t>
+            </a:r>
+          </a:p>
+          <a:p>
+            <a:pPr>
+              <a:spcAft>
+                <a:spcPts val="500"/>
+              </a:spcAft>
+              <a:defRPr sz="1100">
+                <a:solidFill>
+                  <a:srgbClr val="475569"/>
+                </a:solidFill>
+                <a:latin typeface="Malgun Gothic"/>
+              </a:defRPr>
+            </a:pPr>
+            <a:r>
+              <a:t>루브릭 평가:</a:t>
+            </a:r>
+          </a:p>
+          <a:p>
+            <a:pPr>
+              <a:spcAft>
+                <a:spcPts val="500"/>
+              </a:spcAft>
+              <a:defRPr sz="1100">
+                <a:solidFill>
+                  <a:srgbClr val="475569"/>
+                </a:solidFill>
+                <a:latin typeface="Malgun Gothic"/>
+              </a:defRPr>
+            </a:pPr>
+            <a:r>
+              <a:t>• 라디오 카드를 클릭하여 5단계 중 평가 수준을 선택</a:t>
+            </a:r>
+          </a:p>
+          <a:p>
+            <a:pPr>
+              <a:spcAft>
+                <a:spcPts val="500"/>
+              </a:spcAft>
+              <a:defRPr sz="1100">
+                <a:solidFill>
+                  <a:srgbClr val="475569"/>
+                </a:solidFill>
+                <a:latin typeface="Malgun Gothic"/>
+              </a:defRPr>
+            </a:pPr>
+            <a:r>
+              <a:t>• 각 채점 항목별 정성적 의견 필수 기재</a:t>
+            </a:r>
+          </a:p>
+          <a:p>
+            <a:pPr>
+              <a:spcAft>
+                <a:spcPts val="500"/>
+              </a:spcAft>
+              <a:defRPr sz="1100">
+                <a:solidFill>
+                  <a:srgbClr val="475569"/>
+                </a:solidFill>
+                <a:latin typeface="Malgun Gothic"/>
+              </a:defRPr>
+            </a:pPr>
+            <a:r>
+              <a:t>• 편차 모니터링: 패널 위원 간 점수 차이가 15점 이상 시 조율 알림 노출 -&gt; 합의 조율 의견 추가 작성</a:t>
+            </a:r>
+          </a:p>
+          <a:p>
+            <a:br/>
+            <a:pPr>
+              <a:spcAft>
+                <a:spcPts val="500"/>
+              </a:spcAft>
+              <a:defRPr sz="1100">
+                <a:solidFill>
+                  <a:srgbClr val="475569"/>
+                </a:solidFill>
+                <a:latin typeface="Malgun Gothic"/>
+              </a:defRPr>
+            </a:pPr>
+            <a:r>
+              <a:t>질문은행 도우미 (Question Bank):</a:t>
+            </a:r>
+          </a:p>
+          <a:p>
+            <a:pPr>
+              <a:spcAft>
+                <a:spcPts val="500"/>
+              </a:spcAft>
+              <a:defRPr sz="1100">
+                <a:solidFill>
+                  <a:srgbClr val="475569"/>
+                </a:solidFill>
+                <a:latin typeface="Malgun Gothic"/>
+              </a:defRPr>
+            </a:pPr>
+            <a:r>
+              <a:t>• 과제 분류에 매핑되는 심사 질문 목록 검색 제공</a:t>
+            </a:r>
+          </a:p>
+          <a:p>
+            <a:pPr>
+              <a:spcAft>
+                <a:spcPts val="500"/>
+              </a:spcAft>
+              <a:defRPr sz="1100">
+                <a:solidFill>
+                  <a:srgbClr val="475569"/>
+                </a:solidFill>
+                <a:latin typeface="Malgun Gothic"/>
+              </a:defRPr>
+            </a:pPr>
+            <a:r>
+              <a:t>• 질문의 숨은 의도 및 고득점/저득점 판단 가이드라인 제공</a:t>
+            </a:r>
+          </a:p>
+          <a:p>
+            <a:br/>
+            <a:pPr>
+              <a:spcAft>
+                <a:spcPts val="500"/>
+              </a:spcAft>
+              <a:defRPr sz="1100">
+                <a:solidFill>
+                  <a:srgbClr val="475569"/>
+                </a:solidFill>
+                <a:latin typeface="Malgun Gothic"/>
+              </a:defRPr>
+            </a:pPr>
+            <a:r>
+              <a:t>의견 예시: 'RAG를 적용함'보다 '출처 표기와 환각 제어 로직이 시연 비디오에서 명확하게 관찰됨'과 같이 기록합니다.</a:t>
+            </a:r>
+          </a:p>
+        </p:txBody>
+      </p:sp>
+      <p:sp>
+        <p:nvSpPr>
+          <p:cNvPr id="9" name="Rectangle 8"/>
+          <p:cNvSpPr/>
+          <p:nvPr/>
+        </p:nvSpPr>
+        <p:spPr>
+          <a:xfrm>
+            <a:off x="6309360" y="1828800"/>
+            <a:ext cx="5303520" cy="4114800"/>
+          </a:xfrm>
+          <a:prstGeom prst="rect">
+            <a:avLst/>
+          </a:prstGeom>
+          <a:solidFill>
+            <a:srgbClr val="F8FAFC"/>
+          </a:solidFill>
+          <a:ln w="19050">
+            <a:solidFill>
+              <a:srgbClr val="E2E8F0"/>
+            </a:solidFill>
+          </a:ln>
+        </p:spPr>
+        <p:style>
+          <a:lnRef idx="1">
+            <a:schemeClr val="accent1"/>
+          </a:lnRef>
+          <a:fillRef idx="3">
+            <a:schemeClr val="accent1"/>
+          </a:fillRef>
+          <a:effectRef idx="2">
+            <a:schemeClr val="accent1"/>
+          </a:effectRef>
+          <a:fontRef idx="minor">
+            <a:schemeClr val="lt1"/>
+          </a:fontRef>
+        </p:style>
+        <p:txBody>
+          <a:bodyPr rtlCol="0" anchor="ctr"/>
+          <a:lstStyle/>
+          <a:p>
+            <a:pPr algn="ctr"/>
+          </a:p>
+        </p:txBody>
+      </p:sp>
+      <p:pic>
+        <p:nvPicPr>
+          <p:cNvPr id="10" name="Picture 9" descr="aica_evaluation_workspace_mockup_1784167999282.png"/>
+          <p:cNvPicPr>
+            <a:picLocks noChangeAspect="1"/>
+          </p:cNvPicPr>
+          <p:nvPr/>
+        </p:nvPicPr>
+        <p:blipFill>
+          <a:blip r:embed="rId2"/>
+          <a:stretch>
+            <a:fillRect/>
+          </a:stretch>
+        </p:blipFill>
+        <p:spPr>
+          <a:xfrm>
+            <a:off x="7040880" y="1965960"/>
+            <a:ext cx="3840480" cy="3840480"/>
+          </a:xfrm>
+          <a:prstGeom prst="rect">
+            <a:avLst/>
+          </a:prstGeom>
+        </p:spPr>
+      </p:pic>
+    </p:spTree>
+  </p:cSld>
+  <p:clrMapOvr>
+    <a:masterClrMapping/>
+  </p:clrMapOvr>
+</p:sld>
+</file>
+
+<file path=ppt/slides/slide15.xml><?xml version="1.0" encoding="utf-8"?>
+<p:sld xmlns:a="http://schemas.openxmlformats.org/drawingml/2006/main" xmlns:p="http://schemas.openxmlformats.org/presentationml/2006/main" xmlns:r="http://schemas.openxmlformats.org/officeDocument/2006/relationships">
+  <p:cSld>
+    <p:bg>
+      <p:bgPr>
+        <a:solidFill>
+          <a:srgbClr val="FFFFFF"/>
+        </a:solidFill>
+        <a:effectLst/>
+      </p:bgPr>
+    </p:bg>
+    <p:spTree>
+      <p:nvGrpSpPr>
+        <p:cNvPr id="1" name=""/>
+        <p:cNvGrpSpPr/>
+        <p:nvPr/>
+      </p:nvGrpSpPr>
+      <p:grpSpPr/>
+      <p:sp>
+        <p:nvSpPr>
+          <p:cNvPr id="2" name="TextBox 1"/>
+          <p:cNvSpPr txBox="1"/>
+          <p:nvPr/>
+        </p:nvSpPr>
+        <p:spPr>
+          <a:xfrm>
+            <a:off x="548640" y="365760"/>
+            <a:ext cx="7315200" cy="365760"/>
+          </a:xfrm>
+          <a:prstGeom prst="rect">
+            <a:avLst/>
+          </a:prstGeom>
+          <a:noFill/>
+        </p:spPr>
+        <p:txBody>
+          <a:bodyPr wrap="none">
+            <a:spAutoFit/>
+          </a:bodyPr>
+          <a:lstStyle/>
+          <a:p>
+            <a:pPr>
+              <a:defRPr sz="1100" b="1">
+                <a:solidFill>
+                  <a:srgbClr val="2563EB"/>
+                </a:solidFill>
+                <a:latin typeface="Malgun Gothic"/>
+              </a:defRPr>
+            </a:pPr>
+            <a:r>
+              <a:t>심사위원</a:t>
+            </a:r>
+          </a:p>
+        </p:txBody>
+      </p:sp>
+      <p:sp>
+        <p:nvSpPr>
+          <p:cNvPr id="3" name="TextBox 2"/>
+          <p:cNvSpPr txBox="1"/>
+          <p:nvPr/>
+        </p:nvSpPr>
+        <p:spPr>
+          <a:xfrm>
+            <a:off x="548640" y="640080"/>
+            <a:ext cx="10058400" cy="731520"/>
+          </a:xfrm>
+          <a:prstGeom prst="rect">
+            <a:avLst/>
+          </a:prstGeom>
+          <a:noFill/>
+        </p:spPr>
+        <p:txBody>
+          <a:bodyPr wrap="none">
+            <a:spAutoFit/>
+          </a:bodyPr>
+          <a:lstStyle/>
+          <a:p>
+            <a:pPr>
+              <a:defRPr sz="2600" b="1">
+                <a:solidFill>
+                  <a:srgbClr val="0F172A"/>
+                </a:solidFill>
+                <a:latin typeface="Malgun Gothic"/>
+              </a:defRPr>
+            </a:pPr>
+            <a:r>
+              <a:t>제출 전 마지막 확인이 평가 품질을 좌우합니다</a:t>
+            </a:r>
+          </a:p>
+        </p:txBody>
+      </p:sp>
+      <p:sp>
+        <p:nvSpPr>
+          <p:cNvPr id="4" name="Rectangle 3"/>
+          <p:cNvSpPr/>
+          <p:nvPr/>
+        </p:nvSpPr>
+        <p:spPr>
+          <a:xfrm>
+            <a:off x="548640" y="1371600"/>
+            <a:ext cx="11094415" cy="13716"/>
+          </a:xfrm>
+          <a:prstGeom prst="rect">
+            <a:avLst/>
+          </a:prstGeom>
+          <a:solidFill>
+            <a:srgbClr val="E2E8F0"/>
+          </a:solidFill>
+          <a:ln>
+            <a:noFill/>
+          </a:ln>
+        </p:spPr>
+        <p:style>
+          <a:lnRef idx="1">
+            <a:schemeClr val="accent1"/>
+          </a:lnRef>
+          <a:fillRef idx="3">
+            <a:schemeClr val="accent1"/>
+          </a:fillRef>
+          <a:effectRef idx="2">
+            <a:schemeClr val="accent1"/>
+          </a:effectRef>
+          <a:fontRef idx="minor">
+            <a:schemeClr val="lt1"/>
+          </a:fontRef>
+        </p:style>
+        <p:txBody>
+          <a:bodyPr rtlCol="0" anchor="ctr"/>
+          <a:lstStyle/>
+          <a:p>
+            <a:pPr algn="ctr"/>
+          </a:p>
+        </p:txBody>
+      </p:sp>
+      <p:sp>
+        <p:nvSpPr>
+          <p:cNvPr id="5" name="TextBox 4"/>
+          <p:cNvSpPr txBox="1"/>
+          <p:nvPr/>
+        </p:nvSpPr>
+        <p:spPr>
+          <a:xfrm>
+            <a:off x="548640" y="6309360"/>
+            <a:ext cx="9144000" cy="365760"/>
+          </a:xfrm>
+          <a:prstGeom prst="rect">
+            <a:avLst/>
+          </a:prstGeom>
+          <a:noFill/>
+        </p:spPr>
+        <p:txBody>
+          <a:bodyPr wrap="none">
+            <a:spAutoFit/>
+          </a:bodyPr>
+          <a:lstStyle/>
+          <a:p>
+            <a:pPr>
+              <a:defRPr sz="900">
+                <a:solidFill>
+                  <a:srgbClr val="64748B"/>
+                </a:solidFill>
+                <a:latin typeface="Malgun Gothic"/>
+              </a:defRPr>
+            </a:pPr>
+            <a:r>
+              <a:t>AICA 자격심사 시스템 사용자 매뉴얼 · 2026.07</a:t>
+            </a:r>
+          </a:p>
+        </p:txBody>
+      </p:sp>
+      <p:sp>
+        <p:nvSpPr>
+          <p:cNvPr id="6" name="TextBox 5"/>
+          <p:cNvSpPr txBox="1"/>
+          <p:nvPr/>
+        </p:nvSpPr>
+        <p:spPr>
+          <a:xfrm>
+            <a:off x="10820095" y="6309360"/>
+            <a:ext cx="822960" cy="365760"/>
+          </a:xfrm>
+          <a:prstGeom prst="rect">
+            <a:avLst/>
+          </a:prstGeom>
+          <a:noFill/>
+        </p:spPr>
+        <p:txBody>
+          <a:bodyPr wrap="none">
+            <a:spAutoFit/>
+          </a:bodyPr>
+          <a:lstStyle/>
+          <a:p>
+            <a:pPr algn="r">
+              <a:defRPr sz="900">
+                <a:solidFill>
+                  <a:srgbClr val="64748B"/>
+                </a:solidFill>
+                <a:latin typeface="Malgun Gothic"/>
+              </a:defRPr>
+            </a:pPr>
+            <a:r>
+              <a:t>15</a:t>
+            </a:r>
+          </a:p>
+        </p:txBody>
+      </p:sp>
+      <p:sp>
+        <p:nvSpPr>
+          <p:cNvPr id="7" name="Rectangle 6"/>
+          <p:cNvSpPr/>
+          <p:nvPr/>
+        </p:nvSpPr>
+        <p:spPr>
+          <a:xfrm>
+            <a:off x="1371600" y="2926080"/>
+            <a:ext cx="9418320" cy="13716"/>
+          </a:xfrm>
+          <a:prstGeom prst="rect">
+            <a:avLst/>
+          </a:prstGeom>
+          <a:solidFill>
+            <a:srgbClr val="E2E8F0"/>
+          </a:solidFill>
+          <a:ln>
+            <a:noFill/>
+          </a:ln>
+        </p:spPr>
+        <p:style>
+          <a:lnRef idx="1">
+            <a:schemeClr val="accent1"/>
+          </a:lnRef>
+          <a:fillRef idx="3">
+            <a:schemeClr val="accent1"/>
+          </a:fillRef>
+          <a:effectRef idx="2">
+            <a:schemeClr val="accent1"/>
+          </a:effectRef>
+          <a:fontRef idx="minor">
+            <a:schemeClr val="lt1"/>
+          </a:fontRef>
+        </p:style>
+        <p:txBody>
+          <a:bodyPr rtlCol="0" anchor="ctr"/>
+          <a:lstStyle/>
+          <a:p>
+            <a:pPr algn="ctr"/>
+          </a:p>
+        </p:txBody>
+      </p:sp>
+      <p:sp>
+        <p:nvSpPr>
+          <p:cNvPr id="8" name="Oval 7"/>
+          <p:cNvSpPr/>
+          <p:nvPr/>
+        </p:nvSpPr>
+        <p:spPr>
+          <a:xfrm>
+            <a:off x="1554480" y="2468880"/>
+            <a:ext cx="822960" cy="822960"/>
+          </a:xfrm>
+          <a:prstGeom prst="ellipse">
+            <a:avLst/>
+          </a:prstGeom>
+          <a:solidFill>
+            <a:srgbClr val="2563EB"/>
+          </a:solidFill>
+          <a:ln>
+            <a:noFill/>
+          </a:ln>
+        </p:spPr>
+        <p:style>
+          <a:lnRef idx="1">
+            <a:schemeClr val="accent1"/>
+          </a:lnRef>
+          <a:fillRef idx="3">
+            <a:schemeClr val="accent1"/>
+          </a:fillRef>
+          <a:effectRef idx="2">
+            <a:schemeClr val="accent1"/>
+          </a:effectRef>
+          <a:fontRef idx="minor">
+            <a:schemeClr val="lt1"/>
+          </a:fontRef>
+        </p:style>
+        <p:txBody>
+          <a:bodyPr rtlCol="0" anchor="ctr"/>
+          <a:lstStyle/>
+          <a:p>
+            <a:pPr algn="ctr">
+              <a:defRPr sz="1400" b="1">
+                <a:solidFill>
+                  <a:srgbClr val="FFFFFF"/>
+                </a:solidFill>
+                <a:latin typeface="Arial"/>
+              </a:defRPr>
+            </a:pPr>
+            <a:r>
+              <a:t>1</a:t>
+            </a:r>
+          </a:p>
+        </p:txBody>
+      </p:sp>
+      <p:sp>
+        <p:nvSpPr>
+          <p:cNvPr id="9" name="TextBox 8"/>
+          <p:cNvSpPr txBox="1"/>
+          <p:nvPr/>
+        </p:nvSpPr>
+        <p:spPr>
+          <a:xfrm>
+            <a:off x="548640" y="3474720"/>
+            <a:ext cx="2834640" cy="1828800"/>
+          </a:xfrm>
+          <a:prstGeom prst="rect">
+            <a:avLst/>
+          </a:prstGeom>
+          <a:noFill/>
+        </p:spPr>
+        <p:txBody>
+          <a:bodyPr wrap="square">
+            <a:spAutoFit/>
+          </a:bodyPr>
+          <a:lstStyle/>
+          <a:p>
+            <a:pPr algn="ctr">
+              <a:spcAft>
+                <a:spcPts val="1000"/>
+              </a:spcAft>
+              <a:defRPr sz="1500" b="1">
+                <a:solidFill>
+                  <a:srgbClr val="0F172A"/>
+                </a:solidFill>
+                <a:latin typeface="Malgun Gothic"/>
+              </a:defRPr>
+            </a:pPr>
+            <a:r>
+              <a:t>필수 항목 확인</a:t>
+            </a:r>
+          </a:p>
+          <a:p>
+            <a:pPr algn="ctr">
+              <a:defRPr sz="1100">
+                <a:solidFill>
+                  <a:srgbClr val="475569"/>
+                </a:solidFill>
+                <a:latin typeface="Malgun Gothic"/>
+              </a:defRPr>
+            </a:pPr>
+            <a:r>
+              <a:t>보안 체크, 루브릭 점수, 세부 의견 누락 유무 확인</a:t>
+            </a:r>
+          </a:p>
+        </p:txBody>
+      </p:sp>
+      <p:sp>
+        <p:nvSpPr>
+          <p:cNvPr id="10" name="Oval 9"/>
+          <p:cNvSpPr/>
+          <p:nvPr/>
+        </p:nvSpPr>
+        <p:spPr>
+          <a:xfrm>
+            <a:off x="4389120" y="2468880"/>
+            <a:ext cx="822960" cy="822960"/>
+          </a:xfrm>
+          <a:prstGeom prst="ellipse">
+            <a:avLst/>
+          </a:prstGeom>
+          <a:solidFill>
+            <a:srgbClr val="2563EB"/>
+          </a:solidFill>
+          <a:ln>
+            <a:noFill/>
+          </a:ln>
+        </p:spPr>
+        <p:style>
+          <a:lnRef idx="1">
+            <a:schemeClr val="accent1"/>
+          </a:lnRef>
+          <a:fillRef idx="3">
+            <a:schemeClr val="accent1"/>
+          </a:fillRef>
+          <a:effectRef idx="2">
+            <a:schemeClr val="accent1"/>
+          </a:effectRef>
+          <a:fontRef idx="minor">
+            <a:schemeClr val="lt1"/>
+          </a:fontRef>
+        </p:style>
+        <p:txBody>
+          <a:bodyPr rtlCol="0" anchor="ctr"/>
+          <a:lstStyle/>
+          <a:p>
+            <a:pPr algn="ctr">
+              <a:defRPr sz="1400" b="1">
+                <a:solidFill>
+                  <a:srgbClr val="FFFFFF"/>
+                </a:solidFill>
+                <a:latin typeface="Arial"/>
+              </a:defRPr>
+            </a:pPr>
+            <a:r>
+              <a:t>2</a:t>
+            </a:r>
+          </a:p>
+        </p:txBody>
+      </p:sp>
+      <p:sp>
+        <p:nvSpPr>
+          <p:cNvPr id="11" name="TextBox 10"/>
+          <p:cNvSpPr txBox="1"/>
+          <p:nvPr/>
+        </p:nvSpPr>
+        <p:spPr>
+          <a:xfrm>
+            <a:off x="3383280" y="3474720"/>
+            <a:ext cx="2834640" cy="1828800"/>
+          </a:xfrm>
+          <a:prstGeom prst="rect">
+            <a:avLst/>
+          </a:prstGeom>
+          <a:noFill/>
+        </p:spPr>
+        <p:txBody>
+          <a:bodyPr wrap="square">
+            <a:spAutoFit/>
+          </a:bodyPr>
+          <a:lstStyle/>
+          <a:p>
+            <a:pPr algn="ctr">
+              <a:spcAft>
+                <a:spcPts val="1000"/>
+              </a:spcAft>
+              <a:defRPr sz="1500" b="1">
+                <a:solidFill>
+                  <a:srgbClr val="0F172A"/>
+                </a:solidFill>
+                <a:latin typeface="Malgun Gothic"/>
+              </a:defRPr>
+            </a:pPr>
+            <a:r>
+              <a:t>타 위원 상태 확인</a:t>
+            </a:r>
+          </a:p>
+          <a:p>
+            <a:pPr algn="ctr">
+              <a:defRPr sz="1100">
+                <a:solidFill>
+                  <a:srgbClr val="475569"/>
+                </a:solidFill>
+                <a:latin typeface="Malgun Gothic"/>
+              </a:defRPr>
+            </a:pPr>
+            <a:r>
+              <a:t>타 위원의 점수 노출 없이 제출 상태만 확인하여 독립성 유지</a:t>
+            </a:r>
+          </a:p>
+        </p:txBody>
+      </p:sp>
+      <p:sp>
+        <p:nvSpPr>
+          <p:cNvPr id="12" name="Oval 11"/>
+          <p:cNvSpPr/>
+          <p:nvPr/>
+        </p:nvSpPr>
+        <p:spPr>
+          <a:xfrm>
+            <a:off x="7223760" y="2468880"/>
+            <a:ext cx="822960" cy="822960"/>
+          </a:xfrm>
+          <a:prstGeom prst="ellipse">
+            <a:avLst/>
+          </a:prstGeom>
+          <a:solidFill>
+            <a:srgbClr val="2563EB"/>
+          </a:solidFill>
+          <a:ln>
+            <a:noFill/>
+          </a:ln>
+        </p:spPr>
+        <p:style>
+          <a:lnRef idx="1">
+            <a:schemeClr val="accent1"/>
+          </a:lnRef>
+          <a:fillRef idx="3">
+            <a:schemeClr val="accent1"/>
+          </a:fillRef>
+          <a:effectRef idx="2">
+            <a:schemeClr val="accent1"/>
+          </a:effectRef>
+          <a:fontRef idx="minor">
+            <a:schemeClr val="lt1"/>
+          </a:fontRef>
+        </p:style>
+        <p:txBody>
+          <a:bodyPr rtlCol="0" anchor="ctr"/>
+          <a:lstStyle/>
+          <a:p>
+            <a:pPr algn="ctr">
+              <a:defRPr sz="1400" b="1">
+                <a:solidFill>
+                  <a:srgbClr val="FFFFFF"/>
+                </a:solidFill>
+                <a:latin typeface="Arial"/>
+              </a:defRPr>
+            </a:pPr>
+            <a:r>
+              <a:t>3</a:t>
+            </a:r>
+          </a:p>
+        </p:txBody>
+      </p:sp>
+      <p:sp>
+        <p:nvSpPr>
+          <p:cNvPr id="13" name="TextBox 12"/>
+          <p:cNvSpPr txBox="1"/>
+          <p:nvPr/>
+        </p:nvSpPr>
+        <p:spPr>
+          <a:xfrm>
+            <a:off x="6217920" y="3474720"/>
+            <a:ext cx="2834640" cy="1828800"/>
+          </a:xfrm>
+          <a:prstGeom prst="rect">
+            <a:avLst/>
+          </a:prstGeom>
+          <a:noFill/>
+        </p:spPr>
+        <p:txBody>
+          <a:bodyPr wrap="square">
+            <a:spAutoFit/>
+          </a:bodyPr>
+          <a:lstStyle/>
+          <a:p>
+            <a:pPr algn="ctr">
+              <a:spcAft>
+                <a:spcPts val="1000"/>
+              </a:spcAft>
+              <a:defRPr sz="1500" b="1">
+                <a:solidFill>
+                  <a:srgbClr val="0F172A"/>
+                </a:solidFill>
+                <a:latin typeface="Malgun Gothic"/>
+              </a:defRPr>
+            </a:pPr>
+            <a:r>
+              <a:t>평가 제출</a:t>
+            </a:r>
+          </a:p>
+          <a:p>
+            <a:pPr algn="ctr">
+              <a:defRPr sz="1100">
+                <a:solidFill>
+                  <a:srgbClr val="475569"/>
+                </a:solidFill>
+                <a:latin typeface="Malgun Gothic"/>
+              </a:defRPr>
+            </a:pPr>
+            <a:r>
+              <a:t>[평가 완료 및 제출] 버튼을 눌러 데이터베이스 기록</a:t>
+            </a:r>
+          </a:p>
+        </p:txBody>
+      </p:sp>
+      <p:sp>
+        <p:nvSpPr>
+          <p:cNvPr id="14" name="Oval 13"/>
+          <p:cNvSpPr/>
+          <p:nvPr/>
+        </p:nvSpPr>
+        <p:spPr>
+          <a:xfrm>
+            <a:off x="10058400" y="2468880"/>
+            <a:ext cx="822960" cy="822960"/>
+          </a:xfrm>
+          <a:prstGeom prst="ellipse">
+            <a:avLst/>
+          </a:prstGeom>
+          <a:solidFill>
+            <a:srgbClr val="2563EB"/>
+          </a:solidFill>
+          <a:ln>
+            <a:noFill/>
+          </a:ln>
+        </p:spPr>
+        <p:style>
+          <a:lnRef idx="1">
+            <a:schemeClr val="accent1"/>
+          </a:lnRef>
+          <a:fillRef idx="3">
+            <a:schemeClr val="accent1"/>
+          </a:fillRef>
+          <a:effectRef idx="2">
+            <a:schemeClr val="accent1"/>
+          </a:effectRef>
+          <a:fontRef idx="minor">
+            <a:schemeClr val="lt1"/>
+          </a:fontRef>
+        </p:style>
+        <p:txBody>
+          <a:bodyPr rtlCol="0" anchor="ctr"/>
+          <a:lstStyle/>
+          <a:p>
+            <a:pPr algn="ctr">
+              <a:defRPr sz="1400" b="1">
+                <a:solidFill>
+                  <a:srgbClr val="FFFFFF"/>
+                </a:solidFill>
+                <a:latin typeface="Arial"/>
+              </a:defRPr>
+            </a:pPr>
+            <a:r>
+              <a:t>4</a:t>
+            </a:r>
+          </a:p>
+        </p:txBody>
+      </p:sp>
+      <p:sp>
+        <p:nvSpPr>
+          <p:cNvPr id="15" name="TextBox 14"/>
+          <p:cNvSpPr txBox="1"/>
+          <p:nvPr/>
+        </p:nvSpPr>
+        <p:spPr>
+          <a:xfrm>
+            <a:off x="9052560" y="3474720"/>
+            <a:ext cx="2834640" cy="1828800"/>
+          </a:xfrm>
+          <a:prstGeom prst="rect">
+            <a:avLst/>
+          </a:prstGeom>
+          <a:noFill/>
+        </p:spPr>
+        <p:txBody>
+          <a:bodyPr wrap="square">
+            <a:spAutoFit/>
+          </a:bodyPr>
+          <a:lstStyle/>
+          <a:p>
+            <a:pPr algn="ctr">
+              <a:spcAft>
+                <a:spcPts val="1000"/>
+              </a:spcAft>
+              <a:defRPr sz="1500" b="1">
+                <a:solidFill>
+                  <a:srgbClr val="0F172A"/>
+                </a:solidFill>
+                <a:latin typeface="Malgun Gothic"/>
+              </a:defRPr>
+            </a:pPr>
+            <a:r>
+              <a:t>완료 상태 확인</a:t>
+            </a:r>
+          </a:p>
+          <a:p>
+            <a:pPr algn="ctr">
+              <a:defRPr sz="1100">
+                <a:solidFill>
+                  <a:srgbClr val="475569"/>
+                </a:solidFill>
+                <a:latin typeface="Malgun Gothic"/>
+              </a:defRPr>
+            </a:pPr>
+            <a:r>
+              <a:t>개인 대기 큐에서 해당 지원자의 내 심사 상태가 [완료]인지 검증</a:t>
+            </a:r>
+          </a:p>
+        </p:txBody>
+      </p:sp>
+      <p:sp>
+        <p:nvSpPr>
+          <p:cNvPr id="16" name="Rectangle 15"/>
+          <p:cNvSpPr/>
+          <p:nvPr/>
+        </p:nvSpPr>
+        <p:spPr>
+          <a:xfrm>
+            <a:off x="548640" y="5303520"/>
+            <a:ext cx="11094415" cy="548640"/>
+          </a:xfrm>
+          <a:prstGeom prst="rect">
+            <a:avLst/>
+          </a:prstGeom>
+          <a:solidFill>
+            <a:srgbClr val="EFF6FF"/>
+          </a:solidFill>
+          <a:ln>
+            <a:solidFill>
+              <a:srgbClr val="E2E8F0"/>
+            </a:solidFill>
+          </a:ln>
+        </p:spPr>
+        <p:style>
+          <a:lnRef idx="1">
+            <a:schemeClr val="accent1"/>
+          </a:lnRef>
+          <a:fillRef idx="3">
+            <a:schemeClr val="accent1"/>
+          </a:fillRef>
+          <a:effectRef idx="2">
+            <a:schemeClr val="accent1"/>
+          </a:effectRef>
+          <a:fontRef idx="minor">
+            <a:schemeClr val="lt1"/>
+          </a:fontRef>
+        </p:style>
+        <p:txBody>
+          <a:bodyPr rtlCol="0" anchor="ctr" wrap="square"/>
+          <a:lstStyle/>
+          <a:p>
+            <a:pPr algn="ctr">
+              <a:defRPr sz="1100" b="1">
+                <a:solidFill>
+                  <a:srgbClr val="0F172A"/>
+                </a:solidFill>
+                <a:latin typeface="Malgun Gothic"/>
+              </a:defRPr>
+            </a:pPr>
+            <a:r>
+              <a:t>💡 안내: 수정이 필요하면 [심사하기/수정]으로 재진입해 수정할 수 있습니다. 최종 종합 판정은 패널 3인의 제출이 모두 끝나야 실시간 집계됩니다.</a:t>
+            </a:r>
+          </a:p>
+        </p:txBody>
+      </p:sp>
+    </p:spTree>
+  </p:cSld>
+  <p:clrMapOvr>
+    <a:masterClrMapping/>
+  </p:clrMapOvr>
+</p:sld>
+</file>
+
+<file path=ppt/slides/slide16.xml><?xml version="1.0" encoding="utf-8"?>
+<p:sld xmlns:a="http://schemas.openxmlformats.org/drawingml/2006/main" xmlns:p="http://schemas.openxmlformats.org/presentationml/2006/main" xmlns:r="http://schemas.openxmlformats.org/officeDocument/2006/relationships">
+  <p:cSld>
+    <p:bg>
+      <p:bgPr>
+        <a:solidFill>
+          <a:srgbClr val="FFFFFF"/>
+        </a:solidFill>
+        <a:effectLst/>
+      </p:bgPr>
+    </p:bg>
+    <p:spTree>
+      <p:nvGrpSpPr>
+        <p:cNvPr id="1" name=""/>
+        <p:cNvGrpSpPr/>
+        <p:nvPr/>
+      </p:nvGrpSpPr>
+      <p:grpSpPr/>
+      <p:sp>
+        <p:nvSpPr>
+          <p:cNvPr id="2" name="TextBox 1"/>
+          <p:cNvSpPr txBox="1"/>
+          <p:nvPr/>
+        </p:nvSpPr>
+        <p:spPr>
+          <a:xfrm>
+            <a:off x="548640" y="365760"/>
+            <a:ext cx="7315200" cy="365760"/>
+          </a:xfrm>
+          <a:prstGeom prst="rect">
+            <a:avLst/>
+          </a:prstGeom>
+          <a:noFill/>
+        </p:spPr>
+        <p:txBody>
+          <a:bodyPr wrap="none">
+            <a:spAutoFit/>
+          </a:bodyPr>
+          <a:lstStyle/>
+          <a:p>
+            <a:pPr>
+              <a:defRPr sz="1100" b="1">
+                <a:solidFill>
+                  <a:srgbClr val="2563EB"/>
+                </a:solidFill>
+                <a:latin typeface="Malgun Gothic"/>
+              </a:defRPr>
+            </a:pPr>
+            <a:r>
+              <a:t>공통</a:t>
+            </a:r>
+          </a:p>
+        </p:txBody>
+      </p:sp>
+      <p:sp>
+        <p:nvSpPr>
+          <p:cNvPr id="3" name="TextBox 2"/>
+          <p:cNvSpPr txBox="1"/>
+          <p:nvPr/>
+        </p:nvSpPr>
+        <p:spPr>
+          <a:xfrm>
+            <a:off x="548640" y="640080"/>
+            <a:ext cx="10058400" cy="731520"/>
+          </a:xfrm>
+          <a:prstGeom prst="rect">
+            <a:avLst/>
+          </a:prstGeom>
+          <a:noFill/>
+        </p:spPr>
+        <p:txBody>
+          <a:bodyPr wrap="none">
+            <a:spAutoFit/>
+          </a:bodyPr>
+          <a:lstStyle/>
+          <a:p>
+            <a:pPr>
+              <a:defRPr sz="2600" b="1">
+                <a:solidFill>
+                  <a:srgbClr val="0F172A"/>
+                </a:solidFill>
+                <a:latin typeface="Malgun Gothic"/>
+              </a:defRPr>
+            </a:pPr>
+            <a:r>
+              <a:t>문제가 생기면 상태·권한·필수값부터 확인하세요</a:t>
+            </a:r>
+          </a:p>
+        </p:txBody>
+      </p:sp>
+      <p:sp>
+        <p:nvSpPr>
+          <p:cNvPr id="4" name="Rectangle 3"/>
+          <p:cNvSpPr/>
+          <p:nvPr/>
+        </p:nvSpPr>
+        <p:spPr>
+          <a:xfrm>
+            <a:off x="548640" y="1371600"/>
+            <a:ext cx="11094415" cy="13716"/>
+          </a:xfrm>
+          <a:prstGeom prst="rect">
+            <a:avLst/>
+          </a:prstGeom>
+          <a:solidFill>
+            <a:srgbClr val="E2E8F0"/>
+          </a:solidFill>
+          <a:ln>
+            <a:noFill/>
+          </a:ln>
+        </p:spPr>
+        <p:style>
+          <a:lnRef idx="1">
+            <a:schemeClr val="accent1"/>
+          </a:lnRef>
+          <a:fillRef idx="3">
+            <a:schemeClr val="accent1"/>
+          </a:fillRef>
+          <a:effectRef idx="2">
+            <a:schemeClr val="accent1"/>
+          </a:effectRef>
+          <a:fontRef idx="minor">
+            <a:schemeClr val="lt1"/>
+          </a:fontRef>
+        </p:style>
+        <p:txBody>
+          <a:bodyPr rtlCol="0" anchor="ctr"/>
+          <a:lstStyle/>
+          <a:p>
+            <a:pPr algn="ctr"/>
+          </a:p>
+        </p:txBody>
+      </p:sp>
+      <p:sp>
+        <p:nvSpPr>
+          <p:cNvPr id="5" name="TextBox 4"/>
+          <p:cNvSpPr txBox="1"/>
+          <p:nvPr/>
+        </p:nvSpPr>
+        <p:spPr>
+          <a:xfrm>
+            <a:off x="548640" y="6309360"/>
+            <a:ext cx="9144000" cy="365760"/>
+          </a:xfrm>
+          <a:prstGeom prst="rect">
+            <a:avLst/>
+          </a:prstGeom>
+          <a:noFill/>
+        </p:spPr>
+        <p:txBody>
+          <a:bodyPr wrap="none">
+            <a:spAutoFit/>
+          </a:bodyPr>
+          <a:lstStyle/>
+          <a:p>
+            <a:pPr>
+              <a:defRPr sz="900">
+                <a:solidFill>
+                  <a:srgbClr val="64748B"/>
+                </a:solidFill>
+                <a:latin typeface="Malgun Gothic"/>
+              </a:defRPr>
+            </a:pPr>
+            <a:r>
+              <a:t>AICA 자격심사 시스템 사용자 매뉴얼 · 2026.07</a:t>
+            </a:r>
+          </a:p>
+        </p:txBody>
+      </p:sp>
+      <p:sp>
+        <p:nvSpPr>
+          <p:cNvPr id="6" name="TextBox 5"/>
+          <p:cNvSpPr txBox="1"/>
+          <p:nvPr/>
+        </p:nvSpPr>
+        <p:spPr>
+          <a:xfrm>
+            <a:off x="10820095" y="6309360"/>
+            <a:ext cx="822960" cy="365760"/>
+          </a:xfrm>
+          <a:prstGeom prst="rect">
+            <a:avLst/>
+          </a:prstGeom>
+          <a:noFill/>
+        </p:spPr>
+        <p:txBody>
+          <a:bodyPr wrap="none">
+            <a:spAutoFit/>
+          </a:bodyPr>
+          <a:lstStyle/>
+          <a:p>
+            <a:pPr algn="r">
+              <a:defRPr sz="900">
+                <a:solidFill>
+                  <a:srgbClr val="64748B"/>
+                </a:solidFill>
+                <a:latin typeface="Malgun Gothic"/>
+              </a:defRPr>
+            </a:pPr>
+            <a:r>
+              <a:t>16</a:t>
+            </a:r>
+          </a:p>
+        </p:txBody>
+      </p:sp>
+      <p:sp>
+        <p:nvSpPr>
+          <p:cNvPr id="7" name="Rectangle 6"/>
+          <p:cNvSpPr/>
+          <p:nvPr/>
+        </p:nvSpPr>
+        <p:spPr>
+          <a:xfrm>
+            <a:off x="548640" y="1645920"/>
+            <a:ext cx="2011680" cy="822960"/>
+          </a:xfrm>
+          <a:prstGeom prst="rect">
+            <a:avLst/>
+          </a:prstGeom>
+          <a:solidFill>
+            <a:srgbClr val="EF4444"/>
+          </a:solidFill>
+          <a:ln>
+            <a:noFill/>
+          </a:ln>
+        </p:spPr>
+        <p:style>
+          <a:lnRef idx="1">
+            <a:schemeClr val="accent1"/>
+          </a:lnRef>
+          <a:fillRef idx="3">
+            <a:schemeClr val="accent1"/>
+          </a:fillRef>
+          <a:effectRef idx="2">
+            <a:schemeClr val="accent1"/>
+          </a:effectRef>
+          <a:fontRef idx="minor">
+            <a:schemeClr val="lt1"/>
+          </a:fontRef>
+        </p:style>
+        <p:txBody>
+          <a:bodyPr rtlCol="0" anchor="ctr" wrap="square"/>
+          <a:lstStyle/>
+          <a:p>
+            <a:pPr algn="ctr">
+              <a:defRPr sz="1300" b="1">
+                <a:solidFill>
+                  <a:srgbClr val="FFFFFF"/>
+                </a:solidFill>
+                <a:latin typeface="Malgun Gothic"/>
+              </a:defRPr>
+            </a:pPr>
+            <a:r>
+              <a:t>로그인 실패</a:t>
+            </a:r>
+          </a:p>
+        </p:txBody>
+      </p:sp>
+      <p:sp>
+        <p:nvSpPr>
+          <p:cNvPr id="8" name="Rectangle 7"/>
+          <p:cNvSpPr/>
+          <p:nvPr/>
+        </p:nvSpPr>
+        <p:spPr>
+          <a:xfrm>
+            <a:off x="2651760" y="1645920"/>
+            <a:ext cx="8991295" cy="822960"/>
+          </a:xfrm>
+          <a:prstGeom prst="rect">
+            <a:avLst/>
+          </a:prstGeom>
+          <a:solidFill>
+            <a:srgbClr val="F8FAFC"/>
+          </a:solidFill>
+          <a:ln>
+            <a:solidFill>
+              <a:srgbClr val="E2E8F0"/>
+            </a:solidFill>
+          </a:ln>
+        </p:spPr>
+        <p:style>
+          <a:lnRef idx="1">
+            <a:schemeClr val="accent1"/>
+          </a:lnRef>
+          <a:fillRef idx="3">
+            <a:schemeClr val="accent1"/>
+          </a:fillRef>
+          <a:effectRef idx="2">
+            <a:schemeClr val="accent1"/>
+          </a:effectRef>
+          <a:fontRef idx="minor">
+            <a:schemeClr val="lt1"/>
+          </a:fontRef>
+        </p:style>
+        <p:txBody>
+          <a:bodyPr rtlCol="0" anchor="ctr" wrap="square"/>
+          <a:lstStyle/>
+          <a:p>
+            <a:pPr algn="ctr">
+              <a:defRPr sz="1150">
+                <a:solidFill>
+                  <a:srgbClr val="475569"/>
+                </a:solidFill>
+                <a:latin typeface="Malgun Gothic"/>
+              </a:defRPr>
+            </a:pPr>
+            <a:r>
+              <a:t> 등록된 사용자 성명과 사내 이메일 주소가 정확한지 대조해 보세요. (대소문자 및 띄어쓰기 유의)</a:t>
+            </a:r>
+          </a:p>
+        </p:txBody>
+      </p:sp>
+      <p:sp>
+        <p:nvSpPr>
+          <p:cNvPr id="9" name="Rectangle 8"/>
+          <p:cNvSpPr/>
+          <p:nvPr/>
+        </p:nvSpPr>
+        <p:spPr>
+          <a:xfrm>
+            <a:off x="548640" y="2651760"/>
+            <a:ext cx="2011680" cy="822960"/>
+          </a:xfrm>
+          <a:prstGeom prst="rect">
+            <a:avLst/>
+          </a:prstGeom>
+          <a:solidFill>
+            <a:srgbClr val="0F172A"/>
+          </a:solidFill>
+          <a:ln>
+            <a:noFill/>
+          </a:ln>
+        </p:spPr>
+        <p:style>
+          <a:lnRef idx="1">
+            <a:schemeClr val="accent1"/>
+          </a:lnRef>
+          <a:fillRef idx="3">
+            <a:schemeClr val="accent1"/>
+          </a:fillRef>
+          <a:effectRef idx="2">
+            <a:schemeClr val="accent1"/>
+          </a:effectRef>
+          <a:fontRef idx="minor">
+            <a:schemeClr val="lt1"/>
+          </a:fontRef>
+        </p:style>
+        <p:txBody>
+          <a:bodyPr rtlCol="0" anchor="ctr" wrap="square"/>
+          <a:lstStyle/>
+          <a:p>
+            <a:pPr algn="ctr">
+              <a:defRPr sz="1300" b="1">
+                <a:solidFill>
+                  <a:srgbClr val="FFFFFF"/>
+                </a:solidFill>
+                <a:latin typeface="Malgun Gothic"/>
+              </a:defRPr>
+            </a:pPr>
+            <a:r>
+              <a:t>과제 등록 불가</a:t>
+            </a:r>
+          </a:p>
+        </p:txBody>
+      </p:sp>
+      <p:sp>
+        <p:nvSpPr>
+          <p:cNvPr id="10" name="Rectangle 9"/>
+          <p:cNvSpPr/>
+          <p:nvPr/>
+        </p:nvSpPr>
+        <p:spPr>
+          <a:xfrm>
+            <a:off x="2651760" y="2651760"/>
+            <a:ext cx="8991295" cy="822960"/>
+          </a:xfrm>
+          <a:prstGeom prst="rect">
+            <a:avLst/>
+          </a:prstGeom>
+          <a:solidFill>
+            <a:srgbClr val="F8FAFC"/>
+          </a:solidFill>
+          <a:ln>
+            <a:solidFill>
+              <a:srgbClr val="E2E8F0"/>
+            </a:solidFill>
+          </a:ln>
+        </p:spPr>
+        <p:style>
+          <a:lnRef idx="1">
+            <a:schemeClr val="accent1"/>
+          </a:lnRef>
+          <a:fillRef idx="3">
+            <a:schemeClr val="accent1"/>
+          </a:fillRef>
+          <a:effectRef idx="2">
+            <a:schemeClr val="accent1"/>
+          </a:effectRef>
+          <a:fontRef idx="minor">
+            <a:schemeClr val="lt1"/>
+          </a:fontRef>
+        </p:style>
+        <p:txBody>
+          <a:bodyPr rtlCol="0" anchor="ctr" wrap="square"/>
+          <a:lstStyle/>
+          <a:p>
+            <a:pPr algn="ctr">
+              <a:defRPr sz="1150">
+                <a:solidFill>
+                  <a:srgbClr val="475569"/>
+                </a:solidFill>
+                <a:latin typeface="Malgun Gothic"/>
+              </a:defRPr>
+            </a:pPr>
+            <a:r>
+              <a:t> 필수 항목(성명, 이메일, 과제설명 등) 누락 여부 및 심사위원 3인 배정 유무를 확인하세요.</a:t>
+            </a:r>
+          </a:p>
+        </p:txBody>
+      </p:sp>
+      <p:sp>
+        <p:nvSpPr>
+          <p:cNvPr id="11" name="Rectangle 10"/>
+          <p:cNvSpPr/>
+          <p:nvPr/>
+        </p:nvSpPr>
+        <p:spPr>
+          <a:xfrm>
+            <a:off x="548640" y="3657600"/>
+            <a:ext cx="2011680" cy="822960"/>
+          </a:xfrm>
+          <a:prstGeom prst="rect">
+            <a:avLst/>
+          </a:prstGeom>
+          <a:solidFill>
+            <a:srgbClr val="2563EB"/>
+          </a:solidFill>
+          <a:ln>
+            <a:noFill/>
+          </a:ln>
+        </p:spPr>
+        <p:style>
+          <a:lnRef idx="1">
+            <a:schemeClr val="accent1"/>
+          </a:lnRef>
+          <a:fillRef idx="3">
+            <a:schemeClr val="accent1"/>
+          </a:fillRef>
+          <a:effectRef idx="2">
+            <a:schemeClr val="accent1"/>
+          </a:effectRef>
+          <a:fontRef idx="minor">
+            <a:schemeClr val="lt1"/>
+          </a:fontRef>
+        </p:style>
+        <p:txBody>
+          <a:bodyPr rtlCol="0" anchor="ctr" wrap="square"/>
+          <a:lstStyle/>
+          <a:p>
+            <a:pPr algn="ctr">
+              <a:defRPr sz="1300" b="1">
+                <a:solidFill>
+                  <a:srgbClr val="FFFFFF"/>
+                </a:solidFill>
+                <a:latin typeface="Malgun Gothic"/>
+              </a:defRPr>
+            </a:pPr>
+            <a:r>
+              <a:t>점수·판정 미표시</a:t>
+            </a:r>
+          </a:p>
+        </p:txBody>
+      </p:sp>
+      <p:sp>
+        <p:nvSpPr>
+          <p:cNvPr id="12" name="Rectangle 11"/>
+          <p:cNvSpPr/>
+          <p:nvPr/>
+        </p:nvSpPr>
+        <p:spPr>
+          <a:xfrm>
+            <a:off x="2651760" y="3657600"/>
+            <a:ext cx="8991295" cy="822960"/>
+          </a:xfrm>
+          <a:prstGeom prst="rect">
+            <a:avLst/>
+          </a:prstGeom>
+          <a:solidFill>
+            <a:srgbClr val="F8FAFC"/>
+          </a:solidFill>
+          <a:ln>
+            <a:solidFill>
+              <a:srgbClr val="E2E8F0"/>
+            </a:solidFill>
+          </a:ln>
+        </p:spPr>
+        <p:style>
+          <a:lnRef idx="1">
+            <a:schemeClr val="accent1"/>
+          </a:lnRef>
+          <a:fillRef idx="3">
+            <a:schemeClr val="accent1"/>
+          </a:fillRef>
+          <a:effectRef idx="2">
+            <a:schemeClr val="accent1"/>
+          </a:effectRef>
+          <a:fontRef idx="minor">
+            <a:schemeClr val="lt1"/>
+          </a:fontRef>
+        </p:style>
+        <p:txBody>
+          <a:bodyPr rtlCol="0" anchor="ctr" wrap="square"/>
+          <a:lstStyle/>
+          <a:p>
+            <a:pPr algn="ctr">
+              <a:defRPr sz="1150">
+                <a:solidFill>
+                  <a:srgbClr val="475569"/>
+                </a:solidFill>
+                <a:latin typeface="Malgun Gothic"/>
+              </a:defRPr>
+            </a:pPr>
+            <a:r>
+              <a:t> 배정된 3인 패널 심사위원(현업, 기술, 보안) 전원이 최종 제출을 마쳤는지 확인하세요.</a:t>
+            </a:r>
+          </a:p>
+        </p:txBody>
+      </p:sp>
+      <p:sp>
+        <p:nvSpPr>
+          <p:cNvPr id="13" name="Rectangle 12"/>
+          <p:cNvSpPr/>
+          <p:nvPr/>
+        </p:nvSpPr>
+        <p:spPr>
+          <a:xfrm>
+            <a:off x="548640" y="4663440"/>
+            <a:ext cx="2011680" cy="822960"/>
+          </a:xfrm>
+          <a:prstGeom prst="rect">
+            <a:avLst/>
+          </a:prstGeom>
+          <a:solidFill>
+            <a:srgbClr val="64748B"/>
+          </a:solidFill>
+          <a:ln>
+            <a:noFill/>
+          </a:ln>
+        </p:spPr>
+        <p:style>
+          <a:lnRef idx="1">
+            <a:schemeClr val="accent1"/>
+          </a:lnRef>
+          <a:fillRef idx="3">
+            <a:schemeClr val="accent1"/>
+          </a:fillRef>
+          <a:effectRef idx="2">
+            <a:schemeClr val="accent1"/>
+          </a:effectRef>
+          <a:fontRef idx="minor">
+            <a:schemeClr val="lt1"/>
+          </a:fontRef>
+        </p:style>
+        <p:txBody>
+          <a:bodyPr rtlCol="0" anchor="ctr" wrap="square"/>
+          <a:lstStyle/>
+          <a:p>
+            <a:pPr algn="ctr">
+              <a:defRPr sz="1300" b="1">
+                <a:solidFill>
+                  <a:srgbClr val="FFFFFF"/>
+                </a:solidFill>
+                <a:latin typeface="Malgun Gothic"/>
+              </a:defRPr>
+            </a:pPr>
+            <a:r>
+              <a:t>자료 링크 오류</a:t>
+            </a:r>
+          </a:p>
+        </p:txBody>
+      </p:sp>
+      <p:sp>
+        <p:nvSpPr>
+          <p:cNvPr id="14" name="Rectangle 13"/>
+          <p:cNvSpPr/>
+          <p:nvPr/>
+        </p:nvSpPr>
+        <p:spPr>
+          <a:xfrm>
+            <a:off x="2651760" y="4663440"/>
+            <a:ext cx="8991295" cy="822960"/>
+          </a:xfrm>
+          <a:prstGeom prst="rect">
+            <a:avLst/>
+          </a:prstGeom>
+          <a:solidFill>
+            <a:srgbClr val="F8FAFC"/>
+          </a:solidFill>
+          <a:ln>
+            <a:solidFill>
+              <a:srgbClr val="E2E8F0"/>
+            </a:solidFill>
+          </a:ln>
+        </p:spPr>
+        <p:style>
+          <a:lnRef idx="1">
+            <a:schemeClr val="accent1"/>
+          </a:lnRef>
+          <a:fillRef idx="3">
+            <a:schemeClr val="accent1"/>
+          </a:fillRef>
+          <a:effectRef idx="2">
+            <a:schemeClr val="accent1"/>
+          </a:effectRef>
+          <a:fontRef idx="minor">
+            <a:schemeClr val="lt1"/>
+          </a:fontRef>
+        </p:style>
+        <p:txBody>
+          <a:bodyPr rtlCol="0" anchor="ctr" wrap="square"/>
+          <a:lstStyle/>
+          <a:p>
+            <a:pPr algn="ctr">
+              <a:defRPr sz="1150">
+                <a:solidFill>
+                  <a:srgbClr val="475569"/>
+                </a:solidFill>
+                <a:latin typeface="Malgun Gothic"/>
+              </a:defRPr>
+            </a:pPr>
+            <a:r>
+              <a:t> 사내 보안 인트라넷 링크의 접근 권한 허용 여부 및 URL 정상 동작 여부를 사전에 검토하세요.</a:t>
+            </a:r>
+          </a:p>
+        </p:txBody>
+      </p:sp>
+      <p:sp>
+        <p:nvSpPr>
+          <p:cNvPr id="15" name="TextBox 14"/>
+          <p:cNvSpPr txBox="1"/>
+          <p:nvPr/>
+        </p:nvSpPr>
+        <p:spPr>
+          <a:xfrm>
+            <a:off x="548640" y="5852160"/>
+            <a:ext cx="10972800" cy="457200"/>
+          </a:xfrm>
+          <a:prstGeom prst="rect">
+            <a:avLst/>
+          </a:prstGeom>
+          <a:noFill/>
+        </p:spPr>
+        <p:txBody>
+          <a:bodyPr wrap="none">
+            <a:spAutoFit/>
+          </a:bodyPr>
+          <a:lstStyle/>
+          <a:p>
+            <a:pPr>
+              <a:defRPr sz="1200" b="1">
+                <a:solidFill>
+                  <a:srgbClr val="2563EB"/>
+                </a:solidFill>
+                <a:latin typeface="Malgun Gothic"/>
+              </a:defRPr>
+            </a:pPr>
+            <a:r>
+              <a:t>완료 전 4가지 확인 사항:  정확한 정보  ·  이해상충 없는 패널  ·  근거 있는 평가  ·  보안 결격 점검</a:t>
             </a:r>
           </a:p>
         </p:txBody>
@@ -3231,7 +7593,7 @@
     <p:bg>
       <p:bgPr>
         <a:solidFill>
-          <a:srgbClr val="0F172A"/>
+          <a:srgbClr val="FFFFFF"/>
         </a:solidFill>
         <a:effectLst/>
       </p:bgPr>
@@ -3260,7 +7622,7 @@
           <a:noFill/>
         </p:spPr>
         <p:txBody>
-          <a:bodyPr wrap="square">
+          <a:bodyPr wrap="none">
             <a:spAutoFit/>
           </a:bodyPr>
           <a:lstStyle/>
@@ -3268,13 +7630,13 @@
             <a:pPr>
               <a:defRPr sz="1100" b="1">
                 <a:solidFill>
-                  <a:srgbClr val="6366F1"/>
-                </a:solidFill>
-                <a:latin typeface="Malgun Gothic"/>
-              </a:defRPr>
-            </a:pPr>
-            <a:r>
-              <a:t>AICA SYSTEM MANUAL</a:t>
+                  <a:srgbClr val="2563EB"/>
+                </a:solidFill>
+                <a:latin typeface="Malgun Gothic"/>
+              </a:defRPr>
+            </a:pPr>
+            <a:r>
+              <a:t>공통</a:t>
             </a:r>
           </a:p>
         </p:txBody>
@@ -3288,7 +7650,7 @@
         <p:spPr>
           <a:xfrm>
             <a:off x="548640" y="640080"/>
-            <a:ext cx="9144000" cy="731520"/>
+            <a:ext cx="10058400" cy="731520"/>
           </a:xfrm>
           <a:prstGeom prst="rect">
             <a:avLst/>
@@ -3296,21 +7658,21 @@
           <a:noFill/>
         </p:spPr>
         <p:txBody>
-          <a:bodyPr wrap="square">
+          <a:bodyPr wrap="none">
             <a:spAutoFit/>
           </a:bodyPr>
           <a:lstStyle/>
           <a:p>
             <a:pPr>
-              <a:defRPr sz="2800" b="1">
-                <a:solidFill>
-                  <a:srgbClr val="FFFFFF"/>
-                </a:solidFill>
-                <a:latin typeface="Malgun Gothic"/>
-              </a:defRPr>
-            </a:pPr>
-            <a:r>
-              <a:t>1. AICA 자격심사 시스템 소개</a:t>
+              <a:defRPr sz="2600" b="1">
+                <a:solidFill>
+                  <a:srgbClr val="0F172A"/>
+                </a:solidFill>
+                <a:latin typeface="Malgun Gothic"/>
+              </a:defRPr>
+            </a:pPr>
+            <a:r>
+              <a:t>두 역할이 이어져야 한 건의 심사가 완료됩니다</a:t>
             </a:r>
           </a:p>
         </p:txBody>
@@ -3324,18 +7686,16 @@
         <p:spPr>
           <a:xfrm>
             <a:off x="548640" y="1371600"/>
-            <a:ext cx="11094415" cy="27432"/>
+            <a:ext cx="11094415" cy="13716"/>
           </a:xfrm>
           <a:prstGeom prst="rect">
             <a:avLst/>
           </a:prstGeom>
           <a:solidFill>
-            <a:srgbClr val="1E293B"/>
+            <a:srgbClr val="E2E8F0"/>
           </a:solidFill>
           <a:ln>
-            <a:solidFill>
-              <a:srgbClr val="1E293B"/>
-            </a:solidFill>
+            <a:noFill/>
           </a:ln>
         </p:spPr>
         <p:style>
@@ -3362,25 +7722,131 @@
       </p:sp>
       <p:sp>
         <p:nvSpPr>
-          <p:cNvPr id="5" name="Rounded Rectangle 4"/>
+          <p:cNvPr id="5" name="TextBox 4"/>
+          <p:cNvSpPr txBox="1"/>
+          <p:nvPr/>
+        </p:nvSpPr>
+        <p:spPr>
+          <a:xfrm>
+            <a:off x="548640" y="6309360"/>
+            <a:ext cx="9144000" cy="365760"/>
+          </a:xfrm>
+          <a:prstGeom prst="rect">
+            <a:avLst/>
+          </a:prstGeom>
+          <a:noFill/>
+        </p:spPr>
+        <p:txBody>
+          <a:bodyPr wrap="none">
+            <a:spAutoFit/>
+          </a:bodyPr>
+          <a:lstStyle/>
+          <a:p>
+            <a:pPr>
+              <a:defRPr sz="900">
+                <a:solidFill>
+                  <a:srgbClr val="64748B"/>
+                </a:solidFill>
+                <a:latin typeface="Malgun Gothic"/>
+              </a:defRPr>
+            </a:pPr>
+            <a:r>
+              <a:t>AICA 자격심사 시스템 사용자 매뉴얼 · 2026.07</a:t>
+            </a:r>
+          </a:p>
+        </p:txBody>
+      </p:sp>
+      <p:sp>
+        <p:nvSpPr>
+          <p:cNvPr id="6" name="TextBox 5"/>
+          <p:cNvSpPr txBox="1"/>
+          <p:nvPr/>
+        </p:nvSpPr>
+        <p:spPr>
+          <a:xfrm>
+            <a:off x="10820095" y="6309360"/>
+            <a:ext cx="822960" cy="365760"/>
+          </a:xfrm>
+          <a:prstGeom prst="rect">
+            <a:avLst/>
+          </a:prstGeom>
+          <a:noFill/>
+        </p:spPr>
+        <p:txBody>
+          <a:bodyPr wrap="none">
+            <a:spAutoFit/>
+          </a:bodyPr>
+          <a:lstStyle/>
+          <a:p>
+            <a:pPr algn="r">
+              <a:defRPr sz="900">
+                <a:solidFill>
+                  <a:srgbClr val="64748B"/>
+                </a:solidFill>
+                <a:latin typeface="Malgun Gothic"/>
+              </a:defRPr>
+            </a:pPr>
+            <a:r>
+              <a:t>02</a:t>
+            </a:r>
+          </a:p>
+        </p:txBody>
+      </p:sp>
+      <p:sp>
+        <p:nvSpPr>
+          <p:cNvPr id="7" name="TextBox 6"/>
+          <p:cNvSpPr txBox="1"/>
+          <p:nvPr/>
+        </p:nvSpPr>
+        <p:spPr>
+          <a:xfrm>
+            <a:off x="548640" y="1645920"/>
+            <a:ext cx="10972800" cy="457200"/>
+          </a:xfrm>
+          <a:prstGeom prst="rect">
+            <a:avLst/>
+          </a:prstGeom>
+          <a:noFill/>
+        </p:spPr>
+        <p:txBody>
+          <a:bodyPr wrap="none">
+            <a:spAutoFit/>
+          </a:bodyPr>
+          <a:lstStyle/>
+          <a:p>
+            <a:pPr>
+              <a:defRPr sz="1300">
+                <a:solidFill>
+                  <a:srgbClr val="475569"/>
+                </a:solidFill>
+                <a:latin typeface="Malgun Gothic"/>
+              </a:defRPr>
+            </a:pPr>
+            <a:r>
+              <a:t>운영간사는 정확한 등록과 배정을, 심사위원은 독립적인 검토와 제출을 책임집니다.</a:t>
+            </a:r>
+          </a:p>
+        </p:txBody>
+      </p:sp>
+      <p:sp>
+        <p:nvSpPr>
+          <p:cNvPr id="8" name="Rectangle 7"/>
           <p:cNvSpPr/>
           <p:nvPr/>
         </p:nvSpPr>
         <p:spPr>
           <a:xfrm>
-            <a:off x="548640" y="1828800"/>
-            <a:ext cx="5486400" cy="4114800"/>
-          </a:xfrm>
-          <a:prstGeom prst="roundRect">
+            <a:off x="1371600" y="3200400"/>
+            <a:ext cx="9418320" cy="13716"/>
+          </a:xfrm>
+          <a:prstGeom prst="rect">
             <a:avLst/>
           </a:prstGeom>
           <a:solidFill>
-            <a:srgbClr val="1E293B"/>
+            <a:srgbClr val="E2E8F0"/>
           </a:solidFill>
-          <a:ln w="19050">
-            <a:solidFill>
-              <a:srgbClr val="6366F1"/>
-            </a:solidFill>
+          <a:ln>
+            <a:noFill/>
           </a:ln>
         </p:spPr>
         <p:style>
@@ -3407,144 +7873,23 @@
       </p:sp>
       <p:sp>
         <p:nvSpPr>
-          <p:cNvPr id="6" name="TextBox 5"/>
-          <p:cNvSpPr txBox="1"/>
-          <p:nvPr/>
-        </p:nvSpPr>
-        <p:spPr>
-          <a:xfrm>
-            <a:off x="685800" y="1965960"/>
-            <a:ext cx="5212080" cy="3840480"/>
-          </a:xfrm>
-          <a:prstGeom prst="rect">
-            <a:avLst/>
-          </a:prstGeom>
-          <a:noFill/>
-        </p:spPr>
-        <p:txBody>
-          <a:bodyPr wrap="square">
-            <a:spAutoFit/>
-          </a:bodyPr>
-          <a:lstStyle/>
-          <a:p>
-            <a:pPr>
-              <a:spcAft>
-                <a:spcPts val="1000"/>
-              </a:spcAft>
-              <a:defRPr sz="1500" b="1">
-                <a:solidFill>
-                  <a:srgbClr val="6366F1"/>
-                </a:solidFill>
-                <a:latin typeface="Malgun Gothic"/>
-              </a:defRPr>
-            </a:pPr>
-            <a:r>
-              <a:t>실시간 클라우드 평가 환경</a:t>
-            </a:r>
-          </a:p>
-          <a:p>
-            <a:pPr>
-              <a:spcAft>
-                <a:spcPts val="600"/>
-              </a:spcAft>
-              <a:defRPr sz="1200">
-                <a:solidFill>
-                  <a:srgbClr val="94A3B8"/>
-                </a:solidFill>
-                <a:latin typeface="Malgun Gothic"/>
-              </a:defRPr>
-            </a:pPr>
-            <a:r>
-              <a:t>• 심사 대상자의 레벨(L3/L4)에 따른 맞춤형 채점표 렌더링</a:t>
-            </a:r>
-          </a:p>
-          <a:p>
-            <a:pPr>
-              <a:spcAft>
-                <a:spcPts val="600"/>
-              </a:spcAft>
-              <a:defRPr sz="1200">
-                <a:solidFill>
-                  <a:srgbClr val="94A3B8"/>
-                </a:solidFill>
-                <a:latin typeface="Malgun Gothic"/>
-              </a:defRPr>
-            </a:pPr>
-            <a:r>
-              <a:t>• 현업(3:4:3) 및 기술(4:3:3) 가중합 연산을 통한 최종 점수 산출</a:t>
-            </a:r>
-          </a:p>
-          <a:p>
-            <a:pPr>
-              <a:spcAft>
-                <a:spcPts val="600"/>
-              </a:spcAft>
-              <a:defRPr sz="1200">
-                <a:solidFill>
-                  <a:srgbClr val="94A3B8"/>
-                </a:solidFill>
-                <a:latin typeface="Malgun Gothic"/>
-              </a:defRPr>
-            </a:pPr>
-            <a:r>
-              <a:t>• 동시 접속 평가 진행 상황 및 심사 합격/불합격 여부 실시간 계산</a:t>
-            </a:r>
-          </a:p>
-          <a:p>
-            <a:pPr>
-              <a:spcAft>
-                <a:spcPts val="600"/>
-              </a:spcAft>
-              <a:defRPr sz="1200">
-                <a:solidFill>
-                  <a:srgbClr val="94A3B8"/>
-                </a:solidFill>
-                <a:latin typeface="Malgun Gothic"/>
-              </a:defRPr>
-            </a:pPr>
-            <a:r>
-              <a:t>• 5대 공통 보안성 Red Flag 기능 탑재로 보안 검증 강화</a:t>
-            </a:r>
-          </a:p>
-          <a:p>
-            <a:pPr>
-              <a:spcAft>
-                <a:spcPts val="600"/>
-              </a:spcAft>
-              <a:defRPr sz="1200">
-                <a:solidFill>
-                  <a:srgbClr val="94A3B8"/>
-                </a:solidFill>
-                <a:latin typeface="Malgun Gothic"/>
-              </a:defRPr>
-            </a:pPr>
-            <a:r>
-              <a:t>• 오른쪽 화면: 실제 리액트 기반의 심사 워크스페이스 구조 모형</a:t>
-            </a:r>
-          </a:p>
-        </p:txBody>
-      </p:sp>
-      <p:sp>
-        <p:nvSpPr>
-          <p:cNvPr id="7" name="Rounded Rectangle 6"/>
+          <p:cNvPr id="9" name="Oval 8"/>
           <p:cNvSpPr/>
           <p:nvPr/>
         </p:nvSpPr>
         <p:spPr>
           <a:xfrm>
-            <a:off x="6400800" y="1828800"/>
-            <a:ext cx="5212080" cy="4114800"/>
-          </a:xfrm>
-          <a:prstGeom prst="roundRect">
+            <a:off x="1554480" y="2743200"/>
+            <a:ext cx="822960" cy="822960"/>
+          </a:xfrm>
+          <a:prstGeom prst="ellipse">
             <a:avLst/>
           </a:prstGeom>
           <a:solidFill>
-            <a:srgbClr val="1E293B"/>
+            <a:srgbClr val="2563EB"/>
           </a:solidFill>
-          <a:ln w="19050">
-            <a:solidFill>
-              <a:srgbClr val="6366F1"/>
-            </a:solidFill>
+          <a:ln>
+            <a:noFill/>
           </a:ln>
         </p:spPr>
         <p:style>
@@ -3565,34 +7910,387 @@
           <a:bodyPr rtlCol="0" anchor="ctr"/>
           <a:lstStyle/>
           <a:p>
-            <a:pPr algn="ctr"/>
-          </a:p>
-        </p:txBody>
-      </p:sp>
-      <p:pic>
-        <p:nvPicPr>
-          <p:cNvPr id="8" name="Picture 7" descr="aica_evaluation_workspace_mockup_1784167999282.png"/>
-          <p:cNvPicPr>
-            <a:picLocks noChangeAspect="1"/>
-          </p:cNvPicPr>
-          <p:nvPr/>
-        </p:nvPicPr>
-        <p:blipFill>
-          <a:blip r:embed="rId2"/>
-          <a:stretch>
-            <a:fillRect/>
-          </a:stretch>
-        </p:blipFill>
-        <p:spPr>
-          <a:xfrm>
-            <a:off x="7086600" y="1965960"/>
-            <a:ext cx="3840480" cy="3840480"/>
-          </a:xfrm>
-          <a:prstGeom prst="rect">
-            <a:avLst/>
-          </a:prstGeom>
-        </p:spPr>
-      </p:pic>
+            <a:pPr algn="ctr">
+              <a:defRPr sz="1400" b="1">
+                <a:solidFill>
+                  <a:srgbClr val="FFFFFF"/>
+                </a:solidFill>
+                <a:latin typeface="Arial"/>
+              </a:defRPr>
+            </a:pPr>
+            <a:r>
+              <a:t>1</a:t>
+            </a:r>
+          </a:p>
+        </p:txBody>
+      </p:sp>
+      <p:sp>
+        <p:nvSpPr>
+          <p:cNvPr id="10" name="TextBox 9"/>
+          <p:cNvSpPr txBox="1"/>
+          <p:nvPr/>
+        </p:nvSpPr>
+        <p:spPr>
+          <a:xfrm>
+            <a:off x="548640" y="3749039"/>
+            <a:ext cx="2834640" cy="2011680"/>
+          </a:xfrm>
+          <a:prstGeom prst="rect">
+            <a:avLst/>
+          </a:prstGeom>
+          <a:noFill/>
+        </p:spPr>
+        <p:txBody>
+          <a:bodyPr wrap="square">
+            <a:spAutoFit/>
+          </a:bodyPr>
+          <a:lstStyle/>
+          <a:p>
+            <a:pPr algn="ctr">
+              <a:spcAft>
+                <a:spcPts val="1000"/>
+              </a:spcAft>
+              <a:defRPr sz="1600" b="1">
+                <a:solidFill>
+                  <a:srgbClr val="0F172A"/>
+                </a:solidFill>
+                <a:latin typeface="Malgun Gothic"/>
+              </a:defRPr>
+            </a:pPr>
+            <a:r>
+              <a:t>과제 등록</a:t>
+            </a:r>
+          </a:p>
+          <a:p>
+            <a:pPr algn="ctr">
+              <a:defRPr sz="1100">
+                <a:solidFill>
+                  <a:srgbClr val="475569"/>
+                </a:solidFill>
+                <a:latin typeface="Malgun Gothic"/>
+              </a:defRPr>
+            </a:pPr>
+            <a:r>
+              <a:t>지원자·과제·증빙 링크를 입력합니다.</a:t>
+            </a:r>
+          </a:p>
+        </p:txBody>
+      </p:sp>
+      <p:sp>
+        <p:nvSpPr>
+          <p:cNvPr id="11" name="Oval 10"/>
+          <p:cNvSpPr/>
+          <p:nvPr/>
+        </p:nvSpPr>
+        <p:spPr>
+          <a:xfrm>
+            <a:off x="4389120" y="2743200"/>
+            <a:ext cx="822960" cy="822960"/>
+          </a:xfrm>
+          <a:prstGeom prst="ellipse">
+            <a:avLst/>
+          </a:prstGeom>
+          <a:solidFill>
+            <a:srgbClr val="2563EB"/>
+          </a:solidFill>
+          <a:ln>
+            <a:noFill/>
+          </a:ln>
+        </p:spPr>
+        <p:style>
+          <a:lnRef idx="1">
+            <a:schemeClr val="accent1"/>
+          </a:lnRef>
+          <a:fillRef idx="3">
+            <a:schemeClr val="accent1"/>
+          </a:fillRef>
+          <a:effectRef idx="2">
+            <a:schemeClr val="accent1"/>
+          </a:effectRef>
+          <a:fontRef idx="minor">
+            <a:schemeClr val="lt1"/>
+          </a:fontRef>
+        </p:style>
+        <p:txBody>
+          <a:bodyPr rtlCol="0" anchor="ctr"/>
+          <a:lstStyle/>
+          <a:p>
+            <a:pPr algn="ctr">
+              <a:defRPr sz="1400" b="1">
+                <a:solidFill>
+                  <a:srgbClr val="FFFFFF"/>
+                </a:solidFill>
+                <a:latin typeface="Arial"/>
+              </a:defRPr>
+            </a:pPr>
+            <a:r>
+              <a:t>2</a:t>
+            </a:r>
+          </a:p>
+        </p:txBody>
+      </p:sp>
+      <p:sp>
+        <p:nvSpPr>
+          <p:cNvPr id="12" name="TextBox 11"/>
+          <p:cNvSpPr txBox="1"/>
+          <p:nvPr/>
+        </p:nvSpPr>
+        <p:spPr>
+          <a:xfrm>
+            <a:off x="3383280" y="3749039"/>
+            <a:ext cx="2834640" cy="2011680"/>
+          </a:xfrm>
+          <a:prstGeom prst="rect">
+            <a:avLst/>
+          </a:prstGeom>
+          <a:noFill/>
+        </p:spPr>
+        <p:txBody>
+          <a:bodyPr wrap="square">
+            <a:spAutoFit/>
+          </a:bodyPr>
+          <a:lstStyle/>
+          <a:p>
+            <a:pPr algn="ctr">
+              <a:spcAft>
+                <a:spcPts val="1000"/>
+              </a:spcAft>
+              <a:defRPr sz="1600" b="1">
+                <a:solidFill>
+                  <a:srgbClr val="0F172A"/>
+                </a:solidFill>
+                <a:latin typeface="Malgun Gothic"/>
+              </a:defRPr>
+            </a:pPr>
+            <a:r>
+              <a:t>3인 패널 배정</a:t>
+            </a:r>
+          </a:p>
+          <a:p>
+            <a:pPr algn="ctr">
+              <a:defRPr sz="1100">
+                <a:solidFill>
+                  <a:srgbClr val="475569"/>
+                </a:solidFill>
+                <a:latin typeface="Malgun Gothic"/>
+              </a:defRPr>
+            </a:pPr>
+            <a:r>
+              <a:t>현업·기술·보안 각 1인을 지정합니다.</a:t>
+            </a:r>
+          </a:p>
+        </p:txBody>
+      </p:sp>
+      <p:sp>
+        <p:nvSpPr>
+          <p:cNvPr id="13" name="Oval 12"/>
+          <p:cNvSpPr/>
+          <p:nvPr/>
+        </p:nvSpPr>
+        <p:spPr>
+          <a:xfrm>
+            <a:off x="7223760" y="2743200"/>
+            <a:ext cx="822960" cy="822960"/>
+          </a:xfrm>
+          <a:prstGeom prst="ellipse">
+            <a:avLst/>
+          </a:prstGeom>
+          <a:solidFill>
+            <a:srgbClr val="2563EB"/>
+          </a:solidFill>
+          <a:ln>
+            <a:noFill/>
+          </a:ln>
+        </p:spPr>
+        <p:style>
+          <a:lnRef idx="1">
+            <a:schemeClr val="accent1"/>
+          </a:lnRef>
+          <a:fillRef idx="3">
+            <a:schemeClr val="accent1"/>
+          </a:fillRef>
+          <a:effectRef idx="2">
+            <a:schemeClr val="accent1"/>
+          </a:effectRef>
+          <a:fontRef idx="minor">
+            <a:schemeClr val="lt1"/>
+          </a:fontRef>
+        </p:style>
+        <p:txBody>
+          <a:bodyPr rtlCol="0" anchor="ctr"/>
+          <a:lstStyle/>
+          <a:p>
+            <a:pPr algn="ctr">
+              <a:defRPr sz="1400" b="1">
+                <a:solidFill>
+                  <a:srgbClr val="FFFFFF"/>
+                </a:solidFill>
+                <a:latin typeface="Arial"/>
+              </a:defRPr>
+            </a:pPr>
+            <a:r>
+              <a:t>3</a:t>
+            </a:r>
+          </a:p>
+        </p:txBody>
+      </p:sp>
+      <p:sp>
+        <p:nvSpPr>
+          <p:cNvPr id="14" name="TextBox 13"/>
+          <p:cNvSpPr txBox="1"/>
+          <p:nvPr/>
+        </p:nvSpPr>
+        <p:spPr>
+          <a:xfrm>
+            <a:off x="6217920" y="3749039"/>
+            <a:ext cx="2834640" cy="2011680"/>
+          </a:xfrm>
+          <a:prstGeom prst="rect">
+            <a:avLst/>
+          </a:prstGeom>
+          <a:noFill/>
+        </p:spPr>
+        <p:txBody>
+          <a:bodyPr wrap="square">
+            <a:spAutoFit/>
+          </a:bodyPr>
+          <a:lstStyle/>
+          <a:p>
+            <a:pPr algn="ctr">
+              <a:spcAft>
+                <a:spcPts val="1000"/>
+              </a:spcAft>
+              <a:defRPr sz="1600" b="1">
+                <a:solidFill>
+                  <a:srgbClr val="0F172A"/>
+                </a:solidFill>
+                <a:latin typeface="Malgun Gothic"/>
+              </a:defRPr>
+            </a:pPr>
+            <a:r>
+              <a:t>독립 심사</a:t>
+            </a:r>
+          </a:p>
+          <a:p>
+            <a:pPr algn="ctr">
+              <a:defRPr sz="1100">
+                <a:solidFill>
+                  <a:srgbClr val="475569"/>
+                </a:solidFill>
+                <a:latin typeface="Malgun Gothic"/>
+              </a:defRPr>
+            </a:pPr>
+            <a:r>
+              <a:t>자료·보안·루브릭을 확인하고 점수를 제출합니다.</a:t>
+            </a:r>
+          </a:p>
+        </p:txBody>
+      </p:sp>
+      <p:sp>
+        <p:nvSpPr>
+          <p:cNvPr id="15" name="Oval 14"/>
+          <p:cNvSpPr/>
+          <p:nvPr/>
+        </p:nvSpPr>
+        <p:spPr>
+          <a:xfrm>
+            <a:off x="10058400" y="2743200"/>
+            <a:ext cx="822960" cy="822960"/>
+          </a:xfrm>
+          <a:prstGeom prst="ellipse">
+            <a:avLst/>
+          </a:prstGeom>
+          <a:solidFill>
+            <a:srgbClr val="2563EB"/>
+          </a:solidFill>
+          <a:ln>
+            <a:noFill/>
+          </a:ln>
+        </p:spPr>
+        <p:style>
+          <a:lnRef idx="1">
+            <a:schemeClr val="accent1"/>
+          </a:lnRef>
+          <a:fillRef idx="3">
+            <a:schemeClr val="accent1"/>
+          </a:fillRef>
+          <a:effectRef idx="2">
+            <a:schemeClr val="accent1"/>
+          </a:effectRef>
+          <a:fontRef idx="minor">
+            <a:schemeClr val="lt1"/>
+          </a:fontRef>
+        </p:style>
+        <p:txBody>
+          <a:bodyPr rtlCol="0" anchor="ctr"/>
+          <a:lstStyle/>
+          <a:p>
+            <a:pPr algn="ctr">
+              <a:defRPr sz="1400" b="1">
+                <a:solidFill>
+                  <a:srgbClr val="FFFFFF"/>
+                </a:solidFill>
+                <a:latin typeface="Arial"/>
+              </a:defRPr>
+            </a:pPr>
+            <a:r>
+              <a:t>4</a:t>
+            </a:r>
+          </a:p>
+        </p:txBody>
+      </p:sp>
+      <p:sp>
+        <p:nvSpPr>
+          <p:cNvPr id="16" name="TextBox 15"/>
+          <p:cNvSpPr txBox="1"/>
+          <p:nvPr/>
+        </p:nvSpPr>
+        <p:spPr>
+          <a:xfrm>
+            <a:off x="9052560" y="3749039"/>
+            <a:ext cx="2834640" cy="2011680"/>
+          </a:xfrm>
+          <a:prstGeom prst="rect">
+            <a:avLst/>
+          </a:prstGeom>
+          <a:noFill/>
+        </p:spPr>
+        <p:txBody>
+          <a:bodyPr wrap="square">
+            <a:spAutoFit/>
+          </a:bodyPr>
+          <a:lstStyle/>
+          <a:p>
+            <a:pPr algn="ctr">
+              <a:spcAft>
+                <a:spcPts val="1000"/>
+              </a:spcAft>
+              <a:defRPr sz="1600" b="1">
+                <a:solidFill>
+                  <a:srgbClr val="0F172A"/>
+                </a:solidFill>
+                <a:latin typeface="Malgun Gothic"/>
+              </a:defRPr>
+            </a:pPr>
+            <a:r>
+              <a:t>종합 판정</a:t>
+            </a:r>
+          </a:p>
+          <a:p>
+            <a:pPr algn="ctr">
+              <a:defRPr sz="1100">
+                <a:solidFill>
+                  <a:srgbClr val="475569"/>
+                </a:solidFill>
+                <a:latin typeface="Malgun Gothic"/>
+              </a:defRPr>
+            </a:pPr>
+            <a:r>
+              <a:t>3인 제출 후 평균과 판정서를 확인합니다.</a:t>
+            </a:r>
+          </a:p>
+        </p:txBody>
+      </p:sp>
     </p:spTree>
   </p:cSld>
   <p:clrMapOvr>
@@ -3607,7 +8305,7 @@
     <p:bg>
       <p:bgPr>
         <a:solidFill>
-          <a:srgbClr val="0F172A"/>
+          <a:srgbClr val="FFFFFF"/>
         </a:solidFill>
         <a:effectLst/>
       </p:bgPr>
@@ -3636,7 +8334,7 @@
           <a:noFill/>
         </p:spPr>
         <p:txBody>
-          <a:bodyPr wrap="square">
+          <a:bodyPr wrap="none">
             <a:spAutoFit/>
           </a:bodyPr>
           <a:lstStyle/>
@@ -3644,13 +8342,13 @@
             <a:pPr>
               <a:defRPr sz="1100" b="1">
                 <a:solidFill>
-                  <a:srgbClr val="6366F1"/>
-                </a:solidFill>
-                <a:latin typeface="Malgun Gothic"/>
-              </a:defRPr>
-            </a:pPr>
-            <a:r>
-              <a:t>AICA SYSTEM MANUAL</a:t>
+                  <a:srgbClr val="2563EB"/>
+                </a:solidFill>
+                <a:latin typeface="Malgun Gothic"/>
+              </a:defRPr>
+            </a:pPr>
+            <a:r>
+              <a:t>공통</a:t>
             </a:r>
           </a:p>
         </p:txBody>
@@ -3664,7 +8362,7 @@
         <p:spPr>
           <a:xfrm>
             <a:off x="548640" y="640080"/>
-            <a:ext cx="9144000" cy="731520"/>
+            <a:ext cx="10058400" cy="731520"/>
           </a:xfrm>
           <a:prstGeom prst="rect">
             <a:avLst/>
@@ -3672,21 +8370,21 @@
           <a:noFill/>
         </p:spPr>
         <p:txBody>
-          <a:bodyPr wrap="square">
+          <a:bodyPr wrap="none">
             <a:spAutoFit/>
           </a:bodyPr>
           <a:lstStyle/>
           <a:p>
             <a:pPr>
-              <a:defRPr sz="2800" b="1">
-                <a:solidFill>
-                  <a:srgbClr val="FFFFFF"/>
-                </a:solidFill>
-                <a:latin typeface="Malgun Gothic"/>
-              </a:defRPr>
-            </a:pPr>
-            <a:r>
-              <a:t>2. 운영 간사 가이드 (Admin Dashboard)</a:t>
+              <a:defRPr sz="2600" b="1">
+                <a:solidFill>
+                  <a:srgbClr val="0F172A"/>
+                </a:solidFill>
+                <a:latin typeface="Malgun Gothic"/>
+              </a:defRPr>
+            </a:pPr>
+            <a:r>
+              <a:t>성명과 사내 이메일로 로그인합니다</a:t>
             </a:r>
           </a:p>
         </p:txBody>
@@ -3700,18 +8398,16 @@
         <p:spPr>
           <a:xfrm>
             <a:off x="548640" y="1371600"/>
-            <a:ext cx="11094415" cy="27432"/>
+            <a:ext cx="11094415" cy="13716"/>
           </a:xfrm>
           <a:prstGeom prst="rect">
             <a:avLst/>
           </a:prstGeom>
           <a:solidFill>
-            <a:srgbClr val="1E293B"/>
+            <a:srgbClr val="E2E8F0"/>
           </a:solidFill>
           <a:ln>
-            <a:solidFill>
-              <a:srgbClr val="1E293B"/>
-            </a:solidFill>
+            <a:noFill/>
           </a:ln>
         </p:spPr>
         <p:style>
@@ -3738,24 +8434,96 @@
       </p:sp>
       <p:sp>
         <p:nvSpPr>
-          <p:cNvPr id="5" name="Rounded Rectangle 4"/>
+          <p:cNvPr id="5" name="TextBox 4"/>
+          <p:cNvSpPr txBox="1"/>
+          <p:nvPr/>
+        </p:nvSpPr>
+        <p:spPr>
+          <a:xfrm>
+            <a:off x="548640" y="6309360"/>
+            <a:ext cx="9144000" cy="365760"/>
+          </a:xfrm>
+          <a:prstGeom prst="rect">
+            <a:avLst/>
+          </a:prstGeom>
+          <a:noFill/>
+        </p:spPr>
+        <p:txBody>
+          <a:bodyPr wrap="none">
+            <a:spAutoFit/>
+          </a:bodyPr>
+          <a:lstStyle/>
+          <a:p>
+            <a:pPr>
+              <a:defRPr sz="900">
+                <a:solidFill>
+                  <a:srgbClr val="64748B"/>
+                </a:solidFill>
+                <a:latin typeface="Malgun Gothic"/>
+              </a:defRPr>
+            </a:pPr>
+            <a:r>
+              <a:t>AICA 자격심사 시스템 사용자 매뉴얼 · 2026.07</a:t>
+            </a:r>
+          </a:p>
+        </p:txBody>
+      </p:sp>
+      <p:sp>
+        <p:nvSpPr>
+          <p:cNvPr id="6" name="TextBox 5"/>
+          <p:cNvSpPr txBox="1"/>
+          <p:nvPr/>
+        </p:nvSpPr>
+        <p:spPr>
+          <a:xfrm>
+            <a:off x="10820095" y="6309360"/>
+            <a:ext cx="822960" cy="365760"/>
+          </a:xfrm>
+          <a:prstGeom prst="rect">
+            <a:avLst/>
+          </a:prstGeom>
+          <a:noFill/>
+        </p:spPr>
+        <p:txBody>
+          <a:bodyPr wrap="none">
+            <a:spAutoFit/>
+          </a:bodyPr>
+          <a:lstStyle/>
+          <a:p>
+            <a:pPr algn="r">
+              <a:defRPr sz="900">
+                <a:solidFill>
+                  <a:srgbClr val="64748B"/>
+                </a:solidFill>
+                <a:latin typeface="Malgun Gothic"/>
+              </a:defRPr>
+            </a:pPr>
+            <a:r>
+              <a:t>03</a:t>
+            </a:r>
+          </a:p>
+        </p:txBody>
+      </p:sp>
+      <p:sp>
+        <p:nvSpPr>
+          <p:cNvPr id="7" name="Rounded Rectangle 6"/>
           <p:cNvSpPr/>
           <p:nvPr/>
         </p:nvSpPr>
         <p:spPr>
           <a:xfrm>
             <a:off x="548640" y="1828800"/>
-            <a:ext cx="5486400" cy="4114800"/>
+            <a:ext cx="5303520" cy="4114800"/>
           </a:xfrm>
           <a:prstGeom prst="roundRect">
             <a:avLst/>
           </a:prstGeom>
           <a:solidFill>
-            <a:srgbClr val="1E293B"/>
+            <a:srgbClr val="EFF6FF"/>
           </a:solidFill>
-          <a:ln w="19050">
+          <a:ln w="12700">
             <a:solidFill>
-              <a:srgbClr val="6366F1"/>
+              <a:srgbClr val="E2E8F0"/>
             </a:solidFill>
           </a:ln>
         </p:spPr>
@@ -3783,14 +8551,14 @@
       </p:sp>
       <p:sp>
         <p:nvSpPr>
-          <p:cNvPr id="6" name="TextBox 5"/>
+          <p:cNvPr id="8" name="TextBox 7"/>
           <p:cNvSpPr txBox="1"/>
           <p:nvPr/>
         </p:nvSpPr>
         <p:spPr>
           <a:xfrm>
             <a:off x="685800" y="1965960"/>
-            <a:ext cx="5212080" cy="3840480"/>
+            <a:ext cx="5029200" cy="3840480"/>
           </a:xfrm>
           <a:prstGeom prst="rect">
             <a:avLst/>
@@ -3807,119 +8575,120 @@
               <a:spcAft>
                 <a:spcPts val="1000"/>
               </a:spcAft>
-              <a:defRPr sz="1500" b="1">
-                <a:solidFill>
-                  <a:srgbClr val="6366F1"/>
-                </a:solidFill>
-                <a:latin typeface="Malgun Gothic"/>
-              </a:defRPr>
-            </a:pPr>
-            <a:r>
-              <a:t>대시보드 통계 분석 및 상세 필터링</a:t>
-            </a:r>
-          </a:p>
-          <a:p>
-            <a:pPr>
-              <a:spcAft>
-                <a:spcPts val="600"/>
-              </a:spcAft>
-              <a:defRPr sz="1200">
-                <a:solidFill>
-                  <a:srgbClr val="94A3B8"/>
-                </a:solidFill>
-                <a:latin typeface="Malgun Gothic"/>
-              </a:defRPr>
-            </a:pPr>
-            <a:r>
-              <a:t>• 전체 인원, 완료, 평가중, 대기 통계 카드로 진행 상황 실시간 확인</a:t>
-            </a:r>
-          </a:p>
-          <a:p>
-            <a:pPr>
-              <a:spcAft>
-                <a:spcPts val="600"/>
-              </a:spcAft>
-              <a:defRPr sz="1200">
-                <a:solidFill>
-                  <a:srgbClr val="94A3B8"/>
-                </a:solidFill>
-                <a:latin typeface="Malgun Gothic"/>
-              </a:defRPr>
-            </a:pPr>
-            <a:r>
-              <a:t>• 통계 카드를 클릭하면 해당 그룹의 지원자 명단 상세 모달 팝업 오픈</a:t>
-            </a:r>
-          </a:p>
-          <a:p>
-            <a:pPr>
-              <a:spcAft>
-                <a:spcPts val="600"/>
-              </a:spcAft>
-              <a:defRPr sz="1200">
-                <a:solidFill>
-                  <a:srgbClr val="94A3B8"/>
-                </a:solidFill>
-                <a:latin typeface="Malgun Gothic"/>
-              </a:defRPr>
-            </a:pPr>
-            <a:r>
-              <a:t>• 각 위원회별 소속 심사위원들의 심사 여부를 도트로 실시간 모니터링</a:t>
-            </a:r>
-          </a:p>
-          <a:p>
-            <a:pPr>
-              <a:spcAft>
-                <a:spcPts val="600"/>
-              </a:spcAft>
-              <a:defRPr sz="1200">
-                <a:solidFill>
-                  <a:srgbClr val="94A3B8"/>
-                </a:solidFill>
-                <a:latin typeface="Malgun Gothic"/>
-              </a:defRPr>
-            </a:pPr>
-            <a:r>
-              <a:t>• 피평가자와 동일 계열사 심사위원을 제외하는 '이해상충 방지' 기능</a:t>
-            </a:r>
-          </a:p>
-          <a:p>
-            <a:pPr>
-              <a:spcAft>
-                <a:spcPts val="600"/>
-              </a:spcAft>
-              <a:defRPr sz="1200">
-                <a:solidFill>
-                  <a:srgbClr val="94A3B8"/>
-                </a:solidFill>
-                <a:latin typeface="Malgun Gothic"/>
-              </a:defRPr>
-            </a:pPr>
-            <a:r>
-              <a:t>• 오른쪽 화면: 운영간사용 메인 관리 대시보드 및 평가 큐 상세 화면</a:t>
-            </a:r>
-          </a:p>
-        </p:txBody>
-      </p:sp>
-      <p:sp>
-        <p:nvSpPr>
-          <p:cNvPr id="7" name="Rounded Rectangle 6"/>
+              <a:defRPr sz="1400" b="1">
+                <a:solidFill>
+                  <a:srgbClr val="2563EB"/>
+                </a:solidFill>
+                <a:latin typeface="Malgun Gothic"/>
+              </a:defRPr>
+            </a:pPr>
+            <a:r>
+              <a:t>로그인 순서</a:t>
+            </a:r>
+          </a:p>
+          <a:p>
+            <a:pPr>
+              <a:spcAft>
+                <a:spcPts val="500"/>
+              </a:spcAft>
+              <a:defRPr sz="1100">
+                <a:solidFill>
+                  <a:srgbClr val="475569"/>
+                </a:solidFill>
+                <a:latin typeface="Malgun Gothic"/>
+              </a:defRPr>
+            </a:pPr>
+            <a:r>
+              <a:t>1. 성명(ID)에 등록된 성명을 입력</a:t>
+            </a:r>
+          </a:p>
+          <a:p>
+            <a:pPr>
+              <a:spcAft>
+                <a:spcPts val="500"/>
+              </a:spcAft>
+              <a:defRPr sz="1100">
+                <a:solidFill>
+                  <a:srgbClr val="475569"/>
+                </a:solidFill>
+                <a:latin typeface="Malgun Gothic"/>
+              </a:defRPr>
+            </a:pPr>
+            <a:r>
+              <a:t>2. 이메일(Password)에 사내 이메일 입력</a:t>
+            </a:r>
+          </a:p>
+          <a:p>
+            <a:pPr>
+              <a:spcAft>
+                <a:spcPts val="500"/>
+              </a:spcAft>
+              <a:defRPr sz="1100">
+                <a:solidFill>
+                  <a:srgbClr val="475569"/>
+                </a:solidFill>
+                <a:latin typeface="Malgun Gothic"/>
+              </a:defRPr>
+            </a:pPr>
+            <a:r>
+              <a:t>3. 「시스템 로그인」 선택</a:t>
+            </a:r>
+          </a:p>
+          <a:p>
+            <a:pPr>
+              <a:spcAft>
+                <a:spcPts val="500"/>
+              </a:spcAft>
+              <a:defRPr sz="1100">
+                <a:solidFill>
+                  <a:srgbClr val="475569"/>
+                </a:solidFill>
+                <a:latin typeface="Malgun Gothic"/>
+              </a:defRPr>
+            </a:pPr>
+            <a:r>
+              <a:t>4. 상단 역할 표시가 본인 권한인지 확인</a:t>
+            </a:r>
+          </a:p>
+          <a:p>
+            <a:br/>
+            <a:pPr>
+              <a:spcAft>
+                <a:spcPts val="500"/>
+              </a:spcAft>
+              <a:defRPr sz="1100">
+                <a:solidFill>
+                  <a:srgbClr val="475569"/>
+                </a:solidFill>
+                <a:latin typeface="Malgun Gothic"/>
+              </a:defRPr>
+            </a:pPr>
+            <a:r>
+              <a:t>입력이 없거나 일치하지 않으면 로그인 오류가 표시됩니다. 운영간사에게 등록 정보 확인을 요청하세요.</a:t>
+            </a:r>
+          </a:p>
+        </p:txBody>
+      </p:sp>
+      <p:sp>
+        <p:nvSpPr>
+          <p:cNvPr id="9" name="Rectangle 8"/>
           <p:cNvSpPr/>
           <p:nvPr/>
         </p:nvSpPr>
         <p:spPr>
           <a:xfrm>
-            <a:off x="6400800" y="1828800"/>
-            <a:ext cx="5212080" cy="4114800"/>
-          </a:xfrm>
-          <a:prstGeom prst="roundRect">
+            <a:off x="6309360" y="1828800"/>
+            <a:ext cx="5303520" cy="4114800"/>
+          </a:xfrm>
+          <a:prstGeom prst="rect">
             <a:avLst/>
           </a:prstGeom>
           <a:solidFill>
-            <a:srgbClr val="1E293B"/>
+            <a:srgbClr val="F8FAFC"/>
           </a:solidFill>
           <a:ln w="19050">
             <a:solidFill>
-              <a:srgbClr val="6366F1"/>
+              <a:srgbClr val="E2E8F0"/>
             </a:solidFill>
           </a:ln>
         </p:spPr>
@@ -3947,7 +8716,7 @@
       </p:sp>
       <p:pic>
         <p:nvPicPr>
-          <p:cNvPr id="8" name="Picture 7" descr="media__1784188798650.png"/>
+          <p:cNvPr id="10" name="Picture 9" descr="media__1784176101924.png"/>
           <p:cNvPicPr>
             <a:picLocks noChangeAspect="1"/>
           </p:cNvPicPr>
@@ -3961,8 +8730,8 @@
         </p:blipFill>
         <p:spPr>
           <a:xfrm>
-            <a:off x="7369320" y="1965960"/>
-            <a:ext cx="3275038" cy="3840480"/>
+            <a:off x="6446520" y="2371380"/>
+            <a:ext cx="5029200" cy="3029638"/>
           </a:xfrm>
           <a:prstGeom prst="rect">
             <a:avLst/>
@@ -3983,7 +8752,7 @@
     <p:bg>
       <p:bgPr>
         <a:solidFill>
-          <a:srgbClr val="0F172A"/>
+          <a:srgbClr val="FFFFFF"/>
         </a:solidFill>
         <a:effectLst/>
       </p:bgPr>
@@ -4012,7 +8781,7 @@
           <a:noFill/>
         </p:spPr>
         <p:txBody>
-          <a:bodyPr wrap="square">
+          <a:bodyPr wrap="none">
             <a:spAutoFit/>
           </a:bodyPr>
           <a:lstStyle/>
@@ -4020,13 +8789,13 @@
             <a:pPr>
               <a:defRPr sz="1100" b="1">
                 <a:solidFill>
-                  <a:srgbClr val="6366F1"/>
-                </a:solidFill>
-                <a:latin typeface="Malgun Gothic"/>
-              </a:defRPr>
-            </a:pPr>
-            <a:r>
-              <a:t>AICA SYSTEM MANUAL</a:t>
+                  <a:srgbClr val="2563EB"/>
+                </a:solidFill>
+                <a:latin typeface="Malgun Gothic"/>
+              </a:defRPr>
+            </a:pPr>
+            <a:r>
+              <a:t>공통</a:t>
             </a:r>
           </a:p>
         </p:txBody>
@@ -4040,7 +8809,7 @@
         <p:spPr>
           <a:xfrm>
             <a:off x="548640" y="640080"/>
-            <a:ext cx="9144000" cy="731520"/>
+            <a:ext cx="10058400" cy="731520"/>
           </a:xfrm>
           <a:prstGeom prst="rect">
             <a:avLst/>
@@ -4048,21 +8817,21 @@
           <a:noFill/>
         </p:spPr>
         <p:txBody>
-          <a:bodyPr wrap="square">
+          <a:bodyPr wrap="none">
             <a:spAutoFit/>
           </a:bodyPr>
           <a:lstStyle/>
           <a:p>
             <a:pPr>
-              <a:defRPr sz="2800" b="1">
-                <a:solidFill>
-                  <a:srgbClr val="FFFFFF"/>
-                </a:solidFill>
-                <a:latin typeface="Malgun Gothic"/>
-              </a:defRPr>
-            </a:pPr>
-            <a:r>
-              <a:t>3. 심사위원 가이드 (Reviewer Evaluation)</a:t>
+              <a:defRPr sz="2600" b="1">
+                <a:solidFill>
+                  <a:srgbClr val="0F172A"/>
+                </a:solidFill>
+                <a:latin typeface="Malgun Gothic"/>
+              </a:defRPr>
+            </a:pPr>
+            <a:r>
+              <a:t>먼저 내 역할과 완료 조건을 확인하세요</a:t>
             </a:r>
           </a:p>
         </p:txBody>
@@ -4076,18 +8845,16 @@
         <p:spPr>
           <a:xfrm>
             <a:off x="548640" y="1371600"/>
-            <a:ext cx="11094415" cy="27432"/>
+            <a:ext cx="11094415" cy="13716"/>
           </a:xfrm>
           <a:prstGeom prst="rect">
             <a:avLst/>
           </a:prstGeom>
           <a:solidFill>
-            <a:srgbClr val="1E293B"/>
+            <a:srgbClr val="E2E8F0"/>
           </a:solidFill>
           <a:ln>
-            <a:solidFill>
-              <a:srgbClr val="1E293B"/>
-            </a:solidFill>
+            <a:noFill/>
           </a:ln>
         </p:spPr>
         <p:style>
@@ -4114,24 +8881,96 @@
       </p:sp>
       <p:sp>
         <p:nvSpPr>
-          <p:cNvPr id="5" name="Rounded Rectangle 4"/>
+          <p:cNvPr id="5" name="TextBox 4"/>
+          <p:cNvSpPr txBox="1"/>
+          <p:nvPr/>
+        </p:nvSpPr>
+        <p:spPr>
+          <a:xfrm>
+            <a:off x="548640" y="6309360"/>
+            <a:ext cx="9144000" cy="365760"/>
+          </a:xfrm>
+          <a:prstGeom prst="rect">
+            <a:avLst/>
+          </a:prstGeom>
+          <a:noFill/>
+        </p:spPr>
+        <p:txBody>
+          <a:bodyPr wrap="none">
+            <a:spAutoFit/>
+          </a:bodyPr>
+          <a:lstStyle/>
+          <a:p>
+            <a:pPr>
+              <a:defRPr sz="900">
+                <a:solidFill>
+                  <a:srgbClr val="64748B"/>
+                </a:solidFill>
+                <a:latin typeface="Malgun Gothic"/>
+              </a:defRPr>
+            </a:pPr>
+            <a:r>
+              <a:t>AICA 자격심사 시스템 사용자 매뉴얼 · 2026.07</a:t>
+            </a:r>
+          </a:p>
+        </p:txBody>
+      </p:sp>
+      <p:sp>
+        <p:nvSpPr>
+          <p:cNvPr id="6" name="TextBox 5"/>
+          <p:cNvSpPr txBox="1"/>
+          <p:nvPr/>
+        </p:nvSpPr>
+        <p:spPr>
+          <a:xfrm>
+            <a:off x="10820095" y="6309360"/>
+            <a:ext cx="822960" cy="365760"/>
+          </a:xfrm>
+          <a:prstGeom prst="rect">
+            <a:avLst/>
+          </a:prstGeom>
+          <a:noFill/>
+        </p:spPr>
+        <p:txBody>
+          <a:bodyPr wrap="none">
+            <a:spAutoFit/>
+          </a:bodyPr>
+          <a:lstStyle/>
+          <a:p>
+            <a:pPr algn="r">
+              <a:defRPr sz="900">
+                <a:solidFill>
+                  <a:srgbClr val="64748B"/>
+                </a:solidFill>
+                <a:latin typeface="Malgun Gothic"/>
+              </a:defRPr>
+            </a:pPr>
+            <a:r>
+              <a:t>04</a:t>
+            </a:r>
+          </a:p>
+        </p:txBody>
+      </p:sp>
+      <p:sp>
+        <p:nvSpPr>
+          <p:cNvPr id="7" name="Rounded Rectangle 6"/>
           <p:cNvSpPr/>
           <p:nvPr/>
         </p:nvSpPr>
         <p:spPr>
           <a:xfrm>
             <a:off x="548640" y="1828800"/>
-            <a:ext cx="5486400" cy="4114800"/>
+            <a:ext cx="5303520" cy="4114800"/>
           </a:xfrm>
           <a:prstGeom prst="roundRect">
             <a:avLst/>
           </a:prstGeom>
           <a:solidFill>
-            <a:srgbClr val="1E293B"/>
+            <a:srgbClr val="EFF6FF"/>
           </a:solidFill>
-          <a:ln w="19050">
+          <a:ln w="12700">
             <a:solidFill>
-              <a:srgbClr val="6366F1"/>
+              <a:srgbClr val="E2E8F0"/>
             </a:solidFill>
           </a:ln>
         </p:spPr>
@@ -4159,14 +8998,14 @@
       </p:sp>
       <p:sp>
         <p:nvSpPr>
-          <p:cNvPr id="6" name="TextBox 5"/>
+          <p:cNvPr id="8" name="TextBox 7"/>
           <p:cNvSpPr txBox="1"/>
           <p:nvPr/>
         </p:nvSpPr>
         <p:spPr>
           <a:xfrm>
             <a:off x="685800" y="1965960"/>
-            <a:ext cx="5212080" cy="3840480"/>
+            <a:ext cx="5029200" cy="3840480"/>
           </a:xfrm>
           <a:prstGeom prst="rect">
             <a:avLst/>
@@ -4183,123 +9022,152 @@
               <a:spcAft>
                 <a:spcPts val="1000"/>
               </a:spcAft>
-              <a:defRPr sz="1500" b="1">
-                <a:solidFill>
-                  <a:srgbClr val="6366F1"/>
-                </a:solidFill>
-                <a:latin typeface="Malgun Gothic"/>
-              </a:defRPr>
-            </a:pPr>
-            <a:r>
-              <a:t>5단계 세로형 루브릭 채점 및 질문은행</a:t>
-            </a:r>
-          </a:p>
-          <a:p>
-            <a:pPr>
-              <a:spcAft>
-                <a:spcPts val="600"/>
-              </a:spcAft>
-              <a:defRPr sz="1200">
-                <a:solidFill>
-                  <a:srgbClr val="94A3B8"/>
-                </a:solidFill>
-                <a:latin typeface="Malgun Gothic"/>
-              </a:defRPr>
-            </a:pPr>
-            <a:r>
-              <a:t>• 본인에게 배정된 과제 큐에서 [심사하기]를 클릭하여 진입</a:t>
-            </a:r>
-          </a:p>
-          <a:p>
-            <a:pPr>
-              <a:spcAft>
-                <a:spcPts val="600"/>
-              </a:spcAft>
-              <a:defRPr sz="1200">
-                <a:solidFill>
-                  <a:srgbClr val="94A3B8"/>
-                </a:solidFill>
-                <a:latin typeface="Malgun Gothic"/>
-              </a:defRPr>
-            </a:pPr>
-            <a:r>
-              <a:t>• 난이도/완성도/자산화(기술/보안/기여)별 5단계 채점 등급 선택:</a:t>
-            </a:r>
+              <a:defRPr sz="1400" b="1">
+                <a:solidFill>
+                  <a:srgbClr val="2563EB"/>
+                </a:solidFill>
+                <a:latin typeface="Malgun Gothic"/>
+              </a:defRPr>
+            </a:pPr>
+            <a:r>
+              <a:t>운영간사</a:t>
+            </a:r>
+          </a:p>
+          <a:p>
+            <a:pPr>
+              <a:spcAft>
+                <a:spcPts val="500"/>
+              </a:spcAft>
+              <a:defRPr sz="1100">
+                <a:solidFill>
+                  <a:srgbClr val="475569"/>
+                </a:solidFill>
+                <a:latin typeface="Malgun Gothic"/>
+              </a:defRPr>
+            </a:pPr>
+            <a:r>
+              <a:t>정확한 심사 건을 만들고 흐름을 관리</a:t>
+            </a:r>
+          </a:p>
+          <a:p>
+            <a:pPr>
+              <a:spcAft>
+                <a:spcPts val="500"/>
+              </a:spcAft>
+              <a:defRPr sz="1100">
+                <a:solidFill>
+                  <a:srgbClr val="475569"/>
+                </a:solidFill>
+                <a:latin typeface="Malgun Gothic"/>
+              </a:defRPr>
+            </a:pPr>
+            <a:r>
+              <a:t>• 신규 평가과제 등록</a:t>
+            </a:r>
+          </a:p>
+          <a:p>
+            <a:pPr>
+              <a:spcAft>
+                <a:spcPts val="500"/>
+              </a:spcAft>
+              <a:defRPr sz="1100">
+                <a:solidFill>
+                  <a:srgbClr val="475569"/>
+                </a:solidFill>
+                <a:latin typeface="Malgun Gothic"/>
+              </a:defRPr>
+            </a:pPr>
+            <a:r>
+              <a:t>• 현업·기술·보안 패널 지정</a:t>
+            </a:r>
+          </a:p>
+          <a:p>
+            <a:pPr>
+              <a:spcAft>
+                <a:spcPts val="500"/>
+              </a:spcAft>
+              <a:defRPr sz="1100">
+                <a:solidFill>
+                  <a:srgbClr val="475569"/>
+                </a:solidFill>
+                <a:latin typeface="Malgun Gothic"/>
+              </a:defRPr>
+            </a:pPr>
+            <a:r>
+              <a:t>• 이해상충 여부 확인 및 조정</a:t>
+            </a:r>
+          </a:p>
+          <a:p>
+            <a:pPr>
+              <a:spcAft>
+                <a:spcPts val="500"/>
+              </a:spcAft>
+              <a:defRPr sz="1100">
+                <a:solidFill>
+                  <a:srgbClr val="475569"/>
+                </a:solidFill>
+                <a:latin typeface="Malgun Gothic"/>
+              </a:defRPr>
+            </a:pPr>
+            <a:r>
+              <a:t>• 큐·상태·점수 진척 모니터링</a:t>
+            </a:r>
+          </a:p>
+          <a:p>
+            <a:pPr>
+              <a:spcAft>
+                <a:spcPts val="500"/>
+              </a:spcAft>
+              <a:defRPr sz="1100">
+                <a:solidFill>
+                  <a:srgbClr val="475569"/>
+                </a:solidFill>
+                <a:latin typeface="Malgun Gothic"/>
+              </a:defRPr>
+            </a:pPr>
+            <a:r>
+              <a:t>• 최종 보고서 확인 및 인쇄</a:t>
+            </a:r>
+          </a:p>
+          <a:p>
             <a:br/>
-            <a:r>
-              <a:t>(탁월 100, 양호 85, 보통 70, 미흡 50, 부족 30)</a:t>
-            </a:r>
-          </a:p>
-          <a:p>
-            <a:pPr>
-              <a:spcAft>
-                <a:spcPts val="600"/>
-              </a:spcAft>
-              <a:defRPr sz="1200">
-                <a:solidFill>
-                  <a:srgbClr val="94A3B8"/>
-                </a:solidFill>
-                <a:latin typeface="Malgun Gothic"/>
-              </a:defRPr>
-            </a:pPr>
-            <a:r>
-              <a:t>• 각 등급별 정성/정량적 세부 텍스트 설명 렌더링으로 객관성 확보</a:t>
-            </a:r>
-          </a:p>
-          <a:p>
-            <a:pPr>
-              <a:spcAft>
-                <a:spcPts val="600"/>
-              </a:spcAft>
-              <a:defRPr sz="1200">
-                <a:solidFill>
-                  <a:srgbClr val="94A3B8"/>
-                </a:solidFill>
-                <a:latin typeface="Malgun Gothic"/>
-              </a:defRPr>
-            </a:pPr>
-            <a:r>
-              <a:t>• 과제 카테고리별 맞춤 질문은행 도우미 탑재 (질문 검색 기능 포함)</a:t>
-            </a:r>
-          </a:p>
-          <a:p>
-            <a:pPr>
-              <a:spcAft>
-                <a:spcPts val="600"/>
-              </a:spcAft>
-              <a:defRPr sz="1200">
-                <a:solidFill>
-                  <a:srgbClr val="94A3B8"/>
-                </a:solidFill>
-                <a:latin typeface="Malgun Gothic"/>
-              </a:defRPr>
-            </a:pPr>
-            <a:r>
-              <a:t>• 오른쪽 화면: 심사위원 점수 입력 및 보안 체크리스트 작업 화면</a:t>
-            </a:r>
-          </a:p>
-        </p:txBody>
-      </p:sp>
-      <p:sp>
-        <p:nvSpPr>
-          <p:cNvPr id="7" name="Rounded Rectangle 6"/>
+            <a:pPr>
+              <a:spcAft>
+                <a:spcPts val="500"/>
+              </a:spcAft>
+              <a:defRPr sz="1100">
+                <a:solidFill>
+                  <a:srgbClr val="475569"/>
+                </a:solidFill>
+                <a:latin typeface="Malgun Gothic"/>
+              </a:defRPr>
+            </a:pPr>
+            <a:r>
+              <a:t>[완료 신호] 3인의 심사가 모두 제출되고 종합 판정이 표시됨</a:t>
+            </a:r>
+          </a:p>
+        </p:txBody>
+      </p:sp>
+      <p:sp>
+        <p:nvSpPr>
+          <p:cNvPr id="9" name="Rounded Rectangle 8"/>
           <p:cNvSpPr/>
           <p:nvPr/>
         </p:nvSpPr>
         <p:spPr>
           <a:xfrm>
-            <a:off x="6400800" y="1828800"/>
-            <a:ext cx="5212080" cy="4114800"/>
+            <a:off x="6309360" y="1828800"/>
+            <a:ext cx="5303520" cy="4114800"/>
           </a:xfrm>
           <a:prstGeom prst="roundRect">
             <a:avLst/>
           </a:prstGeom>
           <a:solidFill>
-            <a:srgbClr val="1E293B"/>
+            <a:srgbClr val="F8FAFC"/>
           </a:solidFill>
-          <a:ln w="19050">
+          <a:ln w="12700">
             <a:solidFill>
-              <a:srgbClr val="6366F1"/>
+              <a:srgbClr val="E2E8F0"/>
             </a:solidFill>
           </a:ln>
         </p:spPr>
@@ -4325,30 +9193,158 @@
           </a:p>
         </p:txBody>
       </p:sp>
-      <p:pic>
-        <p:nvPicPr>
-          <p:cNvPr id="8" name="Picture 7" descr="media__1784176902473.png"/>
-          <p:cNvPicPr>
-            <a:picLocks noChangeAspect="1"/>
-          </p:cNvPicPr>
-          <p:nvPr/>
-        </p:nvPicPr>
-        <p:blipFill>
-          <a:blip r:embed="rId2"/>
-          <a:stretch>
-            <a:fillRect/>
-          </a:stretch>
-        </p:blipFill>
-        <p:spPr>
-          <a:xfrm>
-            <a:off x="6814049" y="1965960"/>
-            <a:ext cx="4385580" cy="3840480"/>
-          </a:xfrm>
-          <a:prstGeom prst="rect">
-            <a:avLst/>
-          </a:prstGeom>
-        </p:spPr>
-      </p:pic>
+      <p:sp>
+        <p:nvSpPr>
+          <p:cNvPr id="10" name="TextBox 9"/>
+          <p:cNvSpPr txBox="1"/>
+          <p:nvPr/>
+        </p:nvSpPr>
+        <p:spPr>
+          <a:xfrm>
+            <a:off x="6446520" y="1965960"/>
+            <a:ext cx="5029200" cy="3840480"/>
+          </a:xfrm>
+          <a:prstGeom prst="rect">
+            <a:avLst/>
+          </a:prstGeom>
+          <a:noFill/>
+        </p:spPr>
+        <p:txBody>
+          <a:bodyPr wrap="square">
+            <a:spAutoFit/>
+          </a:bodyPr>
+          <a:lstStyle/>
+          <a:p>
+            <a:pPr>
+              <a:spcAft>
+                <a:spcPts val="1000"/>
+              </a:spcAft>
+              <a:defRPr sz="1400" b="1">
+                <a:solidFill>
+                  <a:srgbClr val="0F172A"/>
+                </a:solidFill>
+                <a:latin typeface="Malgun Gothic"/>
+              </a:defRPr>
+            </a:pPr>
+            <a:r>
+              <a:t>심사위원</a:t>
+            </a:r>
+          </a:p>
+          <a:p>
+            <a:pPr>
+              <a:spcAft>
+                <a:spcPts val="500"/>
+              </a:spcAft>
+              <a:defRPr sz="1100">
+                <a:solidFill>
+                  <a:srgbClr val="475569"/>
+                </a:solidFill>
+                <a:latin typeface="Malgun Gothic"/>
+              </a:defRPr>
+            </a:pPr>
+            <a:r>
+              <a:t>배정된 과제를 근거에 따라 독립 평가</a:t>
+            </a:r>
+          </a:p>
+          <a:p>
+            <a:pPr>
+              <a:spcAft>
+                <a:spcPts val="500"/>
+              </a:spcAft>
+              <a:defRPr sz="1100">
+                <a:solidFill>
+                  <a:srgbClr val="475569"/>
+                </a:solidFill>
+                <a:latin typeface="Malgun Gothic"/>
+              </a:defRPr>
+            </a:pPr>
+            <a:r>
+              <a:t>• 제출물·시연·링크 검토 및 재현성 검증</a:t>
+            </a:r>
+          </a:p>
+          <a:p>
+            <a:pPr>
+              <a:spcAft>
+                <a:spcPts val="500"/>
+              </a:spcAft>
+              <a:defRPr sz="1100">
+                <a:solidFill>
+                  <a:srgbClr val="475569"/>
+                </a:solidFill>
+                <a:latin typeface="Malgun Gothic"/>
+              </a:defRPr>
+            </a:pPr>
+            <a:r>
+              <a:t>• 공통 보안 체크리스트 확인</a:t>
+            </a:r>
+          </a:p>
+          <a:p>
+            <a:pPr>
+              <a:spcAft>
+                <a:spcPts val="500"/>
+              </a:spcAft>
+              <a:defRPr sz="1100">
+                <a:solidFill>
+                  <a:srgbClr val="475569"/>
+                </a:solidFill>
+                <a:latin typeface="Malgun Gothic"/>
+              </a:defRPr>
+            </a:pPr>
+            <a:r>
+              <a:t>• Level 3 / Level 4 루브릭 채점</a:t>
+            </a:r>
+          </a:p>
+          <a:p>
+            <a:pPr>
+              <a:spcAft>
+                <a:spcPts val="500"/>
+              </a:spcAft>
+              <a:defRPr sz="1100">
+                <a:solidFill>
+                  <a:srgbClr val="475569"/>
+                </a:solidFill>
+                <a:latin typeface="Malgun Gothic"/>
+              </a:defRPr>
+            </a:pPr>
+            <a:r>
+              <a:t>• 평가 의견 및 질문 면접 기록</a:t>
+            </a:r>
+          </a:p>
+          <a:p>
+            <a:pPr>
+              <a:spcAft>
+                <a:spcPts val="500"/>
+              </a:spcAft>
+              <a:defRPr sz="1100">
+                <a:solidFill>
+                  <a:srgbClr val="475569"/>
+                </a:solidFill>
+                <a:latin typeface="Malgun Gothic"/>
+              </a:defRPr>
+            </a:pPr>
+            <a:r>
+              <a:t>• 위원 간 점수 편차 확인 후 최종 제출</a:t>
+            </a:r>
+          </a:p>
+          <a:p>
+            <a:br/>
+            <a:pPr>
+              <a:spcAft>
+                <a:spcPts val="500"/>
+              </a:spcAft>
+              <a:defRPr sz="1100">
+                <a:solidFill>
+                  <a:srgbClr val="475569"/>
+                </a:solidFill>
+                <a:latin typeface="Malgun Gothic"/>
+              </a:defRPr>
+            </a:pPr>
+            <a:r>
+              <a:t>[완료 신호] 내 심사 상태가 「심사완료」로 표시됨</a:t>
+            </a:r>
+          </a:p>
+        </p:txBody>
+      </p:sp>
     </p:spTree>
   </p:cSld>
   <p:clrMapOvr>
@@ -4363,7 +9359,7 @@
     <p:bg>
       <p:bgPr>
         <a:solidFill>
-          <a:srgbClr val="0F172A"/>
+          <a:srgbClr val="FFFFFF"/>
         </a:solidFill>
         <a:effectLst/>
       </p:bgPr>
@@ -4392,7 +9388,7 @@
           <a:noFill/>
         </p:spPr>
         <p:txBody>
-          <a:bodyPr wrap="square">
+          <a:bodyPr wrap="none">
             <a:spAutoFit/>
           </a:bodyPr>
           <a:lstStyle/>
@@ -4400,13 +9396,13 @@
             <a:pPr>
               <a:defRPr sz="1100" b="1">
                 <a:solidFill>
-                  <a:srgbClr val="6366F1"/>
-                </a:solidFill>
-                <a:latin typeface="Malgun Gothic"/>
-              </a:defRPr>
-            </a:pPr>
-            <a:r>
-              <a:t>AICA SYSTEM MANUAL</a:t>
+                  <a:srgbClr val="2563EB"/>
+                </a:solidFill>
+                <a:latin typeface="Malgun Gothic"/>
+              </a:defRPr>
+            </a:pPr>
+            <a:r>
+              <a:t>운영간사</a:t>
             </a:r>
           </a:p>
         </p:txBody>
@@ -4420,7 +9416,7 @@
         <p:spPr>
           <a:xfrm>
             <a:off x="548640" y="640080"/>
-            <a:ext cx="9144000" cy="731520"/>
+            <a:ext cx="10058400" cy="731520"/>
           </a:xfrm>
           <a:prstGeom prst="rect">
             <a:avLst/>
@@ -4428,21 +9424,21 @@
           <a:noFill/>
         </p:spPr>
         <p:txBody>
-          <a:bodyPr wrap="square">
+          <a:bodyPr wrap="none">
             <a:spAutoFit/>
           </a:bodyPr>
           <a:lstStyle/>
           <a:p>
             <a:pPr>
-              <a:defRPr sz="2800" b="1">
-                <a:solidFill>
-                  <a:srgbClr val="FFFFFF"/>
-                </a:solidFill>
-                <a:latin typeface="Malgun Gothic"/>
-              </a:defRPr>
-            </a:pPr>
-            <a:r>
-              <a:t>4. 평가 결과 보고서 및 데이터 관리</a:t>
+              <a:defRPr sz="2600" b="1">
+                <a:solidFill>
+                  <a:srgbClr val="0F172A"/>
+                </a:solidFill>
+                <a:latin typeface="Malgun Gothic"/>
+              </a:defRPr>
+            </a:pPr>
+            <a:r>
+              <a:t>대시보드에서 전체 심사 현황부터 확인합니다</a:t>
             </a:r>
           </a:p>
         </p:txBody>
@@ -4456,18 +9452,16 @@
         <p:spPr>
           <a:xfrm>
             <a:off x="548640" y="1371600"/>
-            <a:ext cx="11094415" cy="27432"/>
+            <a:ext cx="11094415" cy="13716"/>
           </a:xfrm>
           <a:prstGeom prst="rect">
             <a:avLst/>
           </a:prstGeom>
           <a:solidFill>
-            <a:srgbClr val="1E293B"/>
+            <a:srgbClr val="E2E8F0"/>
           </a:solidFill>
           <a:ln>
-            <a:solidFill>
-              <a:srgbClr val="1E293B"/>
-            </a:solidFill>
+            <a:noFill/>
           </a:ln>
         </p:spPr>
         <p:style>
@@ -4494,24 +9488,96 @@
       </p:sp>
       <p:sp>
         <p:nvSpPr>
-          <p:cNvPr id="5" name="Rounded Rectangle 4"/>
+          <p:cNvPr id="5" name="TextBox 4"/>
+          <p:cNvSpPr txBox="1"/>
+          <p:nvPr/>
+        </p:nvSpPr>
+        <p:spPr>
+          <a:xfrm>
+            <a:off x="548640" y="6309360"/>
+            <a:ext cx="9144000" cy="365760"/>
+          </a:xfrm>
+          <a:prstGeom prst="rect">
+            <a:avLst/>
+          </a:prstGeom>
+          <a:noFill/>
+        </p:spPr>
+        <p:txBody>
+          <a:bodyPr wrap="none">
+            <a:spAutoFit/>
+          </a:bodyPr>
+          <a:lstStyle/>
+          <a:p>
+            <a:pPr>
+              <a:defRPr sz="900">
+                <a:solidFill>
+                  <a:srgbClr val="64748B"/>
+                </a:solidFill>
+                <a:latin typeface="Malgun Gothic"/>
+              </a:defRPr>
+            </a:pPr>
+            <a:r>
+              <a:t>AICA 자격심사 시스템 사용자 매뉴얼 · 2026.07</a:t>
+            </a:r>
+          </a:p>
+        </p:txBody>
+      </p:sp>
+      <p:sp>
+        <p:nvSpPr>
+          <p:cNvPr id="6" name="TextBox 5"/>
+          <p:cNvSpPr txBox="1"/>
+          <p:nvPr/>
+        </p:nvSpPr>
+        <p:spPr>
+          <a:xfrm>
+            <a:off x="10820095" y="6309360"/>
+            <a:ext cx="822960" cy="365760"/>
+          </a:xfrm>
+          <a:prstGeom prst="rect">
+            <a:avLst/>
+          </a:prstGeom>
+          <a:noFill/>
+        </p:spPr>
+        <p:txBody>
+          <a:bodyPr wrap="none">
+            <a:spAutoFit/>
+          </a:bodyPr>
+          <a:lstStyle/>
+          <a:p>
+            <a:pPr algn="r">
+              <a:defRPr sz="900">
+                <a:solidFill>
+                  <a:srgbClr val="64748B"/>
+                </a:solidFill>
+                <a:latin typeface="Malgun Gothic"/>
+              </a:defRPr>
+            </a:pPr>
+            <a:r>
+              <a:t>05</a:t>
+            </a:r>
+          </a:p>
+        </p:txBody>
+      </p:sp>
+      <p:sp>
+        <p:nvSpPr>
+          <p:cNvPr id="7" name="Rounded Rectangle 6"/>
           <p:cNvSpPr/>
           <p:nvPr/>
         </p:nvSpPr>
         <p:spPr>
           <a:xfrm>
             <a:off x="548640" y="1828800"/>
-            <a:ext cx="5486400" cy="4114800"/>
+            <a:ext cx="5303520" cy="4114800"/>
           </a:xfrm>
           <a:prstGeom prst="roundRect">
             <a:avLst/>
           </a:prstGeom>
           <a:solidFill>
-            <a:srgbClr val="1E293B"/>
+            <a:srgbClr val="F8FAFC"/>
           </a:solidFill>
-          <a:ln w="19050">
+          <a:ln w="12700">
             <a:solidFill>
-              <a:srgbClr val="6366F1"/>
+              <a:srgbClr val="E2E8F0"/>
             </a:solidFill>
           </a:ln>
         </p:spPr>
@@ -4539,14 +9605,14 @@
       </p:sp>
       <p:sp>
         <p:nvSpPr>
-          <p:cNvPr id="6" name="TextBox 5"/>
+          <p:cNvPr id="8" name="TextBox 7"/>
           <p:cNvSpPr txBox="1"/>
           <p:nvPr/>
         </p:nvSpPr>
         <p:spPr>
           <a:xfrm>
             <a:off x="685800" y="1965960"/>
-            <a:ext cx="5212080" cy="3840480"/>
+            <a:ext cx="5029200" cy="3840480"/>
           </a:xfrm>
           <a:prstGeom prst="rect">
             <a:avLst/>
@@ -4563,119 +9629,120 @@
               <a:spcAft>
                 <a:spcPts val="1000"/>
               </a:spcAft>
-              <a:defRPr sz="1500" b="1">
-                <a:solidFill>
-                  <a:srgbClr val="6366F1"/>
-                </a:solidFill>
-                <a:latin typeface="Malgun Gothic"/>
-              </a:defRPr>
-            </a:pPr>
-            <a:r>
-              <a:t>인쇄 최적화 보고서 출력 및 서명 동기화</a:t>
-            </a:r>
-          </a:p>
-          <a:p>
-            <a:pPr>
-              <a:spcAft>
-                <a:spcPts val="600"/>
-              </a:spcAft>
-              <a:defRPr sz="1200">
-                <a:solidFill>
-                  <a:srgbClr val="94A3B8"/>
-                </a:solidFill>
-                <a:latin typeface="Malgun Gothic"/>
-              </a:defRPr>
-            </a:pPr>
-            <a:r>
-              <a:t>• 3인 평가 점수가 모두 제출되면 종합 판정 결과가 자동 집계 및 승인</a:t>
-            </a:r>
-          </a:p>
-          <a:p>
-            <a:pPr>
-              <a:spcAft>
-                <a:spcPts val="600"/>
-              </a:spcAft>
-              <a:defRPr sz="1200">
-                <a:solidFill>
-                  <a:srgbClr val="94A3B8"/>
-                </a:solidFill>
-                <a:latin typeface="Malgun Gothic"/>
-              </a:defRPr>
-            </a:pPr>
-            <a:r>
-              <a:t>• A4 표준 비율 레이아웃 및 브라우저 프린트 내보내기 최적화 지원</a:t>
-            </a:r>
-          </a:p>
-          <a:p>
-            <a:pPr>
-              <a:spcAft>
-                <a:spcPts val="600"/>
-              </a:spcAft>
-              <a:defRPr sz="1200">
-                <a:solidFill>
-                  <a:srgbClr val="94A3B8"/>
-                </a:solidFill>
-                <a:latin typeface="Malgun Gothic"/>
-              </a:defRPr>
-            </a:pPr>
-            <a:r>
-              <a:t>• 하단 서명 명패: 임의의 홍길동 명패를 배정된 심사위원 이름으로 자동 변경 완료</a:t>
-            </a:r>
-          </a:p>
-          <a:p>
-            <a:pPr>
-              <a:spcAft>
-                <a:spcPts val="600"/>
-              </a:spcAft>
-              <a:defRPr sz="1200">
-                <a:solidFill>
-                  <a:srgbClr val="94A3B8"/>
-                </a:solidFill>
-                <a:latin typeface="Malgun Gothic"/>
-              </a:defRPr>
-            </a:pPr>
-            <a:r>
-              <a:t>• Firebase Cloud DB 연동을 통한 영속적 평가 정보 자동 관리</a:t>
-            </a:r>
-          </a:p>
-          <a:p>
-            <a:pPr>
-              <a:spcAft>
-                <a:spcPts val="600"/>
-              </a:spcAft>
-              <a:defRPr sz="1200">
-                <a:solidFill>
-                  <a:srgbClr val="94A3B8"/>
-                </a:solidFill>
-                <a:latin typeface="Malgun Gothic"/>
-              </a:defRPr>
-            </a:pPr>
-            <a:r>
-              <a:t>• 오른쪽 화면: 서명이 실제 심사위원 성명으로 연동된 결과 보고서 하단부</a:t>
-            </a:r>
-          </a:p>
-        </p:txBody>
-      </p:sp>
-      <p:sp>
-        <p:nvSpPr>
-          <p:cNvPr id="7" name="Rounded Rectangle 6"/>
+              <a:defRPr sz="1400" b="1">
+                <a:solidFill>
+                  <a:srgbClr val="0F172A"/>
+                </a:solidFill>
+                <a:latin typeface="Malgun Gothic"/>
+              </a:defRPr>
+            </a:pPr>
+            <a:r>
+              <a:t>AICA 자격심사 관리 &amp; 대기 큐 구조</a:t>
+            </a:r>
+          </a:p>
+          <a:p>
+            <a:pPr>
+              <a:spcAft>
+                <a:spcPts val="500"/>
+              </a:spcAft>
+              <a:defRPr sz="1100">
+                <a:solidFill>
+                  <a:srgbClr val="475569"/>
+                </a:solidFill>
+                <a:latin typeface="Malgun Gothic"/>
+              </a:defRPr>
+            </a:pPr>
+            <a:r>
+              <a:t>1. 요약 지표: 전체, 완료, 진행 중, 대기 인원을 실시간 확인</a:t>
+            </a:r>
+          </a:p>
+          <a:p>
+            <a:pPr>
+              <a:spcAft>
+                <a:spcPts val="500"/>
+              </a:spcAft>
+              <a:defRPr sz="1100">
+                <a:solidFill>
+                  <a:srgbClr val="475569"/>
+                </a:solidFill>
+                <a:latin typeface="Malgun Gothic"/>
+              </a:defRPr>
+            </a:pPr>
+            <a:r>
+              <a:t>2. 관계사 평균: 완료된 심사를 기준으로 계열사별 평균 점수를 모니터링</a:t>
+            </a:r>
+          </a:p>
+          <a:p>
+            <a:pPr>
+              <a:spcAft>
+                <a:spcPts val="500"/>
+              </a:spcAft>
+              <a:defRPr sz="1100">
+                <a:solidFill>
+                  <a:srgbClr val="475569"/>
+                </a:solidFill>
+                <a:latin typeface="Malgun Gothic"/>
+              </a:defRPr>
+            </a:pPr>
+            <a:r>
+              <a:t>3. 평가 기준: L3/L4 가중치와 치명적 결격 기준을 확인</a:t>
+            </a:r>
+          </a:p>
+          <a:p>
+            <a:pPr>
+              <a:spcAft>
+                <a:spcPts val="500"/>
+              </a:spcAft>
+              <a:defRPr sz="1100">
+                <a:solidFill>
+                  <a:srgbClr val="475569"/>
+                </a:solidFill>
+                <a:latin typeface="Malgun Gothic"/>
+              </a:defRPr>
+            </a:pPr>
+            <a:r>
+              <a:t>4. 전체 큐: 필터와 액션을 통한 개별 심사 통합 관리</a:t>
+            </a:r>
+          </a:p>
+          <a:p>
+            <a:br/>
+            <a:pPr>
+              <a:spcAft>
+                <a:spcPts val="500"/>
+              </a:spcAft>
+              <a:defRPr sz="1100">
+                <a:solidFill>
+                  <a:srgbClr val="475569"/>
+                </a:solidFill>
+                <a:latin typeface="Malgun Gothic"/>
+              </a:defRPr>
+            </a:pPr>
+            <a:r>
+              <a:t>💡 명단 보기 기능: 각 지표(통계 카드) 클릭 시 해당 대상자 목록을 모달 팝업으로 즉시 확인할 수 있습니다.</a:t>
+            </a:r>
+          </a:p>
+        </p:txBody>
+      </p:sp>
+      <p:sp>
+        <p:nvSpPr>
+          <p:cNvPr id="9" name="Rectangle 8"/>
           <p:cNvSpPr/>
           <p:nvPr/>
         </p:nvSpPr>
         <p:spPr>
           <a:xfrm>
-            <a:off x="6400800" y="1828800"/>
-            <a:ext cx="5212080" cy="4114800"/>
-          </a:xfrm>
-          <a:prstGeom prst="roundRect">
+            <a:off x="6309360" y="1828800"/>
+            <a:ext cx="5303520" cy="4114800"/>
+          </a:xfrm>
+          <a:prstGeom prst="rect">
             <a:avLst/>
           </a:prstGeom>
           <a:solidFill>
-            <a:srgbClr val="1E293B"/>
+            <a:srgbClr val="F8FAFC"/>
           </a:solidFill>
           <a:ln w="19050">
             <a:solidFill>
-              <a:srgbClr val="6366F1"/>
+              <a:srgbClr val="E2E8F0"/>
             </a:solidFill>
           </a:ln>
         </p:spPr>
@@ -4703,7 +9770,7 @@
       </p:sp>
       <p:pic>
         <p:nvPicPr>
-          <p:cNvPr id="8" name="Picture 7" descr="media__1784596287593.png"/>
+          <p:cNvPr id="10" name="Picture 9" descr="media__1784188798650.png"/>
           <p:cNvPicPr>
             <a:picLocks noChangeAspect="1"/>
           </p:cNvPicPr>
@@ -4717,8 +9784,8 @@
         </p:blipFill>
         <p:spPr>
           <a:xfrm>
-            <a:off x="7059982" y="1965960"/>
-            <a:ext cx="3893714" cy="3840480"/>
+            <a:off x="7323600" y="1965960"/>
+            <a:ext cx="3275038" cy="3840480"/>
           </a:xfrm>
           <a:prstGeom prst="rect">
             <a:avLst/>
@@ -4739,7 +9806,7 @@
     <p:bg>
       <p:bgPr>
         <a:solidFill>
-          <a:srgbClr val="0F172A"/>
+          <a:srgbClr val="FFFFFF"/>
         </a:solidFill>
         <a:effectLst/>
       </p:bgPr>
@@ -4768,7 +9835,7 @@
           <a:noFill/>
         </p:spPr>
         <p:txBody>
-          <a:bodyPr wrap="square">
+          <a:bodyPr wrap="none">
             <a:spAutoFit/>
           </a:bodyPr>
           <a:lstStyle/>
@@ -4776,13 +9843,13 @@
             <a:pPr>
               <a:defRPr sz="1100" b="1">
                 <a:solidFill>
-                  <a:srgbClr val="6366F1"/>
-                </a:solidFill>
-                <a:latin typeface="Malgun Gothic"/>
-              </a:defRPr>
-            </a:pPr>
-            <a:r>
-              <a:t>AICA SYSTEM MANUAL</a:t>
+                  <a:srgbClr val="2563EB"/>
+                </a:solidFill>
+                <a:latin typeface="Malgun Gothic"/>
+              </a:defRPr>
+            </a:pPr>
+            <a:r>
+              <a:t>운영간사</a:t>
             </a:r>
           </a:p>
         </p:txBody>
@@ -4796,7 +9863,7 @@
         <p:spPr>
           <a:xfrm>
             <a:off x="548640" y="640080"/>
-            <a:ext cx="9144000" cy="731520"/>
+            <a:ext cx="10058400" cy="731520"/>
           </a:xfrm>
           <a:prstGeom prst="rect">
             <a:avLst/>
@@ -4804,21 +9871,21 @@
           <a:noFill/>
         </p:spPr>
         <p:txBody>
-          <a:bodyPr wrap="square">
+          <a:bodyPr wrap="none">
             <a:spAutoFit/>
           </a:bodyPr>
           <a:lstStyle/>
           <a:p>
             <a:pPr>
-              <a:defRPr sz="2800" b="1">
-                <a:solidFill>
-                  <a:srgbClr val="FFFFFF"/>
-                </a:solidFill>
-                <a:latin typeface="Malgun Gothic"/>
-              </a:defRPr>
-            </a:pPr>
-            <a:r>
-              <a:t>5. 서버 배포 및 구동 가이드</a:t>
+              <a:defRPr sz="2600" b="1">
+                <a:solidFill>
+                  <a:srgbClr val="0F172A"/>
+                </a:solidFill>
+                <a:latin typeface="Malgun Gothic"/>
+              </a:defRPr>
+            </a:pPr>
+            <a:r>
+              <a:t>신규 과제는 필수 정보와 증빙을 한 번에 등록합니다</a:t>
             </a:r>
           </a:p>
         </p:txBody>
@@ -4832,18 +9899,16 @@
         <p:spPr>
           <a:xfrm>
             <a:off x="548640" y="1371600"/>
-            <a:ext cx="11094415" cy="27432"/>
+            <a:ext cx="11094415" cy="13716"/>
           </a:xfrm>
           <a:prstGeom prst="rect">
             <a:avLst/>
           </a:prstGeom>
           <a:solidFill>
-            <a:srgbClr val="1E293B"/>
+            <a:srgbClr val="E2E8F0"/>
           </a:solidFill>
           <a:ln>
-            <a:solidFill>
-              <a:srgbClr val="1E293B"/>
-            </a:solidFill>
+            <a:noFill/>
           </a:ln>
         </p:spPr>
         <p:style>
@@ -4870,24 +9935,96 @@
       </p:sp>
       <p:sp>
         <p:nvSpPr>
-          <p:cNvPr id="5" name="Rounded Rectangle 4"/>
+          <p:cNvPr id="5" name="TextBox 4"/>
+          <p:cNvSpPr txBox="1"/>
+          <p:nvPr/>
+        </p:nvSpPr>
+        <p:spPr>
+          <a:xfrm>
+            <a:off x="548640" y="6309360"/>
+            <a:ext cx="9144000" cy="365760"/>
+          </a:xfrm>
+          <a:prstGeom prst="rect">
+            <a:avLst/>
+          </a:prstGeom>
+          <a:noFill/>
+        </p:spPr>
+        <p:txBody>
+          <a:bodyPr wrap="none">
+            <a:spAutoFit/>
+          </a:bodyPr>
+          <a:lstStyle/>
+          <a:p>
+            <a:pPr>
+              <a:defRPr sz="900">
+                <a:solidFill>
+                  <a:srgbClr val="64748B"/>
+                </a:solidFill>
+                <a:latin typeface="Malgun Gothic"/>
+              </a:defRPr>
+            </a:pPr>
+            <a:r>
+              <a:t>AICA 자격심사 시스템 사용자 매뉴얼 · 2026.07</a:t>
+            </a:r>
+          </a:p>
+        </p:txBody>
+      </p:sp>
+      <p:sp>
+        <p:nvSpPr>
+          <p:cNvPr id="6" name="TextBox 5"/>
+          <p:cNvSpPr txBox="1"/>
+          <p:nvPr/>
+        </p:nvSpPr>
+        <p:spPr>
+          <a:xfrm>
+            <a:off x="10820095" y="6309360"/>
+            <a:ext cx="822960" cy="365760"/>
+          </a:xfrm>
+          <a:prstGeom prst="rect">
+            <a:avLst/>
+          </a:prstGeom>
+          <a:noFill/>
+        </p:spPr>
+        <p:txBody>
+          <a:bodyPr wrap="none">
+            <a:spAutoFit/>
+          </a:bodyPr>
+          <a:lstStyle/>
+          <a:p>
+            <a:pPr algn="r">
+              <a:defRPr sz="900">
+                <a:solidFill>
+                  <a:srgbClr val="64748B"/>
+                </a:solidFill>
+                <a:latin typeface="Malgun Gothic"/>
+              </a:defRPr>
+            </a:pPr>
+            <a:r>
+              <a:t>06</a:t>
+            </a:r>
+          </a:p>
+        </p:txBody>
+      </p:sp>
+      <p:sp>
+        <p:nvSpPr>
+          <p:cNvPr id="7" name="Rounded Rectangle 6"/>
           <p:cNvSpPr/>
           <p:nvPr/>
         </p:nvSpPr>
         <p:spPr>
           <a:xfrm>
             <a:off x="548640" y="1828800"/>
-            <a:ext cx="5486400" cy="4114800"/>
+            <a:ext cx="3474720" cy="4114800"/>
           </a:xfrm>
           <a:prstGeom prst="roundRect">
             <a:avLst/>
           </a:prstGeom>
           <a:solidFill>
-            <a:srgbClr val="1E293B"/>
+            <a:srgbClr val="EFF6FF"/>
           </a:solidFill>
-          <a:ln w="19050">
+          <a:ln w="12700">
             <a:solidFill>
-              <a:srgbClr val="6366F1"/>
+              <a:srgbClr val="E2E8F0"/>
             </a:solidFill>
           </a:ln>
         </p:spPr>
@@ -4915,14 +10052,14 @@
       </p:sp>
       <p:sp>
         <p:nvSpPr>
-          <p:cNvPr id="6" name="TextBox 5"/>
+          <p:cNvPr id="8" name="TextBox 7"/>
           <p:cNvSpPr txBox="1"/>
           <p:nvPr/>
         </p:nvSpPr>
         <p:spPr>
           <a:xfrm>
             <a:off x="685800" y="1965960"/>
-            <a:ext cx="5212080" cy="3840480"/>
+            <a:ext cx="3200400" cy="3840480"/>
           </a:xfrm>
           <a:prstGeom prst="rect">
             <a:avLst/>
@@ -4939,119 +10076,124 @@
               <a:spcAft>
                 <a:spcPts val="1000"/>
               </a:spcAft>
-              <a:defRPr sz="1500" b="1">
-                <a:solidFill>
-                  <a:srgbClr val="6366F1"/>
-                </a:solidFill>
-                <a:latin typeface="Malgun Gothic"/>
-              </a:defRPr>
-            </a:pPr>
-            <a:r>
-              <a:t>로컬 구동, Docker 및 Windows IIS 지원</a:t>
-            </a:r>
-          </a:p>
-          <a:p>
-            <a:pPr>
-              <a:spcAft>
-                <a:spcPts val="600"/>
-              </a:spcAft>
-              <a:defRPr sz="1200">
-                <a:solidFill>
-                  <a:srgbClr val="94A3B8"/>
-                </a:solidFill>
-                <a:latin typeface="Malgun Gothic"/>
-              </a:defRPr>
-            </a:pPr>
-            <a:r>
-              <a:t>• Node.js 무설치 프로덕션 웹 서버(server.js) 실행 (포트 8080)</a:t>
-            </a:r>
-          </a:p>
-          <a:p>
-            <a:pPr>
-              <a:spcAft>
-                <a:spcPts val="600"/>
-              </a:spcAft>
-              <a:defRPr sz="1200">
-                <a:solidFill>
-                  <a:srgbClr val="94A3B8"/>
-                </a:solidFill>
-                <a:latin typeface="Malgun Gothic"/>
-              </a:defRPr>
-            </a:pPr>
-            <a:r>
-              <a:t>• Docker 빌드: `Dockerfile` 및 `nginx.conf` 구성으로 Nginx 컨테이너 기동</a:t>
-            </a:r>
-          </a:p>
-          <a:p>
-            <a:pPr>
-              <a:spcAft>
-                <a:spcPts val="600"/>
-              </a:spcAft>
-              <a:defRPr sz="1200">
-                <a:solidFill>
-                  <a:srgbClr val="94A3B8"/>
-                </a:solidFill>
-                <a:latin typeface="Malgun Gothic"/>
-              </a:defRPr>
-            </a:pPr>
-            <a:r>
-              <a:t>• Windows IIS: `web.config.example` 템플릿 제공으로 SPA URL 리라우팅 최적화</a:t>
-            </a:r>
-          </a:p>
-          <a:p>
-            <a:pPr>
-              <a:spcAft>
-                <a:spcPts val="600"/>
-              </a:spcAft>
-              <a:defRPr sz="1200">
-                <a:solidFill>
-                  <a:srgbClr val="94A3B8"/>
-                </a:solidFill>
-                <a:latin typeface="Malgun Gothic"/>
-              </a:defRPr>
-            </a:pPr>
-            <a:r>
-              <a:t>• Vite 개발 모드 힌트 박스 자동 배제로 프로덕션 소스코드 보안 유지</a:t>
-            </a:r>
-          </a:p>
-          <a:p>
-            <a:pPr>
-              <a:spcAft>
-                <a:spcPts val="600"/>
-              </a:spcAft>
-              <a:defRPr sz="1200">
-                <a:solidFill>
-                  <a:srgbClr val="94A3B8"/>
-                </a:solidFill>
-                <a:latin typeface="Malgun Gothic"/>
-              </a:defRPr>
-            </a:pPr>
-            <a:r>
-              <a:t>• 오른쪽 화면: 로컬 개발 서버 동작 및 핫 모듈 리플레이스먼트 모니터</a:t>
-            </a:r>
-          </a:p>
-        </p:txBody>
-      </p:sp>
-      <p:sp>
-        <p:nvSpPr>
-          <p:cNvPr id="7" name="Rounded Rectangle 6"/>
+              <a:defRPr sz="1400" b="1">
+                <a:solidFill>
+                  <a:srgbClr val="2563EB"/>
+                </a:solidFill>
+                <a:latin typeface="Malgun Gothic"/>
+              </a:defRPr>
+            </a:pPr>
+            <a:r>
+              <a:t>01 지원자 정보</a:t>
+            </a:r>
+          </a:p>
+          <a:p>
+            <a:pPr>
+              <a:spcAft>
+                <a:spcPts val="500"/>
+              </a:spcAft>
+              <a:defRPr sz="1100">
+                <a:solidFill>
+                  <a:srgbClr val="475569"/>
+                </a:solidFill>
+                <a:latin typeface="Malgun Gothic"/>
+              </a:defRPr>
+            </a:pPr>
+            <a:r>
+              <a:t>• 성명 및 사내 이메일 주소</a:t>
+            </a:r>
+          </a:p>
+          <a:p>
+            <a:pPr>
+              <a:spcAft>
+                <a:spcPts val="500"/>
+              </a:spcAft>
+              <a:defRPr sz="1100">
+                <a:solidFill>
+                  <a:srgbClr val="475569"/>
+                </a:solidFill>
+                <a:latin typeface="Malgun Gothic"/>
+              </a:defRPr>
+            </a:pPr>
+            <a:r>
+              <a:t>• 소속 관계사 및 부서명</a:t>
+            </a:r>
+          </a:p>
+          <a:p>
+            <a:pPr>
+              <a:spcAft>
+                <a:spcPts val="500"/>
+              </a:spcAft>
+              <a:defRPr sz="1100">
+                <a:solidFill>
+                  <a:srgbClr val="475569"/>
+                </a:solidFill>
+                <a:latin typeface="Malgun Gothic"/>
+              </a:defRPr>
+            </a:pPr>
+            <a:r>
+              <a:t>• 자격 인증 레벨 (Level 3 / 4)</a:t>
+            </a:r>
+          </a:p>
+          <a:p>
+            <a:pPr>
+              <a:spcAft>
+                <a:spcPts val="500"/>
+              </a:spcAft>
+              <a:defRPr sz="1100">
+                <a:solidFill>
+                  <a:srgbClr val="475569"/>
+                </a:solidFill>
+                <a:latin typeface="Malgun Gothic"/>
+              </a:defRPr>
+            </a:pPr>
+            <a:r>
+              <a:t>• 과제 유형 선택</a:t>
+            </a:r>
+          </a:p>
+          <a:p>
+            <a:br/>
+            <a:pPr>
+              <a:spcAft>
+                <a:spcPts val="500"/>
+              </a:spcAft>
+              <a:defRPr sz="1100">
+                <a:solidFill>
+                  <a:srgbClr val="475569"/>
+                </a:solidFill>
+                <a:latin typeface="Malgun Gothic"/>
+              </a:defRPr>
+            </a:pPr>
+            <a:r>
+              <a:t>* 유형 예시:</a:t>
+            </a:r>
+            <a:br/>
+            <a:r>
+              <a:t>RAG/챗봇, 데이터분석, 웹/앱, 업무자동화</a:t>
+            </a:r>
+          </a:p>
+        </p:txBody>
+      </p:sp>
+      <p:sp>
+        <p:nvSpPr>
+          <p:cNvPr id="9" name="Rounded Rectangle 8"/>
           <p:cNvSpPr/>
           <p:nvPr/>
         </p:nvSpPr>
         <p:spPr>
           <a:xfrm>
-            <a:off x="6400800" y="1828800"/>
-            <a:ext cx="5212080" cy="4114800"/>
+            <a:off x="4389120" y="1828800"/>
+            <a:ext cx="3474720" cy="4114800"/>
           </a:xfrm>
           <a:prstGeom prst="roundRect">
             <a:avLst/>
           </a:prstGeom>
           <a:solidFill>
-            <a:srgbClr val="1E293B"/>
+            <a:srgbClr val="F8FAFC"/>
           </a:solidFill>
-          <a:ln w="19050">
+          <a:ln w="12700">
             <a:solidFill>
-              <a:srgbClr val="6366F1"/>
+              <a:srgbClr val="E2E8F0"/>
             </a:solidFill>
           </a:ln>
         </p:spPr>
@@ -5077,9 +10219,1986 @@
           </a:p>
         </p:txBody>
       </p:sp>
+      <p:sp>
+        <p:nvSpPr>
+          <p:cNvPr id="10" name="TextBox 9"/>
+          <p:cNvSpPr txBox="1"/>
+          <p:nvPr/>
+        </p:nvSpPr>
+        <p:spPr>
+          <a:xfrm>
+            <a:off x="4526280" y="1965960"/>
+            <a:ext cx="3200400" cy="3840480"/>
+          </a:xfrm>
+          <a:prstGeom prst="rect">
+            <a:avLst/>
+          </a:prstGeom>
+          <a:noFill/>
+        </p:spPr>
+        <p:txBody>
+          <a:bodyPr wrap="square">
+            <a:spAutoFit/>
+          </a:bodyPr>
+          <a:lstStyle/>
+          <a:p>
+            <a:pPr>
+              <a:spcAft>
+                <a:spcPts val="1000"/>
+              </a:spcAft>
+              <a:defRPr sz="1400" b="1">
+                <a:solidFill>
+                  <a:srgbClr val="0F172A"/>
+                </a:solidFill>
+                <a:latin typeface="Malgun Gothic"/>
+              </a:defRPr>
+            </a:pPr>
+            <a:r>
+              <a:t>02 과제 내용</a:t>
+            </a:r>
+          </a:p>
+          <a:p>
+            <a:pPr>
+              <a:spcAft>
+                <a:spcPts val="500"/>
+              </a:spcAft>
+              <a:defRPr sz="1100">
+                <a:solidFill>
+                  <a:srgbClr val="475569"/>
+                </a:solidFill>
+                <a:latin typeface="Malgun Gothic"/>
+              </a:defRPr>
+            </a:pPr>
+            <a:r>
+              <a:t>• 평가 대상 과제명</a:t>
+            </a:r>
+          </a:p>
+          <a:p>
+            <a:pPr>
+              <a:spcAft>
+                <a:spcPts val="500"/>
+              </a:spcAft>
+              <a:defRPr sz="1100">
+                <a:solidFill>
+                  <a:srgbClr val="475569"/>
+                </a:solidFill>
+                <a:latin typeface="Malgun Gothic"/>
+              </a:defRPr>
+            </a:pPr>
+            <a:r>
+              <a:t>• Pain Point (기존 업무의 비효율)</a:t>
+            </a:r>
+          </a:p>
+          <a:p>
+            <a:pPr>
+              <a:spcAft>
+                <a:spcPts val="500"/>
+              </a:spcAft>
+              <a:defRPr sz="1100">
+                <a:solidFill>
+                  <a:srgbClr val="475569"/>
+                </a:solidFill>
+                <a:latin typeface="Malgun Gothic"/>
+              </a:defRPr>
+            </a:pPr>
+            <a:r>
+              <a:t>• AI 해결 방안 (알고리즘 및 핵심 로직)</a:t>
+            </a:r>
+          </a:p>
+          <a:p>
+            <a:pPr>
+              <a:spcAft>
+                <a:spcPts val="500"/>
+              </a:spcAft>
+              <a:defRPr sz="1100">
+                <a:solidFill>
+                  <a:srgbClr val="475569"/>
+                </a:solidFill>
+                <a:latin typeface="Malgun Gothic"/>
+              </a:defRPr>
+            </a:pPr>
+            <a:r>
+              <a:t>• 6S 기준 보고서 핵심 요약</a:t>
+            </a:r>
+          </a:p>
+          <a:p>
+            <a:br/>
+            <a:pPr>
+              <a:spcAft>
+                <a:spcPts val="500"/>
+              </a:spcAft>
+              <a:defRPr sz="1100">
+                <a:solidFill>
+                  <a:srgbClr val="475569"/>
+                </a:solidFill>
+                <a:latin typeface="Malgun Gothic"/>
+              </a:defRPr>
+            </a:pPr>
+            <a:r>
+              <a:t>* 주의:</a:t>
+            </a:r>
+            <a:br/>
+            <a:r>
+              <a:t>문제, 해결, 기대효과가 유기적으로 연결되도록 작성합니다.</a:t>
+            </a:r>
+          </a:p>
+        </p:txBody>
+      </p:sp>
+      <p:sp>
+        <p:nvSpPr>
+          <p:cNvPr id="11" name="Rounded Rectangle 10"/>
+          <p:cNvSpPr/>
+          <p:nvPr/>
+        </p:nvSpPr>
+        <p:spPr>
+          <a:xfrm>
+            <a:off x="8229600" y="1828800"/>
+            <a:ext cx="3474720" cy="4114800"/>
+          </a:xfrm>
+          <a:prstGeom prst="roundRect">
+            <a:avLst/>
+          </a:prstGeom>
+          <a:solidFill>
+            <a:srgbClr val="F8FAFC"/>
+          </a:solidFill>
+          <a:ln w="12700">
+            <a:solidFill>
+              <a:srgbClr val="E2E8F0"/>
+            </a:solidFill>
+          </a:ln>
+        </p:spPr>
+        <p:style>
+          <a:lnRef idx="1">
+            <a:schemeClr val="accent1"/>
+          </a:lnRef>
+          <a:fillRef idx="3">
+            <a:schemeClr val="accent1"/>
+          </a:fillRef>
+          <a:effectRef idx="2">
+            <a:schemeClr val="accent1"/>
+          </a:effectRef>
+          <a:fontRef idx="minor">
+            <a:schemeClr val="lt1"/>
+          </a:fontRef>
+        </p:style>
+        <p:txBody>
+          <a:bodyPr rtlCol="0" anchor="ctr"/>
+          <a:lstStyle/>
+          <a:p>
+            <a:pPr algn="ctr"/>
+          </a:p>
+        </p:txBody>
+      </p:sp>
+      <p:sp>
+        <p:nvSpPr>
+          <p:cNvPr id="12" name="TextBox 11"/>
+          <p:cNvSpPr txBox="1"/>
+          <p:nvPr/>
+        </p:nvSpPr>
+        <p:spPr>
+          <a:xfrm>
+            <a:off x="8366760" y="1965960"/>
+            <a:ext cx="3200400" cy="3840480"/>
+          </a:xfrm>
+          <a:prstGeom prst="rect">
+            <a:avLst/>
+          </a:prstGeom>
+          <a:noFill/>
+        </p:spPr>
+        <p:txBody>
+          <a:bodyPr wrap="square">
+            <a:spAutoFit/>
+          </a:bodyPr>
+          <a:lstStyle/>
+          <a:p>
+            <a:pPr>
+              <a:spcAft>
+                <a:spcPts val="1000"/>
+              </a:spcAft>
+              <a:defRPr sz="1400" b="1">
+                <a:solidFill>
+                  <a:srgbClr val="0F172A"/>
+                </a:solidFill>
+                <a:latin typeface="Malgun Gothic"/>
+              </a:defRPr>
+            </a:pPr>
+            <a:r>
+              <a:t>03 증빙 링크</a:t>
+            </a:r>
+          </a:p>
+          <a:p>
+            <a:pPr>
+              <a:spcAft>
+                <a:spcPts val="500"/>
+              </a:spcAft>
+              <a:defRPr sz="1100">
+                <a:solidFill>
+                  <a:srgbClr val="475569"/>
+                </a:solidFill>
+                <a:latin typeface="Malgun Gothic"/>
+              </a:defRPr>
+            </a:pPr>
+            <a:r>
+              <a:t>선택 입력 항목:</a:t>
+            </a:r>
+          </a:p>
+          <a:p>
+            <a:pPr>
+              <a:spcAft>
+                <a:spcPts val="500"/>
+              </a:spcAft>
+              <a:defRPr sz="1100">
+                <a:solidFill>
+                  <a:srgbClr val="475569"/>
+                </a:solidFill>
+                <a:latin typeface="Malgun Gothic"/>
+              </a:defRPr>
+            </a:pPr>
+            <a:r>
+              <a:t>• 소스코드 디렉토리 구조 요약</a:t>
+            </a:r>
+          </a:p>
+          <a:p>
+            <a:pPr>
+              <a:spcAft>
+                <a:spcPts val="500"/>
+              </a:spcAft>
+              <a:defRPr sz="1100">
+                <a:solidFill>
+                  <a:srgbClr val="475569"/>
+                </a:solidFill>
+                <a:latin typeface="Malgun Gothic"/>
+              </a:defRPr>
+            </a:pPr>
+            <a:r>
+              <a:t>• 결과 보고서 PDF 문서 주소</a:t>
+            </a:r>
+          </a:p>
+          <a:p>
+            <a:pPr>
+              <a:spcAft>
+                <a:spcPts val="500"/>
+              </a:spcAft>
+              <a:defRPr sz="1100">
+                <a:solidFill>
+                  <a:srgbClr val="475569"/>
+                </a:solidFill>
+                <a:latin typeface="Malgun Gothic"/>
+              </a:defRPr>
+            </a:pPr>
+            <a:r>
+              <a:t>• Git 소스코드 저장소 주소</a:t>
+            </a:r>
+          </a:p>
+          <a:p>
+            <a:pPr>
+              <a:spcAft>
+                <a:spcPts val="500"/>
+              </a:spcAft>
+              <a:defRPr sz="1100">
+                <a:solidFill>
+                  <a:srgbClr val="475569"/>
+                </a:solidFill>
+                <a:latin typeface="Malgun Gothic"/>
+              </a:defRPr>
+            </a:pPr>
+            <a:r>
+              <a:t>• 시연 동영상 URL 주소</a:t>
+            </a:r>
+          </a:p>
+          <a:p>
+            <a:br/>
+            <a:pPr>
+              <a:spcAft>
+                <a:spcPts val="500"/>
+              </a:spcAft>
+              <a:defRPr sz="1100">
+                <a:solidFill>
+                  <a:srgbClr val="475569"/>
+                </a:solidFill>
+                <a:latin typeface="Malgun Gothic"/>
+              </a:defRPr>
+            </a:pPr>
+            <a:r>
+              <a:t>⚠️ 심사위원이 접근 가능한 사내 링크인지 등록 전 확인합니다.</a:t>
+            </a:r>
+          </a:p>
+        </p:txBody>
+      </p:sp>
+    </p:spTree>
+  </p:cSld>
+  <p:clrMapOvr>
+    <a:masterClrMapping/>
+  </p:clrMapOvr>
+</p:sld>
+</file>
+
+<file path=ppt/slides/slide7.xml><?xml version="1.0" encoding="utf-8"?>
+<p:sld xmlns:a="http://schemas.openxmlformats.org/drawingml/2006/main" xmlns:p="http://schemas.openxmlformats.org/presentationml/2006/main" xmlns:r="http://schemas.openxmlformats.org/officeDocument/2006/relationships">
+  <p:cSld>
+    <p:bg>
+      <p:bgPr>
+        <a:solidFill>
+          <a:srgbClr val="FFFFFF"/>
+        </a:solidFill>
+        <a:effectLst/>
+      </p:bgPr>
+    </p:bg>
+    <p:spTree>
+      <p:nvGrpSpPr>
+        <p:cNvPr id="1" name=""/>
+        <p:cNvGrpSpPr/>
+        <p:nvPr/>
+      </p:nvGrpSpPr>
+      <p:grpSpPr/>
+      <p:sp>
+        <p:nvSpPr>
+          <p:cNvPr id="2" name="TextBox 1"/>
+          <p:cNvSpPr txBox="1"/>
+          <p:nvPr/>
+        </p:nvSpPr>
+        <p:spPr>
+          <a:xfrm>
+            <a:off x="548640" y="365760"/>
+            <a:ext cx="7315200" cy="365760"/>
+          </a:xfrm>
+          <a:prstGeom prst="rect">
+            <a:avLst/>
+          </a:prstGeom>
+          <a:noFill/>
+        </p:spPr>
+        <p:txBody>
+          <a:bodyPr wrap="none">
+            <a:spAutoFit/>
+          </a:bodyPr>
+          <a:lstStyle/>
+          <a:p>
+            <a:pPr>
+              <a:defRPr sz="1100" b="1">
+                <a:solidFill>
+                  <a:srgbClr val="2563EB"/>
+                </a:solidFill>
+                <a:latin typeface="Malgun Gothic"/>
+              </a:defRPr>
+            </a:pPr>
+            <a:r>
+              <a:t>운영간사</a:t>
+            </a:r>
+          </a:p>
+        </p:txBody>
+      </p:sp>
+      <p:sp>
+        <p:nvSpPr>
+          <p:cNvPr id="3" name="TextBox 2"/>
+          <p:cNvSpPr txBox="1"/>
+          <p:nvPr/>
+        </p:nvSpPr>
+        <p:spPr>
+          <a:xfrm>
+            <a:off x="548640" y="640080"/>
+            <a:ext cx="10058400" cy="731520"/>
+          </a:xfrm>
+          <a:prstGeom prst="rect">
+            <a:avLst/>
+          </a:prstGeom>
+          <a:noFill/>
+        </p:spPr>
+        <p:txBody>
+          <a:bodyPr wrap="none">
+            <a:spAutoFit/>
+          </a:bodyPr>
+          <a:lstStyle/>
+          <a:p>
+            <a:pPr>
+              <a:defRPr sz="2600" b="1">
+                <a:solidFill>
+                  <a:srgbClr val="0F172A"/>
+                </a:solidFill>
+                <a:latin typeface="Malgun Gothic"/>
+              </a:defRPr>
+            </a:pPr>
+            <a:r>
+              <a:t>패널은 전문분야별 1인씩, 이해상충 없이 배정합니다</a:t>
+            </a:r>
+          </a:p>
+        </p:txBody>
+      </p:sp>
+      <p:sp>
+        <p:nvSpPr>
+          <p:cNvPr id="4" name="Rectangle 3"/>
+          <p:cNvSpPr/>
+          <p:nvPr/>
+        </p:nvSpPr>
+        <p:spPr>
+          <a:xfrm>
+            <a:off x="548640" y="1371600"/>
+            <a:ext cx="11094415" cy="13716"/>
+          </a:xfrm>
+          <a:prstGeom prst="rect">
+            <a:avLst/>
+          </a:prstGeom>
+          <a:solidFill>
+            <a:srgbClr val="E2E8F0"/>
+          </a:solidFill>
+          <a:ln>
+            <a:noFill/>
+          </a:ln>
+        </p:spPr>
+        <p:style>
+          <a:lnRef idx="1">
+            <a:schemeClr val="accent1"/>
+          </a:lnRef>
+          <a:fillRef idx="3">
+            <a:schemeClr val="accent1"/>
+          </a:fillRef>
+          <a:effectRef idx="2">
+            <a:schemeClr val="accent1"/>
+          </a:effectRef>
+          <a:fontRef idx="minor">
+            <a:schemeClr val="lt1"/>
+          </a:fontRef>
+        </p:style>
+        <p:txBody>
+          <a:bodyPr rtlCol="0" anchor="ctr"/>
+          <a:lstStyle/>
+          <a:p>
+            <a:pPr algn="ctr"/>
+          </a:p>
+        </p:txBody>
+      </p:sp>
+      <p:sp>
+        <p:nvSpPr>
+          <p:cNvPr id="5" name="TextBox 4"/>
+          <p:cNvSpPr txBox="1"/>
+          <p:nvPr/>
+        </p:nvSpPr>
+        <p:spPr>
+          <a:xfrm>
+            <a:off x="548640" y="6309360"/>
+            <a:ext cx="9144000" cy="365760"/>
+          </a:xfrm>
+          <a:prstGeom prst="rect">
+            <a:avLst/>
+          </a:prstGeom>
+          <a:noFill/>
+        </p:spPr>
+        <p:txBody>
+          <a:bodyPr wrap="none">
+            <a:spAutoFit/>
+          </a:bodyPr>
+          <a:lstStyle/>
+          <a:p>
+            <a:pPr>
+              <a:defRPr sz="900">
+                <a:solidFill>
+                  <a:srgbClr val="64748B"/>
+                </a:solidFill>
+                <a:latin typeface="Malgun Gothic"/>
+              </a:defRPr>
+            </a:pPr>
+            <a:r>
+              <a:t>AICA 자격심사 시스템 사용자 매뉴얼 · 2026.07</a:t>
+            </a:r>
+          </a:p>
+        </p:txBody>
+      </p:sp>
+      <p:sp>
+        <p:nvSpPr>
+          <p:cNvPr id="6" name="TextBox 5"/>
+          <p:cNvSpPr txBox="1"/>
+          <p:nvPr/>
+        </p:nvSpPr>
+        <p:spPr>
+          <a:xfrm>
+            <a:off x="10820095" y="6309360"/>
+            <a:ext cx="822960" cy="365760"/>
+          </a:xfrm>
+          <a:prstGeom prst="rect">
+            <a:avLst/>
+          </a:prstGeom>
+          <a:noFill/>
+        </p:spPr>
+        <p:txBody>
+          <a:bodyPr wrap="none">
+            <a:spAutoFit/>
+          </a:bodyPr>
+          <a:lstStyle/>
+          <a:p>
+            <a:pPr algn="r">
+              <a:defRPr sz="900">
+                <a:solidFill>
+                  <a:srgbClr val="64748B"/>
+                </a:solidFill>
+                <a:latin typeface="Malgun Gothic"/>
+              </a:defRPr>
+            </a:pPr>
+            <a:r>
+              <a:t>07</a:t>
+            </a:r>
+          </a:p>
+        </p:txBody>
+      </p:sp>
+      <p:sp>
+        <p:nvSpPr>
+          <p:cNvPr id="7" name="TextBox 6"/>
+          <p:cNvSpPr txBox="1"/>
+          <p:nvPr/>
+        </p:nvSpPr>
+        <p:spPr>
+          <a:xfrm>
+            <a:off x="548640" y="1645920"/>
+            <a:ext cx="10972800" cy="457200"/>
+          </a:xfrm>
+          <a:prstGeom prst="rect">
+            <a:avLst/>
+          </a:prstGeom>
+          <a:noFill/>
+        </p:spPr>
+        <p:txBody>
+          <a:bodyPr wrap="none">
+            <a:spAutoFit/>
+          </a:bodyPr>
+          <a:lstStyle/>
+          <a:p>
+            <a:pPr>
+              <a:defRPr sz="1300">
+                <a:solidFill>
+                  <a:srgbClr val="475569"/>
+                </a:solidFill>
+                <a:latin typeface="Malgun Gothic"/>
+              </a:defRPr>
+            </a:pPr>
+            <a:r>
+              <a:t>「최적 패널 자동 추천」은 동일 관계사 소속을 우선 배제해 심사위원 후보를 제안합니다.</a:t>
+            </a:r>
+          </a:p>
+        </p:txBody>
+      </p:sp>
+      <p:sp>
+        <p:nvSpPr>
+          <p:cNvPr id="8" name="Rounded Rectangle 7"/>
+          <p:cNvSpPr/>
+          <p:nvPr/>
+        </p:nvSpPr>
+        <p:spPr>
+          <a:xfrm>
+            <a:off x="548640" y="2286000"/>
+            <a:ext cx="3474720" cy="2926080"/>
+          </a:xfrm>
+          <a:prstGeom prst="roundRect">
+            <a:avLst/>
+          </a:prstGeom>
+          <a:solidFill>
+            <a:srgbClr val="F8FAFC"/>
+          </a:solidFill>
+          <a:ln w="19050">
+            <a:solidFill>
+              <a:srgbClr val="2563EB"/>
+            </a:solidFill>
+          </a:ln>
+        </p:spPr>
+        <p:style>
+          <a:lnRef idx="1">
+            <a:schemeClr val="accent1"/>
+          </a:lnRef>
+          <a:fillRef idx="3">
+            <a:schemeClr val="accent1"/>
+          </a:fillRef>
+          <a:effectRef idx="2">
+            <a:schemeClr val="accent1"/>
+          </a:effectRef>
+          <a:fontRef idx="minor">
+            <a:schemeClr val="lt1"/>
+          </a:fontRef>
+        </p:style>
+        <p:txBody>
+          <a:bodyPr rtlCol="0" anchor="ctr" wrap="square"/>
+          <a:lstStyle/>
+          <a:p>
+            <a:pPr algn="ctr">
+              <a:spcAft>
+                <a:spcPts val="1500"/>
+              </a:spcAft>
+              <a:defRPr sz="2400" b="1">
+                <a:solidFill>
+                  <a:srgbClr val="2563EB"/>
+                </a:solidFill>
+                <a:latin typeface="Arial"/>
+              </a:defRPr>
+            </a:pPr>
+            <a:r>
+              <a:t>1</a:t>
+            </a:r>
+          </a:p>
+          <a:p>
+            <a:pPr>
+              <a:spcAft>
+                <a:spcPts val="1000"/>
+              </a:spcAft>
+              <a:defRPr sz="1500" b="1">
+                <a:solidFill>
+                  <a:srgbClr val="0F172A"/>
+                </a:solidFill>
+                <a:latin typeface="Malgun Gothic"/>
+              </a:defRPr>
+            </a:pPr>
+            <a:r>
+              <a:t>1. 현업·사업성 위원</a:t>
+            </a:r>
+          </a:p>
+          <a:p>
+            <a:pPr>
+              <a:defRPr sz="1100">
+                <a:solidFill>
+                  <a:srgbClr val="475569"/>
+                </a:solidFill>
+                <a:latin typeface="Malgun Gothic"/>
+              </a:defRPr>
+            </a:pPr>
+            <a:r>
+              <a:t>업무 해결 문제의 가치와 비즈니스 효과성 검증</a:t>
+            </a:r>
+          </a:p>
+        </p:txBody>
+      </p:sp>
+      <p:sp>
+        <p:nvSpPr>
+          <p:cNvPr id="9" name="Rounded Rectangle 8"/>
+          <p:cNvSpPr/>
+          <p:nvPr/>
+        </p:nvSpPr>
+        <p:spPr>
+          <a:xfrm>
+            <a:off x="4297679" y="2286000"/>
+            <a:ext cx="3474720" cy="2926080"/>
+          </a:xfrm>
+          <a:prstGeom prst="roundRect">
+            <a:avLst/>
+          </a:prstGeom>
+          <a:solidFill>
+            <a:srgbClr val="F8FAFC"/>
+          </a:solidFill>
+          <a:ln w="19050">
+            <a:solidFill>
+              <a:srgbClr val="3B82F6"/>
+            </a:solidFill>
+          </a:ln>
+        </p:spPr>
+        <p:style>
+          <a:lnRef idx="1">
+            <a:schemeClr val="accent1"/>
+          </a:lnRef>
+          <a:fillRef idx="3">
+            <a:schemeClr val="accent1"/>
+          </a:fillRef>
+          <a:effectRef idx="2">
+            <a:schemeClr val="accent1"/>
+          </a:effectRef>
+          <a:fontRef idx="minor">
+            <a:schemeClr val="lt1"/>
+          </a:fontRef>
+        </p:style>
+        <p:txBody>
+          <a:bodyPr rtlCol="0" anchor="ctr" wrap="square"/>
+          <a:lstStyle/>
+          <a:p>
+            <a:pPr algn="ctr">
+              <a:spcAft>
+                <a:spcPts val="1500"/>
+              </a:spcAft>
+              <a:defRPr sz="2400" b="1">
+                <a:solidFill>
+                  <a:srgbClr val="3B82F6"/>
+                </a:solidFill>
+                <a:latin typeface="Arial"/>
+              </a:defRPr>
+            </a:pPr>
+            <a:r>
+              <a:t>2</a:t>
+            </a:r>
+          </a:p>
+          <a:p>
+            <a:pPr>
+              <a:spcAft>
+                <a:spcPts val="1000"/>
+              </a:spcAft>
+              <a:defRPr sz="1500" b="1">
+                <a:solidFill>
+                  <a:srgbClr val="0F172A"/>
+                </a:solidFill>
+                <a:latin typeface="Malgun Gothic"/>
+              </a:defRPr>
+            </a:pPr>
+            <a:r>
+              <a:t>2. AI·기술 위원</a:t>
+            </a:r>
+          </a:p>
+          <a:p>
+            <a:pPr>
+              <a:defRPr sz="1100">
+                <a:solidFill>
+                  <a:srgbClr val="475569"/>
+                </a:solidFill>
+                <a:latin typeface="Malgun Gothic"/>
+              </a:defRPr>
+            </a:pPr>
+            <a:r>
+              <a:t>AI 알고리즘 수준, 코드 품질 및 구현 완성도 검증</a:t>
+            </a:r>
+          </a:p>
+        </p:txBody>
+      </p:sp>
+      <p:sp>
+        <p:nvSpPr>
+          <p:cNvPr id="10" name="Rounded Rectangle 9"/>
+          <p:cNvSpPr/>
+          <p:nvPr/>
+        </p:nvSpPr>
+        <p:spPr>
+          <a:xfrm>
+            <a:off x="8046719" y="2286000"/>
+            <a:ext cx="3474720" cy="2926080"/>
+          </a:xfrm>
+          <a:prstGeom prst="roundRect">
+            <a:avLst/>
+          </a:prstGeom>
+          <a:solidFill>
+            <a:srgbClr val="F8FAFC"/>
+          </a:solidFill>
+          <a:ln w="19050">
+            <a:solidFill>
+              <a:srgbClr val="EF4444"/>
+            </a:solidFill>
+          </a:ln>
+        </p:spPr>
+        <p:style>
+          <a:lnRef idx="1">
+            <a:schemeClr val="accent1"/>
+          </a:lnRef>
+          <a:fillRef idx="3">
+            <a:schemeClr val="accent1"/>
+          </a:fillRef>
+          <a:effectRef idx="2">
+            <a:schemeClr val="accent1"/>
+          </a:effectRef>
+          <a:fontRef idx="minor">
+            <a:schemeClr val="lt1"/>
+          </a:fontRef>
+        </p:style>
+        <p:txBody>
+          <a:bodyPr rtlCol="0" anchor="ctr" wrap="square"/>
+          <a:lstStyle/>
+          <a:p>
+            <a:pPr algn="ctr">
+              <a:spcAft>
+                <a:spcPts val="1500"/>
+              </a:spcAft>
+              <a:defRPr sz="2400" b="1">
+                <a:solidFill>
+                  <a:srgbClr val="EF4444"/>
+                </a:solidFill>
+                <a:latin typeface="Arial"/>
+              </a:defRPr>
+            </a:pPr>
+            <a:r>
+              <a:t>3</a:t>
+            </a:r>
+          </a:p>
+          <a:p>
+            <a:pPr>
+              <a:spcAft>
+                <a:spcPts val="1000"/>
+              </a:spcAft>
+              <a:defRPr sz="1500" b="1">
+                <a:solidFill>
+                  <a:srgbClr val="0F172A"/>
+                </a:solidFill>
+                <a:latin typeface="Malgun Gothic"/>
+              </a:defRPr>
+            </a:pPr>
+            <a:r>
+              <a:t>3. 보안·거버넌스 위원</a:t>
+            </a:r>
+          </a:p>
+          <a:p>
+            <a:pPr>
+              <a:defRPr sz="1100">
+                <a:solidFill>
+                  <a:srgbClr val="475569"/>
+                </a:solidFill>
+                <a:latin typeface="Malgun Gothic"/>
+              </a:defRPr>
+            </a:pPr>
+            <a:r>
+              <a:t>데이터 보안, 사내 가이드 준수 및 통제 적합성 검증</a:t>
+            </a:r>
+          </a:p>
+        </p:txBody>
+      </p:sp>
+      <p:sp>
+        <p:nvSpPr>
+          <p:cNvPr id="11" name="Rectangle 10"/>
+          <p:cNvSpPr/>
+          <p:nvPr/>
+        </p:nvSpPr>
+        <p:spPr>
+          <a:xfrm>
+            <a:off x="548640" y="5486400"/>
+            <a:ext cx="11094415" cy="548640"/>
+          </a:xfrm>
+          <a:prstGeom prst="rect">
+            <a:avLst/>
+          </a:prstGeom>
+          <a:solidFill>
+            <a:srgbClr val="EFF6FF"/>
+          </a:solidFill>
+          <a:ln>
+            <a:solidFill>
+              <a:srgbClr val="3B82F6"/>
+            </a:solidFill>
+          </a:ln>
+        </p:spPr>
+        <p:style>
+          <a:lnRef idx="1">
+            <a:schemeClr val="accent1"/>
+          </a:lnRef>
+          <a:fillRef idx="3">
+            <a:schemeClr val="accent1"/>
+          </a:fillRef>
+          <a:effectRef idx="2">
+            <a:schemeClr val="accent1"/>
+          </a:effectRef>
+          <a:fontRef idx="minor">
+            <a:schemeClr val="lt1"/>
+          </a:fontRef>
+        </p:style>
+        <p:txBody>
+          <a:bodyPr rtlCol="0" anchor="ctr" wrap="square"/>
+          <a:lstStyle/>
+          <a:p>
+            <a:pPr algn="ctr">
+              <a:defRPr sz="1100" b="1">
+                <a:solidFill>
+                  <a:srgbClr val="0F172A"/>
+                </a:solidFill>
+                <a:latin typeface="Malgun Gothic"/>
+              </a:defRPr>
+            </a:pPr>
+            <a:r>
+              <a:t>⚠️ 주의: 패널 3인을 모두 지정해야 등록할 수 있습니다. 피평가자와 같은 관계사 소속 위원은 셀렉트 박스 내부의 「이해상충 주의」 표시를 확인하세요.</a:t>
+            </a:r>
+          </a:p>
+        </p:txBody>
+      </p:sp>
+    </p:spTree>
+  </p:cSld>
+  <p:clrMapOvr>
+    <a:masterClrMapping/>
+  </p:clrMapOvr>
+</p:sld>
+</file>
+
+<file path=ppt/slides/slide8.xml><?xml version="1.0" encoding="utf-8"?>
+<p:sld xmlns:a="http://schemas.openxmlformats.org/drawingml/2006/main" xmlns:p="http://schemas.openxmlformats.org/presentationml/2006/main" xmlns:r="http://schemas.openxmlformats.org/officeDocument/2006/relationships">
+  <p:cSld>
+    <p:bg>
+      <p:bgPr>
+        <a:solidFill>
+          <a:srgbClr val="FFFFFF"/>
+        </a:solidFill>
+        <a:effectLst/>
+      </p:bgPr>
+    </p:bg>
+    <p:spTree>
+      <p:nvGrpSpPr>
+        <p:cNvPr id="1" name=""/>
+        <p:cNvGrpSpPr/>
+        <p:nvPr/>
+      </p:nvGrpSpPr>
+      <p:grpSpPr/>
+      <p:sp>
+        <p:nvSpPr>
+          <p:cNvPr id="2" name="TextBox 1"/>
+          <p:cNvSpPr txBox="1"/>
+          <p:nvPr/>
+        </p:nvSpPr>
+        <p:spPr>
+          <a:xfrm>
+            <a:off x="548640" y="365760"/>
+            <a:ext cx="7315200" cy="365760"/>
+          </a:xfrm>
+          <a:prstGeom prst="rect">
+            <a:avLst/>
+          </a:prstGeom>
+          <a:noFill/>
+        </p:spPr>
+        <p:txBody>
+          <a:bodyPr wrap="none">
+            <a:spAutoFit/>
+          </a:bodyPr>
+          <a:lstStyle/>
+          <a:p>
+            <a:pPr>
+              <a:defRPr sz="1100" b="1">
+                <a:solidFill>
+                  <a:srgbClr val="2563EB"/>
+                </a:solidFill>
+                <a:latin typeface="Malgun Gothic"/>
+              </a:defRPr>
+            </a:pPr>
+            <a:r>
+              <a:t>운영간사</a:t>
+            </a:r>
+          </a:p>
+        </p:txBody>
+      </p:sp>
+      <p:sp>
+        <p:nvSpPr>
+          <p:cNvPr id="3" name="TextBox 2"/>
+          <p:cNvSpPr txBox="1"/>
+          <p:nvPr/>
+        </p:nvSpPr>
+        <p:spPr>
+          <a:xfrm>
+            <a:off x="548640" y="640080"/>
+            <a:ext cx="10058400" cy="731520"/>
+          </a:xfrm>
+          <a:prstGeom prst="rect">
+            <a:avLst/>
+          </a:prstGeom>
+          <a:noFill/>
+        </p:spPr>
+        <p:txBody>
+          <a:bodyPr wrap="none">
+            <a:spAutoFit/>
+          </a:bodyPr>
+          <a:lstStyle/>
+          <a:p>
+            <a:pPr>
+              <a:defRPr sz="2600" b="1">
+                <a:solidFill>
+                  <a:srgbClr val="0F172A"/>
+                </a:solidFill>
+                <a:latin typeface="Malgun Gothic"/>
+              </a:defRPr>
+            </a:pPr>
+            <a:r>
+              <a:t>필터와 상태값으로 병목을 빠르게 찾습니다</a:t>
+            </a:r>
+          </a:p>
+        </p:txBody>
+      </p:sp>
+      <p:sp>
+        <p:nvSpPr>
+          <p:cNvPr id="4" name="Rectangle 3"/>
+          <p:cNvSpPr/>
+          <p:nvPr/>
+        </p:nvSpPr>
+        <p:spPr>
+          <a:xfrm>
+            <a:off x="548640" y="1371600"/>
+            <a:ext cx="11094415" cy="13716"/>
+          </a:xfrm>
+          <a:prstGeom prst="rect">
+            <a:avLst/>
+          </a:prstGeom>
+          <a:solidFill>
+            <a:srgbClr val="E2E8F0"/>
+          </a:solidFill>
+          <a:ln>
+            <a:noFill/>
+          </a:ln>
+        </p:spPr>
+        <p:style>
+          <a:lnRef idx="1">
+            <a:schemeClr val="accent1"/>
+          </a:lnRef>
+          <a:fillRef idx="3">
+            <a:schemeClr val="accent1"/>
+          </a:fillRef>
+          <a:effectRef idx="2">
+            <a:schemeClr val="accent1"/>
+          </a:effectRef>
+          <a:fontRef idx="minor">
+            <a:schemeClr val="lt1"/>
+          </a:fontRef>
+        </p:style>
+        <p:txBody>
+          <a:bodyPr rtlCol="0" anchor="ctr"/>
+          <a:lstStyle/>
+          <a:p>
+            <a:pPr algn="ctr"/>
+          </a:p>
+        </p:txBody>
+      </p:sp>
+      <p:sp>
+        <p:nvSpPr>
+          <p:cNvPr id="5" name="TextBox 4"/>
+          <p:cNvSpPr txBox="1"/>
+          <p:nvPr/>
+        </p:nvSpPr>
+        <p:spPr>
+          <a:xfrm>
+            <a:off x="548640" y="6309360"/>
+            <a:ext cx="9144000" cy="365760"/>
+          </a:xfrm>
+          <a:prstGeom prst="rect">
+            <a:avLst/>
+          </a:prstGeom>
+          <a:noFill/>
+        </p:spPr>
+        <p:txBody>
+          <a:bodyPr wrap="none">
+            <a:spAutoFit/>
+          </a:bodyPr>
+          <a:lstStyle/>
+          <a:p>
+            <a:pPr>
+              <a:defRPr sz="900">
+                <a:solidFill>
+                  <a:srgbClr val="64748B"/>
+                </a:solidFill>
+                <a:latin typeface="Malgun Gothic"/>
+              </a:defRPr>
+            </a:pPr>
+            <a:r>
+              <a:t>AICA 자격심사 시스템 사용자 매뉴얼 · 2026.07</a:t>
+            </a:r>
+          </a:p>
+        </p:txBody>
+      </p:sp>
+      <p:sp>
+        <p:nvSpPr>
+          <p:cNvPr id="6" name="TextBox 5"/>
+          <p:cNvSpPr txBox="1"/>
+          <p:nvPr/>
+        </p:nvSpPr>
+        <p:spPr>
+          <a:xfrm>
+            <a:off x="10820095" y="6309360"/>
+            <a:ext cx="822960" cy="365760"/>
+          </a:xfrm>
+          <a:prstGeom prst="rect">
+            <a:avLst/>
+          </a:prstGeom>
+          <a:noFill/>
+        </p:spPr>
+        <p:txBody>
+          <a:bodyPr wrap="none">
+            <a:spAutoFit/>
+          </a:bodyPr>
+          <a:lstStyle/>
+          <a:p>
+            <a:pPr algn="r">
+              <a:defRPr sz="900">
+                <a:solidFill>
+                  <a:srgbClr val="64748B"/>
+                </a:solidFill>
+                <a:latin typeface="Malgun Gothic"/>
+              </a:defRPr>
+            </a:pPr>
+            <a:r>
+              <a:t>08</a:t>
+            </a:r>
+          </a:p>
+        </p:txBody>
+      </p:sp>
+      <p:sp>
+        <p:nvSpPr>
+          <p:cNvPr id="7" name="Rectangle 6"/>
+          <p:cNvSpPr/>
+          <p:nvPr/>
+        </p:nvSpPr>
+        <p:spPr>
+          <a:xfrm>
+            <a:off x="548640" y="1645920"/>
+            <a:ext cx="11094415" cy="548640"/>
+          </a:xfrm>
+          <a:prstGeom prst="rect">
+            <a:avLst/>
+          </a:prstGeom>
+          <a:solidFill>
+            <a:srgbClr val="EFF6FF"/>
+          </a:solidFill>
+          <a:ln>
+            <a:solidFill>
+              <a:srgbClr val="E2E8F0"/>
+            </a:solidFill>
+          </a:ln>
+        </p:spPr>
+        <p:style>
+          <a:lnRef idx="1">
+            <a:schemeClr val="accent1"/>
+          </a:lnRef>
+          <a:fillRef idx="3">
+            <a:schemeClr val="accent1"/>
+          </a:fillRef>
+          <a:effectRef idx="2">
+            <a:schemeClr val="accent1"/>
+          </a:effectRef>
+          <a:fontRef idx="minor">
+            <a:schemeClr val="lt1"/>
+          </a:fontRef>
+        </p:style>
+        <p:txBody>
+          <a:bodyPr rtlCol="0" anchor="ctr"/>
+          <a:lstStyle/>
+          <a:p>
+            <a:pPr algn="ctr">
+              <a:defRPr sz="1200" b="1">
+                <a:solidFill>
+                  <a:srgbClr val="2563EB"/>
+                </a:solidFill>
+                <a:latin typeface="Malgun Gothic"/>
+              </a:defRPr>
+            </a:pPr>
+            <a:r>
+              <a:t>  필터:  관계사 | 인증 레벨 | 상태                                             찾은 뒤 「액션」에서 보고서를 엽니다.</a:t>
+            </a:r>
+          </a:p>
+        </p:txBody>
+      </p:sp>
+      <p:sp>
+        <p:nvSpPr>
+          <p:cNvPr id="8" name="Rounded Rectangle 7"/>
+          <p:cNvSpPr/>
+          <p:nvPr/>
+        </p:nvSpPr>
+        <p:spPr>
+          <a:xfrm>
+            <a:off x="548640" y="2560320"/>
+            <a:ext cx="2560320" cy="2560320"/>
+          </a:xfrm>
+          <a:prstGeom prst="roundRect">
+            <a:avLst/>
+          </a:prstGeom>
+          <a:solidFill>
+            <a:srgbClr val="F8FAFC"/>
+          </a:solidFill>
+          <a:ln>
+            <a:solidFill>
+              <a:srgbClr val="E2E8F0"/>
+            </a:solidFill>
+          </a:ln>
+        </p:spPr>
+        <p:style>
+          <a:lnRef idx="1">
+            <a:schemeClr val="accent1"/>
+          </a:lnRef>
+          <a:fillRef idx="3">
+            <a:schemeClr val="accent1"/>
+          </a:fillRef>
+          <a:effectRef idx="2">
+            <a:schemeClr val="accent1"/>
+          </a:effectRef>
+          <a:fontRef idx="minor">
+            <a:schemeClr val="lt1"/>
+          </a:fontRef>
+        </p:style>
+        <p:txBody>
+          <a:bodyPr rtlCol="0" anchor="ctr" wrap="square"/>
+          <a:lstStyle/>
+          <a:p>
+            <a:pPr algn="ctr">
+              <a:spcAft>
+                <a:spcPts val="1000"/>
+              </a:spcAft>
+              <a:defRPr sz="2000" b="1">
+                <a:solidFill>
+                  <a:srgbClr val="64748B"/>
+                </a:solidFill>
+                <a:latin typeface="Arial"/>
+              </a:defRPr>
+            </a:pPr>
+            <a:r>
+              <a:t>1</a:t>
+            </a:r>
+          </a:p>
+          <a:p>
+            <a:pPr>
+              <a:spcAft>
+                <a:spcPts val="800"/>
+              </a:spcAft>
+              <a:defRPr sz="1400" b="1">
+                <a:solidFill>
+                  <a:srgbClr val="0F172A"/>
+                </a:solidFill>
+                <a:latin typeface="Malgun Gothic"/>
+              </a:defRPr>
+            </a:pPr>
+            <a:r>
+              <a:t>1. 평가대기</a:t>
+            </a:r>
+          </a:p>
+          <a:p>
+            <a:pPr>
+              <a:defRPr sz="1100">
+                <a:solidFill>
+                  <a:srgbClr val="475569"/>
+                </a:solidFill>
+                <a:latin typeface="Malgun Gothic"/>
+              </a:defRPr>
+            </a:pPr>
+            <a:r>
+              <a:t>패널 배정 후 아직 심사위원의 심사가 시작되지 않은 상태</a:t>
+            </a:r>
+          </a:p>
+        </p:txBody>
+      </p:sp>
+      <p:sp>
+        <p:nvSpPr>
+          <p:cNvPr id="9" name="Rounded Rectangle 8"/>
+          <p:cNvSpPr/>
+          <p:nvPr/>
+        </p:nvSpPr>
+        <p:spPr>
+          <a:xfrm>
+            <a:off x="3383280" y="2560320"/>
+            <a:ext cx="2560320" cy="2560320"/>
+          </a:xfrm>
+          <a:prstGeom prst="roundRect">
+            <a:avLst/>
+          </a:prstGeom>
+          <a:solidFill>
+            <a:srgbClr val="F8FAFC"/>
+          </a:solidFill>
+          <a:ln>
+            <a:solidFill>
+              <a:srgbClr val="E2E8F0"/>
+            </a:solidFill>
+          </a:ln>
+        </p:spPr>
+        <p:style>
+          <a:lnRef idx="1">
+            <a:schemeClr val="accent1"/>
+          </a:lnRef>
+          <a:fillRef idx="3">
+            <a:schemeClr val="accent1"/>
+          </a:fillRef>
+          <a:effectRef idx="2">
+            <a:schemeClr val="accent1"/>
+          </a:effectRef>
+          <a:fontRef idx="minor">
+            <a:schemeClr val="lt1"/>
+          </a:fontRef>
+        </p:style>
+        <p:txBody>
+          <a:bodyPr rtlCol="0" anchor="ctr" wrap="square"/>
+          <a:lstStyle/>
+          <a:p>
+            <a:pPr algn="ctr">
+              <a:spcAft>
+                <a:spcPts val="1000"/>
+              </a:spcAft>
+              <a:defRPr sz="2000" b="1">
+                <a:solidFill>
+                  <a:srgbClr val="3B82F6"/>
+                </a:solidFill>
+                <a:latin typeface="Arial"/>
+              </a:defRPr>
+            </a:pPr>
+            <a:r>
+              <a:t>2</a:t>
+            </a:r>
+          </a:p>
+          <a:p>
+            <a:pPr>
+              <a:spcAft>
+                <a:spcPts val="800"/>
+              </a:spcAft>
+              <a:defRPr sz="1400" b="1">
+                <a:solidFill>
+                  <a:srgbClr val="0F172A"/>
+                </a:solidFill>
+                <a:latin typeface="Malgun Gothic"/>
+              </a:defRPr>
+            </a:pPr>
+            <a:r>
+              <a:t>2. 심사중</a:t>
+            </a:r>
+          </a:p>
+          <a:p>
+            <a:pPr>
+              <a:defRPr sz="1100">
+                <a:solidFill>
+                  <a:srgbClr val="475569"/>
+                </a:solidFill>
+                <a:latin typeface="Malgun Gothic"/>
+              </a:defRPr>
+            </a:pPr>
+            <a:r>
+              <a:t>1명 이상의 심사위원이 심사를 진행하거나 점수를 제출한 상태</a:t>
+            </a:r>
+          </a:p>
+        </p:txBody>
+      </p:sp>
+      <p:sp>
+        <p:nvSpPr>
+          <p:cNvPr id="10" name="Rounded Rectangle 9"/>
+          <p:cNvSpPr/>
+          <p:nvPr/>
+        </p:nvSpPr>
+        <p:spPr>
+          <a:xfrm>
+            <a:off x="6217920" y="2560320"/>
+            <a:ext cx="2560320" cy="2560320"/>
+          </a:xfrm>
+          <a:prstGeom prst="roundRect">
+            <a:avLst/>
+          </a:prstGeom>
+          <a:solidFill>
+            <a:srgbClr val="F8FAFC"/>
+          </a:solidFill>
+          <a:ln>
+            <a:solidFill>
+              <a:srgbClr val="E2E8F0"/>
+            </a:solidFill>
+          </a:ln>
+        </p:spPr>
+        <p:style>
+          <a:lnRef idx="1">
+            <a:schemeClr val="accent1"/>
+          </a:lnRef>
+          <a:fillRef idx="3">
+            <a:schemeClr val="accent1"/>
+          </a:fillRef>
+          <a:effectRef idx="2">
+            <a:schemeClr val="accent1"/>
+          </a:effectRef>
+          <a:fontRef idx="minor">
+            <a:schemeClr val="lt1"/>
+          </a:fontRef>
+        </p:style>
+        <p:txBody>
+          <a:bodyPr rtlCol="0" anchor="ctr" wrap="square"/>
+          <a:lstStyle/>
+          <a:p>
+            <a:pPr algn="ctr">
+              <a:spcAft>
+                <a:spcPts val="1000"/>
+              </a:spcAft>
+              <a:defRPr sz="2000" b="1">
+                <a:solidFill>
+                  <a:srgbClr val="10B981"/>
+                </a:solidFill>
+                <a:latin typeface="Arial"/>
+              </a:defRPr>
+            </a:pPr>
+            <a:r>
+              <a:t>3</a:t>
+            </a:r>
+          </a:p>
+          <a:p>
+            <a:pPr>
+              <a:spcAft>
+                <a:spcPts val="800"/>
+              </a:spcAft>
+              <a:defRPr sz="1400" b="1">
+                <a:solidFill>
+                  <a:srgbClr val="0F172A"/>
+                </a:solidFill>
+                <a:latin typeface="Malgun Gothic"/>
+              </a:defRPr>
+            </a:pPr>
+            <a:r>
+              <a:t>3. 완료</a:t>
+            </a:r>
+          </a:p>
+          <a:p>
+            <a:pPr>
+              <a:defRPr sz="1100">
+                <a:solidFill>
+                  <a:srgbClr val="475569"/>
+                </a:solidFill>
+                <a:latin typeface="Malgun Gothic"/>
+              </a:defRPr>
+            </a:pPr>
+            <a:r>
+              <a:t>3인 패널 전원의 제출과 종합 점수 집계가 완료된 상태</a:t>
+            </a:r>
+          </a:p>
+        </p:txBody>
+      </p:sp>
+      <p:sp>
+        <p:nvSpPr>
+          <p:cNvPr id="11" name="Rounded Rectangle 10"/>
+          <p:cNvSpPr/>
+          <p:nvPr/>
+        </p:nvSpPr>
+        <p:spPr>
+          <a:xfrm>
+            <a:off x="9052560" y="2560320"/>
+            <a:ext cx="2560320" cy="2560320"/>
+          </a:xfrm>
+          <a:prstGeom prst="roundRect">
+            <a:avLst/>
+          </a:prstGeom>
+          <a:solidFill>
+            <a:srgbClr val="F8FAFC"/>
+          </a:solidFill>
+          <a:ln>
+            <a:solidFill>
+              <a:srgbClr val="E2E8F0"/>
+            </a:solidFill>
+          </a:ln>
+        </p:spPr>
+        <p:style>
+          <a:lnRef idx="1">
+            <a:schemeClr val="accent1"/>
+          </a:lnRef>
+          <a:fillRef idx="3">
+            <a:schemeClr val="accent1"/>
+          </a:fillRef>
+          <a:effectRef idx="2">
+            <a:schemeClr val="accent1"/>
+          </a:effectRef>
+          <a:fontRef idx="minor">
+            <a:schemeClr val="lt1"/>
+          </a:fontRef>
+        </p:style>
+        <p:txBody>
+          <a:bodyPr rtlCol="0" anchor="ctr" wrap="square"/>
+          <a:lstStyle/>
+          <a:p>
+            <a:pPr algn="ctr">
+              <a:spcAft>
+                <a:spcPts val="1000"/>
+              </a:spcAft>
+              <a:defRPr sz="2000" b="1">
+                <a:solidFill>
+                  <a:srgbClr val="0F172A"/>
+                </a:solidFill>
+                <a:latin typeface="Arial"/>
+              </a:defRPr>
+            </a:pPr>
+            <a:r>
+              <a:t>4</a:t>
+            </a:r>
+          </a:p>
+          <a:p>
+            <a:pPr>
+              <a:spcAft>
+                <a:spcPts val="800"/>
+              </a:spcAft>
+              <a:defRPr sz="1400" b="1">
+                <a:solidFill>
+                  <a:srgbClr val="0F172A"/>
+                </a:solidFill>
+                <a:latin typeface="Malgun Gothic"/>
+              </a:defRPr>
+            </a:pPr>
+            <a:r>
+              <a:t>4. 보고서 보기</a:t>
+            </a:r>
+          </a:p>
+          <a:p>
+            <a:pPr>
+              <a:defRPr sz="1100">
+                <a:solidFill>
+                  <a:srgbClr val="475569"/>
+                </a:solidFill>
+                <a:latin typeface="Malgun Gothic"/>
+              </a:defRPr>
+            </a:pPr>
+            <a:r>
+              <a:t>개별 점수, 평균, 최종 판정, 심사 의견 보고서 확인 및 인쇄</a:t>
+            </a:r>
+          </a:p>
+        </p:txBody>
+      </p:sp>
+      <p:sp>
+        <p:nvSpPr>
+          <p:cNvPr id="12" name="TextBox 11"/>
+          <p:cNvSpPr txBox="1"/>
+          <p:nvPr/>
+        </p:nvSpPr>
+        <p:spPr>
+          <a:xfrm>
+            <a:off x="548640" y="5486400"/>
+            <a:ext cx="10972800" cy="457200"/>
+          </a:xfrm>
+          <a:prstGeom prst="rect">
+            <a:avLst/>
+          </a:prstGeom>
+          <a:noFill/>
+        </p:spPr>
+        <p:txBody>
+          <a:bodyPr wrap="none">
+            <a:spAutoFit/>
+          </a:bodyPr>
+          <a:lstStyle/>
+          <a:p>
+            <a:pPr>
+              <a:defRPr sz="1100" b="1">
+                <a:solidFill>
+                  <a:srgbClr val="EF4444"/>
+                </a:solidFill>
+                <a:latin typeface="Malgun Gothic"/>
+              </a:defRPr>
+            </a:pPr>
+            <a:r>
+              <a:t>💡 팁: 점수나 판정이 비어 있으면 먼저 대시보드의 「타 위원 진척도」 배지에서 미제출 위원이 누구인지 실시간 확인합니다.</a:t>
+            </a:r>
+          </a:p>
+        </p:txBody>
+      </p:sp>
+    </p:spTree>
+  </p:cSld>
+  <p:clrMapOvr>
+    <a:masterClrMapping/>
+  </p:clrMapOvr>
+</p:sld>
+</file>
+
+<file path=ppt/slides/slide9.xml><?xml version="1.0" encoding="utf-8"?>
+<p:sld xmlns:a="http://schemas.openxmlformats.org/drawingml/2006/main" xmlns:p="http://schemas.openxmlformats.org/presentationml/2006/main" xmlns:r="http://schemas.openxmlformats.org/officeDocument/2006/relationships">
+  <p:cSld>
+    <p:bg>
+      <p:bgPr>
+        <a:solidFill>
+          <a:srgbClr val="FFFFFF"/>
+        </a:solidFill>
+        <a:effectLst/>
+      </p:bgPr>
+    </p:bg>
+    <p:spTree>
+      <p:nvGrpSpPr>
+        <p:cNvPr id="1" name=""/>
+        <p:cNvGrpSpPr/>
+        <p:nvPr/>
+      </p:nvGrpSpPr>
+      <p:grpSpPr/>
+      <p:sp>
+        <p:nvSpPr>
+          <p:cNvPr id="2" name="TextBox 1"/>
+          <p:cNvSpPr txBox="1"/>
+          <p:nvPr/>
+        </p:nvSpPr>
+        <p:spPr>
+          <a:xfrm>
+            <a:off x="548640" y="365760"/>
+            <a:ext cx="7315200" cy="365760"/>
+          </a:xfrm>
+          <a:prstGeom prst="rect">
+            <a:avLst/>
+          </a:prstGeom>
+          <a:noFill/>
+        </p:spPr>
+        <p:txBody>
+          <a:bodyPr wrap="none">
+            <a:spAutoFit/>
+          </a:bodyPr>
+          <a:lstStyle/>
+          <a:p>
+            <a:pPr>
+              <a:defRPr sz="1100" b="1">
+                <a:solidFill>
+                  <a:srgbClr val="2563EB"/>
+                </a:solidFill>
+                <a:latin typeface="Malgun Gothic"/>
+              </a:defRPr>
+            </a:pPr>
+            <a:r>
+              <a:t>운영간사</a:t>
+            </a:r>
+          </a:p>
+        </p:txBody>
+      </p:sp>
+      <p:sp>
+        <p:nvSpPr>
+          <p:cNvPr id="3" name="TextBox 2"/>
+          <p:cNvSpPr txBox="1"/>
+          <p:nvPr/>
+        </p:nvSpPr>
+        <p:spPr>
+          <a:xfrm>
+            <a:off x="548640" y="640080"/>
+            <a:ext cx="10058400" cy="731520"/>
+          </a:xfrm>
+          <a:prstGeom prst="rect">
+            <a:avLst/>
+          </a:prstGeom>
+          <a:noFill/>
+        </p:spPr>
+        <p:txBody>
+          <a:bodyPr wrap="none">
+            <a:spAutoFit/>
+          </a:bodyPr>
+          <a:lstStyle/>
+          <a:p>
+            <a:pPr>
+              <a:defRPr sz="2600" b="1">
+                <a:solidFill>
+                  <a:srgbClr val="0F172A"/>
+                </a:solidFill>
+                <a:latin typeface="Malgun Gothic"/>
+              </a:defRPr>
+            </a:pPr>
+            <a:r>
+              <a:t>3인 제출 후 종합판정서가 완성됩니다</a:t>
+            </a:r>
+          </a:p>
+        </p:txBody>
+      </p:sp>
+      <p:sp>
+        <p:nvSpPr>
+          <p:cNvPr id="4" name="Rectangle 3"/>
+          <p:cNvSpPr/>
+          <p:nvPr/>
+        </p:nvSpPr>
+        <p:spPr>
+          <a:xfrm>
+            <a:off x="548640" y="1371600"/>
+            <a:ext cx="11094415" cy="13716"/>
+          </a:xfrm>
+          <a:prstGeom prst="rect">
+            <a:avLst/>
+          </a:prstGeom>
+          <a:solidFill>
+            <a:srgbClr val="E2E8F0"/>
+          </a:solidFill>
+          <a:ln>
+            <a:noFill/>
+          </a:ln>
+        </p:spPr>
+        <p:style>
+          <a:lnRef idx="1">
+            <a:schemeClr val="accent1"/>
+          </a:lnRef>
+          <a:fillRef idx="3">
+            <a:schemeClr val="accent1"/>
+          </a:fillRef>
+          <a:effectRef idx="2">
+            <a:schemeClr val="accent1"/>
+          </a:effectRef>
+          <a:fontRef idx="minor">
+            <a:schemeClr val="lt1"/>
+          </a:fontRef>
+        </p:style>
+        <p:txBody>
+          <a:bodyPr rtlCol="0" anchor="ctr"/>
+          <a:lstStyle/>
+          <a:p>
+            <a:pPr algn="ctr"/>
+          </a:p>
+        </p:txBody>
+      </p:sp>
+      <p:sp>
+        <p:nvSpPr>
+          <p:cNvPr id="5" name="TextBox 4"/>
+          <p:cNvSpPr txBox="1"/>
+          <p:nvPr/>
+        </p:nvSpPr>
+        <p:spPr>
+          <a:xfrm>
+            <a:off x="548640" y="6309360"/>
+            <a:ext cx="9144000" cy="365760"/>
+          </a:xfrm>
+          <a:prstGeom prst="rect">
+            <a:avLst/>
+          </a:prstGeom>
+          <a:noFill/>
+        </p:spPr>
+        <p:txBody>
+          <a:bodyPr wrap="none">
+            <a:spAutoFit/>
+          </a:bodyPr>
+          <a:lstStyle/>
+          <a:p>
+            <a:pPr>
+              <a:defRPr sz="900">
+                <a:solidFill>
+                  <a:srgbClr val="64748B"/>
+                </a:solidFill>
+                <a:latin typeface="Malgun Gothic"/>
+              </a:defRPr>
+            </a:pPr>
+            <a:r>
+              <a:t>AICA 자격심사 시스템 사용자 매뉴얼 · 2026.07</a:t>
+            </a:r>
+          </a:p>
+        </p:txBody>
+      </p:sp>
+      <p:sp>
+        <p:nvSpPr>
+          <p:cNvPr id="6" name="TextBox 5"/>
+          <p:cNvSpPr txBox="1"/>
+          <p:nvPr/>
+        </p:nvSpPr>
+        <p:spPr>
+          <a:xfrm>
+            <a:off x="10820095" y="6309360"/>
+            <a:ext cx="822960" cy="365760"/>
+          </a:xfrm>
+          <a:prstGeom prst="rect">
+            <a:avLst/>
+          </a:prstGeom>
+          <a:noFill/>
+        </p:spPr>
+        <p:txBody>
+          <a:bodyPr wrap="none">
+            <a:spAutoFit/>
+          </a:bodyPr>
+          <a:lstStyle/>
+          <a:p>
+            <a:pPr algn="r">
+              <a:defRPr sz="900">
+                <a:solidFill>
+                  <a:srgbClr val="64748B"/>
+                </a:solidFill>
+                <a:latin typeface="Malgun Gothic"/>
+              </a:defRPr>
+            </a:pPr>
+            <a:r>
+              <a:t>09</a:t>
+            </a:r>
+          </a:p>
+        </p:txBody>
+      </p:sp>
+      <p:sp>
+        <p:nvSpPr>
+          <p:cNvPr id="7" name="Rounded Rectangle 6"/>
+          <p:cNvSpPr/>
+          <p:nvPr/>
+        </p:nvSpPr>
+        <p:spPr>
+          <a:xfrm>
+            <a:off x="548640" y="1828800"/>
+            <a:ext cx="5303520" cy="4114800"/>
+          </a:xfrm>
+          <a:prstGeom prst="roundRect">
+            <a:avLst/>
+          </a:prstGeom>
+          <a:solidFill>
+            <a:srgbClr val="F8FAFC"/>
+          </a:solidFill>
+          <a:ln w="12700">
+            <a:solidFill>
+              <a:srgbClr val="E2E8F0"/>
+            </a:solidFill>
+          </a:ln>
+        </p:spPr>
+        <p:style>
+          <a:lnRef idx="1">
+            <a:schemeClr val="accent1"/>
+          </a:lnRef>
+          <a:fillRef idx="3">
+            <a:schemeClr val="accent1"/>
+          </a:fillRef>
+          <a:effectRef idx="2">
+            <a:schemeClr val="accent1"/>
+          </a:effectRef>
+          <a:fontRef idx="minor">
+            <a:schemeClr val="lt1"/>
+          </a:fontRef>
+        </p:style>
+        <p:txBody>
+          <a:bodyPr rtlCol="0" anchor="ctr"/>
+          <a:lstStyle/>
+          <a:p>
+            <a:pPr algn="ctr"/>
+          </a:p>
+        </p:txBody>
+      </p:sp>
+      <p:sp>
+        <p:nvSpPr>
+          <p:cNvPr id="8" name="TextBox 7"/>
+          <p:cNvSpPr txBox="1"/>
+          <p:nvPr/>
+        </p:nvSpPr>
+        <p:spPr>
+          <a:xfrm>
+            <a:off x="685800" y="1965960"/>
+            <a:ext cx="5029200" cy="3840480"/>
+          </a:xfrm>
+          <a:prstGeom prst="rect">
+            <a:avLst/>
+          </a:prstGeom>
+          <a:noFill/>
+        </p:spPr>
+        <p:txBody>
+          <a:bodyPr wrap="square">
+            <a:spAutoFit/>
+          </a:bodyPr>
+          <a:lstStyle/>
+          <a:p>
+            <a:pPr>
+              <a:spcAft>
+                <a:spcPts val="1000"/>
+              </a:spcAft>
+              <a:defRPr sz="1400" b="1">
+                <a:solidFill>
+                  <a:srgbClr val="0F172A"/>
+                </a:solidFill>
+                <a:latin typeface="Malgun Gothic"/>
+              </a:defRPr>
+            </a:pPr>
+            <a:r>
+              <a:t>종합판정서 구성 항목 및 기준</a:t>
+            </a:r>
+          </a:p>
+          <a:p>
+            <a:pPr>
+              <a:spcAft>
+                <a:spcPts val="500"/>
+              </a:spcAft>
+              <a:defRPr sz="1100">
+                <a:solidFill>
+                  <a:srgbClr val="475569"/>
+                </a:solidFill>
+                <a:latin typeface="Malgun Gothic"/>
+              </a:defRPr>
+            </a:pPr>
+            <a:r>
+              <a:t>1. 심사 대상자 기본 정보 (소속 법인, 부서, 직위, 성명)</a:t>
+            </a:r>
+          </a:p>
+          <a:p>
+            <a:pPr>
+              <a:spcAft>
+                <a:spcPts val="500"/>
+              </a:spcAft>
+              <a:defRPr sz="1100">
+                <a:solidFill>
+                  <a:srgbClr val="475569"/>
+                </a:solidFill>
+                <a:latin typeface="Malgun Gothic"/>
+              </a:defRPr>
+            </a:pPr>
+            <a:r>
+              <a:t>2. 최종 심사 판정 요약 (종합 평균 점수 및 판정 결과)</a:t>
+            </a:r>
+          </a:p>
+          <a:p>
+            <a:pPr>
+              <a:spcAft>
+                <a:spcPts val="500"/>
+              </a:spcAft>
+              <a:defRPr sz="1100">
+                <a:solidFill>
+                  <a:srgbClr val="475569"/>
+                </a:solidFill>
+                <a:latin typeface="Malgun Gothic"/>
+              </a:defRPr>
+            </a:pPr>
+            <a:r>
+              <a:t>3. 심사위원별 세부 채점표 (5단계 루브릭 점수 이력)</a:t>
+            </a:r>
+          </a:p>
+          <a:p>
+            <a:pPr>
+              <a:spcAft>
+                <a:spcPts val="500"/>
+              </a:spcAft>
+              <a:defRPr sz="1100">
+                <a:solidFill>
+                  <a:srgbClr val="475569"/>
+                </a:solidFill>
+                <a:latin typeface="Malgun Gothic"/>
+              </a:defRPr>
+            </a:pPr>
+            <a:r>
+              <a:t>4. 심사위원별 종합 평가 의견 (정성 평가 작성값)</a:t>
+            </a:r>
+          </a:p>
+          <a:p>
+            <a:pPr>
+              <a:spcAft>
+                <a:spcPts val="500"/>
+              </a:spcAft>
+              <a:defRPr sz="1100">
+                <a:solidFill>
+                  <a:srgbClr val="475569"/>
+                </a:solidFill>
+                <a:latin typeface="Malgun Gothic"/>
+              </a:defRPr>
+            </a:pPr>
+            <a:r>
+              <a:t>5. 심사위원회 현업/기술/보안 위원 최종 확인란 (서명 연동)</a:t>
+            </a:r>
+          </a:p>
+          <a:p>
+            <a:br/>
+            <a:pPr>
+              <a:spcAft>
+                <a:spcPts val="500"/>
+              </a:spcAft>
+              <a:defRPr sz="1100">
+                <a:solidFill>
+                  <a:srgbClr val="475569"/>
+                </a:solidFill>
+                <a:latin typeface="Malgun Gothic"/>
+              </a:defRPr>
+            </a:pPr>
+            <a:r>
+              <a:t>• 합격 기준: 종합 평균 70점 이상 (시스템 표시 기준)</a:t>
+            </a:r>
+          </a:p>
+          <a:p>
+            <a:pPr>
+              <a:spcAft>
+                <a:spcPts val="500"/>
+              </a:spcAft>
+              <a:defRPr sz="1100">
+                <a:solidFill>
+                  <a:srgbClr val="475569"/>
+                </a:solidFill>
+                <a:latin typeface="Malgun Gothic"/>
+              </a:defRPr>
+            </a:pPr>
+            <a:r>
+              <a:t>• 결격 우선: 표절·도용, 중요 API Key 노출 등 치명적 결격 사유 기록 시 점수와 상관없이 최종 불합격 처리</a:t>
+            </a:r>
+          </a:p>
+        </p:txBody>
+      </p:sp>
+      <p:sp>
+        <p:nvSpPr>
+          <p:cNvPr id="9" name="Rectangle 8"/>
+          <p:cNvSpPr/>
+          <p:nvPr/>
+        </p:nvSpPr>
+        <p:spPr>
+          <a:xfrm>
+            <a:off x="6309360" y="1828800"/>
+            <a:ext cx="5303520" cy="4114800"/>
+          </a:xfrm>
+          <a:prstGeom prst="rect">
+            <a:avLst/>
+          </a:prstGeom>
+          <a:solidFill>
+            <a:srgbClr val="F8FAFC"/>
+          </a:solidFill>
+          <a:ln w="19050">
+            <a:solidFill>
+              <a:srgbClr val="E2E8F0"/>
+            </a:solidFill>
+          </a:ln>
+        </p:spPr>
+        <p:style>
+          <a:lnRef idx="1">
+            <a:schemeClr val="accent1"/>
+          </a:lnRef>
+          <a:fillRef idx="3">
+            <a:schemeClr val="accent1"/>
+          </a:fillRef>
+          <a:effectRef idx="2">
+            <a:schemeClr val="accent1"/>
+          </a:effectRef>
+          <a:fontRef idx="minor">
+            <a:schemeClr val="lt1"/>
+          </a:fontRef>
+        </p:style>
+        <p:txBody>
+          <a:bodyPr rtlCol="0" anchor="ctr"/>
+          <a:lstStyle/>
+          <a:p>
+            <a:pPr algn="ctr"/>
+          </a:p>
+        </p:txBody>
+      </p:sp>
       <p:pic>
         <p:nvPicPr>
-          <p:cNvPr id="8" name="Picture 7" descr="media__1784176101924.png"/>
+          <p:cNvPr id="10" name="Picture 9" descr="media__1784596287593.png"/>
           <p:cNvPicPr>
             <a:picLocks noChangeAspect="1"/>
           </p:cNvPicPr>
@@ -5093,8 +12212,8 @@
         </p:blipFill>
         <p:spPr>
           <a:xfrm>
-            <a:off x="6537960" y="2398922"/>
-            <a:ext cx="4937760" cy="2974554"/>
+            <a:off x="7014262" y="1965960"/>
+            <a:ext cx="3893714" cy="3840480"/>
           </a:xfrm>
           <a:prstGeom prst="rect">
             <a:avLst/>

--- a/AICA_System_User_Manual.pptx
+++ b/AICA_System_User_Manual.pptx
@@ -3099,7 +3099,7 @@
     <p:bg>
       <p:bgPr>
         <a:solidFill>
-          <a:srgbClr val="FFFFFF"/>
+          <a:srgbClr val="F5F5F7"/>
         </a:solidFill>
         <a:effectLst/>
       </p:bgPr>
@@ -3119,7 +3119,7 @@
         </p:nvSpPr>
         <p:spPr>
           <a:xfrm>
-            <a:off x="548640" y="1645920"/>
+            <a:off x="731520" y="1645920"/>
             <a:ext cx="6217920" cy="3200400"/>
           </a:xfrm>
           <a:prstGeom prst="rect">
@@ -3139,9 +3139,9 @@
               </a:spcAft>
               <a:defRPr sz="1300" b="1">
                 <a:solidFill>
-                  <a:srgbClr val="2563EB"/>
-                </a:solidFill>
-                <a:latin typeface="Arial"/>
+                  <a:srgbClr val="0066CC"/>
+                </a:solidFill>
+                <a:latin typeface="Noto Sans KR"/>
               </a:defRPr>
             </a:pPr>
             <a:r>
@@ -3155,9 +3155,9 @@
               </a:spcAft>
               <a:defRPr sz="4400" b="1">
                 <a:solidFill>
-                  <a:srgbClr val="0F172A"/>
-                </a:solidFill>
-                <a:latin typeface="Malgun Gothic"/>
+                  <a:srgbClr val="1D1D1F"/>
+                </a:solidFill>
+                <a:latin typeface="Noto Sans KR"/>
               </a:defRPr>
             </a:pPr>
             <a:r>
@@ -3172,9 +3172,9 @@
             <a:pPr>
               <a:defRPr sz="1800">
                 <a:solidFill>
-                  <a:srgbClr val="64748B"/>
-                </a:solidFill>
-                <a:latin typeface="Malgun Gothic"/>
+                  <a:srgbClr val="86868B"/>
+                </a:solidFill>
+                <a:latin typeface="Noto Sans KR"/>
               </a:defRPr>
             </a:pPr>
             <a:r>
@@ -3191,7 +3191,7 @@
         </p:nvSpPr>
         <p:spPr>
           <a:xfrm>
-            <a:off x="548640" y="5669280"/>
+            <a:off x="731520" y="5669280"/>
             <a:ext cx="6217920" cy="731520"/>
           </a:xfrm>
           <a:prstGeom prst="rect">
@@ -3208,9 +3208,9 @@
             <a:pPr>
               <a:defRPr sz="1100">
                 <a:solidFill>
-                  <a:srgbClr val="64748B"/>
-                </a:solidFill>
-                <a:latin typeface="Arial"/>
+                  <a:srgbClr val="86868B"/>
+                </a:solidFill>
+                <a:latin typeface="Noto Sans KR"/>
               </a:defRPr>
             </a:pPr>
             <a:r>
@@ -3238,7 +3238,7 @@
             <a:avLst/>
           </a:prstGeom>
           <a:solidFill>
-            <a:srgbClr val="0F172A"/>
+            <a:srgbClr val="1D1D1F"/>
           </a:solidFill>
           <a:ln>
             <a:noFill/>
@@ -3296,7 +3296,7 @@
                 <a:solidFill>
                   <a:srgbClr val="FFFFFF"/>
                 </a:solidFill>
-                <a:latin typeface="Arial"/>
+                <a:latin typeface="Noto Sans KR"/>
               </a:defRPr>
             </a:pPr>
             <a:r>
@@ -3312,7 +3312,7 @@
                 <a:solidFill>
                   <a:srgbClr val="FFFFFF"/>
                 </a:solidFill>
-                <a:latin typeface="Malgun Gothic"/>
+                <a:latin typeface="Noto Sans KR"/>
               </a:defRPr>
             </a:pPr>
             <a:r>
@@ -3326,9 +3326,9 @@
               </a:spcAft>
               <a:defRPr sz="1400">
                 <a:solidFill>
-                  <a:srgbClr val="64748B"/>
-                </a:solidFill>
-                <a:latin typeface="Malgun Gothic"/>
+                  <a:srgbClr val="86868B"/>
+                </a:solidFill>
+                <a:latin typeface="Noto Sans KR"/>
               </a:defRPr>
             </a:pPr>
             <a:r>
@@ -3339,9 +3339,9 @@
             <a:pPr algn="ctr">
               <a:defRPr sz="1400" b="1">
                 <a:solidFill>
-                  <a:srgbClr val="3B82F6"/>
-                </a:solidFill>
-                <a:latin typeface="Malgun Gothic"/>
+                  <a:srgbClr val="0066CC"/>
+                </a:solidFill>
+                <a:latin typeface="Noto Sans KR"/>
               </a:defRPr>
             </a:pPr>
             <a:r>
@@ -3364,7 +3364,7 @@
     <p:bg>
       <p:bgPr>
         <a:solidFill>
-          <a:srgbClr val="FFFFFF"/>
+          <a:srgbClr val="F5F5F7"/>
         </a:solidFill>
         <a:effectLst/>
       </p:bgPr>
@@ -3401,9 +3401,9 @@
             <a:pPr>
               <a:defRPr sz="1100" b="1">
                 <a:solidFill>
-                  <a:srgbClr val="2563EB"/>
-                </a:solidFill>
-                <a:latin typeface="Malgun Gothic"/>
+                  <a:srgbClr val="0066CC"/>
+                </a:solidFill>
+                <a:latin typeface="Noto Sans KR"/>
               </a:defRPr>
             </a:pPr>
             <a:r>
@@ -3437,9 +3437,9 @@
             <a:pPr>
               <a:defRPr sz="2600" b="1">
                 <a:solidFill>
-                  <a:srgbClr val="0F172A"/>
-                </a:solidFill>
-                <a:latin typeface="Malgun Gothic"/>
+                  <a:srgbClr val="1D1D1F"/>
+                </a:solidFill>
+                <a:latin typeface="Noto Sans KR"/>
               </a:defRPr>
             </a:pPr>
             <a:r>
@@ -3457,13 +3457,13 @@
         <p:spPr>
           <a:xfrm>
             <a:off x="548640" y="1371600"/>
-            <a:ext cx="11094415" cy="13716"/>
+            <a:ext cx="11094415" cy="9144"/>
           </a:xfrm>
           <a:prstGeom prst="rect">
             <a:avLst/>
           </a:prstGeom>
           <a:solidFill>
-            <a:srgbClr val="E2E8F0"/>
+            <a:srgbClr val="DADADE"/>
           </a:solidFill>
           <a:ln>
             <a:noFill/>
@@ -3516,13 +3516,13 @@
             <a:pPr>
               <a:defRPr sz="900">
                 <a:solidFill>
-                  <a:srgbClr val="64748B"/>
-                </a:solidFill>
-                <a:latin typeface="Malgun Gothic"/>
-              </a:defRPr>
-            </a:pPr>
-            <a:r>
-              <a:t>AICA 자격심사 시스템 사용자 매뉴얼 · 2026.07</a:t>
+                  <a:srgbClr val="86868B"/>
+                </a:solidFill>
+                <a:latin typeface="Noto Sans KR"/>
+              </a:defRPr>
+            </a:pPr>
+            <a:r>
+              <a:t>AICA 자격심사 시스템 사용자 매뉴얼 · Apple Concept</a:t>
             </a:r>
           </a:p>
         </p:txBody>
@@ -3552,9 +3552,9 @@
             <a:pPr algn="r">
               <a:defRPr sz="900">
                 <a:solidFill>
-                  <a:srgbClr val="64748B"/>
-                </a:solidFill>
-                <a:latin typeface="Malgun Gothic"/>
+                  <a:srgbClr val="86868B"/>
+                </a:solidFill>
+                <a:latin typeface="Noto Sans KR"/>
               </a:defRPr>
             </a:pPr>
             <a:r>
@@ -3572,17 +3572,17 @@
         <p:spPr>
           <a:xfrm>
             <a:off x="548640" y="1828800"/>
-            <a:ext cx="5303520" cy="4114800"/>
+            <a:ext cx="5486400" cy="4114800"/>
           </a:xfrm>
           <a:prstGeom prst="roundRect">
             <a:avLst/>
           </a:prstGeom>
           <a:solidFill>
-            <a:srgbClr val="EFF6FF"/>
+            <a:srgbClr val="FFFFFF"/>
           </a:solidFill>
           <a:ln w="12700">
             <a:solidFill>
-              <a:srgbClr val="E2E8F0"/>
+              <a:srgbClr val="DADADE"/>
             </a:solidFill>
           </a:ln>
         </p:spPr>
@@ -3616,8 +3616,8 @@
         </p:nvSpPr>
         <p:spPr>
           <a:xfrm>
-            <a:off x="685800" y="1965960"/>
-            <a:ext cx="5029200" cy="3840480"/>
+            <a:off x="731520" y="2011680"/>
+            <a:ext cx="5120640" cy="3749040"/>
           </a:xfrm>
           <a:prstGeom prst="rect">
             <a:avLst/>
@@ -3632,13 +3632,13 @@
           <a:p>
             <a:pPr>
               <a:spcAft>
-                <a:spcPts val="1000"/>
-              </a:spcAft>
-              <a:defRPr sz="1400" b="1">
-                <a:solidFill>
-                  <a:srgbClr val="2563EB"/>
-                </a:solidFill>
-                <a:latin typeface="Malgun Gothic"/>
+                <a:spcPts val="1200"/>
+              </a:spcAft>
+              <a:defRPr sz="1500" b="1">
+                <a:solidFill>
+                  <a:srgbClr val="1D1D1F"/>
+                </a:solidFill>
+                <a:latin typeface="Noto Sans KR"/>
               </a:defRPr>
             </a:pPr>
             <a:r>
@@ -3648,13 +3648,13 @@
           <a:p>
             <a:pPr>
               <a:spcAft>
-                <a:spcPts val="500"/>
+                <a:spcPts val="600"/>
               </a:spcAft>
               <a:defRPr sz="1100">
                 <a:solidFill>
-                  <a:srgbClr val="475569"/>
-                </a:solidFill>
-                <a:latin typeface="Malgun Gothic"/>
+                  <a:srgbClr val="1D1D1F"/>
+                </a:solidFill>
+                <a:latin typeface="Noto Sans KR"/>
               </a:defRPr>
             </a:pPr>
             <a:r>
@@ -3664,13 +3664,13 @@
           <a:p>
             <a:pPr>
               <a:spcAft>
-                <a:spcPts val="500"/>
+                <a:spcPts val="600"/>
               </a:spcAft>
               <a:defRPr sz="1100">
                 <a:solidFill>
-                  <a:srgbClr val="475569"/>
-                </a:solidFill>
-                <a:latin typeface="Malgun Gothic"/>
+                  <a:srgbClr val="1D1D1F"/>
+                </a:solidFill>
+                <a:latin typeface="Noto Sans KR"/>
               </a:defRPr>
             </a:pPr>
             <a:r>
@@ -3680,13 +3680,13 @@
           <a:p>
             <a:pPr>
               <a:spcAft>
-                <a:spcPts val="500"/>
+                <a:spcPts val="600"/>
               </a:spcAft>
               <a:defRPr sz="1100">
                 <a:solidFill>
-                  <a:srgbClr val="475569"/>
-                </a:solidFill>
-                <a:latin typeface="Malgun Gothic"/>
+                  <a:srgbClr val="1D1D1F"/>
+                </a:solidFill>
+                <a:latin typeface="Noto Sans KR"/>
               </a:defRPr>
             </a:pPr>
             <a:r>
@@ -3696,13 +3696,13 @@
           <a:p>
             <a:pPr>
               <a:spcAft>
-                <a:spcPts val="500"/>
+                <a:spcPts val="600"/>
               </a:spcAft>
               <a:defRPr sz="1100">
                 <a:solidFill>
-                  <a:srgbClr val="475569"/>
-                </a:solidFill>
-                <a:latin typeface="Malgun Gothic"/>
+                  <a:srgbClr val="1D1D1F"/>
+                </a:solidFill>
+                <a:latin typeface="Noto Sans KR"/>
               </a:defRPr>
             </a:pPr>
             <a:r>
@@ -3712,13 +3712,13 @@
           <a:p>
             <a:pPr>
               <a:spcAft>
-                <a:spcPts val="500"/>
+                <a:spcPts val="600"/>
               </a:spcAft>
               <a:defRPr sz="1100">
                 <a:solidFill>
-                  <a:srgbClr val="475569"/>
-                </a:solidFill>
-                <a:latin typeface="Malgun Gothic"/>
+                  <a:srgbClr val="1D1D1F"/>
+                </a:solidFill>
+                <a:latin typeface="Noto Sans KR"/>
               </a:defRPr>
             </a:pPr>
             <a:r>
@@ -3729,13 +3729,13 @@
             <a:br/>
             <a:pPr>
               <a:spcAft>
-                <a:spcPts val="500"/>
+                <a:spcPts val="600"/>
               </a:spcAft>
               <a:defRPr sz="1100">
                 <a:solidFill>
-                  <a:srgbClr val="475569"/>
-                </a:solidFill>
-                <a:latin typeface="Malgun Gothic"/>
+                  <a:srgbClr val="1D1D1F"/>
+                </a:solidFill>
+                <a:latin typeface="Noto Sans KR"/>
               </a:defRPr>
             </a:pPr>
             <a:r>
@@ -3745,41 +3745,58 @@
           <a:p>
             <a:pPr>
               <a:spcAft>
-                <a:spcPts val="500"/>
+                <a:spcPts val="600"/>
               </a:spcAft>
               <a:defRPr sz="1100">
                 <a:solidFill>
-                  <a:srgbClr val="475569"/>
-                </a:solidFill>
-                <a:latin typeface="Malgun Gothic"/>
+                  <a:srgbClr val="1D1D1F"/>
+                </a:solidFill>
+                <a:latin typeface="Noto Sans KR"/>
               </a:defRPr>
             </a:pPr>
             <a:r>
               <a:t>[심사 수정]: 이미 제출한 평가를 다시 검토·수정해야 할 때 재진입하여 수정 후 임시저장/제출 가능</a:t>
             </a:r>
           </a:p>
-        </p:txBody>
-      </p:sp>
-      <p:sp>
-        <p:nvSpPr>
-          <p:cNvPr id="9" name="Rectangle 8"/>
+          <a:p>
+            <a:br/>
+            <a:pPr>
+              <a:spcAft>
+                <a:spcPts val="600"/>
+              </a:spcAft>
+              <a:defRPr sz="1100">
+                <a:solidFill>
+                  <a:srgbClr val="1D1D1F"/>
+                </a:solidFill>
+                <a:latin typeface="Noto Sans KR"/>
+              </a:defRPr>
+            </a:pPr>
+            <a:r>
+              <a:t>오른쪽 화면: 실제 배정된 심사위원들이 보는 과제 대기 큐 및 타 위원 렌더링 화면</a:t>
+            </a:r>
+          </a:p>
+        </p:txBody>
+      </p:sp>
+      <p:sp>
+        <p:nvSpPr>
+          <p:cNvPr id="9" name="Rounded Rectangle 8"/>
           <p:cNvSpPr/>
           <p:nvPr/>
         </p:nvSpPr>
         <p:spPr>
           <a:xfrm>
-            <a:off x="6309360" y="1828800"/>
-            <a:ext cx="5303520" cy="4114800"/>
-          </a:xfrm>
-          <a:prstGeom prst="rect">
+            <a:off x="6400800" y="1828800"/>
+            <a:ext cx="5212080" cy="4114800"/>
+          </a:xfrm>
+          <a:prstGeom prst="roundRect">
             <a:avLst/>
           </a:prstGeom>
           <a:solidFill>
-            <a:srgbClr val="F8FAFC"/>
+            <a:srgbClr val="FFFFFF"/>
           </a:solidFill>
-          <a:ln w="19050">
+          <a:ln w="12700">
             <a:solidFill>
-              <a:srgbClr val="E2E8F0"/>
+              <a:srgbClr val="DADADE"/>
             </a:solidFill>
           </a:ln>
         </p:spPr>
@@ -3821,7 +3838,7 @@
         </p:blipFill>
         <p:spPr>
           <a:xfrm>
-            <a:off x="6768329" y="1965960"/>
+            <a:off x="6814049" y="1965960"/>
             <a:ext cx="4385580" cy="3840480"/>
           </a:xfrm>
           <a:prstGeom prst="rect">
@@ -3843,7 +3860,7 @@
     <p:bg>
       <p:bgPr>
         <a:solidFill>
-          <a:srgbClr val="FFFFFF"/>
+          <a:srgbClr val="F5F5F7"/>
         </a:solidFill>
         <a:effectLst/>
       </p:bgPr>
@@ -3880,9 +3897,9 @@
             <a:pPr>
               <a:defRPr sz="1100" b="1">
                 <a:solidFill>
-                  <a:srgbClr val="2563EB"/>
-                </a:solidFill>
-                <a:latin typeface="Malgun Gothic"/>
+                  <a:srgbClr val="0066CC"/>
+                </a:solidFill>
+                <a:latin typeface="Noto Sans KR"/>
               </a:defRPr>
             </a:pPr>
             <a:r>
@@ -3916,9 +3933,9 @@
             <a:pPr>
               <a:defRPr sz="2600" b="1">
                 <a:solidFill>
-                  <a:srgbClr val="0F172A"/>
-                </a:solidFill>
-                <a:latin typeface="Malgun Gothic"/>
+                  <a:srgbClr val="1D1D1F"/>
+                </a:solidFill>
+                <a:latin typeface="Noto Sans KR"/>
               </a:defRPr>
             </a:pPr>
             <a:r>
@@ -3936,13 +3953,13 @@
         <p:spPr>
           <a:xfrm>
             <a:off x="548640" y="1371600"/>
-            <a:ext cx="11094415" cy="13716"/>
+            <a:ext cx="11094415" cy="9144"/>
           </a:xfrm>
           <a:prstGeom prst="rect">
             <a:avLst/>
           </a:prstGeom>
           <a:solidFill>
-            <a:srgbClr val="E2E8F0"/>
+            <a:srgbClr val="DADADE"/>
           </a:solidFill>
           <a:ln>
             <a:noFill/>
@@ -3995,13 +4012,13 @@
             <a:pPr>
               <a:defRPr sz="900">
                 <a:solidFill>
-                  <a:srgbClr val="64748B"/>
-                </a:solidFill>
-                <a:latin typeface="Malgun Gothic"/>
-              </a:defRPr>
-            </a:pPr>
-            <a:r>
-              <a:t>AICA 자격심사 시스템 사용자 매뉴얼 · 2026.07</a:t>
+                  <a:srgbClr val="86868B"/>
+                </a:solidFill>
+                <a:latin typeface="Noto Sans KR"/>
+              </a:defRPr>
+            </a:pPr>
+            <a:r>
+              <a:t>AICA 자격심사 시스템 사용자 매뉴얼 · Apple Concept</a:t>
             </a:r>
           </a:p>
         </p:txBody>
@@ -4031,9 +4048,9 @@
             <a:pPr algn="r">
               <a:defRPr sz="900">
                 <a:solidFill>
-                  <a:srgbClr val="64748B"/>
-                </a:solidFill>
-                <a:latin typeface="Malgun Gothic"/>
+                  <a:srgbClr val="86868B"/>
+                </a:solidFill>
+                <a:latin typeface="Noto Sans KR"/>
               </a:defRPr>
             </a:pPr>
             <a:r>
@@ -4057,11 +4074,11 @@
             <a:avLst/>
           </a:prstGeom>
           <a:solidFill>
-            <a:srgbClr val="F8FAFC"/>
+            <a:srgbClr val="FFFFFF"/>
           </a:solidFill>
           <a:ln w="12700">
             <a:solidFill>
-              <a:srgbClr val="E2E8F0"/>
+              <a:srgbClr val="DADADE"/>
             </a:solidFill>
           </a:ln>
         </p:spPr>
@@ -4095,8 +4112,8 @@
         </p:nvSpPr>
         <p:spPr>
           <a:xfrm>
-            <a:off x="685800" y="1965960"/>
-            <a:ext cx="3200400" cy="3840480"/>
+            <a:off x="731520" y="2011680"/>
+            <a:ext cx="3108960" cy="3749040"/>
           </a:xfrm>
           <a:prstGeom prst="rect">
             <a:avLst/>
@@ -4111,13 +4128,13 @@
           <a:p>
             <a:pPr>
               <a:spcAft>
-                <a:spcPts val="1000"/>
-              </a:spcAft>
-              <a:defRPr sz="1400" b="1">
-                <a:solidFill>
-                  <a:srgbClr val="0F172A"/>
-                </a:solidFill>
-                <a:latin typeface="Malgun Gothic"/>
+                <a:spcPts val="1200"/>
+              </a:spcAft>
+              <a:defRPr sz="1500" b="1">
+                <a:solidFill>
+                  <a:srgbClr val="1D1D1F"/>
+                </a:solidFill>
+                <a:latin typeface="Noto Sans KR"/>
               </a:defRPr>
             </a:pPr>
             <a:r>
@@ -4127,13 +4144,13 @@
           <a:p>
             <a:pPr>
               <a:spcAft>
-                <a:spcPts val="500"/>
+                <a:spcPts val="600"/>
               </a:spcAft>
               <a:defRPr sz="1100">
                 <a:solidFill>
-                  <a:srgbClr val="475569"/>
-                </a:solidFill>
-                <a:latin typeface="Malgun Gothic"/>
+                  <a:srgbClr val="1D1D1F"/>
+                </a:solidFill>
+                <a:latin typeface="Noto Sans KR"/>
               </a:defRPr>
             </a:pPr>
             <a:r>
@@ -4143,13 +4160,13 @@
           <a:p>
             <a:pPr>
               <a:spcAft>
-                <a:spcPts val="500"/>
+                <a:spcPts val="600"/>
               </a:spcAft>
               <a:defRPr sz="1100">
                 <a:solidFill>
-                  <a:srgbClr val="475569"/>
-                </a:solidFill>
-                <a:latin typeface="Malgun Gothic"/>
+                  <a:srgbClr val="1D1D1F"/>
+                </a:solidFill>
+                <a:latin typeface="Noto Sans KR"/>
               </a:defRPr>
             </a:pPr>
             <a:r>
@@ -4159,13 +4176,13 @@
           <a:p>
             <a:pPr>
               <a:spcAft>
-                <a:spcPts val="500"/>
+                <a:spcPts val="600"/>
               </a:spcAft>
               <a:defRPr sz="1100">
                 <a:solidFill>
-                  <a:srgbClr val="475569"/>
-                </a:solidFill>
-                <a:latin typeface="Malgun Gothic"/>
+                  <a:srgbClr val="1D1D1F"/>
+                </a:solidFill>
+                <a:latin typeface="Noto Sans KR"/>
               </a:defRPr>
             </a:pPr>
             <a:r>
@@ -4175,13 +4192,13 @@
           <a:p>
             <a:pPr>
               <a:spcAft>
-                <a:spcPts val="500"/>
+                <a:spcPts val="600"/>
               </a:spcAft>
               <a:defRPr sz="1100">
                 <a:solidFill>
-                  <a:srgbClr val="475569"/>
-                </a:solidFill>
-                <a:latin typeface="Malgun Gothic"/>
+                  <a:srgbClr val="1D1D1F"/>
+                </a:solidFill>
+                <a:latin typeface="Noto Sans KR"/>
               </a:defRPr>
             </a:pPr>
             <a:r>
@@ -4192,13 +4209,13 @@
             <a:br/>
             <a:pPr>
               <a:spcAft>
-                <a:spcPts val="500"/>
+                <a:spcPts val="600"/>
               </a:spcAft>
               <a:defRPr sz="1100">
                 <a:solidFill>
-                  <a:srgbClr val="475569"/>
-                </a:solidFill>
-                <a:latin typeface="Malgun Gothic"/>
+                  <a:srgbClr val="1D1D1F"/>
+                </a:solidFill>
+                <a:latin typeface="Noto Sans KR"/>
               </a:defRPr>
             </a:pPr>
             <a:r>
@@ -4222,11 +4239,11 @@
             <a:avLst/>
           </a:prstGeom>
           <a:solidFill>
-            <a:srgbClr val="EFF6FF"/>
+            <a:srgbClr val="F5F5F7"/>
           </a:solidFill>
           <a:ln w="12700">
             <a:solidFill>
-              <a:srgbClr val="E2E8F0"/>
+              <a:srgbClr val="DADADE"/>
             </a:solidFill>
           </a:ln>
         </p:spPr>
@@ -4260,8 +4277,8 @@
         </p:nvSpPr>
         <p:spPr>
           <a:xfrm>
-            <a:off x="4526280" y="1965960"/>
-            <a:ext cx="3200400" cy="3840480"/>
+            <a:off x="4572000" y="2011680"/>
+            <a:ext cx="3108960" cy="3749040"/>
           </a:xfrm>
           <a:prstGeom prst="rect">
             <a:avLst/>
@@ -4276,13 +4293,13 @@
           <a:p>
             <a:pPr>
               <a:spcAft>
-                <a:spcPts val="1000"/>
-              </a:spcAft>
-              <a:defRPr sz="1400" b="1">
-                <a:solidFill>
-                  <a:srgbClr val="2563EB"/>
-                </a:solidFill>
-                <a:latin typeface="Malgun Gothic"/>
+                <a:spcPts val="1200"/>
+              </a:spcAft>
+              <a:defRPr sz="1500" b="1">
+                <a:solidFill>
+                  <a:srgbClr val="0066CC"/>
+                </a:solidFill>
+                <a:latin typeface="Noto Sans KR"/>
               </a:defRPr>
             </a:pPr>
             <a:r>
@@ -4292,13 +4309,13 @@
           <a:p>
             <a:pPr>
               <a:spcAft>
-                <a:spcPts val="500"/>
+                <a:spcPts val="600"/>
               </a:spcAft>
               <a:defRPr sz="1100">
                 <a:solidFill>
-                  <a:srgbClr val="475569"/>
-                </a:solidFill>
-                <a:latin typeface="Malgun Gothic"/>
+                  <a:srgbClr val="1D1D1F"/>
+                </a:solidFill>
+                <a:latin typeface="Noto Sans KR"/>
               </a:defRPr>
             </a:pPr>
             <a:r>
@@ -4308,13 +4325,13 @@
           <a:p>
             <a:pPr>
               <a:spcAft>
-                <a:spcPts val="500"/>
+                <a:spcPts val="600"/>
               </a:spcAft>
               <a:defRPr sz="1100">
                 <a:solidFill>
-                  <a:srgbClr val="475569"/>
-                </a:solidFill>
-                <a:latin typeface="Malgun Gothic"/>
+                  <a:srgbClr val="1D1D1F"/>
+                </a:solidFill>
+                <a:latin typeface="Noto Sans KR"/>
               </a:defRPr>
             </a:pPr>
             <a:r>
@@ -4324,13 +4341,13 @@
           <a:p>
             <a:pPr>
               <a:spcAft>
-                <a:spcPts val="500"/>
+                <a:spcPts val="600"/>
               </a:spcAft>
               <a:defRPr sz="1100">
                 <a:solidFill>
-                  <a:srgbClr val="475569"/>
-                </a:solidFill>
-                <a:latin typeface="Malgun Gothic"/>
+                  <a:srgbClr val="1D1D1F"/>
+                </a:solidFill>
+                <a:latin typeface="Noto Sans KR"/>
               </a:defRPr>
             </a:pPr>
             <a:r>
@@ -4340,13 +4357,13 @@
           <a:p>
             <a:pPr>
               <a:spcAft>
-                <a:spcPts val="500"/>
+                <a:spcPts val="600"/>
               </a:spcAft>
               <a:defRPr sz="1100">
                 <a:solidFill>
-                  <a:srgbClr val="475569"/>
-                </a:solidFill>
-                <a:latin typeface="Malgun Gothic"/>
+                  <a:srgbClr val="1D1D1F"/>
+                </a:solidFill>
+                <a:latin typeface="Noto Sans KR"/>
               </a:defRPr>
             </a:pPr>
             <a:r>
@@ -4357,13 +4374,13 @@
             <a:br/>
             <a:pPr>
               <a:spcAft>
-                <a:spcPts val="500"/>
+                <a:spcPts val="600"/>
               </a:spcAft>
               <a:defRPr sz="1100">
                 <a:solidFill>
-                  <a:srgbClr val="475569"/>
-                </a:solidFill>
-                <a:latin typeface="Malgun Gothic"/>
+                  <a:srgbClr val="1D1D1F"/>
+                </a:solidFill>
+                <a:latin typeface="Noto Sans KR"/>
               </a:defRPr>
             </a:pPr>
             <a:r>
@@ -4387,11 +4404,11 @@
             <a:avLst/>
           </a:prstGeom>
           <a:solidFill>
-            <a:srgbClr val="F8FAFC"/>
+            <a:srgbClr val="FFFFFF"/>
           </a:solidFill>
           <a:ln w="12700">
             <a:solidFill>
-              <a:srgbClr val="E2E8F0"/>
+              <a:srgbClr val="DADADE"/>
             </a:solidFill>
           </a:ln>
         </p:spPr>
@@ -4425,8 +4442,8 @@
         </p:nvSpPr>
         <p:spPr>
           <a:xfrm>
-            <a:off x="8366760" y="1965960"/>
-            <a:ext cx="3200400" cy="3840480"/>
+            <a:off x="8412480" y="2011680"/>
+            <a:ext cx="3108960" cy="3749040"/>
           </a:xfrm>
           <a:prstGeom prst="rect">
             <a:avLst/>
@@ -4441,13 +4458,13 @@
           <a:p>
             <a:pPr>
               <a:spcAft>
-                <a:spcPts val="1000"/>
-              </a:spcAft>
-              <a:defRPr sz="1400" b="1">
-                <a:solidFill>
-                  <a:srgbClr val="0F172A"/>
-                </a:solidFill>
-                <a:latin typeface="Malgun Gothic"/>
+                <a:spcPts val="1200"/>
+              </a:spcAft>
+              <a:defRPr sz="1500" b="1">
+                <a:solidFill>
+                  <a:srgbClr val="1D1D1F"/>
+                </a:solidFill>
+                <a:latin typeface="Noto Sans KR"/>
               </a:defRPr>
             </a:pPr>
             <a:r>
@@ -4457,13 +4474,13 @@
           <a:p>
             <a:pPr>
               <a:spcAft>
-                <a:spcPts val="500"/>
+                <a:spcPts val="600"/>
               </a:spcAft>
               <a:defRPr sz="1100">
                 <a:solidFill>
-                  <a:srgbClr val="475569"/>
-                </a:solidFill>
-                <a:latin typeface="Malgun Gothic"/>
+                  <a:srgbClr val="1D1D1F"/>
+                </a:solidFill>
+                <a:latin typeface="Noto Sans KR"/>
               </a:defRPr>
             </a:pPr>
             <a:r>
@@ -4473,13 +4490,13 @@
           <a:p>
             <a:pPr>
               <a:spcAft>
-                <a:spcPts val="500"/>
+                <a:spcPts val="600"/>
               </a:spcAft>
               <a:defRPr sz="1100">
                 <a:solidFill>
-                  <a:srgbClr val="475569"/>
-                </a:solidFill>
-                <a:latin typeface="Malgun Gothic"/>
+                  <a:srgbClr val="1D1D1F"/>
+                </a:solidFill>
+                <a:latin typeface="Noto Sans KR"/>
               </a:defRPr>
             </a:pPr>
             <a:r>
@@ -4489,13 +4506,13 @@
           <a:p>
             <a:pPr>
               <a:spcAft>
-                <a:spcPts val="500"/>
+                <a:spcPts val="600"/>
               </a:spcAft>
               <a:defRPr sz="1100">
                 <a:solidFill>
-                  <a:srgbClr val="475569"/>
-                </a:solidFill>
-                <a:latin typeface="Malgun Gothic"/>
+                  <a:srgbClr val="1D1D1F"/>
+                </a:solidFill>
+                <a:latin typeface="Noto Sans KR"/>
               </a:defRPr>
             </a:pPr>
             <a:r>
@@ -4505,13 +4522,13 @@
           <a:p>
             <a:pPr>
               <a:spcAft>
-                <a:spcPts val="500"/>
+                <a:spcPts val="600"/>
               </a:spcAft>
               <a:defRPr sz="1100">
                 <a:solidFill>
-                  <a:srgbClr val="475569"/>
-                </a:solidFill>
-                <a:latin typeface="Malgun Gothic"/>
+                  <a:srgbClr val="1D1D1F"/>
+                </a:solidFill>
+                <a:latin typeface="Noto Sans KR"/>
               </a:defRPr>
             </a:pPr>
             <a:r>
@@ -4522,13 +4539,13 @@
             <a:br/>
             <a:pPr>
               <a:spcAft>
-                <a:spcPts val="500"/>
+                <a:spcPts val="600"/>
               </a:spcAft>
               <a:defRPr sz="1100">
                 <a:solidFill>
-                  <a:srgbClr val="475569"/>
-                </a:solidFill>
-                <a:latin typeface="Malgun Gothic"/>
+                  <a:srgbClr val="1D1D1F"/>
+                </a:solidFill>
+                <a:latin typeface="Noto Sans KR"/>
               </a:defRPr>
             </a:pPr>
             <a:r>
@@ -4551,7 +4568,7 @@
     <p:bg>
       <p:bgPr>
         <a:solidFill>
-          <a:srgbClr val="FFFFFF"/>
+          <a:srgbClr val="F5F5F7"/>
         </a:solidFill>
         <a:effectLst/>
       </p:bgPr>
@@ -4588,9 +4605,9 @@
             <a:pPr>
               <a:defRPr sz="1100" b="1">
                 <a:solidFill>
-                  <a:srgbClr val="2563EB"/>
-                </a:solidFill>
-                <a:latin typeface="Malgun Gothic"/>
+                  <a:srgbClr val="0066CC"/>
+                </a:solidFill>
+                <a:latin typeface="Noto Sans KR"/>
               </a:defRPr>
             </a:pPr>
             <a:r>
@@ -4624,9 +4641,9 @@
             <a:pPr>
               <a:defRPr sz="2600" b="1">
                 <a:solidFill>
-                  <a:srgbClr val="0F172A"/>
-                </a:solidFill>
-                <a:latin typeface="Malgun Gothic"/>
+                  <a:srgbClr val="1D1D1F"/>
+                </a:solidFill>
+                <a:latin typeface="Noto Sans KR"/>
               </a:defRPr>
             </a:pPr>
             <a:r>
@@ -4644,13 +4661,13 @@
         <p:spPr>
           <a:xfrm>
             <a:off x="548640" y="1371600"/>
-            <a:ext cx="11094415" cy="13716"/>
+            <a:ext cx="11094415" cy="9144"/>
           </a:xfrm>
           <a:prstGeom prst="rect">
             <a:avLst/>
           </a:prstGeom>
           <a:solidFill>
-            <a:srgbClr val="E2E8F0"/>
+            <a:srgbClr val="DADADE"/>
           </a:solidFill>
           <a:ln>
             <a:noFill/>
@@ -4703,13 +4720,13 @@
             <a:pPr>
               <a:defRPr sz="900">
                 <a:solidFill>
-                  <a:srgbClr val="64748B"/>
-                </a:solidFill>
-                <a:latin typeface="Malgun Gothic"/>
-              </a:defRPr>
-            </a:pPr>
-            <a:r>
-              <a:t>AICA 자격심사 시스템 사용자 매뉴얼 · 2026.07</a:t>
+                  <a:srgbClr val="86868B"/>
+                </a:solidFill>
+                <a:latin typeface="Noto Sans KR"/>
+              </a:defRPr>
+            </a:pPr>
+            <a:r>
+              <a:t>AICA 자격심사 시스템 사용자 매뉴얼 · Apple Concept</a:t>
             </a:r>
           </a:p>
         </p:txBody>
@@ -4739,9 +4756,9 @@
             <a:pPr algn="r">
               <a:defRPr sz="900">
                 <a:solidFill>
-                  <a:srgbClr val="64748B"/>
-                </a:solidFill>
-                <a:latin typeface="Malgun Gothic"/>
+                  <a:srgbClr val="86868B"/>
+                </a:solidFill>
+                <a:latin typeface="Noto Sans KR"/>
               </a:defRPr>
             </a:pPr>
             <a:r>
@@ -4752,7 +4769,7 @@
       </p:sp>
       <p:sp>
         <p:nvSpPr>
-          <p:cNvPr id="7" name="Rectangle 6"/>
+          <p:cNvPr id="7" name="Rounded Rectangle 6"/>
           <p:cNvSpPr/>
           <p:nvPr/>
         </p:nvSpPr>
@@ -4761,15 +4778,15 @@
             <a:off x="548640" y="1645920"/>
             <a:ext cx="11094415" cy="777240"/>
           </a:xfrm>
-          <a:prstGeom prst="rect">
+          <a:prstGeom prst="roundRect">
             <a:avLst/>
           </a:prstGeom>
           <a:solidFill>
-            <a:srgbClr val="F8FAFC"/>
+            <a:srgbClr val="FFFFFF"/>
           </a:solidFill>
           <a:ln>
             <a:solidFill>
-              <a:srgbClr val="E2E8F0"/>
+              <a:srgbClr val="DADADE"/>
             </a:solidFill>
           </a:ln>
         </p:spPr>
@@ -4791,27 +4808,22 @@
           <a:bodyPr rtlCol="0" anchor="ctr" wrap="square"/>
           <a:lstStyle/>
           <a:p>
-            <a:pPr algn="ctr">
-              <a:defRPr sz="1100">
-                <a:solidFill>
-                  <a:srgbClr val="475569"/>
-                </a:solidFill>
-                <a:latin typeface="Malgun Gothic"/>
-              </a:defRPr>
-            </a:pPr>
+            <a:pPr algn="ctr"/>
             <a:r>
               <a:rPr b="1" sz="1100">
                 <a:solidFill>
-                  <a:srgbClr val="2563EB"/>
-                </a:solidFill>
+                  <a:srgbClr val="0066CC"/>
+                </a:solidFill>
+                <a:latin typeface="Noto Sans KR"/>
               </a:rPr>
               <a:t>  [1. 개인정보(PII)]  </a:t>
             </a:r>
             <a:r>
               <a:rPr sz="1100">
                 <a:solidFill>
-                  <a:srgbClr val="475569"/>
-                </a:solidFill>
+                  <a:srgbClr val="1D1D1F"/>
+                </a:solidFill>
+                <a:latin typeface="Noto Sans KR"/>
               </a:rPr>
               <a:t>이름, 전화번호, 이메일 주소 등 고객 및 개인 정보가 마스킹되었는가?</a:t>
             </a:r>
@@ -4820,7 +4832,7 @@
       </p:sp>
       <p:sp>
         <p:nvSpPr>
-          <p:cNvPr id="8" name="Rectangle 7"/>
+          <p:cNvPr id="8" name="Rounded Rectangle 7"/>
           <p:cNvSpPr/>
           <p:nvPr/>
         </p:nvSpPr>
@@ -4829,15 +4841,15 @@
             <a:off x="548640" y="2514600"/>
             <a:ext cx="11094415" cy="777240"/>
           </a:xfrm>
-          <a:prstGeom prst="rect">
+          <a:prstGeom prst="roundRect">
             <a:avLst/>
           </a:prstGeom>
           <a:solidFill>
-            <a:srgbClr val="F8FAFC"/>
+            <a:srgbClr val="FFFFFF"/>
           </a:solidFill>
           <a:ln>
             <a:solidFill>
-              <a:srgbClr val="E2E8F0"/>
+              <a:srgbClr val="DADADE"/>
             </a:solidFill>
           </a:ln>
         </p:spPr>
@@ -4859,27 +4871,22 @@
           <a:bodyPr rtlCol="0" anchor="ctr" wrap="square"/>
           <a:lstStyle/>
           <a:p>
-            <a:pPr algn="ctr">
-              <a:defRPr sz="1100">
-                <a:solidFill>
-                  <a:srgbClr val="475569"/>
-                </a:solidFill>
-                <a:latin typeface="Malgun Gothic"/>
-              </a:defRPr>
-            </a:pPr>
+            <a:pPr algn="ctr"/>
             <a:r>
               <a:rPr b="1" sz="1100">
                 <a:solidFill>
-                  <a:srgbClr val="2563EB"/>
-                </a:solidFill>
+                  <a:srgbClr val="0066CC"/>
+                </a:solidFill>
+                <a:latin typeface="Noto Sans KR"/>
               </a:rPr>
               <a:t>  [2. 기밀 정보 익명화]  </a:t>
             </a:r>
             <a:r>
               <a:rPr sz="1100">
                 <a:solidFill>
-                  <a:srgbClr val="475569"/>
-                </a:solidFill>
+                  <a:srgbClr val="1D1D1F"/>
+                </a:solidFill>
+                <a:latin typeface="Noto Sans KR"/>
               </a:rPr>
               <a:t>계약 금액, 단가, 마진율, 미공개 코드명 및 사내 기밀 정보가 익명화되었는가?</a:t>
             </a:r>
@@ -4888,7 +4895,7 @@
       </p:sp>
       <p:sp>
         <p:nvSpPr>
-          <p:cNvPr id="9" name="Rectangle 8"/>
+          <p:cNvPr id="9" name="Rounded Rectangle 8"/>
           <p:cNvSpPr/>
           <p:nvPr/>
         </p:nvSpPr>
@@ -4897,15 +4904,15 @@
             <a:off x="548640" y="3383280"/>
             <a:ext cx="11094415" cy="777240"/>
           </a:xfrm>
-          <a:prstGeom prst="rect">
+          <a:prstGeom prst="roundRect">
             <a:avLst/>
           </a:prstGeom>
           <a:solidFill>
-            <a:srgbClr val="F8FAFC"/>
+            <a:srgbClr val="FFFFFF"/>
           </a:solidFill>
           <a:ln>
             <a:solidFill>
-              <a:srgbClr val="E2E8F0"/>
+              <a:srgbClr val="DADADE"/>
             </a:solidFill>
           </a:ln>
         </p:spPr>
@@ -4927,27 +4934,22 @@
           <a:bodyPr rtlCol="0" anchor="ctr" wrap="square"/>
           <a:lstStyle/>
           <a:p>
-            <a:pPr algn="ctr">
-              <a:defRPr sz="1100">
-                <a:solidFill>
-                  <a:srgbClr val="475569"/>
-                </a:solidFill>
-                <a:latin typeface="Malgun Gothic"/>
-              </a:defRPr>
-            </a:pPr>
+            <a:pPr algn="ctr"/>
             <a:r>
               <a:rPr b="1" sz="1100">
                 <a:solidFill>
-                  <a:srgbClr val="2563EB"/>
-                </a:solidFill>
+                  <a:srgbClr val="0066CC"/>
+                </a:solidFill>
+                <a:latin typeface="Noto Sans KR"/>
               </a:rPr>
               <a:t>  [3. 접속 자격증명 제거]  </a:t>
             </a:r>
             <a:r>
               <a:rPr sz="1100">
                 <a:solidFill>
-                  <a:srgbClr val="475569"/>
-                </a:solidFill>
+                  <a:srgbClr val="1D1D1F"/>
+                </a:solidFill>
+                <a:latin typeface="Noto Sans KR"/>
               </a:rPr>
               <a:t>API Key, 서비스 계정 Key, DB 접속 정보(ID/PW)가 소스코드 및 문서에서 완벽히 제거되었는가?</a:t>
             </a:r>
@@ -4956,7 +4958,7 @@
       </p:sp>
       <p:sp>
         <p:nvSpPr>
-          <p:cNvPr id="10" name="Rectangle 9"/>
+          <p:cNvPr id="10" name="Rounded Rectangle 9"/>
           <p:cNvSpPr/>
           <p:nvPr/>
         </p:nvSpPr>
@@ -4965,15 +4967,15 @@
             <a:off x="548640" y="4251959"/>
             <a:ext cx="11094415" cy="777240"/>
           </a:xfrm>
-          <a:prstGeom prst="rect">
+          <a:prstGeom prst="roundRect">
             <a:avLst/>
           </a:prstGeom>
           <a:solidFill>
-            <a:srgbClr val="F8FAFC"/>
+            <a:srgbClr val="FFFFFF"/>
           </a:solidFill>
           <a:ln>
             <a:solidFill>
-              <a:srgbClr val="E2E8F0"/>
+              <a:srgbClr val="DADADE"/>
             </a:solidFill>
           </a:ln>
         </p:spPr>
@@ -4995,27 +4997,22 @@
           <a:bodyPr rtlCol="0" anchor="ctr" wrap="square"/>
           <a:lstStyle/>
           <a:p>
-            <a:pPr algn="ctr">
-              <a:defRPr sz="1100">
-                <a:solidFill>
-                  <a:srgbClr val="475569"/>
-                </a:solidFill>
-                <a:latin typeface="Malgun Gothic"/>
-              </a:defRPr>
-            </a:pPr>
+            <a:pPr algn="ctr"/>
             <a:r>
               <a:rPr b="1" sz="1100">
                 <a:solidFill>
-                  <a:srgbClr val="2563EB"/>
-                </a:solidFill>
+                  <a:srgbClr val="0066CC"/>
+                </a:solidFill>
+                <a:latin typeface="Noto Sans KR"/>
               </a:rPr>
               <a:t>  [4. 사내 보안 가이드라인 준수]  </a:t>
             </a:r>
             <a:r>
               <a:rPr sz="1100">
                 <a:solidFill>
-                  <a:srgbClr val="475569"/>
-                </a:solidFill>
+                  <a:srgbClr val="1D1D1F"/>
+                </a:solidFill>
+                <a:latin typeface="Noto Sans KR"/>
               </a:rPr>
               <a:t>보안 부서 배포 가이드라인 및 개발 보안 자가점검표 기준을 성실히 준수했는가?</a:t>
             </a:r>
@@ -5024,7 +5021,7 @@
       </p:sp>
       <p:sp>
         <p:nvSpPr>
-          <p:cNvPr id="11" name="Rectangle 10"/>
+          <p:cNvPr id="11" name="Rounded Rectangle 10"/>
           <p:cNvSpPr/>
           <p:nvPr/>
         </p:nvSpPr>
@@ -5033,15 +5030,15 @@
             <a:off x="548640" y="5120640"/>
             <a:ext cx="11094415" cy="777240"/>
           </a:xfrm>
-          <a:prstGeom prst="rect">
+          <a:prstGeom prst="roundRect">
             <a:avLst/>
           </a:prstGeom>
           <a:solidFill>
-            <a:srgbClr val="F8FAFC"/>
+            <a:srgbClr val="FFFFFF"/>
           </a:solidFill>
           <a:ln>
             <a:solidFill>
-              <a:srgbClr val="E2E8F0"/>
+              <a:srgbClr val="DADADE"/>
             </a:solidFill>
           </a:ln>
         </p:spPr>
@@ -5063,27 +5060,22 @@
           <a:bodyPr rtlCol="0" anchor="ctr" wrap="square"/>
           <a:lstStyle/>
           <a:p>
-            <a:pPr algn="ctr">
-              <a:defRPr sz="1100">
-                <a:solidFill>
-                  <a:srgbClr val="475569"/>
-                </a:solidFill>
-                <a:latin typeface="Malgun Gothic"/>
-              </a:defRPr>
-            </a:pPr>
+            <a:pPr algn="ctr"/>
             <a:r>
               <a:rPr b="1" sz="1100">
                 <a:solidFill>
-                  <a:srgbClr val="2563EB"/>
-                </a:solidFill>
+                  <a:srgbClr val="0066CC"/>
+                </a:solidFill>
+                <a:latin typeface="Noto Sans KR"/>
               </a:rPr>
               <a:t>  [5. 유출 방지 및 연동 안정성]  </a:t>
             </a:r>
             <a:r>
               <a:rPr sz="1100">
                 <a:solidFill>
-                  <a:srgbClr val="475569"/>
-                </a:solidFill>
+                  <a:srgbClr val="1D1D1F"/>
+                </a:solidFill>
+                <a:latin typeface="Noto Sans KR"/>
               </a:rPr>
               <a:t>타 부서 및 망 분리 환경 등 확장 사용 시 기밀 유출 위험이 없는가?</a:t>
             </a:r>
@@ -5115,9 +5107,9 @@
             <a:pPr>
               <a:defRPr sz="1100" b="1">
                 <a:solidFill>
-                  <a:srgbClr val="EF4444"/>
-                </a:solidFill>
-                <a:latin typeface="Malgun Gothic"/>
+                  <a:srgbClr val="FF453A"/>
+                </a:solidFill>
+                <a:latin typeface="Noto Sans KR"/>
               </a:defRPr>
             </a:pPr>
             <a:r>
@@ -5140,7 +5132,7 @@
     <p:bg>
       <p:bgPr>
         <a:solidFill>
-          <a:srgbClr val="FFFFFF"/>
+          <a:srgbClr val="F5F5F7"/>
         </a:solidFill>
         <a:effectLst/>
       </p:bgPr>
@@ -5177,9 +5169,9 @@
             <a:pPr>
               <a:defRPr sz="1100" b="1">
                 <a:solidFill>
-                  <a:srgbClr val="2563EB"/>
-                </a:solidFill>
-                <a:latin typeface="Malgun Gothic"/>
+                  <a:srgbClr val="0066CC"/>
+                </a:solidFill>
+                <a:latin typeface="Noto Sans KR"/>
               </a:defRPr>
             </a:pPr>
             <a:r>
@@ -5213,9 +5205,9 @@
             <a:pPr>
               <a:defRPr sz="2600" b="1">
                 <a:solidFill>
-                  <a:srgbClr val="0F172A"/>
-                </a:solidFill>
-                <a:latin typeface="Malgun Gothic"/>
+                  <a:srgbClr val="1D1D1F"/>
+                </a:solidFill>
+                <a:latin typeface="Noto Sans KR"/>
               </a:defRPr>
             </a:pPr>
             <a:r>
@@ -5233,13 +5225,13 @@
         <p:spPr>
           <a:xfrm>
             <a:off x="548640" y="1371600"/>
-            <a:ext cx="11094415" cy="13716"/>
+            <a:ext cx="11094415" cy="9144"/>
           </a:xfrm>
           <a:prstGeom prst="rect">
             <a:avLst/>
           </a:prstGeom>
           <a:solidFill>
-            <a:srgbClr val="E2E8F0"/>
+            <a:srgbClr val="DADADE"/>
           </a:solidFill>
           <a:ln>
             <a:noFill/>
@@ -5292,13 +5284,13 @@
             <a:pPr>
               <a:defRPr sz="900">
                 <a:solidFill>
-                  <a:srgbClr val="64748B"/>
-                </a:solidFill>
-                <a:latin typeface="Malgun Gothic"/>
-              </a:defRPr>
-            </a:pPr>
-            <a:r>
-              <a:t>AICA 자격심사 시스템 사용자 매뉴얼 · 2026.07</a:t>
+                  <a:srgbClr val="86868B"/>
+                </a:solidFill>
+                <a:latin typeface="Noto Sans KR"/>
+              </a:defRPr>
+            </a:pPr>
+            <a:r>
+              <a:t>AICA 자격심사 시스템 사용자 매뉴얼 · Apple Concept</a:t>
             </a:r>
           </a:p>
         </p:txBody>
@@ -5328,9 +5320,9 @@
             <a:pPr algn="r">
               <a:defRPr sz="900">
                 <a:solidFill>
-                  <a:srgbClr val="64748B"/>
-                </a:solidFill>
-                <a:latin typeface="Malgun Gothic"/>
+                  <a:srgbClr val="86868B"/>
+                </a:solidFill>
+                <a:latin typeface="Noto Sans KR"/>
               </a:defRPr>
             </a:pPr>
             <a:r>
@@ -5354,11 +5346,11 @@
             <a:avLst/>
           </a:prstGeom>
           <a:solidFill>
-            <a:srgbClr val="EFF6FF"/>
+            <a:srgbClr val="F5F5F7"/>
           </a:solidFill>
           <a:ln w="12700">
             <a:solidFill>
-              <a:srgbClr val="E2E8F0"/>
+              <a:srgbClr val="DADADE"/>
             </a:solidFill>
           </a:ln>
         </p:spPr>
@@ -5392,8 +5384,8 @@
         </p:nvSpPr>
         <p:spPr>
           <a:xfrm>
-            <a:off x="685800" y="1965960"/>
-            <a:ext cx="5029200" cy="3840480"/>
+            <a:off x="731520" y="2011680"/>
+            <a:ext cx="4937760" cy="3749040"/>
           </a:xfrm>
           <a:prstGeom prst="rect">
             <a:avLst/>
@@ -5408,13 +5400,13 @@
           <a:p>
             <a:pPr>
               <a:spcAft>
-                <a:spcPts val="1000"/>
-              </a:spcAft>
-              <a:defRPr sz="1400" b="1">
-                <a:solidFill>
-                  <a:srgbClr val="2563EB"/>
-                </a:solidFill>
-                <a:latin typeface="Malgun Gothic"/>
+                <a:spcPts val="1200"/>
+              </a:spcAft>
+              <a:defRPr sz="1500" b="1">
+                <a:solidFill>
+                  <a:srgbClr val="0066CC"/>
+                </a:solidFill>
+                <a:latin typeface="Noto Sans KR"/>
               </a:defRPr>
             </a:pPr>
             <a:r>
@@ -5424,13 +5416,13 @@
           <a:p>
             <a:pPr>
               <a:spcAft>
-                <a:spcPts val="500"/>
+                <a:spcPts val="600"/>
               </a:spcAft>
               <a:defRPr sz="1100">
                 <a:solidFill>
-                  <a:srgbClr val="475569"/>
-                </a:solidFill>
-                <a:latin typeface="Malgun Gothic"/>
+                  <a:srgbClr val="1D1D1F"/>
+                </a:solidFill>
+                <a:latin typeface="Noto Sans KR"/>
               </a:defRPr>
             </a:pPr>
             <a:r>
@@ -5441,13 +5433,13 @@
             <a:br/>
             <a:pPr>
               <a:spcAft>
-                <a:spcPts val="500"/>
+                <a:spcPts val="600"/>
               </a:spcAft>
               <a:defRPr sz="1100">
                 <a:solidFill>
-                  <a:srgbClr val="475569"/>
-                </a:solidFill>
-                <a:latin typeface="Malgun Gothic"/>
+                  <a:srgbClr val="1D1D1F"/>
+                </a:solidFill>
+                <a:latin typeface="Noto Sans KR"/>
               </a:defRPr>
             </a:pPr>
             <a:r>
@@ -5457,13 +5449,13 @@
           <a:p>
             <a:pPr>
               <a:spcAft>
-                <a:spcPts val="500"/>
+                <a:spcPts val="600"/>
               </a:spcAft>
               <a:defRPr sz="1100">
                 <a:solidFill>
-                  <a:srgbClr val="475569"/>
-                </a:solidFill>
-                <a:latin typeface="Malgun Gothic"/>
+                  <a:srgbClr val="1D1D1F"/>
+                </a:solidFill>
+                <a:latin typeface="Noto Sans KR"/>
               </a:defRPr>
             </a:pPr>
             <a:r>
@@ -5473,13 +5465,13 @@
           <a:p>
             <a:pPr>
               <a:spcAft>
-                <a:spcPts val="500"/>
+                <a:spcPts val="600"/>
               </a:spcAft>
               <a:defRPr sz="1100">
                 <a:solidFill>
-                  <a:srgbClr val="475569"/>
-                </a:solidFill>
-                <a:latin typeface="Malgun Gothic"/>
+                  <a:srgbClr val="1D1D1F"/>
+                </a:solidFill>
+                <a:latin typeface="Noto Sans KR"/>
               </a:defRPr>
             </a:pPr>
             <a:r>
@@ -5490,13 +5482,13 @@
             <a:br/>
             <a:pPr>
               <a:spcAft>
-                <a:spcPts val="500"/>
+                <a:spcPts val="600"/>
               </a:spcAft>
               <a:defRPr sz="1100">
                 <a:solidFill>
-                  <a:srgbClr val="475569"/>
-                </a:solidFill>
-                <a:latin typeface="Malgun Gothic"/>
+                  <a:srgbClr val="1D1D1F"/>
+                </a:solidFill>
+                <a:latin typeface="Noto Sans KR"/>
               </a:defRPr>
             </a:pPr>
             <a:r>
@@ -5520,11 +5512,11 @@
             <a:avLst/>
           </a:prstGeom>
           <a:solidFill>
-            <a:srgbClr val="F8FAFC"/>
+            <a:srgbClr val="FFFFFF"/>
           </a:solidFill>
           <a:ln w="12700">
             <a:solidFill>
-              <a:srgbClr val="E2E8F0"/>
+              <a:srgbClr val="DADADE"/>
             </a:solidFill>
           </a:ln>
         </p:spPr>
@@ -5558,8 +5550,8 @@
         </p:nvSpPr>
         <p:spPr>
           <a:xfrm>
-            <a:off x="6446520" y="1965960"/>
-            <a:ext cx="5029200" cy="3840480"/>
+            <a:off x="6492240" y="2011680"/>
+            <a:ext cx="4937760" cy="3749040"/>
           </a:xfrm>
           <a:prstGeom prst="rect">
             <a:avLst/>
@@ -5574,13 +5566,13 @@
           <a:p>
             <a:pPr>
               <a:spcAft>
-                <a:spcPts val="1000"/>
-              </a:spcAft>
-              <a:defRPr sz="1400" b="1">
-                <a:solidFill>
-                  <a:srgbClr val="0F172A"/>
-                </a:solidFill>
-                <a:latin typeface="Malgun Gothic"/>
+                <a:spcPts val="1200"/>
+              </a:spcAft>
+              <a:defRPr sz="1500" b="1">
+                <a:solidFill>
+                  <a:srgbClr val="1D1D1F"/>
+                </a:solidFill>
+                <a:latin typeface="Noto Sans KR"/>
               </a:defRPr>
             </a:pPr>
             <a:r>
@@ -5590,13 +5582,13 @@
           <a:p>
             <a:pPr>
               <a:spcAft>
-                <a:spcPts val="500"/>
+                <a:spcPts val="600"/>
               </a:spcAft>
               <a:defRPr sz="1100">
                 <a:solidFill>
-                  <a:srgbClr val="475569"/>
-                </a:solidFill>
-                <a:latin typeface="Malgun Gothic"/>
+                  <a:srgbClr val="1D1D1F"/>
+                </a:solidFill>
+                <a:latin typeface="Noto Sans KR"/>
               </a:defRPr>
             </a:pPr>
             <a:r>
@@ -5607,13 +5599,13 @@
             <a:br/>
             <a:pPr>
               <a:spcAft>
-                <a:spcPts val="500"/>
+                <a:spcPts val="600"/>
               </a:spcAft>
               <a:defRPr sz="1100">
                 <a:solidFill>
-                  <a:srgbClr val="475569"/>
-                </a:solidFill>
-                <a:latin typeface="Malgun Gothic"/>
+                  <a:srgbClr val="1D1D1F"/>
+                </a:solidFill>
+                <a:latin typeface="Noto Sans KR"/>
               </a:defRPr>
             </a:pPr>
             <a:r>
@@ -5623,13 +5615,13 @@
           <a:p>
             <a:pPr>
               <a:spcAft>
-                <a:spcPts val="500"/>
+                <a:spcPts val="600"/>
               </a:spcAft>
               <a:defRPr sz="1100">
                 <a:solidFill>
-                  <a:srgbClr val="475569"/>
-                </a:solidFill>
-                <a:latin typeface="Malgun Gothic"/>
+                  <a:srgbClr val="1D1D1F"/>
+                </a:solidFill>
+                <a:latin typeface="Noto Sans KR"/>
               </a:defRPr>
             </a:pPr>
             <a:r>
@@ -5639,13 +5631,13 @@
           <a:p>
             <a:pPr>
               <a:spcAft>
-                <a:spcPts val="500"/>
+                <a:spcPts val="600"/>
               </a:spcAft>
               <a:defRPr sz="1100">
                 <a:solidFill>
-                  <a:srgbClr val="475569"/>
-                </a:solidFill>
-                <a:latin typeface="Malgun Gothic"/>
+                  <a:srgbClr val="1D1D1F"/>
+                </a:solidFill>
+                <a:latin typeface="Noto Sans KR"/>
               </a:defRPr>
             </a:pPr>
             <a:r>
@@ -5656,13 +5648,13 @@
             <a:br/>
             <a:pPr>
               <a:spcAft>
-                <a:spcPts val="500"/>
+                <a:spcPts val="600"/>
               </a:spcAft>
               <a:defRPr sz="1100">
                 <a:solidFill>
-                  <a:srgbClr val="475569"/>
-                </a:solidFill>
-                <a:latin typeface="Malgun Gothic"/>
+                  <a:srgbClr val="1D1D1F"/>
+                </a:solidFill>
+                <a:latin typeface="Noto Sans KR"/>
               </a:defRPr>
             </a:pPr>
             <a:r>
@@ -5685,7 +5677,7 @@
     <p:bg>
       <p:bgPr>
         <a:solidFill>
-          <a:srgbClr val="FFFFFF"/>
+          <a:srgbClr val="F5F5F7"/>
         </a:solidFill>
         <a:effectLst/>
       </p:bgPr>
@@ -5722,9 +5714,9 @@
             <a:pPr>
               <a:defRPr sz="1100" b="1">
                 <a:solidFill>
-                  <a:srgbClr val="2563EB"/>
-                </a:solidFill>
-                <a:latin typeface="Malgun Gothic"/>
+                  <a:srgbClr val="0066CC"/>
+                </a:solidFill>
+                <a:latin typeface="Noto Sans KR"/>
               </a:defRPr>
             </a:pPr>
             <a:r>
@@ -5758,9 +5750,9 @@
             <a:pPr>
               <a:defRPr sz="2600" b="1">
                 <a:solidFill>
-                  <a:srgbClr val="0F172A"/>
-                </a:solidFill>
-                <a:latin typeface="Malgun Gothic"/>
+                  <a:srgbClr val="1D1D1F"/>
+                </a:solidFill>
+                <a:latin typeface="Noto Sans KR"/>
               </a:defRPr>
             </a:pPr>
             <a:r>
@@ -5778,13 +5770,13 @@
         <p:spPr>
           <a:xfrm>
             <a:off x="548640" y="1371600"/>
-            <a:ext cx="11094415" cy="13716"/>
+            <a:ext cx="11094415" cy="9144"/>
           </a:xfrm>
           <a:prstGeom prst="rect">
             <a:avLst/>
           </a:prstGeom>
           <a:solidFill>
-            <a:srgbClr val="E2E8F0"/>
+            <a:srgbClr val="DADADE"/>
           </a:solidFill>
           <a:ln>
             <a:noFill/>
@@ -5837,13 +5829,13 @@
             <a:pPr>
               <a:defRPr sz="900">
                 <a:solidFill>
-                  <a:srgbClr val="64748B"/>
-                </a:solidFill>
-                <a:latin typeface="Malgun Gothic"/>
-              </a:defRPr>
-            </a:pPr>
-            <a:r>
-              <a:t>AICA 자격심사 시스템 사용자 매뉴얼 · 2026.07</a:t>
+                  <a:srgbClr val="86868B"/>
+                </a:solidFill>
+                <a:latin typeface="Noto Sans KR"/>
+              </a:defRPr>
+            </a:pPr>
+            <a:r>
+              <a:t>AICA 자격심사 시스템 사용자 매뉴얼 · Apple Concept</a:t>
             </a:r>
           </a:p>
         </p:txBody>
@@ -5873,9 +5865,9 @@
             <a:pPr algn="r">
               <a:defRPr sz="900">
                 <a:solidFill>
-                  <a:srgbClr val="64748B"/>
-                </a:solidFill>
-                <a:latin typeface="Malgun Gothic"/>
+                  <a:srgbClr val="86868B"/>
+                </a:solidFill>
+                <a:latin typeface="Noto Sans KR"/>
               </a:defRPr>
             </a:pPr>
             <a:r>
@@ -5893,17 +5885,17 @@
         <p:spPr>
           <a:xfrm>
             <a:off x="548640" y="1828800"/>
-            <a:ext cx="5303520" cy="4114800"/>
+            <a:ext cx="5486400" cy="4114800"/>
           </a:xfrm>
           <a:prstGeom prst="roundRect">
             <a:avLst/>
           </a:prstGeom>
           <a:solidFill>
-            <a:srgbClr val="F8FAFC"/>
+            <a:srgbClr val="FFFFFF"/>
           </a:solidFill>
           <a:ln w="12700">
             <a:solidFill>
-              <a:srgbClr val="E2E8F0"/>
+              <a:srgbClr val="DADADE"/>
             </a:solidFill>
           </a:ln>
         </p:spPr>
@@ -5937,8 +5929,8 @@
         </p:nvSpPr>
         <p:spPr>
           <a:xfrm>
-            <a:off x="685800" y="1965960"/>
-            <a:ext cx="5029200" cy="3840480"/>
+            <a:off x="731520" y="2011680"/>
+            <a:ext cx="5120640" cy="3749040"/>
           </a:xfrm>
           <a:prstGeom prst="rect">
             <a:avLst/>
@@ -5953,13 +5945,13 @@
           <a:p>
             <a:pPr>
               <a:spcAft>
-                <a:spcPts val="1000"/>
-              </a:spcAft>
-              <a:defRPr sz="1400" b="1">
-                <a:solidFill>
-                  <a:srgbClr val="0F172A"/>
-                </a:solidFill>
-                <a:latin typeface="Malgun Gothic"/>
+                <a:spcPts val="1200"/>
+              </a:spcAft>
+              <a:defRPr sz="1500" b="1">
+                <a:solidFill>
+                  <a:srgbClr val="1D1D1F"/>
+                </a:solidFill>
+                <a:latin typeface="Noto Sans KR"/>
               </a:defRPr>
             </a:pPr>
             <a:r>
@@ -5969,13 +5961,13 @@
           <a:p>
             <a:pPr>
               <a:spcAft>
-                <a:spcPts val="500"/>
+                <a:spcPts val="600"/>
               </a:spcAft>
               <a:defRPr sz="1100">
                 <a:solidFill>
-                  <a:srgbClr val="475569"/>
-                </a:solidFill>
-                <a:latin typeface="Malgun Gothic"/>
+                  <a:srgbClr val="1D1D1F"/>
+                </a:solidFill>
+                <a:latin typeface="Noto Sans KR"/>
               </a:defRPr>
             </a:pPr>
             <a:r>
@@ -5985,13 +5977,13 @@
           <a:p>
             <a:pPr>
               <a:spcAft>
-                <a:spcPts val="500"/>
+                <a:spcPts val="600"/>
               </a:spcAft>
               <a:defRPr sz="1100">
                 <a:solidFill>
-                  <a:srgbClr val="475569"/>
-                </a:solidFill>
-                <a:latin typeface="Malgun Gothic"/>
+                  <a:srgbClr val="1D1D1F"/>
+                </a:solidFill>
+                <a:latin typeface="Noto Sans KR"/>
               </a:defRPr>
             </a:pPr>
             <a:r>
@@ -6001,13 +5993,13 @@
           <a:p>
             <a:pPr>
               <a:spcAft>
-                <a:spcPts val="500"/>
+                <a:spcPts val="600"/>
               </a:spcAft>
               <a:defRPr sz="1100">
                 <a:solidFill>
-                  <a:srgbClr val="475569"/>
-                </a:solidFill>
-                <a:latin typeface="Malgun Gothic"/>
+                  <a:srgbClr val="1D1D1F"/>
+                </a:solidFill>
+                <a:latin typeface="Noto Sans KR"/>
               </a:defRPr>
             </a:pPr>
             <a:r>
@@ -6017,13 +6009,13 @@
           <a:p>
             <a:pPr>
               <a:spcAft>
-                <a:spcPts val="500"/>
+                <a:spcPts val="600"/>
               </a:spcAft>
               <a:defRPr sz="1100">
                 <a:solidFill>
-                  <a:srgbClr val="475569"/>
-                </a:solidFill>
-                <a:latin typeface="Malgun Gothic"/>
+                  <a:srgbClr val="1D1D1F"/>
+                </a:solidFill>
+                <a:latin typeface="Noto Sans KR"/>
               </a:defRPr>
             </a:pPr>
             <a:r>
@@ -6034,13 +6026,13 @@
             <a:br/>
             <a:pPr>
               <a:spcAft>
-                <a:spcPts val="500"/>
+                <a:spcPts val="600"/>
               </a:spcAft>
               <a:defRPr sz="1100">
                 <a:solidFill>
-                  <a:srgbClr val="475569"/>
-                </a:solidFill>
-                <a:latin typeface="Malgun Gothic"/>
+                  <a:srgbClr val="1D1D1F"/>
+                </a:solidFill>
+                <a:latin typeface="Noto Sans KR"/>
               </a:defRPr>
             </a:pPr>
             <a:r>
@@ -6050,13 +6042,13 @@
           <a:p>
             <a:pPr>
               <a:spcAft>
-                <a:spcPts val="500"/>
+                <a:spcPts val="600"/>
               </a:spcAft>
               <a:defRPr sz="1100">
                 <a:solidFill>
-                  <a:srgbClr val="475569"/>
-                </a:solidFill>
-                <a:latin typeface="Malgun Gothic"/>
+                  <a:srgbClr val="1D1D1F"/>
+                </a:solidFill>
+                <a:latin typeface="Noto Sans KR"/>
               </a:defRPr>
             </a:pPr>
             <a:r>
@@ -6066,13 +6058,13 @@
           <a:p>
             <a:pPr>
               <a:spcAft>
-                <a:spcPts val="500"/>
+                <a:spcPts val="600"/>
               </a:spcAft>
               <a:defRPr sz="1100">
                 <a:solidFill>
-                  <a:srgbClr val="475569"/>
-                </a:solidFill>
-                <a:latin typeface="Malgun Gothic"/>
+                  <a:srgbClr val="1D1D1F"/>
+                </a:solidFill>
+                <a:latin typeface="Noto Sans KR"/>
               </a:defRPr>
             </a:pPr>
             <a:r>
@@ -6083,41 +6075,41 @@
             <a:br/>
             <a:pPr>
               <a:spcAft>
-                <a:spcPts val="500"/>
+                <a:spcPts val="600"/>
               </a:spcAft>
               <a:defRPr sz="1100">
                 <a:solidFill>
-                  <a:srgbClr val="475569"/>
-                </a:solidFill>
-                <a:latin typeface="Malgun Gothic"/>
-              </a:defRPr>
-            </a:pPr>
-            <a:r>
-              <a:t>의견 예시: 'RAG를 적용함'보다 '출처 표기와 환각 제어 로직이 시연 비디오에서 명확하게 관찰됨'과 같이 기록합니다.</a:t>
-            </a:r>
-          </a:p>
-        </p:txBody>
-      </p:sp>
-      <p:sp>
-        <p:nvSpPr>
-          <p:cNvPr id="9" name="Rectangle 8"/>
+                  <a:srgbClr val="1D1D1F"/>
+                </a:solidFill>
+                <a:latin typeface="Noto Sans KR"/>
+              </a:defRPr>
+            </a:pPr>
+            <a:r>
+              <a:t>오른쪽 화면: 실제 5단계 루브릭 행 카드 및 우측 하단 질문은행 패널 렌더링 화면</a:t>
+            </a:r>
+          </a:p>
+        </p:txBody>
+      </p:sp>
+      <p:sp>
+        <p:nvSpPr>
+          <p:cNvPr id="9" name="Rounded Rectangle 8"/>
           <p:cNvSpPr/>
           <p:nvPr/>
         </p:nvSpPr>
         <p:spPr>
           <a:xfrm>
-            <a:off x="6309360" y="1828800"/>
-            <a:ext cx="5303520" cy="4114800"/>
-          </a:xfrm>
-          <a:prstGeom prst="rect">
+            <a:off x="6400800" y="1828800"/>
+            <a:ext cx="5212080" cy="4114800"/>
+          </a:xfrm>
+          <a:prstGeom prst="roundRect">
             <a:avLst/>
           </a:prstGeom>
           <a:solidFill>
-            <a:srgbClr val="F8FAFC"/>
+            <a:srgbClr val="FFFFFF"/>
           </a:solidFill>
-          <a:ln w="19050">
+          <a:ln w="12700">
             <a:solidFill>
-              <a:srgbClr val="E2E8F0"/>
+              <a:srgbClr val="DADADE"/>
             </a:solidFill>
           </a:ln>
         </p:spPr>
@@ -6159,7 +6151,7 @@
         </p:blipFill>
         <p:spPr>
           <a:xfrm>
-            <a:off x="7040880" y="1965960"/>
+            <a:off x="7086600" y="1965960"/>
             <a:ext cx="3840480" cy="3840480"/>
           </a:xfrm>
           <a:prstGeom prst="rect">
@@ -6181,7 +6173,7 @@
     <p:bg>
       <p:bgPr>
         <a:solidFill>
-          <a:srgbClr val="FFFFFF"/>
+          <a:srgbClr val="F5F5F7"/>
         </a:solidFill>
         <a:effectLst/>
       </p:bgPr>
@@ -6218,9 +6210,9 @@
             <a:pPr>
               <a:defRPr sz="1100" b="1">
                 <a:solidFill>
-                  <a:srgbClr val="2563EB"/>
-                </a:solidFill>
-                <a:latin typeface="Malgun Gothic"/>
+                  <a:srgbClr val="0066CC"/>
+                </a:solidFill>
+                <a:latin typeface="Noto Sans KR"/>
               </a:defRPr>
             </a:pPr>
             <a:r>
@@ -6254,9 +6246,9 @@
             <a:pPr>
               <a:defRPr sz="2600" b="1">
                 <a:solidFill>
-                  <a:srgbClr val="0F172A"/>
-                </a:solidFill>
-                <a:latin typeface="Malgun Gothic"/>
+                  <a:srgbClr val="1D1D1F"/>
+                </a:solidFill>
+                <a:latin typeface="Noto Sans KR"/>
               </a:defRPr>
             </a:pPr>
             <a:r>
@@ -6274,13 +6266,13 @@
         <p:spPr>
           <a:xfrm>
             <a:off x="548640" y="1371600"/>
-            <a:ext cx="11094415" cy="13716"/>
+            <a:ext cx="11094415" cy="9144"/>
           </a:xfrm>
           <a:prstGeom prst="rect">
             <a:avLst/>
           </a:prstGeom>
           <a:solidFill>
-            <a:srgbClr val="E2E8F0"/>
+            <a:srgbClr val="DADADE"/>
           </a:solidFill>
           <a:ln>
             <a:noFill/>
@@ -6333,13 +6325,13 @@
             <a:pPr>
               <a:defRPr sz="900">
                 <a:solidFill>
-                  <a:srgbClr val="64748B"/>
-                </a:solidFill>
-                <a:latin typeface="Malgun Gothic"/>
-              </a:defRPr>
-            </a:pPr>
-            <a:r>
-              <a:t>AICA 자격심사 시스템 사용자 매뉴얼 · 2026.07</a:t>
+                  <a:srgbClr val="86868B"/>
+                </a:solidFill>
+                <a:latin typeface="Noto Sans KR"/>
+              </a:defRPr>
+            </a:pPr>
+            <a:r>
+              <a:t>AICA 자격심사 시스템 사용자 매뉴얼 · Apple Concept</a:t>
             </a:r>
           </a:p>
         </p:txBody>
@@ -6369,9 +6361,9 @@
             <a:pPr algn="r">
               <a:defRPr sz="900">
                 <a:solidFill>
-                  <a:srgbClr val="64748B"/>
-                </a:solidFill>
-                <a:latin typeface="Malgun Gothic"/>
+                  <a:srgbClr val="86868B"/>
+                </a:solidFill>
+                <a:latin typeface="Noto Sans KR"/>
               </a:defRPr>
             </a:pPr>
             <a:r>
@@ -6389,13 +6381,13 @@
         <p:spPr>
           <a:xfrm>
             <a:off x="1371600" y="2926080"/>
-            <a:ext cx="9418320" cy="13716"/>
+            <a:ext cx="9418320" cy="9144"/>
           </a:xfrm>
           <a:prstGeom prst="rect">
             <a:avLst/>
           </a:prstGeom>
           <a:solidFill>
-            <a:srgbClr val="E2E8F0"/>
+            <a:srgbClr val="DADADE"/>
           </a:solidFill>
           <a:ln>
             <a:noFill/>
@@ -6438,7 +6430,7 @@
             <a:avLst/>
           </a:prstGeom>
           <a:solidFill>
-            <a:srgbClr val="2563EB"/>
+            <a:srgbClr val="0066CC"/>
           </a:solidFill>
           <a:ln>
             <a:noFill/>
@@ -6467,7 +6459,7 @@
                 <a:solidFill>
                   <a:srgbClr val="FFFFFF"/>
                 </a:solidFill>
-                <a:latin typeface="Arial"/>
+                <a:latin typeface="Noto Sans KR"/>
               </a:defRPr>
             </a:pPr>
             <a:r>
@@ -6478,75 +6470,25 @@
       </p:sp>
       <p:sp>
         <p:nvSpPr>
-          <p:cNvPr id="9" name="TextBox 8"/>
-          <p:cNvSpPr txBox="1"/>
+          <p:cNvPr id="9" name="Rounded Rectangle 8"/>
+          <p:cNvSpPr/>
           <p:nvPr/>
         </p:nvSpPr>
         <p:spPr>
           <a:xfrm>
             <a:off x="548640" y="3474720"/>
-            <a:ext cx="2834640" cy="1828800"/>
-          </a:xfrm>
-          <a:prstGeom prst="rect">
-            <a:avLst/>
-          </a:prstGeom>
-          <a:noFill/>
-        </p:spPr>
-        <p:txBody>
-          <a:bodyPr wrap="square">
-            <a:spAutoFit/>
-          </a:bodyPr>
-          <a:lstStyle/>
-          <a:p>
-            <a:pPr algn="ctr">
-              <a:spcAft>
-                <a:spcPts val="1000"/>
-              </a:spcAft>
-              <a:defRPr sz="1500" b="1">
-                <a:solidFill>
-                  <a:srgbClr val="0F172A"/>
-                </a:solidFill>
-                <a:latin typeface="Malgun Gothic"/>
-              </a:defRPr>
-            </a:pPr>
-            <a:r>
-              <a:t>필수 항목 확인</a:t>
-            </a:r>
-          </a:p>
-          <a:p>
-            <a:pPr algn="ctr">
-              <a:defRPr sz="1100">
-                <a:solidFill>
-                  <a:srgbClr val="475569"/>
-                </a:solidFill>
-                <a:latin typeface="Malgun Gothic"/>
-              </a:defRPr>
-            </a:pPr>
-            <a:r>
-              <a:t>보안 체크, 루브릭 점수, 세부 의견 누락 유무 확인</a:t>
-            </a:r>
-          </a:p>
-        </p:txBody>
-      </p:sp>
-      <p:sp>
-        <p:nvSpPr>
-          <p:cNvPr id="10" name="Oval 9"/>
-          <p:cNvSpPr/>
-          <p:nvPr/>
-        </p:nvSpPr>
-        <p:spPr>
-          <a:xfrm>
-            <a:off x="4389120" y="2468880"/>
-            <a:ext cx="822960" cy="822960"/>
-          </a:xfrm>
-          <a:prstGeom prst="ellipse">
+            <a:ext cx="2651760" cy="1828800"/>
+          </a:xfrm>
+          <a:prstGeom prst="roundRect">
             <a:avLst/>
           </a:prstGeom>
           <a:solidFill>
-            <a:srgbClr val="2563EB"/>
+            <a:srgbClr val="FFFFFF"/>
           </a:solidFill>
-          <a:ln>
-            <a:noFill/>
+          <a:ln w="12700">
+            <a:solidFill>
+              <a:srgbClr val="DADADE"/>
+            </a:solidFill>
           </a:ln>
         </p:spPr>
         <p:style>
@@ -6564,91 +6506,55 @@
           </a:fontRef>
         </p:style>
         <p:txBody>
-          <a:bodyPr rtlCol="0" anchor="ctr"/>
+          <a:bodyPr rtlCol="0" anchor="ctr" wrap="square"/>
           <a:lstStyle/>
           <a:p>
             <a:pPr algn="ctr">
-              <a:defRPr sz="1400" b="1">
-                <a:solidFill>
-                  <a:srgbClr val="FFFFFF"/>
-                </a:solidFill>
-                <a:latin typeface="Arial"/>
-              </a:defRPr>
-            </a:pPr>
-            <a:r>
-              <a:t>2</a:t>
-            </a:r>
-          </a:p>
-        </p:txBody>
-      </p:sp>
-      <p:sp>
-        <p:nvSpPr>
-          <p:cNvPr id="11" name="TextBox 10"/>
-          <p:cNvSpPr txBox="1"/>
-          <p:nvPr/>
-        </p:nvSpPr>
-        <p:spPr>
-          <a:xfrm>
-            <a:off x="3383280" y="3474720"/>
-            <a:ext cx="2834640" cy="1828800"/>
-          </a:xfrm>
-          <a:prstGeom prst="rect">
-            <a:avLst/>
-          </a:prstGeom>
-          <a:noFill/>
-        </p:spPr>
-        <p:txBody>
-          <a:bodyPr wrap="square">
-            <a:spAutoFit/>
-          </a:bodyPr>
-          <a:lstStyle/>
-          <a:p>
-            <a:pPr algn="ctr">
               <a:spcAft>
                 <a:spcPts val="1000"/>
               </a:spcAft>
               <a:defRPr sz="1500" b="1">
                 <a:solidFill>
-                  <a:srgbClr val="0F172A"/>
-                </a:solidFill>
-                <a:latin typeface="Malgun Gothic"/>
-              </a:defRPr>
-            </a:pPr>
-            <a:r>
-              <a:t>타 위원 상태 확인</a:t>
+                  <a:srgbClr val="1D1D1F"/>
+                </a:solidFill>
+                <a:latin typeface="Noto Sans KR"/>
+              </a:defRPr>
+            </a:pPr>
+            <a:r>
+              <a:t>필수 항목 확인</a:t>
             </a:r>
           </a:p>
           <a:p>
             <a:pPr algn="ctr">
               <a:defRPr sz="1100">
                 <a:solidFill>
-                  <a:srgbClr val="475569"/>
-                </a:solidFill>
-                <a:latin typeface="Malgun Gothic"/>
-              </a:defRPr>
-            </a:pPr>
-            <a:r>
-              <a:t>타 위원의 점수 노출 없이 제출 상태만 확인하여 독립성 유지</a:t>
-            </a:r>
-          </a:p>
-        </p:txBody>
-      </p:sp>
-      <p:sp>
-        <p:nvSpPr>
-          <p:cNvPr id="12" name="Oval 11"/>
+                  <a:srgbClr val="86868B"/>
+                </a:solidFill>
+                <a:latin typeface="Noto Sans KR"/>
+              </a:defRPr>
+            </a:pPr>
+            <a:r>
+              <a:t>보안 체크, 루브릭 점수, 세부 의견 누락 유무 확인</a:t>
+            </a:r>
+          </a:p>
+        </p:txBody>
+      </p:sp>
+      <p:sp>
+        <p:nvSpPr>
+          <p:cNvPr id="10" name="Oval 9"/>
           <p:cNvSpPr/>
           <p:nvPr/>
         </p:nvSpPr>
         <p:spPr>
           <a:xfrm>
-            <a:off x="7223760" y="2468880"/>
+            <a:off x="4389120" y="2468880"/>
             <a:ext cx="822960" cy="822960"/>
           </a:xfrm>
           <a:prstGeom prst="ellipse">
             <a:avLst/>
           </a:prstGeom>
           <a:solidFill>
-            <a:srgbClr val="2563EB"/>
+            <a:srgbClr val="0066CC"/>
           </a:solidFill>
           <a:ln>
             <a:noFill/>
@@ -6677,86 +6583,36 @@
                 <a:solidFill>
                   <a:srgbClr val="FFFFFF"/>
                 </a:solidFill>
-                <a:latin typeface="Arial"/>
-              </a:defRPr>
-            </a:pPr>
-            <a:r>
-              <a:t>3</a:t>
-            </a:r>
-          </a:p>
-        </p:txBody>
-      </p:sp>
-      <p:sp>
-        <p:nvSpPr>
-          <p:cNvPr id="13" name="TextBox 12"/>
-          <p:cNvSpPr txBox="1"/>
-          <p:nvPr/>
-        </p:nvSpPr>
-        <p:spPr>
-          <a:xfrm>
-            <a:off x="6217920" y="3474720"/>
-            <a:ext cx="2834640" cy="1828800"/>
-          </a:xfrm>
-          <a:prstGeom prst="rect">
-            <a:avLst/>
-          </a:prstGeom>
-          <a:noFill/>
-        </p:spPr>
-        <p:txBody>
-          <a:bodyPr wrap="square">
-            <a:spAutoFit/>
-          </a:bodyPr>
-          <a:lstStyle/>
-          <a:p>
-            <a:pPr algn="ctr">
-              <a:spcAft>
-                <a:spcPts val="1000"/>
-              </a:spcAft>
-              <a:defRPr sz="1500" b="1">
-                <a:solidFill>
-                  <a:srgbClr val="0F172A"/>
-                </a:solidFill>
-                <a:latin typeface="Malgun Gothic"/>
-              </a:defRPr>
-            </a:pPr>
-            <a:r>
-              <a:t>평가 제출</a:t>
-            </a:r>
-          </a:p>
-          <a:p>
-            <a:pPr algn="ctr">
-              <a:defRPr sz="1100">
-                <a:solidFill>
-                  <a:srgbClr val="475569"/>
-                </a:solidFill>
-                <a:latin typeface="Malgun Gothic"/>
-              </a:defRPr>
-            </a:pPr>
-            <a:r>
-              <a:t>[평가 완료 및 제출] 버튼을 눌러 데이터베이스 기록</a:t>
-            </a:r>
-          </a:p>
-        </p:txBody>
-      </p:sp>
-      <p:sp>
-        <p:nvSpPr>
-          <p:cNvPr id="14" name="Oval 13"/>
+                <a:latin typeface="Noto Sans KR"/>
+              </a:defRPr>
+            </a:pPr>
+            <a:r>
+              <a:t>2</a:t>
+            </a:r>
+          </a:p>
+        </p:txBody>
+      </p:sp>
+      <p:sp>
+        <p:nvSpPr>
+          <p:cNvPr id="11" name="Rounded Rectangle 10"/>
           <p:cNvSpPr/>
           <p:nvPr/>
         </p:nvSpPr>
         <p:spPr>
           <a:xfrm>
-            <a:off x="10058400" y="2468880"/>
-            <a:ext cx="822960" cy="822960"/>
-          </a:xfrm>
-          <a:prstGeom prst="ellipse">
+            <a:off x="3383280" y="3474720"/>
+            <a:ext cx="2651760" cy="1828800"/>
+          </a:xfrm>
+          <a:prstGeom prst="roundRect">
             <a:avLst/>
           </a:prstGeom>
           <a:solidFill>
-            <a:srgbClr val="2563EB"/>
+            <a:srgbClr val="FFFFFF"/>
           </a:solidFill>
-          <a:ln>
-            <a:noFill/>
+          <a:ln w="12700">
+            <a:solidFill>
+              <a:srgbClr val="DADADE"/>
+            </a:solidFill>
           </a:ln>
         </p:spPr>
         <p:style>
@@ -6774,96 +6630,58 @@
           </a:fontRef>
         </p:style>
         <p:txBody>
-          <a:bodyPr rtlCol="0" anchor="ctr"/>
+          <a:bodyPr rtlCol="0" anchor="ctr" wrap="square"/>
           <a:lstStyle/>
           <a:p>
             <a:pPr algn="ctr">
-              <a:defRPr sz="1400" b="1">
-                <a:solidFill>
-                  <a:srgbClr val="FFFFFF"/>
-                </a:solidFill>
-                <a:latin typeface="Arial"/>
-              </a:defRPr>
-            </a:pPr>
-            <a:r>
-              <a:t>4</a:t>
-            </a:r>
-          </a:p>
-        </p:txBody>
-      </p:sp>
-      <p:sp>
-        <p:nvSpPr>
-          <p:cNvPr id="15" name="TextBox 14"/>
-          <p:cNvSpPr txBox="1"/>
-          <p:nvPr/>
-        </p:nvSpPr>
-        <p:spPr>
-          <a:xfrm>
-            <a:off x="9052560" y="3474720"/>
-            <a:ext cx="2834640" cy="1828800"/>
-          </a:xfrm>
-          <a:prstGeom prst="rect">
-            <a:avLst/>
-          </a:prstGeom>
-          <a:noFill/>
-        </p:spPr>
-        <p:txBody>
-          <a:bodyPr wrap="square">
-            <a:spAutoFit/>
-          </a:bodyPr>
-          <a:lstStyle/>
-          <a:p>
-            <a:pPr algn="ctr">
               <a:spcAft>
                 <a:spcPts val="1000"/>
               </a:spcAft>
               <a:defRPr sz="1500" b="1">
                 <a:solidFill>
-                  <a:srgbClr val="0F172A"/>
-                </a:solidFill>
-                <a:latin typeface="Malgun Gothic"/>
-              </a:defRPr>
-            </a:pPr>
-            <a:r>
-              <a:t>완료 상태 확인</a:t>
+                  <a:srgbClr val="1D1D1F"/>
+                </a:solidFill>
+                <a:latin typeface="Noto Sans KR"/>
+              </a:defRPr>
+            </a:pPr>
+            <a:r>
+              <a:t>타 위원 상태 확인</a:t>
             </a:r>
           </a:p>
           <a:p>
             <a:pPr algn="ctr">
               <a:defRPr sz="1100">
                 <a:solidFill>
-                  <a:srgbClr val="475569"/>
-                </a:solidFill>
-                <a:latin typeface="Malgun Gothic"/>
-              </a:defRPr>
-            </a:pPr>
-            <a:r>
-              <a:t>개인 대기 큐에서 해당 지원자의 내 심사 상태가 [완료]인지 검증</a:t>
-            </a:r>
-          </a:p>
-        </p:txBody>
-      </p:sp>
-      <p:sp>
-        <p:nvSpPr>
-          <p:cNvPr id="16" name="Rectangle 15"/>
+                  <a:srgbClr val="86868B"/>
+                </a:solidFill>
+                <a:latin typeface="Noto Sans KR"/>
+              </a:defRPr>
+            </a:pPr>
+            <a:r>
+              <a:t>타 위원의 점수 노출 없이 제출 상태만 확인하여 독립성 유지</a:t>
+            </a:r>
+          </a:p>
+        </p:txBody>
+      </p:sp>
+      <p:sp>
+        <p:nvSpPr>
+          <p:cNvPr id="12" name="Oval 11"/>
           <p:cNvSpPr/>
           <p:nvPr/>
         </p:nvSpPr>
         <p:spPr>
           <a:xfrm>
-            <a:off x="548640" y="5303520"/>
-            <a:ext cx="11094415" cy="548640"/>
-          </a:xfrm>
-          <a:prstGeom prst="rect">
+            <a:off x="7223760" y="2468880"/>
+            <a:ext cx="822960" cy="822960"/>
+          </a:xfrm>
+          <a:prstGeom prst="ellipse">
             <a:avLst/>
           </a:prstGeom>
           <a:solidFill>
-            <a:srgbClr val="EFF6FF"/>
+            <a:srgbClr val="0066CC"/>
           </a:solidFill>
           <a:ln>
-            <a:solidFill>
-              <a:srgbClr val="E2E8F0"/>
-            </a:solidFill>
+            <a:noFill/>
           </a:ln>
         </p:spPr>
         <p:style>
@@ -6881,15 +6699,265 @@
           </a:fontRef>
         </p:style>
         <p:txBody>
+          <a:bodyPr rtlCol="0" anchor="ctr"/>
+          <a:lstStyle/>
+          <a:p>
+            <a:pPr algn="ctr">
+              <a:defRPr sz="1400" b="1">
+                <a:solidFill>
+                  <a:srgbClr val="FFFFFF"/>
+                </a:solidFill>
+                <a:latin typeface="Noto Sans KR"/>
+              </a:defRPr>
+            </a:pPr>
+            <a:r>
+              <a:t>3</a:t>
+            </a:r>
+          </a:p>
+        </p:txBody>
+      </p:sp>
+      <p:sp>
+        <p:nvSpPr>
+          <p:cNvPr id="13" name="Rounded Rectangle 12"/>
+          <p:cNvSpPr/>
+          <p:nvPr/>
+        </p:nvSpPr>
+        <p:spPr>
+          <a:xfrm>
+            <a:off x="6217920" y="3474720"/>
+            <a:ext cx="2651760" cy="1828800"/>
+          </a:xfrm>
+          <a:prstGeom prst="roundRect">
+            <a:avLst/>
+          </a:prstGeom>
+          <a:solidFill>
+            <a:srgbClr val="FFFFFF"/>
+          </a:solidFill>
+          <a:ln w="12700">
+            <a:solidFill>
+              <a:srgbClr val="DADADE"/>
+            </a:solidFill>
+          </a:ln>
+        </p:spPr>
+        <p:style>
+          <a:lnRef idx="1">
+            <a:schemeClr val="accent1"/>
+          </a:lnRef>
+          <a:fillRef idx="3">
+            <a:schemeClr val="accent1"/>
+          </a:fillRef>
+          <a:effectRef idx="2">
+            <a:schemeClr val="accent1"/>
+          </a:effectRef>
+          <a:fontRef idx="minor">
+            <a:schemeClr val="lt1"/>
+          </a:fontRef>
+        </p:style>
+        <p:txBody>
+          <a:bodyPr rtlCol="0" anchor="ctr" wrap="square"/>
+          <a:lstStyle/>
+          <a:p>
+            <a:pPr algn="ctr">
+              <a:spcAft>
+                <a:spcPts val="1000"/>
+              </a:spcAft>
+              <a:defRPr sz="1500" b="1">
+                <a:solidFill>
+                  <a:srgbClr val="1D1D1F"/>
+                </a:solidFill>
+                <a:latin typeface="Noto Sans KR"/>
+              </a:defRPr>
+            </a:pPr>
+            <a:r>
+              <a:t>평가 제출</a:t>
+            </a:r>
+          </a:p>
+          <a:p>
+            <a:pPr algn="ctr">
+              <a:defRPr sz="1100">
+                <a:solidFill>
+                  <a:srgbClr val="86868B"/>
+                </a:solidFill>
+                <a:latin typeface="Noto Sans KR"/>
+              </a:defRPr>
+            </a:pPr>
+            <a:r>
+              <a:t>[평가 완료 및 제출] 버튼을 눌러 데이터베이스 기록</a:t>
+            </a:r>
+          </a:p>
+        </p:txBody>
+      </p:sp>
+      <p:sp>
+        <p:nvSpPr>
+          <p:cNvPr id="14" name="Oval 13"/>
+          <p:cNvSpPr/>
+          <p:nvPr/>
+        </p:nvSpPr>
+        <p:spPr>
+          <a:xfrm>
+            <a:off x="10058400" y="2468880"/>
+            <a:ext cx="822960" cy="822960"/>
+          </a:xfrm>
+          <a:prstGeom prst="ellipse">
+            <a:avLst/>
+          </a:prstGeom>
+          <a:solidFill>
+            <a:srgbClr val="0066CC"/>
+          </a:solidFill>
+          <a:ln>
+            <a:noFill/>
+          </a:ln>
+        </p:spPr>
+        <p:style>
+          <a:lnRef idx="1">
+            <a:schemeClr val="accent1"/>
+          </a:lnRef>
+          <a:fillRef idx="3">
+            <a:schemeClr val="accent1"/>
+          </a:fillRef>
+          <a:effectRef idx="2">
+            <a:schemeClr val="accent1"/>
+          </a:effectRef>
+          <a:fontRef idx="minor">
+            <a:schemeClr val="lt1"/>
+          </a:fontRef>
+        </p:style>
+        <p:txBody>
+          <a:bodyPr rtlCol="0" anchor="ctr"/>
+          <a:lstStyle/>
+          <a:p>
+            <a:pPr algn="ctr">
+              <a:defRPr sz="1400" b="1">
+                <a:solidFill>
+                  <a:srgbClr val="FFFFFF"/>
+                </a:solidFill>
+                <a:latin typeface="Noto Sans KR"/>
+              </a:defRPr>
+            </a:pPr>
+            <a:r>
+              <a:t>4</a:t>
+            </a:r>
+          </a:p>
+        </p:txBody>
+      </p:sp>
+      <p:sp>
+        <p:nvSpPr>
+          <p:cNvPr id="15" name="Rounded Rectangle 14"/>
+          <p:cNvSpPr/>
+          <p:nvPr/>
+        </p:nvSpPr>
+        <p:spPr>
+          <a:xfrm>
+            <a:off x="9052560" y="3474720"/>
+            <a:ext cx="2651760" cy="1828800"/>
+          </a:xfrm>
+          <a:prstGeom prst="roundRect">
+            <a:avLst/>
+          </a:prstGeom>
+          <a:solidFill>
+            <a:srgbClr val="FFFFFF"/>
+          </a:solidFill>
+          <a:ln w="12700">
+            <a:solidFill>
+              <a:srgbClr val="DADADE"/>
+            </a:solidFill>
+          </a:ln>
+        </p:spPr>
+        <p:style>
+          <a:lnRef idx="1">
+            <a:schemeClr val="accent1"/>
+          </a:lnRef>
+          <a:fillRef idx="3">
+            <a:schemeClr val="accent1"/>
+          </a:fillRef>
+          <a:effectRef idx="2">
+            <a:schemeClr val="accent1"/>
+          </a:effectRef>
+          <a:fontRef idx="minor">
+            <a:schemeClr val="lt1"/>
+          </a:fontRef>
+        </p:style>
+        <p:txBody>
+          <a:bodyPr rtlCol="0" anchor="ctr" wrap="square"/>
+          <a:lstStyle/>
+          <a:p>
+            <a:pPr algn="ctr">
+              <a:spcAft>
+                <a:spcPts val="1000"/>
+              </a:spcAft>
+              <a:defRPr sz="1500" b="1">
+                <a:solidFill>
+                  <a:srgbClr val="1D1D1F"/>
+                </a:solidFill>
+                <a:latin typeface="Noto Sans KR"/>
+              </a:defRPr>
+            </a:pPr>
+            <a:r>
+              <a:t>완료 상태 확인</a:t>
+            </a:r>
+          </a:p>
+          <a:p>
+            <a:pPr algn="ctr">
+              <a:defRPr sz="1100">
+                <a:solidFill>
+                  <a:srgbClr val="86868B"/>
+                </a:solidFill>
+                <a:latin typeface="Noto Sans KR"/>
+              </a:defRPr>
+            </a:pPr>
+            <a:r>
+              <a:t>개인 대기 큐에서 해당 지원자의 내 심사 상태가 [완료]인지 검증</a:t>
+            </a:r>
+          </a:p>
+        </p:txBody>
+      </p:sp>
+      <p:sp>
+        <p:nvSpPr>
+          <p:cNvPr id="16" name="Rounded Rectangle 15"/>
+          <p:cNvSpPr/>
+          <p:nvPr/>
+        </p:nvSpPr>
+        <p:spPr>
+          <a:xfrm>
+            <a:off x="548640" y="5303520"/>
+            <a:ext cx="11094415" cy="548640"/>
+          </a:xfrm>
+          <a:prstGeom prst="roundRect">
+            <a:avLst/>
+          </a:prstGeom>
+          <a:solidFill>
+            <a:srgbClr val="F5F5F7"/>
+          </a:solidFill>
+          <a:ln>
+            <a:solidFill>
+              <a:srgbClr val="DADADE"/>
+            </a:solidFill>
+          </a:ln>
+        </p:spPr>
+        <p:style>
+          <a:lnRef idx="1">
+            <a:schemeClr val="accent1"/>
+          </a:lnRef>
+          <a:fillRef idx="3">
+            <a:schemeClr val="accent1"/>
+          </a:fillRef>
+          <a:effectRef idx="2">
+            <a:schemeClr val="accent1"/>
+          </a:effectRef>
+          <a:fontRef idx="minor">
+            <a:schemeClr val="lt1"/>
+          </a:fontRef>
+        </p:style>
+        <p:txBody>
           <a:bodyPr rtlCol="0" anchor="ctr" wrap="square"/>
           <a:lstStyle/>
           <a:p>
             <a:pPr algn="ctr">
               <a:defRPr sz="1100" b="1">
                 <a:solidFill>
-                  <a:srgbClr val="0F172A"/>
-                </a:solidFill>
-                <a:latin typeface="Malgun Gothic"/>
+                  <a:srgbClr val="1D1D1F"/>
+                </a:solidFill>
+                <a:latin typeface="Noto Sans KR"/>
               </a:defRPr>
             </a:pPr>
             <a:r>
@@ -6912,7 +6980,7 @@
     <p:bg>
       <p:bgPr>
         <a:solidFill>
-          <a:srgbClr val="FFFFFF"/>
+          <a:srgbClr val="F5F5F7"/>
         </a:solidFill>
         <a:effectLst/>
       </p:bgPr>
@@ -6949,9 +7017,9 @@
             <a:pPr>
               <a:defRPr sz="1100" b="1">
                 <a:solidFill>
-                  <a:srgbClr val="2563EB"/>
-                </a:solidFill>
-                <a:latin typeface="Malgun Gothic"/>
+                  <a:srgbClr val="0066CC"/>
+                </a:solidFill>
+                <a:latin typeface="Noto Sans KR"/>
               </a:defRPr>
             </a:pPr>
             <a:r>
@@ -6985,9 +7053,9 @@
             <a:pPr>
               <a:defRPr sz="2600" b="1">
                 <a:solidFill>
-                  <a:srgbClr val="0F172A"/>
-                </a:solidFill>
-                <a:latin typeface="Malgun Gothic"/>
+                  <a:srgbClr val="1D1D1F"/>
+                </a:solidFill>
+                <a:latin typeface="Noto Sans KR"/>
               </a:defRPr>
             </a:pPr>
             <a:r>
@@ -7005,13 +7073,13 @@
         <p:spPr>
           <a:xfrm>
             <a:off x="548640" y="1371600"/>
-            <a:ext cx="11094415" cy="13716"/>
+            <a:ext cx="11094415" cy="9144"/>
           </a:xfrm>
           <a:prstGeom prst="rect">
             <a:avLst/>
           </a:prstGeom>
           <a:solidFill>
-            <a:srgbClr val="E2E8F0"/>
+            <a:srgbClr val="DADADE"/>
           </a:solidFill>
           <a:ln>
             <a:noFill/>
@@ -7064,13 +7132,13 @@
             <a:pPr>
               <a:defRPr sz="900">
                 <a:solidFill>
-                  <a:srgbClr val="64748B"/>
-                </a:solidFill>
-                <a:latin typeface="Malgun Gothic"/>
-              </a:defRPr>
-            </a:pPr>
-            <a:r>
-              <a:t>AICA 자격심사 시스템 사용자 매뉴얼 · 2026.07</a:t>
+                  <a:srgbClr val="86868B"/>
+                </a:solidFill>
+                <a:latin typeface="Noto Sans KR"/>
+              </a:defRPr>
+            </a:pPr>
+            <a:r>
+              <a:t>AICA 자격심사 시스템 사용자 매뉴얼 · Apple Concept</a:t>
             </a:r>
           </a:p>
         </p:txBody>
@@ -7100,9 +7168,9 @@
             <a:pPr algn="r">
               <a:defRPr sz="900">
                 <a:solidFill>
-                  <a:srgbClr val="64748B"/>
-                </a:solidFill>
-                <a:latin typeface="Malgun Gothic"/>
+                  <a:srgbClr val="86868B"/>
+                </a:solidFill>
+                <a:latin typeface="Noto Sans KR"/>
               </a:defRPr>
             </a:pPr>
             <a:r>
@@ -7113,7 +7181,7 @@
       </p:sp>
       <p:sp>
         <p:nvSpPr>
-          <p:cNvPr id="7" name="Rectangle 6"/>
+          <p:cNvPr id="7" name="Rounded Rectangle 6"/>
           <p:cNvSpPr/>
           <p:nvPr/>
         </p:nvSpPr>
@@ -7122,11 +7190,11 @@
             <a:off x="548640" y="1645920"/>
             <a:ext cx="2011680" cy="822960"/>
           </a:xfrm>
-          <a:prstGeom prst="rect">
+          <a:prstGeom prst="roundRect">
             <a:avLst/>
           </a:prstGeom>
           <a:solidFill>
-            <a:srgbClr val="EF4444"/>
+            <a:srgbClr val="FF453A"/>
           </a:solidFill>
           <a:ln>
             <a:noFill/>
@@ -7155,7 +7223,7 @@
                 <a:solidFill>
                   <a:srgbClr val="FFFFFF"/>
                 </a:solidFill>
-                <a:latin typeface="Malgun Gothic"/>
+                <a:latin typeface="Noto Sans KR"/>
               </a:defRPr>
             </a:pPr>
             <a:r>
@@ -7166,7 +7234,7 @@
       </p:sp>
       <p:sp>
         <p:nvSpPr>
-          <p:cNvPr id="8" name="Rectangle 7"/>
+          <p:cNvPr id="8" name="Rounded Rectangle 7"/>
           <p:cNvSpPr/>
           <p:nvPr/>
         </p:nvSpPr>
@@ -7175,15 +7243,15 @@
             <a:off x="2651760" y="1645920"/>
             <a:ext cx="8991295" cy="822960"/>
           </a:xfrm>
-          <a:prstGeom prst="rect">
+          <a:prstGeom prst="roundRect">
             <a:avLst/>
           </a:prstGeom>
           <a:solidFill>
-            <a:srgbClr val="F8FAFC"/>
+            <a:srgbClr val="FFFFFF"/>
           </a:solidFill>
           <a:ln>
             <a:solidFill>
-              <a:srgbClr val="E2E8F0"/>
+              <a:srgbClr val="DADADE"/>
             </a:solidFill>
           </a:ln>
         </p:spPr>
@@ -7208,20 +7276,20 @@
             <a:pPr algn="ctr">
               <a:defRPr sz="1150">
                 <a:solidFill>
-                  <a:srgbClr val="475569"/>
-                </a:solidFill>
-                <a:latin typeface="Malgun Gothic"/>
-              </a:defRPr>
-            </a:pPr>
-            <a:r>
-              <a:t> 등록된 사용자 성명과 사내 이메일 주소가 정확한지 대조해 보세요. (대소문자 및 띄어쓰기 유의)</a:t>
-            </a:r>
-          </a:p>
-        </p:txBody>
-      </p:sp>
-      <p:sp>
-        <p:nvSpPr>
-          <p:cNvPr id="9" name="Rectangle 8"/>
+                  <a:srgbClr val="1D1D1F"/>
+                </a:solidFill>
+                <a:latin typeface="Noto Sans KR"/>
+              </a:defRPr>
+            </a:pPr>
+            <a:r>
+              <a:t>  등록된 사용자 성명과 사내 이메일 주소가 정확한지 대조해 보세요. (대소문자 및 띄어쓰기 유의)</a:t>
+            </a:r>
+          </a:p>
+        </p:txBody>
+      </p:sp>
+      <p:sp>
+        <p:nvSpPr>
+          <p:cNvPr id="9" name="Rounded Rectangle 8"/>
           <p:cNvSpPr/>
           <p:nvPr/>
         </p:nvSpPr>
@@ -7230,11 +7298,11 @@
             <a:off x="548640" y="2651760"/>
             <a:ext cx="2011680" cy="822960"/>
           </a:xfrm>
-          <a:prstGeom prst="rect">
+          <a:prstGeom prst="roundRect">
             <a:avLst/>
           </a:prstGeom>
           <a:solidFill>
-            <a:srgbClr val="0F172A"/>
+            <a:srgbClr val="0066CC"/>
           </a:solidFill>
           <a:ln>
             <a:noFill/>
@@ -7263,7 +7331,7 @@
                 <a:solidFill>
                   <a:srgbClr val="FFFFFF"/>
                 </a:solidFill>
-                <a:latin typeface="Malgun Gothic"/>
+                <a:latin typeface="Noto Sans KR"/>
               </a:defRPr>
             </a:pPr>
             <a:r>
@@ -7274,7 +7342,7 @@
       </p:sp>
       <p:sp>
         <p:nvSpPr>
-          <p:cNvPr id="10" name="Rectangle 9"/>
+          <p:cNvPr id="10" name="Rounded Rectangle 9"/>
           <p:cNvSpPr/>
           <p:nvPr/>
         </p:nvSpPr>
@@ -7283,15 +7351,15 @@
             <a:off x="2651760" y="2651760"/>
             <a:ext cx="8991295" cy="822960"/>
           </a:xfrm>
-          <a:prstGeom prst="rect">
+          <a:prstGeom prst="roundRect">
             <a:avLst/>
           </a:prstGeom>
           <a:solidFill>
-            <a:srgbClr val="F8FAFC"/>
+            <a:srgbClr val="FFFFFF"/>
           </a:solidFill>
           <a:ln>
             <a:solidFill>
-              <a:srgbClr val="E2E8F0"/>
+              <a:srgbClr val="DADADE"/>
             </a:solidFill>
           </a:ln>
         </p:spPr>
@@ -7316,20 +7384,20 @@
             <a:pPr algn="ctr">
               <a:defRPr sz="1150">
                 <a:solidFill>
-                  <a:srgbClr val="475569"/>
-                </a:solidFill>
-                <a:latin typeface="Malgun Gothic"/>
-              </a:defRPr>
-            </a:pPr>
-            <a:r>
-              <a:t> 필수 항목(성명, 이메일, 과제설명 등) 누락 여부 및 심사위원 3인 배정 유무를 확인하세요.</a:t>
-            </a:r>
-          </a:p>
-        </p:txBody>
-      </p:sp>
-      <p:sp>
-        <p:nvSpPr>
-          <p:cNvPr id="11" name="Rectangle 10"/>
+                  <a:srgbClr val="1D1D1F"/>
+                </a:solidFill>
+                <a:latin typeface="Noto Sans KR"/>
+              </a:defRPr>
+            </a:pPr>
+            <a:r>
+              <a:t>  필수 항목(성명, 이메일, 과제설명 등) 누락 여부 및 심사위원 3인 배정 유무를 확인하세요.</a:t>
+            </a:r>
+          </a:p>
+        </p:txBody>
+      </p:sp>
+      <p:sp>
+        <p:nvSpPr>
+          <p:cNvPr id="11" name="Rounded Rectangle 10"/>
           <p:cNvSpPr/>
           <p:nvPr/>
         </p:nvSpPr>
@@ -7338,11 +7406,11 @@
             <a:off x="548640" y="3657600"/>
             <a:ext cx="2011680" cy="822960"/>
           </a:xfrm>
-          <a:prstGeom prst="rect">
+          <a:prstGeom prst="roundRect">
             <a:avLst/>
           </a:prstGeom>
           <a:solidFill>
-            <a:srgbClr val="2563EB"/>
+            <a:srgbClr val="30D158"/>
           </a:solidFill>
           <a:ln>
             <a:noFill/>
@@ -7371,7 +7439,7 @@
                 <a:solidFill>
                   <a:srgbClr val="FFFFFF"/>
                 </a:solidFill>
-                <a:latin typeface="Malgun Gothic"/>
+                <a:latin typeface="Noto Sans KR"/>
               </a:defRPr>
             </a:pPr>
             <a:r>
@@ -7382,7 +7450,7 @@
       </p:sp>
       <p:sp>
         <p:nvSpPr>
-          <p:cNvPr id="12" name="Rectangle 11"/>
+          <p:cNvPr id="12" name="Rounded Rectangle 11"/>
           <p:cNvSpPr/>
           <p:nvPr/>
         </p:nvSpPr>
@@ -7391,15 +7459,15 @@
             <a:off x="2651760" y="3657600"/>
             <a:ext cx="8991295" cy="822960"/>
           </a:xfrm>
-          <a:prstGeom prst="rect">
+          <a:prstGeom prst="roundRect">
             <a:avLst/>
           </a:prstGeom>
           <a:solidFill>
-            <a:srgbClr val="F8FAFC"/>
+            <a:srgbClr val="FFFFFF"/>
           </a:solidFill>
           <a:ln>
             <a:solidFill>
-              <a:srgbClr val="E2E8F0"/>
+              <a:srgbClr val="DADADE"/>
             </a:solidFill>
           </a:ln>
         </p:spPr>
@@ -7424,20 +7492,20 @@
             <a:pPr algn="ctr">
               <a:defRPr sz="1150">
                 <a:solidFill>
-                  <a:srgbClr val="475569"/>
-                </a:solidFill>
-                <a:latin typeface="Malgun Gothic"/>
-              </a:defRPr>
-            </a:pPr>
-            <a:r>
-              <a:t> 배정된 3인 패널 심사위원(현업, 기술, 보안) 전원이 최종 제출을 마쳤는지 확인하세요.</a:t>
-            </a:r>
-          </a:p>
-        </p:txBody>
-      </p:sp>
-      <p:sp>
-        <p:nvSpPr>
-          <p:cNvPr id="13" name="Rectangle 12"/>
+                  <a:srgbClr val="1D1D1F"/>
+                </a:solidFill>
+                <a:latin typeface="Noto Sans KR"/>
+              </a:defRPr>
+            </a:pPr>
+            <a:r>
+              <a:t>  배정된 3인 패널 심사위원(현업, 기술, 보안) 전원이 최종 제출을 마쳤는지 확인하세요.</a:t>
+            </a:r>
+          </a:p>
+        </p:txBody>
+      </p:sp>
+      <p:sp>
+        <p:nvSpPr>
+          <p:cNvPr id="13" name="Rounded Rectangle 12"/>
           <p:cNvSpPr/>
           <p:nvPr/>
         </p:nvSpPr>
@@ -7446,11 +7514,11 @@
             <a:off x="548640" y="4663440"/>
             <a:ext cx="2011680" cy="822960"/>
           </a:xfrm>
-          <a:prstGeom prst="rect">
+          <a:prstGeom prst="roundRect">
             <a:avLst/>
           </a:prstGeom>
           <a:solidFill>
-            <a:srgbClr val="64748B"/>
+            <a:srgbClr val="86868B"/>
           </a:solidFill>
           <a:ln>
             <a:noFill/>
@@ -7479,7 +7547,7 @@
                 <a:solidFill>
                   <a:srgbClr val="FFFFFF"/>
                 </a:solidFill>
-                <a:latin typeface="Malgun Gothic"/>
+                <a:latin typeface="Noto Sans KR"/>
               </a:defRPr>
             </a:pPr>
             <a:r>
@@ -7490,7 +7558,7 @@
       </p:sp>
       <p:sp>
         <p:nvSpPr>
-          <p:cNvPr id="14" name="Rectangle 13"/>
+          <p:cNvPr id="14" name="Rounded Rectangle 13"/>
           <p:cNvSpPr/>
           <p:nvPr/>
         </p:nvSpPr>
@@ -7499,15 +7567,15 @@
             <a:off x="2651760" y="4663440"/>
             <a:ext cx="8991295" cy="822960"/>
           </a:xfrm>
-          <a:prstGeom prst="rect">
+          <a:prstGeom prst="roundRect">
             <a:avLst/>
           </a:prstGeom>
           <a:solidFill>
-            <a:srgbClr val="F8FAFC"/>
+            <a:srgbClr val="FFFFFF"/>
           </a:solidFill>
           <a:ln>
             <a:solidFill>
-              <a:srgbClr val="E2E8F0"/>
+              <a:srgbClr val="DADADE"/>
             </a:solidFill>
           </a:ln>
         </p:spPr>
@@ -7532,13 +7600,13 @@
             <a:pPr algn="ctr">
               <a:defRPr sz="1150">
                 <a:solidFill>
-                  <a:srgbClr val="475569"/>
-                </a:solidFill>
-                <a:latin typeface="Malgun Gothic"/>
-              </a:defRPr>
-            </a:pPr>
-            <a:r>
-              <a:t> 사내 보안 인트라넷 링크의 접근 권한 허용 여부 및 URL 정상 동작 여부를 사전에 검토하세요.</a:t>
+                  <a:srgbClr val="1D1D1F"/>
+                </a:solidFill>
+                <a:latin typeface="Noto Sans KR"/>
+              </a:defRPr>
+            </a:pPr>
+            <a:r>
+              <a:t>  사내 보안 인트라넷 링크의 접근 권한 허용 여부 및 URL 정상 동작 여부를 사전에 검토하세요.</a:t>
             </a:r>
           </a:p>
         </p:txBody>
@@ -7568,9 +7636,9 @@
             <a:pPr>
               <a:defRPr sz="1200" b="1">
                 <a:solidFill>
-                  <a:srgbClr val="2563EB"/>
-                </a:solidFill>
-                <a:latin typeface="Malgun Gothic"/>
+                  <a:srgbClr val="0066CC"/>
+                </a:solidFill>
+                <a:latin typeface="Noto Sans KR"/>
               </a:defRPr>
             </a:pPr>
             <a:r>
@@ -7593,7 +7661,7 @@
     <p:bg>
       <p:bgPr>
         <a:solidFill>
-          <a:srgbClr val="FFFFFF"/>
+          <a:srgbClr val="F5F5F7"/>
         </a:solidFill>
         <a:effectLst/>
       </p:bgPr>
@@ -7630,9 +7698,9 @@
             <a:pPr>
               <a:defRPr sz="1100" b="1">
                 <a:solidFill>
-                  <a:srgbClr val="2563EB"/>
-                </a:solidFill>
-                <a:latin typeface="Malgun Gothic"/>
+                  <a:srgbClr val="0066CC"/>
+                </a:solidFill>
+                <a:latin typeface="Noto Sans KR"/>
               </a:defRPr>
             </a:pPr>
             <a:r>
@@ -7666,9 +7734,9 @@
             <a:pPr>
               <a:defRPr sz="2600" b="1">
                 <a:solidFill>
-                  <a:srgbClr val="0F172A"/>
-                </a:solidFill>
-                <a:latin typeface="Malgun Gothic"/>
+                  <a:srgbClr val="1D1D1F"/>
+                </a:solidFill>
+                <a:latin typeface="Noto Sans KR"/>
               </a:defRPr>
             </a:pPr>
             <a:r>
@@ -7686,13 +7754,13 @@
         <p:spPr>
           <a:xfrm>
             <a:off x="548640" y="1371600"/>
-            <a:ext cx="11094415" cy="13716"/>
+            <a:ext cx="11094415" cy="9144"/>
           </a:xfrm>
           <a:prstGeom prst="rect">
             <a:avLst/>
           </a:prstGeom>
           <a:solidFill>
-            <a:srgbClr val="E2E8F0"/>
+            <a:srgbClr val="DADADE"/>
           </a:solidFill>
           <a:ln>
             <a:noFill/>
@@ -7745,13 +7813,13 @@
             <a:pPr>
               <a:defRPr sz="900">
                 <a:solidFill>
-                  <a:srgbClr val="64748B"/>
-                </a:solidFill>
-                <a:latin typeface="Malgun Gothic"/>
-              </a:defRPr>
-            </a:pPr>
-            <a:r>
-              <a:t>AICA 자격심사 시스템 사용자 매뉴얼 · 2026.07</a:t>
+                  <a:srgbClr val="86868B"/>
+                </a:solidFill>
+                <a:latin typeface="Noto Sans KR"/>
+              </a:defRPr>
+            </a:pPr>
+            <a:r>
+              <a:t>AICA 자격심사 시스템 사용자 매뉴얼 · Apple Concept</a:t>
             </a:r>
           </a:p>
         </p:txBody>
@@ -7781,9 +7849,9 @@
             <a:pPr algn="r">
               <a:defRPr sz="900">
                 <a:solidFill>
-                  <a:srgbClr val="64748B"/>
-                </a:solidFill>
-                <a:latin typeface="Malgun Gothic"/>
+                  <a:srgbClr val="86868B"/>
+                </a:solidFill>
+                <a:latin typeface="Noto Sans KR"/>
               </a:defRPr>
             </a:pPr>
             <a:r>
@@ -7817,9 +7885,9 @@
             <a:pPr>
               <a:defRPr sz="1300">
                 <a:solidFill>
-                  <a:srgbClr val="475569"/>
-                </a:solidFill>
-                <a:latin typeface="Malgun Gothic"/>
+                  <a:srgbClr val="1D1D1F"/>
+                </a:solidFill>
+                <a:latin typeface="Noto Sans KR"/>
               </a:defRPr>
             </a:pPr>
             <a:r>
@@ -7837,13 +7905,13 @@
         <p:spPr>
           <a:xfrm>
             <a:off x="1371600" y="3200400"/>
-            <a:ext cx="9418320" cy="13716"/>
+            <a:ext cx="9418320" cy="9144"/>
           </a:xfrm>
           <a:prstGeom prst="rect">
             <a:avLst/>
           </a:prstGeom>
           <a:solidFill>
-            <a:srgbClr val="E2E8F0"/>
+            <a:srgbClr val="DADADE"/>
           </a:solidFill>
           <a:ln>
             <a:noFill/>
@@ -7886,7 +7954,7 @@
             <a:avLst/>
           </a:prstGeom>
           <a:solidFill>
-            <a:srgbClr val="2563EB"/>
+            <a:srgbClr val="0066CC"/>
           </a:solidFill>
           <a:ln>
             <a:noFill/>
@@ -7915,7 +7983,7 @@
                 <a:solidFill>
                   <a:srgbClr val="FFFFFF"/>
                 </a:solidFill>
-                <a:latin typeface="Arial"/>
+                <a:latin typeface="Noto Sans KR"/>
               </a:defRPr>
             </a:pPr>
             <a:r>
@@ -7926,75 +7994,25 @@
       </p:sp>
       <p:sp>
         <p:nvSpPr>
-          <p:cNvPr id="10" name="TextBox 9"/>
-          <p:cNvSpPr txBox="1"/>
+          <p:cNvPr id="10" name="Rounded Rectangle 9"/>
+          <p:cNvSpPr/>
           <p:nvPr/>
         </p:nvSpPr>
         <p:spPr>
           <a:xfrm>
             <a:off x="548640" y="3749039"/>
-            <a:ext cx="2834640" cy="2011680"/>
-          </a:xfrm>
-          <a:prstGeom prst="rect">
-            <a:avLst/>
-          </a:prstGeom>
-          <a:noFill/>
-        </p:spPr>
-        <p:txBody>
-          <a:bodyPr wrap="square">
-            <a:spAutoFit/>
-          </a:bodyPr>
-          <a:lstStyle/>
-          <a:p>
-            <a:pPr algn="ctr">
-              <a:spcAft>
-                <a:spcPts val="1000"/>
-              </a:spcAft>
-              <a:defRPr sz="1600" b="1">
-                <a:solidFill>
-                  <a:srgbClr val="0F172A"/>
-                </a:solidFill>
-                <a:latin typeface="Malgun Gothic"/>
-              </a:defRPr>
-            </a:pPr>
-            <a:r>
-              <a:t>과제 등록</a:t>
-            </a:r>
-          </a:p>
-          <a:p>
-            <a:pPr algn="ctr">
-              <a:defRPr sz="1100">
-                <a:solidFill>
-                  <a:srgbClr val="475569"/>
-                </a:solidFill>
-                <a:latin typeface="Malgun Gothic"/>
-              </a:defRPr>
-            </a:pPr>
-            <a:r>
-              <a:t>지원자·과제·증빙 링크를 입력합니다.</a:t>
-            </a:r>
-          </a:p>
-        </p:txBody>
-      </p:sp>
-      <p:sp>
-        <p:nvSpPr>
-          <p:cNvPr id="11" name="Oval 10"/>
-          <p:cNvSpPr/>
-          <p:nvPr/>
-        </p:nvSpPr>
-        <p:spPr>
-          <a:xfrm>
-            <a:off x="4389120" y="2743200"/>
-            <a:ext cx="822960" cy="822960"/>
-          </a:xfrm>
-          <a:prstGeom prst="ellipse">
+            <a:ext cx="2651760" cy="2011680"/>
+          </a:xfrm>
+          <a:prstGeom prst="roundRect">
             <a:avLst/>
           </a:prstGeom>
           <a:solidFill>
-            <a:srgbClr val="2563EB"/>
+            <a:srgbClr val="FFFFFF"/>
           </a:solidFill>
-          <a:ln>
-            <a:noFill/>
+          <a:ln w="12700">
+            <a:solidFill>
+              <a:srgbClr val="DADADE"/>
+            </a:solidFill>
           </a:ln>
         </p:spPr>
         <p:style>
@@ -8012,91 +8030,55 @@
           </a:fontRef>
         </p:style>
         <p:txBody>
-          <a:bodyPr rtlCol="0" anchor="ctr"/>
+          <a:bodyPr rtlCol="0" anchor="ctr" wrap="square"/>
           <a:lstStyle/>
           <a:p>
             <a:pPr algn="ctr">
-              <a:defRPr sz="1400" b="1">
-                <a:solidFill>
-                  <a:srgbClr val="FFFFFF"/>
-                </a:solidFill>
-                <a:latin typeface="Arial"/>
-              </a:defRPr>
-            </a:pPr>
-            <a:r>
-              <a:t>2</a:t>
-            </a:r>
-          </a:p>
-        </p:txBody>
-      </p:sp>
-      <p:sp>
-        <p:nvSpPr>
-          <p:cNvPr id="12" name="TextBox 11"/>
-          <p:cNvSpPr txBox="1"/>
-          <p:nvPr/>
-        </p:nvSpPr>
-        <p:spPr>
-          <a:xfrm>
-            <a:off x="3383280" y="3749039"/>
-            <a:ext cx="2834640" cy="2011680"/>
-          </a:xfrm>
-          <a:prstGeom prst="rect">
-            <a:avLst/>
-          </a:prstGeom>
-          <a:noFill/>
-        </p:spPr>
-        <p:txBody>
-          <a:bodyPr wrap="square">
-            <a:spAutoFit/>
-          </a:bodyPr>
-          <a:lstStyle/>
-          <a:p>
-            <a:pPr algn="ctr">
-              <a:spcAft>
-                <a:spcPts val="1000"/>
+              <a:spcAft>
+                <a:spcPts val="1200"/>
               </a:spcAft>
               <a:defRPr sz="1600" b="1">
                 <a:solidFill>
-                  <a:srgbClr val="0F172A"/>
-                </a:solidFill>
-                <a:latin typeface="Malgun Gothic"/>
-              </a:defRPr>
-            </a:pPr>
-            <a:r>
-              <a:t>3인 패널 배정</a:t>
+                  <a:srgbClr val="1D1D1F"/>
+                </a:solidFill>
+                <a:latin typeface="Noto Sans KR"/>
+              </a:defRPr>
+            </a:pPr>
+            <a:r>
+              <a:t>과제 등록</a:t>
             </a:r>
           </a:p>
           <a:p>
             <a:pPr algn="ctr">
               <a:defRPr sz="1100">
                 <a:solidFill>
-                  <a:srgbClr val="475569"/>
-                </a:solidFill>
-                <a:latin typeface="Malgun Gothic"/>
-              </a:defRPr>
-            </a:pPr>
-            <a:r>
-              <a:t>현업·기술·보안 각 1인을 지정합니다.</a:t>
-            </a:r>
-          </a:p>
-        </p:txBody>
-      </p:sp>
-      <p:sp>
-        <p:nvSpPr>
-          <p:cNvPr id="13" name="Oval 12"/>
+                  <a:srgbClr val="86868B"/>
+                </a:solidFill>
+                <a:latin typeface="Noto Sans KR"/>
+              </a:defRPr>
+            </a:pPr>
+            <a:r>
+              <a:t>지원자·과제·증빙 링크를 입력합니다.</a:t>
+            </a:r>
+          </a:p>
+        </p:txBody>
+      </p:sp>
+      <p:sp>
+        <p:nvSpPr>
+          <p:cNvPr id="11" name="Oval 10"/>
           <p:cNvSpPr/>
           <p:nvPr/>
         </p:nvSpPr>
         <p:spPr>
           <a:xfrm>
-            <a:off x="7223760" y="2743200"/>
+            <a:off x="4389120" y="2743200"/>
             <a:ext cx="822960" cy="822960"/>
           </a:xfrm>
           <a:prstGeom prst="ellipse">
             <a:avLst/>
           </a:prstGeom>
           <a:solidFill>
-            <a:srgbClr val="2563EB"/>
+            <a:srgbClr val="0066CC"/>
           </a:solidFill>
           <a:ln>
             <a:noFill/>
@@ -8125,86 +8107,36 @@
                 <a:solidFill>
                   <a:srgbClr val="FFFFFF"/>
                 </a:solidFill>
-                <a:latin typeface="Arial"/>
-              </a:defRPr>
-            </a:pPr>
-            <a:r>
-              <a:t>3</a:t>
-            </a:r>
-          </a:p>
-        </p:txBody>
-      </p:sp>
-      <p:sp>
-        <p:nvSpPr>
-          <p:cNvPr id="14" name="TextBox 13"/>
-          <p:cNvSpPr txBox="1"/>
-          <p:nvPr/>
-        </p:nvSpPr>
-        <p:spPr>
-          <a:xfrm>
-            <a:off x="6217920" y="3749039"/>
-            <a:ext cx="2834640" cy="2011680"/>
-          </a:xfrm>
-          <a:prstGeom prst="rect">
-            <a:avLst/>
-          </a:prstGeom>
-          <a:noFill/>
-        </p:spPr>
-        <p:txBody>
-          <a:bodyPr wrap="square">
-            <a:spAutoFit/>
-          </a:bodyPr>
-          <a:lstStyle/>
-          <a:p>
-            <a:pPr algn="ctr">
-              <a:spcAft>
-                <a:spcPts val="1000"/>
-              </a:spcAft>
-              <a:defRPr sz="1600" b="1">
-                <a:solidFill>
-                  <a:srgbClr val="0F172A"/>
-                </a:solidFill>
-                <a:latin typeface="Malgun Gothic"/>
-              </a:defRPr>
-            </a:pPr>
-            <a:r>
-              <a:t>독립 심사</a:t>
-            </a:r>
-          </a:p>
-          <a:p>
-            <a:pPr algn="ctr">
-              <a:defRPr sz="1100">
-                <a:solidFill>
-                  <a:srgbClr val="475569"/>
-                </a:solidFill>
-                <a:latin typeface="Malgun Gothic"/>
-              </a:defRPr>
-            </a:pPr>
-            <a:r>
-              <a:t>자료·보안·루브릭을 확인하고 점수를 제출합니다.</a:t>
-            </a:r>
-          </a:p>
-        </p:txBody>
-      </p:sp>
-      <p:sp>
-        <p:nvSpPr>
-          <p:cNvPr id="15" name="Oval 14"/>
+                <a:latin typeface="Noto Sans KR"/>
+              </a:defRPr>
+            </a:pPr>
+            <a:r>
+              <a:t>2</a:t>
+            </a:r>
+          </a:p>
+        </p:txBody>
+      </p:sp>
+      <p:sp>
+        <p:nvSpPr>
+          <p:cNvPr id="12" name="Rounded Rectangle 11"/>
           <p:cNvSpPr/>
           <p:nvPr/>
         </p:nvSpPr>
         <p:spPr>
           <a:xfrm>
-            <a:off x="10058400" y="2743200"/>
-            <a:ext cx="822960" cy="822960"/>
-          </a:xfrm>
-          <a:prstGeom prst="ellipse">
+            <a:off x="3383280" y="3749039"/>
+            <a:ext cx="2651760" cy="2011680"/>
+          </a:xfrm>
+          <a:prstGeom prst="roundRect">
             <a:avLst/>
           </a:prstGeom>
           <a:solidFill>
-            <a:srgbClr val="2563EB"/>
+            <a:srgbClr val="FFFFFF"/>
           </a:solidFill>
-          <a:ln>
-            <a:noFill/>
+          <a:ln w="12700">
+            <a:solidFill>
+              <a:srgbClr val="DADADE"/>
+            </a:solidFill>
           </a:ln>
         </p:spPr>
         <p:style>
@@ -8222,6 +8154,75 @@
           </a:fontRef>
         </p:style>
         <p:txBody>
+          <a:bodyPr rtlCol="0" anchor="ctr" wrap="square"/>
+          <a:lstStyle/>
+          <a:p>
+            <a:pPr algn="ctr">
+              <a:spcAft>
+                <a:spcPts val="1200"/>
+              </a:spcAft>
+              <a:defRPr sz="1600" b="1">
+                <a:solidFill>
+                  <a:srgbClr val="1D1D1F"/>
+                </a:solidFill>
+                <a:latin typeface="Noto Sans KR"/>
+              </a:defRPr>
+            </a:pPr>
+            <a:r>
+              <a:t>3인 패널 배정</a:t>
+            </a:r>
+          </a:p>
+          <a:p>
+            <a:pPr algn="ctr">
+              <a:defRPr sz="1100">
+                <a:solidFill>
+                  <a:srgbClr val="86868B"/>
+                </a:solidFill>
+                <a:latin typeface="Noto Sans KR"/>
+              </a:defRPr>
+            </a:pPr>
+            <a:r>
+              <a:t>현업·기술·보안 각 1인을 지정합니다.</a:t>
+            </a:r>
+          </a:p>
+        </p:txBody>
+      </p:sp>
+      <p:sp>
+        <p:nvSpPr>
+          <p:cNvPr id="13" name="Oval 12"/>
+          <p:cNvSpPr/>
+          <p:nvPr/>
+        </p:nvSpPr>
+        <p:spPr>
+          <a:xfrm>
+            <a:off x="7223760" y="2743200"/>
+            <a:ext cx="822960" cy="822960"/>
+          </a:xfrm>
+          <a:prstGeom prst="ellipse">
+            <a:avLst/>
+          </a:prstGeom>
+          <a:solidFill>
+            <a:srgbClr val="0066CC"/>
+          </a:solidFill>
+          <a:ln>
+            <a:noFill/>
+          </a:ln>
+        </p:spPr>
+        <p:style>
+          <a:lnRef idx="1">
+            <a:schemeClr val="accent1"/>
+          </a:lnRef>
+          <a:fillRef idx="3">
+            <a:schemeClr val="accent1"/>
+          </a:fillRef>
+          <a:effectRef idx="2">
+            <a:schemeClr val="accent1"/>
+          </a:effectRef>
+          <a:fontRef idx="minor">
+            <a:schemeClr val="lt1"/>
+          </a:fontRef>
+        </p:style>
+        <p:txBody>
           <a:bodyPr rtlCol="0" anchor="ctr"/>
           <a:lstStyle/>
           <a:p>
@@ -8230,59 +8231,202 @@
                 <a:solidFill>
                   <a:srgbClr val="FFFFFF"/>
                 </a:solidFill>
-                <a:latin typeface="Arial"/>
-              </a:defRPr>
-            </a:pPr>
-            <a:r>
-              <a:t>4</a:t>
-            </a:r>
-          </a:p>
-        </p:txBody>
-      </p:sp>
-      <p:sp>
-        <p:nvSpPr>
-          <p:cNvPr id="16" name="TextBox 15"/>
-          <p:cNvSpPr txBox="1"/>
-          <p:nvPr/>
-        </p:nvSpPr>
-        <p:spPr>
-          <a:xfrm>
-            <a:off x="9052560" y="3749039"/>
-            <a:ext cx="2834640" cy="2011680"/>
-          </a:xfrm>
-          <a:prstGeom prst="rect">
-            <a:avLst/>
-          </a:prstGeom>
-          <a:noFill/>
-        </p:spPr>
-        <p:txBody>
-          <a:bodyPr wrap="square">
-            <a:spAutoFit/>
-          </a:bodyPr>
+                <a:latin typeface="Noto Sans KR"/>
+              </a:defRPr>
+            </a:pPr>
+            <a:r>
+              <a:t>3</a:t>
+            </a:r>
+          </a:p>
+        </p:txBody>
+      </p:sp>
+      <p:sp>
+        <p:nvSpPr>
+          <p:cNvPr id="14" name="Rounded Rectangle 13"/>
+          <p:cNvSpPr/>
+          <p:nvPr/>
+        </p:nvSpPr>
+        <p:spPr>
+          <a:xfrm>
+            <a:off x="6217920" y="3749039"/>
+            <a:ext cx="2651760" cy="2011680"/>
+          </a:xfrm>
+          <a:prstGeom prst="roundRect">
+            <a:avLst/>
+          </a:prstGeom>
+          <a:solidFill>
+            <a:srgbClr val="FFFFFF"/>
+          </a:solidFill>
+          <a:ln w="12700">
+            <a:solidFill>
+              <a:srgbClr val="DADADE"/>
+            </a:solidFill>
+          </a:ln>
+        </p:spPr>
+        <p:style>
+          <a:lnRef idx="1">
+            <a:schemeClr val="accent1"/>
+          </a:lnRef>
+          <a:fillRef idx="3">
+            <a:schemeClr val="accent1"/>
+          </a:fillRef>
+          <a:effectRef idx="2">
+            <a:schemeClr val="accent1"/>
+          </a:effectRef>
+          <a:fontRef idx="minor">
+            <a:schemeClr val="lt1"/>
+          </a:fontRef>
+        </p:style>
+        <p:txBody>
+          <a:bodyPr rtlCol="0" anchor="ctr" wrap="square"/>
           <a:lstStyle/>
           <a:p>
             <a:pPr algn="ctr">
               <a:spcAft>
-                <a:spcPts val="1000"/>
+                <a:spcPts val="1200"/>
               </a:spcAft>
               <a:defRPr sz="1600" b="1">
                 <a:solidFill>
-                  <a:srgbClr val="0F172A"/>
-                </a:solidFill>
-                <a:latin typeface="Malgun Gothic"/>
-              </a:defRPr>
-            </a:pPr>
-            <a:r>
-              <a:t>종합 판정</a:t>
+                  <a:srgbClr val="1D1D1F"/>
+                </a:solidFill>
+                <a:latin typeface="Noto Sans KR"/>
+              </a:defRPr>
+            </a:pPr>
+            <a:r>
+              <a:t>독립 심사</a:t>
             </a:r>
           </a:p>
           <a:p>
             <a:pPr algn="ctr">
               <a:defRPr sz="1100">
                 <a:solidFill>
-                  <a:srgbClr val="475569"/>
-                </a:solidFill>
-                <a:latin typeface="Malgun Gothic"/>
+                  <a:srgbClr val="86868B"/>
+                </a:solidFill>
+                <a:latin typeface="Noto Sans KR"/>
+              </a:defRPr>
+            </a:pPr>
+            <a:r>
+              <a:t>자료·보안·루브릭을 확인하고 점수를 제출합니다.</a:t>
+            </a:r>
+          </a:p>
+        </p:txBody>
+      </p:sp>
+      <p:sp>
+        <p:nvSpPr>
+          <p:cNvPr id="15" name="Oval 14"/>
+          <p:cNvSpPr/>
+          <p:nvPr/>
+        </p:nvSpPr>
+        <p:spPr>
+          <a:xfrm>
+            <a:off x="10058400" y="2743200"/>
+            <a:ext cx="822960" cy="822960"/>
+          </a:xfrm>
+          <a:prstGeom prst="ellipse">
+            <a:avLst/>
+          </a:prstGeom>
+          <a:solidFill>
+            <a:srgbClr val="0066CC"/>
+          </a:solidFill>
+          <a:ln>
+            <a:noFill/>
+          </a:ln>
+        </p:spPr>
+        <p:style>
+          <a:lnRef idx="1">
+            <a:schemeClr val="accent1"/>
+          </a:lnRef>
+          <a:fillRef idx="3">
+            <a:schemeClr val="accent1"/>
+          </a:fillRef>
+          <a:effectRef idx="2">
+            <a:schemeClr val="accent1"/>
+          </a:effectRef>
+          <a:fontRef idx="minor">
+            <a:schemeClr val="lt1"/>
+          </a:fontRef>
+        </p:style>
+        <p:txBody>
+          <a:bodyPr rtlCol="0" anchor="ctr"/>
+          <a:lstStyle/>
+          <a:p>
+            <a:pPr algn="ctr">
+              <a:defRPr sz="1400" b="1">
+                <a:solidFill>
+                  <a:srgbClr val="FFFFFF"/>
+                </a:solidFill>
+                <a:latin typeface="Noto Sans KR"/>
+              </a:defRPr>
+            </a:pPr>
+            <a:r>
+              <a:t>4</a:t>
+            </a:r>
+          </a:p>
+        </p:txBody>
+      </p:sp>
+      <p:sp>
+        <p:nvSpPr>
+          <p:cNvPr id="16" name="Rounded Rectangle 15"/>
+          <p:cNvSpPr/>
+          <p:nvPr/>
+        </p:nvSpPr>
+        <p:spPr>
+          <a:xfrm>
+            <a:off x="9052560" y="3749039"/>
+            <a:ext cx="2651760" cy="2011680"/>
+          </a:xfrm>
+          <a:prstGeom prst="roundRect">
+            <a:avLst/>
+          </a:prstGeom>
+          <a:solidFill>
+            <a:srgbClr val="FFFFFF"/>
+          </a:solidFill>
+          <a:ln w="12700">
+            <a:solidFill>
+              <a:srgbClr val="DADADE"/>
+            </a:solidFill>
+          </a:ln>
+        </p:spPr>
+        <p:style>
+          <a:lnRef idx="1">
+            <a:schemeClr val="accent1"/>
+          </a:lnRef>
+          <a:fillRef idx="3">
+            <a:schemeClr val="accent1"/>
+          </a:fillRef>
+          <a:effectRef idx="2">
+            <a:schemeClr val="accent1"/>
+          </a:effectRef>
+          <a:fontRef idx="minor">
+            <a:schemeClr val="lt1"/>
+          </a:fontRef>
+        </p:style>
+        <p:txBody>
+          <a:bodyPr rtlCol="0" anchor="ctr" wrap="square"/>
+          <a:lstStyle/>
+          <a:p>
+            <a:pPr algn="ctr">
+              <a:spcAft>
+                <a:spcPts val="1200"/>
+              </a:spcAft>
+              <a:defRPr sz="1600" b="1">
+                <a:solidFill>
+                  <a:srgbClr val="1D1D1F"/>
+                </a:solidFill>
+                <a:latin typeface="Noto Sans KR"/>
+              </a:defRPr>
+            </a:pPr>
+            <a:r>
+              <a:t>종합 판정</a:t>
+            </a:r>
+          </a:p>
+          <a:p>
+            <a:pPr algn="ctr">
+              <a:defRPr sz="1100">
+                <a:solidFill>
+                  <a:srgbClr val="86868B"/>
+                </a:solidFill>
+                <a:latin typeface="Noto Sans KR"/>
               </a:defRPr>
             </a:pPr>
             <a:r>
@@ -8305,7 +8449,7 @@
     <p:bg>
       <p:bgPr>
         <a:solidFill>
-          <a:srgbClr val="FFFFFF"/>
+          <a:srgbClr val="F5F5F7"/>
         </a:solidFill>
         <a:effectLst/>
       </p:bgPr>
@@ -8342,9 +8486,9 @@
             <a:pPr>
               <a:defRPr sz="1100" b="1">
                 <a:solidFill>
-                  <a:srgbClr val="2563EB"/>
-                </a:solidFill>
-                <a:latin typeface="Malgun Gothic"/>
+                  <a:srgbClr val="0066CC"/>
+                </a:solidFill>
+                <a:latin typeface="Noto Sans KR"/>
               </a:defRPr>
             </a:pPr>
             <a:r>
@@ -8378,9 +8522,9 @@
             <a:pPr>
               <a:defRPr sz="2600" b="1">
                 <a:solidFill>
-                  <a:srgbClr val="0F172A"/>
-                </a:solidFill>
-                <a:latin typeface="Malgun Gothic"/>
+                  <a:srgbClr val="1D1D1F"/>
+                </a:solidFill>
+                <a:latin typeface="Noto Sans KR"/>
               </a:defRPr>
             </a:pPr>
             <a:r>
@@ -8398,13 +8542,13 @@
         <p:spPr>
           <a:xfrm>
             <a:off x="548640" y="1371600"/>
-            <a:ext cx="11094415" cy="13716"/>
+            <a:ext cx="11094415" cy="9144"/>
           </a:xfrm>
           <a:prstGeom prst="rect">
             <a:avLst/>
           </a:prstGeom>
           <a:solidFill>
-            <a:srgbClr val="E2E8F0"/>
+            <a:srgbClr val="DADADE"/>
           </a:solidFill>
           <a:ln>
             <a:noFill/>
@@ -8457,13 +8601,13 @@
             <a:pPr>
               <a:defRPr sz="900">
                 <a:solidFill>
-                  <a:srgbClr val="64748B"/>
-                </a:solidFill>
-                <a:latin typeface="Malgun Gothic"/>
-              </a:defRPr>
-            </a:pPr>
-            <a:r>
-              <a:t>AICA 자격심사 시스템 사용자 매뉴얼 · 2026.07</a:t>
+                  <a:srgbClr val="86868B"/>
+                </a:solidFill>
+                <a:latin typeface="Noto Sans KR"/>
+              </a:defRPr>
+            </a:pPr>
+            <a:r>
+              <a:t>AICA 자격심사 시스템 사용자 매뉴얼 · Apple Concept</a:t>
             </a:r>
           </a:p>
         </p:txBody>
@@ -8493,9 +8637,9 @@
             <a:pPr algn="r">
               <a:defRPr sz="900">
                 <a:solidFill>
-                  <a:srgbClr val="64748B"/>
-                </a:solidFill>
-                <a:latin typeface="Malgun Gothic"/>
+                  <a:srgbClr val="86868B"/>
+                </a:solidFill>
+                <a:latin typeface="Noto Sans KR"/>
               </a:defRPr>
             </a:pPr>
             <a:r>
@@ -8513,17 +8657,17 @@
         <p:spPr>
           <a:xfrm>
             <a:off x="548640" y="1828800"/>
-            <a:ext cx="5303520" cy="4114800"/>
+            <a:ext cx="5486400" cy="4114800"/>
           </a:xfrm>
           <a:prstGeom prst="roundRect">
             <a:avLst/>
           </a:prstGeom>
           <a:solidFill>
-            <a:srgbClr val="EFF6FF"/>
+            <a:srgbClr val="FFFFFF"/>
           </a:solidFill>
           <a:ln w="12700">
             <a:solidFill>
-              <a:srgbClr val="E2E8F0"/>
+              <a:srgbClr val="DADADE"/>
             </a:solidFill>
           </a:ln>
         </p:spPr>
@@ -8557,8 +8701,8 @@
         </p:nvSpPr>
         <p:spPr>
           <a:xfrm>
-            <a:off x="685800" y="1965960"/>
-            <a:ext cx="5029200" cy="3840480"/>
+            <a:off x="731520" y="2011680"/>
+            <a:ext cx="5120640" cy="3749040"/>
           </a:xfrm>
           <a:prstGeom prst="rect">
             <a:avLst/>
@@ -8573,13 +8717,13 @@
           <a:p>
             <a:pPr>
               <a:spcAft>
-                <a:spcPts val="1000"/>
-              </a:spcAft>
-              <a:defRPr sz="1400" b="1">
-                <a:solidFill>
-                  <a:srgbClr val="2563EB"/>
-                </a:solidFill>
-                <a:latin typeface="Malgun Gothic"/>
+                <a:spcPts val="1200"/>
+              </a:spcAft>
+              <a:defRPr sz="1500" b="1">
+                <a:solidFill>
+                  <a:srgbClr val="1D1D1F"/>
+                </a:solidFill>
+                <a:latin typeface="Noto Sans KR"/>
               </a:defRPr>
             </a:pPr>
             <a:r>
@@ -8589,13 +8733,13 @@
           <a:p>
             <a:pPr>
               <a:spcAft>
-                <a:spcPts val="500"/>
+                <a:spcPts val="600"/>
               </a:spcAft>
               <a:defRPr sz="1100">
                 <a:solidFill>
-                  <a:srgbClr val="475569"/>
-                </a:solidFill>
-                <a:latin typeface="Malgun Gothic"/>
+                  <a:srgbClr val="1D1D1F"/>
+                </a:solidFill>
+                <a:latin typeface="Noto Sans KR"/>
               </a:defRPr>
             </a:pPr>
             <a:r>
@@ -8605,13 +8749,13 @@
           <a:p>
             <a:pPr>
               <a:spcAft>
-                <a:spcPts val="500"/>
+                <a:spcPts val="600"/>
               </a:spcAft>
               <a:defRPr sz="1100">
                 <a:solidFill>
-                  <a:srgbClr val="475569"/>
-                </a:solidFill>
-                <a:latin typeface="Malgun Gothic"/>
+                  <a:srgbClr val="1D1D1F"/>
+                </a:solidFill>
+                <a:latin typeface="Noto Sans KR"/>
               </a:defRPr>
             </a:pPr>
             <a:r>
@@ -8621,13 +8765,13 @@
           <a:p>
             <a:pPr>
               <a:spcAft>
-                <a:spcPts val="500"/>
+                <a:spcPts val="600"/>
               </a:spcAft>
               <a:defRPr sz="1100">
                 <a:solidFill>
-                  <a:srgbClr val="475569"/>
-                </a:solidFill>
-                <a:latin typeface="Malgun Gothic"/>
+                  <a:srgbClr val="1D1D1F"/>
+                </a:solidFill>
+                <a:latin typeface="Noto Sans KR"/>
               </a:defRPr>
             </a:pPr>
             <a:r>
@@ -8637,13 +8781,13 @@
           <a:p>
             <a:pPr>
               <a:spcAft>
-                <a:spcPts val="500"/>
+                <a:spcPts val="600"/>
               </a:spcAft>
               <a:defRPr sz="1100">
                 <a:solidFill>
-                  <a:srgbClr val="475569"/>
-                </a:solidFill>
-                <a:latin typeface="Malgun Gothic"/>
+                  <a:srgbClr val="1D1D1F"/>
+                </a:solidFill>
+                <a:latin typeface="Noto Sans KR"/>
               </a:defRPr>
             </a:pPr>
             <a:r>
@@ -8654,41 +8798,58 @@
             <a:br/>
             <a:pPr>
               <a:spcAft>
-                <a:spcPts val="500"/>
+                <a:spcPts val="600"/>
               </a:spcAft>
               <a:defRPr sz="1100">
                 <a:solidFill>
-                  <a:srgbClr val="475569"/>
-                </a:solidFill>
-                <a:latin typeface="Malgun Gothic"/>
-              </a:defRPr>
-            </a:pPr>
-            <a:r>
-              <a:t>입력이 없거나 일치하지 않으면 로그인 오류가 표시됩니다. 운영간사에게 등록 정보 확인을 요청하세요.</a:t>
-            </a:r>
-          </a:p>
-        </p:txBody>
-      </p:sp>
-      <p:sp>
-        <p:nvSpPr>
-          <p:cNvPr id="9" name="Rectangle 8"/>
+                  <a:srgbClr val="1D1D1F"/>
+                </a:solidFill>
+                <a:latin typeface="Noto Sans KR"/>
+              </a:defRPr>
+            </a:pPr>
+            <a:r>
+              <a:t>* 입력이 없거나 일치하지 않으면 로그인 오류가 표시됩니다. 운영간사에게 등록 정보 확인을 요청하세요.</a:t>
+            </a:r>
+          </a:p>
+          <a:p>
+            <a:br/>
+            <a:pPr>
+              <a:spcAft>
+                <a:spcPts val="600"/>
+              </a:spcAft>
+              <a:defRPr sz="1100">
+                <a:solidFill>
+                  <a:srgbClr val="1D1D1F"/>
+                </a:solidFill>
+                <a:latin typeface="Noto Sans KR"/>
+              </a:defRPr>
+            </a:pPr>
+            <a:r>
+              <a:t>오른쪽 화면: 실제 리액트 시스템 로그인 창 캡처 화면</a:t>
+            </a:r>
+          </a:p>
+        </p:txBody>
+      </p:sp>
+      <p:sp>
+        <p:nvSpPr>
+          <p:cNvPr id="9" name="Rounded Rectangle 8"/>
           <p:cNvSpPr/>
           <p:nvPr/>
         </p:nvSpPr>
         <p:spPr>
           <a:xfrm>
-            <a:off x="6309360" y="1828800"/>
-            <a:ext cx="5303520" cy="4114800"/>
-          </a:xfrm>
-          <a:prstGeom prst="rect">
+            <a:off x="6400800" y="1828800"/>
+            <a:ext cx="5212080" cy="4114800"/>
+          </a:xfrm>
+          <a:prstGeom prst="roundRect">
             <a:avLst/>
           </a:prstGeom>
           <a:solidFill>
-            <a:srgbClr val="F8FAFC"/>
+            <a:srgbClr val="FFFFFF"/>
           </a:solidFill>
-          <a:ln w="19050">
+          <a:ln w="12700">
             <a:solidFill>
-              <a:srgbClr val="E2E8F0"/>
+              <a:srgbClr val="DADADE"/>
             </a:solidFill>
           </a:ln>
         </p:spPr>
@@ -8730,8 +8891,8 @@
         </p:blipFill>
         <p:spPr>
           <a:xfrm>
-            <a:off x="6446520" y="2371380"/>
-            <a:ext cx="5029200" cy="3029638"/>
+            <a:off x="6537960" y="2398922"/>
+            <a:ext cx="4937760" cy="2974554"/>
           </a:xfrm>
           <a:prstGeom prst="rect">
             <a:avLst/>
@@ -8752,7 +8913,7 @@
     <p:bg>
       <p:bgPr>
         <a:solidFill>
-          <a:srgbClr val="FFFFFF"/>
+          <a:srgbClr val="F5F5F7"/>
         </a:solidFill>
         <a:effectLst/>
       </p:bgPr>
@@ -8789,9 +8950,9 @@
             <a:pPr>
               <a:defRPr sz="1100" b="1">
                 <a:solidFill>
-                  <a:srgbClr val="2563EB"/>
-                </a:solidFill>
-                <a:latin typeface="Malgun Gothic"/>
+                  <a:srgbClr val="0066CC"/>
+                </a:solidFill>
+                <a:latin typeface="Noto Sans KR"/>
               </a:defRPr>
             </a:pPr>
             <a:r>
@@ -8825,9 +8986,9 @@
             <a:pPr>
               <a:defRPr sz="2600" b="1">
                 <a:solidFill>
-                  <a:srgbClr val="0F172A"/>
-                </a:solidFill>
-                <a:latin typeface="Malgun Gothic"/>
+                  <a:srgbClr val="1D1D1F"/>
+                </a:solidFill>
+                <a:latin typeface="Noto Sans KR"/>
               </a:defRPr>
             </a:pPr>
             <a:r>
@@ -8845,13 +9006,13 @@
         <p:spPr>
           <a:xfrm>
             <a:off x="548640" y="1371600"/>
-            <a:ext cx="11094415" cy="13716"/>
+            <a:ext cx="11094415" cy="9144"/>
           </a:xfrm>
           <a:prstGeom prst="rect">
             <a:avLst/>
           </a:prstGeom>
           <a:solidFill>
-            <a:srgbClr val="E2E8F0"/>
+            <a:srgbClr val="DADADE"/>
           </a:solidFill>
           <a:ln>
             <a:noFill/>
@@ -8904,13 +9065,13 @@
             <a:pPr>
               <a:defRPr sz="900">
                 <a:solidFill>
-                  <a:srgbClr val="64748B"/>
-                </a:solidFill>
-                <a:latin typeface="Malgun Gothic"/>
-              </a:defRPr>
-            </a:pPr>
-            <a:r>
-              <a:t>AICA 자격심사 시스템 사용자 매뉴얼 · 2026.07</a:t>
+                  <a:srgbClr val="86868B"/>
+                </a:solidFill>
+                <a:latin typeface="Noto Sans KR"/>
+              </a:defRPr>
+            </a:pPr>
+            <a:r>
+              <a:t>AICA 자격심사 시스템 사용자 매뉴얼 · Apple Concept</a:t>
             </a:r>
           </a:p>
         </p:txBody>
@@ -8940,9 +9101,9 @@
             <a:pPr algn="r">
               <a:defRPr sz="900">
                 <a:solidFill>
-                  <a:srgbClr val="64748B"/>
-                </a:solidFill>
-                <a:latin typeface="Malgun Gothic"/>
+                  <a:srgbClr val="86868B"/>
+                </a:solidFill>
+                <a:latin typeface="Noto Sans KR"/>
               </a:defRPr>
             </a:pPr>
             <a:r>
@@ -8966,11 +9127,11 @@
             <a:avLst/>
           </a:prstGeom>
           <a:solidFill>
-            <a:srgbClr val="EFF6FF"/>
+            <a:srgbClr val="F5F5F7"/>
           </a:solidFill>
           <a:ln w="12700">
             <a:solidFill>
-              <a:srgbClr val="E2E8F0"/>
+              <a:srgbClr val="DADADE"/>
             </a:solidFill>
           </a:ln>
         </p:spPr>
@@ -9004,8 +9165,8 @@
         </p:nvSpPr>
         <p:spPr>
           <a:xfrm>
-            <a:off x="685800" y="1965960"/>
-            <a:ext cx="5029200" cy="3840480"/>
+            <a:off x="731520" y="2011680"/>
+            <a:ext cx="4937760" cy="3749040"/>
           </a:xfrm>
           <a:prstGeom prst="rect">
             <a:avLst/>
@@ -9020,13 +9181,13 @@
           <a:p>
             <a:pPr>
               <a:spcAft>
-                <a:spcPts val="1000"/>
-              </a:spcAft>
-              <a:defRPr sz="1400" b="1">
-                <a:solidFill>
-                  <a:srgbClr val="2563EB"/>
-                </a:solidFill>
-                <a:latin typeface="Malgun Gothic"/>
+                <a:spcPts val="1200"/>
+              </a:spcAft>
+              <a:defRPr sz="1500" b="1">
+                <a:solidFill>
+                  <a:srgbClr val="0066CC"/>
+                </a:solidFill>
+                <a:latin typeface="Noto Sans KR"/>
               </a:defRPr>
             </a:pPr>
             <a:r>
@@ -9036,13 +9197,13 @@
           <a:p>
             <a:pPr>
               <a:spcAft>
-                <a:spcPts val="500"/>
+                <a:spcPts val="600"/>
               </a:spcAft>
               <a:defRPr sz="1100">
                 <a:solidFill>
-                  <a:srgbClr val="475569"/>
-                </a:solidFill>
-                <a:latin typeface="Malgun Gothic"/>
+                  <a:srgbClr val="1D1D1F"/>
+                </a:solidFill>
+                <a:latin typeface="Noto Sans KR"/>
               </a:defRPr>
             </a:pPr>
             <a:r>
@@ -9052,13 +9213,13 @@
           <a:p>
             <a:pPr>
               <a:spcAft>
-                <a:spcPts val="500"/>
+                <a:spcPts val="600"/>
               </a:spcAft>
               <a:defRPr sz="1100">
                 <a:solidFill>
-                  <a:srgbClr val="475569"/>
-                </a:solidFill>
-                <a:latin typeface="Malgun Gothic"/>
+                  <a:srgbClr val="1D1D1F"/>
+                </a:solidFill>
+                <a:latin typeface="Noto Sans KR"/>
               </a:defRPr>
             </a:pPr>
             <a:r>
@@ -9068,13 +9229,13 @@
           <a:p>
             <a:pPr>
               <a:spcAft>
-                <a:spcPts val="500"/>
+                <a:spcPts val="600"/>
               </a:spcAft>
               <a:defRPr sz="1100">
                 <a:solidFill>
-                  <a:srgbClr val="475569"/>
-                </a:solidFill>
-                <a:latin typeface="Malgun Gothic"/>
+                  <a:srgbClr val="1D1D1F"/>
+                </a:solidFill>
+                <a:latin typeface="Noto Sans KR"/>
               </a:defRPr>
             </a:pPr>
             <a:r>
@@ -9084,13 +9245,13 @@
           <a:p>
             <a:pPr>
               <a:spcAft>
-                <a:spcPts val="500"/>
+                <a:spcPts val="600"/>
               </a:spcAft>
               <a:defRPr sz="1100">
                 <a:solidFill>
-                  <a:srgbClr val="475569"/>
-                </a:solidFill>
-                <a:latin typeface="Malgun Gothic"/>
+                  <a:srgbClr val="1D1D1F"/>
+                </a:solidFill>
+                <a:latin typeface="Noto Sans KR"/>
               </a:defRPr>
             </a:pPr>
             <a:r>
@@ -9100,13 +9261,13 @@
           <a:p>
             <a:pPr>
               <a:spcAft>
-                <a:spcPts val="500"/>
+                <a:spcPts val="600"/>
               </a:spcAft>
               <a:defRPr sz="1100">
                 <a:solidFill>
-                  <a:srgbClr val="475569"/>
-                </a:solidFill>
-                <a:latin typeface="Malgun Gothic"/>
+                  <a:srgbClr val="1D1D1F"/>
+                </a:solidFill>
+                <a:latin typeface="Noto Sans KR"/>
               </a:defRPr>
             </a:pPr>
             <a:r>
@@ -9116,13 +9277,13 @@
           <a:p>
             <a:pPr>
               <a:spcAft>
-                <a:spcPts val="500"/>
+                <a:spcPts val="600"/>
               </a:spcAft>
               <a:defRPr sz="1100">
                 <a:solidFill>
-                  <a:srgbClr val="475569"/>
-                </a:solidFill>
-                <a:latin typeface="Malgun Gothic"/>
+                  <a:srgbClr val="1D1D1F"/>
+                </a:solidFill>
+                <a:latin typeface="Noto Sans KR"/>
               </a:defRPr>
             </a:pPr>
             <a:r>
@@ -9133,13 +9294,13 @@
             <a:br/>
             <a:pPr>
               <a:spcAft>
-                <a:spcPts val="500"/>
+                <a:spcPts val="600"/>
               </a:spcAft>
               <a:defRPr sz="1100">
                 <a:solidFill>
-                  <a:srgbClr val="475569"/>
-                </a:solidFill>
-                <a:latin typeface="Malgun Gothic"/>
+                  <a:srgbClr val="1D1D1F"/>
+                </a:solidFill>
+                <a:latin typeface="Noto Sans KR"/>
               </a:defRPr>
             </a:pPr>
             <a:r>
@@ -9163,11 +9324,11 @@
             <a:avLst/>
           </a:prstGeom>
           <a:solidFill>
-            <a:srgbClr val="F8FAFC"/>
+            <a:srgbClr val="FFFFFF"/>
           </a:solidFill>
           <a:ln w="12700">
             <a:solidFill>
-              <a:srgbClr val="E2E8F0"/>
+              <a:srgbClr val="DADADE"/>
             </a:solidFill>
           </a:ln>
         </p:spPr>
@@ -9201,8 +9362,8 @@
         </p:nvSpPr>
         <p:spPr>
           <a:xfrm>
-            <a:off x="6446520" y="1965960"/>
-            <a:ext cx="5029200" cy="3840480"/>
+            <a:off x="6492240" y="2011680"/>
+            <a:ext cx="4937760" cy="3749040"/>
           </a:xfrm>
           <a:prstGeom prst="rect">
             <a:avLst/>
@@ -9217,13 +9378,13 @@
           <a:p>
             <a:pPr>
               <a:spcAft>
-                <a:spcPts val="1000"/>
-              </a:spcAft>
-              <a:defRPr sz="1400" b="1">
-                <a:solidFill>
-                  <a:srgbClr val="0F172A"/>
-                </a:solidFill>
-                <a:latin typeface="Malgun Gothic"/>
+                <a:spcPts val="1200"/>
+              </a:spcAft>
+              <a:defRPr sz="1500" b="1">
+                <a:solidFill>
+                  <a:srgbClr val="1D1D1F"/>
+                </a:solidFill>
+                <a:latin typeface="Noto Sans KR"/>
               </a:defRPr>
             </a:pPr>
             <a:r>
@@ -9233,13 +9394,13 @@
           <a:p>
             <a:pPr>
               <a:spcAft>
-                <a:spcPts val="500"/>
+                <a:spcPts val="600"/>
               </a:spcAft>
               <a:defRPr sz="1100">
                 <a:solidFill>
-                  <a:srgbClr val="475569"/>
-                </a:solidFill>
-                <a:latin typeface="Malgun Gothic"/>
+                  <a:srgbClr val="1D1D1F"/>
+                </a:solidFill>
+                <a:latin typeface="Noto Sans KR"/>
               </a:defRPr>
             </a:pPr>
             <a:r>
@@ -9249,13 +9410,13 @@
           <a:p>
             <a:pPr>
               <a:spcAft>
-                <a:spcPts val="500"/>
+                <a:spcPts val="600"/>
               </a:spcAft>
               <a:defRPr sz="1100">
                 <a:solidFill>
-                  <a:srgbClr val="475569"/>
-                </a:solidFill>
-                <a:latin typeface="Malgun Gothic"/>
+                  <a:srgbClr val="1D1D1F"/>
+                </a:solidFill>
+                <a:latin typeface="Noto Sans KR"/>
               </a:defRPr>
             </a:pPr>
             <a:r>
@@ -9265,13 +9426,13 @@
           <a:p>
             <a:pPr>
               <a:spcAft>
-                <a:spcPts val="500"/>
+                <a:spcPts val="600"/>
               </a:spcAft>
               <a:defRPr sz="1100">
                 <a:solidFill>
-                  <a:srgbClr val="475569"/>
-                </a:solidFill>
-                <a:latin typeface="Malgun Gothic"/>
+                  <a:srgbClr val="1D1D1F"/>
+                </a:solidFill>
+                <a:latin typeface="Noto Sans KR"/>
               </a:defRPr>
             </a:pPr>
             <a:r>
@@ -9281,13 +9442,13 @@
           <a:p>
             <a:pPr>
               <a:spcAft>
-                <a:spcPts val="500"/>
+                <a:spcPts val="600"/>
               </a:spcAft>
               <a:defRPr sz="1100">
                 <a:solidFill>
-                  <a:srgbClr val="475569"/>
-                </a:solidFill>
-                <a:latin typeface="Malgun Gothic"/>
+                  <a:srgbClr val="1D1D1F"/>
+                </a:solidFill>
+                <a:latin typeface="Noto Sans KR"/>
               </a:defRPr>
             </a:pPr>
             <a:r>
@@ -9297,13 +9458,13 @@
           <a:p>
             <a:pPr>
               <a:spcAft>
-                <a:spcPts val="500"/>
+                <a:spcPts val="600"/>
               </a:spcAft>
               <a:defRPr sz="1100">
                 <a:solidFill>
-                  <a:srgbClr val="475569"/>
-                </a:solidFill>
-                <a:latin typeface="Malgun Gothic"/>
+                  <a:srgbClr val="1D1D1F"/>
+                </a:solidFill>
+                <a:latin typeface="Noto Sans KR"/>
               </a:defRPr>
             </a:pPr>
             <a:r>
@@ -9313,13 +9474,13 @@
           <a:p>
             <a:pPr>
               <a:spcAft>
-                <a:spcPts val="500"/>
+                <a:spcPts val="600"/>
               </a:spcAft>
               <a:defRPr sz="1100">
                 <a:solidFill>
-                  <a:srgbClr val="475569"/>
-                </a:solidFill>
-                <a:latin typeface="Malgun Gothic"/>
+                  <a:srgbClr val="1D1D1F"/>
+                </a:solidFill>
+                <a:latin typeface="Noto Sans KR"/>
               </a:defRPr>
             </a:pPr>
             <a:r>
@@ -9330,13 +9491,13 @@
             <a:br/>
             <a:pPr>
               <a:spcAft>
-                <a:spcPts val="500"/>
+                <a:spcPts val="600"/>
               </a:spcAft>
               <a:defRPr sz="1100">
                 <a:solidFill>
-                  <a:srgbClr val="475569"/>
-                </a:solidFill>
-                <a:latin typeface="Malgun Gothic"/>
+                  <a:srgbClr val="1D1D1F"/>
+                </a:solidFill>
+                <a:latin typeface="Noto Sans KR"/>
               </a:defRPr>
             </a:pPr>
             <a:r>
@@ -9359,7 +9520,7 @@
     <p:bg>
       <p:bgPr>
         <a:solidFill>
-          <a:srgbClr val="FFFFFF"/>
+          <a:srgbClr val="F5F5F7"/>
         </a:solidFill>
         <a:effectLst/>
       </p:bgPr>
@@ -9396,9 +9557,9 @@
             <a:pPr>
               <a:defRPr sz="1100" b="1">
                 <a:solidFill>
-                  <a:srgbClr val="2563EB"/>
-                </a:solidFill>
-                <a:latin typeface="Malgun Gothic"/>
+                  <a:srgbClr val="0066CC"/>
+                </a:solidFill>
+                <a:latin typeface="Noto Sans KR"/>
               </a:defRPr>
             </a:pPr>
             <a:r>
@@ -9432,9 +9593,9 @@
             <a:pPr>
               <a:defRPr sz="2600" b="1">
                 <a:solidFill>
-                  <a:srgbClr val="0F172A"/>
-                </a:solidFill>
-                <a:latin typeface="Malgun Gothic"/>
+                  <a:srgbClr val="1D1D1F"/>
+                </a:solidFill>
+                <a:latin typeface="Noto Sans KR"/>
               </a:defRPr>
             </a:pPr>
             <a:r>
@@ -9452,13 +9613,13 @@
         <p:spPr>
           <a:xfrm>
             <a:off x="548640" y="1371600"/>
-            <a:ext cx="11094415" cy="13716"/>
+            <a:ext cx="11094415" cy="9144"/>
           </a:xfrm>
           <a:prstGeom prst="rect">
             <a:avLst/>
           </a:prstGeom>
           <a:solidFill>
-            <a:srgbClr val="E2E8F0"/>
+            <a:srgbClr val="DADADE"/>
           </a:solidFill>
           <a:ln>
             <a:noFill/>
@@ -9511,13 +9672,13 @@
             <a:pPr>
               <a:defRPr sz="900">
                 <a:solidFill>
-                  <a:srgbClr val="64748B"/>
-                </a:solidFill>
-                <a:latin typeface="Malgun Gothic"/>
-              </a:defRPr>
-            </a:pPr>
-            <a:r>
-              <a:t>AICA 자격심사 시스템 사용자 매뉴얼 · 2026.07</a:t>
+                  <a:srgbClr val="86868B"/>
+                </a:solidFill>
+                <a:latin typeface="Noto Sans KR"/>
+              </a:defRPr>
+            </a:pPr>
+            <a:r>
+              <a:t>AICA 자격심사 시스템 사용자 매뉴얼 · Apple Concept</a:t>
             </a:r>
           </a:p>
         </p:txBody>
@@ -9547,9 +9708,9 @@
             <a:pPr algn="r">
               <a:defRPr sz="900">
                 <a:solidFill>
-                  <a:srgbClr val="64748B"/>
-                </a:solidFill>
-                <a:latin typeface="Malgun Gothic"/>
+                  <a:srgbClr val="86868B"/>
+                </a:solidFill>
+                <a:latin typeface="Noto Sans KR"/>
               </a:defRPr>
             </a:pPr>
             <a:r>
@@ -9567,17 +9728,17 @@
         <p:spPr>
           <a:xfrm>
             <a:off x="548640" y="1828800"/>
-            <a:ext cx="5303520" cy="4114800"/>
+            <a:ext cx="5486400" cy="4114800"/>
           </a:xfrm>
           <a:prstGeom prst="roundRect">
             <a:avLst/>
           </a:prstGeom>
           <a:solidFill>
-            <a:srgbClr val="F8FAFC"/>
+            <a:srgbClr val="FFFFFF"/>
           </a:solidFill>
           <a:ln w="12700">
             <a:solidFill>
-              <a:srgbClr val="E2E8F0"/>
+              <a:srgbClr val="DADADE"/>
             </a:solidFill>
           </a:ln>
         </p:spPr>
@@ -9611,8 +9772,8 @@
         </p:nvSpPr>
         <p:spPr>
           <a:xfrm>
-            <a:off x="685800" y="1965960"/>
-            <a:ext cx="5029200" cy="3840480"/>
+            <a:off x="731520" y="2011680"/>
+            <a:ext cx="5120640" cy="3749040"/>
           </a:xfrm>
           <a:prstGeom prst="rect">
             <a:avLst/>
@@ -9627,13 +9788,13 @@
           <a:p>
             <a:pPr>
               <a:spcAft>
-                <a:spcPts val="1000"/>
-              </a:spcAft>
-              <a:defRPr sz="1400" b="1">
-                <a:solidFill>
-                  <a:srgbClr val="0F172A"/>
-                </a:solidFill>
-                <a:latin typeface="Malgun Gothic"/>
+                <a:spcPts val="1200"/>
+              </a:spcAft>
+              <a:defRPr sz="1500" b="1">
+                <a:solidFill>
+                  <a:srgbClr val="1D1D1F"/>
+                </a:solidFill>
+                <a:latin typeface="Noto Sans KR"/>
               </a:defRPr>
             </a:pPr>
             <a:r>
@@ -9643,13 +9804,13 @@
           <a:p>
             <a:pPr>
               <a:spcAft>
-                <a:spcPts val="500"/>
+                <a:spcPts val="600"/>
               </a:spcAft>
               <a:defRPr sz="1100">
                 <a:solidFill>
-                  <a:srgbClr val="475569"/>
-                </a:solidFill>
-                <a:latin typeface="Malgun Gothic"/>
+                  <a:srgbClr val="1D1D1F"/>
+                </a:solidFill>
+                <a:latin typeface="Noto Sans KR"/>
               </a:defRPr>
             </a:pPr>
             <a:r>
@@ -9659,13 +9820,13 @@
           <a:p>
             <a:pPr>
               <a:spcAft>
-                <a:spcPts val="500"/>
+                <a:spcPts val="600"/>
               </a:spcAft>
               <a:defRPr sz="1100">
                 <a:solidFill>
-                  <a:srgbClr val="475569"/>
-                </a:solidFill>
-                <a:latin typeface="Malgun Gothic"/>
+                  <a:srgbClr val="1D1D1F"/>
+                </a:solidFill>
+                <a:latin typeface="Noto Sans KR"/>
               </a:defRPr>
             </a:pPr>
             <a:r>
@@ -9675,13 +9836,13 @@
           <a:p>
             <a:pPr>
               <a:spcAft>
-                <a:spcPts val="500"/>
+                <a:spcPts val="600"/>
               </a:spcAft>
               <a:defRPr sz="1100">
                 <a:solidFill>
-                  <a:srgbClr val="475569"/>
-                </a:solidFill>
-                <a:latin typeface="Malgun Gothic"/>
+                  <a:srgbClr val="1D1D1F"/>
+                </a:solidFill>
+                <a:latin typeface="Noto Sans KR"/>
               </a:defRPr>
             </a:pPr>
             <a:r>
@@ -9691,13 +9852,13 @@
           <a:p>
             <a:pPr>
               <a:spcAft>
-                <a:spcPts val="500"/>
+                <a:spcPts val="600"/>
               </a:spcAft>
               <a:defRPr sz="1100">
                 <a:solidFill>
-                  <a:srgbClr val="475569"/>
-                </a:solidFill>
-                <a:latin typeface="Malgun Gothic"/>
+                  <a:srgbClr val="1D1D1F"/>
+                </a:solidFill>
+                <a:latin typeface="Noto Sans KR"/>
               </a:defRPr>
             </a:pPr>
             <a:r>
@@ -9708,41 +9869,58 @@
             <a:br/>
             <a:pPr>
               <a:spcAft>
-                <a:spcPts val="500"/>
+                <a:spcPts val="600"/>
               </a:spcAft>
               <a:defRPr sz="1100">
                 <a:solidFill>
-                  <a:srgbClr val="475569"/>
-                </a:solidFill>
-                <a:latin typeface="Malgun Gothic"/>
+                  <a:srgbClr val="1D1D1F"/>
+                </a:solidFill>
+                <a:latin typeface="Noto Sans KR"/>
               </a:defRPr>
             </a:pPr>
             <a:r>
               <a:t>💡 명단 보기 기능: 각 지표(통계 카드) 클릭 시 해당 대상자 목록을 모달 팝업으로 즉시 확인할 수 있습니다.</a:t>
             </a:r>
           </a:p>
-        </p:txBody>
-      </p:sp>
-      <p:sp>
-        <p:nvSpPr>
-          <p:cNvPr id="9" name="Rectangle 8"/>
+          <a:p>
+            <a:br/>
+            <a:pPr>
+              <a:spcAft>
+                <a:spcPts val="600"/>
+              </a:spcAft>
+              <a:defRPr sz="1100">
+                <a:solidFill>
+                  <a:srgbClr val="1D1D1F"/>
+                </a:solidFill>
+                <a:latin typeface="Noto Sans KR"/>
+              </a:defRPr>
+            </a:pPr>
+            <a:r>
+              <a:t>오른쪽 화면: 운영간사용 메인 관리 대시보드 및 평가 큐 상세 화면</a:t>
+            </a:r>
+          </a:p>
+        </p:txBody>
+      </p:sp>
+      <p:sp>
+        <p:nvSpPr>
+          <p:cNvPr id="9" name="Rounded Rectangle 8"/>
           <p:cNvSpPr/>
           <p:nvPr/>
         </p:nvSpPr>
         <p:spPr>
           <a:xfrm>
-            <a:off x="6309360" y="1828800"/>
-            <a:ext cx="5303520" cy="4114800"/>
-          </a:xfrm>
-          <a:prstGeom prst="rect">
+            <a:off x="6400800" y="1828800"/>
+            <a:ext cx="5212080" cy="4114800"/>
+          </a:xfrm>
+          <a:prstGeom prst="roundRect">
             <a:avLst/>
           </a:prstGeom>
           <a:solidFill>
-            <a:srgbClr val="F8FAFC"/>
+            <a:srgbClr val="FFFFFF"/>
           </a:solidFill>
-          <a:ln w="19050">
+          <a:ln w="12700">
             <a:solidFill>
-              <a:srgbClr val="E2E8F0"/>
+              <a:srgbClr val="DADADE"/>
             </a:solidFill>
           </a:ln>
         </p:spPr>
@@ -9784,7 +9962,7 @@
         </p:blipFill>
         <p:spPr>
           <a:xfrm>
-            <a:off x="7323600" y="1965960"/>
+            <a:off x="7369320" y="1965960"/>
             <a:ext cx="3275038" cy="3840480"/>
           </a:xfrm>
           <a:prstGeom prst="rect">
@@ -9806,7 +9984,7 @@
     <p:bg>
       <p:bgPr>
         <a:solidFill>
-          <a:srgbClr val="FFFFFF"/>
+          <a:srgbClr val="F5F5F7"/>
         </a:solidFill>
         <a:effectLst/>
       </p:bgPr>
@@ -9843,9 +10021,9 @@
             <a:pPr>
               <a:defRPr sz="1100" b="1">
                 <a:solidFill>
-                  <a:srgbClr val="2563EB"/>
-                </a:solidFill>
-                <a:latin typeface="Malgun Gothic"/>
+                  <a:srgbClr val="0066CC"/>
+                </a:solidFill>
+                <a:latin typeface="Noto Sans KR"/>
               </a:defRPr>
             </a:pPr>
             <a:r>
@@ -9879,9 +10057,9 @@
             <a:pPr>
               <a:defRPr sz="2600" b="1">
                 <a:solidFill>
-                  <a:srgbClr val="0F172A"/>
-                </a:solidFill>
-                <a:latin typeface="Malgun Gothic"/>
+                  <a:srgbClr val="1D1D1F"/>
+                </a:solidFill>
+                <a:latin typeface="Noto Sans KR"/>
               </a:defRPr>
             </a:pPr>
             <a:r>
@@ -9899,13 +10077,13 @@
         <p:spPr>
           <a:xfrm>
             <a:off x="548640" y="1371600"/>
-            <a:ext cx="11094415" cy="13716"/>
+            <a:ext cx="11094415" cy="9144"/>
           </a:xfrm>
           <a:prstGeom prst="rect">
             <a:avLst/>
           </a:prstGeom>
           <a:solidFill>
-            <a:srgbClr val="E2E8F0"/>
+            <a:srgbClr val="DADADE"/>
           </a:solidFill>
           <a:ln>
             <a:noFill/>
@@ -9958,13 +10136,13 @@
             <a:pPr>
               <a:defRPr sz="900">
                 <a:solidFill>
-                  <a:srgbClr val="64748B"/>
-                </a:solidFill>
-                <a:latin typeface="Malgun Gothic"/>
-              </a:defRPr>
-            </a:pPr>
-            <a:r>
-              <a:t>AICA 자격심사 시스템 사용자 매뉴얼 · 2026.07</a:t>
+                  <a:srgbClr val="86868B"/>
+                </a:solidFill>
+                <a:latin typeface="Noto Sans KR"/>
+              </a:defRPr>
+            </a:pPr>
+            <a:r>
+              <a:t>AICA 자격심사 시스템 사용자 매뉴얼 · Apple Concept</a:t>
             </a:r>
           </a:p>
         </p:txBody>
@@ -9994,9 +10172,9 @@
             <a:pPr algn="r">
               <a:defRPr sz="900">
                 <a:solidFill>
-                  <a:srgbClr val="64748B"/>
-                </a:solidFill>
-                <a:latin typeface="Malgun Gothic"/>
+                  <a:srgbClr val="86868B"/>
+                </a:solidFill>
+                <a:latin typeface="Noto Sans KR"/>
               </a:defRPr>
             </a:pPr>
             <a:r>
@@ -10020,11 +10198,11 @@
             <a:avLst/>
           </a:prstGeom>
           <a:solidFill>
-            <a:srgbClr val="EFF6FF"/>
+            <a:srgbClr val="F5F5F7"/>
           </a:solidFill>
           <a:ln w="12700">
             <a:solidFill>
-              <a:srgbClr val="E2E8F0"/>
+              <a:srgbClr val="DADADE"/>
             </a:solidFill>
           </a:ln>
         </p:spPr>
@@ -10058,8 +10236,8 @@
         </p:nvSpPr>
         <p:spPr>
           <a:xfrm>
-            <a:off x="685800" y="1965960"/>
-            <a:ext cx="3200400" cy="3840480"/>
+            <a:off x="731520" y="2011680"/>
+            <a:ext cx="3108960" cy="3749040"/>
           </a:xfrm>
           <a:prstGeom prst="rect">
             <a:avLst/>
@@ -10074,13 +10252,13 @@
           <a:p>
             <a:pPr>
               <a:spcAft>
-                <a:spcPts val="1000"/>
-              </a:spcAft>
-              <a:defRPr sz="1400" b="1">
-                <a:solidFill>
-                  <a:srgbClr val="2563EB"/>
-                </a:solidFill>
-                <a:latin typeface="Malgun Gothic"/>
+                <a:spcPts val="1200"/>
+              </a:spcAft>
+              <a:defRPr sz="1500" b="1">
+                <a:solidFill>
+                  <a:srgbClr val="0066CC"/>
+                </a:solidFill>
+                <a:latin typeface="Noto Sans KR"/>
               </a:defRPr>
             </a:pPr>
             <a:r>
@@ -10090,13 +10268,13 @@
           <a:p>
             <a:pPr>
               <a:spcAft>
-                <a:spcPts val="500"/>
+                <a:spcPts val="600"/>
               </a:spcAft>
               <a:defRPr sz="1100">
                 <a:solidFill>
-                  <a:srgbClr val="475569"/>
-                </a:solidFill>
-                <a:latin typeface="Malgun Gothic"/>
+                  <a:srgbClr val="1D1D1F"/>
+                </a:solidFill>
+                <a:latin typeface="Noto Sans KR"/>
               </a:defRPr>
             </a:pPr>
             <a:r>
@@ -10106,13 +10284,13 @@
           <a:p>
             <a:pPr>
               <a:spcAft>
-                <a:spcPts val="500"/>
+                <a:spcPts val="600"/>
               </a:spcAft>
               <a:defRPr sz="1100">
                 <a:solidFill>
-                  <a:srgbClr val="475569"/>
-                </a:solidFill>
-                <a:latin typeface="Malgun Gothic"/>
+                  <a:srgbClr val="1D1D1F"/>
+                </a:solidFill>
+                <a:latin typeface="Noto Sans KR"/>
               </a:defRPr>
             </a:pPr>
             <a:r>
@@ -10122,13 +10300,13 @@
           <a:p>
             <a:pPr>
               <a:spcAft>
-                <a:spcPts val="500"/>
+                <a:spcPts val="600"/>
               </a:spcAft>
               <a:defRPr sz="1100">
                 <a:solidFill>
-                  <a:srgbClr val="475569"/>
-                </a:solidFill>
-                <a:latin typeface="Malgun Gothic"/>
+                  <a:srgbClr val="1D1D1F"/>
+                </a:solidFill>
+                <a:latin typeface="Noto Sans KR"/>
               </a:defRPr>
             </a:pPr>
             <a:r>
@@ -10138,13 +10316,13 @@
           <a:p>
             <a:pPr>
               <a:spcAft>
-                <a:spcPts val="500"/>
+                <a:spcPts val="600"/>
               </a:spcAft>
               <a:defRPr sz="1100">
                 <a:solidFill>
-                  <a:srgbClr val="475569"/>
-                </a:solidFill>
-                <a:latin typeface="Malgun Gothic"/>
+                  <a:srgbClr val="1D1D1F"/>
+                </a:solidFill>
+                <a:latin typeface="Noto Sans KR"/>
               </a:defRPr>
             </a:pPr>
             <a:r>
@@ -10155,13 +10333,13 @@
             <a:br/>
             <a:pPr>
               <a:spcAft>
-                <a:spcPts val="500"/>
+                <a:spcPts val="600"/>
               </a:spcAft>
               <a:defRPr sz="1100">
                 <a:solidFill>
-                  <a:srgbClr val="475569"/>
-                </a:solidFill>
-                <a:latin typeface="Malgun Gothic"/>
+                  <a:srgbClr val="1D1D1F"/>
+                </a:solidFill>
+                <a:latin typeface="Noto Sans KR"/>
               </a:defRPr>
             </a:pPr>
             <a:r>
@@ -10189,11 +10367,11 @@
             <a:avLst/>
           </a:prstGeom>
           <a:solidFill>
-            <a:srgbClr val="F8FAFC"/>
+            <a:srgbClr val="FFFFFF"/>
           </a:solidFill>
           <a:ln w="12700">
             <a:solidFill>
-              <a:srgbClr val="E2E8F0"/>
+              <a:srgbClr val="DADADE"/>
             </a:solidFill>
           </a:ln>
         </p:spPr>
@@ -10227,8 +10405,8 @@
         </p:nvSpPr>
         <p:spPr>
           <a:xfrm>
-            <a:off x="4526280" y="1965960"/>
-            <a:ext cx="3200400" cy="3840480"/>
+            <a:off x="4572000" y="2011680"/>
+            <a:ext cx="3108960" cy="3749040"/>
           </a:xfrm>
           <a:prstGeom prst="rect">
             <a:avLst/>
@@ -10243,13 +10421,13 @@
           <a:p>
             <a:pPr>
               <a:spcAft>
-                <a:spcPts val="1000"/>
-              </a:spcAft>
-              <a:defRPr sz="1400" b="1">
-                <a:solidFill>
-                  <a:srgbClr val="0F172A"/>
-                </a:solidFill>
-                <a:latin typeface="Malgun Gothic"/>
+                <a:spcPts val="1200"/>
+              </a:spcAft>
+              <a:defRPr sz="1500" b="1">
+                <a:solidFill>
+                  <a:srgbClr val="1D1D1F"/>
+                </a:solidFill>
+                <a:latin typeface="Noto Sans KR"/>
               </a:defRPr>
             </a:pPr>
             <a:r>
@@ -10259,13 +10437,13 @@
           <a:p>
             <a:pPr>
               <a:spcAft>
-                <a:spcPts val="500"/>
+                <a:spcPts val="600"/>
               </a:spcAft>
               <a:defRPr sz="1100">
                 <a:solidFill>
-                  <a:srgbClr val="475569"/>
-                </a:solidFill>
-                <a:latin typeface="Malgun Gothic"/>
+                  <a:srgbClr val="1D1D1F"/>
+                </a:solidFill>
+                <a:latin typeface="Noto Sans KR"/>
               </a:defRPr>
             </a:pPr>
             <a:r>
@@ -10275,13 +10453,13 @@
           <a:p>
             <a:pPr>
               <a:spcAft>
-                <a:spcPts val="500"/>
+                <a:spcPts val="600"/>
               </a:spcAft>
               <a:defRPr sz="1100">
                 <a:solidFill>
-                  <a:srgbClr val="475569"/>
-                </a:solidFill>
-                <a:latin typeface="Malgun Gothic"/>
+                  <a:srgbClr val="1D1D1F"/>
+                </a:solidFill>
+                <a:latin typeface="Noto Sans KR"/>
               </a:defRPr>
             </a:pPr>
             <a:r>
@@ -10291,13 +10469,13 @@
           <a:p>
             <a:pPr>
               <a:spcAft>
-                <a:spcPts val="500"/>
+                <a:spcPts val="600"/>
               </a:spcAft>
               <a:defRPr sz="1100">
                 <a:solidFill>
-                  <a:srgbClr val="475569"/>
-                </a:solidFill>
-                <a:latin typeface="Malgun Gothic"/>
+                  <a:srgbClr val="1D1D1F"/>
+                </a:solidFill>
+                <a:latin typeface="Noto Sans KR"/>
               </a:defRPr>
             </a:pPr>
             <a:r>
@@ -10307,13 +10485,13 @@
           <a:p>
             <a:pPr>
               <a:spcAft>
-                <a:spcPts val="500"/>
+                <a:spcPts val="600"/>
               </a:spcAft>
               <a:defRPr sz="1100">
                 <a:solidFill>
-                  <a:srgbClr val="475569"/>
-                </a:solidFill>
-                <a:latin typeface="Malgun Gothic"/>
+                  <a:srgbClr val="1D1D1F"/>
+                </a:solidFill>
+                <a:latin typeface="Noto Sans KR"/>
               </a:defRPr>
             </a:pPr>
             <a:r>
@@ -10324,13 +10502,13 @@
             <a:br/>
             <a:pPr>
               <a:spcAft>
-                <a:spcPts val="500"/>
+                <a:spcPts val="600"/>
               </a:spcAft>
               <a:defRPr sz="1100">
                 <a:solidFill>
-                  <a:srgbClr val="475569"/>
-                </a:solidFill>
-                <a:latin typeface="Malgun Gothic"/>
+                  <a:srgbClr val="1D1D1F"/>
+                </a:solidFill>
+                <a:latin typeface="Noto Sans KR"/>
               </a:defRPr>
             </a:pPr>
             <a:r>
@@ -10358,11 +10536,11 @@
             <a:avLst/>
           </a:prstGeom>
           <a:solidFill>
-            <a:srgbClr val="F8FAFC"/>
+            <a:srgbClr val="FFFFFF"/>
           </a:solidFill>
           <a:ln w="12700">
             <a:solidFill>
-              <a:srgbClr val="E2E8F0"/>
+              <a:srgbClr val="DADADE"/>
             </a:solidFill>
           </a:ln>
         </p:spPr>
@@ -10396,8 +10574,8 @@
         </p:nvSpPr>
         <p:spPr>
           <a:xfrm>
-            <a:off x="8366760" y="1965960"/>
-            <a:ext cx="3200400" cy="3840480"/>
+            <a:off x="8412480" y="2011680"/>
+            <a:ext cx="3108960" cy="3749040"/>
           </a:xfrm>
           <a:prstGeom prst="rect">
             <a:avLst/>
@@ -10412,13 +10590,13 @@
           <a:p>
             <a:pPr>
               <a:spcAft>
-                <a:spcPts val="1000"/>
-              </a:spcAft>
-              <a:defRPr sz="1400" b="1">
-                <a:solidFill>
-                  <a:srgbClr val="0F172A"/>
-                </a:solidFill>
-                <a:latin typeface="Malgun Gothic"/>
+                <a:spcPts val="1200"/>
+              </a:spcAft>
+              <a:defRPr sz="1500" b="1">
+                <a:solidFill>
+                  <a:srgbClr val="1D1D1F"/>
+                </a:solidFill>
+                <a:latin typeface="Noto Sans KR"/>
               </a:defRPr>
             </a:pPr>
             <a:r>
@@ -10428,13 +10606,13 @@
           <a:p>
             <a:pPr>
               <a:spcAft>
-                <a:spcPts val="500"/>
+                <a:spcPts val="600"/>
               </a:spcAft>
               <a:defRPr sz="1100">
                 <a:solidFill>
-                  <a:srgbClr val="475569"/>
-                </a:solidFill>
-                <a:latin typeface="Malgun Gothic"/>
+                  <a:srgbClr val="1D1D1F"/>
+                </a:solidFill>
+                <a:latin typeface="Noto Sans KR"/>
               </a:defRPr>
             </a:pPr>
             <a:r>
@@ -10444,13 +10622,13 @@
           <a:p>
             <a:pPr>
               <a:spcAft>
-                <a:spcPts val="500"/>
+                <a:spcPts val="600"/>
               </a:spcAft>
               <a:defRPr sz="1100">
                 <a:solidFill>
-                  <a:srgbClr val="475569"/>
-                </a:solidFill>
-                <a:latin typeface="Malgun Gothic"/>
+                  <a:srgbClr val="1D1D1F"/>
+                </a:solidFill>
+                <a:latin typeface="Noto Sans KR"/>
               </a:defRPr>
             </a:pPr>
             <a:r>
@@ -10460,13 +10638,13 @@
           <a:p>
             <a:pPr>
               <a:spcAft>
-                <a:spcPts val="500"/>
+                <a:spcPts val="600"/>
               </a:spcAft>
               <a:defRPr sz="1100">
                 <a:solidFill>
-                  <a:srgbClr val="475569"/>
-                </a:solidFill>
-                <a:latin typeface="Malgun Gothic"/>
+                  <a:srgbClr val="1D1D1F"/>
+                </a:solidFill>
+                <a:latin typeface="Noto Sans KR"/>
               </a:defRPr>
             </a:pPr>
             <a:r>
@@ -10476,13 +10654,13 @@
           <a:p>
             <a:pPr>
               <a:spcAft>
-                <a:spcPts val="500"/>
+                <a:spcPts val="600"/>
               </a:spcAft>
               <a:defRPr sz="1100">
                 <a:solidFill>
-                  <a:srgbClr val="475569"/>
-                </a:solidFill>
-                <a:latin typeface="Malgun Gothic"/>
+                  <a:srgbClr val="1D1D1F"/>
+                </a:solidFill>
+                <a:latin typeface="Noto Sans KR"/>
               </a:defRPr>
             </a:pPr>
             <a:r>
@@ -10492,13 +10670,13 @@
           <a:p>
             <a:pPr>
               <a:spcAft>
-                <a:spcPts val="500"/>
+                <a:spcPts val="600"/>
               </a:spcAft>
               <a:defRPr sz="1100">
                 <a:solidFill>
-                  <a:srgbClr val="475569"/>
-                </a:solidFill>
-                <a:latin typeface="Malgun Gothic"/>
+                  <a:srgbClr val="1D1D1F"/>
+                </a:solidFill>
+                <a:latin typeface="Noto Sans KR"/>
               </a:defRPr>
             </a:pPr>
             <a:r>
@@ -10509,13 +10687,13 @@
             <a:br/>
             <a:pPr>
               <a:spcAft>
-                <a:spcPts val="500"/>
+                <a:spcPts val="600"/>
               </a:spcAft>
               <a:defRPr sz="1100">
                 <a:solidFill>
-                  <a:srgbClr val="475569"/>
-                </a:solidFill>
-                <a:latin typeface="Malgun Gothic"/>
+                  <a:srgbClr val="1D1D1F"/>
+                </a:solidFill>
+                <a:latin typeface="Noto Sans KR"/>
               </a:defRPr>
             </a:pPr>
             <a:r>
@@ -10538,7 +10716,7 @@
     <p:bg>
       <p:bgPr>
         <a:solidFill>
-          <a:srgbClr val="FFFFFF"/>
+          <a:srgbClr val="F5F5F7"/>
         </a:solidFill>
         <a:effectLst/>
       </p:bgPr>
@@ -10575,9 +10753,9 @@
             <a:pPr>
               <a:defRPr sz="1100" b="1">
                 <a:solidFill>
-                  <a:srgbClr val="2563EB"/>
-                </a:solidFill>
-                <a:latin typeface="Malgun Gothic"/>
+                  <a:srgbClr val="0066CC"/>
+                </a:solidFill>
+                <a:latin typeface="Noto Sans KR"/>
               </a:defRPr>
             </a:pPr>
             <a:r>
@@ -10611,9 +10789,9 @@
             <a:pPr>
               <a:defRPr sz="2600" b="1">
                 <a:solidFill>
-                  <a:srgbClr val="0F172A"/>
-                </a:solidFill>
-                <a:latin typeface="Malgun Gothic"/>
+                  <a:srgbClr val="1D1D1F"/>
+                </a:solidFill>
+                <a:latin typeface="Noto Sans KR"/>
               </a:defRPr>
             </a:pPr>
             <a:r>
@@ -10631,13 +10809,13 @@
         <p:spPr>
           <a:xfrm>
             <a:off x="548640" y="1371600"/>
-            <a:ext cx="11094415" cy="13716"/>
+            <a:ext cx="11094415" cy="9144"/>
           </a:xfrm>
           <a:prstGeom prst="rect">
             <a:avLst/>
           </a:prstGeom>
           <a:solidFill>
-            <a:srgbClr val="E2E8F0"/>
+            <a:srgbClr val="DADADE"/>
           </a:solidFill>
           <a:ln>
             <a:noFill/>
@@ -10690,13 +10868,13 @@
             <a:pPr>
               <a:defRPr sz="900">
                 <a:solidFill>
-                  <a:srgbClr val="64748B"/>
-                </a:solidFill>
-                <a:latin typeface="Malgun Gothic"/>
-              </a:defRPr>
-            </a:pPr>
-            <a:r>
-              <a:t>AICA 자격심사 시스템 사용자 매뉴얼 · 2026.07</a:t>
+                  <a:srgbClr val="86868B"/>
+                </a:solidFill>
+                <a:latin typeface="Noto Sans KR"/>
+              </a:defRPr>
+            </a:pPr>
+            <a:r>
+              <a:t>AICA 자격심사 시스템 사용자 매뉴얼 · Apple Concept</a:t>
             </a:r>
           </a:p>
         </p:txBody>
@@ -10726,9 +10904,9 @@
             <a:pPr algn="r">
               <a:defRPr sz="900">
                 <a:solidFill>
-                  <a:srgbClr val="64748B"/>
-                </a:solidFill>
-                <a:latin typeface="Malgun Gothic"/>
+                  <a:srgbClr val="86868B"/>
+                </a:solidFill>
+                <a:latin typeface="Noto Sans KR"/>
               </a:defRPr>
             </a:pPr>
             <a:r>
@@ -10762,9 +10940,9 @@
             <a:pPr>
               <a:defRPr sz="1300">
                 <a:solidFill>
-                  <a:srgbClr val="475569"/>
-                </a:solidFill>
-                <a:latin typeface="Malgun Gothic"/>
+                  <a:srgbClr val="1D1D1F"/>
+                </a:solidFill>
+                <a:latin typeface="Noto Sans KR"/>
               </a:defRPr>
             </a:pPr>
             <a:r>
@@ -10788,11 +10966,11 @@
             <a:avLst/>
           </a:prstGeom>
           <a:solidFill>
-            <a:srgbClr val="F8FAFC"/>
+            <a:srgbClr val="FFFFFF"/>
           </a:solidFill>
-          <a:ln w="19050">
+          <a:ln w="12700">
             <a:solidFill>
-              <a:srgbClr val="2563EB"/>
+              <a:srgbClr val="DADADE"/>
             </a:solidFill>
           </a:ln>
         </p:spPr>
@@ -10820,9 +10998,9 @@
               </a:spcAft>
               <a:defRPr sz="2400" b="1">
                 <a:solidFill>
-                  <a:srgbClr val="2563EB"/>
-                </a:solidFill>
-                <a:latin typeface="Arial"/>
+                  <a:srgbClr val="0066CC"/>
+                </a:solidFill>
+                <a:latin typeface="Noto Sans KR"/>
               </a:defRPr>
             </a:pPr>
             <a:r>
@@ -10836,9 +11014,9 @@
               </a:spcAft>
               <a:defRPr sz="1500" b="1">
                 <a:solidFill>
-                  <a:srgbClr val="0F172A"/>
-                </a:solidFill>
-                <a:latin typeface="Malgun Gothic"/>
+                  <a:srgbClr val="1D1D1F"/>
+                </a:solidFill>
+                <a:latin typeface="Noto Sans KR"/>
               </a:defRPr>
             </a:pPr>
             <a:r>
@@ -10849,9 +11027,9 @@
             <a:pPr>
               <a:defRPr sz="1100">
                 <a:solidFill>
-                  <a:srgbClr val="475569"/>
-                </a:solidFill>
-                <a:latin typeface="Malgun Gothic"/>
+                  <a:srgbClr val="86868B"/>
+                </a:solidFill>
+                <a:latin typeface="Noto Sans KR"/>
               </a:defRPr>
             </a:pPr>
             <a:r>
@@ -10875,11 +11053,11 @@
             <a:avLst/>
           </a:prstGeom>
           <a:solidFill>
-            <a:srgbClr val="F8FAFC"/>
+            <a:srgbClr val="FFFFFF"/>
           </a:solidFill>
-          <a:ln w="19050">
+          <a:ln w="12700">
             <a:solidFill>
-              <a:srgbClr val="3B82F6"/>
+              <a:srgbClr val="DADADE"/>
             </a:solidFill>
           </a:ln>
         </p:spPr>
@@ -10907,9 +11085,9 @@
               </a:spcAft>
               <a:defRPr sz="2400" b="1">
                 <a:solidFill>
-                  <a:srgbClr val="3B82F6"/>
-                </a:solidFill>
-                <a:latin typeface="Arial"/>
+                  <a:srgbClr val="0066CC"/>
+                </a:solidFill>
+                <a:latin typeface="Noto Sans KR"/>
               </a:defRPr>
             </a:pPr>
             <a:r>
@@ -10923,9 +11101,9 @@
               </a:spcAft>
               <a:defRPr sz="1500" b="1">
                 <a:solidFill>
-                  <a:srgbClr val="0F172A"/>
-                </a:solidFill>
-                <a:latin typeface="Malgun Gothic"/>
+                  <a:srgbClr val="1D1D1F"/>
+                </a:solidFill>
+                <a:latin typeface="Noto Sans KR"/>
               </a:defRPr>
             </a:pPr>
             <a:r>
@@ -10936,9 +11114,9 @@
             <a:pPr>
               <a:defRPr sz="1100">
                 <a:solidFill>
-                  <a:srgbClr val="475569"/>
-                </a:solidFill>
-                <a:latin typeface="Malgun Gothic"/>
+                  <a:srgbClr val="86868B"/>
+                </a:solidFill>
+                <a:latin typeface="Noto Sans KR"/>
               </a:defRPr>
             </a:pPr>
             <a:r>
@@ -10962,11 +11140,11 @@
             <a:avLst/>
           </a:prstGeom>
           <a:solidFill>
-            <a:srgbClr val="F8FAFC"/>
+            <a:srgbClr val="FFFFFF"/>
           </a:solidFill>
-          <a:ln w="19050">
+          <a:ln w="12700">
             <a:solidFill>
-              <a:srgbClr val="EF4444"/>
+              <a:srgbClr val="DADADE"/>
             </a:solidFill>
           </a:ln>
         </p:spPr>
@@ -10994,9 +11172,9 @@
               </a:spcAft>
               <a:defRPr sz="2400" b="1">
                 <a:solidFill>
-                  <a:srgbClr val="EF4444"/>
-                </a:solidFill>
-                <a:latin typeface="Arial"/>
+                  <a:srgbClr val="FF453A"/>
+                </a:solidFill>
+                <a:latin typeface="Noto Sans KR"/>
               </a:defRPr>
             </a:pPr>
             <a:r>
@@ -11010,9 +11188,9 @@
               </a:spcAft>
               <a:defRPr sz="1500" b="1">
                 <a:solidFill>
-                  <a:srgbClr val="0F172A"/>
-                </a:solidFill>
-                <a:latin typeface="Malgun Gothic"/>
+                  <a:srgbClr val="1D1D1F"/>
+                </a:solidFill>
+                <a:latin typeface="Noto Sans KR"/>
               </a:defRPr>
             </a:pPr>
             <a:r>
@@ -11023,9 +11201,9 @@
             <a:pPr>
               <a:defRPr sz="1100">
                 <a:solidFill>
-                  <a:srgbClr val="475569"/>
-                </a:solidFill>
-                <a:latin typeface="Malgun Gothic"/>
+                  <a:srgbClr val="86868B"/>
+                </a:solidFill>
+                <a:latin typeface="Noto Sans KR"/>
               </a:defRPr>
             </a:pPr>
             <a:r>
@@ -11036,7 +11214,7 @@
       </p:sp>
       <p:sp>
         <p:nvSpPr>
-          <p:cNvPr id="11" name="Rectangle 10"/>
+          <p:cNvPr id="11" name="Rounded Rectangle 10"/>
           <p:cNvSpPr/>
           <p:nvPr/>
         </p:nvSpPr>
@@ -11045,15 +11223,15 @@
             <a:off x="548640" y="5486400"/>
             <a:ext cx="11094415" cy="548640"/>
           </a:xfrm>
-          <a:prstGeom prst="rect">
+          <a:prstGeom prst="roundRect">
             <a:avLst/>
           </a:prstGeom>
           <a:solidFill>
-            <a:srgbClr val="EFF6FF"/>
+            <a:srgbClr val="F5F5F7"/>
           </a:solidFill>
           <a:ln>
             <a:solidFill>
-              <a:srgbClr val="3B82F6"/>
+              <a:srgbClr val="DADADE"/>
             </a:solidFill>
           </a:ln>
         </p:spPr>
@@ -11078,9 +11256,9 @@
             <a:pPr algn="ctr">
               <a:defRPr sz="1100" b="1">
                 <a:solidFill>
-                  <a:srgbClr val="0F172A"/>
-                </a:solidFill>
-                <a:latin typeface="Malgun Gothic"/>
+                  <a:srgbClr val="1D1D1F"/>
+                </a:solidFill>
+                <a:latin typeface="Noto Sans KR"/>
               </a:defRPr>
             </a:pPr>
             <a:r>
@@ -11103,7 +11281,7 @@
     <p:bg>
       <p:bgPr>
         <a:solidFill>
-          <a:srgbClr val="FFFFFF"/>
+          <a:srgbClr val="F5F5F7"/>
         </a:solidFill>
         <a:effectLst/>
       </p:bgPr>
@@ -11140,9 +11318,9 @@
             <a:pPr>
               <a:defRPr sz="1100" b="1">
                 <a:solidFill>
-                  <a:srgbClr val="2563EB"/>
-                </a:solidFill>
-                <a:latin typeface="Malgun Gothic"/>
+                  <a:srgbClr val="0066CC"/>
+                </a:solidFill>
+                <a:latin typeface="Noto Sans KR"/>
               </a:defRPr>
             </a:pPr>
             <a:r>
@@ -11176,9 +11354,9 @@
             <a:pPr>
               <a:defRPr sz="2600" b="1">
                 <a:solidFill>
-                  <a:srgbClr val="0F172A"/>
-                </a:solidFill>
-                <a:latin typeface="Malgun Gothic"/>
+                  <a:srgbClr val="1D1D1F"/>
+                </a:solidFill>
+                <a:latin typeface="Noto Sans KR"/>
               </a:defRPr>
             </a:pPr>
             <a:r>
@@ -11196,13 +11374,13 @@
         <p:spPr>
           <a:xfrm>
             <a:off x="548640" y="1371600"/>
-            <a:ext cx="11094415" cy="13716"/>
+            <a:ext cx="11094415" cy="9144"/>
           </a:xfrm>
           <a:prstGeom prst="rect">
             <a:avLst/>
           </a:prstGeom>
           <a:solidFill>
-            <a:srgbClr val="E2E8F0"/>
+            <a:srgbClr val="DADADE"/>
           </a:solidFill>
           <a:ln>
             <a:noFill/>
@@ -11255,13 +11433,13 @@
             <a:pPr>
               <a:defRPr sz="900">
                 <a:solidFill>
-                  <a:srgbClr val="64748B"/>
-                </a:solidFill>
-                <a:latin typeface="Malgun Gothic"/>
-              </a:defRPr>
-            </a:pPr>
-            <a:r>
-              <a:t>AICA 자격심사 시스템 사용자 매뉴얼 · 2026.07</a:t>
+                  <a:srgbClr val="86868B"/>
+                </a:solidFill>
+                <a:latin typeface="Noto Sans KR"/>
+              </a:defRPr>
+            </a:pPr>
+            <a:r>
+              <a:t>AICA 자격심사 시스템 사용자 매뉴얼 · Apple Concept</a:t>
             </a:r>
           </a:p>
         </p:txBody>
@@ -11291,9 +11469,9 @@
             <a:pPr algn="r">
               <a:defRPr sz="900">
                 <a:solidFill>
-                  <a:srgbClr val="64748B"/>
-                </a:solidFill>
-                <a:latin typeface="Malgun Gothic"/>
+                  <a:srgbClr val="86868B"/>
+                </a:solidFill>
+                <a:latin typeface="Noto Sans KR"/>
               </a:defRPr>
             </a:pPr>
             <a:r>
@@ -11317,11 +11495,11 @@
             <a:avLst/>
           </a:prstGeom>
           <a:solidFill>
-            <a:srgbClr val="EFF6FF"/>
+            <a:srgbClr val="F5F5F7"/>
           </a:solidFill>
           <a:ln>
             <a:solidFill>
-              <a:srgbClr val="E2E8F0"/>
+              <a:srgbClr val="DADADE"/>
             </a:solidFill>
           </a:ln>
         </p:spPr>
@@ -11346,9 +11524,9 @@
             <a:pPr algn="ctr">
               <a:defRPr sz="1200" b="1">
                 <a:solidFill>
-                  <a:srgbClr val="2563EB"/>
-                </a:solidFill>
-                <a:latin typeface="Malgun Gothic"/>
+                  <a:srgbClr val="0066CC"/>
+                </a:solidFill>
+                <a:latin typeface="Noto Sans KR"/>
               </a:defRPr>
             </a:pPr>
             <a:r>
@@ -11372,11 +11550,11 @@
             <a:avLst/>
           </a:prstGeom>
           <a:solidFill>
-            <a:srgbClr val="F8FAFC"/>
+            <a:srgbClr val="FFFFFF"/>
           </a:solidFill>
           <a:ln>
             <a:solidFill>
-              <a:srgbClr val="E2E8F0"/>
+              <a:srgbClr val="DADADE"/>
             </a:solidFill>
           </a:ln>
         </p:spPr>
@@ -11404,9 +11582,9 @@
               </a:spcAft>
               <a:defRPr sz="2000" b="1">
                 <a:solidFill>
-                  <a:srgbClr val="64748B"/>
-                </a:solidFill>
-                <a:latin typeface="Arial"/>
+                  <a:srgbClr val="86868B"/>
+                </a:solidFill>
+                <a:latin typeface="Noto Sans KR"/>
               </a:defRPr>
             </a:pPr>
             <a:r>
@@ -11420,9 +11598,9 @@
               </a:spcAft>
               <a:defRPr sz="1400" b="1">
                 <a:solidFill>
-                  <a:srgbClr val="0F172A"/>
-                </a:solidFill>
-                <a:latin typeface="Malgun Gothic"/>
+                  <a:srgbClr val="1D1D1F"/>
+                </a:solidFill>
+                <a:latin typeface="Noto Sans KR"/>
               </a:defRPr>
             </a:pPr>
             <a:r>
@@ -11433,9 +11611,9 @@
             <a:pPr>
               <a:defRPr sz="1100">
                 <a:solidFill>
-                  <a:srgbClr val="475569"/>
-                </a:solidFill>
-                <a:latin typeface="Malgun Gothic"/>
+                  <a:srgbClr val="86868B"/>
+                </a:solidFill>
+                <a:latin typeface="Noto Sans KR"/>
               </a:defRPr>
             </a:pPr>
             <a:r>
@@ -11459,11 +11637,11 @@
             <a:avLst/>
           </a:prstGeom>
           <a:solidFill>
-            <a:srgbClr val="F8FAFC"/>
+            <a:srgbClr val="FFFFFF"/>
           </a:solidFill>
           <a:ln>
             <a:solidFill>
-              <a:srgbClr val="E2E8F0"/>
+              <a:srgbClr val="DADADE"/>
             </a:solidFill>
           </a:ln>
         </p:spPr>
@@ -11491,9 +11669,9 @@
               </a:spcAft>
               <a:defRPr sz="2000" b="1">
                 <a:solidFill>
-                  <a:srgbClr val="3B82F6"/>
-                </a:solidFill>
-                <a:latin typeface="Arial"/>
+                  <a:srgbClr val="0066CC"/>
+                </a:solidFill>
+                <a:latin typeface="Noto Sans KR"/>
               </a:defRPr>
             </a:pPr>
             <a:r>
@@ -11507,9 +11685,9 @@
               </a:spcAft>
               <a:defRPr sz="1400" b="1">
                 <a:solidFill>
-                  <a:srgbClr val="0F172A"/>
-                </a:solidFill>
-                <a:latin typeface="Malgun Gothic"/>
+                  <a:srgbClr val="1D1D1F"/>
+                </a:solidFill>
+                <a:latin typeface="Noto Sans KR"/>
               </a:defRPr>
             </a:pPr>
             <a:r>
@@ -11520,9 +11698,9 @@
             <a:pPr>
               <a:defRPr sz="1100">
                 <a:solidFill>
-                  <a:srgbClr val="475569"/>
-                </a:solidFill>
-                <a:latin typeface="Malgun Gothic"/>
+                  <a:srgbClr val="86868B"/>
+                </a:solidFill>
+                <a:latin typeface="Noto Sans KR"/>
               </a:defRPr>
             </a:pPr>
             <a:r>
@@ -11546,11 +11724,11 @@
             <a:avLst/>
           </a:prstGeom>
           <a:solidFill>
-            <a:srgbClr val="F8FAFC"/>
+            <a:srgbClr val="FFFFFF"/>
           </a:solidFill>
           <a:ln>
             <a:solidFill>
-              <a:srgbClr val="E2E8F0"/>
+              <a:srgbClr val="DADADE"/>
             </a:solidFill>
           </a:ln>
         </p:spPr>
@@ -11578,9 +11756,9 @@
               </a:spcAft>
               <a:defRPr sz="2000" b="1">
                 <a:solidFill>
-                  <a:srgbClr val="10B981"/>
-                </a:solidFill>
-                <a:latin typeface="Arial"/>
+                  <a:srgbClr val="30D158"/>
+                </a:solidFill>
+                <a:latin typeface="Noto Sans KR"/>
               </a:defRPr>
             </a:pPr>
             <a:r>
@@ -11594,9 +11772,9 @@
               </a:spcAft>
               <a:defRPr sz="1400" b="1">
                 <a:solidFill>
-                  <a:srgbClr val="0F172A"/>
-                </a:solidFill>
-                <a:latin typeface="Malgun Gothic"/>
+                  <a:srgbClr val="1D1D1F"/>
+                </a:solidFill>
+                <a:latin typeface="Noto Sans KR"/>
               </a:defRPr>
             </a:pPr>
             <a:r>
@@ -11607,9 +11785,9 @@
             <a:pPr>
               <a:defRPr sz="1100">
                 <a:solidFill>
-                  <a:srgbClr val="475569"/>
-                </a:solidFill>
-                <a:latin typeface="Malgun Gothic"/>
+                  <a:srgbClr val="86868B"/>
+                </a:solidFill>
+                <a:latin typeface="Noto Sans KR"/>
               </a:defRPr>
             </a:pPr>
             <a:r>
@@ -11633,11 +11811,11 @@
             <a:avLst/>
           </a:prstGeom>
           <a:solidFill>
-            <a:srgbClr val="F8FAFC"/>
+            <a:srgbClr val="FFFFFF"/>
           </a:solidFill>
           <a:ln>
             <a:solidFill>
-              <a:srgbClr val="E2E8F0"/>
+              <a:srgbClr val="DADADE"/>
             </a:solidFill>
           </a:ln>
         </p:spPr>
@@ -11665,9 +11843,9 @@
               </a:spcAft>
               <a:defRPr sz="2000" b="1">
                 <a:solidFill>
-                  <a:srgbClr val="0F172A"/>
-                </a:solidFill>
-                <a:latin typeface="Arial"/>
+                  <a:srgbClr val="1D1D1F"/>
+                </a:solidFill>
+                <a:latin typeface="Noto Sans KR"/>
               </a:defRPr>
             </a:pPr>
             <a:r>
@@ -11681,9 +11859,9 @@
               </a:spcAft>
               <a:defRPr sz="1400" b="1">
                 <a:solidFill>
-                  <a:srgbClr val="0F172A"/>
-                </a:solidFill>
-                <a:latin typeface="Malgun Gothic"/>
+                  <a:srgbClr val="1D1D1F"/>
+                </a:solidFill>
+                <a:latin typeface="Noto Sans KR"/>
               </a:defRPr>
             </a:pPr>
             <a:r>
@@ -11694,9 +11872,9 @@
             <a:pPr>
               <a:defRPr sz="1100">
                 <a:solidFill>
-                  <a:srgbClr val="475569"/>
-                </a:solidFill>
-                <a:latin typeface="Malgun Gothic"/>
+                  <a:srgbClr val="86868B"/>
+                </a:solidFill>
+                <a:latin typeface="Noto Sans KR"/>
               </a:defRPr>
             </a:pPr>
             <a:r>
@@ -11730,9 +11908,9 @@
             <a:pPr>
               <a:defRPr sz="1100" b="1">
                 <a:solidFill>
-                  <a:srgbClr val="EF4444"/>
-                </a:solidFill>
-                <a:latin typeface="Malgun Gothic"/>
+                  <a:srgbClr val="FF453A"/>
+                </a:solidFill>
+                <a:latin typeface="Noto Sans KR"/>
               </a:defRPr>
             </a:pPr>
             <a:r>
@@ -11755,7 +11933,7 @@
     <p:bg>
       <p:bgPr>
         <a:solidFill>
-          <a:srgbClr val="FFFFFF"/>
+          <a:srgbClr val="F5F5F7"/>
         </a:solidFill>
         <a:effectLst/>
       </p:bgPr>
@@ -11792,9 +11970,9 @@
             <a:pPr>
               <a:defRPr sz="1100" b="1">
                 <a:solidFill>
-                  <a:srgbClr val="2563EB"/>
-                </a:solidFill>
-                <a:latin typeface="Malgun Gothic"/>
+                  <a:srgbClr val="0066CC"/>
+                </a:solidFill>
+                <a:latin typeface="Noto Sans KR"/>
               </a:defRPr>
             </a:pPr>
             <a:r>
@@ -11828,9 +12006,9 @@
             <a:pPr>
               <a:defRPr sz="2600" b="1">
                 <a:solidFill>
-                  <a:srgbClr val="0F172A"/>
-                </a:solidFill>
-                <a:latin typeface="Malgun Gothic"/>
+                  <a:srgbClr val="1D1D1F"/>
+                </a:solidFill>
+                <a:latin typeface="Noto Sans KR"/>
               </a:defRPr>
             </a:pPr>
             <a:r>
@@ -11848,13 +12026,13 @@
         <p:spPr>
           <a:xfrm>
             <a:off x="548640" y="1371600"/>
-            <a:ext cx="11094415" cy="13716"/>
+            <a:ext cx="11094415" cy="9144"/>
           </a:xfrm>
           <a:prstGeom prst="rect">
             <a:avLst/>
           </a:prstGeom>
           <a:solidFill>
-            <a:srgbClr val="E2E8F0"/>
+            <a:srgbClr val="DADADE"/>
           </a:solidFill>
           <a:ln>
             <a:noFill/>
@@ -11907,13 +12085,13 @@
             <a:pPr>
               <a:defRPr sz="900">
                 <a:solidFill>
-                  <a:srgbClr val="64748B"/>
-                </a:solidFill>
-                <a:latin typeface="Malgun Gothic"/>
-              </a:defRPr>
-            </a:pPr>
-            <a:r>
-              <a:t>AICA 자격심사 시스템 사용자 매뉴얼 · 2026.07</a:t>
+                  <a:srgbClr val="86868B"/>
+                </a:solidFill>
+                <a:latin typeface="Noto Sans KR"/>
+              </a:defRPr>
+            </a:pPr>
+            <a:r>
+              <a:t>AICA 자격심사 시스템 사용자 매뉴얼 · Apple Concept</a:t>
             </a:r>
           </a:p>
         </p:txBody>
@@ -11943,9 +12121,9 @@
             <a:pPr algn="r">
               <a:defRPr sz="900">
                 <a:solidFill>
-                  <a:srgbClr val="64748B"/>
-                </a:solidFill>
-                <a:latin typeface="Malgun Gothic"/>
+                  <a:srgbClr val="86868B"/>
+                </a:solidFill>
+                <a:latin typeface="Noto Sans KR"/>
               </a:defRPr>
             </a:pPr>
             <a:r>
@@ -11963,17 +12141,17 @@
         <p:spPr>
           <a:xfrm>
             <a:off x="548640" y="1828800"/>
-            <a:ext cx="5303520" cy="4114800"/>
+            <a:ext cx="5486400" cy="4114800"/>
           </a:xfrm>
           <a:prstGeom prst="roundRect">
             <a:avLst/>
           </a:prstGeom>
           <a:solidFill>
-            <a:srgbClr val="F8FAFC"/>
+            <a:srgbClr val="FFFFFF"/>
           </a:solidFill>
           <a:ln w="12700">
             <a:solidFill>
-              <a:srgbClr val="E2E8F0"/>
+              <a:srgbClr val="DADADE"/>
             </a:solidFill>
           </a:ln>
         </p:spPr>
@@ -12007,8 +12185,8 @@
         </p:nvSpPr>
         <p:spPr>
           <a:xfrm>
-            <a:off x="685800" y="1965960"/>
-            <a:ext cx="5029200" cy="3840480"/>
+            <a:off x="731520" y="2011680"/>
+            <a:ext cx="5120640" cy="3749040"/>
           </a:xfrm>
           <a:prstGeom prst="rect">
             <a:avLst/>
@@ -12023,13 +12201,13 @@
           <a:p>
             <a:pPr>
               <a:spcAft>
-                <a:spcPts val="1000"/>
-              </a:spcAft>
-              <a:defRPr sz="1400" b="1">
-                <a:solidFill>
-                  <a:srgbClr val="0F172A"/>
-                </a:solidFill>
-                <a:latin typeface="Malgun Gothic"/>
+                <a:spcPts val="1200"/>
+              </a:spcAft>
+              <a:defRPr sz="1500" b="1">
+                <a:solidFill>
+                  <a:srgbClr val="1D1D1F"/>
+                </a:solidFill>
+                <a:latin typeface="Noto Sans KR"/>
               </a:defRPr>
             </a:pPr>
             <a:r>
@@ -12039,13 +12217,13 @@
           <a:p>
             <a:pPr>
               <a:spcAft>
-                <a:spcPts val="500"/>
+                <a:spcPts val="600"/>
               </a:spcAft>
               <a:defRPr sz="1100">
                 <a:solidFill>
-                  <a:srgbClr val="475569"/>
-                </a:solidFill>
-                <a:latin typeface="Malgun Gothic"/>
+                  <a:srgbClr val="1D1D1F"/>
+                </a:solidFill>
+                <a:latin typeface="Noto Sans KR"/>
               </a:defRPr>
             </a:pPr>
             <a:r>
@@ -12055,13 +12233,13 @@
           <a:p>
             <a:pPr>
               <a:spcAft>
-                <a:spcPts val="500"/>
+                <a:spcPts val="600"/>
               </a:spcAft>
               <a:defRPr sz="1100">
                 <a:solidFill>
-                  <a:srgbClr val="475569"/>
-                </a:solidFill>
-                <a:latin typeface="Malgun Gothic"/>
+                  <a:srgbClr val="1D1D1F"/>
+                </a:solidFill>
+                <a:latin typeface="Noto Sans KR"/>
               </a:defRPr>
             </a:pPr>
             <a:r>
@@ -12071,13 +12249,13 @@
           <a:p>
             <a:pPr>
               <a:spcAft>
-                <a:spcPts val="500"/>
+                <a:spcPts val="600"/>
               </a:spcAft>
               <a:defRPr sz="1100">
                 <a:solidFill>
-                  <a:srgbClr val="475569"/>
-                </a:solidFill>
-                <a:latin typeface="Malgun Gothic"/>
+                  <a:srgbClr val="1D1D1F"/>
+                </a:solidFill>
+                <a:latin typeface="Noto Sans KR"/>
               </a:defRPr>
             </a:pPr>
             <a:r>
@@ -12087,13 +12265,13 @@
           <a:p>
             <a:pPr>
               <a:spcAft>
-                <a:spcPts val="500"/>
+                <a:spcPts val="600"/>
               </a:spcAft>
               <a:defRPr sz="1100">
                 <a:solidFill>
-                  <a:srgbClr val="475569"/>
-                </a:solidFill>
-                <a:latin typeface="Malgun Gothic"/>
+                  <a:srgbClr val="1D1D1F"/>
+                </a:solidFill>
+                <a:latin typeface="Noto Sans KR"/>
               </a:defRPr>
             </a:pPr>
             <a:r>
@@ -12103,13 +12281,13 @@
           <a:p>
             <a:pPr>
               <a:spcAft>
-                <a:spcPts val="500"/>
+                <a:spcPts val="600"/>
               </a:spcAft>
               <a:defRPr sz="1100">
                 <a:solidFill>
-                  <a:srgbClr val="475569"/>
-                </a:solidFill>
-                <a:latin typeface="Malgun Gothic"/>
+                  <a:srgbClr val="1D1D1F"/>
+                </a:solidFill>
+                <a:latin typeface="Noto Sans KR"/>
               </a:defRPr>
             </a:pPr>
             <a:r>
@@ -12120,13 +12298,13 @@
             <a:br/>
             <a:pPr>
               <a:spcAft>
-                <a:spcPts val="500"/>
+                <a:spcPts val="600"/>
               </a:spcAft>
               <a:defRPr sz="1100">
                 <a:solidFill>
-                  <a:srgbClr val="475569"/>
-                </a:solidFill>
-                <a:latin typeface="Malgun Gothic"/>
+                  <a:srgbClr val="1D1D1F"/>
+                </a:solidFill>
+                <a:latin typeface="Noto Sans KR"/>
               </a:defRPr>
             </a:pPr>
             <a:r>
@@ -12136,41 +12314,58 @@
           <a:p>
             <a:pPr>
               <a:spcAft>
-                <a:spcPts val="500"/>
+                <a:spcPts val="600"/>
               </a:spcAft>
               <a:defRPr sz="1100">
                 <a:solidFill>
-                  <a:srgbClr val="475569"/>
-                </a:solidFill>
-                <a:latin typeface="Malgun Gothic"/>
+                  <a:srgbClr val="1D1D1F"/>
+                </a:solidFill>
+                <a:latin typeface="Noto Sans KR"/>
               </a:defRPr>
             </a:pPr>
             <a:r>
               <a:t>• 결격 우선: 표절·도용, 중요 API Key 노출 등 치명적 결격 사유 기록 시 점수와 상관없이 최종 불합격 처리</a:t>
             </a:r>
           </a:p>
-        </p:txBody>
-      </p:sp>
-      <p:sp>
-        <p:nvSpPr>
-          <p:cNvPr id="9" name="Rectangle 8"/>
+          <a:p>
+            <a:br/>
+            <a:pPr>
+              <a:spcAft>
+                <a:spcPts val="600"/>
+              </a:spcAft>
+              <a:defRPr sz="1100">
+                <a:solidFill>
+                  <a:srgbClr val="1D1D1F"/>
+                </a:solidFill>
+                <a:latin typeface="Noto Sans KR"/>
+              </a:defRPr>
+            </a:pPr>
+            <a:r>
+              <a:t>오른쪽 화면: 실제 배정된 심사위원들의 서명 명패가 실시간 연동된 종합판정서 출력 뷰 화면</a:t>
+            </a:r>
+          </a:p>
+        </p:txBody>
+      </p:sp>
+      <p:sp>
+        <p:nvSpPr>
+          <p:cNvPr id="9" name="Rounded Rectangle 8"/>
           <p:cNvSpPr/>
           <p:nvPr/>
         </p:nvSpPr>
         <p:spPr>
           <a:xfrm>
-            <a:off x="6309360" y="1828800"/>
-            <a:ext cx="5303520" cy="4114800"/>
-          </a:xfrm>
-          <a:prstGeom prst="rect">
+            <a:off x="6400800" y="1828800"/>
+            <a:ext cx="5212080" cy="4114800"/>
+          </a:xfrm>
+          <a:prstGeom prst="roundRect">
             <a:avLst/>
           </a:prstGeom>
           <a:solidFill>
-            <a:srgbClr val="F8FAFC"/>
+            <a:srgbClr val="FFFFFF"/>
           </a:solidFill>
-          <a:ln w="19050">
+          <a:ln w="12700">
             <a:solidFill>
-              <a:srgbClr val="E2E8F0"/>
+              <a:srgbClr val="DADADE"/>
             </a:solidFill>
           </a:ln>
         </p:spPr>
@@ -12212,7 +12407,7 @@
         </p:blipFill>
         <p:spPr>
           <a:xfrm>
-            <a:off x="7014262" y="1965960"/>
+            <a:off x="7059982" y="1965960"/>
             <a:ext cx="3893714" cy="3840480"/>
           </a:xfrm>
           <a:prstGeom prst="rect">

--- a/AICA_System_User_Manual.pptx
+++ b/AICA_System_User_Manual.pptx
@@ -3099,7 +3099,7 @@
     <p:bg>
       <p:bgPr>
         <a:solidFill>
-          <a:srgbClr val="F5F5F7"/>
+          <a:srgbClr val="0F172A"/>
         </a:solidFill>
         <a:effectLst/>
       </p:bgPr>
@@ -3139,7 +3139,7 @@
               </a:spcAft>
               <a:defRPr sz="1300" b="1">
                 <a:solidFill>
-                  <a:srgbClr val="0066CC"/>
+                  <a:srgbClr val="38BDF8"/>
                 </a:solidFill>
                 <a:latin typeface="Noto Sans KR"/>
               </a:defRPr>
@@ -3155,7 +3155,7 @@
               </a:spcAft>
               <a:defRPr sz="4400" b="1">
                 <a:solidFill>
-                  <a:srgbClr val="1D1D1F"/>
+                  <a:srgbClr val="FFFFFF"/>
                 </a:solidFill>
                 <a:latin typeface="Noto Sans KR"/>
               </a:defRPr>
@@ -3172,7 +3172,7 @@
             <a:pPr>
               <a:defRPr sz="1800">
                 <a:solidFill>
-                  <a:srgbClr val="86868B"/>
+                  <a:srgbClr val="94A3B8"/>
                 </a:solidFill>
                 <a:latin typeface="Noto Sans KR"/>
               </a:defRPr>
@@ -3208,7 +3208,7 @@
             <a:pPr>
               <a:defRPr sz="1100">
                 <a:solidFill>
-                  <a:srgbClr val="86868B"/>
+                  <a:srgbClr val="94A3B8"/>
                 </a:solidFill>
                 <a:latin typeface="Noto Sans KR"/>
               </a:defRPr>
@@ -3238,10 +3238,12 @@
             <a:avLst/>
           </a:prstGeom>
           <a:solidFill>
-            <a:srgbClr val="1D1D1F"/>
+            <a:srgbClr val="1E293B"/>
           </a:solidFill>
-          <a:ln>
-            <a:noFill/>
+          <a:ln w="19050">
+            <a:solidFill>
+              <a:srgbClr val="334155"/>
+            </a:solidFill>
           </a:ln>
         </p:spPr>
         <p:style>
@@ -3326,7 +3328,7 @@
               </a:spcAft>
               <a:defRPr sz="1400">
                 <a:solidFill>
-                  <a:srgbClr val="86868B"/>
+                  <a:srgbClr val="94A3B8"/>
                 </a:solidFill>
                 <a:latin typeface="Noto Sans KR"/>
               </a:defRPr>
@@ -3339,7 +3341,7 @@
             <a:pPr algn="ctr">
               <a:defRPr sz="1400" b="1">
                 <a:solidFill>
-                  <a:srgbClr val="0066CC"/>
+                  <a:srgbClr val="38BDF8"/>
                 </a:solidFill>
                 <a:latin typeface="Noto Sans KR"/>
               </a:defRPr>
@@ -3364,7 +3366,7 @@
     <p:bg>
       <p:bgPr>
         <a:solidFill>
-          <a:srgbClr val="F5F5F7"/>
+          <a:srgbClr val="0F172A"/>
         </a:solidFill>
         <a:effectLst/>
       </p:bgPr>
@@ -3401,7 +3403,7 @@
             <a:pPr>
               <a:defRPr sz="1100" b="1">
                 <a:solidFill>
-                  <a:srgbClr val="0066CC"/>
+                  <a:srgbClr val="38BDF8"/>
                 </a:solidFill>
                 <a:latin typeface="Noto Sans KR"/>
               </a:defRPr>
@@ -3437,7 +3439,7 @@
             <a:pPr>
               <a:defRPr sz="2600" b="1">
                 <a:solidFill>
-                  <a:srgbClr val="1D1D1F"/>
+                  <a:srgbClr val="FFFFFF"/>
                 </a:solidFill>
                 <a:latin typeface="Noto Sans KR"/>
               </a:defRPr>
@@ -3463,7 +3465,7 @@
             <a:avLst/>
           </a:prstGeom>
           <a:solidFill>
-            <a:srgbClr val="DADADE"/>
+            <a:srgbClr val="334155"/>
           </a:solidFill>
           <a:ln>
             <a:noFill/>
@@ -3516,13 +3518,13 @@
             <a:pPr>
               <a:defRPr sz="900">
                 <a:solidFill>
-                  <a:srgbClr val="86868B"/>
-                </a:solidFill>
-                <a:latin typeface="Noto Sans KR"/>
-              </a:defRPr>
-            </a:pPr>
-            <a:r>
-              <a:t>AICA 자격심사 시스템 사용자 매뉴얼 · Apple Concept</a:t>
+                  <a:srgbClr val="94A3B8"/>
+                </a:solidFill>
+                <a:latin typeface="Noto Sans KR"/>
+              </a:defRPr>
+            </a:pPr>
+            <a:r>
+              <a:t>AICA 자격심사 시스템 사용자 매뉴얼 · Web App Dark Theme</a:t>
             </a:r>
           </a:p>
         </p:txBody>
@@ -3552,7 +3554,7 @@
             <a:pPr algn="r">
               <a:defRPr sz="900">
                 <a:solidFill>
-                  <a:srgbClr val="86868B"/>
+                  <a:srgbClr val="94A3B8"/>
                 </a:solidFill>
                 <a:latin typeface="Noto Sans KR"/>
               </a:defRPr>
@@ -3578,11 +3580,11 @@
             <a:avLst/>
           </a:prstGeom>
           <a:solidFill>
-            <a:srgbClr val="FFFFFF"/>
+            <a:srgbClr val="1E293B"/>
           </a:solidFill>
           <a:ln w="12700">
             <a:solidFill>
-              <a:srgbClr val="DADADE"/>
+              <a:srgbClr val="334155"/>
             </a:solidFill>
           </a:ln>
         </p:spPr>
@@ -3636,93 +3638,61 @@
               </a:spcAft>
               <a:defRPr sz="1500" b="1">
                 <a:solidFill>
-                  <a:srgbClr val="1D1D1F"/>
-                </a:solidFill>
-                <a:latin typeface="Noto Sans KR"/>
-              </a:defRPr>
-            </a:pPr>
-            <a:r>
-              <a:t>배정 과제 확인 및 심사 착수</a:t>
-            </a:r>
-          </a:p>
-          <a:p>
-            <a:pPr>
-              <a:spcAft>
-                <a:spcPts val="600"/>
-              </a:spcAft>
-              <a:defRPr sz="1100">
-                <a:solidFill>
-                  <a:srgbClr val="1D1D1F"/>
-                </a:solidFill>
-                <a:latin typeface="Noto Sans KR"/>
-              </a:defRPr>
-            </a:pPr>
-            <a:r>
-              <a:t>한 행(Row)에서 전체 데이터 확인:</a:t>
-            </a:r>
-          </a:p>
-          <a:p>
-            <a:pPr>
-              <a:spcAft>
-                <a:spcPts val="600"/>
-              </a:spcAft>
-              <a:defRPr sz="1100">
-                <a:solidFill>
-                  <a:srgbClr val="1D1D1F"/>
-                </a:solidFill>
-                <a:latin typeface="Noto Sans KR"/>
-              </a:defRPr>
-            </a:pPr>
-            <a:r>
-              <a:t>• 지원자 인적사항 및 관계사/부서 정보</a:t>
-            </a:r>
-          </a:p>
-          <a:p>
-            <a:pPr>
-              <a:spcAft>
-                <a:spcPts val="600"/>
-              </a:spcAft>
-              <a:defRPr sz="1100">
-                <a:solidFill>
-                  <a:srgbClr val="1D1D1F"/>
-                </a:solidFill>
-                <a:latin typeface="Noto Sans KR"/>
-              </a:defRPr>
-            </a:pPr>
-            <a:r>
-              <a:t>• 인증 레벨 (Level 3 또는 Level 4)</a:t>
-            </a:r>
-          </a:p>
-          <a:p>
-            <a:pPr>
-              <a:spcAft>
-                <a:spcPts val="600"/>
-              </a:spcAft>
-              <a:defRPr sz="1100">
-                <a:solidFill>
-                  <a:srgbClr val="1D1D1F"/>
-                </a:solidFill>
-                <a:latin typeface="Noto Sans KR"/>
-              </a:defRPr>
-            </a:pPr>
-            <a:r>
-              <a:t>• 내 심사 상태 (대기 / 심사완료)</a:t>
-            </a:r>
-          </a:p>
-          <a:p>
-            <a:pPr>
-              <a:spcAft>
-                <a:spcPts val="600"/>
-              </a:spcAft>
-              <a:defRPr sz="1100">
-                <a:solidFill>
-                  <a:srgbClr val="1D1D1F"/>
-                </a:solidFill>
-                <a:latin typeface="Noto Sans KR"/>
-              </a:defRPr>
-            </a:pPr>
-            <a:r>
-              <a:t>• 타 위원 진척도 (패널 위원별 완료 상태 실시간 도트 모니터링)</a:t>
+                  <a:srgbClr val="FFFFFF"/>
+                </a:solidFill>
+                <a:latin typeface="Noto Sans KR"/>
+              </a:defRPr>
+            </a:pPr>
+            <a:r>
+              <a:t>심사 위원 배정 큐 모니터링</a:t>
+            </a:r>
+          </a:p>
+          <a:p>
+            <a:pPr>
+              <a:spcAft>
+                <a:spcPts val="600"/>
+              </a:spcAft>
+              <a:defRPr sz="1100">
+                <a:solidFill>
+                  <a:srgbClr val="94A3B8"/>
+                </a:solidFill>
+                <a:latin typeface="Noto Sans KR"/>
+              </a:defRPr>
+            </a:pPr>
+            <a:r>
+              <a:t>심사위원 전용 배정 과제 리스트 가이드:</a:t>
+            </a:r>
+          </a:p>
+          <a:p>
+            <a:pPr>
+              <a:spcAft>
+                <a:spcPts val="600"/>
+              </a:spcAft>
+              <a:defRPr sz="1100">
+                <a:solidFill>
+                  <a:srgbClr val="94A3B8"/>
+                </a:solidFill>
+                <a:latin typeface="Noto Sans KR"/>
+              </a:defRPr>
+            </a:pPr>
+            <a:r>
+              <a:t>• 성명 및 이메일 로그인 시, 본인이 패널로 등록된 평가 과제만 화면에 정렬됩니다.</a:t>
+            </a:r>
+          </a:p>
+          <a:p>
+            <a:pPr>
+              <a:spcAft>
+                <a:spcPts val="600"/>
+              </a:spcAft>
+              <a:defRPr sz="1100">
+                <a:solidFill>
+                  <a:srgbClr val="94A3B8"/>
+                </a:solidFill>
+                <a:latin typeface="Noto Sans KR"/>
+              </a:defRPr>
+            </a:pPr>
+            <a:r>
+              <a:t>• 테이블 컬럼: 지원자 정보, 소속 법인/부서, 자격 인증 레벨, 내 평가 진행 현황(대기/완료), 타 위원 제출 진척 상태 배지 표시</a:t>
             </a:r>
           </a:p>
           <a:p>
@@ -3733,29 +3703,29 @@
               </a:spcAft>
               <a:defRPr sz="1100">
                 <a:solidFill>
-                  <a:srgbClr val="1D1D1F"/>
-                </a:solidFill>
-                <a:latin typeface="Noto Sans KR"/>
-              </a:defRPr>
-            </a:pPr>
-            <a:r>
-              <a:t>[심사 시작]: 심사하고자 하는 과제의 우측 [심사하기] 버튼 선택</a:t>
-            </a:r>
-          </a:p>
-          <a:p>
-            <a:pPr>
-              <a:spcAft>
-                <a:spcPts val="600"/>
-              </a:spcAft>
-              <a:defRPr sz="1100">
-                <a:solidFill>
-                  <a:srgbClr val="1D1D1F"/>
-                </a:solidFill>
-                <a:latin typeface="Noto Sans KR"/>
-              </a:defRPr>
-            </a:pPr>
-            <a:r>
-              <a:t>[심사 수정]: 이미 제출한 평가를 다시 검토·수정해야 할 때 재진입하여 수정 후 임시저장/제출 가능</a:t>
+                  <a:srgbClr val="94A3B8"/>
+                </a:solidFill>
+                <a:latin typeface="Noto Sans KR"/>
+              </a:defRPr>
+            </a:pPr>
+            <a:r>
+              <a:t>[심사하기/수정]:</a:t>
+            </a:r>
+          </a:p>
+          <a:p>
+            <a:pPr>
+              <a:spcAft>
+                <a:spcPts val="600"/>
+              </a:spcAft>
+              <a:defRPr sz="1100">
+                <a:solidFill>
+                  <a:srgbClr val="94A3B8"/>
+                </a:solidFill>
+                <a:latin typeface="Noto Sans KR"/>
+              </a:defRPr>
+            </a:pPr>
+            <a:r>
+              <a:t>• 채점을 시작하거나 이미 제출한 내용을 재조정할 때 버튼을 선택해 작업장(Workspace)으로 진입합니다.</a:t>
             </a:r>
           </a:p>
           <a:p>
@@ -3766,13 +3736,13 @@
               </a:spcAft>
               <a:defRPr sz="1100">
                 <a:solidFill>
-                  <a:srgbClr val="1D1D1F"/>
-                </a:solidFill>
-                <a:latin typeface="Noto Sans KR"/>
-              </a:defRPr>
-            </a:pPr>
-            <a:r>
-              <a:t>오른쪽 화면: 실제 배정된 심사위원들이 보는 과제 대기 큐 및 타 위원 렌더링 화면</a:t>
+                  <a:srgbClr val="94A3B8"/>
+                </a:solidFill>
+                <a:latin typeface="Noto Sans KR"/>
+              </a:defRPr>
+            </a:pPr>
+            <a:r>
+              <a:t>오른쪽 화면: 실제 심사위원이 접하는 과제 목록 테이블 영역</a:t>
             </a:r>
           </a:p>
         </p:txBody>
@@ -3792,11 +3762,11 @@
             <a:avLst/>
           </a:prstGeom>
           <a:solidFill>
-            <a:srgbClr val="FFFFFF"/>
+            <a:srgbClr val="1E293B"/>
           </a:solidFill>
-          <a:ln w="12700">
+          <a:ln w="19050">
             <a:solidFill>
-              <a:srgbClr val="DADADE"/>
+              <a:srgbClr val="6366F1"/>
             </a:solidFill>
           </a:ln>
         </p:spPr>
@@ -3860,7 +3830,7 @@
     <p:bg>
       <p:bgPr>
         <a:solidFill>
-          <a:srgbClr val="F5F5F7"/>
+          <a:srgbClr val="0F172A"/>
         </a:solidFill>
         <a:effectLst/>
       </p:bgPr>
@@ -3897,7 +3867,7 @@
             <a:pPr>
               <a:defRPr sz="1100" b="1">
                 <a:solidFill>
-                  <a:srgbClr val="0066CC"/>
+                  <a:srgbClr val="38BDF8"/>
                 </a:solidFill>
                 <a:latin typeface="Noto Sans KR"/>
               </a:defRPr>
@@ -3933,7 +3903,7 @@
             <a:pPr>
               <a:defRPr sz="2600" b="1">
                 <a:solidFill>
-                  <a:srgbClr val="1D1D1F"/>
+                  <a:srgbClr val="FFFFFF"/>
                 </a:solidFill>
                 <a:latin typeface="Noto Sans KR"/>
               </a:defRPr>
@@ -3959,7 +3929,7 @@
             <a:avLst/>
           </a:prstGeom>
           <a:solidFill>
-            <a:srgbClr val="DADADE"/>
+            <a:srgbClr val="334155"/>
           </a:solidFill>
           <a:ln>
             <a:noFill/>
@@ -4012,13 +3982,13 @@
             <a:pPr>
               <a:defRPr sz="900">
                 <a:solidFill>
-                  <a:srgbClr val="86868B"/>
-                </a:solidFill>
-                <a:latin typeface="Noto Sans KR"/>
-              </a:defRPr>
-            </a:pPr>
-            <a:r>
-              <a:t>AICA 자격심사 시스템 사용자 매뉴얼 · Apple Concept</a:t>
+                  <a:srgbClr val="94A3B8"/>
+                </a:solidFill>
+                <a:latin typeface="Noto Sans KR"/>
+              </a:defRPr>
+            </a:pPr>
+            <a:r>
+              <a:t>AICA 자격심사 시스템 사용자 매뉴얼 · Web App Dark Theme</a:t>
             </a:r>
           </a:p>
         </p:txBody>
@@ -4048,7 +4018,7 @@
             <a:pPr algn="r">
               <a:defRPr sz="900">
                 <a:solidFill>
-                  <a:srgbClr val="86868B"/>
+                  <a:srgbClr val="94A3B8"/>
                 </a:solidFill>
                 <a:latin typeface="Noto Sans KR"/>
               </a:defRPr>
@@ -4068,17 +4038,17 @@
         <p:spPr>
           <a:xfrm>
             <a:off x="548640" y="1828800"/>
-            <a:ext cx="3474720" cy="4114800"/>
+            <a:ext cx="5486400" cy="4114800"/>
           </a:xfrm>
           <a:prstGeom prst="roundRect">
             <a:avLst/>
           </a:prstGeom>
           <a:solidFill>
-            <a:srgbClr val="FFFFFF"/>
+            <a:srgbClr val="1E293B"/>
           </a:solidFill>
           <a:ln w="12700">
             <a:solidFill>
-              <a:srgbClr val="DADADE"/>
+              <a:srgbClr val="334155"/>
             </a:solidFill>
           </a:ln>
         </p:spPr>
@@ -4113,7 +4083,7 @@
         <p:spPr>
           <a:xfrm>
             <a:off x="731520" y="2011680"/>
-            <a:ext cx="3108960" cy="3749040"/>
+            <a:ext cx="5120640" cy="3749040"/>
           </a:xfrm>
           <a:prstGeom prst="rect">
             <a:avLst/>
@@ -4132,77 +4102,77 @@
               </a:spcAft>
               <a:defRPr sz="1500" b="1">
                 <a:solidFill>
-                  <a:srgbClr val="1D1D1F"/>
-                </a:solidFill>
-                <a:latin typeface="Noto Sans KR"/>
-              </a:defRPr>
-            </a:pPr>
-            <a:r>
-              <a:t>보고서 요약 (Tab 1)</a:t>
-            </a:r>
-          </a:p>
-          <a:p>
-            <a:pPr>
-              <a:spcAft>
-                <a:spcPts val="600"/>
-              </a:spcAft>
-              <a:defRPr sz="1100">
-                <a:solidFill>
-                  <a:srgbClr val="1D1D1F"/>
-                </a:solidFill>
-                <a:latin typeface="Noto Sans KR"/>
-              </a:defRPr>
-            </a:pPr>
-            <a:r>
-              <a:t>• 과제 제안명 확인</a:t>
-            </a:r>
-          </a:p>
-          <a:p>
-            <a:pPr>
-              <a:spcAft>
-                <a:spcPts val="600"/>
-              </a:spcAft>
-              <a:defRPr sz="1100">
-                <a:solidFill>
-                  <a:srgbClr val="1D1D1F"/>
-                </a:solidFill>
-                <a:latin typeface="Noto Sans KR"/>
-              </a:defRPr>
-            </a:pPr>
-            <a:r>
-              <a:t>• Pain Point 분석의 실효성</a:t>
-            </a:r>
-          </a:p>
-          <a:p>
-            <a:pPr>
-              <a:spcAft>
-                <a:spcPts val="600"/>
-              </a:spcAft>
-              <a:defRPr sz="1100">
-                <a:solidFill>
-                  <a:srgbClr val="1D1D1F"/>
-                </a:solidFill>
-                <a:latin typeface="Noto Sans KR"/>
-              </a:defRPr>
-            </a:pPr>
-            <a:r>
-              <a:t>• AI Solution 구성도 및 설명</a:t>
-            </a:r>
-          </a:p>
-          <a:p>
-            <a:pPr>
-              <a:spcAft>
-                <a:spcPts val="600"/>
-              </a:spcAft>
-              <a:defRPr sz="1100">
-                <a:solidFill>
-                  <a:srgbClr val="1D1D1F"/>
-                </a:solidFill>
-                <a:latin typeface="Noto Sans KR"/>
-              </a:defRPr>
-            </a:pPr>
-            <a:r>
-              <a:t>• 6S 기준 요약 정밀 검토</a:t>
+                  <a:srgbClr val="FFFFFF"/>
+                </a:solidFill>
+                <a:latin typeface="Noto Sans KR"/>
+              </a:defRPr>
+            </a:pPr>
+            <a:r>
+              <a:t>3대 증빙 자료 다차원 교차 검증</a:t>
+            </a:r>
+          </a:p>
+          <a:p>
+            <a:pPr>
+              <a:spcAft>
+                <a:spcPts val="600"/>
+              </a:spcAft>
+              <a:defRPr sz="1100">
+                <a:solidFill>
+                  <a:srgbClr val="94A3B8"/>
+                </a:solidFill>
+                <a:latin typeface="Noto Sans KR"/>
+              </a:defRPr>
+            </a:pPr>
+            <a:r>
+              <a:t>제출물 상세 탭(Tab) 활용 방식:</a:t>
+            </a:r>
+          </a:p>
+          <a:p>
+            <a:pPr>
+              <a:spcAft>
+                <a:spcPts val="600"/>
+              </a:spcAft>
+              <a:defRPr sz="1100">
+                <a:solidFill>
+                  <a:srgbClr val="94A3B8"/>
+                </a:solidFill>
+                <a:latin typeface="Noto Sans KR"/>
+              </a:defRPr>
+            </a:pPr>
+            <a:r>
+              <a:t>• 보고서 요약 (Tab 1): 과제 제안 배경 및 Pain Point 극복 방안, 6S 요약 검토 (문제-해결-기대효과의 논리적 일관성 체크)</a:t>
+            </a:r>
+          </a:p>
+          <a:p>
+            <a:pPr>
+              <a:spcAft>
+                <a:spcPts val="600"/>
+              </a:spcAft>
+              <a:defRPr sz="1100">
+                <a:solidFill>
+                  <a:srgbClr val="94A3B8"/>
+                </a:solidFill>
+                <a:latin typeface="Noto Sans KR"/>
+              </a:defRPr>
+            </a:pPr>
+            <a:r>
+              <a:t>• 소스코드 구조 (Tab 2): 디렉토리 트리 구조, 라이브러리 구성 및 API Key 노출 방지 대책 검토</a:t>
+            </a:r>
+          </a:p>
+          <a:p>
+            <a:pPr>
+              <a:spcAft>
+                <a:spcPts val="600"/>
+              </a:spcAft>
+              <a:defRPr sz="1100">
+                <a:solidFill>
+                  <a:srgbClr val="94A3B8"/>
+                </a:solidFill>
+                <a:latin typeface="Noto Sans KR"/>
+              </a:defRPr>
+            </a:pPr>
+            <a:r>
+              <a:t>• 시연·링크 (Tab 3): 결과 보고서 PDF 원본, Git 저장소 주소, 구동 동영상 링크 유효성 검증</a:t>
             </a:r>
           </a:p>
           <a:p>
@@ -4213,13 +4183,30 @@
               </a:spcAft>
               <a:defRPr sz="1100">
                 <a:solidFill>
-                  <a:srgbClr val="1D1D1F"/>
-                </a:solidFill>
-                <a:latin typeface="Noto Sans KR"/>
-              </a:defRPr>
-            </a:pPr>
-            <a:r>
-              <a:t>💡 문제 ➔ 해결 ➔ 효과의 인과관계가 매끄럽게 연결되는지 인과성을 확인합니다.</a:t>
+                  <a:srgbClr val="94A3B8"/>
+                </a:solidFill>
+                <a:latin typeface="Noto Sans KR"/>
+              </a:defRPr>
+            </a:pPr>
+            <a:r>
+              <a:t>💡 소스코드 및 구동 영상 링크가 손상되었을 경우 정성 의견란에 구체적인 비작동 사유를 기재해 주세요.</a:t>
+            </a:r>
+          </a:p>
+          <a:p>
+            <a:br/>
+            <a:pPr>
+              <a:spcAft>
+                <a:spcPts val="600"/>
+              </a:spcAft>
+              <a:defRPr sz="1100">
+                <a:solidFill>
+                  <a:srgbClr val="94A3B8"/>
+                </a:solidFill>
+                <a:latin typeface="Noto Sans KR"/>
+              </a:defRPr>
+            </a:pPr>
+            <a:r>
+              <a:t>오른쪽 화면: 실제 심사 작업장 좌측의 3단 증빙 자료 리더(Reader)</a:t>
             </a:r>
           </a:p>
         </p:txBody>
@@ -4232,18 +4219,18 @@
         </p:nvSpPr>
         <p:spPr>
           <a:xfrm>
-            <a:off x="4389120" y="1828800"/>
-            <a:ext cx="3474720" cy="4114800"/>
+            <a:off x="6400800" y="1828800"/>
+            <a:ext cx="5212080" cy="4114800"/>
           </a:xfrm>
           <a:prstGeom prst="roundRect">
             <a:avLst/>
           </a:prstGeom>
           <a:solidFill>
-            <a:srgbClr val="F5F5F7"/>
+            <a:srgbClr val="1E293B"/>
           </a:solidFill>
-          <a:ln w="12700">
+          <a:ln w="19050">
             <a:solidFill>
-              <a:srgbClr val="DADADE"/>
+              <a:srgbClr val="6366F1"/>
             </a:solidFill>
           </a:ln>
         </p:spPr>
@@ -4269,291 +4256,30 @@
           </a:p>
         </p:txBody>
       </p:sp>
-      <p:sp>
-        <p:nvSpPr>
-          <p:cNvPr id="10" name="TextBox 9"/>
-          <p:cNvSpPr txBox="1"/>
-          <p:nvPr/>
-        </p:nvSpPr>
-        <p:spPr>
-          <a:xfrm>
-            <a:off x="4572000" y="2011680"/>
-            <a:ext cx="3108960" cy="3749040"/>
-          </a:xfrm>
-          <a:prstGeom prst="rect">
-            <a:avLst/>
-          </a:prstGeom>
-          <a:noFill/>
-        </p:spPr>
-        <p:txBody>
-          <a:bodyPr wrap="square">
-            <a:spAutoFit/>
-          </a:bodyPr>
-          <a:lstStyle/>
-          <a:p>
-            <a:pPr>
-              <a:spcAft>
-                <a:spcPts val="1200"/>
-              </a:spcAft>
-              <a:defRPr sz="1500" b="1">
-                <a:solidFill>
-                  <a:srgbClr val="0066CC"/>
-                </a:solidFill>
-                <a:latin typeface="Noto Sans KR"/>
-              </a:defRPr>
-            </a:pPr>
-            <a:r>
-              <a:t>소스코드 구조 (Tab 2)</a:t>
-            </a:r>
-          </a:p>
-          <a:p>
-            <a:pPr>
-              <a:spcAft>
-                <a:spcPts val="600"/>
-              </a:spcAft>
-              <a:defRPr sz="1100">
-                <a:solidFill>
-                  <a:srgbClr val="1D1D1F"/>
-                </a:solidFill>
-                <a:latin typeface="Noto Sans KR"/>
-              </a:defRPr>
-            </a:pPr>
-            <a:r>
-              <a:t>• 리포지토리 폴더 디렉토리 구조</a:t>
-            </a:r>
-          </a:p>
-          <a:p>
-            <a:pPr>
-              <a:spcAft>
-                <a:spcPts val="600"/>
-              </a:spcAft>
-              <a:defRPr sz="1100">
-                <a:solidFill>
-                  <a:srgbClr val="1D1D1F"/>
-                </a:solidFill>
-                <a:latin typeface="Noto Sans KR"/>
-              </a:defRPr>
-            </a:pPr>
-            <a:r>
-              <a:t>• 패키지 라이브러리 잠금 파일</a:t>
-            </a:r>
-          </a:p>
-          <a:p>
-            <a:pPr>
-              <a:spcAft>
-                <a:spcPts val="600"/>
-              </a:spcAft>
-              <a:defRPr sz="1100">
-                <a:solidFill>
-                  <a:srgbClr val="1D1D1F"/>
-                </a:solidFill>
-                <a:latin typeface="Noto Sans KR"/>
-              </a:defRPr>
-            </a:pPr>
-            <a:r>
-              <a:t>• 환경 변수 구성 방식</a:t>
-            </a:r>
-          </a:p>
-          <a:p>
-            <a:pPr>
-              <a:spcAft>
-                <a:spcPts val="600"/>
-              </a:spcAft>
-              <a:defRPr sz="1100">
-                <a:solidFill>
-                  <a:srgbClr val="1D1D1F"/>
-                </a:solidFill>
-                <a:latin typeface="Noto Sans KR"/>
-              </a:defRPr>
-            </a:pPr>
-            <a:r>
-              <a:t>• 예외처리 및 재현 가이드</a:t>
-            </a:r>
-          </a:p>
-          <a:p>
-            <a:br/>
-            <a:pPr>
-              <a:spcAft>
-                <a:spcPts val="600"/>
-              </a:spcAft>
-              <a:defRPr sz="1100">
-                <a:solidFill>
-                  <a:srgbClr val="1D1D1F"/>
-                </a:solidFill>
-                <a:latin typeface="Noto Sans KR"/>
-              </a:defRPr>
-            </a:pPr>
-            <a:r>
-              <a:t>⚠️ API Key나 내부 계정 정보 등 비밀 자격증명이 코드에 방치되어 있는지 반드시 조사합니다.</a:t>
-            </a:r>
-          </a:p>
-        </p:txBody>
-      </p:sp>
-      <p:sp>
-        <p:nvSpPr>
-          <p:cNvPr id="11" name="Rounded Rectangle 10"/>
-          <p:cNvSpPr/>
-          <p:nvPr/>
-        </p:nvSpPr>
-        <p:spPr>
-          <a:xfrm>
-            <a:off x="8229600" y="1828800"/>
-            <a:ext cx="3474720" cy="4114800"/>
-          </a:xfrm>
-          <a:prstGeom prst="roundRect">
-            <a:avLst/>
-          </a:prstGeom>
-          <a:solidFill>
-            <a:srgbClr val="FFFFFF"/>
-          </a:solidFill>
-          <a:ln w="12700">
-            <a:solidFill>
-              <a:srgbClr val="DADADE"/>
-            </a:solidFill>
-          </a:ln>
-        </p:spPr>
-        <p:style>
-          <a:lnRef idx="1">
-            <a:schemeClr val="accent1"/>
-          </a:lnRef>
-          <a:fillRef idx="3">
-            <a:schemeClr val="accent1"/>
-          </a:fillRef>
-          <a:effectRef idx="2">
-            <a:schemeClr val="accent1"/>
-          </a:effectRef>
-          <a:fontRef idx="minor">
-            <a:schemeClr val="lt1"/>
-          </a:fontRef>
-        </p:style>
-        <p:txBody>
-          <a:bodyPr rtlCol="0" anchor="ctr"/>
-          <a:lstStyle/>
-          <a:p>
-            <a:pPr algn="ctr"/>
-          </a:p>
-        </p:txBody>
-      </p:sp>
-      <p:sp>
-        <p:nvSpPr>
-          <p:cNvPr id="12" name="TextBox 11"/>
-          <p:cNvSpPr txBox="1"/>
-          <p:nvPr/>
-        </p:nvSpPr>
-        <p:spPr>
-          <a:xfrm>
-            <a:off x="8412480" y="2011680"/>
-            <a:ext cx="3108960" cy="3749040"/>
-          </a:xfrm>
-          <a:prstGeom prst="rect">
-            <a:avLst/>
-          </a:prstGeom>
-          <a:noFill/>
-        </p:spPr>
-        <p:txBody>
-          <a:bodyPr wrap="square">
-            <a:spAutoFit/>
-          </a:bodyPr>
-          <a:lstStyle/>
-          <a:p>
-            <a:pPr>
-              <a:spcAft>
-                <a:spcPts val="1200"/>
-              </a:spcAft>
-              <a:defRPr sz="1500" b="1">
-                <a:solidFill>
-                  <a:srgbClr val="1D1D1F"/>
-                </a:solidFill>
-                <a:latin typeface="Noto Sans KR"/>
-              </a:defRPr>
-            </a:pPr>
-            <a:r>
-              <a:t>시연·링크 (Tab 3)</a:t>
-            </a:r>
-          </a:p>
-          <a:p>
-            <a:pPr>
-              <a:spcAft>
-                <a:spcPts val="600"/>
-              </a:spcAft>
-              <a:defRPr sz="1100">
-                <a:solidFill>
-                  <a:srgbClr val="1D1D1F"/>
-                </a:solidFill>
-                <a:latin typeface="Noto Sans KR"/>
-              </a:defRPr>
-            </a:pPr>
-            <a:r>
-              <a:t>제출된 URL 유효성 검증:</a:t>
-            </a:r>
-          </a:p>
-          <a:p>
-            <a:pPr>
-              <a:spcAft>
-                <a:spcPts val="600"/>
-              </a:spcAft>
-              <a:defRPr sz="1100">
-                <a:solidFill>
-                  <a:srgbClr val="1D1D1F"/>
-                </a:solidFill>
-                <a:latin typeface="Noto Sans KR"/>
-              </a:defRPr>
-            </a:pPr>
-            <a:r>
-              <a:t>• 결과 보고서 PDF 링크</a:t>
-            </a:r>
-          </a:p>
-          <a:p>
-            <a:pPr>
-              <a:spcAft>
-                <a:spcPts val="600"/>
-              </a:spcAft>
-              <a:defRPr sz="1100">
-                <a:solidFill>
-                  <a:srgbClr val="1D1D1F"/>
-                </a:solidFill>
-                <a:latin typeface="Noto Sans KR"/>
-              </a:defRPr>
-            </a:pPr>
-            <a:r>
-              <a:t>• Git 저장소 링크</a:t>
-            </a:r>
-          </a:p>
-          <a:p>
-            <a:pPr>
-              <a:spcAft>
-                <a:spcPts val="600"/>
-              </a:spcAft>
-              <a:defRPr sz="1100">
-                <a:solidFill>
-                  <a:srgbClr val="1D1D1F"/>
-                </a:solidFill>
-                <a:latin typeface="Noto Sans KR"/>
-              </a:defRPr>
-            </a:pPr>
-            <a:r>
-              <a:t>• 시연 동영상 URL</a:t>
-            </a:r>
-          </a:p>
-          <a:p>
-            <a:br/>
-            <a:pPr>
-              <a:spcAft>
-                <a:spcPts val="600"/>
-              </a:spcAft>
-              <a:defRPr sz="1100">
-                <a:solidFill>
-                  <a:srgbClr val="1D1D1F"/>
-                </a:solidFill>
-                <a:latin typeface="Noto Sans KR"/>
-              </a:defRPr>
-            </a:pPr>
-            <a:r>
-              <a:t>* 권한 오류나 깨진 링크가 발생한 경우, 평가 의견란에 내용을 구체적으로 기록합니다.</a:t>
-            </a:r>
-          </a:p>
-        </p:txBody>
-      </p:sp>
+      <p:pic>
+        <p:nvPicPr>
+          <p:cNvPr id="10" name="Picture 9" descr="aica_evaluation_workspace_mockup_1784167999282.png"/>
+          <p:cNvPicPr>
+            <a:picLocks noChangeAspect="1"/>
+          </p:cNvPicPr>
+          <p:nvPr/>
+        </p:nvPicPr>
+        <p:blipFill>
+          <a:blip r:embed="rId2"/>
+          <a:stretch>
+            <a:fillRect/>
+          </a:stretch>
+        </p:blipFill>
+        <p:spPr>
+          <a:xfrm>
+            <a:off x="7086600" y="1965960"/>
+            <a:ext cx="3840480" cy="3840480"/>
+          </a:xfrm>
+          <a:prstGeom prst="rect">
+            <a:avLst/>
+          </a:prstGeom>
+        </p:spPr>
+      </p:pic>
     </p:spTree>
   </p:cSld>
   <p:clrMapOvr>
@@ -4568,7 +4294,7 @@
     <p:bg>
       <p:bgPr>
         <a:solidFill>
-          <a:srgbClr val="F5F5F7"/>
+          <a:srgbClr val="0F172A"/>
         </a:solidFill>
         <a:effectLst/>
       </p:bgPr>
@@ -4605,7 +4331,7 @@
             <a:pPr>
               <a:defRPr sz="1100" b="1">
                 <a:solidFill>
-                  <a:srgbClr val="0066CC"/>
+                  <a:srgbClr val="38BDF8"/>
                 </a:solidFill>
                 <a:latin typeface="Noto Sans KR"/>
               </a:defRPr>
@@ -4641,7 +4367,7 @@
             <a:pPr>
               <a:defRPr sz="2600" b="1">
                 <a:solidFill>
-                  <a:srgbClr val="1D1D1F"/>
+                  <a:srgbClr val="FFFFFF"/>
                 </a:solidFill>
                 <a:latin typeface="Noto Sans KR"/>
               </a:defRPr>
@@ -4667,7 +4393,7 @@
             <a:avLst/>
           </a:prstGeom>
           <a:solidFill>
-            <a:srgbClr val="DADADE"/>
+            <a:srgbClr val="334155"/>
           </a:solidFill>
           <a:ln>
             <a:noFill/>
@@ -4720,13 +4446,13 @@
             <a:pPr>
               <a:defRPr sz="900">
                 <a:solidFill>
-                  <a:srgbClr val="86868B"/>
-                </a:solidFill>
-                <a:latin typeface="Noto Sans KR"/>
-              </a:defRPr>
-            </a:pPr>
-            <a:r>
-              <a:t>AICA 자격심사 시스템 사용자 매뉴얼 · Apple Concept</a:t>
+                  <a:srgbClr val="94A3B8"/>
+                </a:solidFill>
+                <a:latin typeface="Noto Sans KR"/>
+              </a:defRPr>
+            </a:pPr>
+            <a:r>
+              <a:t>AICA 자격심사 시스템 사용자 매뉴얼 · Web App Dark Theme</a:t>
             </a:r>
           </a:p>
         </p:txBody>
@@ -4756,7 +4482,7 @@
             <a:pPr algn="r">
               <a:defRPr sz="900">
                 <a:solidFill>
-                  <a:srgbClr val="86868B"/>
+                  <a:srgbClr val="94A3B8"/>
                 </a:solidFill>
                 <a:latin typeface="Noto Sans KR"/>
               </a:defRPr>
@@ -4775,18 +4501,18 @@
         </p:nvSpPr>
         <p:spPr>
           <a:xfrm>
-            <a:off x="548640" y="1645920"/>
-            <a:ext cx="11094415" cy="777240"/>
+            <a:off x="548640" y="1828800"/>
+            <a:ext cx="5486400" cy="4114800"/>
           </a:xfrm>
           <a:prstGeom prst="roundRect">
             <a:avLst/>
           </a:prstGeom>
           <a:solidFill>
-            <a:srgbClr val="FFFFFF"/>
+            <a:srgbClr val="1E293B"/>
           </a:solidFill>
-          <a:ln>
+          <a:ln w="12700">
             <a:solidFill>
-              <a:srgbClr val="DADADE"/>
+              <a:srgbClr val="334155"/>
             </a:solidFill>
           </a:ln>
         </p:spPr>
@@ -4805,51 +4531,218 @@
           </a:fontRef>
         </p:style>
         <p:txBody>
-          <a:bodyPr rtlCol="0" anchor="ctr" wrap="square"/>
+          <a:bodyPr rtlCol="0" anchor="ctr"/>
           <a:lstStyle/>
           <a:p>
             <a:pPr algn="ctr"/>
-            <a:r>
-              <a:rPr b="1" sz="1100">
-                <a:solidFill>
-                  <a:srgbClr val="0066CC"/>
-                </a:solidFill>
-                <a:latin typeface="Noto Sans KR"/>
-              </a:rPr>
-              <a:t>  [1. 개인정보(PII)]  </a:t>
-            </a:r>
-            <a:r>
-              <a:rPr sz="1100">
-                <a:solidFill>
-                  <a:srgbClr val="1D1D1F"/>
-                </a:solidFill>
-                <a:latin typeface="Noto Sans KR"/>
-              </a:rPr>
-              <a:t>이름, 전화번호, 이메일 주소 등 고객 및 개인 정보가 마스킹되었는가?</a:t>
-            </a:r>
-          </a:p>
-        </p:txBody>
-      </p:sp>
-      <p:sp>
-        <p:nvSpPr>
-          <p:cNvPr id="8" name="Rounded Rectangle 7"/>
+          </a:p>
+        </p:txBody>
+      </p:sp>
+      <p:sp>
+        <p:nvSpPr>
+          <p:cNvPr id="8" name="TextBox 7"/>
+          <p:cNvSpPr txBox="1"/>
+          <p:nvPr/>
+        </p:nvSpPr>
+        <p:spPr>
+          <a:xfrm>
+            <a:off x="731520" y="2011680"/>
+            <a:ext cx="5120640" cy="3749040"/>
+          </a:xfrm>
+          <a:prstGeom prst="rect">
+            <a:avLst/>
+          </a:prstGeom>
+          <a:noFill/>
+        </p:spPr>
+        <p:txBody>
+          <a:bodyPr wrap="square">
+            <a:spAutoFit/>
+          </a:bodyPr>
+          <a:lstStyle/>
+          <a:p>
+            <a:pPr>
+              <a:spcAft>
+                <a:spcPts val="1200"/>
+              </a:spcAft>
+              <a:defRPr sz="1500" b="1">
+                <a:solidFill>
+                  <a:srgbClr val="FFFFFF"/>
+                </a:solidFill>
+                <a:latin typeface="Noto Sans KR"/>
+              </a:defRPr>
+            </a:pPr>
+            <a:r>
+              <a:t>5대 공통 보안성 자가진단 규칙</a:t>
+            </a:r>
+          </a:p>
+          <a:p>
+            <a:pPr>
+              <a:spcAft>
+                <a:spcPts val="600"/>
+              </a:spcAft>
+              <a:defRPr sz="1100">
+                <a:solidFill>
+                  <a:srgbClr val="94A3B8"/>
+                </a:solidFill>
+                <a:latin typeface="Noto Sans KR"/>
+              </a:defRPr>
+            </a:pPr>
+            <a:r>
+              <a:t>모든 심사의 최우선 선행 체크리스트:</a:t>
+            </a:r>
+          </a:p>
+          <a:p>
+            <a:pPr>
+              <a:spcAft>
+                <a:spcPts val="600"/>
+              </a:spcAft>
+              <a:defRPr sz="1100">
+                <a:solidFill>
+                  <a:srgbClr val="94A3B8"/>
+                </a:solidFill>
+                <a:latin typeface="Noto Sans KR"/>
+              </a:defRPr>
+            </a:pPr>
+            <a:r>
+              <a:t>• 1. 개인정보(PII): 이름, 메일주소, 연락처 등 완벽 마스킹 여부</a:t>
+            </a:r>
+          </a:p>
+          <a:p>
+            <a:pPr>
+              <a:spcAft>
+                <a:spcPts val="600"/>
+              </a:spcAft>
+              <a:defRPr sz="1100">
+                <a:solidFill>
+                  <a:srgbClr val="94A3B8"/>
+                </a:solidFill>
+                <a:latin typeface="Noto Sans KR"/>
+              </a:defRPr>
+            </a:pPr>
+            <a:r>
+              <a:t>• 2. 기밀 정보 익명화: 계약 금액, 단가, 마진율 등 기밀 제거 여부</a:t>
+            </a:r>
+          </a:p>
+          <a:p>
+            <a:pPr>
+              <a:spcAft>
+                <a:spcPts val="600"/>
+              </a:spcAft>
+              <a:defRPr sz="1100">
+                <a:solidFill>
+                  <a:srgbClr val="94A3B8"/>
+                </a:solidFill>
+                <a:latin typeface="Noto Sans KR"/>
+              </a:defRPr>
+            </a:pPr>
+            <a:r>
+              <a:t>• 3. 자격증명 제거: 소스코드 내 API Key, ID/PW 제거 여부</a:t>
+            </a:r>
+          </a:p>
+          <a:p>
+            <a:pPr>
+              <a:spcAft>
+                <a:spcPts val="600"/>
+              </a:spcAft>
+              <a:defRPr sz="1100">
+                <a:solidFill>
+                  <a:srgbClr val="94A3B8"/>
+                </a:solidFill>
+                <a:latin typeface="Noto Sans KR"/>
+              </a:defRPr>
+            </a:pPr>
+            <a:r>
+              <a:t>• 4. 보안 가이드 준수: 보안실 배포 규정 및 자가점검 여부</a:t>
+            </a:r>
+          </a:p>
+          <a:p>
+            <a:pPr>
+              <a:spcAft>
+                <a:spcPts val="600"/>
+              </a:spcAft>
+              <a:defRPr sz="1100">
+                <a:solidFill>
+                  <a:srgbClr val="94A3B8"/>
+                </a:solidFill>
+                <a:latin typeface="Noto Sans KR"/>
+              </a:defRPr>
+            </a:pPr>
+            <a:r>
+              <a:t>• 5. 유출 위반 차단: 타 부서 및 망 분리 활용 시 유출 위험 제거 여부</a:t>
+            </a:r>
+          </a:p>
+          <a:p>
+            <a:br/>
+            <a:pPr>
+              <a:spcAft>
+                <a:spcPts val="600"/>
+              </a:spcAft>
+              <a:defRPr sz="1100">
+                <a:solidFill>
+                  <a:srgbClr val="94A3B8"/>
+                </a:solidFill>
+                <a:latin typeface="Noto Sans KR"/>
+              </a:defRPr>
+            </a:pPr>
+            <a:r>
+              <a:t>⚠️ Red Flag 경고 연동:</a:t>
+            </a:r>
+          </a:p>
+          <a:p>
+            <a:pPr>
+              <a:spcAft>
+                <a:spcPts val="600"/>
+              </a:spcAft>
+              <a:defRPr sz="1100">
+                <a:solidFill>
+                  <a:srgbClr val="94A3B8"/>
+                </a:solidFill>
+                <a:latin typeface="Noto Sans KR"/>
+              </a:defRPr>
+            </a:pPr>
+            <a:r>
+              <a:t>• 하나라도 미준수 시 '보안 주의 알림'이 대시보드에 연동되며, 중대한 자격증명 노출은 즉시 불합격 처리 대상이 됩니다.</a:t>
+            </a:r>
+          </a:p>
+          <a:p>
+            <a:br/>
+            <a:pPr>
+              <a:spcAft>
+                <a:spcPts val="600"/>
+              </a:spcAft>
+              <a:defRPr sz="1100">
+                <a:solidFill>
+                  <a:srgbClr val="94A3B8"/>
+                </a:solidFill>
+                <a:latin typeface="Noto Sans KR"/>
+              </a:defRPr>
+            </a:pPr>
+            <a:r>
+              <a:t>오른쪽 화면: 실제 채점 페이지 좌측 하단 보안 체크리스트 영역</a:t>
+            </a:r>
+          </a:p>
+        </p:txBody>
+      </p:sp>
+      <p:sp>
+        <p:nvSpPr>
+          <p:cNvPr id="9" name="Rounded Rectangle 8"/>
           <p:cNvSpPr/>
           <p:nvPr/>
         </p:nvSpPr>
         <p:spPr>
           <a:xfrm>
-            <a:off x="548640" y="2514600"/>
-            <a:ext cx="11094415" cy="777240"/>
+            <a:off x="6400800" y="1828800"/>
+            <a:ext cx="5212080" cy="4114800"/>
           </a:xfrm>
           <a:prstGeom prst="roundRect">
             <a:avLst/>
           </a:prstGeom>
           <a:solidFill>
-            <a:srgbClr val="FFFFFF"/>
+            <a:srgbClr val="1E293B"/>
           </a:solidFill>
-          <a:ln>
+          <a:ln w="19050">
             <a:solidFill>
-              <a:srgbClr val="DADADE"/>
+              <a:srgbClr val="6366F1"/>
             </a:solidFill>
           </a:ln>
         </p:spPr>
@@ -4868,256 +4761,37 @@
           </a:fontRef>
         </p:style>
         <p:txBody>
-          <a:bodyPr rtlCol="0" anchor="ctr" wrap="square"/>
+          <a:bodyPr rtlCol="0" anchor="ctr"/>
           <a:lstStyle/>
           <a:p>
             <a:pPr algn="ctr"/>
-            <a:r>
-              <a:rPr b="1" sz="1100">
-                <a:solidFill>
-                  <a:srgbClr val="0066CC"/>
-                </a:solidFill>
-                <a:latin typeface="Noto Sans KR"/>
-              </a:rPr>
-              <a:t>  [2. 기밀 정보 익명화]  </a:t>
-            </a:r>
-            <a:r>
-              <a:rPr sz="1100">
-                <a:solidFill>
-                  <a:srgbClr val="1D1D1F"/>
-                </a:solidFill>
-                <a:latin typeface="Noto Sans KR"/>
-              </a:rPr>
-              <a:t>계약 금액, 단가, 마진율, 미공개 코드명 및 사내 기밀 정보가 익명화되었는가?</a:t>
-            </a:r>
-          </a:p>
-        </p:txBody>
-      </p:sp>
-      <p:sp>
-        <p:nvSpPr>
-          <p:cNvPr id="9" name="Rounded Rectangle 8"/>
-          <p:cNvSpPr/>
-          <p:nvPr/>
-        </p:nvSpPr>
-        <p:spPr>
-          <a:xfrm>
-            <a:off x="548640" y="3383280"/>
-            <a:ext cx="11094415" cy="777240"/>
-          </a:xfrm>
-          <a:prstGeom prst="roundRect">
-            <a:avLst/>
-          </a:prstGeom>
-          <a:solidFill>
-            <a:srgbClr val="FFFFFF"/>
-          </a:solidFill>
-          <a:ln>
-            <a:solidFill>
-              <a:srgbClr val="DADADE"/>
-            </a:solidFill>
-          </a:ln>
-        </p:spPr>
-        <p:style>
-          <a:lnRef idx="1">
-            <a:schemeClr val="accent1"/>
-          </a:lnRef>
-          <a:fillRef idx="3">
-            <a:schemeClr val="accent1"/>
-          </a:fillRef>
-          <a:effectRef idx="2">
-            <a:schemeClr val="accent1"/>
-          </a:effectRef>
-          <a:fontRef idx="minor">
-            <a:schemeClr val="lt1"/>
-          </a:fontRef>
-        </p:style>
-        <p:txBody>
-          <a:bodyPr rtlCol="0" anchor="ctr" wrap="square"/>
-          <a:lstStyle/>
-          <a:p>
-            <a:pPr algn="ctr"/>
-            <a:r>
-              <a:rPr b="1" sz="1100">
-                <a:solidFill>
-                  <a:srgbClr val="0066CC"/>
-                </a:solidFill>
-                <a:latin typeface="Noto Sans KR"/>
-              </a:rPr>
-              <a:t>  [3. 접속 자격증명 제거]  </a:t>
-            </a:r>
-            <a:r>
-              <a:rPr sz="1100">
-                <a:solidFill>
-                  <a:srgbClr val="1D1D1F"/>
-                </a:solidFill>
-                <a:latin typeface="Noto Sans KR"/>
-              </a:rPr>
-              <a:t>API Key, 서비스 계정 Key, DB 접속 정보(ID/PW)가 소스코드 및 문서에서 완벽히 제거되었는가?</a:t>
-            </a:r>
-          </a:p>
-        </p:txBody>
-      </p:sp>
-      <p:sp>
-        <p:nvSpPr>
-          <p:cNvPr id="10" name="Rounded Rectangle 9"/>
-          <p:cNvSpPr/>
-          <p:nvPr/>
-        </p:nvSpPr>
-        <p:spPr>
-          <a:xfrm>
-            <a:off x="548640" y="4251959"/>
-            <a:ext cx="11094415" cy="777240"/>
-          </a:xfrm>
-          <a:prstGeom prst="roundRect">
-            <a:avLst/>
-          </a:prstGeom>
-          <a:solidFill>
-            <a:srgbClr val="FFFFFF"/>
-          </a:solidFill>
-          <a:ln>
-            <a:solidFill>
-              <a:srgbClr val="DADADE"/>
-            </a:solidFill>
-          </a:ln>
-        </p:spPr>
-        <p:style>
-          <a:lnRef idx="1">
-            <a:schemeClr val="accent1"/>
-          </a:lnRef>
-          <a:fillRef idx="3">
-            <a:schemeClr val="accent1"/>
-          </a:fillRef>
-          <a:effectRef idx="2">
-            <a:schemeClr val="accent1"/>
-          </a:effectRef>
-          <a:fontRef idx="minor">
-            <a:schemeClr val="lt1"/>
-          </a:fontRef>
-        </p:style>
-        <p:txBody>
-          <a:bodyPr rtlCol="0" anchor="ctr" wrap="square"/>
-          <a:lstStyle/>
-          <a:p>
-            <a:pPr algn="ctr"/>
-            <a:r>
-              <a:rPr b="1" sz="1100">
-                <a:solidFill>
-                  <a:srgbClr val="0066CC"/>
-                </a:solidFill>
-                <a:latin typeface="Noto Sans KR"/>
-              </a:rPr>
-              <a:t>  [4. 사내 보안 가이드라인 준수]  </a:t>
-            </a:r>
-            <a:r>
-              <a:rPr sz="1100">
-                <a:solidFill>
-                  <a:srgbClr val="1D1D1F"/>
-                </a:solidFill>
-                <a:latin typeface="Noto Sans KR"/>
-              </a:rPr>
-              <a:t>보안 부서 배포 가이드라인 및 개발 보안 자가점검표 기준을 성실히 준수했는가?</a:t>
-            </a:r>
-          </a:p>
-        </p:txBody>
-      </p:sp>
-      <p:sp>
-        <p:nvSpPr>
-          <p:cNvPr id="11" name="Rounded Rectangle 10"/>
-          <p:cNvSpPr/>
-          <p:nvPr/>
-        </p:nvSpPr>
-        <p:spPr>
-          <a:xfrm>
-            <a:off x="548640" y="5120640"/>
-            <a:ext cx="11094415" cy="777240"/>
-          </a:xfrm>
-          <a:prstGeom prst="roundRect">
-            <a:avLst/>
-          </a:prstGeom>
-          <a:solidFill>
-            <a:srgbClr val="FFFFFF"/>
-          </a:solidFill>
-          <a:ln>
-            <a:solidFill>
-              <a:srgbClr val="DADADE"/>
-            </a:solidFill>
-          </a:ln>
-        </p:spPr>
-        <p:style>
-          <a:lnRef idx="1">
-            <a:schemeClr val="accent1"/>
-          </a:lnRef>
-          <a:fillRef idx="3">
-            <a:schemeClr val="accent1"/>
-          </a:fillRef>
-          <a:effectRef idx="2">
-            <a:schemeClr val="accent1"/>
-          </a:effectRef>
-          <a:fontRef idx="minor">
-            <a:schemeClr val="lt1"/>
-          </a:fontRef>
-        </p:style>
-        <p:txBody>
-          <a:bodyPr rtlCol="0" anchor="ctr" wrap="square"/>
-          <a:lstStyle/>
-          <a:p>
-            <a:pPr algn="ctr"/>
-            <a:r>
-              <a:rPr b="1" sz="1100">
-                <a:solidFill>
-                  <a:srgbClr val="0066CC"/>
-                </a:solidFill>
-                <a:latin typeface="Noto Sans KR"/>
-              </a:rPr>
-              <a:t>  [5. 유출 방지 및 연동 안정성]  </a:t>
-            </a:r>
-            <a:r>
-              <a:rPr sz="1100">
-                <a:solidFill>
-                  <a:srgbClr val="1D1D1F"/>
-                </a:solidFill>
-                <a:latin typeface="Noto Sans KR"/>
-              </a:rPr>
-              <a:t>타 부서 및 망 분리 환경 등 확장 사용 시 기밀 유출 위험이 없는가?</a:t>
-            </a:r>
-          </a:p>
-        </p:txBody>
-      </p:sp>
-      <p:sp>
-        <p:nvSpPr>
-          <p:cNvPr id="12" name="TextBox 11"/>
-          <p:cNvSpPr txBox="1"/>
-          <p:nvPr/>
-        </p:nvSpPr>
-        <p:spPr>
-          <a:xfrm>
-            <a:off x="548640" y="5943600"/>
-            <a:ext cx="10972800" cy="457200"/>
-          </a:xfrm>
-          <a:prstGeom prst="rect">
-            <a:avLst/>
-          </a:prstGeom>
-          <a:noFill/>
-        </p:spPr>
-        <p:txBody>
-          <a:bodyPr wrap="none">
-            <a:spAutoFit/>
-          </a:bodyPr>
-          <a:lstStyle/>
-          <a:p>
-            <a:pPr>
-              <a:defRPr sz="1100" b="1">
-                <a:solidFill>
-                  <a:srgbClr val="FF453A"/>
-                </a:solidFill>
-                <a:latin typeface="Noto Sans KR"/>
-              </a:defRPr>
-            </a:pPr>
-            <a:r>
-              <a:t>⚠️ 중요: 중대한 보안 위반 노출(API Key 방치 등)은 단순 감점이 아닌 불합격 결격사유에 해당합니다.</a:t>
-            </a:r>
-          </a:p>
-        </p:txBody>
-      </p:sp>
+          </a:p>
+        </p:txBody>
+      </p:sp>
+      <p:pic>
+        <p:nvPicPr>
+          <p:cNvPr id="10" name="Picture 9" descr="media__1784176902473.png"/>
+          <p:cNvPicPr>
+            <a:picLocks noChangeAspect="1"/>
+          </p:cNvPicPr>
+          <p:nvPr/>
+        </p:nvPicPr>
+        <p:blipFill>
+          <a:blip r:embed="rId2"/>
+          <a:stretch>
+            <a:fillRect/>
+          </a:stretch>
+        </p:blipFill>
+        <p:spPr>
+          <a:xfrm>
+            <a:off x="6814049" y="1965960"/>
+            <a:ext cx="4385580" cy="3840480"/>
+          </a:xfrm>
+          <a:prstGeom prst="rect">
+            <a:avLst/>
+          </a:prstGeom>
+        </p:spPr>
+      </p:pic>
     </p:spTree>
   </p:cSld>
   <p:clrMapOvr>
@@ -5132,7 +4806,7 @@
     <p:bg>
       <p:bgPr>
         <a:solidFill>
-          <a:srgbClr val="F5F5F7"/>
+          <a:srgbClr val="0F172A"/>
         </a:solidFill>
         <a:effectLst/>
       </p:bgPr>
@@ -5169,7 +4843,7 @@
             <a:pPr>
               <a:defRPr sz="1100" b="1">
                 <a:solidFill>
-                  <a:srgbClr val="0066CC"/>
+                  <a:srgbClr val="38BDF8"/>
                 </a:solidFill>
                 <a:latin typeface="Noto Sans KR"/>
               </a:defRPr>
@@ -5205,7 +4879,7 @@
             <a:pPr>
               <a:defRPr sz="2600" b="1">
                 <a:solidFill>
-                  <a:srgbClr val="1D1D1F"/>
+                  <a:srgbClr val="FFFFFF"/>
                 </a:solidFill>
                 <a:latin typeface="Noto Sans KR"/>
               </a:defRPr>
@@ -5231,7 +4905,7 @@
             <a:avLst/>
           </a:prstGeom>
           <a:solidFill>
-            <a:srgbClr val="DADADE"/>
+            <a:srgbClr val="334155"/>
           </a:solidFill>
           <a:ln>
             <a:noFill/>
@@ -5284,13 +4958,13 @@
             <a:pPr>
               <a:defRPr sz="900">
                 <a:solidFill>
-                  <a:srgbClr val="86868B"/>
-                </a:solidFill>
-                <a:latin typeface="Noto Sans KR"/>
-              </a:defRPr>
-            </a:pPr>
-            <a:r>
-              <a:t>AICA 자격심사 시스템 사용자 매뉴얼 · Apple Concept</a:t>
+                  <a:srgbClr val="94A3B8"/>
+                </a:solidFill>
+                <a:latin typeface="Noto Sans KR"/>
+              </a:defRPr>
+            </a:pPr>
+            <a:r>
+              <a:t>AICA 자격심사 시스템 사용자 매뉴얼 · Web App Dark Theme</a:t>
             </a:r>
           </a:p>
         </p:txBody>
@@ -5320,7 +4994,7 @@
             <a:pPr algn="r">
               <a:defRPr sz="900">
                 <a:solidFill>
-                  <a:srgbClr val="86868B"/>
+                  <a:srgbClr val="94A3B8"/>
                 </a:solidFill>
                 <a:latin typeface="Noto Sans KR"/>
               </a:defRPr>
@@ -5340,17 +5014,17 @@
         <p:spPr>
           <a:xfrm>
             <a:off x="548640" y="1828800"/>
-            <a:ext cx="5303520" cy="4114800"/>
+            <a:ext cx="5486400" cy="4114800"/>
           </a:xfrm>
           <a:prstGeom prst="roundRect">
             <a:avLst/>
           </a:prstGeom>
           <a:solidFill>
-            <a:srgbClr val="F5F5F7"/>
+            <a:srgbClr val="1E293B"/>
           </a:solidFill>
           <a:ln w="12700">
             <a:solidFill>
-              <a:srgbClr val="DADADE"/>
+              <a:srgbClr val="334155"/>
             </a:solidFill>
           </a:ln>
         </p:spPr>
@@ -5385,7 +5059,7 @@
         <p:spPr>
           <a:xfrm>
             <a:off x="731520" y="2011680"/>
-            <a:ext cx="4937760" cy="3749040"/>
+            <a:ext cx="5120640" cy="3749040"/>
           </a:xfrm>
           <a:prstGeom prst="rect">
             <a:avLst/>
@@ -5404,29 +5078,157 @@
               </a:spcAft>
               <a:defRPr sz="1500" b="1">
                 <a:solidFill>
-                  <a:srgbClr val="0066CC"/>
-                </a:solidFill>
-                <a:latin typeface="Noto Sans KR"/>
-              </a:defRPr>
-            </a:pPr>
-            <a:r>
-              <a:t>Level 3 · AI Champion</a:t>
-            </a:r>
-          </a:p>
-          <a:p>
-            <a:pPr>
-              <a:spcAft>
-                <a:spcPts val="600"/>
-              </a:spcAft>
-              <a:defRPr sz="1100">
-                <a:solidFill>
-                  <a:srgbClr val="1D1D1F"/>
-                </a:solidFill>
-                <a:latin typeface="Noto Sans KR"/>
-              </a:defRPr>
-            </a:pPr>
-            <a:r>
-              <a:t>현업 적용성과 업무 보급 가능성을 중심으로 검증합니다.</a:t>
+                  <a:srgbClr val="FFFFFF"/>
+                </a:solidFill>
+                <a:latin typeface="Noto Sans KR"/>
+              </a:defRPr>
+            </a:pPr>
+            <a:r>
+              <a:t>심사 자격 레벨별 가중치 및 배점 척도</a:t>
+            </a:r>
+          </a:p>
+          <a:p>
+            <a:pPr>
+              <a:spcAft>
+                <a:spcPts val="600"/>
+              </a:spcAft>
+              <a:defRPr sz="1100">
+                <a:solidFill>
+                  <a:srgbClr val="94A3B8"/>
+                </a:solidFill>
+                <a:latin typeface="Noto Sans KR"/>
+              </a:defRPr>
+            </a:pPr>
+            <a:r>
+              <a:t>자격 등급별 평가 주안점 및 비율:</a:t>
+            </a:r>
+          </a:p>
+          <a:p>
+            <a:pPr>
+              <a:spcAft>
+                <a:spcPts val="600"/>
+              </a:spcAft>
+              <a:defRPr sz="1100">
+                <a:solidFill>
+                  <a:srgbClr val="94A3B8"/>
+                </a:solidFill>
+                <a:latin typeface="Noto Sans KR"/>
+              </a:defRPr>
+            </a:pPr>
+            <a:r>
+              <a:t>• Level 3 (AI Champion): 현업 적용성 및 기여 효과 검증</a:t>
+            </a:r>
+          </a:p>
+          <a:p>
+            <a:pPr>
+              <a:spcAft>
+                <a:spcPts val="600"/>
+              </a:spcAft>
+              <a:defRPr sz="1100">
+                <a:solidFill>
+                  <a:srgbClr val="94A3B8"/>
+                </a:solidFill>
+                <a:latin typeface="Noto Sans KR"/>
+              </a:defRPr>
+            </a:pPr>
+            <a:r>
+              <a:t>   - 문제 해결 난이도 (30%)</a:t>
+            </a:r>
+          </a:p>
+          <a:p>
+            <a:pPr>
+              <a:spcAft>
+                <a:spcPts val="600"/>
+              </a:spcAft>
+              <a:defRPr sz="1100">
+                <a:solidFill>
+                  <a:srgbClr val="94A3B8"/>
+                </a:solidFill>
+                <a:latin typeface="Noto Sans KR"/>
+              </a:defRPr>
+            </a:pPr>
+            <a:r>
+              <a:t>   - 구현 완성도 (40%)</a:t>
+            </a:r>
+          </a:p>
+          <a:p>
+            <a:pPr>
+              <a:spcAft>
+                <a:spcPts val="600"/>
+              </a:spcAft>
+              <a:defRPr sz="1100">
+                <a:solidFill>
+                  <a:srgbClr val="94A3B8"/>
+                </a:solidFill>
+                <a:latin typeface="Noto Sans KR"/>
+              </a:defRPr>
+            </a:pPr>
+            <a:r>
+              <a:t>   - 확산 및 자산화 (30%)</a:t>
+            </a:r>
+          </a:p>
+          <a:p>
+            <a:pPr>
+              <a:spcAft>
+                <a:spcPts val="600"/>
+              </a:spcAft>
+              <a:defRPr sz="1100">
+                <a:solidFill>
+                  <a:srgbClr val="94A3B8"/>
+                </a:solidFill>
+                <a:latin typeface="Noto Sans KR"/>
+              </a:defRPr>
+            </a:pPr>
+            <a:r>
+              <a:t>• Level 4 (AI Specialist): 심화 기술력 및 보안 통제 깊이 검증</a:t>
+            </a:r>
+          </a:p>
+          <a:p>
+            <a:pPr>
+              <a:spcAft>
+                <a:spcPts val="600"/>
+              </a:spcAft>
+              <a:defRPr sz="1100">
+                <a:solidFill>
+                  <a:srgbClr val="94A3B8"/>
+                </a:solidFill>
+                <a:latin typeface="Noto Sans KR"/>
+              </a:defRPr>
+            </a:pPr>
+            <a:r>
+              <a:t>   - 기술적 구현력 (40%)</a:t>
+            </a:r>
+          </a:p>
+          <a:p>
+            <a:pPr>
+              <a:spcAft>
+                <a:spcPts val="600"/>
+              </a:spcAft>
+              <a:defRPr sz="1100">
+                <a:solidFill>
+                  <a:srgbClr val="94A3B8"/>
+                </a:solidFill>
+                <a:latin typeface="Noto Sans KR"/>
+              </a:defRPr>
+            </a:pPr>
+            <a:r>
+              <a:t>   - 데이터 활용 및 보안성 (30%)</a:t>
+            </a:r>
+          </a:p>
+          <a:p>
+            <a:pPr>
+              <a:spcAft>
+                <a:spcPts val="600"/>
+              </a:spcAft>
+              <a:defRPr sz="1100">
+                <a:solidFill>
+                  <a:srgbClr val="94A3B8"/>
+                </a:solidFill>
+                <a:latin typeface="Noto Sans KR"/>
+              </a:defRPr>
+            </a:pPr>
+            <a:r>
+              <a:t>   - 비즈니스 기여도 (30%)</a:t>
             </a:r>
           </a:p>
           <a:p>
@@ -5437,62 +5239,13 @@
               </a:spcAft>
               <a:defRPr sz="1100">
                 <a:solidFill>
-                  <a:srgbClr val="1D1D1F"/>
-                </a:solidFill>
-                <a:latin typeface="Noto Sans KR"/>
-              </a:defRPr>
-            </a:pPr>
-            <a:r>
-              <a:t>• 문제 해결 난이도 (가중치 30%)</a:t>
-            </a:r>
-          </a:p>
-          <a:p>
-            <a:pPr>
-              <a:spcAft>
-                <a:spcPts val="600"/>
-              </a:spcAft>
-              <a:defRPr sz="1100">
-                <a:solidFill>
-                  <a:srgbClr val="1D1D1F"/>
-                </a:solidFill>
-                <a:latin typeface="Noto Sans KR"/>
-              </a:defRPr>
-            </a:pPr>
-            <a:r>
-              <a:t>• 구현 완성도 (가중치 40%)</a:t>
-            </a:r>
-          </a:p>
-          <a:p>
-            <a:pPr>
-              <a:spcAft>
-                <a:spcPts val="600"/>
-              </a:spcAft>
-              <a:defRPr sz="1100">
-                <a:solidFill>
-                  <a:srgbClr val="1D1D1F"/>
-                </a:solidFill>
-                <a:latin typeface="Noto Sans KR"/>
-              </a:defRPr>
-            </a:pPr>
-            <a:r>
-              <a:t>• 확산 및 자산화 가능성 (가중치 30%)</a:t>
-            </a:r>
-          </a:p>
-          <a:p>
-            <a:br/>
-            <a:pPr>
-              <a:spcAft>
-                <a:spcPts val="600"/>
-              </a:spcAft>
-              <a:defRPr sz="1100">
-                <a:solidFill>
-                  <a:srgbClr val="1D1D1F"/>
-                </a:solidFill>
-                <a:latin typeface="Noto Sans KR"/>
-              </a:defRPr>
-            </a:pPr>
-            <a:r>
-              <a:t>💡 현업 현장의 수동 공수 감소 가치와 6개 관계사 전파 확장성을 중점적으로 봅니다.</a:t>
+                  <a:srgbClr val="94A3B8"/>
+                </a:solidFill>
+                <a:latin typeface="Noto Sans KR"/>
+              </a:defRPr>
+            </a:pPr>
+            <a:r>
+              <a:t>오른쪽 화면: 실제 채점 페이지 우측의 루브릭 점수 선택 라디오 영역</a:t>
             </a:r>
           </a:p>
         </p:txBody>
@@ -5505,18 +5258,18 @@
         </p:nvSpPr>
         <p:spPr>
           <a:xfrm>
-            <a:off x="6309360" y="1828800"/>
-            <a:ext cx="5303520" cy="4114800"/>
+            <a:off x="6400800" y="1828800"/>
+            <a:ext cx="5212080" cy="4114800"/>
           </a:xfrm>
           <a:prstGeom prst="roundRect">
             <a:avLst/>
           </a:prstGeom>
           <a:solidFill>
-            <a:srgbClr val="FFFFFF"/>
+            <a:srgbClr val="1E293B"/>
           </a:solidFill>
-          <a:ln w="12700">
+          <a:ln w="19050">
             <a:solidFill>
-              <a:srgbClr val="DADADE"/>
+              <a:srgbClr val="6366F1"/>
             </a:solidFill>
           </a:ln>
         </p:spPr>
@@ -5542,127 +5295,30 @@
           </a:p>
         </p:txBody>
       </p:sp>
-      <p:sp>
-        <p:nvSpPr>
-          <p:cNvPr id="10" name="TextBox 9"/>
-          <p:cNvSpPr txBox="1"/>
-          <p:nvPr/>
-        </p:nvSpPr>
-        <p:spPr>
-          <a:xfrm>
-            <a:off x="6492240" y="2011680"/>
-            <a:ext cx="4937760" cy="3749040"/>
-          </a:xfrm>
-          <a:prstGeom prst="rect">
-            <a:avLst/>
-          </a:prstGeom>
-          <a:noFill/>
-        </p:spPr>
-        <p:txBody>
-          <a:bodyPr wrap="square">
-            <a:spAutoFit/>
-          </a:bodyPr>
-          <a:lstStyle/>
-          <a:p>
-            <a:pPr>
-              <a:spcAft>
-                <a:spcPts val="1200"/>
-              </a:spcAft>
-              <a:defRPr sz="1500" b="1">
-                <a:solidFill>
-                  <a:srgbClr val="1D1D1F"/>
-                </a:solidFill>
-                <a:latin typeface="Noto Sans KR"/>
-              </a:defRPr>
-            </a:pPr>
-            <a:r>
-              <a:t>Level 4 · AI Specialist</a:t>
-            </a:r>
-          </a:p>
-          <a:p>
-            <a:pPr>
-              <a:spcAft>
-                <a:spcPts val="600"/>
-              </a:spcAft>
-              <a:defRPr sz="1100">
-                <a:solidFill>
-                  <a:srgbClr val="1D1D1F"/>
-                </a:solidFill>
-                <a:latin typeface="Noto Sans KR"/>
-              </a:defRPr>
-            </a:pPr>
-            <a:r>
-              <a:t>고급 구현 기술력과 데이터·보안 통제의 깊이를 평가합니다.</a:t>
-            </a:r>
-          </a:p>
-          <a:p>
-            <a:br/>
-            <a:pPr>
-              <a:spcAft>
-                <a:spcPts val="600"/>
-              </a:spcAft>
-              <a:defRPr sz="1100">
-                <a:solidFill>
-                  <a:srgbClr val="1D1D1F"/>
-                </a:solidFill>
-                <a:latin typeface="Noto Sans KR"/>
-              </a:defRPr>
-            </a:pPr>
-            <a:r>
-              <a:t>• 기술적 구현력 (가중치 40%)</a:t>
-            </a:r>
-          </a:p>
-          <a:p>
-            <a:pPr>
-              <a:spcAft>
-                <a:spcPts val="600"/>
-              </a:spcAft>
-              <a:defRPr sz="1100">
-                <a:solidFill>
-                  <a:srgbClr val="1D1D1F"/>
-                </a:solidFill>
-                <a:latin typeface="Noto Sans KR"/>
-              </a:defRPr>
-            </a:pPr>
-            <a:r>
-              <a:t>• 데이터 활용 및 보안성 (가중치 30%)</a:t>
-            </a:r>
-          </a:p>
-          <a:p>
-            <a:pPr>
-              <a:spcAft>
-                <a:spcPts val="600"/>
-              </a:spcAft>
-              <a:defRPr sz="1100">
-                <a:solidFill>
-                  <a:srgbClr val="1D1D1F"/>
-                </a:solidFill>
-                <a:latin typeface="Noto Sans KR"/>
-              </a:defRPr>
-            </a:pPr>
-            <a:r>
-              <a:t>• 비즈니스 기여도 (가중치 30%)</a:t>
-            </a:r>
-          </a:p>
-          <a:p>
-            <a:br/>
-            <a:pPr>
-              <a:spcAft>
-                <a:spcPts val="600"/>
-              </a:spcAft>
-              <a:defRPr sz="1100">
-                <a:solidFill>
-                  <a:srgbClr val="1D1D1F"/>
-                </a:solidFill>
-                <a:latin typeface="Noto Sans KR"/>
-              </a:defRPr>
-            </a:pPr>
-            <a:r>
-              <a:t>💡 LLM, RAG 등 심화 AI 기능 구현도 및 오차 제어 정교함, 명확한 정량적 효과(ROI)를 평가합니다.</a:t>
-            </a:r>
-          </a:p>
-        </p:txBody>
-      </p:sp>
+      <p:pic>
+        <p:nvPicPr>
+          <p:cNvPr id="10" name="Picture 9" descr="media__1784176902473.png"/>
+          <p:cNvPicPr>
+            <a:picLocks noChangeAspect="1"/>
+          </p:cNvPicPr>
+          <p:nvPr/>
+        </p:nvPicPr>
+        <p:blipFill>
+          <a:blip r:embed="rId2"/>
+          <a:stretch>
+            <a:fillRect/>
+          </a:stretch>
+        </p:blipFill>
+        <p:spPr>
+          <a:xfrm>
+            <a:off x="6814049" y="1965960"/>
+            <a:ext cx="4385580" cy="3840480"/>
+          </a:xfrm>
+          <a:prstGeom prst="rect">
+            <a:avLst/>
+          </a:prstGeom>
+        </p:spPr>
+      </p:pic>
     </p:spTree>
   </p:cSld>
   <p:clrMapOvr>
@@ -5677,7 +5333,7 @@
     <p:bg>
       <p:bgPr>
         <a:solidFill>
-          <a:srgbClr val="F5F5F7"/>
+          <a:srgbClr val="0F172A"/>
         </a:solidFill>
         <a:effectLst/>
       </p:bgPr>
@@ -5714,7 +5370,7 @@
             <a:pPr>
               <a:defRPr sz="1100" b="1">
                 <a:solidFill>
-                  <a:srgbClr val="0066CC"/>
+                  <a:srgbClr val="38BDF8"/>
                 </a:solidFill>
                 <a:latin typeface="Noto Sans KR"/>
               </a:defRPr>
@@ -5750,7 +5406,7 @@
             <a:pPr>
               <a:defRPr sz="2600" b="1">
                 <a:solidFill>
-                  <a:srgbClr val="1D1D1F"/>
+                  <a:srgbClr val="FFFFFF"/>
                 </a:solidFill>
                 <a:latin typeface="Noto Sans KR"/>
               </a:defRPr>
@@ -5776,7 +5432,7 @@
             <a:avLst/>
           </a:prstGeom>
           <a:solidFill>
-            <a:srgbClr val="DADADE"/>
+            <a:srgbClr val="334155"/>
           </a:solidFill>
           <a:ln>
             <a:noFill/>
@@ -5829,13 +5485,13 @@
             <a:pPr>
               <a:defRPr sz="900">
                 <a:solidFill>
-                  <a:srgbClr val="86868B"/>
-                </a:solidFill>
-                <a:latin typeface="Noto Sans KR"/>
-              </a:defRPr>
-            </a:pPr>
-            <a:r>
-              <a:t>AICA 자격심사 시스템 사용자 매뉴얼 · Apple Concept</a:t>
+                  <a:srgbClr val="94A3B8"/>
+                </a:solidFill>
+                <a:latin typeface="Noto Sans KR"/>
+              </a:defRPr>
+            </a:pPr>
+            <a:r>
+              <a:t>AICA 자격심사 시스템 사용자 매뉴얼 · Web App Dark Theme</a:t>
             </a:r>
           </a:p>
         </p:txBody>
@@ -5865,7 +5521,7 @@
             <a:pPr algn="r">
               <a:defRPr sz="900">
                 <a:solidFill>
-                  <a:srgbClr val="86868B"/>
+                  <a:srgbClr val="94A3B8"/>
                 </a:solidFill>
                 <a:latin typeface="Noto Sans KR"/>
               </a:defRPr>
@@ -5891,11 +5547,11 @@
             <a:avLst/>
           </a:prstGeom>
           <a:solidFill>
-            <a:srgbClr val="FFFFFF"/>
+            <a:srgbClr val="1E293B"/>
           </a:solidFill>
           <a:ln w="12700">
             <a:solidFill>
-              <a:srgbClr val="DADADE"/>
+              <a:srgbClr val="334155"/>
             </a:solidFill>
           </a:ln>
         </p:spPr>
@@ -5949,77 +5605,61 @@
               </a:spcAft>
               <a:defRPr sz="1500" b="1">
                 <a:solidFill>
-                  <a:srgbClr val="1D1D1F"/>
-                </a:solidFill>
-                <a:latin typeface="Noto Sans KR"/>
-              </a:defRPr>
-            </a:pPr>
-            <a:r>
-              <a:t>루브릭 채점 및 질문은행 활용</a:t>
-            </a:r>
-          </a:p>
-          <a:p>
-            <a:pPr>
-              <a:spcAft>
-                <a:spcPts val="600"/>
-              </a:spcAft>
-              <a:defRPr sz="1100">
-                <a:solidFill>
-                  <a:srgbClr val="1D1D1F"/>
-                </a:solidFill>
-                <a:latin typeface="Noto Sans KR"/>
-              </a:defRPr>
-            </a:pPr>
-            <a:r>
-              <a:t>루브릭 평가:</a:t>
-            </a:r>
-          </a:p>
-          <a:p>
-            <a:pPr>
-              <a:spcAft>
-                <a:spcPts val="600"/>
-              </a:spcAft>
-              <a:defRPr sz="1100">
-                <a:solidFill>
-                  <a:srgbClr val="1D1D1F"/>
-                </a:solidFill>
-                <a:latin typeface="Noto Sans KR"/>
-              </a:defRPr>
-            </a:pPr>
-            <a:r>
-              <a:t>• 라디오 카드를 클릭하여 5단계 중 평가 수준을 선택</a:t>
-            </a:r>
-          </a:p>
-          <a:p>
-            <a:pPr>
-              <a:spcAft>
-                <a:spcPts val="600"/>
-              </a:spcAft>
-              <a:defRPr sz="1100">
-                <a:solidFill>
-                  <a:srgbClr val="1D1D1F"/>
-                </a:solidFill>
-                <a:latin typeface="Noto Sans KR"/>
-              </a:defRPr>
-            </a:pPr>
-            <a:r>
-              <a:t>• 각 채점 항목별 정성적 의견 필수 기재</a:t>
-            </a:r>
-          </a:p>
-          <a:p>
-            <a:pPr>
-              <a:spcAft>
-                <a:spcPts val="600"/>
-              </a:spcAft>
-              <a:defRPr sz="1100">
-                <a:solidFill>
-                  <a:srgbClr val="1D1D1F"/>
-                </a:solidFill>
-                <a:latin typeface="Noto Sans KR"/>
-              </a:defRPr>
-            </a:pPr>
-            <a:r>
-              <a:t>• 편차 모니터링: 패널 위원 간 점수 차이가 15점 이상 시 조율 알림 노출 -&gt; 합의 조율 의견 추가 작성</a:t>
+                  <a:srgbClr val="FFFFFF"/>
+                </a:solidFill>
+                <a:latin typeface="Noto Sans KR"/>
+              </a:defRPr>
+            </a:pPr>
+            <a:r>
+              <a:t>세부 루브릭 채점 및 질문은행 면접 툴</a:t>
+            </a:r>
+          </a:p>
+          <a:p>
+            <a:pPr>
+              <a:spcAft>
+                <a:spcPts val="600"/>
+              </a:spcAft>
+              <a:defRPr sz="1100">
+                <a:solidFill>
+                  <a:srgbClr val="94A3B8"/>
+                </a:solidFill>
+                <a:latin typeface="Noto Sans KR"/>
+              </a:defRPr>
+            </a:pPr>
+            <a:r>
+              <a:t>루브릭 세부 채점 가이드:</a:t>
+            </a:r>
+          </a:p>
+          <a:p>
+            <a:pPr>
+              <a:spcAft>
+                <a:spcPts val="600"/>
+              </a:spcAft>
+              <a:defRPr sz="1100">
+                <a:solidFill>
+                  <a:srgbClr val="94A3B8"/>
+                </a:solidFill>
+                <a:latin typeface="Noto Sans KR"/>
+              </a:defRPr>
+            </a:pPr>
+            <a:r>
+              <a:t>• 5단계 등급 선택: (탁월 100, 양호 85, 보통 70, 미흡 50, 부족 30)</a:t>
+            </a:r>
+          </a:p>
+          <a:p>
+            <a:pPr>
+              <a:spcAft>
+                <a:spcPts val="600"/>
+              </a:spcAft>
+              <a:defRPr sz="1100">
+                <a:solidFill>
+                  <a:srgbClr val="94A3B8"/>
+                </a:solidFill>
+                <a:latin typeface="Noto Sans KR"/>
+              </a:defRPr>
+            </a:pPr>
+            <a:r>
+              <a:t>• 각 항목마다 정량적/정성적 등급 부여 사유 필수 기재</a:t>
             </a:r>
           </a:p>
           <a:p>
@@ -6030,7 +5670,40 @@
               </a:spcAft>
               <a:defRPr sz="1100">
                 <a:solidFill>
-                  <a:srgbClr val="1D1D1F"/>
+                  <a:srgbClr val="94A3B8"/>
+                </a:solidFill>
+                <a:latin typeface="Noto Sans KR"/>
+              </a:defRPr>
+            </a:pPr>
+            <a:r>
+              <a:t>⚡ Consensus Monitor (의견 불합치 방지):</a:t>
+            </a:r>
+          </a:p>
+          <a:p>
+            <a:pPr>
+              <a:spcAft>
+                <a:spcPts val="600"/>
+              </a:spcAft>
+              <a:defRPr sz="1100">
+                <a:solidFill>
+                  <a:srgbClr val="94A3B8"/>
+                </a:solidFill>
+                <a:latin typeface="Noto Sans KR"/>
+              </a:defRPr>
+            </a:pPr>
+            <a:r>
+              <a:t>• 동시 배정된 위원 간 평가 편차가 15점 이상 벌어질 경우 경고 알림 노출 ➡️ 타 위원 의견 수렴 후 조율 합의문 기재</a:t>
+            </a:r>
+          </a:p>
+          <a:p>
+            <a:br/>
+            <a:pPr>
+              <a:spcAft>
+                <a:spcPts val="600"/>
+              </a:spcAft>
+              <a:defRPr sz="1100">
+                <a:solidFill>
+                  <a:srgbClr val="94A3B8"/>
                 </a:solidFill>
                 <a:latin typeface="Noto Sans KR"/>
               </a:defRPr>
@@ -6046,29 +5719,13 @@
               </a:spcAft>
               <a:defRPr sz="1100">
                 <a:solidFill>
-                  <a:srgbClr val="1D1D1F"/>
-                </a:solidFill>
-                <a:latin typeface="Noto Sans KR"/>
-              </a:defRPr>
-            </a:pPr>
-            <a:r>
-              <a:t>• 과제 분류에 매핑되는 심사 질문 목록 검색 제공</a:t>
-            </a:r>
-          </a:p>
-          <a:p>
-            <a:pPr>
-              <a:spcAft>
-                <a:spcPts val="600"/>
-              </a:spcAft>
-              <a:defRPr sz="1100">
-                <a:solidFill>
-                  <a:srgbClr val="1D1D1F"/>
-                </a:solidFill>
-                <a:latin typeface="Noto Sans KR"/>
-              </a:defRPr>
-            </a:pPr>
-            <a:r>
-              <a:t>• 질문의 숨은 의도 및 고득점/저득점 판단 가이드라인 제공</a:t>
+                  <a:srgbClr val="94A3B8"/>
+                </a:solidFill>
+                <a:latin typeface="Noto Sans KR"/>
+              </a:defRPr>
+            </a:pPr>
+            <a:r>
+              <a:t>• 지원자 과제 유형을 선택하면 면접 질문 리스트와 모범 답변 준거 가이드를 자동으로 제시하여 객관성을 보장합니다.</a:t>
             </a:r>
           </a:p>
           <a:p>
@@ -6079,7 +5736,7 @@
               </a:spcAft>
               <a:defRPr sz="1100">
                 <a:solidFill>
-                  <a:srgbClr val="1D1D1F"/>
+                  <a:srgbClr val="94A3B8"/>
                 </a:solidFill>
                 <a:latin typeface="Noto Sans KR"/>
               </a:defRPr>
@@ -6105,11 +5762,11 @@
             <a:avLst/>
           </a:prstGeom>
           <a:solidFill>
-            <a:srgbClr val="FFFFFF"/>
+            <a:srgbClr val="1E293B"/>
           </a:solidFill>
-          <a:ln w="12700">
+          <a:ln w="19050">
             <a:solidFill>
-              <a:srgbClr val="DADADE"/>
+              <a:srgbClr val="6366F1"/>
             </a:solidFill>
           </a:ln>
         </p:spPr>
@@ -6173,7 +5830,7 @@
     <p:bg>
       <p:bgPr>
         <a:solidFill>
-          <a:srgbClr val="F5F5F7"/>
+          <a:srgbClr val="0F172A"/>
         </a:solidFill>
         <a:effectLst/>
       </p:bgPr>
@@ -6210,7 +5867,7 @@
             <a:pPr>
               <a:defRPr sz="1100" b="1">
                 <a:solidFill>
-                  <a:srgbClr val="0066CC"/>
+                  <a:srgbClr val="38BDF8"/>
                 </a:solidFill>
                 <a:latin typeface="Noto Sans KR"/>
               </a:defRPr>
@@ -6246,7 +5903,7 @@
             <a:pPr>
               <a:defRPr sz="2600" b="1">
                 <a:solidFill>
-                  <a:srgbClr val="1D1D1F"/>
+                  <a:srgbClr val="FFFFFF"/>
                 </a:solidFill>
                 <a:latin typeface="Noto Sans KR"/>
               </a:defRPr>
@@ -6272,7 +5929,7 @@
             <a:avLst/>
           </a:prstGeom>
           <a:solidFill>
-            <a:srgbClr val="DADADE"/>
+            <a:srgbClr val="334155"/>
           </a:solidFill>
           <a:ln>
             <a:noFill/>
@@ -6325,13 +5982,13 @@
             <a:pPr>
               <a:defRPr sz="900">
                 <a:solidFill>
-                  <a:srgbClr val="86868B"/>
-                </a:solidFill>
-                <a:latin typeface="Noto Sans KR"/>
-              </a:defRPr>
-            </a:pPr>
-            <a:r>
-              <a:t>AICA 자격심사 시스템 사용자 매뉴얼 · Apple Concept</a:t>
+                  <a:srgbClr val="94A3B8"/>
+                </a:solidFill>
+                <a:latin typeface="Noto Sans KR"/>
+              </a:defRPr>
+            </a:pPr>
+            <a:r>
+              <a:t>AICA 자격심사 시스템 사용자 매뉴얼 · Web App Dark Theme</a:t>
             </a:r>
           </a:p>
         </p:txBody>
@@ -6361,7 +6018,7 @@
             <a:pPr algn="r">
               <a:defRPr sz="900">
                 <a:solidFill>
-                  <a:srgbClr val="86868B"/>
+                  <a:srgbClr val="94A3B8"/>
                 </a:solidFill>
                 <a:latin typeface="Noto Sans KR"/>
               </a:defRPr>
@@ -6374,23 +6031,25 @@
       </p:sp>
       <p:sp>
         <p:nvSpPr>
-          <p:cNvPr id="7" name="Rectangle 6"/>
+          <p:cNvPr id="7" name="Rounded Rectangle 6"/>
           <p:cNvSpPr/>
           <p:nvPr/>
         </p:nvSpPr>
         <p:spPr>
           <a:xfrm>
-            <a:off x="1371600" y="2926080"/>
-            <a:ext cx="9418320" cy="9144"/>
-          </a:xfrm>
-          <a:prstGeom prst="rect">
+            <a:off x="548640" y="1828800"/>
+            <a:ext cx="5486400" cy="4114800"/>
+          </a:xfrm>
+          <a:prstGeom prst="roundRect">
             <a:avLst/>
           </a:prstGeom>
           <a:solidFill>
-            <a:srgbClr val="DADADE"/>
+            <a:srgbClr val="1E293B"/>
           </a:solidFill>
-          <a:ln>
-            <a:noFill/>
+          <a:ln w="12700">
+            <a:solidFill>
+              <a:srgbClr val="334155"/>
+            </a:solidFill>
           </a:ln>
         </p:spPr>
         <p:style>
@@ -6417,23 +6076,178 @@
       </p:sp>
       <p:sp>
         <p:nvSpPr>
-          <p:cNvPr id="8" name="Oval 7"/>
+          <p:cNvPr id="8" name="TextBox 7"/>
+          <p:cNvSpPr txBox="1"/>
+          <p:nvPr/>
+        </p:nvSpPr>
+        <p:spPr>
+          <a:xfrm>
+            <a:off x="731520" y="2011680"/>
+            <a:ext cx="5120640" cy="3749040"/>
+          </a:xfrm>
+          <a:prstGeom prst="rect">
+            <a:avLst/>
+          </a:prstGeom>
+          <a:noFill/>
+        </p:spPr>
+        <p:txBody>
+          <a:bodyPr wrap="square">
+            <a:spAutoFit/>
+          </a:bodyPr>
+          <a:lstStyle/>
+          <a:p>
+            <a:pPr>
+              <a:spcAft>
+                <a:spcPts val="1200"/>
+              </a:spcAft>
+              <a:defRPr sz="1500" b="1">
+                <a:solidFill>
+                  <a:srgbClr val="FFFFFF"/>
+                </a:solidFill>
+                <a:latin typeface="Noto Sans KR"/>
+              </a:defRPr>
+            </a:pPr>
+            <a:r>
+              <a:t>평가 최종 검토 및 제출 확정</a:t>
+            </a:r>
+          </a:p>
+          <a:p>
+            <a:pPr>
+              <a:spcAft>
+                <a:spcPts val="600"/>
+              </a:spcAft>
+              <a:defRPr sz="1100">
+                <a:solidFill>
+                  <a:srgbClr val="94A3B8"/>
+                </a:solidFill>
+                <a:latin typeface="Noto Sans KR"/>
+              </a:defRPr>
+            </a:pPr>
+            <a:r>
+              <a:t>평가 완료 및 전송 단계:</a:t>
+            </a:r>
+          </a:p>
+          <a:p>
+            <a:pPr>
+              <a:spcAft>
+                <a:spcPts val="600"/>
+              </a:spcAft>
+              <a:defRPr sz="1100">
+                <a:solidFill>
+                  <a:srgbClr val="94A3B8"/>
+                </a:solidFill>
+                <a:latin typeface="Noto Sans KR"/>
+              </a:defRPr>
+            </a:pPr>
+            <a:r>
+              <a:t>• 1. 필수값 체크: 보안 체크박스 준수, 루브릭 점수 선택, 세부 의견 누락 여부 최종 갱신</a:t>
+            </a:r>
+          </a:p>
+          <a:p>
+            <a:pPr>
+              <a:spcAft>
+                <a:spcPts val="600"/>
+              </a:spcAft>
+              <a:defRPr sz="1100">
+                <a:solidFill>
+                  <a:srgbClr val="94A3B8"/>
+                </a:solidFill>
+                <a:latin typeface="Noto Sans KR"/>
+              </a:defRPr>
+            </a:pPr>
+            <a:r>
+              <a:t>• 2. 타 위원 상태 검토: 타 위원의 점수 노출 없이 평가 진행률만 확인(독립적 판단 견지)</a:t>
+            </a:r>
+          </a:p>
+          <a:p>
+            <a:pPr>
+              <a:spcAft>
+                <a:spcPts val="600"/>
+              </a:spcAft>
+              <a:defRPr sz="1100">
+                <a:solidFill>
+                  <a:srgbClr val="94A3B8"/>
+                </a:solidFill>
+                <a:latin typeface="Noto Sans KR"/>
+              </a:defRPr>
+            </a:pPr>
+            <a:r>
+              <a:t>• 3. 평가 제출: [평가 완료 및 제출] 버튼을 선택해 데이터베이스 기록 완료</a:t>
+            </a:r>
+          </a:p>
+          <a:p>
+            <a:pPr>
+              <a:spcAft>
+                <a:spcPts val="600"/>
+              </a:spcAft>
+              <a:defRPr sz="1100">
+                <a:solidFill>
+                  <a:srgbClr val="94A3B8"/>
+                </a:solidFill>
+                <a:latin typeface="Noto Sans KR"/>
+              </a:defRPr>
+            </a:pPr>
+            <a:r>
+              <a:t>• 4. 상태 갱신 검증: 본인 대기 큐로 복귀 후 해당 과제 상태가 '완료'인지 확인</a:t>
+            </a:r>
+          </a:p>
+          <a:p>
+            <a:br/>
+            <a:pPr>
+              <a:spcAft>
+                <a:spcPts val="600"/>
+              </a:spcAft>
+              <a:defRPr sz="1100">
+                <a:solidFill>
+                  <a:srgbClr val="94A3B8"/>
+                </a:solidFill>
+                <a:latin typeface="Noto Sans KR"/>
+              </a:defRPr>
+            </a:pPr>
+            <a:r>
+              <a:t>💡 최종 판정 계산: 3인의 패널 심사위원이 최종 제출을 모두 완료하는 즉시 파이어스토어에서 평균 점수와 판정을 계산합니다.</a:t>
+            </a:r>
+          </a:p>
+          <a:p>
+            <a:br/>
+            <a:pPr>
+              <a:spcAft>
+                <a:spcPts val="600"/>
+              </a:spcAft>
+              <a:defRPr sz="1100">
+                <a:solidFill>
+                  <a:srgbClr val="94A3B8"/>
+                </a:solidFill>
+                <a:latin typeface="Noto Sans KR"/>
+              </a:defRPr>
+            </a:pPr>
+            <a:r>
+              <a:t>오른쪽 화면: 실제 채점 입력창 하단의 저장 및 최종 제출 영역</a:t>
+            </a:r>
+          </a:p>
+        </p:txBody>
+      </p:sp>
+      <p:sp>
+        <p:nvSpPr>
+          <p:cNvPr id="9" name="Rounded Rectangle 8"/>
           <p:cNvSpPr/>
           <p:nvPr/>
         </p:nvSpPr>
         <p:spPr>
           <a:xfrm>
-            <a:off x="1554480" y="2468880"/>
-            <a:ext cx="822960" cy="822960"/>
-          </a:xfrm>
-          <a:prstGeom prst="ellipse">
+            <a:off x="6400800" y="1828800"/>
+            <a:ext cx="5212080" cy="4114800"/>
+          </a:xfrm>
+          <a:prstGeom prst="roundRect">
             <a:avLst/>
           </a:prstGeom>
           <a:solidFill>
-            <a:srgbClr val="0066CC"/>
+            <a:srgbClr val="1E293B"/>
           </a:solidFill>
-          <a:ln>
-            <a:noFill/>
+          <a:ln w="19050">
+            <a:solidFill>
+              <a:srgbClr val="6366F1"/>
+            </a:solidFill>
           </a:ln>
         </p:spPr>
         <p:style>
@@ -6454,518 +6268,34 @@
           <a:bodyPr rtlCol="0" anchor="ctr"/>
           <a:lstStyle/>
           <a:p>
-            <a:pPr algn="ctr">
-              <a:defRPr sz="1400" b="1">
-                <a:solidFill>
-                  <a:srgbClr val="FFFFFF"/>
-                </a:solidFill>
-                <a:latin typeface="Noto Sans KR"/>
-              </a:defRPr>
-            </a:pPr>
-            <a:r>
-              <a:t>1</a:t>
-            </a:r>
-          </a:p>
-        </p:txBody>
-      </p:sp>
-      <p:sp>
-        <p:nvSpPr>
-          <p:cNvPr id="9" name="Rounded Rectangle 8"/>
-          <p:cNvSpPr/>
-          <p:nvPr/>
-        </p:nvSpPr>
-        <p:spPr>
-          <a:xfrm>
-            <a:off x="548640" y="3474720"/>
-            <a:ext cx="2651760" cy="1828800"/>
-          </a:xfrm>
-          <a:prstGeom prst="roundRect">
-            <a:avLst/>
-          </a:prstGeom>
-          <a:solidFill>
-            <a:srgbClr val="FFFFFF"/>
-          </a:solidFill>
-          <a:ln w="12700">
-            <a:solidFill>
-              <a:srgbClr val="DADADE"/>
-            </a:solidFill>
-          </a:ln>
-        </p:spPr>
-        <p:style>
-          <a:lnRef idx="1">
-            <a:schemeClr val="accent1"/>
-          </a:lnRef>
-          <a:fillRef idx="3">
-            <a:schemeClr val="accent1"/>
-          </a:fillRef>
-          <a:effectRef idx="2">
-            <a:schemeClr val="accent1"/>
-          </a:effectRef>
-          <a:fontRef idx="minor">
-            <a:schemeClr val="lt1"/>
-          </a:fontRef>
-        </p:style>
-        <p:txBody>
-          <a:bodyPr rtlCol="0" anchor="ctr" wrap="square"/>
-          <a:lstStyle/>
-          <a:p>
-            <a:pPr algn="ctr">
-              <a:spcAft>
-                <a:spcPts val="1000"/>
-              </a:spcAft>
-              <a:defRPr sz="1500" b="1">
-                <a:solidFill>
-                  <a:srgbClr val="1D1D1F"/>
-                </a:solidFill>
-                <a:latin typeface="Noto Sans KR"/>
-              </a:defRPr>
-            </a:pPr>
-            <a:r>
-              <a:t>필수 항목 확인</a:t>
-            </a:r>
-          </a:p>
-          <a:p>
-            <a:pPr algn="ctr">
-              <a:defRPr sz="1100">
-                <a:solidFill>
-                  <a:srgbClr val="86868B"/>
-                </a:solidFill>
-                <a:latin typeface="Noto Sans KR"/>
-              </a:defRPr>
-            </a:pPr>
-            <a:r>
-              <a:t>보안 체크, 루브릭 점수, 세부 의견 누락 유무 확인</a:t>
-            </a:r>
-          </a:p>
-        </p:txBody>
-      </p:sp>
-      <p:sp>
-        <p:nvSpPr>
-          <p:cNvPr id="10" name="Oval 9"/>
-          <p:cNvSpPr/>
-          <p:nvPr/>
-        </p:nvSpPr>
-        <p:spPr>
-          <a:xfrm>
-            <a:off x="4389120" y="2468880"/>
-            <a:ext cx="822960" cy="822960"/>
-          </a:xfrm>
-          <a:prstGeom prst="ellipse">
-            <a:avLst/>
-          </a:prstGeom>
-          <a:solidFill>
-            <a:srgbClr val="0066CC"/>
-          </a:solidFill>
-          <a:ln>
-            <a:noFill/>
-          </a:ln>
-        </p:spPr>
-        <p:style>
-          <a:lnRef idx="1">
-            <a:schemeClr val="accent1"/>
-          </a:lnRef>
-          <a:fillRef idx="3">
-            <a:schemeClr val="accent1"/>
-          </a:fillRef>
-          <a:effectRef idx="2">
-            <a:schemeClr val="accent1"/>
-          </a:effectRef>
-          <a:fontRef idx="minor">
-            <a:schemeClr val="lt1"/>
-          </a:fontRef>
-        </p:style>
-        <p:txBody>
-          <a:bodyPr rtlCol="0" anchor="ctr"/>
-          <a:lstStyle/>
-          <a:p>
-            <a:pPr algn="ctr">
-              <a:defRPr sz="1400" b="1">
-                <a:solidFill>
-                  <a:srgbClr val="FFFFFF"/>
-                </a:solidFill>
-                <a:latin typeface="Noto Sans KR"/>
-              </a:defRPr>
-            </a:pPr>
-            <a:r>
-              <a:t>2</a:t>
-            </a:r>
-          </a:p>
-        </p:txBody>
-      </p:sp>
-      <p:sp>
-        <p:nvSpPr>
-          <p:cNvPr id="11" name="Rounded Rectangle 10"/>
-          <p:cNvSpPr/>
-          <p:nvPr/>
-        </p:nvSpPr>
-        <p:spPr>
-          <a:xfrm>
-            <a:off x="3383280" y="3474720"/>
-            <a:ext cx="2651760" cy="1828800"/>
-          </a:xfrm>
-          <a:prstGeom prst="roundRect">
-            <a:avLst/>
-          </a:prstGeom>
-          <a:solidFill>
-            <a:srgbClr val="FFFFFF"/>
-          </a:solidFill>
-          <a:ln w="12700">
-            <a:solidFill>
-              <a:srgbClr val="DADADE"/>
-            </a:solidFill>
-          </a:ln>
-        </p:spPr>
-        <p:style>
-          <a:lnRef idx="1">
-            <a:schemeClr val="accent1"/>
-          </a:lnRef>
-          <a:fillRef idx="3">
-            <a:schemeClr val="accent1"/>
-          </a:fillRef>
-          <a:effectRef idx="2">
-            <a:schemeClr val="accent1"/>
-          </a:effectRef>
-          <a:fontRef idx="minor">
-            <a:schemeClr val="lt1"/>
-          </a:fontRef>
-        </p:style>
-        <p:txBody>
-          <a:bodyPr rtlCol="0" anchor="ctr" wrap="square"/>
-          <a:lstStyle/>
-          <a:p>
-            <a:pPr algn="ctr">
-              <a:spcAft>
-                <a:spcPts val="1000"/>
-              </a:spcAft>
-              <a:defRPr sz="1500" b="1">
-                <a:solidFill>
-                  <a:srgbClr val="1D1D1F"/>
-                </a:solidFill>
-                <a:latin typeface="Noto Sans KR"/>
-              </a:defRPr>
-            </a:pPr>
-            <a:r>
-              <a:t>타 위원 상태 확인</a:t>
-            </a:r>
-          </a:p>
-          <a:p>
-            <a:pPr algn="ctr">
-              <a:defRPr sz="1100">
-                <a:solidFill>
-                  <a:srgbClr val="86868B"/>
-                </a:solidFill>
-                <a:latin typeface="Noto Sans KR"/>
-              </a:defRPr>
-            </a:pPr>
-            <a:r>
-              <a:t>타 위원의 점수 노출 없이 제출 상태만 확인하여 독립성 유지</a:t>
-            </a:r>
-          </a:p>
-        </p:txBody>
-      </p:sp>
-      <p:sp>
-        <p:nvSpPr>
-          <p:cNvPr id="12" name="Oval 11"/>
-          <p:cNvSpPr/>
-          <p:nvPr/>
-        </p:nvSpPr>
-        <p:spPr>
-          <a:xfrm>
-            <a:off x="7223760" y="2468880"/>
-            <a:ext cx="822960" cy="822960"/>
-          </a:xfrm>
-          <a:prstGeom prst="ellipse">
-            <a:avLst/>
-          </a:prstGeom>
-          <a:solidFill>
-            <a:srgbClr val="0066CC"/>
-          </a:solidFill>
-          <a:ln>
-            <a:noFill/>
-          </a:ln>
-        </p:spPr>
-        <p:style>
-          <a:lnRef idx="1">
-            <a:schemeClr val="accent1"/>
-          </a:lnRef>
-          <a:fillRef idx="3">
-            <a:schemeClr val="accent1"/>
-          </a:fillRef>
-          <a:effectRef idx="2">
-            <a:schemeClr val="accent1"/>
-          </a:effectRef>
-          <a:fontRef idx="minor">
-            <a:schemeClr val="lt1"/>
-          </a:fontRef>
-        </p:style>
-        <p:txBody>
-          <a:bodyPr rtlCol="0" anchor="ctr"/>
-          <a:lstStyle/>
-          <a:p>
-            <a:pPr algn="ctr">
-              <a:defRPr sz="1400" b="1">
-                <a:solidFill>
-                  <a:srgbClr val="FFFFFF"/>
-                </a:solidFill>
-                <a:latin typeface="Noto Sans KR"/>
-              </a:defRPr>
-            </a:pPr>
-            <a:r>
-              <a:t>3</a:t>
-            </a:r>
-          </a:p>
-        </p:txBody>
-      </p:sp>
-      <p:sp>
-        <p:nvSpPr>
-          <p:cNvPr id="13" name="Rounded Rectangle 12"/>
-          <p:cNvSpPr/>
-          <p:nvPr/>
-        </p:nvSpPr>
-        <p:spPr>
-          <a:xfrm>
-            <a:off x="6217920" y="3474720"/>
-            <a:ext cx="2651760" cy="1828800"/>
-          </a:xfrm>
-          <a:prstGeom prst="roundRect">
-            <a:avLst/>
-          </a:prstGeom>
-          <a:solidFill>
-            <a:srgbClr val="FFFFFF"/>
-          </a:solidFill>
-          <a:ln w="12700">
-            <a:solidFill>
-              <a:srgbClr val="DADADE"/>
-            </a:solidFill>
-          </a:ln>
-        </p:spPr>
-        <p:style>
-          <a:lnRef idx="1">
-            <a:schemeClr val="accent1"/>
-          </a:lnRef>
-          <a:fillRef idx="3">
-            <a:schemeClr val="accent1"/>
-          </a:fillRef>
-          <a:effectRef idx="2">
-            <a:schemeClr val="accent1"/>
-          </a:effectRef>
-          <a:fontRef idx="minor">
-            <a:schemeClr val="lt1"/>
-          </a:fontRef>
-        </p:style>
-        <p:txBody>
-          <a:bodyPr rtlCol="0" anchor="ctr" wrap="square"/>
-          <a:lstStyle/>
-          <a:p>
-            <a:pPr algn="ctr">
-              <a:spcAft>
-                <a:spcPts val="1000"/>
-              </a:spcAft>
-              <a:defRPr sz="1500" b="1">
-                <a:solidFill>
-                  <a:srgbClr val="1D1D1F"/>
-                </a:solidFill>
-                <a:latin typeface="Noto Sans KR"/>
-              </a:defRPr>
-            </a:pPr>
-            <a:r>
-              <a:t>평가 제출</a:t>
-            </a:r>
-          </a:p>
-          <a:p>
-            <a:pPr algn="ctr">
-              <a:defRPr sz="1100">
-                <a:solidFill>
-                  <a:srgbClr val="86868B"/>
-                </a:solidFill>
-                <a:latin typeface="Noto Sans KR"/>
-              </a:defRPr>
-            </a:pPr>
-            <a:r>
-              <a:t>[평가 완료 및 제출] 버튼을 눌러 데이터베이스 기록</a:t>
-            </a:r>
-          </a:p>
-        </p:txBody>
-      </p:sp>
-      <p:sp>
-        <p:nvSpPr>
-          <p:cNvPr id="14" name="Oval 13"/>
-          <p:cNvSpPr/>
-          <p:nvPr/>
-        </p:nvSpPr>
-        <p:spPr>
-          <a:xfrm>
-            <a:off x="10058400" y="2468880"/>
-            <a:ext cx="822960" cy="822960"/>
-          </a:xfrm>
-          <a:prstGeom prst="ellipse">
-            <a:avLst/>
-          </a:prstGeom>
-          <a:solidFill>
-            <a:srgbClr val="0066CC"/>
-          </a:solidFill>
-          <a:ln>
-            <a:noFill/>
-          </a:ln>
-        </p:spPr>
-        <p:style>
-          <a:lnRef idx="1">
-            <a:schemeClr val="accent1"/>
-          </a:lnRef>
-          <a:fillRef idx="3">
-            <a:schemeClr val="accent1"/>
-          </a:fillRef>
-          <a:effectRef idx="2">
-            <a:schemeClr val="accent1"/>
-          </a:effectRef>
-          <a:fontRef idx="minor">
-            <a:schemeClr val="lt1"/>
-          </a:fontRef>
-        </p:style>
-        <p:txBody>
-          <a:bodyPr rtlCol="0" anchor="ctr"/>
-          <a:lstStyle/>
-          <a:p>
-            <a:pPr algn="ctr">
-              <a:defRPr sz="1400" b="1">
-                <a:solidFill>
-                  <a:srgbClr val="FFFFFF"/>
-                </a:solidFill>
-                <a:latin typeface="Noto Sans KR"/>
-              </a:defRPr>
-            </a:pPr>
-            <a:r>
-              <a:t>4</a:t>
-            </a:r>
-          </a:p>
-        </p:txBody>
-      </p:sp>
-      <p:sp>
-        <p:nvSpPr>
-          <p:cNvPr id="15" name="Rounded Rectangle 14"/>
-          <p:cNvSpPr/>
-          <p:nvPr/>
-        </p:nvSpPr>
-        <p:spPr>
-          <a:xfrm>
-            <a:off x="9052560" y="3474720"/>
-            <a:ext cx="2651760" cy="1828800"/>
-          </a:xfrm>
-          <a:prstGeom prst="roundRect">
-            <a:avLst/>
-          </a:prstGeom>
-          <a:solidFill>
-            <a:srgbClr val="FFFFFF"/>
-          </a:solidFill>
-          <a:ln w="12700">
-            <a:solidFill>
-              <a:srgbClr val="DADADE"/>
-            </a:solidFill>
-          </a:ln>
-        </p:spPr>
-        <p:style>
-          <a:lnRef idx="1">
-            <a:schemeClr val="accent1"/>
-          </a:lnRef>
-          <a:fillRef idx="3">
-            <a:schemeClr val="accent1"/>
-          </a:fillRef>
-          <a:effectRef idx="2">
-            <a:schemeClr val="accent1"/>
-          </a:effectRef>
-          <a:fontRef idx="minor">
-            <a:schemeClr val="lt1"/>
-          </a:fontRef>
-        </p:style>
-        <p:txBody>
-          <a:bodyPr rtlCol="0" anchor="ctr" wrap="square"/>
-          <a:lstStyle/>
-          <a:p>
-            <a:pPr algn="ctr">
-              <a:spcAft>
-                <a:spcPts val="1000"/>
-              </a:spcAft>
-              <a:defRPr sz="1500" b="1">
-                <a:solidFill>
-                  <a:srgbClr val="1D1D1F"/>
-                </a:solidFill>
-                <a:latin typeface="Noto Sans KR"/>
-              </a:defRPr>
-            </a:pPr>
-            <a:r>
-              <a:t>완료 상태 확인</a:t>
-            </a:r>
-          </a:p>
-          <a:p>
-            <a:pPr algn="ctr">
-              <a:defRPr sz="1100">
-                <a:solidFill>
-                  <a:srgbClr val="86868B"/>
-                </a:solidFill>
-                <a:latin typeface="Noto Sans KR"/>
-              </a:defRPr>
-            </a:pPr>
-            <a:r>
-              <a:t>개인 대기 큐에서 해당 지원자의 내 심사 상태가 [완료]인지 검증</a:t>
-            </a:r>
-          </a:p>
-        </p:txBody>
-      </p:sp>
-      <p:sp>
-        <p:nvSpPr>
-          <p:cNvPr id="16" name="Rounded Rectangle 15"/>
-          <p:cNvSpPr/>
-          <p:nvPr/>
-        </p:nvSpPr>
-        <p:spPr>
-          <a:xfrm>
-            <a:off x="548640" y="5303520"/>
-            <a:ext cx="11094415" cy="548640"/>
-          </a:xfrm>
-          <a:prstGeom prst="roundRect">
-            <a:avLst/>
-          </a:prstGeom>
-          <a:solidFill>
-            <a:srgbClr val="F5F5F7"/>
-          </a:solidFill>
-          <a:ln>
-            <a:solidFill>
-              <a:srgbClr val="DADADE"/>
-            </a:solidFill>
-          </a:ln>
-        </p:spPr>
-        <p:style>
-          <a:lnRef idx="1">
-            <a:schemeClr val="accent1"/>
-          </a:lnRef>
-          <a:fillRef idx="3">
-            <a:schemeClr val="accent1"/>
-          </a:fillRef>
-          <a:effectRef idx="2">
-            <a:schemeClr val="accent1"/>
-          </a:effectRef>
-          <a:fontRef idx="minor">
-            <a:schemeClr val="lt1"/>
-          </a:fontRef>
-        </p:style>
-        <p:txBody>
-          <a:bodyPr rtlCol="0" anchor="ctr" wrap="square"/>
-          <a:lstStyle/>
-          <a:p>
-            <a:pPr algn="ctr">
-              <a:defRPr sz="1100" b="1">
-                <a:solidFill>
-                  <a:srgbClr val="1D1D1F"/>
-                </a:solidFill>
-                <a:latin typeface="Noto Sans KR"/>
-              </a:defRPr>
-            </a:pPr>
-            <a:r>
-              <a:t>💡 안내: 수정이 필요하면 [심사하기/수정]으로 재진입해 수정할 수 있습니다. 최종 종합 판정은 패널 3인의 제출이 모두 끝나야 실시간 집계됩니다.</a:t>
-            </a:r>
-          </a:p>
-        </p:txBody>
-      </p:sp>
+            <a:pPr algn="ctr"/>
+          </a:p>
+        </p:txBody>
+      </p:sp>
+      <p:pic>
+        <p:nvPicPr>
+          <p:cNvPr id="10" name="Picture 9" descr="media__1784176902473.png"/>
+          <p:cNvPicPr>
+            <a:picLocks noChangeAspect="1"/>
+          </p:cNvPicPr>
+          <p:nvPr/>
+        </p:nvPicPr>
+        <p:blipFill>
+          <a:blip r:embed="rId2"/>
+          <a:stretch>
+            <a:fillRect/>
+          </a:stretch>
+        </p:blipFill>
+        <p:spPr>
+          <a:xfrm>
+            <a:off x="6814049" y="1965960"/>
+            <a:ext cx="4385580" cy="3840480"/>
+          </a:xfrm>
+          <a:prstGeom prst="rect">
+            <a:avLst/>
+          </a:prstGeom>
+        </p:spPr>
+      </p:pic>
     </p:spTree>
   </p:cSld>
   <p:clrMapOvr>
@@ -6980,7 +6310,7 @@
     <p:bg>
       <p:bgPr>
         <a:solidFill>
-          <a:srgbClr val="F5F5F7"/>
+          <a:srgbClr val="0F172A"/>
         </a:solidFill>
         <a:effectLst/>
       </p:bgPr>
@@ -7017,7 +6347,7 @@
             <a:pPr>
               <a:defRPr sz="1100" b="1">
                 <a:solidFill>
-                  <a:srgbClr val="0066CC"/>
+                  <a:srgbClr val="38BDF8"/>
                 </a:solidFill>
                 <a:latin typeface="Noto Sans KR"/>
               </a:defRPr>
@@ -7053,7 +6383,7 @@
             <a:pPr>
               <a:defRPr sz="2600" b="1">
                 <a:solidFill>
-                  <a:srgbClr val="1D1D1F"/>
+                  <a:srgbClr val="FFFFFF"/>
                 </a:solidFill>
                 <a:latin typeface="Noto Sans KR"/>
               </a:defRPr>
@@ -7079,7 +6409,7 @@
             <a:avLst/>
           </a:prstGeom>
           <a:solidFill>
-            <a:srgbClr val="DADADE"/>
+            <a:srgbClr val="334155"/>
           </a:solidFill>
           <a:ln>
             <a:noFill/>
@@ -7132,13 +6462,13 @@
             <a:pPr>
               <a:defRPr sz="900">
                 <a:solidFill>
-                  <a:srgbClr val="86868B"/>
-                </a:solidFill>
-                <a:latin typeface="Noto Sans KR"/>
-              </a:defRPr>
-            </a:pPr>
-            <a:r>
-              <a:t>AICA 자격심사 시스템 사용자 매뉴얼 · Apple Concept</a:t>
+                  <a:srgbClr val="94A3B8"/>
+                </a:solidFill>
+                <a:latin typeface="Noto Sans KR"/>
+              </a:defRPr>
+            </a:pPr>
+            <a:r>
+              <a:t>AICA 자격심사 시스템 사용자 매뉴얼 · Web App Dark Theme</a:t>
             </a:r>
           </a:p>
         </p:txBody>
@@ -7168,7 +6498,7 @@
             <a:pPr algn="r">
               <a:defRPr sz="900">
                 <a:solidFill>
-                  <a:srgbClr val="86868B"/>
+                  <a:srgbClr val="94A3B8"/>
                 </a:solidFill>
                 <a:latin typeface="Noto Sans KR"/>
               </a:defRPr>
@@ -7187,17 +6517,19 @@
         </p:nvSpPr>
         <p:spPr>
           <a:xfrm>
-            <a:off x="548640" y="1645920"/>
-            <a:ext cx="2011680" cy="822960"/>
+            <a:off x="548640" y="1828800"/>
+            <a:ext cx="5486400" cy="4114800"/>
           </a:xfrm>
           <a:prstGeom prst="roundRect">
             <a:avLst/>
           </a:prstGeom>
           <a:solidFill>
-            <a:srgbClr val="FF453A"/>
+            <a:srgbClr val="1E293B"/>
           </a:solidFill>
-          <a:ln>
-            <a:noFill/>
+          <a:ln w="12700">
+            <a:solidFill>
+              <a:srgbClr val="334155"/>
+            </a:solidFill>
           </a:ln>
         </p:spPr>
         <p:style>
@@ -7215,11 +6547,40 @@
           </a:fontRef>
         </p:style>
         <p:txBody>
-          <a:bodyPr rtlCol="0" anchor="ctr" wrap="square"/>
-          <a:lstStyle/>
-          <a:p>
-            <a:pPr algn="ctr">
-              <a:defRPr sz="1300" b="1">
+          <a:bodyPr rtlCol="0" anchor="ctr"/>
+          <a:lstStyle/>
+          <a:p>
+            <a:pPr algn="ctr"/>
+          </a:p>
+        </p:txBody>
+      </p:sp>
+      <p:sp>
+        <p:nvSpPr>
+          <p:cNvPr id="8" name="TextBox 7"/>
+          <p:cNvSpPr txBox="1"/>
+          <p:nvPr/>
+        </p:nvSpPr>
+        <p:spPr>
+          <a:xfrm>
+            <a:off x="731520" y="2011680"/>
+            <a:ext cx="5120640" cy="3749040"/>
+          </a:xfrm>
+          <a:prstGeom prst="rect">
+            <a:avLst/>
+          </a:prstGeom>
+          <a:noFill/>
+        </p:spPr>
+        <p:txBody>
+          <a:bodyPr wrap="square">
+            <a:spAutoFit/>
+          </a:bodyPr>
+          <a:lstStyle/>
+          <a:p>
+            <a:pPr>
+              <a:spcAft>
+                <a:spcPts val="1200"/>
+              </a:spcAft>
+              <a:defRPr sz="1500" b="1">
                 <a:solidFill>
                   <a:srgbClr val="FFFFFF"/>
                 </a:solidFill>
@@ -7227,31 +6588,145 @@
               </a:defRPr>
             </a:pPr>
             <a:r>
-              <a:t>로그인 실패</a:t>
-            </a:r>
-          </a:p>
-        </p:txBody>
-      </p:sp>
-      <p:sp>
-        <p:nvSpPr>
-          <p:cNvPr id="8" name="Rounded Rectangle 7"/>
+              <a:t>자주 묻는 질문 및 트러블슈팅 조치법</a:t>
+            </a:r>
+          </a:p>
+          <a:p>
+            <a:pPr>
+              <a:spcAft>
+                <a:spcPts val="600"/>
+              </a:spcAft>
+              <a:defRPr sz="1100">
+                <a:solidFill>
+                  <a:srgbClr val="94A3B8"/>
+                </a:solidFill>
+                <a:latin typeface="Noto Sans KR"/>
+              </a:defRPr>
+            </a:pPr>
+            <a:r>
+              <a:t>자주 발생하는 이슈 해결 방안:</a:t>
+            </a:r>
+          </a:p>
+          <a:p>
+            <a:pPr>
+              <a:spcAft>
+                <a:spcPts val="600"/>
+              </a:spcAft>
+              <a:defRPr sz="1100">
+                <a:solidFill>
+                  <a:srgbClr val="94A3B8"/>
+                </a:solidFill>
+                <a:latin typeface="Noto Sans KR"/>
+              </a:defRPr>
+            </a:pPr>
+            <a:r>
+              <a:t>• 1. 로그인 실패: 등록된 사용자 성명과 사내 이메일 주소가 정확한지 대조해 보세요. (대소문자 및 띄어쓰기 유의)</a:t>
+            </a:r>
+          </a:p>
+          <a:p>
+            <a:pPr>
+              <a:spcAft>
+                <a:spcPts val="600"/>
+              </a:spcAft>
+              <a:defRPr sz="1100">
+                <a:solidFill>
+                  <a:srgbClr val="94A3B8"/>
+                </a:solidFill>
+                <a:latin typeface="Noto Sans KR"/>
+              </a:defRPr>
+            </a:pPr>
+            <a:r>
+              <a:t>• 2. 과제 등록 불가: 필수 항목(성명, 이메일, 과제설명 등) 누락 여부 및 심사위원 3인 배정 유무를 확인하세요.</a:t>
+            </a:r>
+          </a:p>
+          <a:p>
+            <a:pPr>
+              <a:spcAft>
+                <a:spcPts val="600"/>
+              </a:spcAft>
+              <a:defRPr sz="1100">
+                <a:solidFill>
+                  <a:srgbClr val="94A3B8"/>
+                </a:solidFill>
+                <a:latin typeface="Noto Sans KR"/>
+              </a:defRPr>
+            </a:pPr>
+            <a:r>
+              <a:t>• 3. 점수·판정 미표시: 배정된 3인 패널 심사위원(현업, 기술, 보안) 전원이 최종 제출을 마쳤는지 확인하세요.</a:t>
+            </a:r>
+          </a:p>
+          <a:p>
+            <a:pPr>
+              <a:spcAft>
+                <a:spcPts val="600"/>
+              </a:spcAft>
+              <a:defRPr sz="1100">
+                <a:solidFill>
+                  <a:srgbClr val="94A3B8"/>
+                </a:solidFill>
+                <a:latin typeface="Noto Sans KR"/>
+              </a:defRPr>
+            </a:pPr>
+            <a:r>
+              <a:t>• 4. 자료 링크 오류: 사내 보안 인트라넷 링크의 접근 권한 허용 여부 및 URL 정상 동작 여부를 사전에 검토하세요.</a:t>
+            </a:r>
+          </a:p>
+          <a:p>
+            <a:br/>
+            <a:pPr>
+              <a:spcAft>
+                <a:spcPts val="600"/>
+              </a:spcAft>
+              <a:defRPr sz="1100">
+                <a:solidFill>
+                  <a:srgbClr val="94A3B8"/>
+                </a:solidFill>
+                <a:latin typeface="Noto Sans KR"/>
+              </a:defRPr>
+            </a:pPr>
+            <a:r>
+              <a:t>💡 완료 전 4대 필수 체크 사항: 정확한 후보자 정보, 이해상충이 없는 패널 매핑, 명확한 평가 근거 작성, 보안 결격 검증 완료</a:t>
+            </a:r>
+          </a:p>
+          <a:p>
+            <a:br/>
+            <a:pPr>
+              <a:spcAft>
+                <a:spcPts val="600"/>
+              </a:spcAft>
+              <a:defRPr sz="1100">
+                <a:solidFill>
+                  <a:srgbClr val="94A3B8"/>
+                </a:solidFill>
+                <a:latin typeface="Noto Sans KR"/>
+              </a:defRPr>
+            </a:pPr>
+            <a:r>
+              <a:t>오른쪽 화면: 실제 리액트 로그인 오류 배지 렌더링 화면</a:t>
+            </a:r>
+          </a:p>
+        </p:txBody>
+      </p:sp>
+      <p:sp>
+        <p:nvSpPr>
+          <p:cNvPr id="9" name="Rounded Rectangle 8"/>
           <p:cNvSpPr/>
           <p:nvPr/>
         </p:nvSpPr>
         <p:spPr>
           <a:xfrm>
-            <a:off x="2651760" y="1645920"/>
-            <a:ext cx="8991295" cy="822960"/>
+            <a:off x="6400800" y="1828800"/>
+            <a:ext cx="5212080" cy="4114800"/>
           </a:xfrm>
           <a:prstGeom prst="roundRect">
             <a:avLst/>
           </a:prstGeom>
           <a:solidFill>
-            <a:srgbClr val="FFFFFF"/>
+            <a:srgbClr val="1E293B"/>
           </a:solidFill>
-          <a:ln>
+          <a:ln w="19050">
             <a:solidFill>
-              <a:srgbClr val="DADADE"/>
+              <a:srgbClr val="6366F1"/>
             </a:solidFill>
           </a:ln>
         </p:spPr>
@@ -7270,383 +6745,37 @@
           </a:fontRef>
         </p:style>
         <p:txBody>
-          <a:bodyPr rtlCol="0" anchor="ctr" wrap="square"/>
-          <a:lstStyle/>
-          <a:p>
-            <a:pPr algn="ctr">
-              <a:defRPr sz="1150">
-                <a:solidFill>
-                  <a:srgbClr val="1D1D1F"/>
-                </a:solidFill>
-                <a:latin typeface="Noto Sans KR"/>
-              </a:defRPr>
-            </a:pPr>
-            <a:r>
-              <a:t>  등록된 사용자 성명과 사내 이메일 주소가 정확한지 대조해 보세요. (대소문자 및 띄어쓰기 유의)</a:t>
-            </a:r>
-          </a:p>
-        </p:txBody>
-      </p:sp>
-      <p:sp>
-        <p:nvSpPr>
-          <p:cNvPr id="9" name="Rounded Rectangle 8"/>
-          <p:cNvSpPr/>
-          <p:nvPr/>
-        </p:nvSpPr>
-        <p:spPr>
-          <a:xfrm>
-            <a:off x="548640" y="2651760"/>
-            <a:ext cx="2011680" cy="822960"/>
-          </a:xfrm>
-          <a:prstGeom prst="roundRect">
-            <a:avLst/>
-          </a:prstGeom>
-          <a:solidFill>
-            <a:srgbClr val="0066CC"/>
-          </a:solidFill>
-          <a:ln>
-            <a:noFill/>
-          </a:ln>
-        </p:spPr>
-        <p:style>
-          <a:lnRef idx="1">
-            <a:schemeClr val="accent1"/>
-          </a:lnRef>
-          <a:fillRef idx="3">
-            <a:schemeClr val="accent1"/>
-          </a:fillRef>
-          <a:effectRef idx="2">
-            <a:schemeClr val="accent1"/>
-          </a:effectRef>
-          <a:fontRef idx="minor">
-            <a:schemeClr val="lt1"/>
-          </a:fontRef>
-        </p:style>
-        <p:txBody>
-          <a:bodyPr rtlCol="0" anchor="ctr" wrap="square"/>
-          <a:lstStyle/>
-          <a:p>
-            <a:pPr algn="ctr">
-              <a:defRPr sz="1300" b="1">
-                <a:solidFill>
-                  <a:srgbClr val="FFFFFF"/>
-                </a:solidFill>
-                <a:latin typeface="Noto Sans KR"/>
-              </a:defRPr>
-            </a:pPr>
-            <a:r>
-              <a:t>과제 등록 불가</a:t>
-            </a:r>
-          </a:p>
-        </p:txBody>
-      </p:sp>
-      <p:sp>
-        <p:nvSpPr>
-          <p:cNvPr id="10" name="Rounded Rectangle 9"/>
-          <p:cNvSpPr/>
-          <p:nvPr/>
-        </p:nvSpPr>
-        <p:spPr>
-          <a:xfrm>
-            <a:off x="2651760" y="2651760"/>
-            <a:ext cx="8991295" cy="822960"/>
-          </a:xfrm>
-          <a:prstGeom prst="roundRect">
-            <a:avLst/>
-          </a:prstGeom>
-          <a:solidFill>
-            <a:srgbClr val="FFFFFF"/>
-          </a:solidFill>
-          <a:ln>
-            <a:solidFill>
-              <a:srgbClr val="DADADE"/>
-            </a:solidFill>
-          </a:ln>
-        </p:spPr>
-        <p:style>
-          <a:lnRef idx="1">
-            <a:schemeClr val="accent1"/>
-          </a:lnRef>
-          <a:fillRef idx="3">
-            <a:schemeClr val="accent1"/>
-          </a:fillRef>
-          <a:effectRef idx="2">
-            <a:schemeClr val="accent1"/>
-          </a:effectRef>
-          <a:fontRef idx="minor">
-            <a:schemeClr val="lt1"/>
-          </a:fontRef>
-        </p:style>
-        <p:txBody>
-          <a:bodyPr rtlCol="0" anchor="ctr" wrap="square"/>
-          <a:lstStyle/>
-          <a:p>
-            <a:pPr algn="ctr">
-              <a:defRPr sz="1150">
-                <a:solidFill>
-                  <a:srgbClr val="1D1D1F"/>
-                </a:solidFill>
-                <a:latin typeface="Noto Sans KR"/>
-              </a:defRPr>
-            </a:pPr>
-            <a:r>
-              <a:t>  필수 항목(성명, 이메일, 과제설명 등) 누락 여부 및 심사위원 3인 배정 유무를 확인하세요.</a:t>
-            </a:r>
-          </a:p>
-        </p:txBody>
-      </p:sp>
-      <p:sp>
-        <p:nvSpPr>
-          <p:cNvPr id="11" name="Rounded Rectangle 10"/>
-          <p:cNvSpPr/>
-          <p:nvPr/>
-        </p:nvSpPr>
-        <p:spPr>
-          <a:xfrm>
-            <a:off x="548640" y="3657600"/>
-            <a:ext cx="2011680" cy="822960"/>
-          </a:xfrm>
-          <a:prstGeom prst="roundRect">
-            <a:avLst/>
-          </a:prstGeom>
-          <a:solidFill>
-            <a:srgbClr val="30D158"/>
-          </a:solidFill>
-          <a:ln>
-            <a:noFill/>
-          </a:ln>
-        </p:spPr>
-        <p:style>
-          <a:lnRef idx="1">
-            <a:schemeClr val="accent1"/>
-          </a:lnRef>
-          <a:fillRef idx="3">
-            <a:schemeClr val="accent1"/>
-          </a:fillRef>
-          <a:effectRef idx="2">
-            <a:schemeClr val="accent1"/>
-          </a:effectRef>
-          <a:fontRef idx="minor">
-            <a:schemeClr val="lt1"/>
-          </a:fontRef>
-        </p:style>
-        <p:txBody>
-          <a:bodyPr rtlCol="0" anchor="ctr" wrap="square"/>
-          <a:lstStyle/>
-          <a:p>
-            <a:pPr algn="ctr">
-              <a:defRPr sz="1300" b="1">
-                <a:solidFill>
-                  <a:srgbClr val="FFFFFF"/>
-                </a:solidFill>
-                <a:latin typeface="Noto Sans KR"/>
-              </a:defRPr>
-            </a:pPr>
-            <a:r>
-              <a:t>점수·판정 미표시</a:t>
-            </a:r>
-          </a:p>
-        </p:txBody>
-      </p:sp>
-      <p:sp>
-        <p:nvSpPr>
-          <p:cNvPr id="12" name="Rounded Rectangle 11"/>
-          <p:cNvSpPr/>
-          <p:nvPr/>
-        </p:nvSpPr>
-        <p:spPr>
-          <a:xfrm>
-            <a:off x="2651760" y="3657600"/>
-            <a:ext cx="8991295" cy="822960"/>
-          </a:xfrm>
-          <a:prstGeom prst="roundRect">
-            <a:avLst/>
-          </a:prstGeom>
-          <a:solidFill>
-            <a:srgbClr val="FFFFFF"/>
-          </a:solidFill>
-          <a:ln>
-            <a:solidFill>
-              <a:srgbClr val="DADADE"/>
-            </a:solidFill>
-          </a:ln>
-        </p:spPr>
-        <p:style>
-          <a:lnRef idx="1">
-            <a:schemeClr val="accent1"/>
-          </a:lnRef>
-          <a:fillRef idx="3">
-            <a:schemeClr val="accent1"/>
-          </a:fillRef>
-          <a:effectRef idx="2">
-            <a:schemeClr val="accent1"/>
-          </a:effectRef>
-          <a:fontRef idx="minor">
-            <a:schemeClr val="lt1"/>
-          </a:fontRef>
-        </p:style>
-        <p:txBody>
-          <a:bodyPr rtlCol="0" anchor="ctr" wrap="square"/>
-          <a:lstStyle/>
-          <a:p>
-            <a:pPr algn="ctr">
-              <a:defRPr sz="1150">
-                <a:solidFill>
-                  <a:srgbClr val="1D1D1F"/>
-                </a:solidFill>
-                <a:latin typeface="Noto Sans KR"/>
-              </a:defRPr>
-            </a:pPr>
-            <a:r>
-              <a:t>  배정된 3인 패널 심사위원(현업, 기술, 보안) 전원이 최종 제출을 마쳤는지 확인하세요.</a:t>
-            </a:r>
-          </a:p>
-        </p:txBody>
-      </p:sp>
-      <p:sp>
-        <p:nvSpPr>
-          <p:cNvPr id="13" name="Rounded Rectangle 12"/>
-          <p:cNvSpPr/>
-          <p:nvPr/>
-        </p:nvSpPr>
-        <p:spPr>
-          <a:xfrm>
-            <a:off x="548640" y="4663440"/>
-            <a:ext cx="2011680" cy="822960"/>
-          </a:xfrm>
-          <a:prstGeom prst="roundRect">
-            <a:avLst/>
-          </a:prstGeom>
-          <a:solidFill>
-            <a:srgbClr val="86868B"/>
-          </a:solidFill>
-          <a:ln>
-            <a:noFill/>
-          </a:ln>
-        </p:spPr>
-        <p:style>
-          <a:lnRef idx="1">
-            <a:schemeClr val="accent1"/>
-          </a:lnRef>
-          <a:fillRef idx="3">
-            <a:schemeClr val="accent1"/>
-          </a:fillRef>
-          <a:effectRef idx="2">
-            <a:schemeClr val="accent1"/>
-          </a:effectRef>
-          <a:fontRef idx="minor">
-            <a:schemeClr val="lt1"/>
-          </a:fontRef>
-        </p:style>
-        <p:txBody>
-          <a:bodyPr rtlCol="0" anchor="ctr" wrap="square"/>
-          <a:lstStyle/>
-          <a:p>
-            <a:pPr algn="ctr">
-              <a:defRPr sz="1300" b="1">
-                <a:solidFill>
-                  <a:srgbClr val="FFFFFF"/>
-                </a:solidFill>
-                <a:latin typeface="Noto Sans KR"/>
-              </a:defRPr>
-            </a:pPr>
-            <a:r>
-              <a:t>자료 링크 오류</a:t>
-            </a:r>
-          </a:p>
-        </p:txBody>
-      </p:sp>
-      <p:sp>
-        <p:nvSpPr>
-          <p:cNvPr id="14" name="Rounded Rectangle 13"/>
-          <p:cNvSpPr/>
-          <p:nvPr/>
-        </p:nvSpPr>
-        <p:spPr>
-          <a:xfrm>
-            <a:off x="2651760" y="4663440"/>
-            <a:ext cx="8991295" cy="822960"/>
-          </a:xfrm>
-          <a:prstGeom prst="roundRect">
-            <a:avLst/>
-          </a:prstGeom>
-          <a:solidFill>
-            <a:srgbClr val="FFFFFF"/>
-          </a:solidFill>
-          <a:ln>
-            <a:solidFill>
-              <a:srgbClr val="DADADE"/>
-            </a:solidFill>
-          </a:ln>
-        </p:spPr>
-        <p:style>
-          <a:lnRef idx="1">
-            <a:schemeClr val="accent1"/>
-          </a:lnRef>
-          <a:fillRef idx="3">
-            <a:schemeClr val="accent1"/>
-          </a:fillRef>
-          <a:effectRef idx="2">
-            <a:schemeClr val="accent1"/>
-          </a:effectRef>
-          <a:fontRef idx="minor">
-            <a:schemeClr val="lt1"/>
-          </a:fontRef>
-        </p:style>
-        <p:txBody>
-          <a:bodyPr rtlCol="0" anchor="ctr" wrap="square"/>
-          <a:lstStyle/>
-          <a:p>
-            <a:pPr algn="ctr">
-              <a:defRPr sz="1150">
-                <a:solidFill>
-                  <a:srgbClr val="1D1D1F"/>
-                </a:solidFill>
-                <a:latin typeface="Noto Sans KR"/>
-              </a:defRPr>
-            </a:pPr>
-            <a:r>
-              <a:t>  사내 보안 인트라넷 링크의 접근 권한 허용 여부 및 URL 정상 동작 여부를 사전에 검토하세요.</a:t>
-            </a:r>
-          </a:p>
-        </p:txBody>
-      </p:sp>
-      <p:sp>
-        <p:nvSpPr>
-          <p:cNvPr id="15" name="TextBox 14"/>
-          <p:cNvSpPr txBox="1"/>
-          <p:nvPr/>
-        </p:nvSpPr>
-        <p:spPr>
-          <a:xfrm>
-            <a:off x="548640" y="5852160"/>
-            <a:ext cx="10972800" cy="457200"/>
-          </a:xfrm>
-          <a:prstGeom prst="rect">
-            <a:avLst/>
-          </a:prstGeom>
-          <a:noFill/>
-        </p:spPr>
-        <p:txBody>
-          <a:bodyPr wrap="none">
-            <a:spAutoFit/>
-          </a:bodyPr>
-          <a:lstStyle/>
-          <a:p>
-            <a:pPr>
-              <a:defRPr sz="1200" b="1">
-                <a:solidFill>
-                  <a:srgbClr val="0066CC"/>
-                </a:solidFill>
-                <a:latin typeface="Noto Sans KR"/>
-              </a:defRPr>
-            </a:pPr>
-            <a:r>
-              <a:t>완료 전 4가지 확인 사항:  정확한 정보  ·  이해상충 없는 패널  ·  근거 있는 평가  ·  보안 결격 점검</a:t>
-            </a:r>
-          </a:p>
-        </p:txBody>
-      </p:sp>
+          <a:bodyPr rtlCol="0" anchor="ctr"/>
+          <a:lstStyle/>
+          <a:p>
+            <a:pPr algn="ctr"/>
+          </a:p>
+        </p:txBody>
+      </p:sp>
+      <p:pic>
+        <p:nvPicPr>
+          <p:cNvPr id="10" name="Picture 9" descr="media__1784176101924.png"/>
+          <p:cNvPicPr>
+            <a:picLocks noChangeAspect="1"/>
+          </p:cNvPicPr>
+          <p:nvPr/>
+        </p:nvPicPr>
+        <p:blipFill>
+          <a:blip r:embed="rId2"/>
+          <a:stretch>
+            <a:fillRect/>
+          </a:stretch>
+        </p:blipFill>
+        <p:spPr>
+          <a:xfrm>
+            <a:off x="6537960" y="2398922"/>
+            <a:ext cx="4937760" cy="2974554"/>
+          </a:xfrm>
+          <a:prstGeom prst="rect">
+            <a:avLst/>
+          </a:prstGeom>
+        </p:spPr>
+      </p:pic>
     </p:spTree>
   </p:cSld>
   <p:clrMapOvr>
@@ -7661,7 +6790,7 @@
     <p:bg>
       <p:bgPr>
         <a:solidFill>
-          <a:srgbClr val="F5F5F7"/>
+          <a:srgbClr val="0F172A"/>
         </a:solidFill>
         <a:effectLst/>
       </p:bgPr>
@@ -7698,7 +6827,7 @@
             <a:pPr>
               <a:defRPr sz="1100" b="1">
                 <a:solidFill>
-                  <a:srgbClr val="0066CC"/>
+                  <a:srgbClr val="38BDF8"/>
                 </a:solidFill>
                 <a:latin typeface="Noto Sans KR"/>
               </a:defRPr>
@@ -7734,7 +6863,7 @@
             <a:pPr>
               <a:defRPr sz="2600" b="1">
                 <a:solidFill>
-                  <a:srgbClr val="1D1D1F"/>
+                  <a:srgbClr val="FFFFFF"/>
                 </a:solidFill>
                 <a:latin typeface="Noto Sans KR"/>
               </a:defRPr>
@@ -7760,7 +6889,7 @@
             <a:avLst/>
           </a:prstGeom>
           <a:solidFill>
-            <a:srgbClr val="DADADE"/>
+            <a:srgbClr val="334155"/>
           </a:solidFill>
           <a:ln>
             <a:noFill/>
@@ -7813,13 +6942,13 @@
             <a:pPr>
               <a:defRPr sz="900">
                 <a:solidFill>
-                  <a:srgbClr val="86868B"/>
-                </a:solidFill>
-                <a:latin typeface="Noto Sans KR"/>
-              </a:defRPr>
-            </a:pPr>
-            <a:r>
-              <a:t>AICA 자격심사 시스템 사용자 매뉴얼 · Apple Concept</a:t>
+                  <a:srgbClr val="94A3B8"/>
+                </a:solidFill>
+                <a:latin typeface="Noto Sans KR"/>
+              </a:defRPr>
+            </a:pPr>
+            <a:r>
+              <a:t>AICA 자격심사 시스템 사용자 매뉴얼 · Web App Dark Theme</a:t>
             </a:r>
           </a:p>
         </p:txBody>
@@ -7849,7 +6978,7 @@
             <a:pPr algn="r">
               <a:defRPr sz="900">
                 <a:solidFill>
-                  <a:srgbClr val="86868B"/>
+                  <a:srgbClr val="94A3B8"/>
                 </a:solidFill>
                 <a:latin typeface="Noto Sans KR"/>
               </a:defRPr>
@@ -7862,59 +6991,25 @@
       </p:sp>
       <p:sp>
         <p:nvSpPr>
-          <p:cNvPr id="7" name="TextBox 6"/>
-          <p:cNvSpPr txBox="1"/>
-          <p:nvPr/>
-        </p:nvSpPr>
-        <p:spPr>
-          <a:xfrm>
-            <a:off x="548640" y="1645920"/>
-            <a:ext cx="10972800" cy="457200"/>
-          </a:xfrm>
-          <a:prstGeom prst="rect">
-            <a:avLst/>
-          </a:prstGeom>
-          <a:noFill/>
-        </p:spPr>
-        <p:txBody>
-          <a:bodyPr wrap="none">
-            <a:spAutoFit/>
-          </a:bodyPr>
-          <a:lstStyle/>
-          <a:p>
-            <a:pPr>
-              <a:defRPr sz="1300">
-                <a:solidFill>
-                  <a:srgbClr val="1D1D1F"/>
-                </a:solidFill>
-                <a:latin typeface="Noto Sans KR"/>
-              </a:defRPr>
-            </a:pPr>
-            <a:r>
-              <a:t>운영간사는 정확한 등록과 배정을, 심사위원은 독립적인 검토와 제출을 책임집니다.</a:t>
-            </a:r>
-          </a:p>
-        </p:txBody>
-      </p:sp>
-      <p:sp>
-        <p:nvSpPr>
-          <p:cNvPr id="8" name="Rectangle 7"/>
+          <p:cNvPr id="7" name="Rounded Rectangle 6"/>
           <p:cNvSpPr/>
           <p:nvPr/>
         </p:nvSpPr>
         <p:spPr>
           <a:xfrm>
-            <a:off x="1371600" y="3200400"/>
-            <a:ext cx="9418320" cy="9144"/>
-          </a:xfrm>
-          <a:prstGeom prst="rect">
+            <a:off x="548640" y="1828800"/>
+            <a:ext cx="5486400" cy="4114800"/>
+          </a:xfrm>
+          <a:prstGeom prst="roundRect">
             <a:avLst/>
           </a:prstGeom>
           <a:solidFill>
-            <a:srgbClr val="DADADE"/>
+            <a:srgbClr val="1E293B"/>
           </a:solidFill>
-          <a:ln>
-            <a:noFill/>
+          <a:ln w="12700">
+            <a:solidFill>
+              <a:srgbClr val="334155"/>
+            </a:solidFill>
           </a:ln>
         </p:spPr>
         <p:style>
@@ -7941,23 +7036,161 @@
       </p:sp>
       <p:sp>
         <p:nvSpPr>
-          <p:cNvPr id="9" name="Oval 8"/>
+          <p:cNvPr id="8" name="TextBox 7"/>
+          <p:cNvSpPr txBox="1"/>
+          <p:nvPr/>
+        </p:nvSpPr>
+        <p:spPr>
+          <a:xfrm>
+            <a:off x="731520" y="2011680"/>
+            <a:ext cx="5120640" cy="3749040"/>
+          </a:xfrm>
+          <a:prstGeom prst="rect">
+            <a:avLst/>
+          </a:prstGeom>
+          <a:noFill/>
+        </p:spPr>
+        <p:txBody>
+          <a:bodyPr wrap="square">
+            <a:spAutoFit/>
+          </a:bodyPr>
+          <a:lstStyle/>
+          <a:p>
+            <a:pPr>
+              <a:spcAft>
+                <a:spcPts val="1200"/>
+              </a:spcAft>
+              <a:defRPr sz="1500" b="1">
+                <a:solidFill>
+                  <a:srgbClr val="FFFFFF"/>
+                </a:solidFill>
+                <a:latin typeface="Noto Sans KR"/>
+              </a:defRPr>
+            </a:pPr>
+            <a:r>
+              <a:t>자격 심사 전체 워크플로우</a:t>
+            </a:r>
+          </a:p>
+          <a:p>
+            <a:pPr>
+              <a:spcAft>
+                <a:spcPts val="600"/>
+              </a:spcAft>
+              <a:defRPr sz="1100">
+                <a:solidFill>
+                  <a:srgbClr val="94A3B8"/>
+                </a:solidFill>
+                <a:latin typeface="Noto Sans KR"/>
+              </a:defRPr>
+            </a:pPr>
+            <a:r>
+              <a:t>운영간사와 심사위원 간의 원활한 업무 연계 흐름:</a:t>
+            </a:r>
+          </a:p>
+          <a:p>
+            <a:pPr>
+              <a:spcAft>
+                <a:spcPts val="600"/>
+              </a:spcAft>
+              <a:defRPr sz="1100">
+                <a:solidFill>
+                  <a:srgbClr val="94A3B8"/>
+                </a:solidFill>
+                <a:latin typeface="Noto Sans KR"/>
+              </a:defRPr>
+            </a:pPr>
+            <a:r>
+              <a:t>• 1단계 (과제 등록): 간사가 지원자명, 과제설명, 증빙 자료 등록</a:t>
+            </a:r>
+          </a:p>
+          <a:p>
+            <a:pPr>
+              <a:spcAft>
+                <a:spcPts val="600"/>
+              </a:spcAft>
+              <a:defRPr sz="1100">
+                <a:solidFill>
+                  <a:srgbClr val="94A3B8"/>
+                </a:solidFill>
+                <a:latin typeface="Noto Sans KR"/>
+              </a:defRPr>
+            </a:pPr>
+            <a:r>
+              <a:t>• 2단계 (3인 패널 배정): 현업, 기술, 보안별 심사위원 자동 매핑</a:t>
+            </a:r>
+          </a:p>
+          <a:p>
+            <a:pPr>
+              <a:spcAft>
+                <a:spcPts val="600"/>
+              </a:spcAft>
+              <a:defRPr sz="1100">
+                <a:solidFill>
+                  <a:srgbClr val="94A3B8"/>
+                </a:solidFill>
+                <a:latin typeface="Noto Sans KR"/>
+              </a:defRPr>
+            </a:pPr>
+            <a:r>
+              <a:t>• 3단계 (독립 심사): 각 위원이 증빙을 검증하고 5단계 평가 제출</a:t>
+            </a:r>
+          </a:p>
+          <a:p>
+            <a:pPr>
+              <a:spcAft>
+                <a:spcPts val="600"/>
+              </a:spcAft>
+              <a:defRPr sz="1100">
+                <a:solidFill>
+                  <a:srgbClr val="94A3B8"/>
+                </a:solidFill>
+                <a:latin typeface="Noto Sans KR"/>
+              </a:defRPr>
+            </a:pPr>
+            <a:r>
+              <a:t>• 4단계 (종합 판정): 3인 점수 평균 및 결격 검증 후 판정서 발급</a:t>
+            </a:r>
+          </a:p>
+          <a:p>
+            <a:br/>
+            <a:pPr>
+              <a:spcAft>
+                <a:spcPts val="600"/>
+              </a:spcAft>
+              <a:defRPr sz="1100">
+                <a:solidFill>
+                  <a:srgbClr val="94A3B8"/>
+                </a:solidFill>
+                <a:latin typeface="Noto Sans KR"/>
+              </a:defRPr>
+            </a:pPr>
+            <a:r>
+              <a:t>💡 우측 화면: 리액트 및 클라우드 파이어스토어(Firestore) 데이터베이스 기반 실시간 평가 시스템의 전체 구조</a:t>
+            </a:r>
+          </a:p>
+        </p:txBody>
+      </p:sp>
+      <p:sp>
+        <p:nvSpPr>
+          <p:cNvPr id="9" name="Rounded Rectangle 8"/>
           <p:cNvSpPr/>
           <p:nvPr/>
         </p:nvSpPr>
         <p:spPr>
           <a:xfrm>
-            <a:off x="1554480" y="2743200"/>
-            <a:ext cx="822960" cy="822960"/>
-          </a:xfrm>
-          <a:prstGeom prst="ellipse">
+            <a:off x="6400800" y="1828800"/>
+            <a:ext cx="5212080" cy="4114800"/>
+          </a:xfrm>
+          <a:prstGeom prst="roundRect">
             <a:avLst/>
           </a:prstGeom>
           <a:solidFill>
-            <a:srgbClr val="0066CC"/>
+            <a:srgbClr val="1E293B"/>
           </a:solidFill>
-          <a:ln>
-            <a:noFill/>
+          <a:ln w="19050">
+            <a:solidFill>
+              <a:srgbClr val="6366F1"/>
+            </a:solidFill>
           </a:ln>
         </p:spPr>
         <p:style>
@@ -7978,463 +7211,34 @@
           <a:bodyPr rtlCol="0" anchor="ctr"/>
           <a:lstStyle/>
           <a:p>
-            <a:pPr algn="ctr">
-              <a:defRPr sz="1400" b="1">
-                <a:solidFill>
-                  <a:srgbClr val="FFFFFF"/>
-                </a:solidFill>
-                <a:latin typeface="Noto Sans KR"/>
-              </a:defRPr>
-            </a:pPr>
-            <a:r>
-              <a:t>1</a:t>
-            </a:r>
-          </a:p>
-        </p:txBody>
-      </p:sp>
-      <p:sp>
-        <p:nvSpPr>
-          <p:cNvPr id="10" name="Rounded Rectangle 9"/>
-          <p:cNvSpPr/>
-          <p:nvPr/>
-        </p:nvSpPr>
-        <p:spPr>
-          <a:xfrm>
-            <a:off x="548640" y="3749039"/>
-            <a:ext cx="2651760" cy="2011680"/>
-          </a:xfrm>
-          <a:prstGeom prst="roundRect">
-            <a:avLst/>
-          </a:prstGeom>
-          <a:solidFill>
-            <a:srgbClr val="FFFFFF"/>
-          </a:solidFill>
-          <a:ln w="12700">
-            <a:solidFill>
-              <a:srgbClr val="DADADE"/>
-            </a:solidFill>
-          </a:ln>
-        </p:spPr>
-        <p:style>
-          <a:lnRef idx="1">
-            <a:schemeClr val="accent1"/>
-          </a:lnRef>
-          <a:fillRef idx="3">
-            <a:schemeClr val="accent1"/>
-          </a:fillRef>
-          <a:effectRef idx="2">
-            <a:schemeClr val="accent1"/>
-          </a:effectRef>
-          <a:fontRef idx="minor">
-            <a:schemeClr val="lt1"/>
-          </a:fontRef>
-        </p:style>
-        <p:txBody>
-          <a:bodyPr rtlCol="0" anchor="ctr" wrap="square"/>
-          <a:lstStyle/>
-          <a:p>
-            <a:pPr algn="ctr">
-              <a:spcAft>
-                <a:spcPts val="1200"/>
-              </a:spcAft>
-              <a:defRPr sz="1600" b="1">
-                <a:solidFill>
-                  <a:srgbClr val="1D1D1F"/>
-                </a:solidFill>
-                <a:latin typeface="Noto Sans KR"/>
-              </a:defRPr>
-            </a:pPr>
-            <a:r>
-              <a:t>과제 등록</a:t>
-            </a:r>
-          </a:p>
-          <a:p>
-            <a:pPr algn="ctr">
-              <a:defRPr sz="1100">
-                <a:solidFill>
-                  <a:srgbClr val="86868B"/>
-                </a:solidFill>
-                <a:latin typeface="Noto Sans KR"/>
-              </a:defRPr>
-            </a:pPr>
-            <a:r>
-              <a:t>지원자·과제·증빙 링크를 입력합니다.</a:t>
-            </a:r>
-          </a:p>
-        </p:txBody>
-      </p:sp>
-      <p:sp>
-        <p:nvSpPr>
-          <p:cNvPr id="11" name="Oval 10"/>
-          <p:cNvSpPr/>
-          <p:nvPr/>
-        </p:nvSpPr>
-        <p:spPr>
-          <a:xfrm>
-            <a:off x="4389120" y="2743200"/>
-            <a:ext cx="822960" cy="822960"/>
-          </a:xfrm>
-          <a:prstGeom prst="ellipse">
-            <a:avLst/>
-          </a:prstGeom>
-          <a:solidFill>
-            <a:srgbClr val="0066CC"/>
-          </a:solidFill>
-          <a:ln>
-            <a:noFill/>
-          </a:ln>
-        </p:spPr>
-        <p:style>
-          <a:lnRef idx="1">
-            <a:schemeClr val="accent1"/>
-          </a:lnRef>
-          <a:fillRef idx="3">
-            <a:schemeClr val="accent1"/>
-          </a:fillRef>
-          <a:effectRef idx="2">
-            <a:schemeClr val="accent1"/>
-          </a:effectRef>
-          <a:fontRef idx="minor">
-            <a:schemeClr val="lt1"/>
-          </a:fontRef>
-        </p:style>
-        <p:txBody>
-          <a:bodyPr rtlCol="0" anchor="ctr"/>
-          <a:lstStyle/>
-          <a:p>
-            <a:pPr algn="ctr">
-              <a:defRPr sz="1400" b="1">
-                <a:solidFill>
-                  <a:srgbClr val="FFFFFF"/>
-                </a:solidFill>
-                <a:latin typeface="Noto Sans KR"/>
-              </a:defRPr>
-            </a:pPr>
-            <a:r>
-              <a:t>2</a:t>
-            </a:r>
-          </a:p>
-        </p:txBody>
-      </p:sp>
-      <p:sp>
-        <p:nvSpPr>
-          <p:cNvPr id="12" name="Rounded Rectangle 11"/>
-          <p:cNvSpPr/>
-          <p:nvPr/>
-        </p:nvSpPr>
-        <p:spPr>
-          <a:xfrm>
-            <a:off x="3383280" y="3749039"/>
-            <a:ext cx="2651760" cy="2011680"/>
-          </a:xfrm>
-          <a:prstGeom prst="roundRect">
-            <a:avLst/>
-          </a:prstGeom>
-          <a:solidFill>
-            <a:srgbClr val="FFFFFF"/>
-          </a:solidFill>
-          <a:ln w="12700">
-            <a:solidFill>
-              <a:srgbClr val="DADADE"/>
-            </a:solidFill>
-          </a:ln>
-        </p:spPr>
-        <p:style>
-          <a:lnRef idx="1">
-            <a:schemeClr val="accent1"/>
-          </a:lnRef>
-          <a:fillRef idx="3">
-            <a:schemeClr val="accent1"/>
-          </a:fillRef>
-          <a:effectRef idx="2">
-            <a:schemeClr val="accent1"/>
-          </a:effectRef>
-          <a:fontRef idx="minor">
-            <a:schemeClr val="lt1"/>
-          </a:fontRef>
-        </p:style>
-        <p:txBody>
-          <a:bodyPr rtlCol="0" anchor="ctr" wrap="square"/>
-          <a:lstStyle/>
-          <a:p>
-            <a:pPr algn="ctr">
-              <a:spcAft>
-                <a:spcPts val="1200"/>
-              </a:spcAft>
-              <a:defRPr sz="1600" b="1">
-                <a:solidFill>
-                  <a:srgbClr val="1D1D1F"/>
-                </a:solidFill>
-                <a:latin typeface="Noto Sans KR"/>
-              </a:defRPr>
-            </a:pPr>
-            <a:r>
-              <a:t>3인 패널 배정</a:t>
-            </a:r>
-          </a:p>
-          <a:p>
-            <a:pPr algn="ctr">
-              <a:defRPr sz="1100">
-                <a:solidFill>
-                  <a:srgbClr val="86868B"/>
-                </a:solidFill>
-                <a:latin typeface="Noto Sans KR"/>
-              </a:defRPr>
-            </a:pPr>
-            <a:r>
-              <a:t>현업·기술·보안 각 1인을 지정합니다.</a:t>
-            </a:r>
-          </a:p>
-        </p:txBody>
-      </p:sp>
-      <p:sp>
-        <p:nvSpPr>
-          <p:cNvPr id="13" name="Oval 12"/>
-          <p:cNvSpPr/>
-          <p:nvPr/>
-        </p:nvSpPr>
-        <p:spPr>
-          <a:xfrm>
-            <a:off x="7223760" y="2743200"/>
-            <a:ext cx="822960" cy="822960"/>
-          </a:xfrm>
-          <a:prstGeom prst="ellipse">
-            <a:avLst/>
-          </a:prstGeom>
-          <a:solidFill>
-            <a:srgbClr val="0066CC"/>
-          </a:solidFill>
-          <a:ln>
-            <a:noFill/>
-          </a:ln>
-        </p:spPr>
-        <p:style>
-          <a:lnRef idx="1">
-            <a:schemeClr val="accent1"/>
-          </a:lnRef>
-          <a:fillRef idx="3">
-            <a:schemeClr val="accent1"/>
-          </a:fillRef>
-          <a:effectRef idx="2">
-            <a:schemeClr val="accent1"/>
-          </a:effectRef>
-          <a:fontRef idx="minor">
-            <a:schemeClr val="lt1"/>
-          </a:fontRef>
-        </p:style>
-        <p:txBody>
-          <a:bodyPr rtlCol="0" anchor="ctr"/>
-          <a:lstStyle/>
-          <a:p>
-            <a:pPr algn="ctr">
-              <a:defRPr sz="1400" b="1">
-                <a:solidFill>
-                  <a:srgbClr val="FFFFFF"/>
-                </a:solidFill>
-                <a:latin typeface="Noto Sans KR"/>
-              </a:defRPr>
-            </a:pPr>
-            <a:r>
-              <a:t>3</a:t>
-            </a:r>
-          </a:p>
-        </p:txBody>
-      </p:sp>
-      <p:sp>
-        <p:nvSpPr>
-          <p:cNvPr id="14" name="Rounded Rectangle 13"/>
-          <p:cNvSpPr/>
-          <p:nvPr/>
-        </p:nvSpPr>
-        <p:spPr>
-          <a:xfrm>
-            <a:off x="6217920" y="3749039"/>
-            <a:ext cx="2651760" cy="2011680"/>
-          </a:xfrm>
-          <a:prstGeom prst="roundRect">
-            <a:avLst/>
-          </a:prstGeom>
-          <a:solidFill>
-            <a:srgbClr val="FFFFFF"/>
-          </a:solidFill>
-          <a:ln w="12700">
-            <a:solidFill>
-              <a:srgbClr val="DADADE"/>
-            </a:solidFill>
-          </a:ln>
-        </p:spPr>
-        <p:style>
-          <a:lnRef idx="1">
-            <a:schemeClr val="accent1"/>
-          </a:lnRef>
-          <a:fillRef idx="3">
-            <a:schemeClr val="accent1"/>
-          </a:fillRef>
-          <a:effectRef idx="2">
-            <a:schemeClr val="accent1"/>
-          </a:effectRef>
-          <a:fontRef idx="minor">
-            <a:schemeClr val="lt1"/>
-          </a:fontRef>
-        </p:style>
-        <p:txBody>
-          <a:bodyPr rtlCol="0" anchor="ctr" wrap="square"/>
-          <a:lstStyle/>
-          <a:p>
-            <a:pPr algn="ctr">
-              <a:spcAft>
-                <a:spcPts val="1200"/>
-              </a:spcAft>
-              <a:defRPr sz="1600" b="1">
-                <a:solidFill>
-                  <a:srgbClr val="1D1D1F"/>
-                </a:solidFill>
-                <a:latin typeface="Noto Sans KR"/>
-              </a:defRPr>
-            </a:pPr>
-            <a:r>
-              <a:t>독립 심사</a:t>
-            </a:r>
-          </a:p>
-          <a:p>
-            <a:pPr algn="ctr">
-              <a:defRPr sz="1100">
-                <a:solidFill>
-                  <a:srgbClr val="86868B"/>
-                </a:solidFill>
-                <a:latin typeface="Noto Sans KR"/>
-              </a:defRPr>
-            </a:pPr>
-            <a:r>
-              <a:t>자료·보안·루브릭을 확인하고 점수를 제출합니다.</a:t>
-            </a:r>
-          </a:p>
-        </p:txBody>
-      </p:sp>
-      <p:sp>
-        <p:nvSpPr>
-          <p:cNvPr id="15" name="Oval 14"/>
-          <p:cNvSpPr/>
-          <p:nvPr/>
-        </p:nvSpPr>
-        <p:spPr>
-          <a:xfrm>
-            <a:off x="10058400" y="2743200"/>
-            <a:ext cx="822960" cy="822960"/>
-          </a:xfrm>
-          <a:prstGeom prst="ellipse">
-            <a:avLst/>
-          </a:prstGeom>
-          <a:solidFill>
-            <a:srgbClr val="0066CC"/>
-          </a:solidFill>
-          <a:ln>
-            <a:noFill/>
-          </a:ln>
-        </p:spPr>
-        <p:style>
-          <a:lnRef idx="1">
-            <a:schemeClr val="accent1"/>
-          </a:lnRef>
-          <a:fillRef idx="3">
-            <a:schemeClr val="accent1"/>
-          </a:fillRef>
-          <a:effectRef idx="2">
-            <a:schemeClr val="accent1"/>
-          </a:effectRef>
-          <a:fontRef idx="minor">
-            <a:schemeClr val="lt1"/>
-          </a:fontRef>
-        </p:style>
-        <p:txBody>
-          <a:bodyPr rtlCol="0" anchor="ctr"/>
-          <a:lstStyle/>
-          <a:p>
-            <a:pPr algn="ctr">
-              <a:defRPr sz="1400" b="1">
-                <a:solidFill>
-                  <a:srgbClr val="FFFFFF"/>
-                </a:solidFill>
-                <a:latin typeface="Noto Sans KR"/>
-              </a:defRPr>
-            </a:pPr>
-            <a:r>
-              <a:t>4</a:t>
-            </a:r>
-          </a:p>
-        </p:txBody>
-      </p:sp>
-      <p:sp>
-        <p:nvSpPr>
-          <p:cNvPr id="16" name="Rounded Rectangle 15"/>
-          <p:cNvSpPr/>
-          <p:nvPr/>
-        </p:nvSpPr>
-        <p:spPr>
-          <a:xfrm>
-            <a:off x="9052560" y="3749039"/>
-            <a:ext cx="2651760" cy="2011680"/>
-          </a:xfrm>
-          <a:prstGeom prst="roundRect">
-            <a:avLst/>
-          </a:prstGeom>
-          <a:solidFill>
-            <a:srgbClr val="FFFFFF"/>
-          </a:solidFill>
-          <a:ln w="12700">
-            <a:solidFill>
-              <a:srgbClr val="DADADE"/>
-            </a:solidFill>
-          </a:ln>
-        </p:spPr>
-        <p:style>
-          <a:lnRef idx="1">
-            <a:schemeClr val="accent1"/>
-          </a:lnRef>
-          <a:fillRef idx="3">
-            <a:schemeClr val="accent1"/>
-          </a:fillRef>
-          <a:effectRef idx="2">
-            <a:schemeClr val="accent1"/>
-          </a:effectRef>
-          <a:fontRef idx="minor">
-            <a:schemeClr val="lt1"/>
-          </a:fontRef>
-        </p:style>
-        <p:txBody>
-          <a:bodyPr rtlCol="0" anchor="ctr" wrap="square"/>
-          <a:lstStyle/>
-          <a:p>
-            <a:pPr algn="ctr">
-              <a:spcAft>
-                <a:spcPts val="1200"/>
-              </a:spcAft>
-              <a:defRPr sz="1600" b="1">
-                <a:solidFill>
-                  <a:srgbClr val="1D1D1F"/>
-                </a:solidFill>
-                <a:latin typeface="Noto Sans KR"/>
-              </a:defRPr>
-            </a:pPr>
-            <a:r>
-              <a:t>종합 판정</a:t>
-            </a:r>
-          </a:p>
-          <a:p>
-            <a:pPr algn="ctr">
-              <a:defRPr sz="1100">
-                <a:solidFill>
-                  <a:srgbClr val="86868B"/>
-                </a:solidFill>
-                <a:latin typeface="Noto Sans KR"/>
-              </a:defRPr>
-            </a:pPr>
-            <a:r>
-              <a:t>3인 제출 후 평균과 판정서를 확인합니다.</a:t>
-            </a:r>
-          </a:p>
-        </p:txBody>
-      </p:sp>
+            <a:pPr algn="ctr"/>
+          </a:p>
+        </p:txBody>
+      </p:sp>
+      <p:pic>
+        <p:nvPicPr>
+          <p:cNvPr id="10" name="Picture 9" descr="aica_evaluation_workspace_mockup_1784167999282.png"/>
+          <p:cNvPicPr>
+            <a:picLocks noChangeAspect="1"/>
+          </p:cNvPicPr>
+          <p:nvPr/>
+        </p:nvPicPr>
+        <p:blipFill>
+          <a:blip r:embed="rId2"/>
+          <a:stretch>
+            <a:fillRect/>
+          </a:stretch>
+        </p:blipFill>
+        <p:spPr>
+          <a:xfrm>
+            <a:off x="7086600" y="1965960"/>
+            <a:ext cx="3840480" cy="3840480"/>
+          </a:xfrm>
+          <a:prstGeom prst="rect">
+            <a:avLst/>
+          </a:prstGeom>
+        </p:spPr>
+      </p:pic>
     </p:spTree>
   </p:cSld>
   <p:clrMapOvr>
@@ -8449,7 +7253,7 @@
     <p:bg>
       <p:bgPr>
         <a:solidFill>
-          <a:srgbClr val="F5F5F7"/>
+          <a:srgbClr val="0F172A"/>
         </a:solidFill>
         <a:effectLst/>
       </p:bgPr>
@@ -8486,7 +7290,7 @@
             <a:pPr>
               <a:defRPr sz="1100" b="1">
                 <a:solidFill>
-                  <a:srgbClr val="0066CC"/>
+                  <a:srgbClr val="38BDF8"/>
                 </a:solidFill>
                 <a:latin typeface="Noto Sans KR"/>
               </a:defRPr>
@@ -8522,7 +7326,7 @@
             <a:pPr>
               <a:defRPr sz="2600" b="1">
                 <a:solidFill>
-                  <a:srgbClr val="1D1D1F"/>
+                  <a:srgbClr val="FFFFFF"/>
                 </a:solidFill>
                 <a:latin typeface="Noto Sans KR"/>
               </a:defRPr>
@@ -8548,7 +7352,7 @@
             <a:avLst/>
           </a:prstGeom>
           <a:solidFill>
-            <a:srgbClr val="DADADE"/>
+            <a:srgbClr val="334155"/>
           </a:solidFill>
           <a:ln>
             <a:noFill/>
@@ -8601,13 +7405,13 @@
             <a:pPr>
               <a:defRPr sz="900">
                 <a:solidFill>
-                  <a:srgbClr val="86868B"/>
-                </a:solidFill>
-                <a:latin typeface="Noto Sans KR"/>
-              </a:defRPr>
-            </a:pPr>
-            <a:r>
-              <a:t>AICA 자격심사 시스템 사용자 매뉴얼 · Apple Concept</a:t>
+                  <a:srgbClr val="94A3B8"/>
+                </a:solidFill>
+                <a:latin typeface="Noto Sans KR"/>
+              </a:defRPr>
+            </a:pPr>
+            <a:r>
+              <a:t>AICA 자격심사 시스템 사용자 매뉴얼 · Web App Dark Theme</a:t>
             </a:r>
           </a:p>
         </p:txBody>
@@ -8637,7 +7441,7 @@
             <a:pPr algn="r">
               <a:defRPr sz="900">
                 <a:solidFill>
-                  <a:srgbClr val="86868B"/>
+                  <a:srgbClr val="94A3B8"/>
                 </a:solidFill>
                 <a:latin typeface="Noto Sans KR"/>
               </a:defRPr>
@@ -8663,11 +7467,11 @@
             <a:avLst/>
           </a:prstGeom>
           <a:solidFill>
-            <a:srgbClr val="FFFFFF"/>
+            <a:srgbClr val="1E293B"/>
           </a:solidFill>
           <a:ln w="12700">
             <a:solidFill>
-              <a:srgbClr val="DADADE"/>
+              <a:srgbClr val="334155"/>
             </a:solidFill>
           </a:ln>
         </p:spPr>
@@ -8721,23 +7525,23 @@
               </a:spcAft>
               <a:defRPr sz="1500" b="1">
                 <a:solidFill>
-                  <a:srgbClr val="1D1D1F"/>
-                </a:solidFill>
-                <a:latin typeface="Noto Sans KR"/>
-              </a:defRPr>
-            </a:pPr>
-            <a:r>
-              <a:t>로그인 순서</a:t>
-            </a:r>
-          </a:p>
-          <a:p>
-            <a:pPr>
-              <a:spcAft>
-                <a:spcPts val="600"/>
-              </a:spcAft>
-              <a:defRPr sz="1100">
-                <a:solidFill>
-                  <a:srgbClr val="1D1D1F"/>
+                  <a:srgbClr val="FFFFFF"/>
+                </a:solidFill>
+                <a:latin typeface="Noto Sans KR"/>
+              </a:defRPr>
+            </a:pPr>
+            <a:r>
+              <a:t>로그인 순서 및 계정 인증</a:t>
+            </a:r>
+          </a:p>
+          <a:p>
+            <a:pPr>
+              <a:spcAft>
+                <a:spcPts val="600"/>
+              </a:spcAft>
+              <a:defRPr sz="1100">
+                <a:solidFill>
+                  <a:srgbClr val="94A3B8"/>
                 </a:solidFill>
                 <a:latin typeface="Noto Sans KR"/>
               </a:defRPr>
@@ -8753,7 +7557,7 @@
               </a:spcAft>
               <a:defRPr sz="1100">
                 <a:solidFill>
-                  <a:srgbClr val="1D1D1F"/>
+                  <a:srgbClr val="94A3B8"/>
                 </a:solidFill>
                 <a:latin typeface="Noto Sans KR"/>
               </a:defRPr>
@@ -8769,7 +7573,7 @@
               </a:spcAft>
               <a:defRPr sz="1100">
                 <a:solidFill>
-                  <a:srgbClr val="1D1D1F"/>
+                  <a:srgbClr val="94A3B8"/>
                 </a:solidFill>
                 <a:latin typeface="Noto Sans KR"/>
               </a:defRPr>
@@ -8785,7 +7589,7 @@
               </a:spcAft>
               <a:defRPr sz="1100">
                 <a:solidFill>
-                  <a:srgbClr val="1D1D1F"/>
+                  <a:srgbClr val="94A3B8"/>
                 </a:solidFill>
                 <a:latin typeface="Noto Sans KR"/>
               </a:defRPr>
@@ -8802,7 +7606,7 @@
               </a:spcAft>
               <a:defRPr sz="1100">
                 <a:solidFill>
-                  <a:srgbClr val="1D1D1F"/>
+                  <a:srgbClr val="94A3B8"/>
                 </a:solidFill>
                 <a:latin typeface="Noto Sans KR"/>
               </a:defRPr>
@@ -8819,13 +7623,13 @@
               </a:spcAft>
               <a:defRPr sz="1100">
                 <a:solidFill>
-                  <a:srgbClr val="1D1D1F"/>
-                </a:solidFill>
-                <a:latin typeface="Noto Sans KR"/>
-              </a:defRPr>
-            </a:pPr>
-            <a:r>
-              <a:t>오른쪽 화면: 실제 리액트 시스템 로그인 창 캡처 화면</a:t>
+                  <a:srgbClr val="94A3B8"/>
+                </a:solidFill>
+                <a:latin typeface="Noto Sans KR"/>
+              </a:defRPr>
+            </a:pPr>
+            <a:r>
+              <a:t>오른쪽 화면: 실제 리액트 시스템 로그인 창 및 하단 테스트 계정 정보창 캡처 화면</a:t>
             </a:r>
           </a:p>
         </p:txBody>
@@ -8845,11 +7649,11 @@
             <a:avLst/>
           </a:prstGeom>
           <a:solidFill>
-            <a:srgbClr val="FFFFFF"/>
+            <a:srgbClr val="1E293B"/>
           </a:solidFill>
-          <a:ln w="12700">
+          <a:ln w="19050">
             <a:solidFill>
-              <a:srgbClr val="DADADE"/>
+              <a:srgbClr val="6366F1"/>
             </a:solidFill>
           </a:ln>
         </p:spPr>
@@ -8913,7 +7717,7 @@
     <p:bg>
       <p:bgPr>
         <a:solidFill>
-          <a:srgbClr val="F5F5F7"/>
+          <a:srgbClr val="0F172A"/>
         </a:solidFill>
         <a:effectLst/>
       </p:bgPr>
@@ -8950,7 +7754,7 @@
             <a:pPr>
               <a:defRPr sz="1100" b="1">
                 <a:solidFill>
-                  <a:srgbClr val="0066CC"/>
+                  <a:srgbClr val="38BDF8"/>
                 </a:solidFill>
                 <a:latin typeface="Noto Sans KR"/>
               </a:defRPr>
@@ -8986,7 +7790,7 @@
             <a:pPr>
               <a:defRPr sz="2600" b="1">
                 <a:solidFill>
-                  <a:srgbClr val="1D1D1F"/>
+                  <a:srgbClr val="FFFFFF"/>
                 </a:solidFill>
                 <a:latin typeface="Noto Sans KR"/>
               </a:defRPr>
@@ -9012,7 +7816,7 @@
             <a:avLst/>
           </a:prstGeom>
           <a:solidFill>
-            <a:srgbClr val="DADADE"/>
+            <a:srgbClr val="334155"/>
           </a:solidFill>
           <a:ln>
             <a:noFill/>
@@ -9065,13 +7869,13 @@
             <a:pPr>
               <a:defRPr sz="900">
                 <a:solidFill>
-                  <a:srgbClr val="86868B"/>
-                </a:solidFill>
-                <a:latin typeface="Noto Sans KR"/>
-              </a:defRPr>
-            </a:pPr>
-            <a:r>
-              <a:t>AICA 자격심사 시스템 사용자 매뉴얼 · Apple Concept</a:t>
+                  <a:srgbClr val="94A3B8"/>
+                </a:solidFill>
+                <a:latin typeface="Noto Sans KR"/>
+              </a:defRPr>
+            </a:pPr>
+            <a:r>
+              <a:t>AICA 자격심사 시스템 사용자 매뉴얼 · Web App Dark Theme</a:t>
             </a:r>
           </a:p>
         </p:txBody>
@@ -9101,7 +7905,7 @@
             <a:pPr algn="r">
               <a:defRPr sz="900">
                 <a:solidFill>
-                  <a:srgbClr val="86868B"/>
+                  <a:srgbClr val="94A3B8"/>
                 </a:solidFill>
                 <a:latin typeface="Noto Sans KR"/>
               </a:defRPr>
@@ -9121,17 +7925,17 @@
         <p:spPr>
           <a:xfrm>
             <a:off x="548640" y="1828800"/>
-            <a:ext cx="5303520" cy="4114800"/>
+            <a:ext cx="5486400" cy="4114800"/>
           </a:xfrm>
           <a:prstGeom prst="roundRect">
             <a:avLst/>
           </a:prstGeom>
           <a:solidFill>
-            <a:srgbClr val="F5F5F7"/>
+            <a:srgbClr val="1E293B"/>
           </a:solidFill>
           <a:ln w="12700">
             <a:solidFill>
-              <a:srgbClr val="DADADE"/>
+              <a:srgbClr val="334155"/>
             </a:solidFill>
           </a:ln>
         </p:spPr>
@@ -9166,7 +7970,7 @@
         <p:spPr>
           <a:xfrm>
             <a:off x="731520" y="2011680"/>
-            <a:ext cx="4937760" cy="3749040"/>
+            <a:ext cx="5120640" cy="3749040"/>
           </a:xfrm>
           <a:prstGeom prst="rect">
             <a:avLst/>
@@ -9185,109 +7989,93 @@
               </a:spcAft>
               <a:defRPr sz="1500" b="1">
                 <a:solidFill>
-                  <a:srgbClr val="0066CC"/>
-                </a:solidFill>
-                <a:latin typeface="Noto Sans KR"/>
-              </a:defRPr>
-            </a:pPr>
-            <a:r>
-              <a:t>운영간사</a:t>
-            </a:r>
-          </a:p>
-          <a:p>
-            <a:pPr>
-              <a:spcAft>
-                <a:spcPts val="600"/>
-              </a:spcAft>
-              <a:defRPr sz="1100">
-                <a:solidFill>
-                  <a:srgbClr val="1D1D1F"/>
-                </a:solidFill>
-                <a:latin typeface="Noto Sans KR"/>
-              </a:defRPr>
-            </a:pPr>
-            <a:r>
-              <a:t>정확한 심사 건을 만들고 흐름을 관리</a:t>
-            </a:r>
-          </a:p>
-          <a:p>
-            <a:pPr>
-              <a:spcAft>
-                <a:spcPts val="600"/>
-              </a:spcAft>
-              <a:defRPr sz="1100">
-                <a:solidFill>
-                  <a:srgbClr val="1D1D1F"/>
-                </a:solidFill>
-                <a:latin typeface="Noto Sans KR"/>
-              </a:defRPr>
-            </a:pPr>
-            <a:r>
-              <a:t>• 신규 평가과제 등록</a:t>
-            </a:r>
-          </a:p>
-          <a:p>
-            <a:pPr>
-              <a:spcAft>
-                <a:spcPts val="600"/>
-              </a:spcAft>
-              <a:defRPr sz="1100">
-                <a:solidFill>
-                  <a:srgbClr val="1D1D1F"/>
-                </a:solidFill>
-                <a:latin typeface="Noto Sans KR"/>
-              </a:defRPr>
-            </a:pPr>
-            <a:r>
-              <a:t>• 현업·기술·보안 패널 지정</a:t>
-            </a:r>
-          </a:p>
-          <a:p>
-            <a:pPr>
-              <a:spcAft>
-                <a:spcPts val="600"/>
-              </a:spcAft>
-              <a:defRPr sz="1100">
-                <a:solidFill>
-                  <a:srgbClr val="1D1D1F"/>
-                </a:solidFill>
-                <a:latin typeface="Noto Sans KR"/>
-              </a:defRPr>
-            </a:pPr>
-            <a:r>
-              <a:t>• 이해상충 여부 확인 및 조정</a:t>
-            </a:r>
-          </a:p>
-          <a:p>
-            <a:pPr>
-              <a:spcAft>
-                <a:spcPts val="600"/>
-              </a:spcAft>
-              <a:defRPr sz="1100">
-                <a:solidFill>
-                  <a:srgbClr val="1D1D1F"/>
-                </a:solidFill>
-                <a:latin typeface="Noto Sans KR"/>
-              </a:defRPr>
-            </a:pPr>
-            <a:r>
-              <a:t>• 큐·상태·점수 진척 모니터링</a:t>
-            </a:r>
-          </a:p>
-          <a:p>
-            <a:pPr>
-              <a:spcAft>
-                <a:spcPts val="600"/>
-              </a:spcAft>
-              <a:defRPr sz="1100">
-                <a:solidFill>
-                  <a:srgbClr val="1D1D1F"/>
-                </a:solidFill>
-                <a:latin typeface="Noto Sans KR"/>
-              </a:defRPr>
-            </a:pPr>
-            <a:r>
-              <a:t>• 최종 보고서 확인 및 인쇄</a:t>
+                  <a:srgbClr val="FFFFFF"/>
+                </a:solidFill>
+                <a:latin typeface="Noto Sans KR"/>
+              </a:defRPr>
+            </a:pPr>
+            <a:r>
+              <a:t>사용자 역할 분리 및 완료 기준</a:t>
+            </a:r>
+          </a:p>
+          <a:p>
+            <a:pPr>
+              <a:spcAft>
+                <a:spcPts val="600"/>
+              </a:spcAft>
+              <a:defRPr sz="1100">
+                <a:solidFill>
+                  <a:srgbClr val="94A3B8"/>
+                </a:solidFill>
+                <a:latin typeface="Noto Sans KR"/>
+              </a:defRPr>
+            </a:pPr>
+            <a:r>
+              <a:t>운영간사의 핵심 임무 및 완료 조건:</a:t>
+            </a:r>
+          </a:p>
+          <a:p>
+            <a:pPr>
+              <a:spcAft>
+                <a:spcPts val="600"/>
+              </a:spcAft>
+              <a:defRPr sz="1100">
+                <a:solidFill>
+                  <a:srgbClr val="94A3B8"/>
+                </a:solidFill>
+                <a:latin typeface="Noto Sans KR"/>
+              </a:defRPr>
+            </a:pPr>
+            <a:r>
+              <a:t>• 신규 평가과제 및 후보자 등록</a:t>
+            </a:r>
+          </a:p>
+          <a:p>
+            <a:pPr>
+              <a:spcAft>
+                <a:spcPts val="600"/>
+              </a:spcAft>
+              <a:defRPr sz="1100">
+                <a:solidFill>
+                  <a:srgbClr val="94A3B8"/>
+                </a:solidFill>
+                <a:latin typeface="Noto Sans KR"/>
+              </a:defRPr>
+            </a:pPr>
+            <a:r>
+              <a:t>• 3인 패널 지정 및 이해상충 자가검증</a:t>
+            </a:r>
+          </a:p>
+          <a:p>
+            <a:pPr>
+              <a:spcAft>
+                <a:spcPts val="600"/>
+              </a:spcAft>
+              <a:defRPr sz="1100">
+                <a:solidFill>
+                  <a:srgbClr val="94A3B8"/>
+                </a:solidFill>
+                <a:latin typeface="Noto Sans KR"/>
+              </a:defRPr>
+            </a:pPr>
+            <a:r>
+              <a:t>• 큐·상태·점수 진척도 실시간 모니터링</a:t>
+            </a:r>
+          </a:p>
+          <a:p>
+            <a:pPr>
+              <a:spcAft>
+                <a:spcPts val="600"/>
+              </a:spcAft>
+              <a:defRPr sz="1100">
+                <a:solidFill>
+                  <a:srgbClr val="94A3B8"/>
+                </a:solidFill>
+                <a:latin typeface="Noto Sans KR"/>
+              </a:defRPr>
+            </a:pPr>
+            <a:r>
+              <a:t>• 완료 신호: 3인의 심사가 완료되고 최종 판정서 생성</a:t>
             </a:r>
           </a:p>
           <a:p>
@@ -9298,13 +8086,78 @@
               </a:spcAft>
               <a:defRPr sz="1100">
                 <a:solidFill>
-                  <a:srgbClr val="1D1D1F"/>
-                </a:solidFill>
-                <a:latin typeface="Noto Sans KR"/>
-              </a:defRPr>
-            </a:pPr>
-            <a:r>
-              <a:t>[완료 신호] 3인의 심사가 모두 제출되고 종합 판정이 표시됨</a:t>
+                  <a:srgbClr val="94A3B8"/>
+                </a:solidFill>
+                <a:latin typeface="Noto Sans KR"/>
+              </a:defRPr>
+            </a:pPr>
+            <a:r>
+              <a:t>심사위원의 핵심 임무 및 완료 조건:</a:t>
+            </a:r>
+          </a:p>
+          <a:p>
+            <a:pPr>
+              <a:spcAft>
+                <a:spcPts val="600"/>
+              </a:spcAft>
+              <a:defRPr sz="1100">
+                <a:solidFill>
+                  <a:srgbClr val="94A3B8"/>
+                </a:solidFill>
+                <a:latin typeface="Noto Sans KR"/>
+              </a:defRPr>
+            </a:pPr>
+            <a:r>
+              <a:t>• 제출물·시연·링크 검토 및 공통 보안 체크리스트 확인</a:t>
+            </a:r>
+          </a:p>
+          <a:p>
+            <a:pPr>
+              <a:spcAft>
+                <a:spcPts val="600"/>
+              </a:spcAft>
+              <a:defRPr sz="1100">
+                <a:solidFill>
+                  <a:srgbClr val="94A3B8"/>
+                </a:solidFill>
+                <a:latin typeface="Noto Sans KR"/>
+              </a:defRPr>
+            </a:pPr>
+            <a:r>
+              <a:t>• Level 3 / Level 4 루브릭 평가 및 면접 질문 작성</a:t>
+            </a:r>
+          </a:p>
+          <a:p>
+            <a:pPr>
+              <a:spcAft>
+                <a:spcPts val="600"/>
+              </a:spcAft>
+              <a:defRPr sz="1100">
+                <a:solidFill>
+                  <a:srgbClr val="94A3B8"/>
+                </a:solidFill>
+                <a:latin typeface="Noto Sans KR"/>
+              </a:defRPr>
+            </a:pPr>
+            <a:r>
+              <a:t>• 완료 신호: 내 심사 상태 배지가 「완료」로 표시됨</a:t>
+            </a:r>
+          </a:p>
+          <a:p>
+            <a:br/>
+            <a:pPr>
+              <a:spcAft>
+                <a:spcPts val="600"/>
+              </a:spcAft>
+              <a:defRPr sz="1100">
+                <a:solidFill>
+                  <a:srgbClr val="94A3B8"/>
+                </a:solidFill>
+                <a:latin typeface="Noto Sans KR"/>
+              </a:defRPr>
+            </a:pPr>
+            <a:r>
+              <a:t>오른쪽 화면: 실시간 진행 상황을 요약하는 관리용 대시보드 인터페이스</a:t>
             </a:r>
           </a:p>
         </p:txBody>
@@ -9317,18 +8170,18 @@
         </p:nvSpPr>
         <p:spPr>
           <a:xfrm>
-            <a:off x="6309360" y="1828800"/>
-            <a:ext cx="5303520" cy="4114800"/>
+            <a:off x="6400800" y="1828800"/>
+            <a:ext cx="5212080" cy="4114800"/>
           </a:xfrm>
           <a:prstGeom prst="roundRect">
             <a:avLst/>
           </a:prstGeom>
           <a:solidFill>
-            <a:srgbClr val="FFFFFF"/>
+            <a:srgbClr val="1E293B"/>
           </a:solidFill>
-          <a:ln w="12700">
+          <a:ln w="19050">
             <a:solidFill>
-              <a:srgbClr val="DADADE"/>
+              <a:srgbClr val="6366F1"/>
             </a:solidFill>
           </a:ln>
         </p:spPr>
@@ -9354,158 +8207,30 @@
           </a:p>
         </p:txBody>
       </p:sp>
-      <p:sp>
-        <p:nvSpPr>
-          <p:cNvPr id="10" name="TextBox 9"/>
-          <p:cNvSpPr txBox="1"/>
-          <p:nvPr/>
-        </p:nvSpPr>
-        <p:spPr>
-          <a:xfrm>
-            <a:off x="6492240" y="2011680"/>
-            <a:ext cx="4937760" cy="3749040"/>
-          </a:xfrm>
-          <a:prstGeom prst="rect">
-            <a:avLst/>
-          </a:prstGeom>
-          <a:noFill/>
-        </p:spPr>
-        <p:txBody>
-          <a:bodyPr wrap="square">
-            <a:spAutoFit/>
-          </a:bodyPr>
-          <a:lstStyle/>
-          <a:p>
-            <a:pPr>
-              <a:spcAft>
-                <a:spcPts val="1200"/>
-              </a:spcAft>
-              <a:defRPr sz="1500" b="1">
-                <a:solidFill>
-                  <a:srgbClr val="1D1D1F"/>
-                </a:solidFill>
-                <a:latin typeface="Noto Sans KR"/>
-              </a:defRPr>
-            </a:pPr>
-            <a:r>
-              <a:t>심사위원</a:t>
-            </a:r>
-          </a:p>
-          <a:p>
-            <a:pPr>
-              <a:spcAft>
-                <a:spcPts val="600"/>
-              </a:spcAft>
-              <a:defRPr sz="1100">
-                <a:solidFill>
-                  <a:srgbClr val="1D1D1F"/>
-                </a:solidFill>
-                <a:latin typeface="Noto Sans KR"/>
-              </a:defRPr>
-            </a:pPr>
-            <a:r>
-              <a:t>배정된 과제를 근거에 따라 독립 평가</a:t>
-            </a:r>
-          </a:p>
-          <a:p>
-            <a:pPr>
-              <a:spcAft>
-                <a:spcPts val="600"/>
-              </a:spcAft>
-              <a:defRPr sz="1100">
-                <a:solidFill>
-                  <a:srgbClr val="1D1D1F"/>
-                </a:solidFill>
-                <a:latin typeface="Noto Sans KR"/>
-              </a:defRPr>
-            </a:pPr>
-            <a:r>
-              <a:t>• 제출물·시연·링크 검토 및 재현성 검증</a:t>
-            </a:r>
-          </a:p>
-          <a:p>
-            <a:pPr>
-              <a:spcAft>
-                <a:spcPts val="600"/>
-              </a:spcAft>
-              <a:defRPr sz="1100">
-                <a:solidFill>
-                  <a:srgbClr val="1D1D1F"/>
-                </a:solidFill>
-                <a:latin typeface="Noto Sans KR"/>
-              </a:defRPr>
-            </a:pPr>
-            <a:r>
-              <a:t>• 공통 보안 체크리스트 확인</a:t>
-            </a:r>
-          </a:p>
-          <a:p>
-            <a:pPr>
-              <a:spcAft>
-                <a:spcPts val="600"/>
-              </a:spcAft>
-              <a:defRPr sz="1100">
-                <a:solidFill>
-                  <a:srgbClr val="1D1D1F"/>
-                </a:solidFill>
-                <a:latin typeface="Noto Sans KR"/>
-              </a:defRPr>
-            </a:pPr>
-            <a:r>
-              <a:t>• Level 3 / Level 4 루브릭 채점</a:t>
-            </a:r>
-          </a:p>
-          <a:p>
-            <a:pPr>
-              <a:spcAft>
-                <a:spcPts val="600"/>
-              </a:spcAft>
-              <a:defRPr sz="1100">
-                <a:solidFill>
-                  <a:srgbClr val="1D1D1F"/>
-                </a:solidFill>
-                <a:latin typeface="Noto Sans KR"/>
-              </a:defRPr>
-            </a:pPr>
-            <a:r>
-              <a:t>• 평가 의견 및 질문 면접 기록</a:t>
-            </a:r>
-          </a:p>
-          <a:p>
-            <a:pPr>
-              <a:spcAft>
-                <a:spcPts val="600"/>
-              </a:spcAft>
-              <a:defRPr sz="1100">
-                <a:solidFill>
-                  <a:srgbClr val="1D1D1F"/>
-                </a:solidFill>
-                <a:latin typeface="Noto Sans KR"/>
-              </a:defRPr>
-            </a:pPr>
-            <a:r>
-              <a:t>• 위원 간 점수 편차 확인 후 최종 제출</a:t>
-            </a:r>
-          </a:p>
-          <a:p>
-            <a:br/>
-            <a:pPr>
-              <a:spcAft>
-                <a:spcPts val="600"/>
-              </a:spcAft>
-              <a:defRPr sz="1100">
-                <a:solidFill>
-                  <a:srgbClr val="1D1D1F"/>
-                </a:solidFill>
-                <a:latin typeface="Noto Sans KR"/>
-              </a:defRPr>
-            </a:pPr>
-            <a:r>
-              <a:t>[완료 신호] 내 심사 상태가 「심사완료」로 표시됨</a:t>
-            </a:r>
-          </a:p>
-        </p:txBody>
-      </p:sp>
+      <p:pic>
+        <p:nvPicPr>
+          <p:cNvPr id="10" name="Picture 9" descr="media__1784188798650.png"/>
+          <p:cNvPicPr>
+            <a:picLocks noChangeAspect="1"/>
+          </p:cNvPicPr>
+          <p:nvPr/>
+        </p:nvPicPr>
+        <p:blipFill>
+          <a:blip r:embed="rId2"/>
+          <a:stretch>
+            <a:fillRect/>
+          </a:stretch>
+        </p:blipFill>
+        <p:spPr>
+          <a:xfrm>
+            <a:off x="7369320" y="1965960"/>
+            <a:ext cx="3275038" cy="3840480"/>
+          </a:xfrm>
+          <a:prstGeom prst="rect">
+            <a:avLst/>
+          </a:prstGeom>
+        </p:spPr>
+      </p:pic>
     </p:spTree>
   </p:cSld>
   <p:clrMapOvr>
@@ -9520,7 +8245,7 @@
     <p:bg>
       <p:bgPr>
         <a:solidFill>
-          <a:srgbClr val="F5F5F7"/>
+          <a:srgbClr val="0F172A"/>
         </a:solidFill>
         <a:effectLst/>
       </p:bgPr>
@@ -9557,7 +8282,7 @@
             <a:pPr>
               <a:defRPr sz="1100" b="1">
                 <a:solidFill>
-                  <a:srgbClr val="0066CC"/>
+                  <a:srgbClr val="38BDF8"/>
                 </a:solidFill>
                 <a:latin typeface="Noto Sans KR"/>
               </a:defRPr>
@@ -9593,7 +8318,7 @@
             <a:pPr>
               <a:defRPr sz="2600" b="1">
                 <a:solidFill>
-                  <a:srgbClr val="1D1D1F"/>
+                  <a:srgbClr val="FFFFFF"/>
                 </a:solidFill>
                 <a:latin typeface="Noto Sans KR"/>
               </a:defRPr>
@@ -9619,7 +8344,7 @@
             <a:avLst/>
           </a:prstGeom>
           <a:solidFill>
-            <a:srgbClr val="DADADE"/>
+            <a:srgbClr val="334155"/>
           </a:solidFill>
           <a:ln>
             <a:noFill/>
@@ -9672,13 +8397,13 @@
             <a:pPr>
               <a:defRPr sz="900">
                 <a:solidFill>
-                  <a:srgbClr val="86868B"/>
-                </a:solidFill>
-                <a:latin typeface="Noto Sans KR"/>
-              </a:defRPr>
-            </a:pPr>
-            <a:r>
-              <a:t>AICA 자격심사 시스템 사용자 매뉴얼 · Apple Concept</a:t>
+                  <a:srgbClr val="94A3B8"/>
+                </a:solidFill>
+                <a:latin typeface="Noto Sans KR"/>
+              </a:defRPr>
+            </a:pPr>
+            <a:r>
+              <a:t>AICA 자격심사 시스템 사용자 매뉴얼 · Web App Dark Theme</a:t>
             </a:r>
           </a:p>
         </p:txBody>
@@ -9708,7 +8433,7 @@
             <a:pPr algn="r">
               <a:defRPr sz="900">
                 <a:solidFill>
-                  <a:srgbClr val="86868B"/>
+                  <a:srgbClr val="94A3B8"/>
                 </a:solidFill>
                 <a:latin typeface="Noto Sans KR"/>
               </a:defRPr>
@@ -9734,11 +8459,11 @@
             <a:avLst/>
           </a:prstGeom>
           <a:solidFill>
-            <a:srgbClr val="FFFFFF"/>
+            <a:srgbClr val="1E293B"/>
           </a:solidFill>
           <a:ln w="12700">
             <a:solidFill>
-              <a:srgbClr val="DADADE"/>
+              <a:srgbClr val="334155"/>
             </a:solidFill>
           </a:ln>
         </p:spPr>
@@ -9792,7 +8517,7 @@
               </a:spcAft>
               <a:defRPr sz="1500" b="1">
                 <a:solidFill>
-                  <a:srgbClr val="1D1D1F"/>
+                  <a:srgbClr val="FFFFFF"/>
                 </a:solidFill>
                 <a:latin typeface="Noto Sans KR"/>
               </a:defRPr>
@@ -9808,7 +8533,7 @@
               </a:spcAft>
               <a:defRPr sz="1100">
                 <a:solidFill>
-                  <a:srgbClr val="1D1D1F"/>
+                  <a:srgbClr val="94A3B8"/>
                 </a:solidFill>
                 <a:latin typeface="Noto Sans KR"/>
               </a:defRPr>
@@ -9824,7 +8549,7 @@
               </a:spcAft>
               <a:defRPr sz="1100">
                 <a:solidFill>
-                  <a:srgbClr val="1D1D1F"/>
+                  <a:srgbClr val="94A3B8"/>
                 </a:solidFill>
                 <a:latin typeface="Noto Sans KR"/>
               </a:defRPr>
@@ -9840,7 +8565,7 @@
               </a:spcAft>
               <a:defRPr sz="1100">
                 <a:solidFill>
-                  <a:srgbClr val="1D1D1F"/>
+                  <a:srgbClr val="94A3B8"/>
                 </a:solidFill>
                 <a:latin typeface="Noto Sans KR"/>
               </a:defRPr>
@@ -9856,7 +8581,7 @@
               </a:spcAft>
               <a:defRPr sz="1100">
                 <a:solidFill>
-                  <a:srgbClr val="1D1D1F"/>
+                  <a:srgbClr val="94A3B8"/>
                 </a:solidFill>
                 <a:latin typeface="Noto Sans KR"/>
               </a:defRPr>
@@ -9873,7 +8598,7 @@
               </a:spcAft>
               <a:defRPr sz="1100">
                 <a:solidFill>
-                  <a:srgbClr val="1D1D1F"/>
+                  <a:srgbClr val="94A3B8"/>
                 </a:solidFill>
                 <a:latin typeface="Noto Sans KR"/>
               </a:defRPr>
@@ -9890,7 +8615,7 @@
               </a:spcAft>
               <a:defRPr sz="1100">
                 <a:solidFill>
-                  <a:srgbClr val="1D1D1F"/>
+                  <a:srgbClr val="94A3B8"/>
                 </a:solidFill>
                 <a:latin typeface="Noto Sans KR"/>
               </a:defRPr>
@@ -9916,11 +8641,11 @@
             <a:avLst/>
           </a:prstGeom>
           <a:solidFill>
-            <a:srgbClr val="FFFFFF"/>
+            <a:srgbClr val="1E293B"/>
           </a:solidFill>
-          <a:ln w="12700">
+          <a:ln w="19050">
             <a:solidFill>
-              <a:srgbClr val="DADADE"/>
+              <a:srgbClr val="6366F1"/>
             </a:solidFill>
           </a:ln>
         </p:spPr>
@@ -9984,7 +8709,7 @@
     <p:bg>
       <p:bgPr>
         <a:solidFill>
-          <a:srgbClr val="F5F5F7"/>
+          <a:srgbClr val="0F172A"/>
         </a:solidFill>
         <a:effectLst/>
       </p:bgPr>
@@ -10021,7 +8746,7 @@
             <a:pPr>
               <a:defRPr sz="1100" b="1">
                 <a:solidFill>
-                  <a:srgbClr val="0066CC"/>
+                  <a:srgbClr val="38BDF8"/>
                 </a:solidFill>
                 <a:latin typeface="Noto Sans KR"/>
               </a:defRPr>
@@ -10057,7 +8782,7 @@
             <a:pPr>
               <a:defRPr sz="2600" b="1">
                 <a:solidFill>
-                  <a:srgbClr val="1D1D1F"/>
+                  <a:srgbClr val="FFFFFF"/>
                 </a:solidFill>
                 <a:latin typeface="Noto Sans KR"/>
               </a:defRPr>
@@ -10083,7 +8808,7 @@
             <a:avLst/>
           </a:prstGeom>
           <a:solidFill>
-            <a:srgbClr val="DADADE"/>
+            <a:srgbClr val="334155"/>
           </a:solidFill>
           <a:ln>
             <a:noFill/>
@@ -10136,13 +8861,13 @@
             <a:pPr>
               <a:defRPr sz="900">
                 <a:solidFill>
-                  <a:srgbClr val="86868B"/>
-                </a:solidFill>
-                <a:latin typeface="Noto Sans KR"/>
-              </a:defRPr>
-            </a:pPr>
-            <a:r>
-              <a:t>AICA 자격심사 시스템 사용자 매뉴얼 · Apple Concept</a:t>
+                  <a:srgbClr val="94A3B8"/>
+                </a:solidFill>
+                <a:latin typeface="Noto Sans KR"/>
+              </a:defRPr>
+            </a:pPr>
+            <a:r>
+              <a:t>AICA 자격심사 시스템 사용자 매뉴얼 · Web App Dark Theme</a:t>
             </a:r>
           </a:p>
         </p:txBody>
@@ -10172,7 +8897,7 @@
             <a:pPr algn="r">
               <a:defRPr sz="900">
                 <a:solidFill>
-                  <a:srgbClr val="86868B"/>
+                  <a:srgbClr val="94A3B8"/>
                 </a:solidFill>
                 <a:latin typeface="Noto Sans KR"/>
               </a:defRPr>
@@ -10192,17 +8917,17 @@
         <p:spPr>
           <a:xfrm>
             <a:off x="548640" y="1828800"/>
-            <a:ext cx="3474720" cy="4114800"/>
+            <a:ext cx="5486400" cy="4114800"/>
           </a:xfrm>
           <a:prstGeom prst="roundRect">
             <a:avLst/>
           </a:prstGeom>
           <a:solidFill>
-            <a:srgbClr val="F5F5F7"/>
+            <a:srgbClr val="1E293B"/>
           </a:solidFill>
           <a:ln w="12700">
             <a:solidFill>
-              <a:srgbClr val="DADADE"/>
+              <a:srgbClr val="334155"/>
             </a:solidFill>
           </a:ln>
         </p:spPr>
@@ -10237,7 +8962,7 @@
         <p:spPr>
           <a:xfrm>
             <a:off x="731520" y="2011680"/>
-            <a:ext cx="3108960" cy="3749040"/>
+            <a:ext cx="5120640" cy="3749040"/>
           </a:xfrm>
           <a:prstGeom prst="rect">
             <a:avLst/>
@@ -10256,77 +8981,45 @@
               </a:spcAft>
               <a:defRPr sz="1500" b="1">
                 <a:solidFill>
-                  <a:srgbClr val="0066CC"/>
-                </a:solidFill>
-                <a:latin typeface="Noto Sans KR"/>
-              </a:defRPr>
-            </a:pPr>
-            <a:r>
-              <a:t>01 지원자 정보</a:t>
-            </a:r>
-          </a:p>
-          <a:p>
-            <a:pPr>
-              <a:spcAft>
-                <a:spcPts val="600"/>
-              </a:spcAft>
-              <a:defRPr sz="1100">
-                <a:solidFill>
-                  <a:srgbClr val="1D1D1F"/>
-                </a:solidFill>
-                <a:latin typeface="Noto Sans KR"/>
-              </a:defRPr>
-            </a:pPr>
-            <a:r>
-              <a:t>• 성명 및 사내 이메일 주소</a:t>
-            </a:r>
-          </a:p>
-          <a:p>
-            <a:pPr>
-              <a:spcAft>
-                <a:spcPts val="600"/>
-              </a:spcAft>
-              <a:defRPr sz="1100">
-                <a:solidFill>
-                  <a:srgbClr val="1D1D1F"/>
-                </a:solidFill>
-                <a:latin typeface="Noto Sans KR"/>
-              </a:defRPr>
-            </a:pPr>
-            <a:r>
-              <a:t>• 소속 관계사 및 부서명</a:t>
-            </a:r>
-          </a:p>
-          <a:p>
-            <a:pPr>
-              <a:spcAft>
-                <a:spcPts val="600"/>
-              </a:spcAft>
-              <a:defRPr sz="1100">
-                <a:solidFill>
-                  <a:srgbClr val="1D1D1F"/>
-                </a:solidFill>
-                <a:latin typeface="Noto Sans KR"/>
-              </a:defRPr>
-            </a:pPr>
-            <a:r>
-              <a:t>• 자격 인증 레벨 (Level 3 / 4)</a:t>
-            </a:r>
-          </a:p>
-          <a:p>
-            <a:pPr>
-              <a:spcAft>
-                <a:spcPts val="600"/>
-              </a:spcAft>
-              <a:defRPr sz="1100">
-                <a:solidFill>
-                  <a:srgbClr val="1D1D1F"/>
-                </a:solidFill>
-                <a:latin typeface="Noto Sans KR"/>
-              </a:defRPr>
-            </a:pPr>
-            <a:r>
-              <a:t>• 과제 유형 선택</a:t>
+                  <a:srgbClr val="FFFFFF"/>
+                </a:solidFill>
+                <a:latin typeface="Noto Sans KR"/>
+              </a:defRPr>
+            </a:pPr>
+            <a:r>
+              <a:t>후보자 정보 및 증빙 링크 등록 폼</a:t>
+            </a:r>
+          </a:p>
+          <a:p>
+            <a:pPr>
+              <a:spcAft>
+                <a:spcPts val="600"/>
+              </a:spcAft>
+              <a:defRPr sz="1100">
+                <a:solidFill>
+                  <a:srgbClr val="94A3B8"/>
+                </a:solidFill>
+                <a:latin typeface="Noto Sans KR"/>
+              </a:defRPr>
+            </a:pPr>
+            <a:r>
+              <a:t>01 지원자 정보:</a:t>
+            </a:r>
+          </a:p>
+          <a:p>
+            <a:pPr>
+              <a:spcAft>
+                <a:spcPts val="600"/>
+              </a:spcAft>
+              <a:defRPr sz="1100">
+                <a:solidFill>
+                  <a:srgbClr val="94A3B8"/>
+                </a:solidFill>
+                <a:latin typeface="Noto Sans KR"/>
+              </a:defRPr>
+            </a:pPr>
+            <a:r>
+              <a:t>• 성명, 사내 이메일, 소속 관계사/부서, 자격 레벨(L3/L4), 과제 유형</a:t>
             </a:r>
           </a:p>
           <a:p>
@@ -10337,17 +9030,79 @@
               </a:spcAft>
               <a:defRPr sz="1100">
                 <a:solidFill>
-                  <a:srgbClr val="1D1D1F"/>
-                </a:solidFill>
-                <a:latin typeface="Noto Sans KR"/>
-              </a:defRPr>
-            </a:pPr>
-            <a:r>
-              <a:t>* 유형 예시:</a:t>
-            </a:r>
+                  <a:srgbClr val="94A3B8"/>
+                </a:solidFill>
+                <a:latin typeface="Noto Sans KR"/>
+              </a:defRPr>
+            </a:pPr>
+            <a:r>
+              <a:t>02 과제 내용 및 6S 요약:</a:t>
+            </a:r>
+          </a:p>
+          <a:p>
+            <a:pPr>
+              <a:spcAft>
+                <a:spcPts val="600"/>
+              </a:spcAft>
+              <a:defRPr sz="1100">
+                <a:solidFill>
+                  <a:srgbClr val="94A3B8"/>
+                </a:solidFill>
+                <a:latin typeface="Noto Sans KR"/>
+              </a:defRPr>
+            </a:pPr>
+            <a:r>
+              <a:t>• 평가 대상 과제명, Pain Point, AI 해결 방안, 핵심 기대효과 기술</a:t>
+            </a:r>
+          </a:p>
+          <a:p>
             <a:br/>
-            <a:r>
-              <a:t>RAG/챗봇, 데이터분석, 웹/앱, 업무자동화</a:t>
+            <a:pPr>
+              <a:spcAft>
+                <a:spcPts val="600"/>
+              </a:spcAft>
+              <a:defRPr sz="1100">
+                <a:solidFill>
+                  <a:srgbClr val="94A3B8"/>
+                </a:solidFill>
+                <a:latin typeface="Noto Sans KR"/>
+              </a:defRPr>
+            </a:pPr>
+            <a:r>
+              <a:t>03 증빙 파일 링크 등록:</a:t>
+            </a:r>
+          </a:p>
+          <a:p>
+            <a:pPr>
+              <a:spcAft>
+                <a:spcPts val="600"/>
+              </a:spcAft>
+              <a:defRPr sz="1100">
+                <a:solidFill>
+                  <a:srgbClr val="94A3B8"/>
+                </a:solidFill>
+                <a:latin typeface="Noto Sans KR"/>
+              </a:defRPr>
+            </a:pPr>
+            <a:r>
+              <a:t>• 디렉토리 구조 요약, 결과 보고서 PDF 주소, Git 소스코드 저장소, 시연 동영상 URL</a:t>
+            </a:r>
+          </a:p>
+          <a:p>
+            <a:br/>
+            <a:pPr>
+              <a:spcAft>
+                <a:spcPts val="600"/>
+              </a:spcAft>
+              <a:defRPr sz="1100">
+                <a:solidFill>
+                  <a:srgbClr val="94A3B8"/>
+                </a:solidFill>
+                <a:latin typeface="Noto Sans KR"/>
+              </a:defRPr>
+            </a:pPr>
+            <a:r>
+              <a:t>오른쪽 화면: 수동 과제 등록 및 패널 배정 기능이 활성화되는 대시보드 화면</a:t>
             </a:r>
           </a:p>
         </p:txBody>
@@ -10360,18 +9115,18 @@
         </p:nvSpPr>
         <p:spPr>
           <a:xfrm>
-            <a:off x="4389120" y="1828800"/>
-            <a:ext cx="3474720" cy="4114800"/>
+            <a:off x="6400800" y="1828800"/>
+            <a:ext cx="5212080" cy="4114800"/>
           </a:xfrm>
           <a:prstGeom prst="roundRect">
             <a:avLst/>
           </a:prstGeom>
           <a:solidFill>
-            <a:srgbClr val="FFFFFF"/>
+            <a:srgbClr val="1E293B"/>
           </a:solidFill>
-          <a:ln w="12700">
+          <a:ln w="19050">
             <a:solidFill>
-              <a:srgbClr val="DADADE"/>
+              <a:srgbClr val="6366F1"/>
             </a:solidFill>
           </a:ln>
         </p:spPr>
@@ -10397,311 +9152,30 @@
           </a:p>
         </p:txBody>
       </p:sp>
-      <p:sp>
-        <p:nvSpPr>
-          <p:cNvPr id="10" name="TextBox 9"/>
-          <p:cNvSpPr txBox="1"/>
-          <p:nvPr/>
-        </p:nvSpPr>
-        <p:spPr>
-          <a:xfrm>
-            <a:off x="4572000" y="2011680"/>
-            <a:ext cx="3108960" cy="3749040"/>
-          </a:xfrm>
-          <a:prstGeom prst="rect">
-            <a:avLst/>
-          </a:prstGeom>
-          <a:noFill/>
-        </p:spPr>
-        <p:txBody>
-          <a:bodyPr wrap="square">
-            <a:spAutoFit/>
-          </a:bodyPr>
-          <a:lstStyle/>
-          <a:p>
-            <a:pPr>
-              <a:spcAft>
-                <a:spcPts val="1200"/>
-              </a:spcAft>
-              <a:defRPr sz="1500" b="1">
-                <a:solidFill>
-                  <a:srgbClr val="1D1D1F"/>
-                </a:solidFill>
-                <a:latin typeface="Noto Sans KR"/>
-              </a:defRPr>
-            </a:pPr>
-            <a:r>
-              <a:t>02 과제 내용</a:t>
-            </a:r>
-          </a:p>
-          <a:p>
-            <a:pPr>
-              <a:spcAft>
-                <a:spcPts val="600"/>
-              </a:spcAft>
-              <a:defRPr sz="1100">
-                <a:solidFill>
-                  <a:srgbClr val="1D1D1F"/>
-                </a:solidFill>
-                <a:latin typeface="Noto Sans KR"/>
-              </a:defRPr>
-            </a:pPr>
-            <a:r>
-              <a:t>• 평가 대상 과제명</a:t>
-            </a:r>
-          </a:p>
-          <a:p>
-            <a:pPr>
-              <a:spcAft>
-                <a:spcPts val="600"/>
-              </a:spcAft>
-              <a:defRPr sz="1100">
-                <a:solidFill>
-                  <a:srgbClr val="1D1D1F"/>
-                </a:solidFill>
-                <a:latin typeface="Noto Sans KR"/>
-              </a:defRPr>
-            </a:pPr>
-            <a:r>
-              <a:t>• Pain Point (기존 업무의 비효율)</a:t>
-            </a:r>
-          </a:p>
-          <a:p>
-            <a:pPr>
-              <a:spcAft>
-                <a:spcPts val="600"/>
-              </a:spcAft>
-              <a:defRPr sz="1100">
-                <a:solidFill>
-                  <a:srgbClr val="1D1D1F"/>
-                </a:solidFill>
-                <a:latin typeface="Noto Sans KR"/>
-              </a:defRPr>
-            </a:pPr>
-            <a:r>
-              <a:t>• AI 해결 방안 (알고리즘 및 핵심 로직)</a:t>
-            </a:r>
-          </a:p>
-          <a:p>
-            <a:pPr>
-              <a:spcAft>
-                <a:spcPts val="600"/>
-              </a:spcAft>
-              <a:defRPr sz="1100">
-                <a:solidFill>
-                  <a:srgbClr val="1D1D1F"/>
-                </a:solidFill>
-                <a:latin typeface="Noto Sans KR"/>
-              </a:defRPr>
-            </a:pPr>
-            <a:r>
-              <a:t>• 6S 기준 보고서 핵심 요약</a:t>
-            </a:r>
-          </a:p>
-          <a:p>
-            <a:br/>
-            <a:pPr>
-              <a:spcAft>
-                <a:spcPts val="600"/>
-              </a:spcAft>
-              <a:defRPr sz="1100">
-                <a:solidFill>
-                  <a:srgbClr val="1D1D1F"/>
-                </a:solidFill>
-                <a:latin typeface="Noto Sans KR"/>
-              </a:defRPr>
-            </a:pPr>
-            <a:r>
-              <a:t>* 주의:</a:t>
-            </a:r>
-            <a:br/>
-            <a:r>
-              <a:t>문제, 해결, 기대효과가 유기적으로 연결되도록 작성합니다.</a:t>
-            </a:r>
-          </a:p>
-        </p:txBody>
-      </p:sp>
-      <p:sp>
-        <p:nvSpPr>
-          <p:cNvPr id="11" name="Rounded Rectangle 10"/>
-          <p:cNvSpPr/>
-          <p:nvPr/>
-        </p:nvSpPr>
-        <p:spPr>
-          <a:xfrm>
-            <a:off x="8229600" y="1828800"/>
-            <a:ext cx="3474720" cy="4114800"/>
-          </a:xfrm>
-          <a:prstGeom prst="roundRect">
-            <a:avLst/>
-          </a:prstGeom>
-          <a:solidFill>
-            <a:srgbClr val="FFFFFF"/>
-          </a:solidFill>
-          <a:ln w="12700">
-            <a:solidFill>
-              <a:srgbClr val="DADADE"/>
-            </a:solidFill>
-          </a:ln>
-        </p:spPr>
-        <p:style>
-          <a:lnRef idx="1">
-            <a:schemeClr val="accent1"/>
-          </a:lnRef>
-          <a:fillRef idx="3">
-            <a:schemeClr val="accent1"/>
-          </a:fillRef>
-          <a:effectRef idx="2">
-            <a:schemeClr val="accent1"/>
-          </a:effectRef>
-          <a:fontRef idx="minor">
-            <a:schemeClr val="lt1"/>
-          </a:fontRef>
-        </p:style>
-        <p:txBody>
-          <a:bodyPr rtlCol="0" anchor="ctr"/>
-          <a:lstStyle/>
-          <a:p>
-            <a:pPr algn="ctr"/>
-          </a:p>
-        </p:txBody>
-      </p:sp>
-      <p:sp>
-        <p:nvSpPr>
-          <p:cNvPr id="12" name="TextBox 11"/>
-          <p:cNvSpPr txBox="1"/>
-          <p:nvPr/>
-        </p:nvSpPr>
-        <p:spPr>
-          <a:xfrm>
-            <a:off x="8412480" y="2011680"/>
-            <a:ext cx="3108960" cy="3749040"/>
-          </a:xfrm>
-          <a:prstGeom prst="rect">
-            <a:avLst/>
-          </a:prstGeom>
-          <a:noFill/>
-        </p:spPr>
-        <p:txBody>
-          <a:bodyPr wrap="square">
-            <a:spAutoFit/>
-          </a:bodyPr>
-          <a:lstStyle/>
-          <a:p>
-            <a:pPr>
-              <a:spcAft>
-                <a:spcPts val="1200"/>
-              </a:spcAft>
-              <a:defRPr sz="1500" b="1">
-                <a:solidFill>
-                  <a:srgbClr val="1D1D1F"/>
-                </a:solidFill>
-                <a:latin typeface="Noto Sans KR"/>
-              </a:defRPr>
-            </a:pPr>
-            <a:r>
-              <a:t>03 증빙 링크</a:t>
-            </a:r>
-          </a:p>
-          <a:p>
-            <a:pPr>
-              <a:spcAft>
-                <a:spcPts val="600"/>
-              </a:spcAft>
-              <a:defRPr sz="1100">
-                <a:solidFill>
-                  <a:srgbClr val="1D1D1F"/>
-                </a:solidFill>
-                <a:latin typeface="Noto Sans KR"/>
-              </a:defRPr>
-            </a:pPr>
-            <a:r>
-              <a:t>선택 입력 항목:</a:t>
-            </a:r>
-          </a:p>
-          <a:p>
-            <a:pPr>
-              <a:spcAft>
-                <a:spcPts val="600"/>
-              </a:spcAft>
-              <a:defRPr sz="1100">
-                <a:solidFill>
-                  <a:srgbClr val="1D1D1F"/>
-                </a:solidFill>
-                <a:latin typeface="Noto Sans KR"/>
-              </a:defRPr>
-            </a:pPr>
-            <a:r>
-              <a:t>• 소스코드 디렉토리 구조 요약</a:t>
-            </a:r>
-          </a:p>
-          <a:p>
-            <a:pPr>
-              <a:spcAft>
-                <a:spcPts val="600"/>
-              </a:spcAft>
-              <a:defRPr sz="1100">
-                <a:solidFill>
-                  <a:srgbClr val="1D1D1F"/>
-                </a:solidFill>
-                <a:latin typeface="Noto Sans KR"/>
-              </a:defRPr>
-            </a:pPr>
-            <a:r>
-              <a:t>• 결과 보고서 PDF 문서 주소</a:t>
-            </a:r>
-          </a:p>
-          <a:p>
-            <a:pPr>
-              <a:spcAft>
-                <a:spcPts val="600"/>
-              </a:spcAft>
-              <a:defRPr sz="1100">
-                <a:solidFill>
-                  <a:srgbClr val="1D1D1F"/>
-                </a:solidFill>
-                <a:latin typeface="Noto Sans KR"/>
-              </a:defRPr>
-            </a:pPr>
-            <a:r>
-              <a:t>• Git 소스코드 저장소 주소</a:t>
-            </a:r>
-          </a:p>
-          <a:p>
-            <a:pPr>
-              <a:spcAft>
-                <a:spcPts val="600"/>
-              </a:spcAft>
-              <a:defRPr sz="1100">
-                <a:solidFill>
-                  <a:srgbClr val="1D1D1F"/>
-                </a:solidFill>
-                <a:latin typeface="Noto Sans KR"/>
-              </a:defRPr>
-            </a:pPr>
-            <a:r>
-              <a:t>• 시연 동영상 URL 주소</a:t>
-            </a:r>
-          </a:p>
-          <a:p>
-            <a:br/>
-            <a:pPr>
-              <a:spcAft>
-                <a:spcPts val="600"/>
-              </a:spcAft>
-              <a:defRPr sz="1100">
-                <a:solidFill>
-                  <a:srgbClr val="1D1D1F"/>
-                </a:solidFill>
-                <a:latin typeface="Noto Sans KR"/>
-              </a:defRPr>
-            </a:pPr>
-            <a:r>
-              <a:t>⚠️ 심사위원이 접근 가능한 사내 링크인지 등록 전 확인합니다.</a:t>
-            </a:r>
-          </a:p>
-        </p:txBody>
-      </p:sp>
+      <p:pic>
+        <p:nvPicPr>
+          <p:cNvPr id="10" name="Picture 9" descr="media__1784188798650.png"/>
+          <p:cNvPicPr>
+            <a:picLocks noChangeAspect="1"/>
+          </p:cNvPicPr>
+          <p:nvPr/>
+        </p:nvPicPr>
+        <p:blipFill>
+          <a:blip r:embed="rId2"/>
+          <a:stretch>
+            <a:fillRect/>
+          </a:stretch>
+        </p:blipFill>
+        <p:spPr>
+          <a:xfrm>
+            <a:off x="7369320" y="1965960"/>
+            <a:ext cx="3275038" cy="3840480"/>
+          </a:xfrm>
+          <a:prstGeom prst="rect">
+            <a:avLst/>
+          </a:prstGeom>
+        </p:spPr>
+      </p:pic>
     </p:spTree>
   </p:cSld>
   <p:clrMapOvr>
@@ -10716,7 +9190,7 @@
     <p:bg>
       <p:bgPr>
         <a:solidFill>
-          <a:srgbClr val="F5F5F7"/>
+          <a:srgbClr val="0F172A"/>
         </a:solidFill>
         <a:effectLst/>
       </p:bgPr>
@@ -10753,7 +9227,7 @@
             <a:pPr>
               <a:defRPr sz="1100" b="1">
                 <a:solidFill>
-                  <a:srgbClr val="0066CC"/>
+                  <a:srgbClr val="38BDF8"/>
                 </a:solidFill>
                 <a:latin typeface="Noto Sans KR"/>
               </a:defRPr>
@@ -10789,7 +9263,7 @@
             <a:pPr>
               <a:defRPr sz="2600" b="1">
                 <a:solidFill>
-                  <a:srgbClr val="1D1D1F"/>
+                  <a:srgbClr val="FFFFFF"/>
                 </a:solidFill>
                 <a:latin typeface="Noto Sans KR"/>
               </a:defRPr>
@@ -10815,7 +9289,7 @@
             <a:avLst/>
           </a:prstGeom>
           <a:solidFill>
-            <a:srgbClr val="DADADE"/>
+            <a:srgbClr val="334155"/>
           </a:solidFill>
           <a:ln>
             <a:noFill/>
@@ -10868,13 +9342,13 @@
             <a:pPr>
               <a:defRPr sz="900">
                 <a:solidFill>
-                  <a:srgbClr val="86868B"/>
-                </a:solidFill>
-                <a:latin typeface="Noto Sans KR"/>
-              </a:defRPr>
-            </a:pPr>
-            <a:r>
-              <a:t>AICA 자격심사 시스템 사용자 매뉴얼 · Apple Concept</a:t>
+                  <a:srgbClr val="94A3B8"/>
+                </a:solidFill>
+                <a:latin typeface="Noto Sans KR"/>
+              </a:defRPr>
+            </a:pPr>
+            <a:r>
+              <a:t>AICA 자격심사 시스템 사용자 매뉴얼 · Web App Dark Theme</a:t>
             </a:r>
           </a:p>
         </p:txBody>
@@ -10904,7 +9378,7 @@
             <a:pPr algn="r">
               <a:defRPr sz="900">
                 <a:solidFill>
-                  <a:srgbClr val="86868B"/>
+                  <a:srgbClr val="94A3B8"/>
                 </a:solidFill>
                 <a:latin typeface="Noto Sans KR"/>
               </a:defRPr>
@@ -10917,60 +9391,24 @@
       </p:sp>
       <p:sp>
         <p:nvSpPr>
-          <p:cNvPr id="7" name="TextBox 6"/>
-          <p:cNvSpPr txBox="1"/>
-          <p:nvPr/>
-        </p:nvSpPr>
-        <p:spPr>
-          <a:xfrm>
-            <a:off x="548640" y="1645920"/>
-            <a:ext cx="10972800" cy="457200"/>
-          </a:xfrm>
-          <a:prstGeom prst="rect">
-            <a:avLst/>
-          </a:prstGeom>
-          <a:noFill/>
-        </p:spPr>
-        <p:txBody>
-          <a:bodyPr wrap="none">
-            <a:spAutoFit/>
-          </a:bodyPr>
-          <a:lstStyle/>
-          <a:p>
-            <a:pPr>
-              <a:defRPr sz="1300">
-                <a:solidFill>
-                  <a:srgbClr val="1D1D1F"/>
-                </a:solidFill>
-                <a:latin typeface="Noto Sans KR"/>
-              </a:defRPr>
-            </a:pPr>
-            <a:r>
-              <a:t>「최적 패널 자동 추천」은 동일 관계사 소속을 우선 배제해 심사위원 후보를 제안합니다.</a:t>
-            </a:r>
-          </a:p>
-        </p:txBody>
-      </p:sp>
-      <p:sp>
-        <p:nvSpPr>
-          <p:cNvPr id="8" name="Rounded Rectangle 7"/>
+          <p:cNvPr id="7" name="Rounded Rectangle 6"/>
           <p:cNvSpPr/>
           <p:nvPr/>
         </p:nvSpPr>
         <p:spPr>
           <a:xfrm>
-            <a:off x="548640" y="2286000"/>
-            <a:ext cx="3474720" cy="2926080"/>
+            <a:off x="548640" y="1828800"/>
+            <a:ext cx="5486400" cy="4114800"/>
           </a:xfrm>
           <a:prstGeom prst="roundRect">
             <a:avLst/>
           </a:prstGeom>
           <a:solidFill>
-            <a:srgbClr val="FFFFFF"/>
+            <a:srgbClr val="1E293B"/>
           </a:solidFill>
           <a:ln w="12700">
             <a:solidFill>
-              <a:srgbClr val="DADADE"/>
+              <a:srgbClr val="334155"/>
             </a:solidFill>
           </a:ln>
         </p:spPr>
@@ -10989,51 +9427,163 @@
           </a:fontRef>
         </p:style>
         <p:txBody>
-          <a:bodyPr rtlCol="0" anchor="ctr" wrap="square"/>
-          <a:lstStyle/>
-          <a:p>
-            <a:pPr algn="ctr">
-              <a:spcAft>
-                <a:spcPts val="1500"/>
-              </a:spcAft>
-              <a:defRPr sz="2400" b="1">
-                <a:solidFill>
-                  <a:srgbClr val="0066CC"/>
-                </a:solidFill>
-                <a:latin typeface="Noto Sans KR"/>
-              </a:defRPr>
-            </a:pPr>
-            <a:r>
-              <a:t>1</a:t>
-            </a:r>
-          </a:p>
-          <a:p>
-            <a:pPr>
-              <a:spcAft>
-                <a:spcPts val="1000"/>
+          <a:bodyPr rtlCol="0" anchor="ctr"/>
+          <a:lstStyle/>
+          <a:p>
+            <a:pPr algn="ctr"/>
+          </a:p>
+        </p:txBody>
+      </p:sp>
+      <p:sp>
+        <p:nvSpPr>
+          <p:cNvPr id="8" name="TextBox 7"/>
+          <p:cNvSpPr txBox="1"/>
+          <p:nvPr/>
+        </p:nvSpPr>
+        <p:spPr>
+          <a:xfrm>
+            <a:off x="731520" y="2011680"/>
+            <a:ext cx="5120640" cy="3749040"/>
+          </a:xfrm>
+          <a:prstGeom prst="rect">
+            <a:avLst/>
+          </a:prstGeom>
+          <a:noFill/>
+        </p:spPr>
+        <p:txBody>
+          <a:bodyPr wrap="square">
+            <a:spAutoFit/>
+          </a:bodyPr>
+          <a:lstStyle/>
+          <a:p>
+            <a:pPr>
+              <a:spcAft>
+                <a:spcPts val="1200"/>
               </a:spcAft>
               <a:defRPr sz="1500" b="1">
                 <a:solidFill>
-                  <a:srgbClr val="1D1D1F"/>
-                </a:solidFill>
-                <a:latin typeface="Noto Sans KR"/>
-              </a:defRPr>
-            </a:pPr>
-            <a:r>
-              <a:t>1. 현업·사업성 위원</a:t>
-            </a:r>
-          </a:p>
-          <a:p>
-            <a:pPr>
-              <a:defRPr sz="1100">
-                <a:solidFill>
-                  <a:srgbClr val="86868B"/>
-                </a:solidFill>
-                <a:latin typeface="Noto Sans KR"/>
-              </a:defRPr>
-            </a:pPr>
-            <a:r>
-              <a:t>업무 해결 문제의 가치와 비즈니스 효과성 검증</a:t>
+                  <a:srgbClr val="FFFFFF"/>
+                </a:solidFill>
+                <a:latin typeface="Noto Sans KR"/>
+              </a:defRPr>
+            </a:pPr>
+            <a:r>
+              <a:t>심사 위원회 패널 구성 및 최적 추천</a:t>
+            </a:r>
+          </a:p>
+          <a:p>
+            <a:pPr>
+              <a:spcAft>
+                <a:spcPts val="600"/>
+              </a:spcAft>
+              <a:defRPr sz="1100">
+                <a:solidFill>
+                  <a:srgbClr val="94A3B8"/>
+                </a:solidFill>
+                <a:latin typeface="Noto Sans KR"/>
+              </a:defRPr>
+            </a:pPr>
+            <a:r>
+              <a:t>1. 현업·사업성 위원 (가치성 검증): 업무 프로세스 개선율 및 사업 효과성 채점</a:t>
+            </a:r>
+          </a:p>
+          <a:p>
+            <a:pPr>
+              <a:spcAft>
+                <a:spcPts val="600"/>
+              </a:spcAft>
+              <a:defRPr sz="1100">
+                <a:solidFill>
+                  <a:srgbClr val="94A3B8"/>
+                </a:solidFill>
+                <a:latin typeface="Noto Sans KR"/>
+              </a:defRPr>
+            </a:pPr>
+            <a:r>
+              <a:t>2. AI·기술 위원 (구현성 검증): 기술적 난이도 및 구현 완성도 채점</a:t>
+            </a:r>
+          </a:p>
+          <a:p>
+            <a:pPr>
+              <a:spcAft>
+                <a:spcPts val="600"/>
+              </a:spcAft>
+              <a:defRPr sz="1100">
+                <a:solidFill>
+                  <a:srgbClr val="94A3B8"/>
+                </a:solidFill>
+                <a:latin typeface="Noto Sans KR"/>
+              </a:defRPr>
+            </a:pPr>
+            <a:r>
+              <a:t>3. 보안·거버넌스 위원 (신뢰성 검증): 데이터 활용 보안 및 내부 가이드 채점</a:t>
+            </a:r>
+          </a:p>
+          <a:p>
+            <a:br/>
+            <a:pPr>
+              <a:spcAft>
+                <a:spcPts val="600"/>
+              </a:spcAft>
+              <a:defRPr sz="1100">
+                <a:solidFill>
+                  <a:srgbClr val="94A3B8"/>
+                </a:solidFill>
+                <a:latin typeface="Noto Sans KR"/>
+              </a:defRPr>
+            </a:pPr>
+            <a:r>
+              <a:t>⚡ 최적 패널 자동 추천 로직:</a:t>
+            </a:r>
+          </a:p>
+          <a:p>
+            <a:pPr>
+              <a:spcAft>
+                <a:spcPts val="600"/>
+              </a:spcAft>
+              <a:defRPr sz="1100">
+                <a:solidFill>
+                  <a:srgbClr val="94A3B8"/>
+                </a:solidFill>
+                <a:latin typeface="Noto Sans KR"/>
+              </a:defRPr>
+            </a:pPr>
+            <a:r>
+              <a:t>• 피평가자와 동일한 사명 소속 위원을 자동 배제하여 후보군을 우선 순위 정렬합니다.</a:t>
+            </a:r>
+          </a:p>
+          <a:p>
+            <a:br/>
+            <a:pPr>
+              <a:spcAft>
+                <a:spcPts val="600"/>
+              </a:spcAft>
+              <a:defRPr sz="1100">
+                <a:solidFill>
+                  <a:srgbClr val="94A3B8"/>
+                </a:solidFill>
+                <a:latin typeface="Noto Sans KR"/>
+              </a:defRPr>
+            </a:pPr>
+            <a:r>
+              <a:t>⚠️ 간사가 위원을 직접 수동 선택하는 경우, 소속이 일치하는 위원 옆에는 빨간색 [이해상충 주의] 레이블이 노출됩니다.</a:t>
+            </a:r>
+          </a:p>
+          <a:p>
+            <a:br/>
+            <a:pPr>
+              <a:spcAft>
+                <a:spcPts val="600"/>
+              </a:spcAft>
+              <a:defRPr sz="1100">
+                <a:solidFill>
+                  <a:srgbClr val="94A3B8"/>
+                </a:solidFill>
+                <a:latin typeface="Noto Sans KR"/>
+              </a:defRPr>
+            </a:pPr>
+            <a:r>
+              <a:t>오른쪽 화면: 대시보드 우측의 위원 배정 큐 영역</a:t>
             </a:r>
           </a:p>
         </p:txBody>
@@ -11046,18 +9596,18 @@
         </p:nvSpPr>
         <p:spPr>
           <a:xfrm>
-            <a:off x="4297679" y="2286000"/>
-            <a:ext cx="3474720" cy="2926080"/>
+            <a:off x="6400800" y="1828800"/>
+            <a:ext cx="5212080" cy="4114800"/>
           </a:xfrm>
           <a:prstGeom prst="roundRect">
             <a:avLst/>
           </a:prstGeom>
           <a:solidFill>
-            <a:srgbClr val="FFFFFF"/>
+            <a:srgbClr val="1E293B"/>
           </a:solidFill>
-          <a:ln w="12700">
+          <a:ln w="19050">
             <a:solidFill>
-              <a:srgbClr val="DADADE"/>
+              <a:srgbClr val="6366F1"/>
             </a:solidFill>
           </a:ln>
         </p:spPr>
@@ -11076,197 +9626,37 @@
           </a:fontRef>
         </p:style>
         <p:txBody>
-          <a:bodyPr rtlCol="0" anchor="ctr" wrap="square"/>
-          <a:lstStyle/>
-          <a:p>
-            <a:pPr algn="ctr">
-              <a:spcAft>
-                <a:spcPts val="1500"/>
-              </a:spcAft>
-              <a:defRPr sz="2400" b="1">
-                <a:solidFill>
-                  <a:srgbClr val="0066CC"/>
-                </a:solidFill>
-                <a:latin typeface="Noto Sans KR"/>
-              </a:defRPr>
-            </a:pPr>
-            <a:r>
-              <a:t>2</a:t>
-            </a:r>
-          </a:p>
-          <a:p>
-            <a:pPr>
-              <a:spcAft>
-                <a:spcPts val="1000"/>
-              </a:spcAft>
-              <a:defRPr sz="1500" b="1">
-                <a:solidFill>
-                  <a:srgbClr val="1D1D1F"/>
-                </a:solidFill>
-                <a:latin typeface="Noto Sans KR"/>
-              </a:defRPr>
-            </a:pPr>
-            <a:r>
-              <a:t>2. AI·기술 위원</a:t>
-            </a:r>
-          </a:p>
-          <a:p>
-            <a:pPr>
-              <a:defRPr sz="1100">
-                <a:solidFill>
-                  <a:srgbClr val="86868B"/>
-                </a:solidFill>
-                <a:latin typeface="Noto Sans KR"/>
-              </a:defRPr>
-            </a:pPr>
-            <a:r>
-              <a:t>AI 알고리즘 수준, 코드 품질 및 구현 완성도 검증</a:t>
-            </a:r>
-          </a:p>
-        </p:txBody>
-      </p:sp>
-      <p:sp>
-        <p:nvSpPr>
-          <p:cNvPr id="10" name="Rounded Rectangle 9"/>
-          <p:cNvSpPr/>
-          <p:nvPr/>
-        </p:nvSpPr>
-        <p:spPr>
-          <a:xfrm>
-            <a:off x="8046719" y="2286000"/>
-            <a:ext cx="3474720" cy="2926080"/>
-          </a:xfrm>
-          <a:prstGeom prst="roundRect">
-            <a:avLst/>
-          </a:prstGeom>
-          <a:solidFill>
-            <a:srgbClr val="FFFFFF"/>
-          </a:solidFill>
-          <a:ln w="12700">
-            <a:solidFill>
-              <a:srgbClr val="DADADE"/>
-            </a:solidFill>
-          </a:ln>
-        </p:spPr>
-        <p:style>
-          <a:lnRef idx="1">
-            <a:schemeClr val="accent1"/>
-          </a:lnRef>
-          <a:fillRef idx="3">
-            <a:schemeClr val="accent1"/>
-          </a:fillRef>
-          <a:effectRef idx="2">
-            <a:schemeClr val="accent1"/>
-          </a:effectRef>
-          <a:fontRef idx="minor">
-            <a:schemeClr val="lt1"/>
-          </a:fontRef>
-        </p:style>
-        <p:txBody>
-          <a:bodyPr rtlCol="0" anchor="ctr" wrap="square"/>
-          <a:lstStyle/>
-          <a:p>
-            <a:pPr algn="ctr">
-              <a:spcAft>
-                <a:spcPts val="1500"/>
-              </a:spcAft>
-              <a:defRPr sz="2400" b="1">
-                <a:solidFill>
-                  <a:srgbClr val="FF453A"/>
-                </a:solidFill>
-                <a:latin typeface="Noto Sans KR"/>
-              </a:defRPr>
-            </a:pPr>
-            <a:r>
-              <a:t>3</a:t>
-            </a:r>
-          </a:p>
-          <a:p>
-            <a:pPr>
-              <a:spcAft>
-                <a:spcPts val="1000"/>
-              </a:spcAft>
-              <a:defRPr sz="1500" b="1">
-                <a:solidFill>
-                  <a:srgbClr val="1D1D1F"/>
-                </a:solidFill>
-                <a:latin typeface="Noto Sans KR"/>
-              </a:defRPr>
-            </a:pPr>
-            <a:r>
-              <a:t>3. 보안·거버넌스 위원</a:t>
-            </a:r>
-          </a:p>
-          <a:p>
-            <a:pPr>
-              <a:defRPr sz="1100">
-                <a:solidFill>
-                  <a:srgbClr val="86868B"/>
-                </a:solidFill>
-                <a:latin typeface="Noto Sans KR"/>
-              </a:defRPr>
-            </a:pPr>
-            <a:r>
-              <a:t>데이터 보안, 사내 가이드 준수 및 통제 적합성 검증</a:t>
-            </a:r>
-          </a:p>
-        </p:txBody>
-      </p:sp>
-      <p:sp>
-        <p:nvSpPr>
-          <p:cNvPr id="11" name="Rounded Rectangle 10"/>
-          <p:cNvSpPr/>
-          <p:nvPr/>
-        </p:nvSpPr>
-        <p:spPr>
-          <a:xfrm>
-            <a:off x="548640" y="5486400"/>
-            <a:ext cx="11094415" cy="548640"/>
-          </a:xfrm>
-          <a:prstGeom prst="roundRect">
-            <a:avLst/>
-          </a:prstGeom>
-          <a:solidFill>
-            <a:srgbClr val="F5F5F7"/>
-          </a:solidFill>
-          <a:ln>
-            <a:solidFill>
-              <a:srgbClr val="DADADE"/>
-            </a:solidFill>
-          </a:ln>
-        </p:spPr>
-        <p:style>
-          <a:lnRef idx="1">
-            <a:schemeClr val="accent1"/>
-          </a:lnRef>
-          <a:fillRef idx="3">
-            <a:schemeClr val="accent1"/>
-          </a:fillRef>
-          <a:effectRef idx="2">
-            <a:schemeClr val="accent1"/>
-          </a:effectRef>
-          <a:fontRef idx="minor">
-            <a:schemeClr val="lt1"/>
-          </a:fontRef>
-        </p:style>
-        <p:txBody>
-          <a:bodyPr rtlCol="0" anchor="ctr" wrap="square"/>
-          <a:lstStyle/>
-          <a:p>
-            <a:pPr algn="ctr">
-              <a:defRPr sz="1100" b="1">
-                <a:solidFill>
-                  <a:srgbClr val="1D1D1F"/>
-                </a:solidFill>
-                <a:latin typeface="Noto Sans KR"/>
-              </a:defRPr>
-            </a:pPr>
-            <a:r>
-              <a:t>⚠️ 주의: 패널 3인을 모두 지정해야 등록할 수 있습니다. 피평가자와 같은 관계사 소속 위원은 셀렉트 박스 내부의 「이해상충 주의」 표시를 확인하세요.</a:t>
-            </a:r>
-          </a:p>
-        </p:txBody>
-      </p:sp>
+          <a:bodyPr rtlCol="0" anchor="ctr"/>
+          <a:lstStyle/>
+          <a:p>
+            <a:pPr algn="ctr"/>
+          </a:p>
+        </p:txBody>
+      </p:sp>
+      <p:pic>
+        <p:nvPicPr>
+          <p:cNvPr id="10" name="Picture 9" descr="media__1784188798650.png"/>
+          <p:cNvPicPr>
+            <a:picLocks noChangeAspect="1"/>
+          </p:cNvPicPr>
+          <p:nvPr/>
+        </p:nvPicPr>
+        <p:blipFill>
+          <a:blip r:embed="rId2"/>
+          <a:stretch>
+            <a:fillRect/>
+          </a:stretch>
+        </p:blipFill>
+        <p:spPr>
+          <a:xfrm>
+            <a:off x="7369320" y="1965960"/>
+            <a:ext cx="3275038" cy="3840480"/>
+          </a:xfrm>
+          <a:prstGeom prst="rect">
+            <a:avLst/>
+          </a:prstGeom>
+        </p:spPr>
+      </p:pic>
     </p:spTree>
   </p:cSld>
   <p:clrMapOvr>
@@ -11281,7 +9671,7 @@
     <p:bg>
       <p:bgPr>
         <a:solidFill>
-          <a:srgbClr val="F5F5F7"/>
+          <a:srgbClr val="0F172A"/>
         </a:solidFill>
         <a:effectLst/>
       </p:bgPr>
@@ -11318,7 +9708,7 @@
             <a:pPr>
               <a:defRPr sz="1100" b="1">
                 <a:solidFill>
-                  <a:srgbClr val="0066CC"/>
+                  <a:srgbClr val="38BDF8"/>
                 </a:solidFill>
                 <a:latin typeface="Noto Sans KR"/>
               </a:defRPr>
@@ -11354,7 +9744,7 @@
             <a:pPr>
               <a:defRPr sz="2600" b="1">
                 <a:solidFill>
-                  <a:srgbClr val="1D1D1F"/>
+                  <a:srgbClr val="FFFFFF"/>
                 </a:solidFill>
                 <a:latin typeface="Noto Sans KR"/>
               </a:defRPr>
@@ -11380,7 +9770,7 @@
             <a:avLst/>
           </a:prstGeom>
           <a:solidFill>
-            <a:srgbClr val="DADADE"/>
+            <a:srgbClr val="334155"/>
           </a:solidFill>
           <a:ln>
             <a:noFill/>
@@ -11433,13 +9823,13 @@
             <a:pPr>
               <a:defRPr sz="900">
                 <a:solidFill>
-                  <a:srgbClr val="86868B"/>
-                </a:solidFill>
-                <a:latin typeface="Noto Sans KR"/>
-              </a:defRPr>
-            </a:pPr>
-            <a:r>
-              <a:t>AICA 자격심사 시스템 사용자 매뉴얼 · Apple Concept</a:t>
+                  <a:srgbClr val="94A3B8"/>
+                </a:solidFill>
+                <a:latin typeface="Noto Sans KR"/>
+              </a:defRPr>
+            </a:pPr>
+            <a:r>
+              <a:t>AICA 자격심사 시스템 사용자 매뉴얼 · Web App Dark Theme</a:t>
             </a:r>
           </a:p>
         </p:txBody>
@@ -11469,7 +9859,7 @@
             <a:pPr algn="r">
               <a:defRPr sz="900">
                 <a:solidFill>
-                  <a:srgbClr val="86868B"/>
+                  <a:srgbClr val="94A3B8"/>
                 </a:solidFill>
                 <a:latin typeface="Noto Sans KR"/>
               </a:defRPr>
@@ -11482,24 +9872,24 @@
       </p:sp>
       <p:sp>
         <p:nvSpPr>
-          <p:cNvPr id="7" name="Rectangle 6"/>
+          <p:cNvPr id="7" name="Rounded Rectangle 6"/>
           <p:cNvSpPr/>
           <p:nvPr/>
         </p:nvSpPr>
         <p:spPr>
           <a:xfrm>
-            <a:off x="548640" y="1645920"/>
-            <a:ext cx="11094415" cy="548640"/>
-          </a:xfrm>
-          <a:prstGeom prst="rect">
+            <a:off x="548640" y="1828800"/>
+            <a:ext cx="5486400" cy="4114800"/>
+          </a:xfrm>
+          <a:prstGeom prst="roundRect">
             <a:avLst/>
           </a:prstGeom>
           <a:solidFill>
-            <a:srgbClr val="F5F5F7"/>
+            <a:srgbClr val="1E293B"/>
           </a:solidFill>
-          <a:ln>
+          <a:ln w="12700">
             <a:solidFill>
-              <a:srgbClr val="DADADE"/>
+              <a:srgbClr val="334155"/>
             </a:solidFill>
           </a:ln>
         </p:spPr>
@@ -11521,40 +9911,199 @@
           <a:bodyPr rtlCol="0" anchor="ctr"/>
           <a:lstStyle/>
           <a:p>
-            <a:pPr algn="ctr">
-              <a:defRPr sz="1200" b="1">
-                <a:solidFill>
-                  <a:srgbClr val="0066CC"/>
-                </a:solidFill>
-                <a:latin typeface="Noto Sans KR"/>
-              </a:defRPr>
-            </a:pPr>
-            <a:r>
-              <a:t>  필터:  관계사 | 인증 레벨 | 상태                                             찾은 뒤 「액션」에서 보고서를 엽니다.</a:t>
-            </a:r>
-          </a:p>
-        </p:txBody>
-      </p:sp>
-      <p:sp>
-        <p:nvSpPr>
-          <p:cNvPr id="8" name="Rounded Rectangle 7"/>
+            <a:pPr algn="ctr"/>
+          </a:p>
+        </p:txBody>
+      </p:sp>
+      <p:sp>
+        <p:nvSpPr>
+          <p:cNvPr id="8" name="TextBox 7"/>
+          <p:cNvSpPr txBox="1"/>
+          <p:nvPr/>
+        </p:nvSpPr>
+        <p:spPr>
+          <a:xfrm>
+            <a:off x="731520" y="2011680"/>
+            <a:ext cx="5120640" cy="3749040"/>
+          </a:xfrm>
+          <a:prstGeom prst="rect">
+            <a:avLst/>
+          </a:prstGeom>
+          <a:noFill/>
+        </p:spPr>
+        <p:txBody>
+          <a:bodyPr wrap="square">
+            <a:spAutoFit/>
+          </a:bodyPr>
+          <a:lstStyle/>
+          <a:p>
+            <a:pPr>
+              <a:spcAft>
+                <a:spcPts val="1200"/>
+              </a:spcAft>
+              <a:defRPr sz="1500" b="1">
+                <a:solidFill>
+                  <a:srgbClr val="FFFFFF"/>
+                </a:solidFill>
+                <a:latin typeface="Noto Sans KR"/>
+              </a:defRPr>
+            </a:pPr>
+            <a:r>
+              <a:t>진행 상태 분기 및 필터 모니터링</a:t>
+            </a:r>
+          </a:p>
+          <a:p>
+            <a:pPr>
+              <a:spcAft>
+                <a:spcPts val="600"/>
+              </a:spcAft>
+              <a:defRPr sz="1100">
+                <a:solidFill>
+                  <a:srgbClr val="94A3B8"/>
+                </a:solidFill>
+                <a:latin typeface="Noto Sans KR"/>
+              </a:defRPr>
+            </a:pPr>
+            <a:r>
+              <a:t>통합 대기 큐 및 필터 시스템 활용법:</a:t>
+            </a:r>
+          </a:p>
+          <a:p>
+            <a:pPr>
+              <a:spcAft>
+                <a:spcPts val="600"/>
+              </a:spcAft>
+              <a:defRPr sz="1100">
+                <a:solidFill>
+                  <a:srgbClr val="94A3B8"/>
+                </a:solidFill>
+                <a:latin typeface="Noto Sans KR"/>
+              </a:defRPr>
+            </a:pPr>
+            <a:r>
+              <a:t>• 필터 종류: 관계사별, 인증 레벨별, 평가 진행 상태별 필터 제공</a:t>
+            </a:r>
+          </a:p>
+          <a:p>
+            <a:pPr>
+              <a:spcAft>
+                <a:spcPts val="600"/>
+              </a:spcAft>
+              <a:defRPr sz="1100">
+                <a:solidFill>
+                  <a:srgbClr val="94A3B8"/>
+                </a:solidFill>
+                <a:latin typeface="Noto Sans KR"/>
+              </a:defRPr>
+            </a:pPr>
+            <a:r>
+              <a:t>• 1. 평가대기: 패널 배정 완료 후 아직 위원이 채점을 시작하지 않음</a:t>
+            </a:r>
+          </a:p>
+          <a:p>
+            <a:pPr>
+              <a:spcAft>
+                <a:spcPts val="600"/>
+              </a:spcAft>
+              <a:defRPr sz="1100">
+                <a:solidFill>
+                  <a:srgbClr val="94A3B8"/>
+                </a:solidFill>
+                <a:latin typeface="Noto Sans KR"/>
+              </a:defRPr>
+            </a:pPr>
+            <a:r>
+              <a:t>• 2. 심사중: 1명 이상의 위원이 부분 채점을 기록하거나 제출함</a:t>
+            </a:r>
+          </a:p>
+          <a:p>
+            <a:pPr>
+              <a:spcAft>
+                <a:spcPts val="600"/>
+              </a:spcAft>
+              <a:defRPr sz="1100">
+                <a:solidFill>
+                  <a:srgbClr val="94A3B8"/>
+                </a:solidFill>
+                <a:latin typeface="Noto Sans KR"/>
+              </a:defRPr>
+            </a:pPr>
+            <a:r>
+              <a:t>• 3. 완료: 3인 패널이 모두 최종 평가를 제출하여 종합 평균이 집계됨</a:t>
+            </a:r>
+          </a:p>
+          <a:p>
+            <a:pPr>
+              <a:spcAft>
+                <a:spcPts val="600"/>
+              </a:spcAft>
+              <a:defRPr sz="1100">
+                <a:solidFill>
+                  <a:srgbClr val="94A3B8"/>
+                </a:solidFill>
+                <a:latin typeface="Noto Sans KR"/>
+              </a:defRPr>
+            </a:pPr>
+            <a:r>
+              <a:t>• 4. 보고서 보기: [결과 보기] 액션 버튼을 눌러 종합판정서 조회 및 인쇄</a:t>
+            </a:r>
+          </a:p>
+          <a:p>
+            <a:br/>
+            <a:pPr>
+              <a:spcAft>
+                <a:spcPts val="600"/>
+              </a:spcAft>
+              <a:defRPr sz="1100">
+                <a:solidFill>
+                  <a:srgbClr val="94A3B8"/>
+                </a:solidFill>
+                <a:latin typeface="Noto Sans KR"/>
+              </a:defRPr>
+            </a:pPr>
+            <a:r>
+              <a:t>💡 팁: '타 위원 진척도' 항목에서 실시간 배지 도트를 확인해 미제출 위원을 즉시 판별할 수 있습니다.</a:t>
+            </a:r>
+          </a:p>
+          <a:p>
+            <a:br/>
+            <a:pPr>
+              <a:spcAft>
+                <a:spcPts val="600"/>
+              </a:spcAft>
+              <a:defRPr sz="1100">
+                <a:solidFill>
+                  <a:srgbClr val="94A3B8"/>
+                </a:solidFill>
+                <a:latin typeface="Noto Sans KR"/>
+              </a:defRPr>
+            </a:pPr>
+            <a:r>
+              <a:t>오른쪽 화면: 간사용 대기 큐 필터 및 위원 진척 표시 영역</a:t>
+            </a:r>
+          </a:p>
+        </p:txBody>
+      </p:sp>
+      <p:sp>
+        <p:nvSpPr>
+          <p:cNvPr id="9" name="Rounded Rectangle 8"/>
           <p:cNvSpPr/>
           <p:nvPr/>
         </p:nvSpPr>
         <p:spPr>
           <a:xfrm>
-            <a:off x="548640" y="2560320"/>
-            <a:ext cx="2560320" cy="2560320"/>
+            <a:off x="6400800" y="1828800"/>
+            <a:ext cx="5212080" cy="4114800"/>
           </a:xfrm>
           <a:prstGeom prst="roundRect">
             <a:avLst/>
           </a:prstGeom>
           <a:solidFill>
-            <a:srgbClr val="FFFFFF"/>
+            <a:srgbClr val="1E293B"/>
           </a:solidFill>
-          <a:ln>
+          <a:ln w="19050">
             <a:solidFill>
-              <a:srgbClr val="DADADE"/>
+              <a:srgbClr val="6366F1"/>
             </a:solidFill>
           </a:ln>
         </p:spPr>
@@ -11573,352 +10122,37 @@
           </a:fontRef>
         </p:style>
         <p:txBody>
-          <a:bodyPr rtlCol="0" anchor="ctr" wrap="square"/>
-          <a:lstStyle/>
-          <a:p>
-            <a:pPr algn="ctr">
-              <a:spcAft>
-                <a:spcPts val="1000"/>
-              </a:spcAft>
-              <a:defRPr sz="2000" b="1">
-                <a:solidFill>
-                  <a:srgbClr val="86868B"/>
-                </a:solidFill>
-                <a:latin typeface="Noto Sans KR"/>
-              </a:defRPr>
-            </a:pPr>
-            <a:r>
-              <a:t>1</a:t>
-            </a:r>
-          </a:p>
-          <a:p>
-            <a:pPr>
-              <a:spcAft>
-                <a:spcPts val="800"/>
-              </a:spcAft>
-              <a:defRPr sz="1400" b="1">
-                <a:solidFill>
-                  <a:srgbClr val="1D1D1F"/>
-                </a:solidFill>
-                <a:latin typeface="Noto Sans KR"/>
-              </a:defRPr>
-            </a:pPr>
-            <a:r>
-              <a:t>1. 평가대기</a:t>
-            </a:r>
-          </a:p>
-          <a:p>
-            <a:pPr>
-              <a:defRPr sz="1100">
-                <a:solidFill>
-                  <a:srgbClr val="86868B"/>
-                </a:solidFill>
-                <a:latin typeface="Noto Sans KR"/>
-              </a:defRPr>
-            </a:pPr>
-            <a:r>
-              <a:t>패널 배정 후 아직 심사위원의 심사가 시작되지 않은 상태</a:t>
-            </a:r>
-          </a:p>
-        </p:txBody>
-      </p:sp>
-      <p:sp>
-        <p:nvSpPr>
-          <p:cNvPr id="9" name="Rounded Rectangle 8"/>
-          <p:cNvSpPr/>
-          <p:nvPr/>
-        </p:nvSpPr>
-        <p:spPr>
-          <a:xfrm>
-            <a:off x="3383280" y="2560320"/>
-            <a:ext cx="2560320" cy="2560320"/>
-          </a:xfrm>
-          <a:prstGeom prst="roundRect">
-            <a:avLst/>
-          </a:prstGeom>
-          <a:solidFill>
-            <a:srgbClr val="FFFFFF"/>
-          </a:solidFill>
-          <a:ln>
-            <a:solidFill>
-              <a:srgbClr val="DADADE"/>
-            </a:solidFill>
-          </a:ln>
-        </p:spPr>
-        <p:style>
-          <a:lnRef idx="1">
-            <a:schemeClr val="accent1"/>
-          </a:lnRef>
-          <a:fillRef idx="3">
-            <a:schemeClr val="accent1"/>
-          </a:fillRef>
-          <a:effectRef idx="2">
-            <a:schemeClr val="accent1"/>
-          </a:effectRef>
-          <a:fontRef idx="minor">
-            <a:schemeClr val="lt1"/>
-          </a:fontRef>
-        </p:style>
-        <p:txBody>
-          <a:bodyPr rtlCol="0" anchor="ctr" wrap="square"/>
-          <a:lstStyle/>
-          <a:p>
-            <a:pPr algn="ctr">
-              <a:spcAft>
-                <a:spcPts val="1000"/>
-              </a:spcAft>
-              <a:defRPr sz="2000" b="1">
-                <a:solidFill>
-                  <a:srgbClr val="0066CC"/>
-                </a:solidFill>
-                <a:latin typeface="Noto Sans KR"/>
-              </a:defRPr>
-            </a:pPr>
-            <a:r>
-              <a:t>2</a:t>
-            </a:r>
-          </a:p>
-          <a:p>
-            <a:pPr>
-              <a:spcAft>
-                <a:spcPts val="800"/>
-              </a:spcAft>
-              <a:defRPr sz="1400" b="1">
-                <a:solidFill>
-                  <a:srgbClr val="1D1D1F"/>
-                </a:solidFill>
-                <a:latin typeface="Noto Sans KR"/>
-              </a:defRPr>
-            </a:pPr>
-            <a:r>
-              <a:t>2. 심사중</a:t>
-            </a:r>
-          </a:p>
-          <a:p>
-            <a:pPr>
-              <a:defRPr sz="1100">
-                <a:solidFill>
-                  <a:srgbClr val="86868B"/>
-                </a:solidFill>
-                <a:latin typeface="Noto Sans KR"/>
-              </a:defRPr>
-            </a:pPr>
-            <a:r>
-              <a:t>1명 이상의 심사위원이 심사를 진행하거나 점수를 제출한 상태</a:t>
-            </a:r>
-          </a:p>
-        </p:txBody>
-      </p:sp>
-      <p:sp>
-        <p:nvSpPr>
-          <p:cNvPr id="10" name="Rounded Rectangle 9"/>
-          <p:cNvSpPr/>
-          <p:nvPr/>
-        </p:nvSpPr>
-        <p:spPr>
-          <a:xfrm>
-            <a:off x="6217920" y="2560320"/>
-            <a:ext cx="2560320" cy="2560320"/>
-          </a:xfrm>
-          <a:prstGeom prst="roundRect">
-            <a:avLst/>
-          </a:prstGeom>
-          <a:solidFill>
-            <a:srgbClr val="FFFFFF"/>
-          </a:solidFill>
-          <a:ln>
-            <a:solidFill>
-              <a:srgbClr val="DADADE"/>
-            </a:solidFill>
-          </a:ln>
-        </p:spPr>
-        <p:style>
-          <a:lnRef idx="1">
-            <a:schemeClr val="accent1"/>
-          </a:lnRef>
-          <a:fillRef idx="3">
-            <a:schemeClr val="accent1"/>
-          </a:fillRef>
-          <a:effectRef idx="2">
-            <a:schemeClr val="accent1"/>
-          </a:effectRef>
-          <a:fontRef idx="minor">
-            <a:schemeClr val="lt1"/>
-          </a:fontRef>
-        </p:style>
-        <p:txBody>
-          <a:bodyPr rtlCol="0" anchor="ctr" wrap="square"/>
-          <a:lstStyle/>
-          <a:p>
-            <a:pPr algn="ctr">
-              <a:spcAft>
-                <a:spcPts val="1000"/>
-              </a:spcAft>
-              <a:defRPr sz="2000" b="1">
-                <a:solidFill>
-                  <a:srgbClr val="30D158"/>
-                </a:solidFill>
-                <a:latin typeface="Noto Sans KR"/>
-              </a:defRPr>
-            </a:pPr>
-            <a:r>
-              <a:t>3</a:t>
-            </a:r>
-          </a:p>
-          <a:p>
-            <a:pPr>
-              <a:spcAft>
-                <a:spcPts val="800"/>
-              </a:spcAft>
-              <a:defRPr sz="1400" b="1">
-                <a:solidFill>
-                  <a:srgbClr val="1D1D1F"/>
-                </a:solidFill>
-                <a:latin typeface="Noto Sans KR"/>
-              </a:defRPr>
-            </a:pPr>
-            <a:r>
-              <a:t>3. 완료</a:t>
-            </a:r>
-          </a:p>
-          <a:p>
-            <a:pPr>
-              <a:defRPr sz="1100">
-                <a:solidFill>
-                  <a:srgbClr val="86868B"/>
-                </a:solidFill>
-                <a:latin typeface="Noto Sans KR"/>
-              </a:defRPr>
-            </a:pPr>
-            <a:r>
-              <a:t>3인 패널 전원의 제출과 종합 점수 집계가 완료된 상태</a:t>
-            </a:r>
-          </a:p>
-        </p:txBody>
-      </p:sp>
-      <p:sp>
-        <p:nvSpPr>
-          <p:cNvPr id="11" name="Rounded Rectangle 10"/>
-          <p:cNvSpPr/>
-          <p:nvPr/>
-        </p:nvSpPr>
-        <p:spPr>
-          <a:xfrm>
-            <a:off x="9052560" y="2560320"/>
-            <a:ext cx="2560320" cy="2560320"/>
-          </a:xfrm>
-          <a:prstGeom prst="roundRect">
-            <a:avLst/>
-          </a:prstGeom>
-          <a:solidFill>
-            <a:srgbClr val="FFFFFF"/>
-          </a:solidFill>
-          <a:ln>
-            <a:solidFill>
-              <a:srgbClr val="DADADE"/>
-            </a:solidFill>
-          </a:ln>
-        </p:spPr>
-        <p:style>
-          <a:lnRef idx="1">
-            <a:schemeClr val="accent1"/>
-          </a:lnRef>
-          <a:fillRef idx="3">
-            <a:schemeClr val="accent1"/>
-          </a:fillRef>
-          <a:effectRef idx="2">
-            <a:schemeClr val="accent1"/>
-          </a:effectRef>
-          <a:fontRef idx="minor">
-            <a:schemeClr val="lt1"/>
-          </a:fontRef>
-        </p:style>
-        <p:txBody>
-          <a:bodyPr rtlCol="0" anchor="ctr" wrap="square"/>
-          <a:lstStyle/>
-          <a:p>
-            <a:pPr algn="ctr">
-              <a:spcAft>
-                <a:spcPts val="1000"/>
-              </a:spcAft>
-              <a:defRPr sz="2000" b="1">
-                <a:solidFill>
-                  <a:srgbClr val="1D1D1F"/>
-                </a:solidFill>
-                <a:latin typeface="Noto Sans KR"/>
-              </a:defRPr>
-            </a:pPr>
-            <a:r>
-              <a:t>4</a:t>
-            </a:r>
-          </a:p>
-          <a:p>
-            <a:pPr>
-              <a:spcAft>
-                <a:spcPts val="800"/>
-              </a:spcAft>
-              <a:defRPr sz="1400" b="1">
-                <a:solidFill>
-                  <a:srgbClr val="1D1D1F"/>
-                </a:solidFill>
-                <a:latin typeface="Noto Sans KR"/>
-              </a:defRPr>
-            </a:pPr>
-            <a:r>
-              <a:t>4. 보고서 보기</a:t>
-            </a:r>
-          </a:p>
-          <a:p>
-            <a:pPr>
-              <a:defRPr sz="1100">
-                <a:solidFill>
-                  <a:srgbClr val="86868B"/>
-                </a:solidFill>
-                <a:latin typeface="Noto Sans KR"/>
-              </a:defRPr>
-            </a:pPr>
-            <a:r>
-              <a:t>개별 점수, 평균, 최종 판정, 심사 의견 보고서 확인 및 인쇄</a:t>
-            </a:r>
-          </a:p>
-        </p:txBody>
-      </p:sp>
-      <p:sp>
-        <p:nvSpPr>
-          <p:cNvPr id="12" name="TextBox 11"/>
-          <p:cNvSpPr txBox="1"/>
-          <p:nvPr/>
-        </p:nvSpPr>
-        <p:spPr>
-          <a:xfrm>
-            <a:off x="548640" y="5486400"/>
-            <a:ext cx="10972800" cy="457200"/>
-          </a:xfrm>
-          <a:prstGeom prst="rect">
-            <a:avLst/>
-          </a:prstGeom>
-          <a:noFill/>
-        </p:spPr>
-        <p:txBody>
-          <a:bodyPr wrap="none">
-            <a:spAutoFit/>
-          </a:bodyPr>
-          <a:lstStyle/>
-          <a:p>
-            <a:pPr>
-              <a:defRPr sz="1100" b="1">
-                <a:solidFill>
-                  <a:srgbClr val="FF453A"/>
-                </a:solidFill>
-                <a:latin typeface="Noto Sans KR"/>
-              </a:defRPr>
-            </a:pPr>
-            <a:r>
-              <a:t>💡 팁: 점수나 판정이 비어 있으면 먼저 대시보드의 「타 위원 진척도」 배지에서 미제출 위원이 누구인지 실시간 확인합니다.</a:t>
-            </a:r>
-          </a:p>
-        </p:txBody>
-      </p:sp>
+          <a:bodyPr rtlCol="0" anchor="ctr"/>
+          <a:lstStyle/>
+          <a:p>
+            <a:pPr algn="ctr"/>
+          </a:p>
+        </p:txBody>
+      </p:sp>
+      <p:pic>
+        <p:nvPicPr>
+          <p:cNvPr id="10" name="Picture 9" descr="media__1784188798650.png"/>
+          <p:cNvPicPr>
+            <a:picLocks noChangeAspect="1"/>
+          </p:cNvPicPr>
+          <p:nvPr/>
+        </p:nvPicPr>
+        <p:blipFill>
+          <a:blip r:embed="rId2"/>
+          <a:stretch>
+            <a:fillRect/>
+          </a:stretch>
+        </p:blipFill>
+        <p:spPr>
+          <a:xfrm>
+            <a:off x="7369320" y="1965960"/>
+            <a:ext cx="3275038" cy="3840480"/>
+          </a:xfrm>
+          <a:prstGeom prst="rect">
+            <a:avLst/>
+          </a:prstGeom>
+        </p:spPr>
+      </p:pic>
     </p:spTree>
   </p:cSld>
   <p:clrMapOvr>
@@ -11933,7 +10167,7 @@
     <p:bg>
       <p:bgPr>
         <a:solidFill>
-          <a:srgbClr val="F5F5F7"/>
+          <a:srgbClr val="0F172A"/>
         </a:solidFill>
         <a:effectLst/>
       </p:bgPr>
@@ -11970,7 +10204,7 @@
             <a:pPr>
               <a:defRPr sz="1100" b="1">
                 <a:solidFill>
-                  <a:srgbClr val="0066CC"/>
+                  <a:srgbClr val="38BDF8"/>
                 </a:solidFill>
                 <a:latin typeface="Noto Sans KR"/>
               </a:defRPr>
@@ -12006,7 +10240,7 @@
             <a:pPr>
               <a:defRPr sz="2600" b="1">
                 <a:solidFill>
-                  <a:srgbClr val="1D1D1F"/>
+                  <a:srgbClr val="FFFFFF"/>
                 </a:solidFill>
                 <a:latin typeface="Noto Sans KR"/>
               </a:defRPr>
@@ -12032,7 +10266,7 @@
             <a:avLst/>
           </a:prstGeom>
           <a:solidFill>
-            <a:srgbClr val="DADADE"/>
+            <a:srgbClr val="334155"/>
           </a:solidFill>
           <a:ln>
             <a:noFill/>
@@ -12085,13 +10319,13 @@
             <a:pPr>
               <a:defRPr sz="900">
                 <a:solidFill>
-                  <a:srgbClr val="86868B"/>
-                </a:solidFill>
-                <a:latin typeface="Noto Sans KR"/>
-              </a:defRPr>
-            </a:pPr>
-            <a:r>
-              <a:t>AICA 자격심사 시스템 사용자 매뉴얼 · Apple Concept</a:t>
+                  <a:srgbClr val="94A3B8"/>
+                </a:solidFill>
+                <a:latin typeface="Noto Sans KR"/>
+              </a:defRPr>
+            </a:pPr>
+            <a:r>
+              <a:t>AICA 자격심사 시스템 사용자 매뉴얼 · Web App Dark Theme</a:t>
             </a:r>
           </a:p>
         </p:txBody>
@@ -12121,7 +10355,7 @@
             <a:pPr algn="r">
               <a:defRPr sz="900">
                 <a:solidFill>
-                  <a:srgbClr val="86868B"/>
+                  <a:srgbClr val="94A3B8"/>
                 </a:solidFill>
                 <a:latin typeface="Noto Sans KR"/>
               </a:defRPr>
@@ -12147,11 +10381,11 @@
             <a:avLst/>
           </a:prstGeom>
           <a:solidFill>
-            <a:srgbClr val="FFFFFF"/>
+            <a:srgbClr val="1E293B"/>
           </a:solidFill>
           <a:ln w="12700">
             <a:solidFill>
-              <a:srgbClr val="DADADE"/>
+              <a:srgbClr val="334155"/>
             </a:solidFill>
           </a:ln>
         </p:spPr>
@@ -12205,93 +10439,93 @@
               </a:spcAft>
               <a:defRPr sz="1500" b="1">
                 <a:solidFill>
-                  <a:srgbClr val="1D1D1F"/>
-                </a:solidFill>
-                <a:latin typeface="Noto Sans KR"/>
-              </a:defRPr>
-            </a:pPr>
-            <a:r>
-              <a:t>종합판정서 구성 항목 및 기준</a:t>
-            </a:r>
-          </a:p>
-          <a:p>
-            <a:pPr>
-              <a:spcAft>
-                <a:spcPts val="600"/>
-              </a:spcAft>
-              <a:defRPr sz="1100">
-                <a:solidFill>
-                  <a:srgbClr val="1D1D1F"/>
-                </a:solidFill>
-                <a:latin typeface="Noto Sans KR"/>
-              </a:defRPr>
-            </a:pPr>
-            <a:r>
-              <a:t>1. 심사 대상자 기본 정보 (소속 법인, 부서, 직위, 성명)</a:t>
-            </a:r>
-          </a:p>
-          <a:p>
-            <a:pPr>
-              <a:spcAft>
-                <a:spcPts val="600"/>
-              </a:spcAft>
-              <a:defRPr sz="1100">
-                <a:solidFill>
-                  <a:srgbClr val="1D1D1F"/>
-                </a:solidFill>
-                <a:latin typeface="Noto Sans KR"/>
-              </a:defRPr>
-            </a:pPr>
-            <a:r>
-              <a:t>2. 최종 심사 판정 요약 (종합 평균 점수 및 판정 결과)</a:t>
-            </a:r>
-          </a:p>
-          <a:p>
-            <a:pPr>
-              <a:spcAft>
-                <a:spcPts val="600"/>
-              </a:spcAft>
-              <a:defRPr sz="1100">
-                <a:solidFill>
-                  <a:srgbClr val="1D1D1F"/>
-                </a:solidFill>
-                <a:latin typeface="Noto Sans KR"/>
-              </a:defRPr>
-            </a:pPr>
-            <a:r>
-              <a:t>3. 심사위원별 세부 채점표 (5단계 루브릭 점수 이력)</a:t>
-            </a:r>
-          </a:p>
-          <a:p>
-            <a:pPr>
-              <a:spcAft>
-                <a:spcPts val="600"/>
-              </a:spcAft>
-              <a:defRPr sz="1100">
-                <a:solidFill>
-                  <a:srgbClr val="1D1D1F"/>
-                </a:solidFill>
-                <a:latin typeface="Noto Sans KR"/>
-              </a:defRPr>
-            </a:pPr>
-            <a:r>
-              <a:t>4. 심사위원별 종합 평가 의견 (정성 평가 작성값)</a:t>
-            </a:r>
-          </a:p>
-          <a:p>
-            <a:pPr>
-              <a:spcAft>
-                <a:spcPts val="600"/>
-              </a:spcAft>
-              <a:defRPr sz="1100">
-                <a:solidFill>
-                  <a:srgbClr val="1D1D1F"/>
-                </a:solidFill>
-                <a:latin typeface="Noto Sans KR"/>
-              </a:defRPr>
-            </a:pPr>
-            <a:r>
-              <a:t>5. 심사위원회 현업/기술/보안 위원 최종 확인란 (서명 연동)</a:t>
+                  <a:srgbClr val="FFFFFF"/>
+                </a:solidFill>
+                <a:latin typeface="Noto Sans KR"/>
+              </a:defRPr>
+            </a:pPr>
+            <a:r>
+              <a:t>종합판정 보고서 발급 및 명패 동기화</a:t>
+            </a:r>
+          </a:p>
+          <a:p>
+            <a:pPr>
+              <a:spcAft>
+                <a:spcPts val="600"/>
+              </a:spcAft>
+              <a:defRPr sz="1100">
+                <a:solidFill>
+                  <a:srgbClr val="94A3B8"/>
+                </a:solidFill>
+                <a:latin typeface="Noto Sans KR"/>
+              </a:defRPr>
+            </a:pPr>
+            <a:r>
+              <a:t>종합판정서 구성 항목 및 검증 가이드:</a:t>
+            </a:r>
+          </a:p>
+          <a:p>
+            <a:pPr>
+              <a:spcAft>
+                <a:spcPts val="600"/>
+              </a:spcAft>
+              <a:defRPr sz="1100">
+                <a:solidFill>
+                  <a:srgbClr val="94A3B8"/>
+                </a:solidFill>
+                <a:latin typeface="Noto Sans KR"/>
+              </a:defRPr>
+            </a:pPr>
+            <a:r>
+              <a:t>• 지원자 기본 정보 및 종합 평균 점수 시각화</a:t>
+            </a:r>
+          </a:p>
+          <a:p>
+            <a:pPr>
+              <a:spcAft>
+                <a:spcPts val="600"/>
+              </a:spcAft>
+              <a:defRPr sz="1100">
+                <a:solidFill>
+                  <a:srgbClr val="94A3B8"/>
+                </a:solidFill>
+                <a:latin typeface="Noto Sans KR"/>
+              </a:defRPr>
+            </a:pPr>
+            <a:r>
+              <a:t>• 3인 배정 위원의 세부 루브릭 채점 점수 및 종합 정성 평가 의견 노출</a:t>
+            </a:r>
+          </a:p>
+          <a:p>
+            <a:pPr>
+              <a:spcAft>
+                <a:spcPts val="600"/>
+              </a:spcAft>
+              <a:defRPr sz="1100">
+                <a:solidFill>
+                  <a:srgbClr val="94A3B8"/>
+                </a:solidFill>
+                <a:latin typeface="Noto Sans KR"/>
+              </a:defRPr>
+            </a:pPr>
+            <a:r>
+              <a:t>• 하단 서명란: 배정된 실제 심사위원 성명으로 명패 자동 변경 완료</a:t>
+            </a:r>
+          </a:p>
+          <a:p>
+            <a:pPr>
+              <a:spcAft>
+                <a:spcPts val="600"/>
+              </a:spcAft>
+              <a:defRPr sz="1100">
+                <a:solidFill>
+                  <a:srgbClr val="94A3B8"/>
+                </a:solidFill>
+                <a:latin typeface="Noto Sans KR"/>
+              </a:defRPr>
+            </a:pPr>
+            <a:r>
+              <a:t>• 출력 최적화: [결과 보고서 인쇄 (PDF)] 버튼을 클릭하여 A4 최적화 보고서 출력 및 사내 공유용 저장 가능</a:t>
             </a:r>
           </a:p>
           <a:p>
@@ -12302,29 +10536,29 @@
               </a:spcAft>
               <a:defRPr sz="1100">
                 <a:solidFill>
-                  <a:srgbClr val="1D1D1F"/>
-                </a:solidFill>
-                <a:latin typeface="Noto Sans KR"/>
-              </a:defRPr>
-            </a:pPr>
-            <a:r>
-              <a:t>• 합격 기준: 종합 평균 70점 이상 (시스템 표시 기준)</a:t>
-            </a:r>
-          </a:p>
-          <a:p>
-            <a:pPr>
-              <a:spcAft>
-                <a:spcPts val="600"/>
-              </a:spcAft>
-              <a:defRPr sz="1100">
-                <a:solidFill>
-                  <a:srgbClr val="1D1D1F"/>
-                </a:solidFill>
-                <a:latin typeface="Noto Sans KR"/>
-              </a:defRPr>
-            </a:pPr>
-            <a:r>
-              <a:t>• 결격 우선: 표절·도용, 중요 API Key 노출 등 치명적 결격 사유 기록 시 점수와 상관없이 최종 불합격 처리</a:t>
+                  <a:srgbClr val="94A3B8"/>
+                </a:solidFill>
+                <a:latin typeface="Noto Sans KR"/>
+              </a:defRPr>
+            </a:pPr>
+            <a:r>
+              <a:t>⚠️ 결격 사유 발생 시:</a:t>
+            </a:r>
+          </a:p>
+          <a:p>
+            <a:pPr>
+              <a:spcAft>
+                <a:spcPts val="600"/>
+              </a:spcAft>
+              <a:defRPr sz="1100">
+                <a:solidFill>
+                  <a:srgbClr val="94A3B8"/>
+                </a:solidFill>
+                <a:latin typeface="Noto Sans KR"/>
+              </a:defRPr>
+            </a:pPr>
+            <a:r>
+              <a:t>• 표절, 중요 기밀 및 API Key 노출 등이 발견되어 결격 처리된 경우, 평균 점수가 70점 이상이어도 최종 판정은 '불합격' 처리됩니다.</a:t>
             </a:r>
           </a:p>
           <a:p>
@@ -12335,13 +10569,13 @@
               </a:spcAft>
               <a:defRPr sz="1100">
                 <a:solidFill>
-                  <a:srgbClr val="1D1D1F"/>
-                </a:solidFill>
-                <a:latin typeface="Noto Sans KR"/>
-              </a:defRPr>
-            </a:pPr>
-            <a:r>
-              <a:t>오른쪽 화면: 실제 배정된 심사위원들의 서명 명패가 실시간 연동된 종합판정서 출력 뷰 화면</a:t>
+                  <a:srgbClr val="94A3B8"/>
+                </a:solidFill>
+                <a:latin typeface="Noto Sans KR"/>
+              </a:defRPr>
+            </a:pPr>
+            <a:r>
+              <a:t>오른쪽 화면: 서명이 실제 심사위원 성명으로 연동된 결과 보고서 하단부</a:t>
             </a:r>
           </a:p>
         </p:txBody>
@@ -12361,11 +10595,11 @@
             <a:avLst/>
           </a:prstGeom>
           <a:solidFill>
-            <a:srgbClr val="FFFFFF"/>
+            <a:srgbClr val="1E293B"/>
           </a:solidFill>
-          <a:ln w="12700">
+          <a:ln w="19050">
             <a:solidFill>
-              <a:srgbClr val="DADADE"/>
+              <a:srgbClr val="6366F1"/>
             </a:solidFill>
           </a:ln>
         </p:spPr>

--- a/AICA_System_User_Manual.pptx
+++ b/AICA_System_User_Manual.pptx
@@ -8539,55 +8539,71 @@
               </a:defRPr>
             </a:pPr>
             <a:r>
-              <a:t>1. 요약 지표: 전체, 완료, 진행 중, 대기 인원을 실시간 확인</a:t>
-            </a:r>
-          </a:p>
-          <a:p>
-            <a:pPr>
-              <a:spcAft>
-                <a:spcPts val="600"/>
-              </a:spcAft>
-              <a:defRPr sz="1100">
-                <a:solidFill>
-                  <a:srgbClr val="94A3B8"/>
-                </a:solidFill>
-                <a:latin typeface="Noto Sans KR"/>
-              </a:defRPr>
-            </a:pPr>
-            <a:r>
-              <a:t>2. 관계사 평균: 완료된 심사를 기준으로 계열사별 평균 점수를 모니터링</a:t>
-            </a:r>
-          </a:p>
-          <a:p>
-            <a:pPr>
-              <a:spcAft>
-                <a:spcPts val="600"/>
-              </a:spcAft>
-              <a:defRPr sz="1100">
-                <a:solidFill>
-                  <a:srgbClr val="94A3B8"/>
-                </a:solidFill>
-                <a:latin typeface="Noto Sans KR"/>
-              </a:defRPr>
-            </a:pPr>
-            <a:r>
-              <a:t>3. 평가 기준: L3/L4 가중치와 치명적 결격 기준을 확인</a:t>
-            </a:r>
-          </a:p>
-          <a:p>
-            <a:pPr>
-              <a:spcAft>
-                <a:spcPts val="600"/>
-              </a:spcAft>
-              <a:defRPr sz="1100">
-                <a:solidFill>
-                  <a:srgbClr val="94A3B8"/>
-                </a:solidFill>
-                <a:latin typeface="Noto Sans KR"/>
-              </a:defRPr>
-            </a:pPr>
-            <a:r>
-              <a:t>4. 전체 큐: 필터와 액션을 통한 개별 심사 통합 관리</a:t>
+              <a:t>1. 시뮬레이션 데이터 불러오기: 가상의 테스트 데이터셋(후보자 9명 및 3인 패널 평가 결과) 복원</a:t>
+            </a:r>
+          </a:p>
+          <a:p>
+            <a:pPr>
+              <a:spcAft>
+                <a:spcPts val="600"/>
+              </a:spcAft>
+              <a:defRPr sz="1100">
+                <a:solidFill>
+                  <a:srgbClr val="94A3B8"/>
+                </a:solidFill>
+                <a:latin typeface="Noto Sans KR"/>
+              </a:defRPr>
+            </a:pPr>
+            <a:r>
+              <a:t>2. 데이터 초기화: 실무 운영 착수를 위해 전체 평가 과제 및 결과를 깨끗하게 초기화</a:t>
+            </a:r>
+          </a:p>
+          <a:p>
+            <a:pPr>
+              <a:spcAft>
+                <a:spcPts val="600"/>
+              </a:spcAft>
+              <a:defRPr sz="1100">
+                <a:solidFill>
+                  <a:srgbClr val="94A3B8"/>
+                </a:solidFill>
+                <a:latin typeface="Noto Sans KR"/>
+              </a:defRPr>
+            </a:pPr>
+            <a:r>
+              <a:t>3. 요약 지표: 전체, 완료, 진행 중, 대기 인원을 실시간 확인 (클릭 시 명단 모달 팝업)</a:t>
+            </a:r>
+          </a:p>
+          <a:p>
+            <a:pPr>
+              <a:spcAft>
+                <a:spcPts val="600"/>
+              </a:spcAft>
+              <a:defRPr sz="1100">
+                <a:solidFill>
+                  <a:srgbClr val="94A3B8"/>
+                </a:solidFill>
+                <a:latin typeface="Noto Sans KR"/>
+              </a:defRPr>
+            </a:pPr>
+            <a:r>
+              <a:t>4. 관계사 평균: 완료된 심사를 기준으로 계열사별 평균 점수를 모니터링</a:t>
+            </a:r>
+          </a:p>
+          <a:p>
+            <a:pPr>
+              <a:spcAft>
+                <a:spcPts val="600"/>
+              </a:spcAft>
+              <a:defRPr sz="1100">
+                <a:solidFill>
+                  <a:srgbClr val="94A3B8"/>
+                </a:solidFill>
+                <a:latin typeface="Noto Sans KR"/>
+              </a:defRPr>
+            </a:pPr>
+            <a:r>
+              <a:t>5. 전체 큐: 필터와 액션을 통한 개별 심사 통합 관리</a:t>
             </a:r>
           </a:p>
           <a:p>
@@ -8604,7 +8620,7 @@
               </a:defRPr>
             </a:pPr>
             <a:r>
-              <a:t>💡 명단 보기 기능: 각 지표(통계 카드) 클릭 시 해당 대상자 목록을 모달 팝업으로 즉시 확인할 수 있습니다.</a:t>
+              <a:t>💡 대시보드 우측 상단 배지를 통해 테스트 시연용 가상 데이터 복원 및 실무용 초기화를 손쉽게 제어할 수 있습니다.</a:t>
             </a:r>
           </a:p>
           <a:p>

--- a/AICA_System_User_Manual.pptx
+++ b/AICA_System_User_Manual.pptx
@@ -21,6 +21,7 @@
     <p:sldId id="269" r:id="rId20"/>
     <p:sldId id="270" r:id="rId21"/>
     <p:sldId id="271" r:id="rId22"/>
+    <p:sldId id="272" r:id="rId23"/>
   </p:sldIdLst>
   <p:sldSz cx="12191695" cy="6858000" type="screen4x3"/>
   <p:notesSz cx="6858000" cy="9144000"/>
@@ -3409,7 +3410,7 @@
               </a:defRPr>
             </a:pPr>
             <a:r>
-              <a:t>심사위원</a:t>
+              <a:t>운영간사</a:t>
             </a:r>
           </a:p>
         </p:txBody>
@@ -3445,7 +3446,7 @@
               </a:defRPr>
             </a:pPr>
             <a:r>
-              <a:t>내 배정 과제 큐에서 심사 우선순위를 잡습니다</a:t>
+              <a:t>3인 제출 후 종합판정서가 완성됩니다</a:t>
             </a:r>
           </a:p>
         </p:txBody>
@@ -3560,7 +3561,7 @@
               </a:defRPr>
             </a:pPr>
             <a:r>
-              <a:t>10</a:t>
+              <a:t>09</a:t>
             </a:r>
           </a:p>
         </p:txBody>
@@ -3644,55 +3645,87 @@
               </a:defRPr>
             </a:pPr>
             <a:r>
-              <a:t>심사 위원 배정 큐 모니터링</a:t>
-            </a:r>
-          </a:p>
-          <a:p>
-            <a:pPr>
-              <a:spcAft>
-                <a:spcPts val="600"/>
-              </a:spcAft>
-              <a:defRPr sz="1100">
-                <a:solidFill>
-                  <a:srgbClr val="94A3B8"/>
-                </a:solidFill>
-                <a:latin typeface="Noto Sans KR"/>
-              </a:defRPr>
-            </a:pPr>
-            <a:r>
-              <a:t>심사위원 전용 배정 과제 리스트 가이드:</a:t>
-            </a:r>
-          </a:p>
-          <a:p>
-            <a:pPr>
-              <a:spcAft>
-                <a:spcPts val="600"/>
-              </a:spcAft>
-              <a:defRPr sz="1100">
-                <a:solidFill>
-                  <a:srgbClr val="94A3B8"/>
-                </a:solidFill>
-                <a:latin typeface="Noto Sans KR"/>
-              </a:defRPr>
-            </a:pPr>
-            <a:r>
-              <a:t>• 성명 및 이메일 로그인 시, 본인이 패널로 등록된 평가 과제만 화면에 정렬됩니다.</a:t>
-            </a:r>
-          </a:p>
-          <a:p>
-            <a:pPr>
-              <a:spcAft>
-                <a:spcPts val="600"/>
-              </a:spcAft>
-              <a:defRPr sz="1100">
-                <a:solidFill>
-                  <a:srgbClr val="94A3B8"/>
-                </a:solidFill>
-                <a:latin typeface="Noto Sans KR"/>
-              </a:defRPr>
-            </a:pPr>
-            <a:r>
-              <a:t>• 테이블 컬럼: 지원자 정보, 소속 법인/부서, 자격 인증 레벨, 내 평가 진행 현황(대기/완료), 타 위원 제출 진척 상태 배지 표시</a:t>
+              <a:t>종합판정 보고서 발급 및 명패 동기화</a:t>
+            </a:r>
+          </a:p>
+          <a:p>
+            <a:pPr>
+              <a:spcAft>
+                <a:spcPts val="600"/>
+              </a:spcAft>
+              <a:defRPr sz="1100">
+                <a:solidFill>
+                  <a:srgbClr val="94A3B8"/>
+                </a:solidFill>
+                <a:latin typeface="Noto Sans KR"/>
+              </a:defRPr>
+            </a:pPr>
+            <a:r>
+              <a:t>종합판정서 구성 항목 및 검증 가이드:</a:t>
+            </a:r>
+          </a:p>
+          <a:p>
+            <a:pPr>
+              <a:spcAft>
+                <a:spcPts val="600"/>
+              </a:spcAft>
+              <a:defRPr sz="1100">
+                <a:solidFill>
+                  <a:srgbClr val="94A3B8"/>
+                </a:solidFill>
+                <a:latin typeface="Noto Sans KR"/>
+              </a:defRPr>
+            </a:pPr>
+            <a:r>
+              <a:t>• 지원자 기본 정보 및 종합 평균 점수 시각화</a:t>
+            </a:r>
+          </a:p>
+          <a:p>
+            <a:pPr>
+              <a:spcAft>
+                <a:spcPts val="600"/>
+              </a:spcAft>
+              <a:defRPr sz="1100">
+                <a:solidFill>
+                  <a:srgbClr val="94A3B8"/>
+                </a:solidFill>
+                <a:latin typeface="Noto Sans KR"/>
+              </a:defRPr>
+            </a:pPr>
+            <a:r>
+              <a:t>• 3인 배정 위원의 세부 루브릭 채점 점수 및 종합 정성 평가 의견 노출</a:t>
+            </a:r>
+          </a:p>
+          <a:p>
+            <a:pPr>
+              <a:spcAft>
+                <a:spcPts val="600"/>
+              </a:spcAft>
+              <a:defRPr sz="1100">
+                <a:solidFill>
+                  <a:srgbClr val="94A3B8"/>
+                </a:solidFill>
+                <a:latin typeface="Noto Sans KR"/>
+              </a:defRPr>
+            </a:pPr>
+            <a:r>
+              <a:t>• 하단 서명란: 배정된 실제 심사위원 성명으로 명패 자동 변경 완료</a:t>
+            </a:r>
+          </a:p>
+          <a:p>
+            <a:pPr>
+              <a:spcAft>
+                <a:spcPts val="600"/>
+              </a:spcAft>
+              <a:defRPr sz="1100">
+                <a:solidFill>
+                  <a:srgbClr val="94A3B8"/>
+                </a:solidFill>
+                <a:latin typeface="Noto Sans KR"/>
+              </a:defRPr>
+            </a:pPr>
+            <a:r>
+              <a:t>• 출력 최적화: [결과 보고서 인쇄 (PDF)] 버튼을 클릭하여 A4 최적화 보고서 출력 및 사내 공유용 저장 가능</a:t>
             </a:r>
           </a:p>
           <a:p>
@@ -3709,23 +3742,23 @@
               </a:defRPr>
             </a:pPr>
             <a:r>
-              <a:t>[심사하기/수정]:</a:t>
-            </a:r>
-          </a:p>
-          <a:p>
-            <a:pPr>
-              <a:spcAft>
-                <a:spcPts val="600"/>
-              </a:spcAft>
-              <a:defRPr sz="1100">
-                <a:solidFill>
-                  <a:srgbClr val="94A3B8"/>
-                </a:solidFill>
-                <a:latin typeface="Noto Sans KR"/>
-              </a:defRPr>
-            </a:pPr>
-            <a:r>
-              <a:t>• 채점을 시작하거나 이미 제출한 내용을 재조정할 때 버튼을 선택해 작업장(Workspace)으로 진입합니다.</a:t>
+              <a:t>⚠️ 결격 사유 발생 시:</a:t>
+            </a:r>
+          </a:p>
+          <a:p>
+            <a:pPr>
+              <a:spcAft>
+                <a:spcPts val="600"/>
+              </a:spcAft>
+              <a:defRPr sz="1100">
+                <a:solidFill>
+                  <a:srgbClr val="94A3B8"/>
+                </a:solidFill>
+                <a:latin typeface="Noto Sans KR"/>
+              </a:defRPr>
+            </a:pPr>
+            <a:r>
+              <a:t>• 표절, 중요 기밀 및 API Key 노출 등이 발견되어 결격 처리된 경우, 평균 점수가 70점 이상이어도 최종 판정은 '불합격' 처리됩니다.</a:t>
             </a:r>
           </a:p>
           <a:p>
@@ -3742,7 +3775,7 @@
               </a:defRPr>
             </a:pPr>
             <a:r>
-              <a:t>오른쪽 화면: 실제 심사위원이 접하는 과제 목록 테이블 영역</a:t>
+              <a:t>오른쪽 화면: 서명이 실제 심사위원 성명으로 연동된 결과 보고서 하단부</a:t>
             </a:r>
           </a:p>
         </p:txBody>
@@ -3794,7 +3827,7 @@
       </p:sp>
       <p:pic>
         <p:nvPicPr>
-          <p:cNvPr id="10" name="Picture 9" descr="media__1784176902473.png"/>
+          <p:cNvPr id="10" name="Picture 9" descr="media__1784596287593.png"/>
           <p:cNvPicPr>
             <a:picLocks noChangeAspect="1"/>
           </p:cNvPicPr>
@@ -3808,8 +3841,8 @@
         </p:blipFill>
         <p:spPr>
           <a:xfrm>
-            <a:off x="6814049" y="1965960"/>
-            <a:ext cx="4385580" cy="3840480"/>
+            <a:off x="7059982" y="1965960"/>
+            <a:ext cx="3893714" cy="3840480"/>
           </a:xfrm>
           <a:prstGeom prst="rect">
             <a:avLst/>
@@ -3909,7 +3942,7 @@
               </a:defRPr>
             </a:pPr>
             <a:r>
-              <a:t>채점 전에 제출물의 연결성과 재현 가능성을 봅니다</a:t>
+              <a:t>내 배정 과제 큐에서 심사 우선순위를 잡습니다</a:t>
             </a:r>
           </a:p>
         </p:txBody>
@@ -4024,7 +4057,7 @@
               </a:defRPr>
             </a:pPr>
             <a:r>
-              <a:t>11</a:t>
+              <a:t>10</a:t>
             </a:r>
           </a:p>
         </p:txBody>
@@ -4108,71 +4141,55 @@
               </a:defRPr>
             </a:pPr>
             <a:r>
-              <a:t>3대 증빙 자료 다차원 교차 검증</a:t>
-            </a:r>
-          </a:p>
-          <a:p>
-            <a:pPr>
-              <a:spcAft>
-                <a:spcPts val="600"/>
-              </a:spcAft>
-              <a:defRPr sz="1100">
-                <a:solidFill>
-                  <a:srgbClr val="94A3B8"/>
-                </a:solidFill>
-                <a:latin typeface="Noto Sans KR"/>
-              </a:defRPr>
-            </a:pPr>
-            <a:r>
-              <a:t>제출물 상세 탭(Tab) 활용 방식:</a:t>
-            </a:r>
-          </a:p>
-          <a:p>
-            <a:pPr>
-              <a:spcAft>
-                <a:spcPts val="600"/>
-              </a:spcAft>
-              <a:defRPr sz="1100">
-                <a:solidFill>
-                  <a:srgbClr val="94A3B8"/>
-                </a:solidFill>
-                <a:latin typeface="Noto Sans KR"/>
-              </a:defRPr>
-            </a:pPr>
-            <a:r>
-              <a:t>• 보고서 요약 (Tab 1): 과제 제안 배경 및 Pain Point 극복 방안, 6S 요약 검토 (문제-해결-기대효과의 논리적 일관성 체크)</a:t>
-            </a:r>
-          </a:p>
-          <a:p>
-            <a:pPr>
-              <a:spcAft>
-                <a:spcPts val="600"/>
-              </a:spcAft>
-              <a:defRPr sz="1100">
-                <a:solidFill>
-                  <a:srgbClr val="94A3B8"/>
-                </a:solidFill>
-                <a:latin typeface="Noto Sans KR"/>
-              </a:defRPr>
-            </a:pPr>
-            <a:r>
-              <a:t>• 소스코드 구조 (Tab 2): 디렉토리 트리 구조, 라이브러리 구성 및 API Key 노출 방지 대책 검토</a:t>
-            </a:r>
-          </a:p>
-          <a:p>
-            <a:pPr>
-              <a:spcAft>
-                <a:spcPts val="600"/>
-              </a:spcAft>
-              <a:defRPr sz="1100">
-                <a:solidFill>
-                  <a:srgbClr val="94A3B8"/>
-                </a:solidFill>
-                <a:latin typeface="Noto Sans KR"/>
-              </a:defRPr>
-            </a:pPr>
-            <a:r>
-              <a:t>• 시연·링크 (Tab 3): 결과 보고서 PDF 원본, Git 저장소 주소, 구동 동영상 링크 유효성 검증</a:t>
+              <a:t>심사 위원 배정 큐 모니터링</a:t>
+            </a:r>
+          </a:p>
+          <a:p>
+            <a:pPr>
+              <a:spcAft>
+                <a:spcPts val="600"/>
+              </a:spcAft>
+              <a:defRPr sz="1100">
+                <a:solidFill>
+                  <a:srgbClr val="94A3B8"/>
+                </a:solidFill>
+                <a:latin typeface="Noto Sans KR"/>
+              </a:defRPr>
+            </a:pPr>
+            <a:r>
+              <a:t>심사위원 전용 배정 과제 리스트 가이드:</a:t>
+            </a:r>
+          </a:p>
+          <a:p>
+            <a:pPr>
+              <a:spcAft>
+                <a:spcPts val="600"/>
+              </a:spcAft>
+              <a:defRPr sz="1100">
+                <a:solidFill>
+                  <a:srgbClr val="94A3B8"/>
+                </a:solidFill>
+                <a:latin typeface="Noto Sans KR"/>
+              </a:defRPr>
+            </a:pPr>
+            <a:r>
+              <a:t>• 성명 및 이메일 로그인 시, 본인이 패널로 등록된 평가 과제만 화면에 정렬됩니다.</a:t>
+            </a:r>
+          </a:p>
+          <a:p>
+            <a:pPr>
+              <a:spcAft>
+                <a:spcPts val="600"/>
+              </a:spcAft>
+              <a:defRPr sz="1100">
+                <a:solidFill>
+                  <a:srgbClr val="94A3B8"/>
+                </a:solidFill>
+                <a:latin typeface="Noto Sans KR"/>
+              </a:defRPr>
+            </a:pPr>
+            <a:r>
+              <a:t>• 테이블 컬럼: 지원자 정보, 소속 법인/부서, 자격 인증 레벨, 내 평가 진행 현황(대기/완료), 타 위원 제출 진척 상태 배지 표시</a:t>
             </a:r>
           </a:p>
           <a:p>
@@ -4189,7 +4206,23 @@
               </a:defRPr>
             </a:pPr>
             <a:r>
-              <a:t>💡 소스코드 및 구동 영상 링크가 손상되었을 경우 정성 의견란에 구체적인 비작동 사유를 기재해 주세요.</a:t>
+              <a:t>[심사하기/수정]:</a:t>
+            </a:r>
+          </a:p>
+          <a:p>
+            <a:pPr>
+              <a:spcAft>
+                <a:spcPts val="600"/>
+              </a:spcAft>
+              <a:defRPr sz="1100">
+                <a:solidFill>
+                  <a:srgbClr val="94A3B8"/>
+                </a:solidFill>
+                <a:latin typeface="Noto Sans KR"/>
+              </a:defRPr>
+            </a:pPr>
+            <a:r>
+              <a:t>• 채점을 시작하거나 이미 제출한 내용을 재조정할 때 버튼을 선택해 작업장(Workspace)으로 진입합니다.</a:t>
             </a:r>
           </a:p>
           <a:p>
@@ -4206,7 +4239,7 @@
               </a:defRPr>
             </a:pPr>
             <a:r>
-              <a:t>오른쪽 화면: 실제 심사 작업장 좌측의 3단 증빙 자료 리더(Reader)</a:t>
+              <a:t>오른쪽 화면: 실제 심사위원이 접하는 과제 목록 테이블 영역</a:t>
             </a:r>
           </a:p>
         </p:txBody>
@@ -4258,7 +4291,7 @@
       </p:sp>
       <p:pic>
         <p:nvPicPr>
-          <p:cNvPr id="10" name="Picture 9" descr="aica_evaluation_workspace_mockup_1784167999282.png"/>
+          <p:cNvPr id="10" name="Picture 9" descr="media__1784176902473.png"/>
           <p:cNvPicPr>
             <a:picLocks noChangeAspect="1"/>
           </p:cNvPicPr>
@@ -4272,8 +4305,8 @@
         </p:blipFill>
         <p:spPr>
           <a:xfrm>
-            <a:off x="7086600" y="1965960"/>
-            <a:ext cx="3840480" cy="3840480"/>
+            <a:off x="6814049" y="1965960"/>
+            <a:ext cx="4385580" cy="3840480"/>
           </a:xfrm>
           <a:prstGeom prst="rect">
             <a:avLst/>
@@ -4373,7 +4406,7 @@
               </a:defRPr>
             </a:pPr>
             <a:r>
-              <a:t>공통 보안 체크리스트는 모든 심사의 선행 조건입니다</a:t>
+              <a:t>채점 전에 제출물의 연결성과 재현 가능성을 봅니다</a:t>
             </a:r>
           </a:p>
         </p:txBody>
@@ -4488,7 +4521,7 @@
               </a:defRPr>
             </a:pPr>
             <a:r>
-              <a:t>12</a:t>
+              <a:t>11</a:t>
             </a:r>
           </a:p>
         </p:txBody>
@@ -4572,103 +4605,71 @@
               </a:defRPr>
             </a:pPr>
             <a:r>
-              <a:t>5대 공통 보안성 자가진단 규칙</a:t>
-            </a:r>
-          </a:p>
-          <a:p>
-            <a:pPr>
-              <a:spcAft>
-                <a:spcPts val="600"/>
-              </a:spcAft>
-              <a:defRPr sz="1100">
-                <a:solidFill>
-                  <a:srgbClr val="94A3B8"/>
-                </a:solidFill>
-                <a:latin typeface="Noto Sans KR"/>
-              </a:defRPr>
-            </a:pPr>
-            <a:r>
-              <a:t>모든 심사의 최우선 선행 체크리스트:</a:t>
-            </a:r>
-          </a:p>
-          <a:p>
-            <a:pPr>
-              <a:spcAft>
-                <a:spcPts val="600"/>
-              </a:spcAft>
-              <a:defRPr sz="1100">
-                <a:solidFill>
-                  <a:srgbClr val="94A3B8"/>
-                </a:solidFill>
-                <a:latin typeface="Noto Sans KR"/>
-              </a:defRPr>
-            </a:pPr>
-            <a:r>
-              <a:t>• 1. 개인정보(PII): 이름, 메일주소, 연락처 등 완벽 마스킹 여부</a:t>
-            </a:r>
-          </a:p>
-          <a:p>
-            <a:pPr>
-              <a:spcAft>
-                <a:spcPts val="600"/>
-              </a:spcAft>
-              <a:defRPr sz="1100">
-                <a:solidFill>
-                  <a:srgbClr val="94A3B8"/>
-                </a:solidFill>
-                <a:latin typeface="Noto Sans KR"/>
-              </a:defRPr>
-            </a:pPr>
-            <a:r>
-              <a:t>• 2. 기밀 정보 익명화: 계약 금액, 단가, 마진율 등 기밀 제거 여부</a:t>
-            </a:r>
-          </a:p>
-          <a:p>
-            <a:pPr>
-              <a:spcAft>
-                <a:spcPts val="600"/>
-              </a:spcAft>
-              <a:defRPr sz="1100">
-                <a:solidFill>
-                  <a:srgbClr val="94A3B8"/>
-                </a:solidFill>
-                <a:latin typeface="Noto Sans KR"/>
-              </a:defRPr>
-            </a:pPr>
-            <a:r>
-              <a:t>• 3. 자격증명 제거: 소스코드 내 API Key, ID/PW 제거 여부</a:t>
-            </a:r>
-          </a:p>
-          <a:p>
-            <a:pPr>
-              <a:spcAft>
-                <a:spcPts val="600"/>
-              </a:spcAft>
-              <a:defRPr sz="1100">
-                <a:solidFill>
-                  <a:srgbClr val="94A3B8"/>
-                </a:solidFill>
-                <a:latin typeface="Noto Sans KR"/>
-              </a:defRPr>
-            </a:pPr>
-            <a:r>
-              <a:t>• 4. 보안 가이드 준수: 보안실 배포 규정 및 자가점검 여부</a:t>
-            </a:r>
-          </a:p>
-          <a:p>
-            <a:pPr>
-              <a:spcAft>
-                <a:spcPts val="600"/>
-              </a:spcAft>
-              <a:defRPr sz="1100">
-                <a:solidFill>
-                  <a:srgbClr val="94A3B8"/>
-                </a:solidFill>
-                <a:latin typeface="Noto Sans KR"/>
-              </a:defRPr>
-            </a:pPr>
-            <a:r>
-              <a:t>• 5. 유출 위반 차단: 타 부서 및 망 분리 활용 시 유출 위험 제거 여부</a:t>
+              <a:t>3대 증빙 자료 다차원 교차 검증</a:t>
+            </a:r>
+          </a:p>
+          <a:p>
+            <a:pPr>
+              <a:spcAft>
+                <a:spcPts val="600"/>
+              </a:spcAft>
+              <a:defRPr sz="1100">
+                <a:solidFill>
+                  <a:srgbClr val="94A3B8"/>
+                </a:solidFill>
+                <a:latin typeface="Noto Sans KR"/>
+              </a:defRPr>
+            </a:pPr>
+            <a:r>
+              <a:t>제출물 상세 탭(Tab) 활용 방식:</a:t>
+            </a:r>
+          </a:p>
+          <a:p>
+            <a:pPr>
+              <a:spcAft>
+                <a:spcPts val="600"/>
+              </a:spcAft>
+              <a:defRPr sz="1100">
+                <a:solidFill>
+                  <a:srgbClr val="94A3B8"/>
+                </a:solidFill>
+                <a:latin typeface="Noto Sans KR"/>
+              </a:defRPr>
+            </a:pPr>
+            <a:r>
+              <a:t>• 보고서 요약 (Tab 1): 과제 제안 배경 및 Pain Point 극복 방안, 6S 요약 검토 (문제-해결-기대효과의 논리적 일관성 체크)</a:t>
+            </a:r>
+          </a:p>
+          <a:p>
+            <a:pPr>
+              <a:spcAft>
+                <a:spcPts val="600"/>
+              </a:spcAft>
+              <a:defRPr sz="1100">
+                <a:solidFill>
+                  <a:srgbClr val="94A3B8"/>
+                </a:solidFill>
+                <a:latin typeface="Noto Sans KR"/>
+              </a:defRPr>
+            </a:pPr>
+            <a:r>
+              <a:t>• 소스코드 구조 (Tab 2): 디렉토리 트리 구조, 라이브러리 구성 및 API Key 노출 방지 대책 검토</a:t>
+            </a:r>
+          </a:p>
+          <a:p>
+            <a:pPr>
+              <a:spcAft>
+                <a:spcPts val="600"/>
+              </a:spcAft>
+              <a:defRPr sz="1100">
+                <a:solidFill>
+                  <a:srgbClr val="94A3B8"/>
+                </a:solidFill>
+                <a:latin typeface="Noto Sans KR"/>
+              </a:defRPr>
+            </a:pPr>
+            <a:r>
+              <a:t>• 시연·링크 (Tab 3): 결과 보고서 PDF 원본, Git 저장소 주소, 구동 동영상 링크 유효성 검증</a:t>
             </a:r>
           </a:p>
           <a:p>
@@ -4685,23 +4686,7 @@
               </a:defRPr>
             </a:pPr>
             <a:r>
-              <a:t>⚠️ Red Flag 경고 연동:</a:t>
-            </a:r>
-          </a:p>
-          <a:p>
-            <a:pPr>
-              <a:spcAft>
-                <a:spcPts val="600"/>
-              </a:spcAft>
-              <a:defRPr sz="1100">
-                <a:solidFill>
-                  <a:srgbClr val="94A3B8"/>
-                </a:solidFill>
-                <a:latin typeface="Noto Sans KR"/>
-              </a:defRPr>
-            </a:pPr>
-            <a:r>
-              <a:t>• 하나라도 미준수 시 '보안 주의 알림'이 대시보드에 연동되며, 중대한 자격증명 노출은 즉시 불합격 처리 대상이 됩니다.</a:t>
+              <a:t>💡 소스코드 및 구동 영상 링크가 손상되었을 경우 정성 의견란에 구체적인 비작동 사유를 기재해 주세요.</a:t>
             </a:r>
           </a:p>
           <a:p>
@@ -4718,7 +4703,7 @@
               </a:defRPr>
             </a:pPr>
             <a:r>
-              <a:t>오른쪽 화면: 실제 채점 페이지 좌측 하단 보안 체크리스트 영역</a:t>
+              <a:t>오른쪽 화면: 실제 심사 작업장 좌측의 3단 증빙 자료 리더(Reader)</a:t>
             </a:r>
           </a:p>
         </p:txBody>
@@ -4770,7 +4755,7 @@
       </p:sp>
       <p:pic>
         <p:nvPicPr>
-          <p:cNvPr id="10" name="Picture 9" descr="media__1784176902473.png"/>
+          <p:cNvPr id="10" name="Picture 9" descr="aica_evaluation_workspace_mockup_1784167999282.png"/>
           <p:cNvPicPr>
             <a:picLocks noChangeAspect="1"/>
           </p:cNvPicPr>
@@ -4784,8 +4769,8 @@
         </p:blipFill>
         <p:spPr>
           <a:xfrm>
-            <a:off x="6814049" y="1965960"/>
-            <a:ext cx="4385580" cy="3840480"/>
+            <a:off x="7086600" y="1965960"/>
+            <a:ext cx="3840480" cy="3840480"/>
           </a:xfrm>
           <a:prstGeom prst="rect">
             <a:avLst/>
@@ -4885,7 +4870,7 @@
               </a:defRPr>
             </a:pPr>
             <a:r>
-              <a:t>Level에 따라 채점 축과 가중치가 달라집니다</a:t>
+              <a:t>공통 보안 체크리스트는 모든 심사의 선행 조건입니다</a:t>
             </a:r>
           </a:p>
         </p:txBody>
@@ -5000,7 +4985,7 @@
               </a:defRPr>
             </a:pPr>
             <a:r>
-              <a:t>13</a:t>
+              <a:t>12</a:t>
             </a:r>
           </a:p>
         </p:txBody>
@@ -5084,151 +5069,103 @@
               </a:defRPr>
             </a:pPr>
             <a:r>
-              <a:t>심사 자격 레벨별 가중치 및 배점 척도</a:t>
-            </a:r>
-          </a:p>
-          <a:p>
-            <a:pPr>
-              <a:spcAft>
-                <a:spcPts val="600"/>
-              </a:spcAft>
-              <a:defRPr sz="1100">
-                <a:solidFill>
-                  <a:srgbClr val="94A3B8"/>
-                </a:solidFill>
-                <a:latin typeface="Noto Sans KR"/>
-              </a:defRPr>
-            </a:pPr>
-            <a:r>
-              <a:t>자격 등급별 평가 주안점 및 비율:</a:t>
-            </a:r>
-          </a:p>
-          <a:p>
-            <a:pPr>
-              <a:spcAft>
-                <a:spcPts val="600"/>
-              </a:spcAft>
-              <a:defRPr sz="1100">
-                <a:solidFill>
-                  <a:srgbClr val="94A3B8"/>
-                </a:solidFill>
-                <a:latin typeface="Noto Sans KR"/>
-              </a:defRPr>
-            </a:pPr>
-            <a:r>
-              <a:t>• Level 3 (AI Champion): 현업 적용성 및 기여 효과 검증</a:t>
-            </a:r>
-          </a:p>
-          <a:p>
-            <a:pPr>
-              <a:spcAft>
-                <a:spcPts val="600"/>
-              </a:spcAft>
-              <a:defRPr sz="1100">
-                <a:solidFill>
-                  <a:srgbClr val="94A3B8"/>
-                </a:solidFill>
-                <a:latin typeface="Noto Sans KR"/>
-              </a:defRPr>
-            </a:pPr>
-            <a:r>
-              <a:t>   - 문제 해결 난이도 (30%)</a:t>
-            </a:r>
-          </a:p>
-          <a:p>
-            <a:pPr>
-              <a:spcAft>
-                <a:spcPts val="600"/>
-              </a:spcAft>
-              <a:defRPr sz="1100">
-                <a:solidFill>
-                  <a:srgbClr val="94A3B8"/>
-                </a:solidFill>
-                <a:latin typeface="Noto Sans KR"/>
-              </a:defRPr>
-            </a:pPr>
-            <a:r>
-              <a:t>   - 구현 완성도 (40%)</a:t>
-            </a:r>
-          </a:p>
-          <a:p>
-            <a:pPr>
-              <a:spcAft>
-                <a:spcPts val="600"/>
-              </a:spcAft>
-              <a:defRPr sz="1100">
-                <a:solidFill>
-                  <a:srgbClr val="94A3B8"/>
-                </a:solidFill>
-                <a:latin typeface="Noto Sans KR"/>
-              </a:defRPr>
-            </a:pPr>
-            <a:r>
-              <a:t>   - 확산 및 자산화 (30%)</a:t>
-            </a:r>
-          </a:p>
-          <a:p>
-            <a:pPr>
-              <a:spcAft>
-                <a:spcPts val="600"/>
-              </a:spcAft>
-              <a:defRPr sz="1100">
-                <a:solidFill>
-                  <a:srgbClr val="94A3B8"/>
-                </a:solidFill>
-                <a:latin typeface="Noto Sans KR"/>
-              </a:defRPr>
-            </a:pPr>
-            <a:r>
-              <a:t>• Level 4 (AI Specialist): 심화 기술력 및 보안 통제 깊이 검증</a:t>
-            </a:r>
-          </a:p>
-          <a:p>
-            <a:pPr>
-              <a:spcAft>
-                <a:spcPts val="600"/>
-              </a:spcAft>
-              <a:defRPr sz="1100">
-                <a:solidFill>
-                  <a:srgbClr val="94A3B8"/>
-                </a:solidFill>
-                <a:latin typeface="Noto Sans KR"/>
-              </a:defRPr>
-            </a:pPr>
-            <a:r>
-              <a:t>   - 기술적 구현력 (40%)</a:t>
-            </a:r>
-          </a:p>
-          <a:p>
-            <a:pPr>
-              <a:spcAft>
-                <a:spcPts val="600"/>
-              </a:spcAft>
-              <a:defRPr sz="1100">
-                <a:solidFill>
-                  <a:srgbClr val="94A3B8"/>
-                </a:solidFill>
-                <a:latin typeface="Noto Sans KR"/>
-              </a:defRPr>
-            </a:pPr>
-            <a:r>
-              <a:t>   - 데이터 활용 및 보안성 (30%)</a:t>
-            </a:r>
-          </a:p>
-          <a:p>
-            <a:pPr>
-              <a:spcAft>
-                <a:spcPts val="600"/>
-              </a:spcAft>
-              <a:defRPr sz="1100">
-                <a:solidFill>
-                  <a:srgbClr val="94A3B8"/>
-                </a:solidFill>
-                <a:latin typeface="Noto Sans KR"/>
-              </a:defRPr>
-            </a:pPr>
-            <a:r>
-              <a:t>   - 비즈니스 기여도 (30%)</a:t>
+              <a:t>5대 공통 보안성 자가진단 규칙</a:t>
+            </a:r>
+          </a:p>
+          <a:p>
+            <a:pPr>
+              <a:spcAft>
+                <a:spcPts val="600"/>
+              </a:spcAft>
+              <a:defRPr sz="1100">
+                <a:solidFill>
+                  <a:srgbClr val="94A3B8"/>
+                </a:solidFill>
+                <a:latin typeface="Noto Sans KR"/>
+              </a:defRPr>
+            </a:pPr>
+            <a:r>
+              <a:t>모든 심사의 최우선 선행 체크리스트:</a:t>
+            </a:r>
+          </a:p>
+          <a:p>
+            <a:pPr>
+              <a:spcAft>
+                <a:spcPts val="600"/>
+              </a:spcAft>
+              <a:defRPr sz="1100">
+                <a:solidFill>
+                  <a:srgbClr val="94A3B8"/>
+                </a:solidFill>
+                <a:latin typeface="Noto Sans KR"/>
+              </a:defRPr>
+            </a:pPr>
+            <a:r>
+              <a:t>• 1. 개인정보(PII): 이름, 메일주소, 연락처 등 완벽 마스킹 여부</a:t>
+            </a:r>
+          </a:p>
+          <a:p>
+            <a:pPr>
+              <a:spcAft>
+                <a:spcPts val="600"/>
+              </a:spcAft>
+              <a:defRPr sz="1100">
+                <a:solidFill>
+                  <a:srgbClr val="94A3B8"/>
+                </a:solidFill>
+                <a:latin typeface="Noto Sans KR"/>
+              </a:defRPr>
+            </a:pPr>
+            <a:r>
+              <a:t>• 2. 기밀 정보 익명화: 계약 금액, 단가, 마진율 등 기밀 제거 여부</a:t>
+            </a:r>
+          </a:p>
+          <a:p>
+            <a:pPr>
+              <a:spcAft>
+                <a:spcPts val="600"/>
+              </a:spcAft>
+              <a:defRPr sz="1100">
+                <a:solidFill>
+                  <a:srgbClr val="94A3B8"/>
+                </a:solidFill>
+                <a:latin typeface="Noto Sans KR"/>
+              </a:defRPr>
+            </a:pPr>
+            <a:r>
+              <a:t>• 3. 자격증명 제거: 소스코드 내 API Key, ID/PW 제거 여부</a:t>
+            </a:r>
+          </a:p>
+          <a:p>
+            <a:pPr>
+              <a:spcAft>
+                <a:spcPts val="600"/>
+              </a:spcAft>
+              <a:defRPr sz="1100">
+                <a:solidFill>
+                  <a:srgbClr val="94A3B8"/>
+                </a:solidFill>
+                <a:latin typeface="Noto Sans KR"/>
+              </a:defRPr>
+            </a:pPr>
+            <a:r>
+              <a:t>• 4. 보안 가이드 준수: 보안실 배포 규정 및 자가점검 여부</a:t>
+            </a:r>
+          </a:p>
+          <a:p>
+            <a:pPr>
+              <a:spcAft>
+                <a:spcPts val="600"/>
+              </a:spcAft>
+              <a:defRPr sz="1100">
+                <a:solidFill>
+                  <a:srgbClr val="94A3B8"/>
+                </a:solidFill>
+                <a:latin typeface="Noto Sans KR"/>
+              </a:defRPr>
+            </a:pPr>
+            <a:r>
+              <a:t>• 5. 유출 위반 차단: 타 부서 및 망 분리 활용 시 유출 위험 제거 여부</a:t>
             </a:r>
           </a:p>
           <a:p>
@@ -5245,7 +5182,40 @@
               </a:defRPr>
             </a:pPr>
             <a:r>
-              <a:t>오른쪽 화면: 실제 채점 페이지 우측의 루브릭 점수 선택 라디오 영역</a:t>
+              <a:t>⚠️ Red Flag 경고 연동:</a:t>
+            </a:r>
+          </a:p>
+          <a:p>
+            <a:pPr>
+              <a:spcAft>
+                <a:spcPts val="600"/>
+              </a:spcAft>
+              <a:defRPr sz="1100">
+                <a:solidFill>
+                  <a:srgbClr val="94A3B8"/>
+                </a:solidFill>
+                <a:latin typeface="Noto Sans KR"/>
+              </a:defRPr>
+            </a:pPr>
+            <a:r>
+              <a:t>• 하나라도 미준수 시 '보안 주의 알림'이 대시보드에 연동되며, 중대한 자격증명 노출은 즉시 불합격 처리 대상이 됩니다.</a:t>
+            </a:r>
+          </a:p>
+          <a:p>
+            <a:br/>
+            <a:pPr>
+              <a:spcAft>
+                <a:spcPts val="600"/>
+              </a:spcAft>
+              <a:defRPr sz="1100">
+                <a:solidFill>
+                  <a:srgbClr val="94A3B8"/>
+                </a:solidFill>
+                <a:latin typeface="Noto Sans KR"/>
+              </a:defRPr>
+            </a:pPr>
+            <a:r>
+              <a:t>오른쪽 화면: 실제 채점 페이지 좌측 하단 보안 체크리스트 영역</a:t>
             </a:r>
           </a:p>
         </p:txBody>
@@ -5412,7 +5382,7 @@
               </a:defRPr>
             </a:pPr>
             <a:r>
-              <a:t>점수와 의견은 반드시 같은 근거를 가리켜야 합니다</a:t>
+              <a:t>Level에 따라 채점 축과 가중치가 달라집니다</a:t>
             </a:r>
           </a:p>
         </p:txBody>
@@ -5527,7 +5497,7 @@
               </a:defRPr>
             </a:pPr>
             <a:r>
-              <a:t>14</a:t>
+              <a:t>13</a:t>
             </a:r>
           </a:p>
         </p:txBody>
@@ -5611,55 +5581,151 @@
               </a:defRPr>
             </a:pPr>
             <a:r>
-              <a:t>세부 루브릭 채점 및 질문은행 면접 툴</a:t>
-            </a:r>
-          </a:p>
-          <a:p>
-            <a:pPr>
-              <a:spcAft>
-                <a:spcPts val="600"/>
-              </a:spcAft>
-              <a:defRPr sz="1100">
-                <a:solidFill>
-                  <a:srgbClr val="94A3B8"/>
-                </a:solidFill>
-                <a:latin typeface="Noto Sans KR"/>
-              </a:defRPr>
-            </a:pPr>
-            <a:r>
-              <a:t>루브릭 세부 채점 가이드:</a:t>
-            </a:r>
-          </a:p>
-          <a:p>
-            <a:pPr>
-              <a:spcAft>
-                <a:spcPts val="600"/>
-              </a:spcAft>
-              <a:defRPr sz="1100">
-                <a:solidFill>
-                  <a:srgbClr val="94A3B8"/>
-                </a:solidFill>
-                <a:latin typeface="Noto Sans KR"/>
-              </a:defRPr>
-            </a:pPr>
-            <a:r>
-              <a:t>• 5단계 등급 선택: (탁월 100, 양호 85, 보통 70, 미흡 50, 부족 30)</a:t>
-            </a:r>
-          </a:p>
-          <a:p>
-            <a:pPr>
-              <a:spcAft>
-                <a:spcPts val="600"/>
-              </a:spcAft>
-              <a:defRPr sz="1100">
-                <a:solidFill>
-                  <a:srgbClr val="94A3B8"/>
-                </a:solidFill>
-                <a:latin typeface="Noto Sans KR"/>
-              </a:defRPr>
-            </a:pPr>
-            <a:r>
-              <a:t>• 각 항목마다 정량적/정성적 등급 부여 사유 필수 기재</a:t>
+              <a:t>심사 자격 레벨별 가중치 및 배점 척도</a:t>
+            </a:r>
+          </a:p>
+          <a:p>
+            <a:pPr>
+              <a:spcAft>
+                <a:spcPts val="600"/>
+              </a:spcAft>
+              <a:defRPr sz="1100">
+                <a:solidFill>
+                  <a:srgbClr val="94A3B8"/>
+                </a:solidFill>
+                <a:latin typeface="Noto Sans KR"/>
+              </a:defRPr>
+            </a:pPr>
+            <a:r>
+              <a:t>자격 등급별 평가 주안점 및 비율:</a:t>
+            </a:r>
+          </a:p>
+          <a:p>
+            <a:pPr>
+              <a:spcAft>
+                <a:spcPts val="600"/>
+              </a:spcAft>
+              <a:defRPr sz="1100">
+                <a:solidFill>
+                  <a:srgbClr val="94A3B8"/>
+                </a:solidFill>
+                <a:latin typeface="Noto Sans KR"/>
+              </a:defRPr>
+            </a:pPr>
+            <a:r>
+              <a:t>• Level 3 (AI Champion): 현업 적용성 및 기여 효과 검증</a:t>
+            </a:r>
+          </a:p>
+          <a:p>
+            <a:pPr>
+              <a:spcAft>
+                <a:spcPts val="600"/>
+              </a:spcAft>
+              <a:defRPr sz="1100">
+                <a:solidFill>
+                  <a:srgbClr val="94A3B8"/>
+                </a:solidFill>
+                <a:latin typeface="Noto Sans KR"/>
+              </a:defRPr>
+            </a:pPr>
+            <a:r>
+              <a:t>   - 문제 해결 난이도 (30%)</a:t>
+            </a:r>
+          </a:p>
+          <a:p>
+            <a:pPr>
+              <a:spcAft>
+                <a:spcPts val="600"/>
+              </a:spcAft>
+              <a:defRPr sz="1100">
+                <a:solidFill>
+                  <a:srgbClr val="94A3B8"/>
+                </a:solidFill>
+                <a:latin typeface="Noto Sans KR"/>
+              </a:defRPr>
+            </a:pPr>
+            <a:r>
+              <a:t>   - 구현 완성도 (40%)</a:t>
+            </a:r>
+          </a:p>
+          <a:p>
+            <a:pPr>
+              <a:spcAft>
+                <a:spcPts val="600"/>
+              </a:spcAft>
+              <a:defRPr sz="1100">
+                <a:solidFill>
+                  <a:srgbClr val="94A3B8"/>
+                </a:solidFill>
+                <a:latin typeface="Noto Sans KR"/>
+              </a:defRPr>
+            </a:pPr>
+            <a:r>
+              <a:t>   - 확산 및 자산화 (30%)</a:t>
+            </a:r>
+          </a:p>
+          <a:p>
+            <a:pPr>
+              <a:spcAft>
+                <a:spcPts val="600"/>
+              </a:spcAft>
+              <a:defRPr sz="1100">
+                <a:solidFill>
+                  <a:srgbClr val="94A3B8"/>
+                </a:solidFill>
+                <a:latin typeface="Noto Sans KR"/>
+              </a:defRPr>
+            </a:pPr>
+            <a:r>
+              <a:t>• Level 4 (AI Specialist): 심화 기술력 및 보안 통제 깊이 검증</a:t>
+            </a:r>
+          </a:p>
+          <a:p>
+            <a:pPr>
+              <a:spcAft>
+                <a:spcPts val="600"/>
+              </a:spcAft>
+              <a:defRPr sz="1100">
+                <a:solidFill>
+                  <a:srgbClr val="94A3B8"/>
+                </a:solidFill>
+                <a:latin typeface="Noto Sans KR"/>
+              </a:defRPr>
+            </a:pPr>
+            <a:r>
+              <a:t>   - 기술적 구현력 (40%)</a:t>
+            </a:r>
+          </a:p>
+          <a:p>
+            <a:pPr>
+              <a:spcAft>
+                <a:spcPts val="600"/>
+              </a:spcAft>
+              <a:defRPr sz="1100">
+                <a:solidFill>
+                  <a:srgbClr val="94A3B8"/>
+                </a:solidFill>
+                <a:latin typeface="Noto Sans KR"/>
+              </a:defRPr>
+            </a:pPr>
+            <a:r>
+              <a:t>   - 데이터 활용 및 보안성 (30%)</a:t>
+            </a:r>
+          </a:p>
+          <a:p>
+            <a:pPr>
+              <a:spcAft>
+                <a:spcPts val="600"/>
+              </a:spcAft>
+              <a:defRPr sz="1100">
+                <a:solidFill>
+                  <a:srgbClr val="94A3B8"/>
+                </a:solidFill>
+                <a:latin typeface="Noto Sans KR"/>
+              </a:defRPr>
+            </a:pPr>
+            <a:r>
+              <a:t>   - 비즈니스 기여도 (30%)</a:t>
             </a:r>
           </a:p>
           <a:p>
@@ -5676,73 +5742,7 @@
               </a:defRPr>
             </a:pPr>
             <a:r>
-              <a:t>⚡ Consensus Monitor (의견 불합치 방지):</a:t>
-            </a:r>
-          </a:p>
-          <a:p>
-            <a:pPr>
-              <a:spcAft>
-                <a:spcPts val="600"/>
-              </a:spcAft>
-              <a:defRPr sz="1100">
-                <a:solidFill>
-                  <a:srgbClr val="94A3B8"/>
-                </a:solidFill>
-                <a:latin typeface="Noto Sans KR"/>
-              </a:defRPr>
-            </a:pPr>
-            <a:r>
-              <a:t>• 동시 배정된 위원 간 평가 편차가 15점 이상 벌어질 경우 경고 알림 노출 ➡️ 타 위원 의견 수렴 후 조율 합의문 기재</a:t>
-            </a:r>
-          </a:p>
-          <a:p>
-            <a:br/>
-            <a:pPr>
-              <a:spcAft>
-                <a:spcPts val="600"/>
-              </a:spcAft>
-              <a:defRPr sz="1100">
-                <a:solidFill>
-                  <a:srgbClr val="94A3B8"/>
-                </a:solidFill>
-                <a:latin typeface="Noto Sans KR"/>
-              </a:defRPr>
-            </a:pPr>
-            <a:r>
-              <a:t>질문은행 도우미 (Question Bank):</a:t>
-            </a:r>
-          </a:p>
-          <a:p>
-            <a:pPr>
-              <a:spcAft>
-                <a:spcPts val="600"/>
-              </a:spcAft>
-              <a:defRPr sz="1100">
-                <a:solidFill>
-                  <a:srgbClr val="94A3B8"/>
-                </a:solidFill>
-                <a:latin typeface="Noto Sans KR"/>
-              </a:defRPr>
-            </a:pPr>
-            <a:r>
-              <a:t>• 지원자 과제 유형을 선택하면 면접 질문 리스트와 모범 답변 준거 가이드를 자동으로 제시하여 객관성을 보장합니다.</a:t>
-            </a:r>
-          </a:p>
-          <a:p>
-            <a:br/>
-            <a:pPr>
-              <a:spcAft>
-                <a:spcPts val="600"/>
-              </a:spcAft>
-              <a:defRPr sz="1100">
-                <a:solidFill>
-                  <a:srgbClr val="94A3B8"/>
-                </a:solidFill>
-                <a:latin typeface="Noto Sans KR"/>
-              </a:defRPr>
-            </a:pPr>
-            <a:r>
-              <a:t>오른쪽 화면: 실제 5단계 루브릭 행 카드 및 우측 하단 질문은행 패널 렌더링 화면</a:t>
+              <a:t>오른쪽 화면: 실제 채점 페이지 우측의 루브릭 점수 선택 라디오 영역</a:t>
             </a:r>
           </a:p>
         </p:txBody>
@@ -5794,7 +5794,7 @@
       </p:sp>
       <p:pic>
         <p:nvPicPr>
-          <p:cNvPr id="10" name="Picture 9" descr="aica_evaluation_workspace_mockup_1784167999282.png"/>
+          <p:cNvPr id="10" name="Picture 9" descr="media__1784176902473.png"/>
           <p:cNvPicPr>
             <a:picLocks noChangeAspect="1"/>
           </p:cNvPicPr>
@@ -5808,8 +5808,8 @@
         </p:blipFill>
         <p:spPr>
           <a:xfrm>
-            <a:off x="7086600" y="1965960"/>
-            <a:ext cx="3840480" cy="3840480"/>
+            <a:off x="6814049" y="1965960"/>
+            <a:ext cx="4385580" cy="3840480"/>
           </a:xfrm>
           <a:prstGeom prst="rect">
             <a:avLst/>
@@ -5909,7 +5909,7 @@
               </a:defRPr>
             </a:pPr>
             <a:r>
-              <a:t>제출 전 마지막 확인이 평가 품질을 좌우합니다</a:t>
+              <a:t>점수와 의견은 반드시 같은 근거를 가리켜야 합니다</a:t>
             </a:r>
           </a:p>
         </p:txBody>
@@ -6024,7 +6024,7 @@
               </a:defRPr>
             </a:pPr>
             <a:r>
-              <a:t>15</a:t>
+              <a:t>14</a:t>
             </a:r>
           </a:p>
         </p:txBody>
@@ -6108,87 +6108,55 @@
               </a:defRPr>
             </a:pPr>
             <a:r>
-              <a:t>평가 최종 검토 및 제출 확정</a:t>
-            </a:r>
-          </a:p>
-          <a:p>
-            <a:pPr>
-              <a:spcAft>
-                <a:spcPts val="600"/>
-              </a:spcAft>
-              <a:defRPr sz="1100">
-                <a:solidFill>
-                  <a:srgbClr val="94A3B8"/>
-                </a:solidFill>
-                <a:latin typeface="Noto Sans KR"/>
-              </a:defRPr>
-            </a:pPr>
-            <a:r>
-              <a:t>평가 완료 및 전송 단계:</a:t>
-            </a:r>
-          </a:p>
-          <a:p>
-            <a:pPr>
-              <a:spcAft>
-                <a:spcPts val="600"/>
-              </a:spcAft>
-              <a:defRPr sz="1100">
-                <a:solidFill>
-                  <a:srgbClr val="94A3B8"/>
-                </a:solidFill>
-                <a:latin typeface="Noto Sans KR"/>
-              </a:defRPr>
-            </a:pPr>
-            <a:r>
-              <a:t>• 1. 필수값 체크: 보안 체크박스 준수, 루브릭 점수 선택, 세부 의견 누락 여부 최종 갱신</a:t>
-            </a:r>
-          </a:p>
-          <a:p>
-            <a:pPr>
-              <a:spcAft>
-                <a:spcPts val="600"/>
-              </a:spcAft>
-              <a:defRPr sz="1100">
-                <a:solidFill>
-                  <a:srgbClr val="94A3B8"/>
-                </a:solidFill>
-                <a:latin typeface="Noto Sans KR"/>
-              </a:defRPr>
-            </a:pPr>
-            <a:r>
-              <a:t>• 2. 타 위원 상태 검토: 타 위원의 점수 노출 없이 평가 진행률만 확인(독립적 판단 견지)</a:t>
-            </a:r>
-          </a:p>
-          <a:p>
-            <a:pPr>
-              <a:spcAft>
-                <a:spcPts val="600"/>
-              </a:spcAft>
-              <a:defRPr sz="1100">
-                <a:solidFill>
-                  <a:srgbClr val="94A3B8"/>
-                </a:solidFill>
-                <a:latin typeface="Noto Sans KR"/>
-              </a:defRPr>
-            </a:pPr>
-            <a:r>
-              <a:t>• 3. 평가 제출: [평가 완료 및 제출] 버튼을 선택해 데이터베이스 기록 완료</a:t>
-            </a:r>
-          </a:p>
-          <a:p>
-            <a:pPr>
-              <a:spcAft>
-                <a:spcPts val="600"/>
-              </a:spcAft>
-              <a:defRPr sz="1100">
-                <a:solidFill>
-                  <a:srgbClr val="94A3B8"/>
-                </a:solidFill>
-                <a:latin typeface="Noto Sans KR"/>
-              </a:defRPr>
-            </a:pPr>
-            <a:r>
-              <a:t>• 4. 상태 갱신 검증: 본인 대기 큐로 복귀 후 해당 과제 상태가 '완료'인지 확인</a:t>
+              <a:t>세부 루브릭 채점 및 질문은행 면접 툴</a:t>
+            </a:r>
+          </a:p>
+          <a:p>
+            <a:pPr>
+              <a:spcAft>
+                <a:spcPts val="600"/>
+              </a:spcAft>
+              <a:defRPr sz="1100">
+                <a:solidFill>
+                  <a:srgbClr val="94A3B8"/>
+                </a:solidFill>
+                <a:latin typeface="Noto Sans KR"/>
+              </a:defRPr>
+            </a:pPr>
+            <a:r>
+              <a:t>루브릭 세부 채점 가이드:</a:t>
+            </a:r>
+          </a:p>
+          <a:p>
+            <a:pPr>
+              <a:spcAft>
+                <a:spcPts val="600"/>
+              </a:spcAft>
+              <a:defRPr sz="1100">
+                <a:solidFill>
+                  <a:srgbClr val="94A3B8"/>
+                </a:solidFill>
+                <a:latin typeface="Noto Sans KR"/>
+              </a:defRPr>
+            </a:pPr>
+            <a:r>
+              <a:t>• 5단계 등급 선택: (탁월 100, 양호 85, 보통 70, 미흡 50, 부족 30)</a:t>
+            </a:r>
+          </a:p>
+          <a:p>
+            <a:pPr>
+              <a:spcAft>
+                <a:spcPts val="600"/>
+              </a:spcAft>
+              <a:defRPr sz="1100">
+                <a:solidFill>
+                  <a:srgbClr val="94A3B8"/>
+                </a:solidFill>
+                <a:latin typeface="Noto Sans KR"/>
+              </a:defRPr>
+            </a:pPr>
+            <a:r>
+              <a:t>• 각 항목마다 정량적/정성적 등급 부여 사유 필수 기재</a:t>
             </a:r>
           </a:p>
           <a:p>
@@ -6205,7 +6173,23 @@
               </a:defRPr>
             </a:pPr>
             <a:r>
-              <a:t>💡 최종 판정 계산: 3인의 패널 심사위원이 최종 제출을 모두 완료하는 즉시 파이어스토어에서 평균 점수와 판정을 계산합니다.</a:t>
+              <a:t>⚡ Consensus Monitor (의견 불합치 방지):</a:t>
+            </a:r>
+          </a:p>
+          <a:p>
+            <a:pPr>
+              <a:spcAft>
+                <a:spcPts val="600"/>
+              </a:spcAft>
+              <a:defRPr sz="1100">
+                <a:solidFill>
+                  <a:srgbClr val="94A3B8"/>
+                </a:solidFill>
+                <a:latin typeface="Noto Sans KR"/>
+              </a:defRPr>
+            </a:pPr>
+            <a:r>
+              <a:t>• 동시 배정된 위원 간 평가 편차가 15점 이상 벌어질 경우 경고 알림 노출 ➡️ 타 위원 의견 수렴 후 조율 합의문 기재</a:t>
             </a:r>
           </a:p>
           <a:p>
@@ -6222,7 +6206,40 @@
               </a:defRPr>
             </a:pPr>
             <a:r>
-              <a:t>오른쪽 화면: 실제 채점 입력창 하단의 저장 및 최종 제출 영역</a:t>
+              <a:t>질문은행 도우미 (Question Bank):</a:t>
+            </a:r>
+          </a:p>
+          <a:p>
+            <a:pPr>
+              <a:spcAft>
+                <a:spcPts val="600"/>
+              </a:spcAft>
+              <a:defRPr sz="1100">
+                <a:solidFill>
+                  <a:srgbClr val="94A3B8"/>
+                </a:solidFill>
+                <a:latin typeface="Noto Sans KR"/>
+              </a:defRPr>
+            </a:pPr>
+            <a:r>
+              <a:t>• 지원자 과제 유형을 선택하면 면접 질문 리스트와 모범 답변 준거 가이드를 자동으로 제시하여 객관성을 보장합니다.</a:t>
+            </a:r>
+          </a:p>
+          <a:p>
+            <a:br/>
+            <a:pPr>
+              <a:spcAft>
+                <a:spcPts val="600"/>
+              </a:spcAft>
+              <a:defRPr sz="1100">
+                <a:solidFill>
+                  <a:srgbClr val="94A3B8"/>
+                </a:solidFill>
+                <a:latin typeface="Noto Sans KR"/>
+              </a:defRPr>
+            </a:pPr>
+            <a:r>
+              <a:t>오른쪽 화면: 실제 5단계 루브릭 행 카드 및 우측 하단 질문은행 패널 렌더링 화면</a:t>
             </a:r>
           </a:p>
         </p:txBody>
@@ -6274,7 +6291,7 @@
       </p:sp>
       <p:pic>
         <p:nvPicPr>
-          <p:cNvPr id="10" name="Picture 9" descr="media__1784176902473.png"/>
+          <p:cNvPr id="10" name="Picture 9" descr="aica_evaluation_workspace_mockup_1784167999282.png"/>
           <p:cNvPicPr>
             <a:picLocks noChangeAspect="1"/>
           </p:cNvPicPr>
@@ -6288,8 +6305,8 @@
         </p:blipFill>
         <p:spPr>
           <a:xfrm>
-            <a:off x="6814049" y="1965960"/>
-            <a:ext cx="4385580" cy="3840480"/>
+            <a:off x="7086600" y="1965960"/>
+            <a:ext cx="3840480" cy="3840480"/>
           </a:xfrm>
           <a:prstGeom prst="rect">
             <a:avLst/>
@@ -6353,6 +6370,486 @@
               </a:defRPr>
             </a:pPr>
             <a:r>
+              <a:t>심사위원</a:t>
+            </a:r>
+          </a:p>
+        </p:txBody>
+      </p:sp>
+      <p:sp>
+        <p:nvSpPr>
+          <p:cNvPr id="3" name="TextBox 2"/>
+          <p:cNvSpPr txBox="1"/>
+          <p:nvPr/>
+        </p:nvSpPr>
+        <p:spPr>
+          <a:xfrm>
+            <a:off x="548640" y="640080"/>
+            <a:ext cx="10058400" cy="731520"/>
+          </a:xfrm>
+          <a:prstGeom prst="rect">
+            <a:avLst/>
+          </a:prstGeom>
+          <a:noFill/>
+        </p:spPr>
+        <p:txBody>
+          <a:bodyPr wrap="none">
+            <a:spAutoFit/>
+          </a:bodyPr>
+          <a:lstStyle/>
+          <a:p>
+            <a:pPr>
+              <a:defRPr sz="2600" b="1">
+                <a:solidFill>
+                  <a:srgbClr val="FFFFFF"/>
+                </a:solidFill>
+                <a:latin typeface="Noto Sans KR"/>
+              </a:defRPr>
+            </a:pPr>
+            <a:r>
+              <a:t>제출 전 마지막 확인이 평가 품질을 좌우합니다</a:t>
+            </a:r>
+          </a:p>
+        </p:txBody>
+      </p:sp>
+      <p:sp>
+        <p:nvSpPr>
+          <p:cNvPr id="4" name="Rectangle 3"/>
+          <p:cNvSpPr/>
+          <p:nvPr/>
+        </p:nvSpPr>
+        <p:spPr>
+          <a:xfrm>
+            <a:off x="548640" y="1371600"/>
+            <a:ext cx="11094415" cy="9144"/>
+          </a:xfrm>
+          <a:prstGeom prst="rect">
+            <a:avLst/>
+          </a:prstGeom>
+          <a:solidFill>
+            <a:srgbClr val="334155"/>
+          </a:solidFill>
+          <a:ln>
+            <a:noFill/>
+          </a:ln>
+        </p:spPr>
+        <p:style>
+          <a:lnRef idx="1">
+            <a:schemeClr val="accent1"/>
+          </a:lnRef>
+          <a:fillRef idx="3">
+            <a:schemeClr val="accent1"/>
+          </a:fillRef>
+          <a:effectRef idx="2">
+            <a:schemeClr val="accent1"/>
+          </a:effectRef>
+          <a:fontRef idx="minor">
+            <a:schemeClr val="lt1"/>
+          </a:fontRef>
+        </p:style>
+        <p:txBody>
+          <a:bodyPr rtlCol="0" anchor="ctr"/>
+          <a:lstStyle/>
+          <a:p>
+            <a:pPr algn="ctr"/>
+          </a:p>
+        </p:txBody>
+      </p:sp>
+      <p:sp>
+        <p:nvSpPr>
+          <p:cNvPr id="5" name="TextBox 4"/>
+          <p:cNvSpPr txBox="1"/>
+          <p:nvPr/>
+        </p:nvSpPr>
+        <p:spPr>
+          <a:xfrm>
+            <a:off x="548640" y="6309360"/>
+            <a:ext cx="9144000" cy="365760"/>
+          </a:xfrm>
+          <a:prstGeom prst="rect">
+            <a:avLst/>
+          </a:prstGeom>
+          <a:noFill/>
+        </p:spPr>
+        <p:txBody>
+          <a:bodyPr wrap="none">
+            <a:spAutoFit/>
+          </a:bodyPr>
+          <a:lstStyle/>
+          <a:p>
+            <a:pPr>
+              <a:defRPr sz="900">
+                <a:solidFill>
+                  <a:srgbClr val="94A3B8"/>
+                </a:solidFill>
+                <a:latin typeface="Noto Sans KR"/>
+              </a:defRPr>
+            </a:pPr>
+            <a:r>
+              <a:t>AICA 자격심사 시스템 사용자 매뉴얼 · Web App Dark Theme</a:t>
+            </a:r>
+          </a:p>
+        </p:txBody>
+      </p:sp>
+      <p:sp>
+        <p:nvSpPr>
+          <p:cNvPr id="6" name="TextBox 5"/>
+          <p:cNvSpPr txBox="1"/>
+          <p:nvPr/>
+        </p:nvSpPr>
+        <p:spPr>
+          <a:xfrm>
+            <a:off x="10820095" y="6309360"/>
+            <a:ext cx="822960" cy="365760"/>
+          </a:xfrm>
+          <a:prstGeom prst="rect">
+            <a:avLst/>
+          </a:prstGeom>
+          <a:noFill/>
+        </p:spPr>
+        <p:txBody>
+          <a:bodyPr wrap="none">
+            <a:spAutoFit/>
+          </a:bodyPr>
+          <a:lstStyle/>
+          <a:p>
+            <a:pPr algn="r">
+              <a:defRPr sz="900">
+                <a:solidFill>
+                  <a:srgbClr val="94A3B8"/>
+                </a:solidFill>
+                <a:latin typeface="Noto Sans KR"/>
+              </a:defRPr>
+            </a:pPr>
+            <a:r>
+              <a:t>15</a:t>
+            </a:r>
+          </a:p>
+        </p:txBody>
+      </p:sp>
+      <p:sp>
+        <p:nvSpPr>
+          <p:cNvPr id="7" name="Rounded Rectangle 6"/>
+          <p:cNvSpPr/>
+          <p:nvPr/>
+        </p:nvSpPr>
+        <p:spPr>
+          <a:xfrm>
+            <a:off x="548640" y="1828800"/>
+            <a:ext cx="5486400" cy="4114800"/>
+          </a:xfrm>
+          <a:prstGeom prst="roundRect">
+            <a:avLst/>
+          </a:prstGeom>
+          <a:solidFill>
+            <a:srgbClr val="1E293B"/>
+          </a:solidFill>
+          <a:ln w="12700">
+            <a:solidFill>
+              <a:srgbClr val="334155"/>
+            </a:solidFill>
+          </a:ln>
+        </p:spPr>
+        <p:style>
+          <a:lnRef idx="1">
+            <a:schemeClr val="accent1"/>
+          </a:lnRef>
+          <a:fillRef idx="3">
+            <a:schemeClr val="accent1"/>
+          </a:fillRef>
+          <a:effectRef idx="2">
+            <a:schemeClr val="accent1"/>
+          </a:effectRef>
+          <a:fontRef idx="minor">
+            <a:schemeClr val="lt1"/>
+          </a:fontRef>
+        </p:style>
+        <p:txBody>
+          <a:bodyPr rtlCol="0" anchor="ctr"/>
+          <a:lstStyle/>
+          <a:p>
+            <a:pPr algn="ctr"/>
+          </a:p>
+        </p:txBody>
+      </p:sp>
+      <p:sp>
+        <p:nvSpPr>
+          <p:cNvPr id="8" name="TextBox 7"/>
+          <p:cNvSpPr txBox="1"/>
+          <p:nvPr/>
+        </p:nvSpPr>
+        <p:spPr>
+          <a:xfrm>
+            <a:off x="731520" y="2011680"/>
+            <a:ext cx="5120640" cy="3749040"/>
+          </a:xfrm>
+          <a:prstGeom prst="rect">
+            <a:avLst/>
+          </a:prstGeom>
+          <a:noFill/>
+        </p:spPr>
+        <p:txBody>
+          <a:bodyPr wrap="square">
+            <a:spAutoFit/>
+          </a:bodyPr>
+          <a:lstStyle/>
+          <a:p>
+            <a:pPr>
+              <a:spcAft>
+                <a:spcPts val="1200"/>
+              </a:spcAft>
+              <a:defRPr sz="1500" b="1">
+                <a:solidFill>
+                  <a:srgbClr val="FFFFFF"/>
+                </a:solidFill>
+                <a:latin typeface="Noto Sans KR"/>
+              </a:defRPr>
+            </a:pPr>
+            <a:r>
+              <a:t>평가 최종 검토 및 제출 확정</a:t>
+            </a:r>
+          </a:p>
+          <a:p>
+            <a:pPr>
+              <a:spcAft>
+                <a:spcPts val="600"/>
+              </a:spcAft>
+              <a:defRPr sz="1100">
+                <a:solidFill>
+                  <a:srgbClr val="94A3B8"/>
+                </a:solidFill>
+                <a:latin typeface="Noto Sans KR"/>
+              </a:defRPr>
+            </a:pPr>
+            <a:r>
+              <a:t>평가 완료 및 전송 단계:</a:t>
+            </a:r>
+          </a:p>
+          <a:p>
+            <a:pPr>
+              <a:spcAft>
+                <a:spcPts val="600"/>
+              </a:spcAft>
+              <a:defRPr sz="1100">
+                <a:solidFill>
+                  <a:srgbClr val="94A3B8"/>
+                </a:solidFill>
+                <a:latin typeface="Noto Sans KR"/>
+              </a:defRPr>
+            </a:pPr>
+            <a:r>
+              <a:t>• 1. 필수값 체크: 보안 체크박스 준수, 루브릭 점수 선택, 세부 의견 누락 여부 최종 갱신</a:t>
+            </a:r>
+          </a:p>
+          <a:p>
+            <a:pPr>
+              <a:spcAft>
+                <a:spcPts val="600"/>
+              </a:spcAft>
+              <a:defRPr sz="1100">
+                <a:solidFill>
+                  <a:srgbClr val="94A3B8"/>
+                </a:solidFill>
+                <a:latin typeface="Noto Sans KR"/>
+              </a:defRPr>
+            </a:pPr>
+            <a:r>
+              <a:t>• 2. 타 위원 상태 검토: 타 위원의 점수 노출 없이 평가 진행률만 확인(독립적 판단 견지)</a:t>
+            </a:r>
+          </a:p>
+          <a:p>
+            <a:pPr>
+              <a:spcAft>
+                <a:spcPts val="600"/>
+              </a:spcAft>
+              <a:defRPr sz="1100">
+                <a:solidFill>
+                  <a:srgbClr val="94A3B8"/>
+                </a:solidFill>
+                <a:latin typeface="Noto Sans KR"/>
+              </a:defRPr>
+            </a:pPr>
+            <a:r>
+              <a:t>• 3. 평가 제출: [평가 완료 및 제출] 버튼을 선택해 데이터베이스 기록 완료</a:t>
+            </a:r>
+          </a:p>
+          <a:p>
+            <a:pPr>
+              <a:spcAft>
+                <a:spcPts val="600"/>
+              </a:spcAft>
+              <a:defRPr sz="1100">
+                <a:solidFill>
+                  <a:srgbClr val="94A3B8"/>
+                </a:solidFill>
+                <a:latin typeface="Noto Sans KR"/>
+              </a:defRPr>
+            </a:pPr>
+            <a:r>
+              <a:t>• 4. 상태 갱신 검증: 본인 대기 큐로 복귀 후 해당 과제 상태가 '완료'인지 확인</a:t>
+            </a:r>
+          </a:p>
+          <a:p>
+            <a:br/>
+            <a:pPr>
+              <a:spcAft>
+                <a:spcPts val="600"/>
+              </a:spcAft>
+              <a:defRPr sz="1100">
+                <a:solidFill>
+                  <a:srgbClr val="94A3B8"/>
+                </a:solidFill>
+                <a:latin typeface="Noto Sans KR"/>
+              </a:defRPr>
+            </a:pPr>
+            <a:r>
+              <a:t>💡 최종 판정 계산: 3인의 패널 심사위원이 최종 제출을 모두 완료하는 즉시 파이어스토어에서 평균 점수와 판정을 계산합니다.</a:t>
+            </a:r>
+          </a:p>
+          <a:p>
+            <a:br/>
+            <a:pPr>
+              <a:spcAft>
+                <a:spcPts val="600"/>
+              </a:spcAft>
+              <a:defRPr sz="1100">
+                <a:solidFill>
+                  <a:srgbClr val="94A3B8"/>
+                </a:solidFill>
+                <a:latin typeface="Noto Sans KR"/>
+              </a:defRPr>
+            </a:pPr>
+            <a:r>
+              <a:t>오른쪽 화면: 실제 채점 입력창 하단의 저장 및 최종 제출 영역</a:t>
+            </a:r>
+          </a:p>
+        </p:txBody>
+      </p:sp>
+      <p:sp>
+        <p:nvSpPr>
+          <p:cNvPr id="9" name="Rounded Rectangle 8"/>
+          <p:cNvSpPr/>
+          <p:nvPr/>
+        </p:nvSpPr>
+        <p:spPr>
+          <a:xfrm>
+            <a:off x="6400800" y="1828800"/>
+            <a:ext cx="5212080" cy="4114800"/>
+          </a:xfrm>
+          <a:prstGeom prst="roundRect">
+            <a:avLst/>
+          </a:prstGeom>
+          <a:solidFill>
+            <a:srgbClr val="1E293B"/>
+          </a:solidFill>
+          <a:ln w="19050">
+            <a:solidFill>
+              <a:srgbClr val="6366F1"/>
+            </a:solidFill>
+          </a:ln>
+        </p:spPr>
+        <p:style>
+          <a:lnRef idx="1">
+            <a:schemeClr val="accent1"/>
+          </a:lnRef>
+          <a:fillRef idx="3">
+            <a:schemeClr val="accent1"/>
+          </a:fillRef>
+          <a:effectRef idx="2">
+            <a:schemeClr val="accent1"/>
+          </a:effectRef>
+          <a:fontRef idx="minor">
+            <a:schemeClr val="lt1"/>
+          </a:fontRef>
+        </p:style>
+        <p:txBody>
+          <a:bodyPr rtlCol="0" anchor="ctr"/>
+          <a:lstStyle/>
+          <a:p>
+            <a:pPr algn="ctr"/>
+          </a:p>
+        </p:txBody>
+      </p:sp>
+      <p:pic>
+        <p:nvPicPr>
+          <p:cNvPr id="10" name="Picture 9" descr="media__1784176902473.png"/>
+          <p:cNvPicPr>
+            <a:picLocks noChangeAspect="1"/>
+          </p:cNvPicPr>
+          <p:nvPr/>
+        </p:nvPicPr>
+        <p:blipFill>
+          <a:blip r:embed="rId2"/>
+          <a:stretch>
+            <a:fillRect/>
+          </a:stretch>
+        </p:blipFill>
+        <p:spPr>
+          <a:xfrm>
+            <a:off x="6814049" y="1965960"/>
+            <a:ext cx="4385580" cy="3840480"/>
+          </a:xfrm>
+          <a:prstGeom prst="rect">
+            <a:avLst/>
+          </a:prstGeom>
+        </p:spPr>
+      </p:pic>
+    </p:spTree>
+  </p:cSld>
+  <p:clrMapOvr>
+    <a:masterClrMapping/>
+  </p:clrMapOvr>
+</p:sld>
+</file>
+
+<file path=ppt/slides/slide17.xml><?xml version="1.0" encoding="utf-8"?>
+<p:sld xmlns:a="http://schemas.openxmlformats.org/drawingml/2006/main" xmlns:p="http://schemas.openxmlformats.org/presentationml/2006/main" xmlns:r="http://schemas.openxmlformats.org/officeDocument/2006/relationships">
+  <p:cSld>
+    <p:bg>
+      <p:bgPr>
+        <a:solidFill>
+          <a:srgbClr val="0F172A"/>
+        </a:solidFill>
+        <a:effectLst/>
+      </p:bgPr>
+    </p:bg>
+    <p:spTree>
+      <p:nvGrpSpPr>
+        <p:cNvPr id="1" name=""/>
+        <p:cNvGrpSpPr/>
+        <p:nvPr/>
+      </p:nvGrpSpPr>
+      <p:grpSpPr/>
+      <p:sp>
+        <p:nvSpPr>
+          <p:cNvPr id="2" name="TextBox 1"/>
+          <p:cNvSpPr txBox="1"/>
+          <p:nvPr/>
+        </p:nvSpPr>
+        <p:spPr>
+          <a:xfrm>
+            <a:off x="548640" y="365760"/>
+            <a:ext cx="7315200" cy="365760"/>
+          </a:xfrm>
+          <a:prstGeom prst="rect">
+            <a:avLst/>
+          </a:prstGeom>
+          <a:noFill/>
+        </p:spPr>
+        <p:txBody>
+          <a:bodyPr wrap="none">
+            <a:spAutoFit/>
+          </a:bodyPr>
+          <a:lstStyle/>
+          <a:p>
+            <a:pPr>
+              <a:defRPr sz="1100" b="1">
+                <a:solidFill>
+                  <a:srgbClr val="38BDF8"/>
+                </a:solidFill>
+                <a:latin typeface="Noto Sans KR"/>
+              </a:defRPr>
+            </a:pPr>
+            <a:r>
               <a:t>공통</a:t>
             </a:r>
           </a:p>
@@ -8539,55 +9036,55 @@
               </a:defRPr>
             </a:pPr>
             <a:r>
-              <a:t>1. 시뮬레이션 데이터 불러오기: 가상의 테스트 데이터셋(후보자 9명 및 3인 패널 평가 결과) 복원</a:t>
-            </a:r>
-          </a:p>
-          <a:p>
-            <a:pPr>
-              <a:spcAft>
-                <a:spcPts val="600"/>
-              </a:spcAft>
-              <a:defRPr sz="1100">
-                <a:solidFill>
-                  <a:srgbClr val="94A3B8"/>
-                </a:solidFill>
-                <a:latin typeface="Noto Sans KR"/>
-              </a:defRPr>
-            </a:pPr>
-            <a:r>
-              <a:t>2. 데이터 초기화: 실무 운영 착수를 위해 전체 평가 과제 및 결과를 깨끗하게 초기화</a:t>
-            </a:r>
-          </a:p>
-          <a:p>
-            <a:pPr>
-              <a:spcAft>
-                <a:spcPts val="600"/>
-              </a:spcAft>
-              <a:defRPr sz="1100">
-                <a:solidFill>
-                  <a:srgbClr val="94A3B8"/>
-                </a:solidFill>
-                <a:latin typeface="Noto Sans KR"/>
-              </a:defRPr>
-            </a:pPr>
-            <a:r>
-              <a:t>3. 요약 지표: 전체, 완료, 진행 중, 대기 인원을 실시간 확인 (클릭 시 명단 모달 팝업)</a:t>
-            </a:r>
-          </a:p>
-          <a:p>
-            <a:pPr>
-              <a:spcAft>
-                <a:spcPts val="600"/>
-              </a:spcAft>
-              <a:defRPr sz="1100">
-                <a:solidFill>
-                  <a:srgbClr val="94A3B8"/>
-                </a:solidFill>
-                <a:latin typeface="Noto Sans KR"/>
-              </a:defRPr>
-            </a:pPr>
-            <a:r>
-              <a:t>4. 관계사 평균: 완료된 심사를 기준으로 계열사별 평균 점수를 모니터링</a:t>
+              <a:t>1. 월별 자격심사 일정: AICA L3/L4 심사일정을 캘린더로 한눈에 모니터링</a:t>
+            </a:r>
+          </a:p>
+          <a:p>
+            <a:pPr>
+              <a:spcAft>
+                <a:spcPts val="600"/>
+              </a:spcAft>
+              <a:defRPr sz="1100">
+                <a:solidFill>
+                  <a:srgbClr val="94A3B8"/>
+                </a:solidFill>
+                <a:latin typeface="Noto Sans KR"/>
+              </a:defRPr>
+            </a:pPr>
+            <a:r>
+              <a:t>2. 시뮬레이션 데이터 불러오기: 가상의 테스트 데이터셋(후보자 9명 및 3인 평가 결과) 복원</a:t>
+            </a:r>
+          </a:p>
+          <a:p>
+            <a:pPr>
+              <a:spcAft>
+                <a:spcPts val="600"/>
+              </a:spcAft>
+              <a:defRPr sz="1100">
+                <a:solidFill>
+                  <a:srgbClr val="94A3B8"/>
+                </a:solidFill>
+                <a:latin typeface="Noto Sans KR"/>
+              </a:defRPr>
+            </a:pPr>
+            <a:r>
+              <a:t>3. 데이터 초기화: 실무 운영 착수를 위해 전체 평가 과제 및 결과를 깨끗하게 초기화</a:t>
+            </a:r>
+          </a:p>
+          <a:p>
+            <a:pPr>
+              <a:spcAft>
+                <a:spcPts val="600"/>
+              </a:spcAft>
+              <a:defRPr sz="1100">
+                <a:solidFill>
+                  <a:srgbClr val="94A3B8"/>
+                </a:solidFill>
+                <a:latin typeface="Noto Sans KR"/>
+              </a:defRPr>
+            </a:pPr>
+            <a:r>
+              <a:t>4. 요약 지표: 전체, 완료, 진행 중, 대기 인원을 실시간 확인 (클릭 시 명단 모달 팝업)</a:t>
             </a:r>
           </a:p>
           <a:p>
@@ -8620,7 +9117,7 @@
               </a:defRPr>
             </a:pPr>
             <a:r>
-              <a:t>💡 대시보드 우측 상단 배지를 통해 테스트 시연용 가상 데이터 복원 및 실무용 초기화를 손쉽게 제어할 수 있습니다.</a:t>
+              <a:t>💡 대시보드 우측 상단 배지를 통해 시연용 가상 데이터 복원 및 실무용 초기화를 손쉽게 제어할 수 있습니다.</a:t>
             </a:r>
           </a:p>
           <a:p>
@@ -8768,7 +9265,7 @@
               </a:defRPr>
             </a:pPr>
             <a:r>
-              <a:t>운영간사</a:t>
+              <a:t>공통</a:t>
             </a:r>
           </a:p>
         </p:txBody>
@@ -8804,7 +9301,7 @@
               </a:defRPr>
             </a:pPr>
             <a:r>
-              <a:t>신규 과제는 필수 정보와 증빙을 한 번에 등록합니다</a:t>
+              <a:t>월별 자격심사 일정과 산출물 날짜가 명확히 연동됩니다</a:t>
             </a:r>
           </a:p>
         </p:txBody>
@@ -8919,7 +9416,7 @@
               </a:defRPr>
             </a:pPr>
             <a:r>
-              <a:t>06</a:t>
+              <a:t>05-B</a:t>
             </a:r>
           </a:p>
         </p:txBody>
@@ -9003,39 +9500,55 @@
               </a:defRPr>
             </a:pPr>
             <a:r>
-              <a:t>후보자 정보 및 증빙 링크 등록 폼</a:t>
-            </a:r>
-          </a:p>
-          <a:p>
-            <a:pPr>
-              <a:spcAft>
-                <a:spcPts val="600"/>
-              </a:spcAft>
-              <a:defRPr sz="1100">
-                <a:solidFill>
-                  <a:srgbClr val="94A3B8"/>
-                </a:solidFill>
-                <a:latin typeface="Noto Sans KR"/>
-              </a:defRPr>
-            </a:pPr>
-            <a:r>
-              <a:t>01 지원자 정보:</a:t>
-            </a:r>
-          </a:p>
-          <a:p>
-            <a:pPr>
-              <a:spcAft>
-                <a:spcPts val="600"/>
-              </a:spcAft>
-              <a:defRPr sz="1100">
-                <a:solidFill>
-                  <a:srgbClr val="94A3B8"/>
-                </a:solidFill>
-                <a:latin typeface="Noto Sans KR"/>
-              </a:defRPr>
-            </a:pPr>
-            <a:r>
-              <a:t>• 성명, 사내 이메일, 소속 관계사/부서, 자격 레벨(L3/L4), 과제 유형</a:t>
+              <a:t>월별 캘린더 연동 및 평가 산출물 일자 표기</a:t>
+            </a:r>
+          </a:p>
+          <a:p>
+            <a:pPr>
+              <a:spcAft>
+                <a:spcPts val="600"/>
+              </a:spcAft>
+              <a:defRPr sz="1100">
+                <a:solidFill>
+                  <a:srgbClr val="94A3B8"/>
+                </a:solidFill>
+                <a:latin typeface="Noto Sans KR"/>
+              </a:defRPr>
+            </a:pPr>
+            <a:r>
+              <a:t>1. 로그인 초기화면 월별 캘린더:</a:t>
+            </a:r>
+          </a:p>
+          <a:p>
+            <a:pPr>
+              <a:spcAft>
+                <a:spcPts val="600"/>
+              </a:spcAft>
+              <a:defRPr sz="1100">
+                <a:solidFill>
+                  <a:srgbClr val="94A3B8"/>
+                </a:solidFill>
+                <a:latin typeface="Noto Sans KR"/>
+              </a:defRPr>
+            </a:pPr>
+            <a:r>
+              <a:t>• 운영간사 및 심사위원 로그인 시 메인 화면에 캘린더가 렌더링됩니다.</a:t>
+            </a:r>
+          </a:p>
+          <a:p>
+            <a:pPr>
+              <a:spcAft>
+                <a:spcPts val="600"/>
+              </a:spcAft>
+              <a:defRPr sz="1100">
+                <a:solidFill>
+                  <a:srgbClr val="94A3B8"/>
+                </a:solidFill>
+                <a:latin typeface="Noto Sans KR"/>
+              </a:defRPr>
+            </a:pPr>
+            <a:r>
+              <a:t>• 심사일자에 [AICA L3 심사], [AICA L4 심사] 명칭으로 일정이 자동 기입됩니다.</a:t>
             </a:r>
           </a:p>
           <a:p>
@@ -9052,23 +9565,23 @@
               </a:defRPr>
             </a:pPr>
             <a:r>
-              <a:t>02 과제 내용 및 6S 요약:</a:t>
-            </a:r>
-          </a:p>
-          <a:p>
-            <a:pPr>
-              <a:spcAft>
-                <a:spcPts val="600"/>
-              </a:spcAft>
-              <a:defRPr sz="1100">
-                <a:solidFill>
-                  <a:srgbClr val="94A3B8"/>
-                </a:solidFill>
-                <a:latin typeface="Noto Sans KR"/>
-              </a:defRPr>
-            </a:pPr>
-            <a:r>
-              <a:t>• 평가 대상 과제명, Pain Point, AI 해결 방안, 핵심 기대효과 기술</a:t>
+              <a:t>2. 일정 클릭 시 화면 자동 이동:</a:t>
+            </a:r>
+          </a:p>
+          <a:p>
+            <a:pPr>
+              <a:spcAft>
+                <a:spcPts val="600"/>
+              </a:spcAft>
+              <a:defRPr sz="1100">
+                <a:solidFill>
+                  <a:srgbClr val="94A3B8"/>
+                </a:solidFill>
+                <a:latin typeface="Noto Sans KR"/>
+              </a:defRPr>
+            </a:pPr>
+            <a:r>
+              <a:t>• 캘린더 내 심사 일정을 클릭하면 운영간사는 대시보드/종합판정서로, 심사위원은 해당 배정 과제 평가 화면으로 즉시 이동합니다.</a:t>
             </a:r>
           </a:p>
           <a:p>
@@ -9085,23 +9598,39 @@
               </a:defRPr>
             </a:pPr>
             <a:r>
-              <a:t>03 증빙 파일 링크 등록:</a:t>
-            </a:r>
-          </a:p>
-          <a:p>
-            <a:pPr>
-              <a:spcAft>
-                <a:spcPts val="600"/>
-              </a:spcAft>
-              <a:defRPr sz="1100">
-                <a:solidFill>
-                  <a:srgbClr val="94A3B8"/>
-                </a:solidFill>
-                <a:latin typeface="Noto Sans KR"/>
-              </a:defRPr>
-            </a:pPr>
-            <a:r>
-              <a:t>• 디렉토리 구조 요약, 결과 보고서 PDF 주소, Git 소스코드 저장소, 시연 동영상 URL</a:t>
+              <a:t>3. 평가 산출물 명확한 날짜 표기:</a:t>
+            </a:r>
+          </a:p>
+          <a:p>
+            <a:pPr>
+              <a:spcAft>
+                <a:spcPts val="600"/>
+              </a:spcAft>
+              <a:defRPr sz="1100">
+                <a:solidFill>
+                  <a:srgbClr val="94A3B8"/>
+                </a:solidFill>
+                <a:latin typeface="Noto Sans KR"/>
+              </a:defRPr>
+            </a:pPr>
+            <a:r>
+              <a:t>• 종합판정서: 심사 시행 일자, 과제 제출 일시, 최종 승인 일시, 위원별 채점 제출 일시, 판정서 발행 일자 명시</a:t>
+            </a:r>
+          </a:p>
+          <a:p>
+            <a:pPr>
+              <a:spcAft>
+                <a:spcPts val="600"/>
+              </a:spcAft>
+              <a:defRPr sz="1100">
+                <a:solidFill>
+                  <a:srgbClr val="94A3B8"/>
+                </a:solidFill>
+                <a:latin typeface="Noto Sans KR"/>
+              </a:defRPr>
+            </a:pPr>
+            <a:r>
+              <a:t>• 평가 워크스페이스: 과제 제출일 및 심사 시행 예정일 실시간 상단 노출</a:t>
             </a:r>
           </a:p>
           <a:p>
@@ -9118,7 +9647,7 @@
               </a:defRPr>
             </a:pPr>
             <a:r>
-              <a:t>오른쪽 화면: 수동 과제 등록 및 패널 배정 기능이 활성화되는 대시보드 화면</a:t>
+              <a:t>오른쪽 화면: 실제 리액트 월별 캘린더 및 종합판정서 렌더링 화면</a:t>
             </a:r>
           </a:p>
         </p:txBody>
@@ -9285,7 +9814,7 @@
               </a:defRPr>
             </a:pPr>
             <a:r>
-              <a:t>패널은 전문분야별 1인씩, 이해상충 없이 배정합니다</a:t>
+              <a:t>신규 과제는 필수 정보와 증빙을 한 번에 등록합니다</a:t>
             </a:r>
           </a:p>
         </p:txBody>
@@ -9400,7 +9929,7 @@
               </a:defRPr>
             </a:pPr>
             <a:r>
-              <a:t>07</a:t>
+              <a:t>06</a:t>
             </a:r>
           </a:p>
         </p:txBody>
@@ -9484,55 +10013,39 @@
               </a:defRPr>
             </a:pPr>
             <a:r>
-              <a:t>심사 위원회 패널 구성 및 최적 추천</a:t>
-            </a:r>
-          </a:p>
-          <a:p>
-            <a:pPr>
-              <a:spcAft>
-                <a:spcPts val="600"/>
-              </a:spcAft>
-              <a:defRPr sz="1100">
-                <a:solidFill>
-                  <a:srgbClr val="94A3B8"/>
-                </a:solidFill>
-                <a:latin typeface="Noto Sans KR"/>
-              </a:defRPr>
-            </a:pPr>
-            <a:r>
-              <a:t>1. 현업·사업성 위원 (가치성 검증): 업무 프로세스 개선율 및 사업 효과성 채점</a:t>
-            </a:r>
-          </a:p>
-          <a:p>
-            <a:pPr>
-              <a:spcAft>
-                <a:spcPts val="600"/>
-              </a:spcAft>
-              <a:defRPr sz="1100">
-                <a:solidFill>
-                  <a:srgbClr val="94A3B8"/>
-                </a:solidFill>
-                <a:latin typeface="Noto Sans KR"/>
-              </a:defRPr>
-            </a:pPr>
-            <a:r>
-              <a:t>2. AI·기술 위원 (구현성 검증): 기술적 난이도 및 구현 완성도 채점</a:t>
-            </a:r>
-          </a:p>
-          <a:p>
-            <a:pPr>
-              <a:spcAft>
-                <a:spcPts val="600"/>
-              </a:spcAft>
-              <a:defRPr sz="1100">
-                <a:solidFill>
-                  <a:srgbClr val="94A3B8"/>
-                </a:solidFill>
-                <a:latin typeface="Noto Sans KR"/>
-              </a:defRPr>
-            </a:pPr>
-            <a:r>
-              <a:t>3. 보안·거버넌스 위원 (신뢰성 검증): 데이터 활용 보안 및 내부 가이드 채점</a:t>
+              <a:t>후보자 정보 및 증빙 링크 등록 폼</a:t>
+            </a:r>
+          </a:p>
+          <a:p>
+            <a:pPr>
+              <a:spcAft>
+                <a:spcPts val="600"/>
+              </a:spcAft>
+              <a:defRPr sz="1100">
+                <a:solidFill>
+                  <a:srgbClr val="94A3B8"/>
+                </a:solidFill>
+                <a:latin typeface="Noto Sans KR"/>
+              </a:defRPr>
+            </a:pPr>
+            <a:r>
+              <a:t>01 지원자 정보:</a:t>
+            </a:r>
+          </a:p>
+          <a:p>
+            <a:pPr>
+              <a:spcAft>
+                <a:spcPts val="600"/>
+              </a:spcAft>
+              <a:defRPr sz="1100">
+                <a:solidFill>
+                  <a:srgbClr val="94A3B8"/>
+                </a:solidFill>
+                <a:latin typeface="Noto Sans KR"/>
+              </a:defRPr>
+            </a:pPr>
+            <a:r>
+              <a:t>• 성명, 사내 이메일, 소속 관계사/부서, 자격 레벨(L3/L4), 과제 유형</a:t>
             </a:r>
           </a:p>
           <a:p>
@@ -9549,23 +10062,23 @@
               </a:defRPr>
             </a:pPr>
             <a:r>
-              <a:t>⚡ 최적 패널 자동 추천 로직:</a:t>
-            </a:r>
-          </a:p>
-          <a:p>
-            <a:pPr>
-              <a:spcAft>
-                <a:spcPts val="600"/>
-              </a:spcAft>
-              <a:defRPr sz="1100">
-                <a:solidFill>
-                  <a:srgbClr val="94A3B8"/>
-                </a:solidFill>
-                <a:latin typeface="Noto Sans KR"/>
-              </a:defRPr>
-            </a:pPr>
-            <a:r>
-              <a:t>• 피평가자와 동일한 사명 소속 위원을 자동 배제하여 후보군을 우선 순위 정렬합니다.</a:t>
+              <a:t>02 과제 내용 및 6S 요약:</a:t>
+            </a:r>
+          </a:p>
+          <a:p>
+            <a:pPr>
+              <a:spcAft>
+                <a:spcPts val="600"/>
+              </a:spcAft>
+              <a:defRPr sz="1100">
+                <a:solidFill>
+                  <a:srgbClr val="94A3B8"/>
+                </a:solidFill>
+                <a:latin typeface="Noto Sans KR"/>
+              </a:defRPr>
+            </a:pPr>
+            <a:r>
+              <a:t>• 평가 대상 과제명, Pain Point, AI 해결 방안, 핵심 기대효과 기술</a:t>
             </a:r>
           </a:p>
           <a:p>
@@ -9582,7 +10095,23 @@
               </a:defRPr>
             </a:pPr>
             <a:r>
-              <a:t>⚠️ 간사가 위원을 직접 수동 선택하는 경우, 소속이 일치하는 위원 옆에는 빨간색 [이해상충 주의] 레이블이 노출됩니다.</a:t>
+              <a:t>03 증빙 파일 링크 등록:</a:t>
+            </a:r>
+          </a:p>
+          <a:p>
+            <a:pPr>
+              <a:spcAft>
+                <a:spcPts val="600"/>
+              </a:spcAft>
+              <a:defRPr sz="1100">
+                <a:solidFill>
+                  <a:srgbClr val="94A3B8"/>
+                </a:solidFill>
+                <a:latin typeface="Noto Sans KR"/>
+              </a:defRPr>
+            </a:pPr>
+            <a:r>
+              <a:t>• 디렉토리 구조 요약, 결과 보고서 PDF 주소, Git 소스코드 저장소, 시연 동영상 URL</a:t>
             </a:r>
           </a:p>
           <a:p>
@@ -9599,7 +10128,7 @@
               </a:defRPr>
             </a:pPr>
             <a:r>
-              <a:t>오른쪽 화면: 대시보드 우측의 위원 배정 큐 영역</a:t>
+              <a:t>오른쪽 화면: 수동 과제 등록 및 패널 배정 기능이 활성화되는 대시보드 화면</a:t>
             </a:r>
           </a:p>
         </p:txBody>
@@ -9766,7 +10295,7 @@
               </a:defRPr>
             </a:pPr>
             <a:r>
-              <a:t>필터와 상태값으로 병목을 빠르게 찾습니다</a:t>
+              <a:t>패널은 전문분야별 1인씩, 이해상충 없이 배정합니다</a:t>
             </a:r>
           </a:p>
         </p:txBody>
@@ -9881,7 +10410,7 @@
               </a:defRPr>
             </a:pPr>
             <a:r>
-              <a:t>08</a:t>
+              <a:t>07</a:t>
             </a:r>
           </a:p>
         </p:txBody>
@@ -9965,103 +10494,55 @@
               </a:defRPr>
             </a:pPr>
             <a:r>
-              <a:t>진행 상태 분기 및 필터 모니터링</a:t>
-            </a:r>
-          </a:p>
-          <a:p>
-            <a:pPr>
-              <a:spcAft>
-                <a:spcPts val="600"/>
-              </a:spcAft>
-              <a:defRPr sz="1100">
-                <a:solidFill>
-                  <a:srgbClr val="94A3B8"/>
-                </a:solidFill>
-                <a:latin typeface="Noto Sans KR"/>
-              </a:defRPr>
-            </a:pPr>
-            <a:r>
-              <a:t>통합 대기 큐 및 필터 시스템 활용법:</a:t>
-            </a:r>
-          </a:p>
-          <a:p>
-            <a:pPr>
-              <a:spcAft>
-                <a:spcPts val="600"/>
-              </a:spcAft>
-              <a:defRPr sz="1100">
-                <a:solidFill>
-                  <a:srgbClr val="94A3B8"/>
-                </a:solidFill>
-                <a:latin typeface="Noto Sans KR"/>
-              </a:defRPr>
-            </a:pPr>
-            <a:r>
-              <a:t>• 필터 종류: 관계사별, 인증 레벨별, 평가 진행 상태별 필터 제공</a:t>
-            </a:r>
-          </a:p>
-          <a:p>
-            <a:pPr>
-              <a:spcAft>
-                <a:spcPts val="600"/>
-              </a:spcAft>
-              <a:defRPr sz="1100">
-                <a:solidFill>
-                  <a:srgbClr val="94A3B8"/>
-                </a:solidFill>
-                <a:latin typeface="Noto Sans KR"/>
-              </a:defRPr>
-            </a:pPr>
-            <a:r>
-              <a:t>• 1. 평가대기: 패널 배정 완료 후 아직 위원이 채점을 시작하지 않음</a:t>
-            </a:r>
-          </a:p>
-          <a:p>
-            <a:pPr>
-              <a:spcAft>
-                <a:spcPts val="600"/>
-              </a:spcAft>
-              <a:defRPr sz="1100">
-                <a:solidFill>
-                  <a:srgbClr val="94A3B8"/>
-                </a:solidFill>
-                <a:latin typeface="Noto Sans KR"/>
-              </a:defRPr>
-            </a:pPr>
-            <a:r>
-              <a:t>• 2. 심사중: 1명 이상의 위원이 부분 채점을 기록하거나 제출함</a:t>
-            </a:r>
-          </a:p>
-          <a:p>
-            <a:pPr>
-              <a:spcAft>
-                <a:spcPts val="600"/>
-              </a:spcAft>
-              <a:defRPr sz="1100">
-                <a:solidFill>
-                  <a:srgbClr val="94A3B8"/>
-                </a:solidFill>
-                <a:latin typeface="Noto Sans KR"/>
-              </a:defRPr>
-            </a:pPr>
-            <a:r>
-              <a:t>• 3. 완료: 3인 패널이 모두 최종 평가를 제출하여 종합 평균이 집계됨</a:t>
-            </a:r>
-          </a:p>
-          <a:p>
-            <a:pPr>
-              <a:spcAft>
-                <a:spcPts val="600"/>
-              </a:spcAft>
-              <a:defRPr sz="1100">
-                <a:solidFill>
-                  <a:srgbClr val="94A3B8"/>
-                </a:solidFill>
-                <a:latin typeface="Noto Sans KR"/>
-              </a:defRPr>
-            </a:pPr>
-            <a:r>
-              <a:t>• 4. 보고서 보기: [결과 보기] 액션 버튼을 눌러 종합판정서 조회 및 인쇄</a:t>
+              <a:t>심사 위원회 패널 구성 및 최적 추천</a:t>
+            </a:r>
+          </a:p>
+          <a:p>
+            <a:pPr>
+              <a:spcAft>
+                <a:spcPts val="600"/>
+              </a:spcAft>
+              <a:defRPr sz="1100">
+                <a:solidFill>
+                  <a:srgbClr val="94A3B8"/>
+                </a:solidFill>
+                <a:latin typeface="Noto Sans KR"/>
+              </a:defRPr>
+            </a:pPr>
+            <a:r>
+              <a:t>1. 현업·사업성 위원 (가치성 검증): 업무 프로세스 개선율 및 사업 효과성 채점</a:t>
+            </a:r>
+          </a:p>
+          <a:p>
+            <a:pPr>
+              <a:spcAft>
+                <a:spcPts val="600"/>
+              </a:spcAft>
+              <a:defRPr sz="1100">
+                <a:solidFill>
+                  <a:srgbClr val="94A3B8"/>
+                </a:solidFill>
+                <a:latin typeface="Noto Sans KR"/>
+              </a:defRPr>
+            </a:pPr>
+            <a:r>
+              <a:t>2. AI·기술 위원 (구현성 검증): 기술적 난이도 및 구현 완성도 채점</a:t>
+            </a:r>
+          </a:p>
+          <a:p>
+            <a:pPr>
+              <a:spcAft>
+                <a:spcPts val="600"/>
+              </a:spcAft>
+              <a:defRPr sz="1100">
+                <a:solidFill>
+                  <a:srgbClr val="94A3B8"/>
+                </a:solidFill>
+                <a:latin typeface="Noto Sans KR"/>
+              </a:defRPr>
+            </a:pPr>
+            <a:r>
+              <a:t>3. 보안·거버넌스 위원 (신뢰성 검증): 데이터 활용 보안 및 내부 가이드 채점</a:t>
             </a:r>
           </a:p>
           <a:p>
@@ -10078,7 +10559,23 @@
               </a:defRPr>
             </a:pPr>
             <a:r>
-              <a:t>💡 팁: '타 위원 진척도' 항목에서 실시간 배지 도트를 확인해 미제출 위원을 즉시 판별할 수 있습니다.</a:t>
+              <a:t>⚡ 최적 패널 자동 추천 로직:</a:t>
+            </a:r>
+          </a:p>
+          <a:p>
+            <a:pPr>
+              <a:spcAft>
+                <a:spcPts val="600"/>
+              </a:spcAft>
+              <a:defRPr sz="1100">
+                <a:solidFill>
+                  <a:srgbClr val="94A3B8"/>
+                </a:solidFill>
+                <a:latin typeface="Noto Sans KR"/>
+              </a:defRPr>
+            </a:pPr>
+            <a:r>
+              <a:t>• 피평가자와 동일한 사명 소속 위원을 자동 배제하여 후보군을 우선 순위 정렬합니다.</a:t>
             </a:r>
           </a:p>
           <a:p>
@@ -10095,7 +10592,24 @@
               </a:defRPr>
             </a:pPr>
             <a:r>
-              <a:t>오른쪽 화면: 간사용 대기 큐 필터 및 위원 진척 표시 영역</a:t>
+              <a:t>⚠️ 간사가 위원을 직접 수동 선택하는 경우, 소속이 일치하는 위원 옆에는 빨간색 [이해상충 주의] 레이블이 노출됩니다.</a:t>
+            </a:r>
+          </a:p>
+          <a:p>
+            <a:br/>
+            <a:pPr>
+              <a:spcAft>
+                <a:spcPts val="600"/>
+              </a:spcAft>
+              <a:defRPr sz="1100">
+                <a:solidFill>
+                  <a:srgbClr val="94A3B8"/>
+                </a:solidFill>
+                <a:latin typeface="Noto Sans KR"/>
+              </a:defRPr>
+            </a:pPr>
+            <a:r>
+              <a:t>오른쪽 화면: 대시보드 우측의 위원 배정 큐 영역</a:t>
             </a:r>
           </a:p>
         </p:txBody>
@@ -10262,7 +10776,7 @@
               </a:defRPr>
             </a:pPr>
             <a:r>
-              <a:t>3인 제출 후 종합판정서가 완성됩니다</a:t>
+              <a:t>필터와 상태값으로 병목을 빠르게 찾습니다</a:t>
             </a:r>
           </a:p>
         </p:txBody>
@@ -10377,7 +10891,7 @@
               </a:defRPr>
             </a:pPr>
             <a:r>
-              <a:t>09</a:t>
+              <a:t>08</a:t>
             </a:r>
           </a:p>
         </p:txBody>
@@ -10461,87 +10975,103 @@
               </a:defRPr>
             </a:pPr>
             <a:r>
-              <a:t>종합판정 보고서 발급 및 명패 동기화</a:t>
-            </a:r>
-          </a:p>
-          <a:p>
-            <a:pPr>
-              <a:spcAft>
-                <a:spcPts val="600"/>
-              </a:spcAft>
-              <a:defRPr sz="1100">
-                <a:solidFill>
-                  <a:srgbClr val="94A3B8"/>
-                </a:solidFill>
-                <a:latin typeface="Noto Sans KR"/>
-              </a:defRPr>
-            </a:pPr>
-            <a:r>
-              <a:t>종합판정서 구성 항목 및 검증 가이드:</a:t>
-            </a:r>
-          </a:p>
-          <a:p>
-            <a:pPr>
-              <a:spcAft>
-                <a:spcPts val="600"/>
-              </a:spcAft>
-              <a:defRPr sz="1100">
-                <a:solidFill>
-                  <a:srgbClr val="94A3B8"/>
-                </a:solidFill>
-                <a:latin typeface="Noto Sans KR"/>
-              </a:defRPr>
-            </a:pPr>
-            <a:r>
-              <a:t>• 지원자 기본 정보 및 종합 평균 점수 시각화</a:t>
-            </a:r>
-          </a:p>
-          <a:p>
-            <a:pPr>
-              <a:spcAft>
-                <a:spcPts val="600"/>
-              </a:spcAft>
-              <a:defRPr sz="1100">
-                <a:solidFill>
-                  <a:srgbClr val="94A3B8"/>
-                </a:solidFill>
-                <a:latin typeface="Noto Sans KR"/>
-              </a:defRPr>
-            </a:pPr>
-            <a:r>
-              <a:t>• 3인 배정 위원의 세부 루브릭 채점 점수 및 종합 정성 평가 의견 노출</a:t>
-            </a:r>
-          </a:p>
-          <a:p>
-            <a:pPr>
-              <a:spcAft>
-                <a:spcPts val="600"/>
-              </a:spcAft>
-              <a:defRPr sz="1100">
-                <a:solidFill>
-                  <a:srgbClr val="94A3B8"/>
-                </a:solidFill>
-                <a:latin typeface="Noto Sans KR"/>
-              </a:defRPr>
-            </a:pPr>
-            <a:r>
-              <a:t>• 하단 서명란: 배정된 실제 심사위원 성명으로 명패 자동 변경 완료</a:t>
-            </a:r>
-          </a:p>
-          <a:p>
-            <a:pPr>
-              <a:spcAft>
-                <a:spcPts val="600"/>
-              </a:spcAft>
-              <a:defRPr sz="1100">
-                <a:solidFill>
-                  <a:srgbClr val="94A3B8"/>
-                </a:solidFill>
-                <a:latin typeface="Noto Sans KR"/>
-              </a:defRPr>
-            </a:pPr>
-            <a:r>
-              <a:t>• 출력 최적화: [결과 보고서 인쇄 (PDF)] 버튼을 클릭하여 A4 최적화 보고서 출력 및 사내 공유용 저장 가능</a:t>
+              <a:t>진행 상태 분기 및 필터 모니터링</a:t>
+            </a:r>
+          </a:p>
+          <a:p>
+            <a:pPr>
+              <a:spcAft>
+                <a:spcPts val="600"/>
+              </a:spcAft>
+              <a:defRPr sz="1100">
+                <a:solidFill>
+                  <a:srgbClr val="94A3B8"/>
+                </a:solidFill>
+                <a:latin typeface="Noto Sans KR"/>
+              </a:defRPr>
+            </a:pPr>
+            <a:r>
+              <a:t>통합 대기 큐 및 필터 시스템 활용법:</a:t>
+            </a:r>
+          </a:p>
+          <a:p>
+            <a:pPr>
+              <a:spcAft>
+                <a:spcPts val="600"/>
+              </a:spcAft>
+              <a:defRPr sz="1100">
+                <a:solidFill>
+                  <a:srgbClr val="94A3B8"/>
+                </a:solidFill>
+                <a:latin typeface="Noto Sans KR"/>
+              </a:defRPr>
+            </a:pPr>
+            <a:r>
+              <a:t>• 필터 종류: 관계사별, 인증 레벨별, 평가 진행 상태별 필터 제공</a:t>
+            </a:r>
+          </a:p>
+          <a:p>
+            <a:pPr>
+              <a:spcAft>
+                <a:spcPts val="600"/>
+              </a:spcAft>
+              <a:defRPr sz="1100">
+                <a:solidFill>
+                  <a:srgbClr val="94A3B8"/>
+                </a:solidFill>
+                <a:latin typeface="Noto Sans KR"/>
+              </a:defRPr>
+            </a:pPr>
+            <a:r>
+              <a:t>• 1. 평가대기: 패널 배정 완료 후 아직 위원이 채점을 시작하지 않음</a:t>
+            </a:r>
+          </a:p>
+          <a:p>
+            <a:pPr>
+              <a:spcAft>
+                <a:spcPts val="600"/>
+              </a:spcAft>
+              <a:defRPr sz="1100">
+                <a:solidFill>
+                  <a:srgbClr val="94A3B8"/>
+                </a:solidFill>
+                <a:latin typeface="Noto Sans KR"/>
+              </a:defRPr>
+            </a:pPr>
+            <a:r>
+              <a:t>• 2. 심사중: 1명 이상의 위원이 부분 채점을 기록하거나 제출함</a:t>
+            </a:r>
+          </a:p>
+          <a:p>
+            <a:pPr>
+              <a:spcAft>
+                <a:spcPts val="600"/>
+              </a:spcAft>
+              <a:defRPr sz="1100">
+                <a:solidFill>
+                  <a:srgbClr val="94A3B8"/>
+                </a:solidFill>
+                <a:latin typeface="Noto Sans KR"/>
+              </a:defRPr>
+            </a:pPr>
+            <a:r>
+              <a:t>• 3. 완료: 3인 패널이 모두 최종 평가를 제출하여 종합 평균이 집계됨</a:t>
+            </a:r>
+          </a:p>
+          <a:p>
+            <a:pPr>
+              <a:spcAft>
+                <a:spcPts val="600"/>
+              </a:spcAft>
+              <a:defRPr sz="1100">
+                <a:solidFill>
+                  <a:srgbClr val="94A3B8"/>
+                </a:solidFill>
+                <a:latin typeface="Noto Sans KR"/>
+              </a:defRPr>
+            </a:pPr>
+            <a:r>
+              <a:t>• 4. 보고서 보기: [결과 보기] 액션 버튼을 눌러 종합판정서 조회 및 인쇄</a:t>
             </a:r>
           </a:p>
           <a:p>
@@ -10558,23 +11088,7 @@
               </a:defRPr>
             </a:pPr>
             <a:r>
-              <a:t>⚠️ 결격 사유 발생 시:</a:t>
-            </a:r>
-          </a:p>
-          <a:p>
-            <a:pPr>
-              <a:spcAft>
-                <a:spcPts val="600"/>
-              </a:spcAft>
-              <a:defRPr sz="1100">
-                <a:solidFill>
-                  <a:srgbClr val="94A3B8"/>
-                </a:solidFill>
-                <a:latin typeface="Noto Sans KR"/>
-              </a:defRPr>
-            </a:pPr>
-            <a:r>
-              <a:t>• 표절, 중요 기밀 및 API Key 노출 등이 발견되어 결격 처리된 경우, 평균 점수가 70점 이상이어도 최종 판정은 '불합격' 처리됩니다.</a:t>
+              <a:t>💡 팁: '타 위원 진척도' 항목에서 실시간 배지 도트를 확인해 미제출 위원을 즉시 판별할 수 있습니다.</a:t>
             </a:r>
           </a:p>
           <a:p>
@@ -10591,7 +11105,7 @@
               </a:defRPr>
             </a:pPr>
             <a:r>
-              <a:t>오른쪽 화면: 서명이 실제 심사위원 성명으로 연동된 결과 보고서 하단부</a:t>
+              <a:t>오른쪽 화면: 간사용 대기 큐 필터 및 위원 진척 표시 영역</a:t>
             </a:r>
           </a:p>
         </p:txBody>
@@ -10643,7 +11157,7 @@
       </p:sp>
       <p:pic>
         <p:nvPicPr>
-          <p:cNvPr id="10" name="Picture 9" descr="media__1784596287593.png"/>
+          <p:cNvPr id="10" name="Picture 9" descr="media__1784188798650.png"/>
           <p:cNvPicPr>
             <a:picLocks noChangeAspect="1"/>
           </p:cNvPicPr>
@@ -10657,8 +11171,8 @@
         </p:blipFill>
         <p:spPr>
           <a:xfrm>
-            <a:off x="7059982" y="1965960"/>
-            <a:ext cx="3893714" cy="3840480"/>
+            <a:off x="7369320" y="1965960"/>
+            <a:ext cx="3275038" cy="3840480"/>
           </a:xfrm>
           <a:prstGeom prst="rect">
             <a:avLst/>

--- a/AICA_System_User_Manual.pptx
+++ b/AICA_System_User_Manual.pptx
@@ -22,6 +22,9 @@
     <p:sldId id="270" r:id="rId21"/>
     <p:sldId id="271" r:id="rId22"/>
     <p:sldId id="272" r:id="rId23"/>
+    <p:sldId id="273" r:id="rId24"/>
+    <p:sldId id="274" r:id="rId25"/>
+    <p:sldId id="275" r:id="rId26"/>
   </p:sldIdLst>
   <p:sldSz cx="12191695" cy="6858000" type="screen4x3"/>
   <p:notesSz cx="6858000" cy="9144000"/>
@@ -3100,7 +3103,7 @@
     <p:bg>
       <p:bgPr>
         <a:solidFill>
-          <a:srgbClr val="0F172A"/>
+          <a:srgbClr val="0B1329"/>
         </a:solidFill>
         <a:effectLst/>
       </p:bgPr>
@@ -3136,13 +3139,13 @@
           <a:p>
             <a:pPr>
               <a:spcAft>
-                <a:spcPts val="2000"/>
-              </a:spcAft>
-              <a:defRPr sz="1300" b="1">
+                <a:spcPts val="1400"/>
+              </a:spcAft>
+              <a:defRPr sz="1600" b="1">
                 <a:solidFill>
                   <a:srgbClr val="38BDF8"/>
                 </a:solidFill>
-                <a:latin typeface="Noto Sans KR"/>
+                <a:latin typeface="Malgun Gothic"/>
               </a:defRPr>
             </a:pPr>
             <a:r>
@@ -3151,20 +3154,29 @@
           </a:p>
           <a:p>
             <a:pPr>
-              <a:spcAft>
-                <a:spcPts val="2000"/>
-              </a:spcAft>
-              <a:defRPr sz="4400" b="1">
+              <a:defRPr sz="3800" b="1">
                 <a:solidFill>
                   <a:srgbClr val="FFFFFF"/>
                 </a:solidFill>
-                <a:latin typeface="Noto Sans KR"/>
+                <a:latin typeface="Malgun Gothic"/>
               </a:defRPr>
             </a:pPr>
             <a:r>
               <a:t>자격심사 시스템</a:t>
             </a:r>
-            <a:br/>
+          </a:p>
+          <a:p>
+            <a:pPr>
+              <a:spcAft>
+                <a:spcPts val="1600"/>
+              </a:spcAft>
+              <a:defRPr sz="3800" b="1">
+                <a:solidFill>
+                  <a:srgbClr val="FFFFFF"/>
+                </a:solidFill>
+                <a:latin typeface="Malgun Gothic"/>
+              </a:defRPr>
+            </a:pPr>
             <a:r>
               <a:t>사용자 매뉴얼</a:t>
             </a:r>
@@ -3175,7 +3187,7 @@
                 <a:solidFill>
                   <a:srgbClr val="94A3B8"/>
                 </a:solidFill>
-                <a:latin typeface="Noto Sans KR"/>
+                <a:latin typeface="Malgun Gothic"/>
               </a:defRPr>
             </a:pPr>
             <a:r>
@@ -3192,7 +3204,7 @@
         </p:nvSpPr>
         <p:spPr>
           <a:xfrm>
-            <a:off x="731520" y="5669280"/>
+            <a:off x="731520" y="5486400"/>
             <a:ext cx="6217920" cy="731520"/>
           </a:xfrm>
           <a:prstGeom prst="rect">
@@ -3211,13 +3223,22 @@
                 <a:solidFill>
                   <a:srgbClr val="94A3B8"/>
                 </a:solidFill>
-                <a:latin typeface="Noto Sans KR"/>
+                <a:latin typeface="Malgun Gothic"/>
               </a:defRPr>
             </a:pPr>
             <a:r>
               <a:t>2026. 07</a:t>
             </a:r>
-            <a:br/>
+          </a:p>
+          <a:p>
+            <a:pPr>
+              <a:defRPr sz="1100">
+                <a:solidFill>
+                  <a:srgbClr val="38BDF8"/>
+                </a:solidFill>
+                <a:latin typeface="Malgun Gothic"/>
+              </a:defRPr>
+            </a:pPr>
             <a:r>
               <a:t>https://aica-competency.web.app/</a:t>
             </a:r>
@@ -3232,18 +3253,18 @@
         </p:nvSpPr>
         <p:spPr>
           <a:xfrm>
-            <a:off x="7315200" y="914400"/>
-            <a:ext cx="4114800" cy="5029200"/>
+            <a:off x="7315200" y="1097280"/>
+            <a:ext cx="4114800" cy="4663440"/>
           </a:xfrm>
           <a:prstGeom prst="roundRect">
             <a:avLst/>
           </a:prstGeom>
           <a:solidFill>
-            <a:srgbClr val="1E293B"/>
+            <a:srgbClr val="111C38"/>
           </a:solidFill>
           <a:ln w="19050">
             <a:solidFill>
-              <a:srgbClr val="334155"/>
+              <a:srgbClr val="1E293B"/>
             </a:solidFill>
           </a:ln>
         </p:spPr>
@@ -3277,8 +3298,8 @@
         </p:nvSpPr>
         <p:spPr>
           <a:xfrm>
-            <a:off x="7498079" y="1371600"/>
-            <a:ext cx="3749039" cy="4114800"/>
+            <a:off x="7498079" y="1645920"/>
+            <a:ext cx="3749039" cy="3657600"/>
           </a:xfrm>
           <a:prstGeom prst="rect">
             <a:avLst/>
@@ -3293,13 +3314,13 @@
           <a:p>
             <a:pPr algn="ctr">
               <a:spcAft>
-                <a:spcPts val="3000"/>
-              </a:spcAft>
-              <a:defRPr sz="2800" b="1">
+                <a:spcPts val="2400"/>
+              </a:spcAft>
+              <a:defRPr sz="4000" b="1">
                 <a:solidFill>
                   <a:srgbClr val="FFFFFF"/>
                 </a:solidFill>
-                <a:latin typeface="Noto Sans KR"/>
+                <a:latin typeface="Malgun Gothic"/>
               </a:defRPr>
             </a:pPr>
             <a:r>
@@ -3309,13 +3330,13 @@
           <a:p>
             <a:pPr algn="ctr">
               <a:spcAft>
-                <a:spcPts val="1000"/>
-              </a:spcAft>
-              <a:defRPr sz="1800" b="1">
+                <a:spcPts val="1200"/>
+              </a:spcAft>
+              <a:defRPr sz="2000" b="1">
                 <a:solidFill>
                   <a:srgbClr val="FFFFFF"/>
                 </a:solidFill>
-                <a:latin typeface="Noto Sans KR"/>
+                <a:latin typeface="Malgun Gothic"/>
               </a:defRPr>
             </a:pPr>
             <a:r>
@@ -3325,13 +3346,13 @@
           <a:p>
             <a:pPr algn="ctr">
               <a:spcAft>
-                <a:spcPts val="4000"/>
-              </a:spcAft>
-              <a:defRPr sz="1400">
+                <a:spcPts val="2800"/>
+              </a:spcAft>
+              <a:defRPr sz="1500">
                 <a:solidFill>
                   <a:srgbClr val="94A3B8"/>
                 </a:solidFill>
-                <a:latin typeface="Noto Sans KR"/>
+                <a:latin typeface="Malgun Gothic"/>
               </a:defRPr>
             </a:pPr>
             <a:r>
@@ -3340,11 +3361,11 @@
           </a:p>
           <a:p>
             <a:pPr algn="ctr">
-              <a:defRPr sz="1400" b="1">
-                <a:solidFill>
-                  <a:srgbClr val="38BDF8"/>
-                </a:solidFill>
-                <a:latin typeface="Noto Sans KR"/>
+              <a:defRPr sz="1600" b="1">
+                <a:solidFill>
+                  <a:srgbClr val="60A5FA"/>
+                </a:solidFill>
+                <a:latin typeface="Malgun Gothic"/>
               </a:defRPr>
             </a:pPr>
             <a:r>
@@ -3367,7 +3388,7 @@
     <p:bg>
       <p:bgPr>
         <a:solidFill>
-          <a:srgbClr val="0F172A"/>
+          <a:srgbClr val="0B1329"/>
         </a:solidFill>
         <a:effectLst/>
       </p:bgPr>
@@ -3388,7 +3409,7 @@
         <p:spPr>
           <a:xfrm>
             <a:off x="548640" y="365760"/>
-            <a:ext cx="7315200" cy="365760"/>
+            <a:ext cx="7315200" cy="320040"/>
           </a:xfrm>
           <a:prstGeom prst="rect">
             <a:avLst/>
@@ -3396,17 +3417,17 @@
           <a:noFill/>
         </p:spPr>
         <p:txBody>
-          <a:bodyPr wrap="none">
+          <a:bodyPr wrap="square">
             <a:spAutoFit/>
           </a:bodyPr>
           <a:lstStyle/>
           <a:p>
             <a:pPr>
-              <a:defRPr sz="1100" b="1">
+              <a:defRPr sz="1300" b="1">
                 <a:solidFill>
                   <a:srgbClr val="38BDF8"/>
                 </a:solidFill>
-                <a:latin typeface="Noto Sans KR"/>
+                <a:latin typeface="Malgun Gothic"/>
               </a:defRPr>
             </a:pPr>
             <a:r>
@@ -3424,7 +3445,7 @@
         <p:spPr>
           <a:xfrm>
             <a:off x="548640" y="640080"/>
-            <a:ext cx="10058400" cy="731520"/>
+            <a:ext cx="10058400" cy="640080"/>
           </a:xfrm>
           <a:prstGeom prst="rect">
             <a:avLst/>
@@ -3432,17 +3453,17 @@
           <a:noFill/>
         </p:spPr>
         <p:txBody>
-          <a:bodyPr wrap="none">
+          <a:bodyPr wrap="square">
             <a:spAutoFit/>
           </a:bodyPr>
           <a:lstStyle/>
           <a:p>
             <a:pPr>
-              <a:defRPr sz="2600" b="1">
+              <a:defRPr sz="2400" b="1">
                 <a:solidFill>
                   <a:srgbClr val="FFFFFF"/>
                 </a:solidFill>
-                <a:latin typeface="Noto Sans KR"/>
+                <a:latin typeface="Malgun Gothic"/>
               </a:defRPr>
             </a:pPr>
             <a:r>
@@ -3466,10 +3487,12 @@
             <a:avLst/>
           </a:prstGeom>
           <a:solidFill>
-            <a:srgbClr val="334155"/>
+            <a:srgbClr val="1E293B"/>
           </a:solidFill>
           <a:ln>
-            <a:noFill/>
+            <a:solidFill>
+              <a:srgbClr val="1E293B"/>
+            </a:solidFill>
           </a:ln>
         </p:spPr>
         <p:style>
@@ -3517,15 +3540,15 @@
           <a:lstStyle/>
           <a:p>
             <a:pPr>
-              <a:defRPr sz="900">
+              <a:defRPr sz="1000">
                 <a:solidFill>
                   <a:srgbClr val="94A3B8"/>
                 </a:solidFill>
-                <a:latin typeface="Noto Sans KR"/>
-              </a:defRPr>
-            </a:pPr>
-            <a:r>
-              <a:t>AICA 자격심사 시스템 사용자 매뉴얼 · Web App Dark Theme</a:t>
+                <a:latin typeface="Malgun Gothic"/>
+              </a:defRPr>
+            </a:pPr>
+            <a:r>
+              <a:t>AICA 자격심사 시스템 사용자 매뉴얼 · 경영혁신실</a:t>
             </a:r>
           </a:p>
         </p:txBody>
@@ -3553,15 +3576,15 @@
           <a:lstStyle/>
           <a:p>
             <a:pPr algn="r">
-              <a:defRPr sz="900">
+              <a:defRPr sz="1000">
                 <a:solidFill>
                   <a:srgbClr val="94A3B8"/>
                 </a:solidFill>
-                <a:latin typeface="Noto Sans KR"/>
-              </a:defRPr>
-            </a:pPr>
-            <a:r>
-              <a:t>09</a:t>
+                <a:latin typeface="Malgun Gothic"/>
+              </a:defRPr>
+            </a:pPr>
+            <a:r>
+              <a:t>10</a:t>
             </a:r>
           </a:p>
         </p:txBody>
@@ -3574,18 +3597,18 @@
         </p:nvSpPr>
         <p:spPr>
           <a:xfrm>
-            <a:off x="548640" y="1828800"/>
-            <a:ext cx="5486400" cy="4114800"/>
+            <a:off x="548640" y="1645920"/>
+            <a:ext cx="5486400" cy="4389120"/>
           </a:xfrm>
           <a:prstGeom prst="roundRect">
             <a:avLst/>
           </a:prstGeom>
           <a:solidFill>
-            <a:srgbClr val="1E293B"/>
+            <a:srgbClr val="111C38"/>
           </a:solidFill>
           <a:ln w="12700">
             <a:solidFill>
-              <a:srgbClr val="334155"/>
+              <a:srgbClr val="1E293B"/>
             </a:solidFill>
           </a:ln>
         </p:spPr>
@@ -3619,8 +3642,8 @@
         </p:nvSpPr>
         <p:spPr>
           <a:xfrm>
-            <a:off x="731520" y="2011680"/>
-            <a:ext cx="5120640" cy="3749040"/>
+            <a:off x="731520" y="1828800"/>
+            <a:ext cx="5120640" cy="4023360"/>
           </a:xfrm>
           <a:prstGeom prst="rect">
             <a:avLst/>
@@ -3635,17 +3658,49 @@
           <a:p>
             <a:pPr>
               <a:spcAft>
-                <a:spcPts val="1200"/>
-              </a:spcAft>
-              <a:defRPr sz="1500" b="1">
+                <a:spcPts val="1000"/>
+              </a:spcAft>
+              <a:defRPr sz="1600" b="1">
+                <a:solidFill>
+                  <a:srgbClr val="60A5FA"/>
+                </a:solidFill>
+                <a:latin typeface="Malgun Gothic"/>
+              </a:defRPr>
+            </a:pPr>
+            <a:r>
+              <a:t>종합판정 보고서 발급 및 명패 동기화</a:t>
+            </a:r>
+          </a:p>
+          <a:p>
+            <a:pPr>
+              <a:spcAft>
+                <a:spcPts val="600"/>
+              </a:spcAft>
+              <a:defRPr sz="1200">
+                <a:solidFill>
+                  <a:srgbClr val="E2E8F0"/>
+                </a:solidFill>
+                <a:latin typeface="Malgun Gothic"/>
+              </a:defRPr>
+            </a:pPr>
+            <a:r>
+              <a:t>종합판정서 구성 항목 및 검증 가이드:</a:t>
+            </a:r>
+          </a:p>
+          <a:p>
+            <a:pPr>
+              <a:spcAft>
+                <a:spcPts val="600"/>
+              </a:spcAft>
+              <a:defRPr sz="1200">
                 <a:solidFill>
                   <a:srgbClr val="FFFFFF"/>
                 </a:solidFill>
-                <a:latin typeface="Noto Sans KR"/>
-              </a:defRPr>
-            </a:pPr>
-            <a:r>
-              <a:t>종합판정 보고서 발급 및 명패 동기화</a:t>
+                <a:latin typeface="Malgun Gothic"/>
+              </a:defRPr>
+            </a:pPr>
+            <a:r>
+              <a:t>• 지원자 기본 정보 및 심사 시행/제출/승인 일자 명시</a:t>
             </a:r>
           </a:p>
           <a:p>
@@ -3653,15 +3708,15 @@
               <a:spcAft>
                 <a:spcPts val="600"/>
               </a:spcAft>
-              <a:defRPr sz="1100">
-                <a:solidFill>
-                  <a:srgbClr val="94A3B8"/>
-                </a:solidFill>
-                <a:latin typeface="Noto Sans KR"/>
-              </a:defRPr>
-            </a:pPr>
-            <a:r>
-              <a:t>종합판정서 구성 항목 및 검증 가이드:</a:t>
+              <a:defRPr sz="1200" b="1">
+                <a:solidFill>
+                  <a:srgbClr val="F87171"/>
+                </a:solidFill>
+                <a:latin typeface="Malgun Gothic"/>
+              </a:defRPr>
+            </a:pPr>
+            <a:r>
+              <a:t>• 종합 평균 점수 시각화 및 최종 합격/불합격 판정</a:t>
             </a:r>
           </a:p>
           <a:p>
@@ -3669,15 +3724,15 @@
               <a:spcAft>
                 <a:spcPts val="600"/>
               </a:spcAft>
-              <a:defRPr sz="1100">
-                <a:solidFill>
-                  <a:srgbClr val="94A3B8"/>
-                </a:solidFill>
-                <a:latin typeface="Noto Sans KR"/>
-              </a:defRPr>
-            </a:pPr>
-            <a:r>
-              <a:t>• 지원자 기본 정보 및 종합 평균 점수 시각화</a:t>
+              <a:defRPr sz="1200">
+                <a:solidFill>
+                  <a:srgbClr val="FFFFFF"/>
+                </a:solidFill>
+                <a:latin typeface="Malgun Gothic"/>
+              </a:defRPr>
+            </a:pPr>
+            <a:r>
+              <a:t>• 3인 배정 위원의 세부 루브릭 채점 점수 및 종합 정성 평가 의견 노출</a:t>
             </a:r>
           </a:p>
           <a:p>
@@ -3685,15 +3740,15 @@
               <a:spcAft>
                 <a:spcPts val="600"/>
               </a:spcAft>
-              <a:defRPr sz="1100">
-                <a:solidFill>
-                  <a:srgbClr val="94A3B8"/>
-                </a:solidFill>
-                <a:latin typeface="Noto Sans KR"/>
-              </a:defRPr>
-            </a:pPr>
-            <a:r>
-              <a:t>• 3인 배정 위원의 세부 루브릭 채점 점수 및 종합 정성 평가 의견 노출</a:t>
+              <a:defRPr sz="1200">
+                <a:solidFill>
+                  <a:srgbClr val="FFFFFF"/>
+                </a:solidFill>
+                <a:latin typeface="Malgun Gothic"/>
+              </a:defRPr>
+            </a:pPr>
+            <a:r>
+              <a:t>• 하단 서명란: 배정된 실제 심사위원 성명으로 명패 자동 변경 완료</a:t>
             </a:r>
           </a:p>
           <a:p>
@@ -3701,81 +3756,32 @@
               <a:spcAft>
                 <a:spcPts val="600"/>
               </a:spcAft>
-              <a:defRPr sz="1100">
-                <a:solidFill>
-                  <a:srgbClr val="94A3B8"/>
-                </a:solidFill>
-                <a:latin typeface="Noto Sans KR"/>
-              </a:defRPr>
-            </a:pPr>
-            <a:r>
-              <a:t>• 하단 서명란: 배정된 실제 심사위원 성명으로 명패 자동 변경 완료</a:t>
-            </a:r>
-          </a:p>
-          <a:p>
+              <a:defRPr sz="1200">
+                <a:solidFill>
+                  <a:srgbClr val="FFFFFF"/>
+                </a:solidFill>
+                <a:latin typeface="Malgun Gothic"/>
+              </a:defRPr>
+            </a:pPr>
+            <a:r>
+              <a:t>• 출력 최적화: [결과 보고서 인쇄(PDF)] 버튼을 클릭하여 A4 최적화 보고서 출력</a:t>
+            </a:r>
+          </a:p>
+          <a:p>
+            <a:br/>
             <a:pPr>
               <a:spcAft>
                 <a:spcPts val="600"/>
               </a:spcAft>
-              <a:defRPr sz="1100">
-                <a:solidFill>
-                  <a:srgbClr val="94A3B8"/>
-                </a:solidFill>
-                <a:latin typeface="Noto Sans KR"/>
-              </a:defRPr>
-            </a:pPr>
-            <a:r>
-              <a:t>• 출력 최적화: [결과 보고서 인쇄 (PDF)] 버튼을 클릭하여 A4 최적화 보고서 출력 및 사내 공유용 저장 가능</a:t>
-            </a:r>
-          </a:p>
-          <a:p>
-            <a:br/>
-            <a:pPr>
-              <a:spcAft>
-                <a:spcPts val="600"/>
-              </a:spcAft>
-              <a:defRPr sz="1100">
-                <a:solidFill>
-                  <a:srgbClr val="94A3B8"/>
-                </a:solidFill>
-                <a:latin typeface="Noto Sans KR"/>
-              </a:defRPr>
-            </a:pPr>
-            <a:r>
-              <a:t>⚠️ 결격 사유 발생 시:</a:t>
-            </a:r>
-          </a:p>
-          <a:p>
-            <a:pPr>
-              <a:spcAft>
-                <a:spcPts val="600"/>
-              </a:spcAft>
-              <a:defRPr sz="1100">
-                <a:solidFill>
-                  <a:srgbClr val="94A3B8"/>
-                </a:solidFill>
-                <a:latin typeface="Noto Sans KR"/>
-              </a:defRPr>
-            </a:pPr>
-            <a:r>
-              <a:t>• 표절, 중요 기밀 및 API Key 노출 등이 발견되어 결격 처리된 경우, 평균 점수가 70점 이상이어도 최종 판정은 '불합격' 처리됩니다.</a:t>
-            </a:r>
-          </a:p>
-          <a:p>
-            <a:br/>
-            <a:pPr>
-              <a:spcAft>
-                <a:spcPts val="600"/>
-              </a:spcAft>
-              <a:defRPr sz="1100">
-                <a:solidFill>
-                  <a:srgbClr val="94A3B8"/>
-                </a:solidFill>
-                <a:latin typeface="Noto Sans KR"/>
-              </a:defRPr>
-            </a:pPr>
-            <a:r>
-              <a:t>오른쪽 화면: 서명이 실제 심사위원 성명으로 연동된 결과 보고서 하단부</a:t>
+              <a:defRPr sz="1200" b="1">
+                <a:solidFill>
+                  <a:srgbClr val="F87171"/>
+                </a:solidFill>
+                <a:latin typeface="Malgun Gothic"/>
+              </a:defRPr>
+            </a:pPr>
+            <a:r>
+              <a:t>⚠️ 결격 사유 발생 시: 표절, 중요 기밀 및 API Key 노출 등이 발견되어 결격 처리된 경우, 평균 점수가 70점 이상이어도 최종 판정은 '불합격' 처리됩니다.</a:t>
             </a:r>
           </a:p>
         </p:txBody>
@@ -3788,18 +3794,18 @@
         </p:nvSpPr>
         <p:spPr>
           <a:xfrm>
-            <a:off x="6400800" y="1828800"/>
-            <a:ext cx="5212080" cy="4114800"/>
+            <a:off x="6309360" y="1645920"/>
+            <a:ext cx="5303520" cy="4389120"/>
           </a:xfrm>
           <a:prstGeom prst="roundRect">
             <a:avLst/>
           </a:prstGeom>
           <a:solidFill>
-            <a:srgbClr val="1E293B"/>
+            <a:srgbClr val="111C38"/>
           </a:solidFill>
-          <a:ln w="19050">
+          <a:ln w="12700">
             <a:solidFill>
-              <a:srgbClr val="6366F1"/>
+              <a:srgbClr val="1E293B"/>
             </a:solidFill>
           </a:ln>
         </p:spPr>
@@ -3827,7 +3833,7 @@
       </p:sp>
       <p:pic>
         <p:nvPicPr>
-          <p:cNvPr id="10" name="Picture 9" descr="media__1784596287593.png"/>
+          <p:cNvPr id="10" name="Picture 9" descr="page_10.png"/>
           <p:cNvPicPr>
             <a:picLocks noChangeAspect="1"/>
           </p:cNvPicPr>
@@ -3841,8 +3847,8 @@
         </p:blipFill>
         <p:spPr>
           <a:xfrm>
-            <a:off x="7059982" y="1965960"/>
-            <a:ext cx="3893714" cy="3840480"/>
+            <a:off x="6400800" y="1737360"/>
+            <a:ext cx="5120640" cy="4206240"/>
           </a:xfrm>
           <a:prstGeom prst="rect">
             <a:avLst/>
@@ -3863,7 +3869,7 @@
     <p:bg>
       <p:bgPr>
         <a:solidFill>
-          <a:srgbClr val="0F172A"/>
+          <a:srgbClr val="0B1329"/>
         </a:solidFill>
         <a:effectLst/>
       </p:bgPr>
@@ -3884,7 +3890,7 @@
         <p:spPr>
           <a:xfrm>
             <a:off x="548640" y="365760"/>
-            <a:ext cx="7315200" cy="365760"/>
+            <a:ext cx="7315200" cy="320040"/>
           </a:xfrm>
           <a:prstGeom prst="rect">
             <a:avLst/>
@@ -3892,17 +3898,17 @@
           <a:noFill/>
         </p:spPr>
         <p:txBody>
-          <a:bodyPr wrap="none">
+          <a:bodyPr wrap="square">
             <a:spAutoFit/>
           </a:bodyPr>
           <a:lstStyle/>
           <a:p>
             <a:pPr>
-              <a:defRPr sz="1100" b="1">
+              <a:defRPr sz="1300" b="1">
                 <a:solidFill>
                   <a:srgbClr val="38BDF8"/>
                 </a:solidFill>
-                <a:latin typeface="Noto Sans KR"/>
+                <a:latin typeface="Malgun Gothic"/>
               </a:defRPr>
             </a:pPr>
             <a:r>
@@ -3920,7 +3926,7 @@
         <p:spPr>
           <a:xfrm>
             <a:off x="548640" y="640080"/>
-            <a:ext cx="10058400" cy="731520"/>
+            <a:ext cx="10058400" cy="640080"/>
           </a:xfrm>
           <a:prstGeom prst="rect">
             <a:avLst/>
@@ -3928,17 +3934,17 @@
           <a:noFill/>
         </p:spPr>
         <p:txBody>
-          <a:bodyPr wrap="none">
+          <a:bodyPr wrap="square">
             <a:spAutoFit/>
           </a:bodyPr>
           <a:lstStyle/>
           <a:p>
             <a:pPr>
-              <a:defRPr sz="2600" b="1">
+              <a:defRPr sz="2400" b="1">
                 <a:solidFill>
                   <a:srgbClr val="FFFFFF"/>
                 </a:solidFill>
-                <a:latin typeface="Noto Sans KR"/>
+                <a:latin typeface="Malgun Gothic"/>
               </a:defRPr>
             </a:pPr>
             <a:r>
@@ -3962,10 +3968,12 @@
             <a:avLst/>
           </a:prstGeom>
           <a:solidFill>
-            <a:srgbClr val="334155"/>
+            <a:srgbClr val="1E293B"/>
           </a:solidFill>
           <a:ln>
-            <a:noFill/>
+            <a:solidFill>
+              <a:srgbClr val="1E293B"/>
+            </a:solidFill>
           </a:ln>
         </p:spPr>
         <p:style>
@@ -4013,15 +4021,15 @@
           <a:lstStyle/>
           <a:p>
             <a:pPr>
-              <a:defRPr sz="900">
+              <a:defRPr sz="1000">
                 <a:solidFill>
                   <a:srgbClr val="94A3B8"/>
                 </a:solidFill>
-                <a:latin typeface="Noto Sans KR"/>
-              </a:defRPr>
-            </a:pPr>
-            <a:r>
-              <a:t>AICA 자격심사 시스템 사용자 매뉴얼 · Web App Dark Theme</a:t>
+                <a:latin typeface="Malgun Gothic"/>
+              </a:defRPr>
+            </a:pPr>
+            <a:r>
+              <a:t>AICA 자격심사 시스템 사용자 매뉴얼 · 경영혁신실</a:t>
             </a:r>
           </a:p>
         </p:txBody>
@@ -4049,15 +4057,15 @@
           <a:lstStyle/>
           <a:p>
             <a:pPr algn="r">
-              <a:defRPr sz="900">
+              <a:defRPr sz="1000">
                 <a:solidFill>
                   <a:srgbClr val="94A3B8"/>
                 </a:solidFill>
-                <a:latin typeface="Noto Sans KR"/>
-              </a:defRPr>
-            </a:pPr>
-            <a:r>
-              <a:t>10</a:t>
+                <a:latin typeface="Malgun Gothic"/>
+              </a:defRPr>
+            </a:pPr>
+            <a:r>
+              <a:t>11</a:t>
             </a:r>
           </a:p>
         </p:txBody>
@@ -4070,18 +4078,18 @@
         </p:nvSpPr>
         <p:spPr>
           <a:xfrm>
-            <a:off x="548640" y="1828800"/>
-            <a:ext cx="5486400" cy="4114800"/>
+            <a:off x="548640" y="1645920"/>
+            <a:ext cx="5486400" cy="4389120"/>
           </a:xfrm>
           <a:prstGeom prst="roundRect">
             <a:avLst/>
           </a:prstGeom>
           <a:solidFill>
-            <a:srgbClr val="1E293B"/>
+            <a:srgbClr val="111C38"/>
           </a:solidFill>
           <a:ln w="12700">
             <a:solidFill>
-              <a:srgbClr val="334155"/>
+              <a:srgbClr val="1E293B"/>
             </a:solidFill>
           </a:ln>
         </p:spPr>
@@ -4115,8 +4123,8 @@
         </p:nvSpPr>
         <p:spPr>
           <a:xfrm>
-            <a:off x="731520" y="2011680"/>
-            <a:ext cx="5120640" cy="3749040"/>
+            <a:off x="731520" y="1828800"/>
+            <a:ext cx="5120640" cy="4023360"/>
           </a:xfrm>
           <a:prstGeom prst="rect">
             <a:avLst/>
@@ -4131,17 +4139,49 @@
           <a:p>
             <a:pPr>
               <a:spcAft>
-                <a:spcPts val="1200"/>
-              </a:spcAft>
-              <a:defRPr sz="1500" b="1">
+                <a:spcPts val="1000"/>
+              </a:spcAft>
+              <a:defRPr sz="1600" b="1">
+                <a:solidFill>
+                  <a:srgbClr val="60A5FA"/>
+                </a:solidFill>
+                <a:latin typeface="Malgun Gothic"/>
+              </a:defRPr>
+            </a:pPr>
+            <a:r>
+              <a:t>심사위원 배정 큐 및 월별 일정 모니터링</a:t>
+            </a:r>
+          </a:p>
+          <a:p>
+            <a:pPr>
+              <a:spcAft>
+                <a:spcPts val="600"/>
+              </a:spcAft>
+              <a:defRPr sz="1200">
+                <a:solidFill>
+                  <a:srgbClr val="E2E8F0"/>
+                </a:solidFill>
+                <a:latin typeface="Malgun Gothic"/>
+              </a:defRPr>
+            </a:pPr>
+            <a:r>
+              <a:t>심사위원 전용 배정 과제 리스트 가이드:</a:t>
+            </a:r>
+          </a:p>
+          <a:p>
+            <a:pPr>
+              <a:spcAft>
+                <a:spcPts val="600"/>
+              </a:spcAft>
+              <a:defRPr sz="1200">
                 <a:solidFill>
                   <a:srgbClr val="FFFFFF"/>
                 </a:solidFill>
-                <a:latin typeface="Noto Sans KR"/>
-              </a:defRPr>
-            </a:pPr>
-            <a:r>
-              <a:t>심사 위원 배정 큐 모니터링</a:t>
+                <a:latin typeface="Malgun Gothic"/>
+              </a:defRPr>
+            </a:pPr>
+            <a:r>
+              <a:t>• 성명 및 이메일 로그인 시, 본인이 패널로 등록된 평가 과제 및 월별 일정 캘린더가 렌더링됩니다.</a:t>
             </a:r>
           </a:p>
           <a:p>
@@ -4149,15 +4189,15 @@
               <a:spcAft>
                 <a:spcPts val="600"/>
               </a:spcAft>
-              <a:defRPr sz="1100">
-                <a:solidFill>
-                  <a:srgbClr val="94A3B8"/>
-                </a:solidFill>
-                <a:latin typeface="Noto Sans KR"/>
-              </a:defRPr>
-            </a:pPr>
-            <a:r>
-              <a:t>심사위원 전용 배정 과제 리스트 가이드:</a:t>
+              <a:defRPr sz="1200">
+                <a:solidFill>
+                  <a:srgbClr val="FFFFFF"/>
+                </a:solidFill>
+                <a:latin typeface="Malgun Gothic"/>
+              </a:defRPr>
+            </a:pPr>
+            <a:r>
+              <a:t>• 테이블 컬럼: 지원자 정보, 소속 법인/부서, 자격 인증 레벨, 내 평가 진행 현황(대기/완료), 타 위원 제출 진척 상태 배지 표시</a:t>
             </a:r>
           </a:p>
           <a:p>
@@ -4165,81 +4205,15 @@
               <a:spcAft>
                 <a:spcPts val="600"/>
               </a:spcAft>
-              <a:defRPr sz="1100">
-                <a:solidFill>
-                  <a:srgbClr val="94A3B8"/>
-                </a:solidFill>
-                <a:latin typeface="Noto Sans KR"/>
-              </a:defRPr>
-            </a:pPr>
-            <a:r>
-              <a:t>• 성명 및 이메일 로그인 시, 본인이 패널로 등록된 평가 과제만 화면에 정렬됩니다.</a:t>
-            </a:r>
-          </a:p>
-          <a:p>
-            <a:pPr>
-              <a:spcAft>
-                <a:spcPts val="600"/>
-              </a:spcAft>
-              <a:defRPr sz="1100">
-                <a:solidFill>
-                  <a:srgbClr val="94A3B8"/>
-                </a:solidFill>
-                <a:latin typeface="Noto Sans KR"/>
-              </a:defRPr>
-            </a:pPr>
-            <a:r>
-              <a:t>• 테이블 컬럼: 지원자 정보, 소속 법인/부서, 자격 인증 레벨, 내 평가 진행 현황(대기/완료), 타 위원 제출 진척 상태 배지 표시</a:t>
-            </a:r>
-          </a:p>
-          <a:p>
-            <a:br/>
-            <a:pPr>
-              <a:spcAft>
-                <a:spcPts val="600"/>
-              </a:spcAft>
-              <a:defRPr sz="1100">
-                <a:solidFill>
-                  <a:srgbClr val="94A3B8"/>
-                </a:solidFill>
-                <a:latin typeface="Noto Sans KR"/>
-              </a:defRPr>
-            </a:pPr>
-            <a:r>
-              <a:t>[심사하기/수정]:</a:t>
-            </a:r>
-          </a:p>
-          <a:p>
-            <a:pPr>
-              <a:spcAft>
-                <a:spcPts val="600"/>
-              </a:spcAft>
-              <a:defRPr sz="1100">
-                <a:solidFill>
-                  <a:srgbClr val="94A3B8"/>
-                </a:solidFill>
-                <a:latin typeface="Noto Sans KR"/>
-              </a:defRPr>
-            </a:pPr>
-            <a:r>
-              <a:t>• 채점을 시작하거나 이미 제출한 내용을 재조정할 때 버튼을 선택해 작업장(Workspace)으로 진입합니다.</a:t>
-            </a:r>
-          </a:p>
-          <a:p>
-            <a:br/>
-            <a:pPr>
-              <a:spcAft>
-                <a:spcPts val="600"/>
-              </a:spcAft>
-              <a:defRPr sz="1100">
-                <a:solidFill>
-                  <a:srgbClr val="94A3B8"/>
-                </a:solidFill>
-                <a:latin typeface="Noto Sans KR"/>
-              </a:defRPr>
-            </a:pPr>
-            <a:r>
-              <a:t>오른쪽 화면: 실제 심사위원이 접하는 과제 목록 테이블 영역</a:t>
+              <a:defRPr sz="1200">
+                <a:solidFill>
+                  <a:srgbClr val="FFFFFF"/>
+                </a:solidFill>
+                <a:latin typeface="Malgun Gothic"/>
+              </a:defRPr>
+            </a:pPr>
+            <a:r>
+              <a:t>• [심사하기/수정]: 채점을 시작하거나 이미 제출한 내용을 재조정할 때 버튼을 선택해 작업장(Workspace)으로 진입합니다.</a:t>
             </a:r>
           </a:p>
         </p:txBody>
@@ -4252,18 +4226,18 @@
         </p:nvSpPr>
         <p:spPr>
           <a:xfrm>
-            <a:off x="6400800" y="1828800"/>
-            <a:ext cx="5212080" cy="4114800"/>
+            <a:off x="6309360" y="1645920"/>
+            <a:ext cx="5303520" cy="4389120"/>
           </a:xfrm>
           <a:prstGeom prst="roundRect">
             <a:avLst/>
           </a:prstGeom>
           <a:solidFill>
-            <a:srgbClr val="1E293B"/>
+            <a:srgbClr val="111C38"/>
           </a:solidFill>
-          <a:ln w="19050">
+          <a:ln w="12700">
             <a:solidFill>
-              <a:srgbClr val="6366F1"/>
+              <a:srgbClr val="1E293B"/>
             </a:solidFill>
           </a:ln>
         </p:spPr>
@@ -4291,7 +4265,7 @@
       </p:sp>
       <p:pic>
         <p:nvPicPr>
-          <p:cNvPr id="10" name="Picture 9" descr="media__1784176902473.png"/>
+          <p:cNvPr id="10" name="Picture 9" descr="page_11.png"/>
           <p:cNvPicPr>
             <a:picLocks noChangeAspect="1"/>
           </p:cNvPicPr>
@@ -4305,8 +4279,8 @@
         </p:blipFill>
         <p:spPr>
           <a:xfrm>
-            <a:off x="6814049" y="1965960"/>
-            <a:ext cx="4385580" cy="3840480"/>
+            <a:off x="6400800" y="1737360"/>
+            <a:ext cx="5120640" cy="4206240"/>
           </a:xfrm>
           <a:prstGeom prst="rect">
             <a:avLst/>
@@ -4327,7 +4301,7 @@
     <p:bg>
       <p:bgPr>
         <a:solidFill>
-          <a:srgbClr val="0F172A"/>
+          <a:srgbClr val="0B1329"/>
         </a:solidFill>
         <a:effectLst/>
       </p:bgPr>
@@ -4348,7 +4322,7 @@
         <p:spPr>
           <a:xfrm>
             <a:off x="548640" y="365760"/>
-            <a:ext cx="7315200" cy="365760"/>
+            <a:ext cx="7315200" cy="320040"/>
           </a:xfrm>
           <a:prstGeom prst="rect">
             <a:avLst/>
@@ -4356,17 +4330,17 @@
           <a:noFill/>
         </p:spPr>
         <p:txBody>
-          <a:bodyPr wrap="none">
+          <a:bodyPr wrap="square">
             <a:spAutoFit/>
           </a:bodyPr>
           <a:lstStyle/>
           <a:p>
             <a:pPr>
-              <a:defRPr sz="1100" b="1">
+              <a:defRPr sz="1300" b="1">
                 <a:solidFill>
                   <a:srgbClr val="38BDF8"/>
                 </a:solidFill>
-                <a:latin typeface="Noto Sans KR"/>
+                <a:latin typeface="Malgun Gothic"/>
               </a:defRPr>
             </a:pPr>
             <a:r>
@@ -4384,7 +4358,7 @@
         <p:spPr>
           <a:xfrm>
             <a:off x="548640" y="640080"/>
-            <a:ext cx="10058400" cy="731520"/>
+            <a:ext cx="10058400" cy="640080"/>
           </a:xfrm>
           <a:prstGeom prst="rect">
             <a:avLst/>
@@ -4392,17 +4366,17 @@
           <a:noFill/>
         </p:spPr>
         <p:txBody>
-          <a:bodyPr wrap="none">
+          <a:bodyPr wrap="square">
             <a:spAutoFit/>
           </a:bodyPr>
           <a:lstStyle/>
           <a:p>
             <a:pPr>
-              <a:defRPr sz="2600" b="1">
+              <a:defRPr sz="2400" b="1">
                 <a:solidFill>
                   <a:srgbClr val="FFFFFF"/>
                 </a:solidFill>
-                <a:latin typeface="Noto Sans KR"/>
+                <a:latin typeface="Malgun Gothic"/>
               </a:defRPr>
             </a:pPr>
             <a:r>
@@ -4426,10 +4400,12 @@
             <a:avLst/>
           </a:prstGeom>
           <a:solidFill>
-            <a:srgbClr val="334155"/>
+            <a:srgbClr val="1E293B"/>
           </a:solidFill>
           <a:ln>
-            <a:noFill/>
+            <a:solidFill>
+              <a:srgbClr val="1E293B"/>
+            </a:solidFill>
           </a:ln>
         </p:spPr>
         <p:style>
@@ -4477,15 +4453,15 @@
           <a:lstStyle/>
           <a:p>
             <a:pPr>
-              <a:defRPr sz="900">
+              <a:defRPr sz="1000">
                 <a:solidFill>
                   <a:srgbClr val="94A3B8"/>
                 </a:solidFill>
-                <a:latin typeface="Noto Sans KR"/>
-              </a:defRPr>
-            </a:pPr>
-            <a:r>
-              <a:t>AICA 자격심사 시스템 사용자 매뉴얼 · Web App Dark Theme</a:t>
+                <a:latin typeface="Malgun Gothic"/>
+              </a:defRPr>
+            </a:pPr>
+            <a:r>
+              <a:t>AICA 자격심사 시스템 사용자 매뉴얼 · 경영혁신실</a:t>
             </a:r>
           </a:p>
         </p:txBody>
@@ -4513,15 +4489,15 @@
           <a:lstStyle/>
           <a:p>
             <a:pPr algn="r">
-              <a:defRPr sz="900">
+              <a:defRPr sz="1000">
                 <a:solidFill>
                   <a:srgbClr val="94A3B8"/>
                 </a:solidFill>
-                <a:latin typeface="Noto Sans KR"/>
-              </a:defRPr>
-            </a:pPr>
-            <a:r>
-              <a:t>11</a:t>
+                <a:latin typeface="Malgun Gothic"/>
+              </a:defRPr>
+            </a:pPr>
+            <a:r>
+              <a:t>12</a:t>
             </a:r>
           </a:p>
         </p:txBody>
@@ -4534,18 +4510,18 @@
         </p:nvSpPr>
         <p:spPr>
           <a:xfrm>
-            <a:off x="548640" y="1828800"/>
-            <a:ext cx="5486400" cy="4114800"/>
+            <a:off x="548640" y="1645920"/>
+            <a:ext cx="5486400" cy="4389120"/>
           </a:xfrm>
           <a:prstGeom prst="roundRect">
             <a:avLst/>
           </a:prstGeom>
           <a:solidFill>
-            <a:srgbClr val="1E293B"/>
+            <a:srgbClr val="111C38"/>
           </a:solidFill>
           <a:ln w="12700">
             <a:solidFill>
-              <a:srgbClr val="334155"/>
+              <a:srgbClr val="1E293B"/>
             </a:solidFill>
           </a:ln>
         </p:spPr>
@@ -4579,8 +4555,8 @@
         </p:nvSpPr>
         <p:spPr>
           <a:xfrm>
-            <a:off x="731520" y="2011680"/>
-            <a:ext cx="5120640" cy="3749040"/>
+            <a:off x="731520" y="1828800"/>
+            <a:ext cx="5120640" cy="4023360"/>
           </a:xfrm>
           <a:prstGeom prst="rect">
             <a:avLst/>
@@ -4595,17 +4571,49 @@
           <a:p>
             <a:pPr>
               <a:spcAft>
-                <a:spcPts val="1200"/>
-              </a:spcAft>
-              <a:defRPr sz="1500" b="1">
+                <a:spcPts val="1000"/>
+              </a:spcAft>
+              <a:defRPr sz="1600" b="1">
+                <a:solidFill>
+                  <a:srgbClr val="60A5FA"/>
+                </a:solidFill>
+                <a:latin typeface="Malgun Gothic"/>
+              </a:defRPr>
+            </a:pPr>
+            <a:r>
+              <a:t>3대 증빙자료 다차원 교차 검증 (탭 1: 보고서 요약)</a:t>
+            </a:r>
+          </a:p>
+          <a:p>
+            <a:pPr>
+              <a:spcAft>
+                <a:spcPts val="600"/>
+              </a:spcAft>
+              <a:defRPr sz="1200">
+                <a:solidFill>
+                  <a:srgbClr val="E2E8F0"/>
+                </a:solidFill>
+                <a:latin typeface="Malgun Gothic"/>
+              </a:defRPr>
+            </a:pPr>
+            <a:r>
+              <a:t>제출물 상세 탭(Tab) 활용 방식:</a:t>
+            </a:r>
+          </a:p>
+          <a:p>
+            <a:pPr>
+              <a:spcAft>
+                <a:spcPts val="600"/>
+              </a:spcAft>
+              <a:defRPr sz="1200">
                 <a:solidFill>
                   <a:srgbClr val="FFFFFF"/>
                 </a:solidFill>
-                <a:latin typeface="Noto Sans KR"/>
-              </a:defRPr>
-            </a:pPr>
-            <a:r>
-              <a:t>3대 증빙 자료 다차원 교차 검증</a:t>
+                <a:latin typeface="Malgun Gothic"/>
+              </a:defRPr>
+            </a:pPr>
+            <a:r>
+              <a:t>• 보고서 요약 (Tab 1): 과제 제안 배경 및 Pain Point 극복 방안, 6S 요약 검토 (문제-해결-기대효과의 논리적 일관성 체크)</a:t>
             </a:r>
           </a:p>
           <a:p>
@@ -4613,15 +4621,15 @@
               <a:spcAft>
                 <a:spcPts val="600"/>
               </a:spcAft>
-              <a:defRPr sz="1100">
-                <a:solidFill>
-                  <a:srgbClr val="94A3B8"/>
-                </a:solidFill>
-                <a:latin typeface="Noto Sans KR"/>
-              </a:defRPr>
-            </a:pPr>
-            <a:r>
-              <a:t>제출물 상세 탭(Tab) 활용 방식:</a:t>
+              <a:defRPr sz="1200">
+                <a:solidFill>
+                  <a:srgbClr val="FFFFFF"/>
+                </a:solidFill>
+                <a:latin typeface="Malgun Gothic"/>
+              </a:defRPr>
+            </a:pPr>
+            <a:r>
+              <a:t>• 제출일 및 심사 시행 일자 메타 바를 통한 일정 확인</a:t>
             </a:r>
           </a:p>
           <a:p>
@@ -4629,15 +4637,15 @@
               <a:spcAft>
                 <a:spcPts val="600"/>
               </a:spcAft>
-              <a:defRPr sz="1100">
-                <a:solidFill>
-                  <a:srgbClr val="94A3B8"/>
-                </a:solidFill>
-                <a:latin typeface="Noto Sans KR"/>
-              </a:defRPr>
-            </a:pPr>
-            <a:r>
-              <a:t>• 보고서 요약 (Tab 1): 과제 제안 배경 및 Pain Point 극복 방안, 6S 요약 검토 (문제-해결-기대효과의 논리적 일관성 체크)</a:t>
+              <a:defRPr sz="1200">
+                <a:solidFill>
+                  <a:srgbClr val="FFFFFF"/>
+                </a:solidFill>
+                <a:latin typeface="Malgun Gothic"/>
+              </a:defRPr>
+            </a:pPr>
+            <a:r>
+              <a:t>• 소스코드 구조 (Tab 2): 디렉토리 트리 구조, 라이브러리 구성 및 API Key 노출 방지 대책 검토</a:t>
             </a:r>
           </a:p>
           <a:p>
@@ -4645,65 +4653,32 @@
               <a:spcAft>
                 <a:spcPts val="600"/>
               </a:spcAft>
-              <a:defRPr sz="1100">
-                <a:solidFill>
-                  <a:srgbClr val="94A3B8"/>
-                </a:solidFill>
-                <a:latin typeface="Noto Sans KR"/>
-              </a:defRPr>
-            </a:pPr>
-            <a:r>
-              <a:t>• 소스코드 구조 (Tab 2): 디렉토리 트리 구조, 라이브러리 구성 및 API Key 노출 방지 대책 검토</a:t>
-            </a:r>
-          </a:p>
-          <a:p>
+              <a:defRPr sz="1200">
+                <a:solidFill>
+                  <a:srgbClr val="FFFFFF"/>
+                </a:solidFill>
+                <a:latin typeface="Malgun Gothic"/>
+              </a:defRPr>
+            </a:pPr>
+            <a:r>
+              <a:t>• 시연·링크 (Tab 3): 결과 보고서 PDF 원본, Git 저장소 주소, 구동 동영상 링크 유효성 검증</a:t>
+            </a:r>
+          </a:p>
+          <a:p>
+            <a:br/>
             <a:pPr>
               <a:spcAft>
                 <a:spcPts val="600"/>
               </a:spcAft>
-              <a:defRPr sz="1100">
-                <a:solidFill>
-                  <a:srgbClr val="94A3B8"/>
-                </a:solidFill>
-                <a:latin typeface="Noto Sans KR"/>
-              </a:defRPr>
-            </a:pPr>
-            <a:r>
-              <a:t>• 시연·링크 (Tab 3): 결과 보고서 PDF 원본, Git 저장소 주소, 구동 동영상 링크 유효성 검증</a:t>
-            </a:r>
-          </a:p>
-          <a:p>
-            <a:br/>
-            <a:pPr>
-              <a:spcAft>
-                <a:spcPts val="600"/>
-              </a:spcAft>
-              <a:defRPr sz="1100">
-                <a:solidFill>
-                  <a:srgbClr val="94A3B8"/>
-                </a:solidFill>
-                <a:latin typeface="Noto Sans KR"/>
+              <a:defRPr sz="1200" b="1">
+                <a:solidFill>
+                  <a:srgbClr val="FACC15"/>
+                </a:solidFill>
+                <a:latin typeface="Malgun Gothic"/>
               </a:defRPr>
             </a:pPr>
             <a:r>
               <a:t>💡 소스코드 및 구동 영상 링크가 손상되었을 경우 정성 의견란에 구체적인 비작동 사유를 기재해 주세요.</a:t>
-            </a:r>
-          </a:p>
-          <a:p>
-            <a:br/>
-            <a:pPr>
-              <a:spcAft>
-                <a:spcPts val="600"/>
-              </a:spcAft>
-              <a:defRPr sz="1100">
-                <a:solidFill>
-                  <a:srgbClr val="94A3B8"/>
-                </a:solidFill>
-                <a:latin typeface="Noto Sans KR"/>
-              </a:defRPr>
-            </a:pPr>
-            <a:r>
-              <a:t>오른쪽 화면: 실제 심사 작업장 좌측의 3단 증빙 자료 리더(Reader)</a:t>
             </a:r>
           </a:p>
         </p:txBody>
@@ -4716,18 +4691,18 @@
         </p:nvSpPr>
         <p:spPr>
           <a:xfrm>
-            <a:off x="6400800" y="1828800"/>
-            <a:ext cx="5212080" cy="4114800"/>
+            <a:off x="6309360" y="1645920"/>
+            <a:ext cx="5303520" cy="4389120"/>
           </a:xfrm>
           <a:prstGeom prst="roundRect">
             <a:avLst/>
           </a:prstGeom>
           <a:solidFill>
-            <a:srgbClr val="1E293B"/>
+            <a:srgbClr val="111C38"/>
           </a:solidFill>
-          <a:ln w="19050">
+          <a:ln w="12700">
             <a:solidFill>
-              <a:srgbClr val="6366F1"/>
+              <a:srgbClr val="1E293B"/>
             </a:solidFill>
           </a:ln>
         </p:spPr>
@@ -4755,7 +4730,7 @@
       </p:sp>
       <p:pic>
         <p:nvPicPr>
-          <p:cNvPr id="10" name="Picture 9" descr="aica_evaluation_workspace_mockup_1784167999282.png"/>
+          <p:cNvPr id="10" name="Picture 9" descr="page_12.png"/>
           <p:cNvPicPr>
             <a:picLocks noChangeAspect="1"/>
           </p:cNvPicPr>
@@ -4769,8 +4744,8 @@
         </p:blipFill>
         <p:spPr>
           <a:xfrm>
-            <a:off x="7086600" y="1965960"/>
-            <a:ext cx="3840480" cy="3840480"/>
+            <a:off x="6400800" y="1737360"/>
+            <a:ext cx="5120640" cy="4206240"/>
           </a:xfrm>
           <a:prstGeom prst="rect">
             <a:avLst/>
@@ -4791,7 +4766,7 @@
     <p:bg>
       <p:bgPr>
         <a:solidFill>
-          <a:srgbClr val="0F172A"/>
+          <a:srgbClr val="0B1329"/>
         </a:solidFill>
         <a:effectLst/>
       </p:bgPr>
@@ -4812,7 +4787,7 @@
         <p:spPr>
           <a:xfrm>
             <a:off x="548640" y="365760"/>
-            <a:ext cx="7315200" cy="365760"/>
+            <a:ext cx="7315200" cy="320040"/>
           </a:xfrm>
           <a:prstGeom prst="rect">
             <a:avLst/>
@@ -4820,17 +4795,17 @@
           <a:noFill/>
         </p:spPr>
         <p:txBody>
-          <a:bodyPr wrap="none">
+          <a:bodyPr wrap="square">
             <a:spAutoFit/>
           </a:bodyPr>
           <a:lstStyle/>
           <a:p>
             <a:pPr>
-              <a:defRPr sz="1100" b="1">
+              <a:defRPr sz="1300" b="1">
                 <a:solidFill>
                   <a:srgbClr val="38BDF8"/>
                 </a:solidFill>
-                <a:latin typeface="Noto Sans KR"/>
+                <a:latin typeface="Malgun Gothic"/>
               </a:defRPr>
             </a:pPr>
             <a:r>
@@ -4848,7 +4823,7 @@
         <p:spPr>
           <a:xfrm>
             <a:off x="548640" y="640080"/>
-            <a:ext cx="10058400" cy="731520"/>
+            <a:ext cx="10058400" cy="640080"/>
           </a:xfrm>
           <a:prstGeom prst="rect">
             <a:avLst/>
@@ -4856,21 +4831,21 @@
           <a:noFill/>
         </p:spPr>
         <p:txBody>
-          <a:bodyPr wrap="none">
+          <a:bodyPr wrap="square">
             <a:spAutoFit/>
           </a:bodyPr>
           <a:lstStyle/>
           <a:p>
             <a:pPr>
-              <a:defRPr sz="2600" b="1">
+              <a:defRPr sz="2400" b="1">
                 <a:solidFill>
                   <a:srgbClr val="FFFFFF"/>
                 </a:solidFill>
-                <a:latin typeface="Noto Sans KR"/>
-              </a:defRPr>
-            </a:pPr>
-            <a:r>
-              <a:t>공통 보안 체크리스트는 모든 심사의 선행 조건입니다</a:t>
+                <a:latin typeface="Malgun Gothic"/>
+              </a:defRPr>
+            </a:pPr>
+            <a:r>
+              <a:t>채점 전에 제출물의 연결성과 재현 가능성을 봅니다</a:t>
             </a:r>
           </a:p>
         </p:txBody>
@@ -4890,10 +4865,12 @@
             <a:avLst/>
           </a:prstGeom>
           <a:solidFill>
-            <a:srgbClr val="334155"/>
+            <a:srgbClr val="1E293B"/>
           </a:solidFill>
           <a:ln>
-            <a:noFill/>
+            <a:solidFill>
+              <a:srgbClr val="1E293B"/>
+            </a:solidFill>
           </a:ln>
         </p:spPr>
         <p:style>
@@ -4941,15 +4918,15 @@
           <a:lstStyle/>
           <a:p>
             <a:pPr>
-              <a:defRPr sz="900">
+              <a:defRPr sz="1000">
                 <a:solidFill>
                   <a:srgbClr val="94A3B8"/>
                 </a:solidFill>
-                <a:latin typeface="Noto Sans KR"/>
-              </a:defRPr>
-            </a:pPr>
-            <a:r>
-              <a:t>AICA 자격심사 시스템 사용자 매뉴얼 · Web App Dark Theme</a:t>
+                <a:latin typeface="Malgun Gothic"/>
+              </a:defRPr>
+            </a:pPr>
+            <a:r>
+              <a:t>AICA 자격심사 시스템 사용자 매뉴얼 · 경영혁신실</a:t>
             </a:r>
           </a:p>
         </p:txBody>
@@ -4977,15 +4954,15 @@
           <a:lstStyle/>
           <a:p>
             <a:pPr algn="r">
-              <a:defRPr sz="900">
+              <a:defRPr sz="1000">
                 <a:solidFill>
                   <a:srgbClr val="94A3B8"/>
                 </a:solidFill>
-                <a:latin typeface="Noto Sans KR"/>
-              </a:defRPr>
-            </a:pPr>
-            <a:r>
-              <a:t>12</a:t>
+                <a:latin typeface="Malgun Gothic"/>
+              </a:defRPr>
+            </a:pPr>
+            <a:r>
+              <a:t>13</a:t>
             </a:r>
           </a:p>
         </p:txBody>
@@ -4998,18 +4975,18 @@
         </p:nvSpPr>
         <p:spPr>
           <a:xfrm>
-            <a:off x="548640" y="1828800"/>
-            <a:ext cx="5486400" cy="4114800"/>
+            <a:off x="548640" y="1645920"/>
+            <a:ext cx="5486400" cy="4389120"/>
           </a:xfrm>
           <a:prstGeom prst="roundRect">
             <a:avLst/>
           </a:prstGeom>
           <a:solidFill>
-            <a:srgbClr val="1E293B"/>
+            <a:srgbClr val="111C38"/>
           </a:solidFill>
           <a:ln w="12700">
             <a:solidFill>
-              <a:srgbClr val="334155"/>
+              <a:srgbClr val="1E293B"/>
             </a:solidFill>
           </a:ln>
         </p:spPr>
@@ -5043,8 +5020,8 @@
         </p:nvSpPr>
         <p:spPr>
           <a:xfrm>
-            <a:off x="731520" y="2011680"/>
-            <a:ext cx="5120640" cy="3749040"/>
+            <a:off x="731520" y="1828800"/>
+            <a:ext cx="5120640" cy="4023360"/>
           </a:xfrm>
           <a:prstGeom prst="rect">
             <a:avLst/>
@@ -5059,17 +5036,49 @@
           <a:p>
             <a:pPr>
               <a:spcAft>
-                <a:spcPts val="1200"/>
-              </a:spcAft>
-              <a:defRPr sz="1500" b="1">
+                <a:spcPts val="1000"/>
+              </a:spcAft>
+              <a:defRPr sz="1600" b="1">
+                <a:solidFill>
+                  <a:srgbClr val="60A5FA"/>
+                </a:solidFill>
+                <a:latin typeface="Malgun Gothic"/>
+              </a:defRPr>
+            </a:pPr>
+            <a:r>
+              <a:t>3대 증빙자료 다차원 교차 검증 (탭 2: 소스코드 구조)</a:t>
+            </a:r>
+          </a:p>
+          <a:p>
+            <a:pPr>
+              <a:spcAft>
+                <a:spcPts val="600"/>
+              </a:spcAft>
+              <a:defRPr sz="1200">
+                <a:solidFill>
+                  <a:srgbClr val="E2E8F0"/>
+                </a:solidFill>
+                <a:latin typeface="Malgun Gothic"/>
+              </a:defRPr>
+            </a:pPr>
+            <a:r>
+              <a:t>소스코드 아키텍처 및 보안 검토:</a:t>
+            </a:r>
+          </a:p>
+          <a:p>
+            <a:pPr>
+              <a:spcAft>
+                <a:spcPts val="600"/>
+              </a:spcAft>
+              <a:defRPr sz="1200">
                 <a:solidFill>
                   <a:srgbClr val="FFFFFF"/>
                 </a:solidFill>
-                <a:latin typeface="Noto Sans KR"/>
-              </a:defRPr>
-            </a:pPr>
-            <a:r>
-              <a:t>5대 공통 보안성 자가진단 규칙</a:t>
+                <a:latin typeface="Malgun Gothic"/>
+              </a:defRPr>
+            </a:pPr>
+            <a:r>
+              <a:t>• 제출 소스코드 디렉토리 트리를 시각적으로 확인</a:t>
             </a:r>
           </a:p>
           <a:p>
@@ -5077,15 +5086,15 @@
               <a:spcAft>
                 <a:spcPts val="600"/>
               </a:spcAft>
-              <a:defRPr sz="1100">
-                <a:solidFill>
-                  <a:srgbClr val="94A3B8"/>
-                </a:solidFill>
-                <a:latin typeface="Noto Sans KR"/>
-              </a:defRPr>
-            </a:pPr>
-            <a:r>
-              <a:t>모든 심사의 최우선 선행 체크리스트:</a:t>
+              <a:defRPr sz="1200">
+                <a:solidFill>
+                  <a:srgbClr val="FFFFFF"/>
+                </a:solidFill>
+                <a:latin typeface="Malgun Gothic"/>
+              </a:defRPr>
+            </a:pPr>
+            <a:r>
+              <a:t>• `requirements.txt` 또는 `package-lock.json` 등 패키지 잠금 내역 및 `env.example` 구성도 검토</a:t>
             </a:r>
           </a:p>
           <a:p>
@@ -5093,15 +5102,15 @@
               <a:spcAft>
                 <a:spcPts val="600"/>
               </a:spcAft>
-              <a:defRPr sz="1100">
-                <a:solidFill>
-                  <a:srgbClr val="94A3B8"/>
-                </a:solidFill>
-                <a:latin typeface="Noto Sans KR"/>
-              </a:defRPr>
-            </a:pPr>
-            <a:r>
-              <a:t>• 1. 개인정보(PII): 이름, 메일주소, 연락처 등 완벽 마스킹 여부</a:t>
+              <a:defRPr sz="1200">
+                <a:solidFill>
+                  <a:srgbClr val="FFFFFF"/>
+                </a:solidFill>
+                <a:latin typeface="Malgun Gothic"/>
+              </a:defRPr>
+            </a:pPr>
+            <a:r>
+              <a:t>• 하드코딩된 API Key, DB 비밀번호, 접근 토큰 포함 여부 집중 조명</a:t>
             </a:r>
           </a:p>
           <a:p>
@@ -5109,113 +5118,15 @@
               <a:spcAft>
                 <a:spcPts val="600"/>
               </a:spcAft>
-              <a:defRPr sz="1100">
-                <a:solidFill>
-                  <a:srgbClr val="94A3B8"/>
-                </a:solidFill>
-                <a:latin typeface="Noto Sans KR"/>
-              </a:defRPr>
-            </a:pPr>
-            <a:r>
-              <a:t>• 2. 기밀 정보 익명화: 계약 금액, 단가, 마진율 등 기밀 제거 여부</a:t>
-            </a:r>
-          </a:p>
-          <a:p>
-            <a:pPr>
-              <a:spcAft>
-                <a:spcPts val="600"/>
-              </a:spcAft>
-              <a:defRPr sz="1100">
-                <a:solidFill>
-                  <a:srgbClr val="94A3B8"/>
-                </a:solidFill>
-                <a:latin typeface="Noto Sans KR"/>
-              </a:defRPr>
-            </a:pPr>
-            <a:r>
-              <a:t>• 3. 자격증명 제거: 소스코드 내 API Key, ID/PW 제거 여부</a:t>
-            </a:r>
-          </a:p>
-          <a:p>
-            <a:pPr>
-              <a:spcAft>
-                <a:spcPts val="600"/>
-              </a:spcAft>
-              <a:defRPr sz="1100">
-                <a:solidFill>
-                  <a:srgbClr val="94A3B8"/>
-                </a:solidFill>
-                <a:latin typeface="Noto Sans KR"/>
-              </a:defRPr>
-            </a:pPr>
-            <a:r>
-              <a:t>• 4. 보안 가이드 준수: 보안실 배포 규정 및 자가점검 여부</a:t>
-            </a:r>
-          </a:p>
-          <a:p>
-            <a:pPr>
-              <a:spcAft>
-                <a:spcPts val="600"/>
-              </a:spcAft>
-              <a:defRPr sz="1100">
-                <a:solidFill>
-                  <a:srgbClr val="94A3B8"/>
-                </a:solidFill>
-                <a:latin typeface="Noto Sans KR"/>
-              </a:defRPr>
-            </a:pPr>
-            <a:r>
-              <a:t>• 5. 유출 위반 차단: 타 부서 및 망 분리 활용 시 유출 위험 제거 여부</a:t>
-            </a:r>
-          </a:p>
-          <a:p>
-            <a:br/>
-            <a:pPr>
-              <a:spcAft>
-                <a:spcPts val="600"/>
-              </a:spcAft>
-              <a:defRPr sz="1100">
-                <a:solidFill>
-                  <a:srgbClr val="94A3B8"/>
-                </a:solidFill>
-                <a:latin typeface="Noto Sans KR"/>
-              </a:defRPr>
-            </a:pPr>
-            <a:r>
-              <a:t>⚠️ Red Flag 경고 연동:</a:t>
-            </a:r>
-          </a:p>
-          <a:p>
-            <a:pPr>
-              <a:spcAft>
-                <a:spcPts val="600"/>
-              </a:spcAft>
-              <a:defRPr sz="1100">
-                <a:solidFill>
-                  <a:srgbClr val="94A3B8"/>
-                </a:solidFill>
-                <a:latin typeface="Noto Sans KR"/>
-              </a:defRPr>
-            </a:pPr>
-            <a:r>
-              <a:t>• 하나라도 미준수 시 '보안 주의 알림'이 대시보드에 연동되며, 중대한 자격증명 노출은 즉시 불합격 처리 대상이 됩니다.</a:t>
-            </a:r>
-          </a:p>
-          <a:p>
-            <a:br/>
-            <a:pPr>
-              <a:spcAft>
-                <a:spcPts val="600"/>
-              </a:spcAft>
-              <a:defRPr sz="1100">
-                <a:solidFill>
-                  <a:srgbClr val="94A3B8"/>
-                </a:solidFill>
-                <a:latin typeface="Noto Sans KR"/>
-              </a:defRPr>
-            </a:pPr>
-            <a:r>
-              <a:t>오른쪽 화면: 실제 채점 페이지 좌측 하단 보안 체크리스트 영역</a:t>
+              <a:defRPr sz="1200">
+                <a:solidFill>
+                  <a:srgbClr val="FFFFFF"/>
+                </a:solidFill>
+                <a:latin typeface="Malgun Gothic"/>
+              </a:defRPr>
+            </a:pPr>
+            <a:r>
+              <a:t>• PII 정규식 필터 및 예외 처리 로직 구현 확인</a:t>
             </a:r>
           </a:p>
         </p:txBody>
@@ -5228,18 +5139,18 @@
         </p:nvSpPr>
         <p:spPr>
           <a:xfrm>
-            <a:off x="6400800" y="1828800"/>
-            <a:ext cx="5212080" cy="4114800"/>
+            <a:off x="6309360" y="1645920"/>
+            <a:ext cx="5303520" cy="4389120"/>
           </a:xfrm>
           <a:prstGeom prst="roundRect">
             <a:avLst/>
           </a:prstGeom>
           <a:solidFill>
-            <a:srgbClr val="1E293B"/>
+            <a:srgbClr val="111C38"/>
           </a:solidFill>
-          <a:ln w="19050">
+          <a:ln w="12700">
             <a:solidFill>
-              <a:srgbClr val="6366F1"/>
+              <a:srgbClr val="1E293B"/>
             </a:solidFill>
           </a:ln>
         </p:spPr>
@@ -5267,7 +5178,7 @@
       </p:sp>
       <p:pic>
         <p:nvPicPr>
-          <p:cNvPr id="10" name="Picture 9" descr="media__1784176902473.png"/>
+          <p:cNvPr id="10" name="Picture 9" descr="page_13.png"/>
           <p:cNvPicPr>
             <a:picLocks noChangeAspect="1"/>
           </p:cNvPicPr>
@@ -5281,8 +5192,8 @@
         </p:blipFill>
         <p:spPr>
           <a:xfrm>
-            <a:off x="6814049" y="1965960"/>
-            <a:ext cx="4385580" cy="3840480"/>
+            <a:off x="6400800" y="1737360"/>
+            <a:ext cx="5120640" cy="4206240"/>
           </a:xfrm>
           <a:prstGeom prst="rect">
             <a:avLst/>
@@ -5303,7 +5214,7 @@
     <p:bg>
       <p:bgPr>
         <a:solidFill>
-          <a:srgbClr val="0F172A"/>
+          <a:srgbClr val="0B1329"/>
         </a:solidFill>
         <a:effectLst/>
       </p:bgPr>
@@ -5324,7 +5235,7 @@
         <p:spPr>
           <a:xfrm>
             <a:off x="548640" y="365760"/>
-            <a:ext cx="7315200" cy="365760"/>
+            <a:ext cx="7315200" cy="320040"/>
           </a:xfrm>
           <a:prstGeom prst="rect">
             <a:avLst/>
@@ -5332,17 +5243,17 @@
           <a:noFill/>
         </p:spPr>
         <p:txBody>
-          <a:bodyPr wrap="none">
+          <a:bodyPr wrap="square">
             <a:spAutoFit/>
           </a:bodyPr>
           <a:lstStyle/>
           <a:p>
             <a:pPr>
-              <a:defRPr sz="1100" b="1">
+              <a:defRPr sz="1300" b="1">
                 <a:solidFill>
                   <a:srgbClr val="38BDF8"/>
                 </a:solidFill>
-                <a:latin typeface="Noto Sans KR"/>
+                <a:latin typeface="Malgun Gothic"/>
               </a:defRPr>
             </a:pPr>
             <a:r>
@@ -5360,7 +5271,7 @@
         <p:spPr>
           <a:xfrm>
             <a:off x="548640" y="640080"/>
-            <a:ext cx="10058400" cy="731520"/>
+            <a:ext cx="10058400" cy="640080"/>
           </a:xfrm>
           <a:prstGeom prst="rect">
             <a:avLst/>
@@ -5368,21 +5279,21 @@
           <a:noFill/>
         </p:spPr>
         <p:txBody>
-          <a:bodyPr wrap="none">
+          <a:bodyPr wrap="square">
             <a:spAutoFit/>
           </a:bodyPr>
           <a:lstStyle/>
           <a:p>
             <a:pPr>
-              <a:defRPr sz="2600" b="1">
+              <a:defRPr sz="2400" b="1">
                 <a:solidFill>
                   <a:srgbClr val="FFFFFF"/>
                 </a:solidFill>
-                <a:latin typeface="Noto Sans KR"/>
-              </a:defRPr>
-            </a:pPr>
-            <a:r>
-              <a:t>Level에 따라 채점 축과 가중치가 달라집니다</a:t>
+                <a:latin typeface="Malgun Gothic"/>
+              </a:defRPr>
+            </a:pPr>
+            <a:r>
+              <a:t>채점 전에 제출물의 연결성과 재현 가능성을 봅니다</a:t>
             </a:r>
           </a:p>
         </p:txBody>
@@ -5402,10 +5313,12 @@
             <a:avLst/>
           </a:prstGeom>
           <a:solidFill>
-            <a:srgbClr val="334155"/>
+            <a:srgbClr val="1E293B"/>
           </a:solidFill>
           <a:ln>
-            <a:noFill/>
+            <a:solidFill>
+              <a:srgbClr val="1E293B"/>
+            </a:solidFill>
           </a:ln>
         </p:spPr>
         <p:style>
@@ -5453,15 +5366,15 @@
           <a:lstStyle/>
           <a:p>
             <a:pPr>
-              <a:defRPr sz="900">
+              <a:defRPr sz="1000">
                 <a:solidFill>
                   <a:srgbClr val="94A3B8"/>
                 </a:solidFill>
-                <a:latin typeface="Noto Sans KR"/>
-              </a:defRPr>
-            </a:pPr>
-            <a:r>
-              <a:t>AICA 자격심사 시스템 사용자 매뉴얼 · Web App Dark Theme</a:t>
+                <a:latin typeface="Malgun Gothic"/>
+              </a:defRPr>
+            </a:pPr>
+            <a:r>
+              <a:t>AICA 자격심사 시스템 사용자 매뉴얼 · 경영혁신실</a:t>
             </a:r>
           </a:p>
         </p:txBody>
@@ -5489,15 +5402,15 @@
           <a:lstStyle/>
           <a:p>
             <a:pPr algn="r">
-              <a:defRPr sz="900">
+              <a:defRPr sz="1000">
                 <a:solidFill>
                   <a:srgbClr val="94A3B8"/>
                 </a:solidFill>
-                <a:latin typeface="Noto Sans KR"/>
-              </a:defRPr>
-            </a:pPr>
-            <a:r>
-              <a:t>13</a:t>
+                <a:latin typeface="Malgun Gothic"/>
+              </a:defRPr>
+            </a:pPr>
+            <a:r>
+              <a:t>14</a:t>
             </a:r>
           </a:p>
         </p:txBody>
@@ -5510,18 +5423,18 @@
         </p:nvSpPr>
         <p:spPr>
           <a:xfrm>
-            <a:off x="548640" y="1828800"/>
-            <a:ext cx="5486400" cy="4114800"/>
+            <a:off x="548640" y="1645920"/>
+            <a:ext cx="5486400" cy="4389120"/>
           </a:xfrm>
           <a:prstGeom prst="roundRect">
             <a:avLst/>
           </a:prstGeom>
           <a:solidFill>
-            <a:srgbClr val="1E293B"/>
+            <a:srgbClr val="111C38"/>
           </a:solidFill>
           <a:ln w="12700">
             <a:solidFill>
-              <a:srgbClr val="334155"/>
+              <a:srgbClr val="1E293B"/>
             </a:solidFill>
           </a:ln>
         </p:spPr>
@@ -5555,8 +5468,8 @@
         </p:nvSpPr>
         <p:spPr>
           <a:xfrm>
-            <a:off x="731520" y="2011680"/>
-            <a:ext cx="5120640" cy="3749040"/>
+            <a:off x="731520" y="1828800"/>
+            <a:ext cx="5120640" cy="4023360"/>
           </a:xfrm>
           <a:prstGeom prst="rect">
             <a:avLst/>
@@ -5571,17 +5484,49 @@
           <a:p>
             <a:pPr>
               <a:spcAft>
-                <a:spcPts val="1200"/>
-              </a:spcAft>
-              <a:defRPr sz="1500" b="1">
+                <a:spcPts val="1000"/>
+              </a:spcAft>
+              <a:defRPr sz="1600" b="1">
+                <a:solidFill>
+                  <a:srgbClr val="60A5FA"/>
+                </a:solidFill>
+                <a:latin typeface="Malgun Gothic"/>
+              </a:defRPr>
+            </a:pPr>
+            <a:r>
+              <a:t>3대 증빙자료 다차원 교차 검증 (탭 3: 시연 &amp; 링크)</a:t>
+            </a:r>
+          </a:p>
+          <a:p>
+            <a:pPr>
+              <a:spcAft>
+                <a:spcPts val="600"/>
+              </a:spcAft>
+              <a:defRPr sz="1200">
+                <a:solidFill>
+                  <a:srgbClr val="E2E8F0"/>
+                </a:solidFill>
+                <a:latin typeface="Malgun Gothic"/>
+              </a:defRPr>
+            </a:pPr>
+            <a:r>
+              <a:t>시연 동영상 및 외부 링크 검증:</a:t>
+            </a:r>
+          </a:p>
+          <a:p>
+            <a:pPr>
+              <a:spcAft>
+                <a:spcPts val="600"/>
+              </a:spcAft>
+              <a:defRPr sz="1200">
                 <a:solidFill>
                   <a:srgbClr val="FFFFFF"/>
                 </a:solidFill>
-                <a:latin typeface="Noto Sans KR"/>
-              </a:defRPr>
-            </a:pPr>
-            <a:r>
-              <a:t>심사 자격 레벨별 가중치 및 배점 척도</a:t>
+                <a:latin typeface="Malgun Gothic"/>
+              </a:defRPr>
+            </a:pPr>
+            <a:r>
+              <a:t>• 사내 데모 샌드박스 동영상 모의 플레이어 구동</a:t>
             </a:r>
           </a:p>
           <a:p>
@@ -5589,15 +5534,15 @@
               <a:spcAft>
                 <a:spcPts val="600"/>
               </a:spcAft>
-              <a:defRPr sz="1100">
-                <a:solidFill>
-                  <a:srgbClr val="94A3B8"/>
-                </a:solidFill>
-                <a:latin typeface="Noto Sans KR"/>
-              </a:defRPr>
-            </a:pPr>
-            <a:r>
-              <a:t>자격 등급별 평가 주안점 및 비율:</a:t>
+              <a:defRPr sz="1200">
+                <a:solidFill>
+                  <a:srgbClr val="FFFFFF"/>
+                </a:solidFill>
+                <a:latin typeface="Malgun Gothic"/>
+              </a:defRPr>
+            </a:pPr>
+            <a:r>
+              <a:t>• 과제 증빙용 하이퍼링크 3종 검증:</a:t>
             </a:r>
           </a:p>
           <a:p>
@@ -5605,15 +5550,15 @@
               <a:spcAft>
                 <a:spcPts val="600"/>
               </a:spcAft>
-              <a:defRPr sz="1100">
-                <a:solidFill>
-                  <a:srgbClr val="94A3B8"/>
-                </a:solidFill>
-                <a:latin typeface="Noto Sans KR"/>
-              </a:defRPr>
-            </a:pPr>
-            <a:r>
-              <a:t>• Level 3 (AI Champion): 현업 적용성 및 기여 효과 검증</a:t>
+              <a:defRPr sz="1200">
+                <a:solidFill>
+                  <a:srgbClr val="E2E8F0"/>
+                </a:solidFill>
+                <a:latin typeface="Malgun Gothic"/>
+              </a:defRPr>
+            </a:pPr>
+            <a:r>
+              <a:t>  - 결과 보고서 원본 (그룹웨어 PDF)</a:t>
             </a:r>
           </a:p>
           <a:p>
@@ -5621,15 +5566,15 @@
               <a:spcAft>
                 <a:spcPts val="600"/>
               </a:spcAft>
-              <a:defRPr sz="1100">
-                <a:solidFill>
-                  <a:srgbClr val="94A3B8"/>
-                </a:solidFill>
-                <a:latin typeface="Noto Sans KR"/>
-              </a:defRPr>
-            </a:pPr>
-            <a:r>
-              <a:t>   - 문제 해결 난이도 (30%)</a:t>
+              <a:defRPr sz="1200">
+                <a:solidFill>
+                  <a:srgbClr val="E2E8F0"/>
+                </a:solidFill>
+                <a:latin typeface="Malgun Gothic"/>
+              </a:defRPr>
+            </a:pPr>
+            <a:r>
+              <a:t>  - 코드 저장소 (GitLab Repository)</a:t>
             </a:r>
           </a:p>
           <a:p>
@@ -5637,112 +5582,15 @@
               <a:spcAft>
                 <a:spcPts val="600"/>
               </a:spcAft>
-              <a:defRPr sz="1100">
-                <a:solidFill>
-                  <a:srgbClr val="94A3B8"/>
-                </a:solidFill>
-                <a:latin typeface="Noto Sans KR"/>
-              </a:defRPr>
-            </a:pPr>
-            <a:r>
-              <a:t>   - 구현 완성도 (40%)</a:t>
-            </a:r>
-          </a:p>
-          <a:p>
-            <a:pPr>
-              <a:spcAft>
-                <a:spcPts val="600"/>
-              </a:spcAft>
-              <a:defRPr sz="1100">
-                <a:solidFill>
-                  <a:srgbClr val="94A3B8"/>
-                </a:solidFill>
-                <a:latin typeface="Noto Sans KR"/>
-              </a:defRPr>
-            </a:pPr>
-            <a:r>
-              <a:t>   - 확산 및 자산화 (30%)</a:t>
-            </a:r>
-          </a:p>
-          <a:p>
-            <a:pPr>
-              <a:spcAft>
-                <a:spcPts val="600"/>
-              </a:spcAft>
-              <a:defRPr sz="1100">
-                <a:solidFill>
-                  <a:srgbClr val="94A3B8"/>
-                </a:solidFill>
-                <a:latin typeface="Noto Sans KR"/>
-              </a:defRPr>
-            </a:pPr>
-            <a:r>
-              <a:t>• Level 4 (AI Specialist): 심화 기술력 및 보안 통제 깊이 검증</a:t>
-            </a:r>
-          </a:p>
-          <a:p>
-            <a:pPr>
-              <a:spcAft>
-                <a:spcPts val="600"/>
-              </a:spcAft>
-              <a:defRPr sz="1100">
-                <a:solidFill>
-                  <a:srgbClr val="94A3B8"/>
-                </a:solidFill>
-                <a:latin typeface="Noto Sans KR"/>
-              </a:defRPr>
-            </a:pPr>
-            <a:r>
-              <a:t>   - 기술적 구현력 (40%)</a:t>
-            </a:r>
-          </a:p>
-          <a:p>
-            <a:pPr>
-              <a:spcAft>
-                <a:spcPts val="600"/>
-              </a:spcAft>
-              <a:defRPr sz="1100">
-                <a:solidFill>
-                  <a:srgbClr val="94A3B8"/>
-                </a:solidFill>
-                <a:latin typeface="Noto Sans KR"/>
-              </a:defRPr>
-            </a:pPr>
-            <a:r>
-              <a:t>   - 데이터 활용 및 보안성 (30%)</a:t>
-            </a:r>
-          </a:p>
-          <a:p>
-            <a:pPr>
-              <a:spcAft>
-                <a:spcPts val="600"/>
-              </a:spcAft>
-              <a:defRPr sz="1100">
-                <a:solidFill>
-                  <a:srgbClr val="94A3B8"/>
-                </a:solidFill>
-                <a:latin typeface="Noto Sans KR"/>
-              </a:defRPr>
-            </a:pPr>
-            <a:r>
-              <a:t>   - 비즈니스 기여도 (30%)</a:t>
-            </a:r>
-          </a:p>
-          <a:p>
-            <a:br/>
-            <a:pPr>
-              <a:spcAft>
-                <a:spcPts val="600"/>
-              </a:spcAft>
-              <a:defRPr sz="1100">
-                <a:solidFill>
-                  <a:srgbClr val="94A3B8"/>
-                </a:solidFill>
-                <a:latin typeface="Noto Sans KR"/>
-              </a:defRPr>
-            </a:pPr>
-            <a:r>
-              <a:t>오른쪽 화면: 실제 채점 페이지 우측의 루브릭 점수 선택 라디오 영역</a:t>
+              <a:defRPr sz="1200">
+                <a:solidFill>
+                  <a:srgbClr val="E2E8F0"/>
+                </a:solidFill>
+                <a:latin typeface="Malgun Gothic"/>
+              </a:defRPr>
+            </a:pPr>
+            <a:r>
+              <a:t>  - 실제 구동 데모 (사내 Sandbox URL)</a:t>
             </a:r>
           </a:p>
         </p:txBody>
@@ -5755,18 +5603,18 @@
         </p:nvSpPr>
         <p:spPr>
           <a:xfrm>
-            <a:off x="6400800" y="1828800"/>
-            <a:ext cx="5212080" cy="4114800"/>
+            <a:off x="6309360" y="1645920"/>
+            <a:ext cx="5303520" cy="4389120"/>
           </a:xfrm>
           <a:prstGeom prst="roundRect">
             <a:avLst/>
           </a:prstGeom>
           <a:solidFill>
-            <a:srgbClr val="1E293B"/>
+            <a:srgbClr val="111C38"/>
           </a:solidFill>
-          <a:ln w="19050">
+          <a:ln w="12700">
             <a:solidFill>
-              <a:srgbClr val="6366F1"/>
+              <a:srgbClr val="1E293B"/>
             </a:solidFill>
           </a:ln>
         </p:spPr>
@@ -5794,7 +5642,7 @@
       </p:sp>
       <p:pic>
         <p:nvPicPr>
-          <p:cNvPr id="10" name="Picture 9" descr="media__1784176902473.png"/>
+          <p:cNvPr id="10" name="Picture 9" descr="page_14.png"/>
           <p:cNvPicPr>
             <a:picLocks noChangeAspect="1"/>
           </p:cNvPicPr>
@@ -5808,8 +5656,8 @@
         </p:blipFill>
         <p:spPr>
           <a:xfrm>
-            <a:off x="6814049" y="1965960"/>
-            <a:ext cx="4385580" cy="3840480"/>
+            <a:off x="6400800" y="1737360"/>
+            <a:ext cx="5120640" cy="4206240"/>
           </a:xfrm>
           <a:prstGeom prst="rect">
             <a:avLst/>
@@ -5830,7 +5678,7 @@
     <p:bg>
       <p:bgPr>
         <a:solidFill>
-          <a:srgbClr val="0F172A"/>
+          <a:srgbClr val="0B1329"/>
         </a:solidFill>
         <a:effectLst/>
       </p:bgPr>
@@ -5851,7 +5699,7 @@
         <p:spPr>
           <a:xfrm>
             <a:off x="548640" y="365760"/>
-            <a:ext cx="7315200" cy="365760"/>
+            <a:ext cx="7315200" cy="320040"/>
           </a:xfrm>
           <a:prstGeom prst="rect">
             <a:avLst/>
@@ -5859,17 +5707,17 @@
           <a:noFill/>
         </p:spPr>
         <p:txBody>
-          <a:bodyPr wrap="none">
+          <a:bodyPr wrap="square">
             <a:spAutoFit/>
           </a:bodyPr>
           <a:lstStyle/>
           <a:p>
             <a:pPr>
-              <a:defRPr sz="1100" b="1">
+              <a:defRPr sz="1300" b="1">
                 <a:solidFill>
                   <a:srgbClr val="38BDF8"/>
                 </a:solidFill>
-                <a:latin typeface="Noto Sans KR"/>
+                <a:latin typeface="Malgun Gothic"/>
               </a:defRPr>
             </a:pPr>
             <a:r>
@@ -5887,7 +5735,7 @@
         <p:spPr>
           <a:xfrm>
             <a:off x="548640" y="640080"/>
-            <a:ext cx="10058400" cy="731520"/>
+            <a:ext cx="10058400" cy="640080"/>
           </a:xfrm>
           <a:prstGeom prst="rect">
             <a:avLst/>
@@ -5895,21 +5743,21 @@
           <a:noFill/>
         </p:spPr>
         <p:txBody>
-          <a:bodyPr wrap="none">
+          <a:bodyPr wrap="square">
             <a:spAutoFit/>
           </a:bodyPr>
           <a:lstStyle/>
           <a:p>
             <a:pPr>
-              <a:defRPr sz="2600" b="1">
+              <a:defRPr sz="2400" b="1">
                 <a:solidFill>
                   <a:srgbClr val="FFFFFF"/>
                 </a:solidFill>
-                <a:latin typeface="Noto Sans KR"/>
-              </a:defRPr>
-            </a:pPr>
-            <a:r>
-              <a:t>점수와 의견은 반드시 같은 근거를 가리켜야 합니다</a:t>
+                <a:latin typeface="Malgun Gothic"/>
+              </a:defRPr>
+            </a:pPr>
+            <a:r>
+              <a:t>공통 보안 체크리스트는 모든 심사의 선행 조건입니다</a:t>
             </a:r>
           </a:p>
         </p:txBody>
@@ -5929,10 +5777,12 @@
             <a:avLst/>
           </a:prstGeom>
           <a:solidFill>
-            <a:srgbClr val="334155"/>
+            <a:srgbClr val="1E293B"/>
           </a:solidFill>
           <a:ln>
-            <a:noFill/>
+            <a:solidFill>
+              <a:srgbClr val="1E293B"/>
+            </a:solidFill>
           </a:ln>
         </p:spPr>
         <p:style>
@@ -5980,15 +5830,15 @@
           <a:lstStyle/>
           <a:p>
             <a:pPr>
-              <a:defRPr sz="900">
+              <a:defRPr sz="1000">
                 <a:solidFill>
                   <a:srgbClr val="94A3B8"/>
                 </a:solidFill>
-                <a:latin typeface="Noto Sans KR"/>
-              </a:defRPr>
-            </a:pPr>
-            <a:r>
-              <a:t>AICA 자격심사 시스템 사용자 매뉴얼 · Web App Dark Theme</a:t>
+                <a:latin typeface="Malgun Gothic"/>
+              </a:defRPr>
+            </a:pPr>
+            <a:r>
+              <a:t>AICA 자격심사 시스템 사용자 매뉴얼 · 경영혁신실</a:t>
             </a:r>
           </a:p>
         </p:txBody>
@@ -6016,15 +5866,15 @@
           <a:lstStyle/>
           <a:p>
             <a:pPr algn="r">
-              <a:defRPr sz="900">
+              <a:defRPr sz="1000">
                 <a:solidFill>
                   <a:srgbClr val="94A3B8"/>
                 </a:solidFill>
-                <a:latin typeface="Noto Sans KR"/>
-              </a:defRPr>
-            </a:pPr>
-            <a:r>
-              <a:t>14</a:t>
+                <a:latin typeface="Malgun Gothic"/>
+              </a:defRPr>
+            </a:pPr>
+            <a:r>
+              <a:t>15</a:t>
             </a:r>
           </a:p>
         </p:txBody>
@@ -6037,18 +5887,18 @@
         </p:nvSpPr>
         <p:spPr>
           <a:xfrm>
-            <a:off x="548640" y="1828800"/>
-            <a:ext cx="5486400" cy="4114800"/>
+            <a:off x="548640" y="1645920"/>
+            <a:ext cx="5486400" cy="4389120"/>
           </a:xfrm>
           <a:prstGeom prst="roundRect">
             <a:avLst/>
           </a:prstGeom>
           <a:solidFill>
-            <a:srgbClr val="1E293B"/>
+            <a:srgbClr val="111C38"/>
           </a:solidFill>
           <a:ln w="12700">
             <a:solidFill>
-              <a:srgbClr val="334155"/>
+              <a:srgbClr val="1E293B"/>
             </a:solidFill>
           </a:ln>
         </p:spPr>
@@ -6082,8 +5932,8 @@
         </p:nvSpPr>
         <p:spPr>
           <a:xfrm>
-            <a:off x="731520" y="2011680"/>
-            <a:ext cx="5120640" cy="3749040"/>
+            <a:off x="731520" y="1828800"/>
+            <a:ext cx="5120640" cy="4023360"/>
           </a:xfrm>
           <a:prstGeom prst="rect">
             <a:avLst/>
@@ -6098,17 +5948,49 @@
           <a:p>
             <a:pPr>
               <a:spcAft>
-                <a:spcPts val="1200"/>
-              </a:spcAft>
-              <a:defRPr sz="1500" b="1">
+                <a:spcPts val="1000"/>
+              </a:spcAft>
+              <a:defRPr sz="1600" b="1">
+                <a:solidFill>
+                  <a:srgbClr val="60A5FA"/>
+                </a:solidFill>
+                <a:latin typeface="Malgun Gothic"/>
+              </a:defRPr>
+            </a:pPr>
+            <a:r>
+              <a:t>5대 공통 보안성 자가진단 규칙</a:t>
+            </a:r>
+          </a:p>
+          <a:p>
+            <a:pPr>
+              <a:spcAft>
+                <a:spcPts val="600"/>
+              </a:spcAft>
+              <a:defRPr sz="1200">
+                <a:solidFill>
+                  <a:srgbClr val="E2E8F0"/>
+                </a:solidFill>
+                <a:latin typeface="Malgun Gothic"/>
+              </a:defRPr>
+            </a:pPr>
+            <a:r>
+              <a:t>모든 심사의 최우선 선행 체크리스트:</a:t>
+            </a:r>
+          </a:p>
+          <a:p>
+            <a:pPr>
+              <a:spcAft>
+                <a:spcPts val="600"/>
+              </a:spcAft>
+              <a:defRPr sz="1200">
                 <a:solidFill>
                   <a:srgbClr val="FFFFFF"/>
                 </a:solidFill>
-                <a:latin typeface="Noto Sans KR"/>
-              </a:defRPr>
-            </a:pPr>
-            <a:r>
-              <a:t>세부 루브릭 채점 및 질문은행 면접 툴</a:t>
+                <a:latin typeface="Malgun Gothic"/>
+              </a:defRPr>
+            </a:pPr>
+            <a:r>
+              <a:t>• 1. 개인정보(PII): 이름, 메일주소, 연락처 등 완벽 마스킹 여부</a:t>
             </a:r>
           </a:p>
           <a:p>
@@ -6116,15 +5998,15 @@
               <a:spcAft>
                 <a:spcPts val="600"/>
               </a:spcAft>
-              <a:defRPr sz="1100">
-                <a:solidFill>
-                  <a:srgbClr val="94A3B8"/>
-                </a:solidFill>
-                <a:latin typeface="Noto Sans KR"/>
-              </a:defRPr>
-            </a:pPr>
-            <a:r>
-              <a:t>루브릭 세부 채점 가이드:</a:t>
+              <a:defRPr sz="1200">
+                <a:solidFill>
+                  <a:srgbClr val="FFFFFF"/>
+                </a:solidFill>
+                <a:latin typeface="Malgun Gothic"/>
+              </a:defRPr>
+            </a:pPr>
+            <a:r>
+              <a:t>• 2. 기밀 정보 익명화: 계약 금액, 단가, 마진율 등 기밀 제거 여부</a:t>
             </a:r>
           </a:p>
           <a:p>
@@ -6132,15 +6014,15 @@
               <a:spcAft>
                 <a:spcPts val="600"/>
               </a:spcAft>
-              <a:defRPr sz="1100">
-                <a:solidFill>
-                  <a:srgbClr val="94A3B8"/>
-                </a:solidFill>
-                <a:latin typeface="Noto Sans KR"/>
-              </a:defRPr>
-            </a:pPr>
-            <a:r>
-              <a:t>• 5단계 등급 선택: (탁월 100, 양호 85, 보통 70, 미흡 50, 부족 30)</a:t>
+              <a:defRPr sz="1200">
+                <a:solidFill>
+                  <a:srgbClr val="FFFFFF"/>
+                </a:solidFill>
+                <a:latin typeface="Malgun Gothic"/>
+              </a:defRPr>
+            </a:pPr>
+            <a:r>
+              <a:t>• 3. 자격증명 제거: 소스코드 내 API Key, ID/PW 제거 여부</a:t>
             </a:r>
           </a:p>
           <a:p>
@@ -6148,15 +6030,31 @@
               <a:spcAft>
                 <a:spcPts val="600"/>
               </a:spcAft>
-              <a:defRPr sz="1100">
-                <a:solidFill>
-                  <a:srgbClr val="94A3B8"/>
-                </a:solidFill>
-                <a:latin typeface="Noto Sans KR"/>
-              </a:defRPr>
-            </a:pPr>
-            <a:r>
-              <a:t>• 각 항목마다 정량적/정성적 등급 부여 사유 필수 기재</a:t>
+              <a:defRPr sz="1200">
+                <a:solidFill>
+                  <a:srgbClr val="FFFFFF"/>
+                </a:solidFill>
+                <a:latin typeface="Malgun Gothic"/>
+              </a:defRPr>
+            </a:pPr>
+            <a:r>
+              <a:t>• 4. 보안 가이드 준수: 보안실 배포 규정 및 자가점검 여부</a:t>
+            </a:r>
+          </a:p>
+          <a:p>
+            <a:pPr>
+              <a:spcAft>
+                <a:spcPts val="600"/>
+              </a:spcAft>
+              <a:defRPr sz="1200">
+                <a:solidFill>
+                  <a:srgbClr val="FFFFFF"/>
+                </a:solidFill>
+                <a:latin typeface="Malgun Gothic"/>
+              </a:defRPr>
+            </a:pPr>
+            <a:r>
+              <a:t>• 5. 유출 위반 차단: 타 부서 및 망 분리 활용 시 유출 위험 제거 여부</a:t>
             </a:r>
           </a:p>
           <a:p>
@@ -6165,81 +6063,15 @@
               <a:spcAft>
                 <a:spcPts val="600"/>
               </a:spcAft>
-              <a:defRPr sz="1100">
-                <a:solidFill>
-                  <a:srgbClr val="94A3B8"/>
-                </a:solidFill>
-                <a:latin typeface="Noto Sans KR"/>
-              </a:defRPr>
-            </a:pPr>
-            <a:r>
-              <a:t>⚡ Consensus Monitor (의견 불합치 방지):</a:t>
-            </a:r>
-          </a:p>
-          <a:p>
-            <a:pPr>
-              <a:spcAft>
-                <a:spcPts val="600"/>
-              </a:spcAft>
-              <a:defRPr sz="1100">
-                <a:solidFill>
-                  <a:srgbClr val="94A3B8"/>
-                </a:solidFill>
-                <a:latin typeface="Noto Sans KR"/>
-              </a:defRPr>
-            </a:pPr>
-            <a:r>
-              <a:t>• 동시 배정된 위원 간 평가 편차가 15점 이상 벌어질 경우 경고 알림 노출 ➡️ 타 위원 의견 수렴 후 조율 합의문 기재</a:t>
-            </a:r>
-          </a:p>
-          <a:p>
-            <a:br/>
-            <a:pPr>
-              <a:spcAft>
-                <a:spcPts val="600"/>
-              </a:spcAft>
-              <a:defRPr sz="1100">
-                <a:solidFill>
-                  <a:srgbClr val="94A3B8"/>
-                </a:solidFill>
-                <a:latin typeface="Noto Sans KR"/>
-              </a:defRPr>
-            </a:pPr>
-            <a:r>
-              <a:t>질문은행 도우미 (Question Bank):</a:t>
-            </a:r>
-          </a:p>
-          <a:p>
-            <a:pPr>
-              <a:spcAft>
-                <a:spcPts val="600"/>
-              </a:spcAft>
-              <a:defRPr sz="1100">
-                <a:solidFill>
-                  <a:srgbClr val="94A3B8"/>
-                </a:solidFill>
-                <a:latin typeface="Noto Sans KR"/>
-              </a:defRPr>
-            </a:pPr>
-            <a:r>
-              <a:t>• 지원자 과제 유형을 선택하면 면접 질문 리스트와 모범 답변 준거 가이드를 자동으로 제시하여 객관성을 보장합니다.</a:t>
-            </a:r>
-          </a:p>
-          <a:p>
-            <a:br/>
-            <a:pPr>
-              <a:spcAft>
-                <a:spcPts val="600"/>
-              </a:spcAft>
-              <a:defRPr sz="1100">
-                <a:solidFill>
-                  <a:srgbClr val="94A3B8"/>
-                </a:solidFill>
-                <a:latin typeface="Noto Sans KR"/>
-              </a:defRPr>
-            </a:pPr>
-            <a:r>
-              <a:t>오른쪽 화면: 실제 5단계 루브릭 행 카드 및 우측 하단 질문은행 패널 렌더링 화면</a:t>
+              <a:defRPr sz="1200" b="1">
+                <a:solidFill>
+                  <a:srgbClr val="F87171"/>
+                </a:solidFill>
+                <a:latin typeface="Malgun Gothic"/>
+              </a:defRPr>
+            </a:pPr>
+            <a:r>
+              <a:t>⚠️ Red Flag 경고 연동: 하나라도 미준수 시 '보안 주의 알림'이 대시보드에 연동되며, 중대한 자격증명 노출은 즉시 불합격 처리 대상이 됩니다.</a:t>
             </a:r>
           </a:p>
         </p:txBody>
@@ -6252,18 +6084,18 @@
         </p:nvSpPr>
         <p:spPr>
           <a:xfrm>
-            <a:off x="6400800" y="1828800"/>
-            <a:ext cx="5212080" cy="4114800"/>
+            <a:off x="6309360" y="1645920"/>
+            <a:ext cx="5303520" cy="4389120"/>
           </a:xfrm>
           <a:prstGeom prst="roundRect">
             <a:avLst/>
           </a:prstGeom>
           <a:solidFill>
-            <a:srgbClr val="1E293B"/>
+            <a:srgbClr val="111C38"/>
           </a:solidFill>
-          <a:ln w="19050">
+          <a:ln w="12700">
             <a:solidFill>
-              <a:srgbClr val="6366F1"/>
+              <a:srgbClr val="1E293B"/>
             </a:solidFill>
           </a:ln>
         </p:spPr>
@@ -6291,7 +6123,7 @@
       </p:sp>
       <p:pic>
         <p:nvPicPr>
-          <p:cNvPr id="10" name="Picture 9" descr="aica_evaluation_workspace_mockup_1784167999282.png"/>
+          <p:cNvPr id="10" name="Picture 9" descr="page_15.png"/>
           <p:cNvPicPr>
             <a:picLocks noChangeAspect="1"/>
           </p:cNvPicPr>
@@ -6305,8 +6137,8 @@
         </p:blipFill>
         <p:spPr>
           <a:xfrm>
-            <a:off x="7086600" y="1965960"/>
-            <a:ext cx="3840480" cy="3840480"/>
+            <a:off x="6400800" y="1737360"/>
+            <a:ext cx="5120640" cy="4206240"/>
           </a:xfrm>
           <a:prstGeom prst="rect">
             <a:avLst/>
@@ -6327,7 +6159,7 @@
     <p:bg>
       <p:bgPr>
         <a:solidFill>
-          <a:srgbClr val="0F172A"/>
+          <a:srgbClr val="0B1329"/>
         </a:solidFill>
         <a:effectLst/>
       </p:bgPr>
@@ -6348,7 +6180,7 @@
         <p:spPr>
           <a:xfrm>
             <a:off x="548640" y="365760"/>
-            <a:ext cx="7315200" cy="365760"/>
+            <a:ext cx="7315200" cy="320040"/>
           </a:xfrm>
           <a:prstGeom prst="rect">
             <a:avLst/>
@@ -6356,17 +6188,17 @@
           <a:noFill/>
         </p:spPr>
         <p:txBody>
-          <a:bodyPr wrap="none">
+          <a:bodyPr wrap="square">
             <a:spAutoFit/>
           </a:bodyPr>
           <a:lstStyle/>
           <a:p>
             <a:pPr>
-              <a:defRPr sz="1100" b="1">
+              <a:defRPr sz="1300" b="1">
                 <a:solidFill>
                   <a:srgbClr val="38BDF8"/>
                 </a:solidFill>
-                <a:latin typeface="Noto Sans KR"/>
+                <a:latin typeface="Malgun Gothic"/>
               </a:defRPr>
             </a:pPr>
             <a:r>
@@ -6384,7 +6216,7 @@
         <p:spPr>
           <a:xfrm>
             <a:off x="548640" y="640080"/>
-            <a:ext cx="10058400" cy="731520"/>
+            <a:ext cx="10058400" cy="640080"/>
           </a:xfrm>
           <a:prstGeom prst="rect">
             <a:avLst/>
@@ -6392,21 +6224,21 @@
           <a:noFill/>
         </p:spPr>
         <p:txBody>
-          <a:bodyPr wrap="none">
+          <a:bodyPr wrap="square">
             <a:spAutoFit/>
           </a:bodyPr>
           <a:lstStyle/>
           <a:p>
             <a:pPr>
-              <a:defRPr sz="2600" b="1">
+              <a:defRPr sz="2400" b="1">
                 <a:solidFill>
                   <a:srgbClr val="FFFFFF"/>
                 </a:solidFill>
-                <a:latin typeface="Noto Sans KR"/>
-              </a:defRPr>
-            </a:pPr>
-            <a:r>
-              <a:t>제출 전 마지막 확인이 평가 품질을 좌우합니다</a:t>
+                <a:latin typeface="Malgun Gothic"/>
+              </a:defRPr>
+            </a:pPr>
+            <a:r>
+              <a:t>Level에 따라 채점 축과 가중치가 달라집니다</a:t>
             </a:r>
           </a:p>
         </p:txBody>
@@ -6426,10 +6258,12 @@
             <a:avLst/>
           </a:prstGeom>
           <a:solidFill>
-            <a:srgbClr val="334155"/>
+            <a:srgbClr val="1E293B"/>
           </a:solidFill>
           <a:ln>
-            <a:noFill/>
+            <a:solidFill>
+              <a:srgbClr val="1E293B"/>
+            </a:solidFill>
           </a:ln>
         </p:spPr>
         <p:style>
@@ -6477,15 +6311,15 @@
           <a:lstStyle/>
           <a:p>
             <a:pPr>
-              <a:defRPr sz="900">
+              <a:defRPr sz="1000">
                 <a:solidFill>
                   <a:srgbClr val="94A3B8"/>
                 </a:solidFill>
-                <a:latin typeface="Noto Sans KR"/>
-              </a:defRPr>
-            </a:pPr>
-            <a:r>
-              <a:t>AICA 자격심사 시스템 사용자 매뉴얼 · Web App Dark Theme</a:t>
+                <a:latin typeface="Malgun Gothic"/>
+              </a:defRPr>
+            </a:pPr>
+            <a:r>
+              <a:t>AICA 자격심사 시스템 사용자 매뉴얼 · 경영혁신실</a:t>
             </a:r>
           </a:p>
         </p:txBody>
@@ -6513,15 +6347,15 @@
           <a:lstStyle/>
           <a:p>
             <a:pPr algn="r">
-              <a:defRPr sz="900">
+              <a:defRPr sz="1000">
                 <a:solidFill>
                   <a:srgbClr val="94A3B8"/>
                 </a:solidFill>
-                <a:latin typeface="Noto Sans KR"/>
-              </a:defRPr>
-            </a:pPr>
-            <a:r>
-              <a:t>15</a:t>
+                <a:latin typeface="Malgun Gothic"/>
+              </a:defRPr>
+            </a:pPr>
+            <a:r>
+              <a:t>16</a:t>
             </a:r>
           </a:p>
         </p:txBody>
@@ -6534,18 +6368,18 @@
         </p:nvSpPr>
         <p:spPr>
           <a:xfrm>
-            <a:off x="548640" y="1828800"/>
-            <a:ext cx="5486400" cy="4114800"/>
+            <a:off x="548640" y="1645920"/>
+            <a:ext cx="5486400" cy="4389120"/>
           </a:xfrm>
           <a:prstGeom prst="roundRect">
             <a:avLst/>
           </a:prstGeom>
           <a:solidFill>
-            <a:srgbClr val="1E293B"/>
+            <a:srgbClr val="111C38"/>
           </a:solidFill>
           <a:ln w="12700">
             <a:solidFill>
-              <a:srgbClr val="334155"/>
+              <a:srgbClr val="1E293B"/>
             </a:solidFill>
           </a:ln>
         </p:spPr>
@@ -6579,8 +6413,8 @@
         </p:nvSpPr>
         <p:spPr>
           <a:xfrm>
-            <a:off x="731520" y="2011680"/>
-            <a:ext cx="5120640" cy="3749040"/>
+            <a:off x="731520" y="1828800"/>
+            <a:ext cx="5120640" cy="4023360"/>
           </a:xfrm>
           <a:prstGeom prst="rect">
             <a:avLst/>
@@ -6595,17 +6429,49 @@
           <a:p>
             <a:pPr>
               <a:spcAft>
-                <a:spcPts val="1200"/>
-              </a:spcAft>
-              <a:defRPr sz="1500" b="1">
+                <a:spcPts val="1000"/>
+              </a:spcAft>
+              <a:defRPr sz="1600" b="1">
+                <a:solidFill>
+                  <a:srgbClr val="60A5FA"/>
+                </a:solidFill>
+                <a:latin typeface="Malgun Gothic"/>
+              </a:defRPr>
+            </a:pPr>
+            <a:r>
+              <a:t>심사 자격 레벨별 가중치 및 배점 척도</a:t>
+            </a:r>
+          </a:p>
+          <a:p>
+            <a:pPr>
+              <a:spcAft>
+                <a:spcPts val="600"/>
+              </a:spcAft>
+              <a:defRPr sz="1200">
+                <a:solidFill>
+                  <a:srgbClr val="E2E8F0"/>
+                </a:solidFill>
+                <a:latin typeface="Malgun Gothic"/>
+              </a:defRPr>
+            </a:pPr>
+            <a:r>
+              <a:t>자격 등급별 평가 주안점 및 비율:</a:t>
+            </a:r>
+          </a:p>
+          <a:p>
+            <a:pPr>
+              <a:spcAft>
+                <a:spcPts val="600"/>
+              </a:spcAft>
+              <a:defRPr sz="1200">
                 <a:solidFill>
                   <a:srgbClr val="FFFFFF"/>
                 </a:solidFill>
-                <a:latin typeface="Noto Sans KR"/>
-              </a:defRPr>
-            </a:pPr>
-            <a:r>
-              <a:t>평가 최종 검토 및 제출 확정</a:t>
+                <a:latin typeface="Malgun Gothic"/>
+              </a:defRPr>
+            </a:pPr>
+            <a:r>
+              <a:t>• Level 3 (AI Champion): 현업 적용성 및 기여 효과 검증</a:t>
             </a:r>
           </a:p>
           <a:p>
@@ -6613,15 +6479,15 @@
               <a:spcAft>
                 <a:spcPts val="600"/>
               </a:spcAft>
-              <a:defRPr sz="1100">
-                <a:solidFill>
-                  <a:srgbClr val="94A3B8"/>
-                </a:solidFill>
-                <a:latin typeface="Noto Sans KR"/>
-              </a:defRPr>
-            </a:pPr>
-            <a:r>
-              <a:t>평가 완료 및 전송 단계:</a:t>
+              <a:defRPr sz="1200">
+                <a:solidFill>
+                  <a:srgbClr val="E2E8F0"/>
+                </a:solidFill>
+                <a:latin typeface="Malgun Gothic"/>
+              </a:defRPr>
+            </a:pPr>
+            <a:r>
+              <a:t>   - 문제 해결 난이도 (30%)</a:t>
             </a:r>
           </a:p>
           <a:p>
@@ -6629,15 +6495,15 @@
               <a:spcAft>
                 <a:spcPts val="600"/>
               </a:spcAft>
-              <a:defRPr sz="1100">
-                <a:solidFill>
-                  <a:srgbClr val="94A3B8"/>
-                </a:solidFill>
-                <a:latin typeface="Noto Sans KR"/>
-              </a:defRPr>
-            </a:pPr>
-            <a:r>
-              <a:t>• 1. 필수값 체크: 보안 체크박스 준수, 루브릭 점수 선택, 세부 의견 누락 여부 최종 갱신</a:t>
+              <a:defRPr sz="1200">
+                <a:solidFill>
+                  <a:srgbClr val="E2E8F0"/>
+                </a:solidFill>
+                <a:latin typeface="Malgun Gothic"/>
+              </a:defRPr>
+            </a:pPr>
+            <a:r>
+              <a:t>   - 구현 완성도 (40%)</a:t>
             </a:r>
           </a:p>
           <a:p>
@@ -6645,15 +6511,15 @@
               <a:spcAft>
                 <a:spcPts val="600"/>
               </a:spcAft>
-              <a:defRPr sz="1100">
-                <a:solidFill>
-                  <a:srgbClr val="94A3B8"/>
-                </a:solidFill>
-                <a:latin typeface="Noto Sans KR"/>
-              </a:defRPr>
-            </a:pPr>
-            <a:r>
-              <a:t>• 2. 타 위원 상태 검토: 타 위원의 점수 노출 없이 평가 진행률만 확인(독립적 판단 견지)</a:t>
+              <a:defRPr sz="1200">
+                <a:solidFill>
+                  <a:srgbClr val="E2E8F0"/>
+                </a:solidFill>
+                <a:latin typeface="Malgun Gothic"/>
+              </a:defRPr>
+            </a:pPr>
+            <a:r>
+              <a:t>   - 확산 및 자산화 (30%)</a:t>
             </a:r>
           </a:p>
           <a:p>
@@ -6661,15 +6527,15 @@
               <a:spcAft>
                 <a:spcPts val="600"/>
               </a:spcAft>
-              <a:defRPr sz="1100">
-                <a:solidFill>
-                  <a:srgbClr val="94A3B8"/>
-                </a:solidFill>
-                <a:latin typeface="Noto Sans KR"/>
-              </a:defRPr>
-            </a:pPr>
-            <a:r>
-              <a:t>• 3. 평가 제출: [평가 완료 및 제출] 버튼을 선택해 데이터베이스 기록 완료</a:t>
+              <a:defRPr sz="1200">
+                <a:solidFill>
+                  <a:srgbClr val="FFFFFF"/>
+                </a:solidFill>
+                <a:latin typeface="Malgun Gothic"/>
+              </a:defRPr>
+            </a:pPr>
+            <a:r>
+              <a:t>• Level 4 (AI Specialist): 심화 기술력 및 보안 통제 깊이 검증</a:t>
             </a:r>
           </a:p>
           <a:p>
@@ -6677,49 +6543,47 @@
               <a:spcAft>
                 <a:spcPts val="600"/>
               </a:spcAft>
-              <a:defRPr sz="1100">
-                <a:solidFill>
-                  <a:srgbClr val="94A3B8"/>
-                </a:solidFill>
-                <a:latin typeface="Noto Sans KR"/>
-              </a:defRPr>
-            </a:pPr>
-            <a:r>
-              <a:t>• 4. 상태 갱신 검증: 본인 대기 큐로 복귀 후 해당 과제 상태가 '완료'인지 확인</a:t>
-            </a:r>
-          </a:p>
-          <a:p>
-            <a:br/>
+              <a:defRPr sz="1200">
+                <a:solidFill>
+                  <a:srgbClr val="E2E8F0"/>
+                </a:solidFill>
+                <a:latin typeface="Malgun Gothic"/>
+              </a:defRPr>
+            </a:pPr>
+            <a:r>
+              <a:t>   - 기술적 구현력 (40%)</a:t>
+            </a:r>
+          </a:p>
+          <a:p>
             <a:pPr>
               <a:spcAft>
                 <a:spcPts val="600"/>
               </a:spcAft>
-              <a:defRPr sz="1100">
-                <a:solidFill>
-                  <a:srgbClr val="94A3B8"/>
-                </a:solidFill>
-                <a:latin typeface="Noto Sans KR"/>
-              </a:defRPr>
-            </a:pPr>
-            <a:r>
-              <a:t>💡 최종 판정 계산: 3인의 패널 심사위원이 최종 제출을 모두 완료하는 즉시 파이어스토어에서 평균 점수와 판정을 계산합니다.</a:t>
-            </a:r>
-          </a:p>
-          <a:p>
-            <a:br/>
+              <a:defRPr sz="1200">
+                <a:solidFill>
+                  <a:srgbClr val="E2E8F0"/>
+                </a:solidFill>
+                <a:latin typeface="Malgun Gothic"/>
+              </a:defRPr>
+            </a:pPr>
+            <a:r>
+              <a:t>   - 데이터 활용 및 보안성 (30%)</a:t>
+            </a:r>
+          </a:p>
+          <a:p>
             <a:pPr>
               <a:spcAft>
                 <a:spcPts val="600"/>
               </a:spcAft>
-              <a:defRPr sz="1100">
-                <a:solidFill>
-                  <a:srgbClr val="94A3B8"/>
-                </a:solidFill>
-                <a:latin typeface="Noto Sans KR"/>
-              </a:defRPr>
-            </a:pPr>
-            <a:r>
-              <a:t>오른쪽 화면: 실제 채점 입력창 하단의 저장 및 최종 제출 영역</a:t>
+              <a:defRPr sz="1200">
+                <a:solidFill>
+                  <a:srgbClr val="E2E8F0"/>
+                </a:solidFill>
+                <a:latin typeface="Malgun Gothic"/>
+              </a:defRPr>
+            </a:pPr>
+            <a:r>
+              <a:t>   - 비즈니스 기여도 (30%)</a:t>
             </a:r>
           </a:p>
         </p:txBody>
@@ -6732,18 +6596,18 @@
         </p:nvSpPr>
         <p:spPr>
           <a:xfrm>
-            <a:off x="6400800" y="1828800"/>
-            <a:ext cx="5212080" cy="4114800"/>
+            <a:off x="6309360" y="1645920"/>
+            <a:ext cx="5303520" cy="4389120"/>
           </a:xfrm>
           <a:prstGeom prst="roundRect">
             <a:avLst/>
           </a:prstGeom>
           <a:solidFill>
-            <a:srgbClr val="1E293B"/>
+            <a:srgbClr val="111C38"/>
           </a:solidFill>
-          <a:ln w="19050">
+          <a:ln w="12700">
             <a:solidFill>
-              <a:srgbClr val="6366F1"/>
+              <a:srgbClr val="1E293B"/>
             </a:solidFill>
           </a:ln>
         </p:spPr>
@@ -6771,7 +6635,7 @@
       </p:sp>
       <p:pic>
         <p:nvPicPr>
-          <p:cNvPr id="10" name="Picture 9" descr="media__1784176902473.png"/>
+          <p:cNvPr id="10" name="Picture 9" descr="page_16.png"/>
           <p:cNvPicPr>
             <a:picLocks noChangeAspect="1"/>
           </p:cNvPicPr>
@@ -6785,8 +6649,8 @@
         </p:blipFill>
         <p:spPr>
           <a:xfrm>
-            <a:off x="6814049" y="1965960"/>
-            <a:ext cx="4385580" cy="3840480"/>
+            <a:off x="6400800" y="1737360"/>
+            <a:ext cx="5120640" cy="4206240"/>
           </a:xfrm>
           <a:prstGeom prst="rect">
             <a:avLst/>
@@ -6807,7 +6671,7 @@
     <p:bg>
       <p:bgPr>
         <a:solidFill>
-          <a:srgbClr val="0F172A"/>
+          <a:srgbClr val="0B1329"/>
         </a:solidFill>
         <a:effectLst/>
       </p:bgPr>
@@ -6828,7 +6692,7 @@
         <p:spPr>
           <a:xfrm>
             <a:off x="548640" y="365760"/>
-            <a:ext cx="7315200" cy="365760"/>
+            <a:ext cx="7315200" cy="320040"/>
           </a:xfrm>
           <a:prstGeom prst="rect">
             <a:avLst/>
@@ -6836,21 +6700,21 @@
           <a:noFill/>
         </p:spPr>
         <p:txBody>
-          <a:bodyPr wrap="none">
+          <a:bodyPr wrap="square">
             <a:spAutoFit/>
           </a:bodyPr>
           <a:lstStyle/>
           <a:p>
             <a:pPr>
-              <a:defRPr sz="1100" b="1">
+              <a:defRPr sz="1300" b="1">
                 <a:solidFill>
                   <a:srgbClr val="38BDF8"/>
                 </a:solidFill>
-                <a:latin typeface="Noto Sans KR"/>
-              </a:defRPr>
-            </a:pPr>
-            <a:r>
-              <a:t>공통</a:t>
+                <a:latin typeface="Malgun Gothic"/>
+              </a:defRPr>
+            </a:pPr>
+            <a:r>
+              <a:t>심사위원</a:t>
             </a:r>
           </a:p>
         </p:txBody>
@@ -6864,7 +6728,7 @@
         <p:spPr>
           <a:xfrm>
             <a:off x="548640" y="640080"/>
-            <a:ext cx="10058400" cy="731520"/>
+            <a:ext cx="10058400" cy="640080"/>
           </a:xfrm>
           <a:prstGeom prst="rect">
             <a:avLst/>
@@ -6872,21 +6736,21 @@
           <a:noFill/>
         </p:spPr>
         <p:txBody>
-          <a:bodyPr wrap="none">
+          <a:bodyPr wrap="square">
             <a:spAutoFit/>
           </a:bodyPr>
           <a:lstStyle/>
           <a:p>
             <a:pPr>
-              <a:defRPr sz="2600" b="1">
+              <a:defRPr sz="2400" b="1">
                 <a:solidFill>
                   <a:srgbClr val="FFFFFF"/>
                 </a:solidFill>
-                <a:latin typeface="Noto Sans KR"/>
-              </a:defRPr>
-            </a:pPr>
-            <a:r>
-              <a:t>문제가 생기면 상태·권한·필수값부터 확인하세요</a:t>
+                <a:latin typeface="Malgun Gothic"/>
+              </a:defRPr>
+            </a:pPr>
+            <a:r>
+              <a:t>점수와 의견은 반드시 같은 근거를 가리켜야 합니다</a:t>
             </a:r>
           </a:p>
         </p:txBody>
@@ -6906,10 +6770,12 @@
             <a:avLst/>
           </a:prstGeom>
           <a:solidFill>
-            <a:srgbClr val="334155"/>
+            <a:srgbClr val="1E293B"/>
           </a:solidFill>
           <a:ln>
-            <a:noFill/>
+            <a:solidFill>
+              <a:srgbClr val="1E293B"/>
+            </a:solidFill>
           </a:ln>
         </p:spPr>
         <p:style>
@@ -6957,15 +6823,15 @@
           <a:lstStyle/>
           <a:p>
             <a:pPr>
-              <a:defRPr sz="900">
+              <a:defRPr sz="1000">
                 <a:solidFill>
                   <a:srgbClr val="94A3B8"/>
                 </a:solidFill>
-                <a:latin typeface="Noto Sans KR"/>
-              </a:defRPr>
-            </a:pPr>
-            <a:r>
-              <a:t>AICA 자격심사 시스템 사용자 매뉴얼 · Web App Dark Theme</a:t>
+                <a:latin typeface="Malgun Gothic"/>
+              </a:defRPr>
+            </a:pPr>
+            <a:r>
+              <a:t>AICA 자격심사 시스템 사용자 매뉴얼 · 경영혁신실</a:t>
             </a:r>
           </a:p>
         </p:txBody>
@@ -6993,15 +6859,15 @@
           <a:lstStyle/>
           <a:p>
             <a:pPr algn="r">
-              <a:defRPr sz="900">
+              <a:defRPr sz="1000">
                 <a:solidFill>
                   <a:srgbClr val="94A3B8"/>
                 </a:solidFill>
-                <a:latin typeface="Noto Sans KR"/>
-              </a:defRPr>
-            </a:pPr>
-            <a:r>
-              <a:t>16</a:t>
+                <a:latin typeface="Malgun Gothic"/>
+              </a:defRPr>
+            </a:pPr>
+            <a:r>
+              <a:t>17</a:t>
             </a:r>
           </a:p>
         </p:txBody>
@@ -7014,18 +6880,18 @@
         </p:nvSpPr>
         <p:spPr>
           <a:xfrm>
-            <a:off x="548640" y="1828800"/>
-            <a:ext cx="5486400" cy="4114800"/>
+            <a:off x="548640" y="1645920"/>
+            <a:ext cx="5486400" cy="4389120"/>
           </a:xfrm>
           <a:prstGeom prst="roundRect">
             <a:avLst/>
           </a:prstGeom>
           <a:solidFill>
-            <a:srgbClr val="1E293B"/>
+            <a:srgbClr val="111C38"/>
           </a:solidFill>
           <a:ln w="12700">
             <a:solidFill>
-              <a:srgbClr val="334155"/>
+              <a:srgbClr val="1E293B"/>
             </a:solidFill>
           </a:ln>
         </p:spPr>
@@ -7059,8 +6925,8 @@
         </p:nvSpPr>
         <p:spPr>
           <a:xfrm>
-            <a:off x="731520" y="2011680"/>
-            <a:ext cx="5120640" cy="3749040"/>
+            <a:off x="731520" y="1828800"/>
+            <a:ext cx="5120640" cy="4023360"/>
           </a:xfrm>
           <a:prstGeom prst="rect">
             <a:avLst/>
@@ -7075,17 +6941,49 @@
           <a:p>
             <a:pPr>
               <a:spcAft>
-                <a:spcPts val="1200"/>
-              </a:spcAft>
-              <a:defRPr sz="1500" b="1">
+                <a:spcPts val="1000"/>
+              </a:spcAft>
+              <a:defRPr sz="1600" b="1">
+                <a:solidFill>
+                  <a:srgbClr val="60A5FA"/>
+                </a:solidFill>
+                <a:latin typeface="Malgun Gothic"/>
+              </a:defRPr>
+            </a:pPr>
+            <a:r>
+              <a:t>세부 루브릭 채점 및 질문은행 면접 툴</a:t>
+            </a:r>
+          </a:p>
+          <a:p>
+            <a:pPr>
+              <a:spcAft>
+                <a:spcPts val="600"/>
+              </a:spcAft>
+              <a:defRPr sz="1200">
+                <a:solidFill>
+                  <a:srgbClr val="E2E8F0"/>
+                </a:solidFill>
+                <a:latin typeface="Malgun Gothic"/>
+              </a:defRPr>
+            </a:pPr>
+            <a:r>
+              <a:t>루브릭 세부 채점 가이드:</a:t>
+            </a:r>
+          </a:p>
+          <a:p>
+            <a:pPr>
+              <a:spcAft>
+                <a:spcPts val="600"/>
+              </a:spcAft>
+              <a:defRPr sz="1200">
                 <a:solidFill>
                   <a:srgbClr val="FFFFFF"/>
                 </a:solidFill>
-                <a:latin typeface="Noto Sans KR"/>
-              </a:defRPr>
-            </a:pPr>
-            <a:r>
-              <a:t>자주 묻는 질문 및 트러블슈팅 조치법</a:t>
+                <a:latin typeface="Malgun Gothic"/>
+              </a:defRPr>
+            </a:pPr>
+            <a:r>
+              <a:t>• 5단계 등급 선택: (탁월 100, 양호 85, 보통 70, 미흡 50, 부족 30)</a:t>
             </a:r>
           </a:p>
           <a:p>
@@ -7093,31 +6991,32 @@
               <a:spcAft>
                 <a:spcPts val="600"/>
               </a:spcAft>
-              <a:defRPr sz="1100">
-                <a:solidFill>
-                  <a:srgbClr val="94A3B8"/>
-                </a:solidFill>
-                <a:latin typeface="Noto Sans KR"/>
-              </a:defRPr>
-            </a:pPr>
-            <a:r>
-              <a:t>자주 발생하는 이슈 해결 방안:</a:t>
-            </a:r>
-          </a:p>
-          <a:p>
+              <a:defRPr sz="1200">
+                <a:solidFill>
+                  <a:srgbClr val="FFFFFF"/>
+                </a:solidFill>
+                <a:latin typeface="Malgun Gothic"/>
+              </a:defRPr>
+            </a:pPr>
+            <a:r>
+              <a:t>• 각 항목마다 정량적/정성적 등급 부여 사유 필수 기재</a:t>
+            </a:r>
+          </a:p>
+          <a:p>
+            <a:br/>
             <a:pPr>
               <a:spcAft>
                 <a:spcPts val="600"/>
               </a:spcAft>
-              <a:defRPr sz="1100">
-                <a:solidFill>
-                  <a:srgbClr val="94A3B8"/>
-                </a:solidFill>
-                <a:latin typeface="Noto Sans KR"/>
-              </a:defRPr>
-            </a:pPr>
-            <a:r>
-              <a:t>• 1. 로그인 실패: 등록된 사용자 성명과 사내 이메일 주소가 정확한지 대조해 보세요. (대소문자 및 띄어쓰기 유의)</a:t>
+              <a:defRPr sz="1200" b="1">
+                <a:solidFill>
+                  <a:srgbClr val="38BDF8"/>
+                </a:solidFill>
+                <a:latin typeface="Malgun Gothic"/>
+              </a:defRPr>
+            </a:pPr>
+            <a:r>
+              <a:t>⚡ Consensus Monitor (의견 불합치 방지):</a:t>
             </a:r>
           </a:p>
           <a:p>
@@ -7125,31 +7024,32 @@
               <a:spcAft>
                 <a:spcPts val="600"/>
               </a:spcAft>
-              <a:defRPr sz="1100">
-                <a:solidFill>
-                  <a:srgbClr val="94A3B8"/>
-                </a:solidFill>
-                <a:latin typeface="Noto Sans KR"/>
-              </a:defRPr>
-            </a:pPr>
-            <a:r>
-              <a:t>• 2. 과제 등록 불가: 필수 항목(성명, 이메일, 과제설명 등) 누락 여부 및 심사위원 3인 배정 유무를 확인하세요.</a:t>
-            </a:r>
-          </a:p>
-          <a:p>
+              <a:defRPr sz="1200" b="1">
+                <a:solidFill>
+                  <a:srgbClr val="F87171"/>
+                </a:solidFill>
+                <a:latin typeface="Malgun Gothic"/>
+              </a:defRPr>
+            </a:pPr>
+            <a:r>
+              <a:t>• 동시 배정된 위원 간 평가 편차가 15점 이상 벌어질 경우 경고 알림 노출 ➡️ 타 위원 의견 수렴 후 조율 합의문 기재</a:t>
+            </a:r>
+          </a:p>
+          <a:p>
+            <a:br/>
             <a:pPr>
               <a:spcAft>
                 <a:spcPts val="600"/>
               </a:spcAft>
-              <a:defRPr sz="1100">
-                <a:solidFill>
-                  <a:srgbClr val="94A3B8"/>
-                </a:solidFill>
-                <a:latin typeface="Noto Sans KR"/>
-              </a:defRPr>
-            </a:pPr>
-            <a:r>
-              <a:t>• 3. 점수·판정 미표시: 배정된 3인 패널 심사위원(현업, 기술, 보안) 전원이 최종 제출을 마쳤는지 확인하세요.</a:t>
+              <a:defRPr sz="1200">
+                <a:solidFill>
+                  <a:srgbClr val="E2E8F0"/>
+                </a:solidFill>
+                <a:latin typeface="Malgun Gothic"/>
+              </a:defRPr>
+            </a:pPr>
+            <a:r>
+              <a:t>질문은행 도우미 (Question Bank):</a:t>
             </a:r>
           </a:p>
           <a:p>
@@ -7157,49 +7057,15 @@
               <a:spcAft>
                 <a:spcPts val="600"/>
               </a:spcAft>
-              <a:defRPr sz="1100">
-                <a:solidFill>
-                  <a:srgbClr val="94A3B8"/>
-                </a:solidFill>
-                <a:latin typeface="Noto Sans KR"/>
-              </a:defRPr>
-            </a:pPr>
-            <a:r>
-              <a:t>• 4. 자료 링크 오류: 사내 보안 인트라넷 링크의 접근 권한 허용 여부 및 URL 정상 동작 여부를 사전에 검토하세요.</a:t>
-            </a:r>
-          </a:p>
-          <a:p>
-            <a:br/>
-            <a:pPr>
-              <a:spcAft>
-                <a:spcPts val="600"/>
-              </a:spcAft>
-              <a:defRPr sz="1100">
-                <a:solidFill>
-                  <a:srgbClr val="94A3B8"/>
-                </a:solidFill>
-                <a:latin typeface="Noto Sans KR"/>
-              </a:defRPr>
-            </a:pPr>
-            <a:r>
-              <a:t>💡 완료 전 4대 필수 체크 사항: 정확한 후보자 정보, 이해상충이 없는 패널 매핑, 명확한 평가 근거 작성, 보안 결격 검증 완료</a:t>
-            </a:r>
-          </a:p>
-          <a:p>
-            <a:br/>
-            <a:pPr>
-              <a:spcAft>
-                <a:spcPts val="600"/>
-              </a:spcAft>
-              <a:defRPr sz="1100">
-                <a:solidFill>
-                  <a:srgbClr val="94A3B8"/>
-                </a:solidFill>
-                <a:latin typeface="Noto Sans KR"/>
-              </a:defRPr>
-            </a:pPr>
-            <a:r>
-              <a:t>오른쪽 화면: 실제 리액트 로그인 오류 배지 렌더링 화면</a:t>
+              <a:defRPr sz="1200">
+                <a:solidFill>
+                  <a:srgbClr val="FFFFFF"/>
+                </a:solidFill>
+                <a:latin typeface="Malgun Gothic"/>
+              </a:defRPr>
+            </a:pPr>
+            <a:r>
+              <a:t>• 지원자 과제 유형을 선택하면 면접 질문 리스트와 모범 답변 준거 가이드를 자동으로 제시하여 객관성을 보장합니다.</a:t>
             </a:r>
           </a:p>
         </p:txBody>
@@ -7212,18 +7078,18 @@
         </p:nvSpPr>
         <p:spPr>
           <a:xfrm>
-            <a:off x="6400800" y="1828800"/>
-            <a:ext cx="5212080" cy="4114800"/>
+            <a:off x="6309360" y="1645920"/>
+            <a:ext cx="5303520" cy="4389120"/>
           </a:xfrm>
           <a:prstGeom prst="roundRect">
             <a:avLst/>
           </a:prstGeom>
           <a:solidFill>
-            <a:srgbClr val="1E293B"/>
+            <a:srgbClr val="111C38"/>
           </a:solidFill>
-          <a:ln w="19050">
+          <a:ln w="12700">
             <a:solidFill>
-              <a:srgbClr val="6366F1"/>
+              <a:srgbClr val="1E293B"/>
             </a:solidFill>
           </a:ln>
         </p:spPr>
@@ -7249,30 +7115,888 @@
           </a:p>
         </p:txBody>
       </p:sp>
-      <p:pic>
-        <p:nvPicPr>
-          <p:cNvPr id="10" name="Picture 9" descr="media__1784176101924.png"/>
-          <p:cNvPicPr>
-            <a:picLocks noChangeAspect="1"/>
-          </p:cNvPicPr>
-          <p:nvPr/>
-        </p:nvPicPr>
-        <p:blipFill>
-          <a:blip r:embed="rId2"/>
-          <a:stretch>
-            <a:fillRect/>
-          </a:stretch>
-        </p:blipFill>
-        <p:spPr>
-          <a:xfrm>
-            <a:off x="6537960" y="2398922"/>
-            <a:ext cx="4937760" cy="2974554"/>
-          </a:xfrm>
-          <a:prstGeom prst="rect">
-            <a:avLst/>
-          </a:prstGeom>
-        </p:spPr>
-      </p:pic>
+    </p:spTree>
+  </p:cSld>
+  <p:clrMapOvr>
+    <a:masterClrMapping/>
+  </p:clrMapOvr>
+</p:sld>
+</file>
+
+<file path=ppt/slides/slide18.xml><?xml version="1.0" encoding="utf-8"?>
+<p:sld xmlns:a="http://schemas.openxmlformats.org/drawingml/2006/main" xmlns:p="http://schemas.openxmlformats.org/presentationml/2006/main" xmlns:r="http://schemas.openxmlformats.org/officeDocument/2006/relationships">
+  <p:cSld>
+    <p:bg>
+      <p:bgPr>
+        <a:solidFill>
+          <a:srgbClr val="0B1329"/>
+        </a:solidFill>
+        <a:effectLst/>
+      </p:bgPr>
+    </p:bg>
+    <p:spTree>
+      <p:nvGrpSpPr>
+        <p:cNvPr id="1" name=""/>
+        <p:cNvGrpSpPr/>
+        <p:nvPr/>
+      </p:nvGrpSpPr>
+      <p:grpSpPr/>
+      <p:sp>
+        <p:nvSpPr>
+          <p:cNvPr id="2" name="TextBox 1"/>
+          <p:cNvSpPr txBox="1"/>
+          <p:nvPr/>
+        </p:nvSpPr>
+        <p:spPr>
+          <a:xfrm>
+            <a:off x="548640" y="365760"/>
+            <a:ext cx="7315200" cy="320040"/>
+          </a:xfrm>
+          <a:prstGeom prst="rect">
+            <a:avLst/>
+          </a:prstGeom>
+          <a:noFill/>
+        </p:spPr>
+        <p:txBody>
+          <a:bodyPr wrap="square">
+            <a:spAutoFit/>
+          </a:bodyPr>
+          <a:lstStyle/>
+          <a:p>
+            <a:pPr>
+              <a:defRPr sz="1300" b="1">
+                <a:solidFill>
+                  <a:srgbClr val="38BDF8"/>
+                </a:solidFill>
+                <a:latin typeface="Malgun Gothic"/>
+              </a:defRPr>
+            </a:pPr>
+            <a:r>
+              <a:t>심사위원</a:t>
+            </a:r>
+          </a:p>
+        </p:txBody>
+      </p:sp>
+      <p:sp>
+        <p:nvSpPr>
+          <p:cNvPr id="3" name="TextBox 2"/>
+          <p:cNvSpPr txBox="1"/>
+          <p:nvPr/>
+        </p:nvSpPr>
+        <p:spPr>
+          <a:xfrm>
+            <a:off x="548640" y="640080"/>
+            <a:ext cx="10058400" cy="640080"/>
+          </a:xfrm>
+          <a:prstGeom prst="rect">
+            <a:avLst/>
+          </a:prstGeom>
+          <a:noFill/>
+        </p:spPr>
+        <p:txBody>
+          <a:bodyPr wrap="square">
+            <a:spAutoFit/>
+          </a:bodyPr>
+          <a:lstStyle/>
+          <a:p>
+            <a:pPr>
+              <a:defRPr sz="2400" b="1">
+                <a:solidFill>
+                  <a:srgbClr val="FFFFFF"/>
+                </a:solidFill>
+                <a:latin typeface="Malgun Gothic"/>
+              </a:defRPr>
+            </a:pPr>
+            <a:r>
+              <a:t>제출 전 마지막 확인이 평가 품질을 좌우합니다</a:t>
+            </a:r>
+          </a:p>
+        </p:txBody>
+      </p:sp>
+      <p:sp>
+        <p:nvSpPr>
+          <p:cNvPr id="4" name="Rectangle 3"/>
+          <p:cNvSpPr/>
+          <p:nvPr/>
+        </p:nvSpPr>
+        <p:spPr>
+          <a:xfrm>
+            <a:off x="548640" y="1371600"/>
+            <a:ext cx="11094415" cy="9144"/>
+          </a:xfrm>
+          <a:prstGeom prst="rect">
+            <a:avLst/>
+          </a:prstGeom>
+          <a:solidFill>
+            <a:srgbClr val="1E293B"/>
+          </a:solidFill>
+          <a:ln>
+            <a:solidFill>
+              <a:srgbClr val="1E293B"/>
+            </a:solidFill>
+          </a:ln>
+        </p:spPr>
+        <p:style>
+          <a:lnRef idx="1">
+            <a:schemeClr val="accent1"/>
+          </a:lnRef>
+          <a:fillRef idx="3">
+            <a:schemeClr val="accent1"/>
+          </a:fillRef>
+          <a:effectRef idx="2">
+            <a:schemeClr val="accent1"/>
+          </a:effectRef>
+          <a:fontRef idx="minor">
+            <a:schemeClr val="lt1"/>
+          </a:fontRef>
+        </p:style>
+        <p:txBody>
+          <a:bodyPr rtlCol="0" anchor="ctr"/>
+          <a:lstStyle/>
+          <a:p>
+            <a:pPr algn="ctr"/>
+          </a:p>
+        </p:txBody>
+      </p:sp>
+      <p:sp>
+        <p:nvSpPr>
+          <p:cNvPr id="5" name="TextBox 4"/>
+          <p:cNvSpPr txBox="1"/>
+          <p:nvPr/>
+        </p:nvSpPr>
+        <p:spPr>
+          <a:xfrm>
+            <a:off x="548640" y="6309360"/>
+            <a:ext cx="9144000" cy="365760"/>
+          </a:xfrm>
+          <a:prstGeom prst="rect">
+            <a:avLst/>
+          </a:prstGeom>
+          <a:noFill/>
+        </p:spPr>
+        <p:txBody>
+          <a:bodyPr wrap="none">
+            <a:spAutoFit/>
+          </a:bodyPr>
+          <a:lstStyle/>
+          <a:p>
+            <a:pPr>
+              <a:defRPr sz="1000">
+                <a:solidFill>
+                  <a:srgbClr val="94A3B8"/>
+                </a:solidFill>
+                <a:latin typeface="Malgun Gothic"/>
+              </a:defRPr>
+            </a:pPr>
+            <a:r>
+              <a:t>AICA 자격심사 시스템 사용자 매뉴얼 · 경영혁신실</a:t>
+            </a:r>
+          </a:p>
+        </p:txBody>
+      </p:sp>
+      <p:sp>
+        <p:nvSpPr>
+          <p:cNvPr id="6" name="TextBox 5"/>
+          <p:cNvSpPr txBox="1"/>
+          <p:nvPr/>
+        </p:nvSpPr>
+        <p:spPr>
+          <a:xfrm>
+            <a:off x="10820095" y="6309360"/>
+            <a:ext cx="822960" cy="365760"/>
+          </a:xfrm>
+          <a:prstGeom prst="rect">
+            <a:avLst/>
+          </a:prstGeom>
+          <a:noFill/>
+        </p:spPr>
+        <p:txBody>
+          <a:bodyPr wrap="none">
+            <a:spAutoFit/>
+          </a:bodyPr>
+          <a:lstStyle/>
+          <a:p>
+            <a:pPr algn="r">
+              <a:defRPr sz="1000">
+                <a:solidFill>
+                  <a:srgbClr val="94A3B8"/>
+                </a:solidFill>
+                <a:latin typeface="Malgun Gothic"/>
+              </a:defRPr>
+            </a:pPr>
+            <a:r>
+              <a:t>18</a:t>
+            </a:r>
+          </a:p>
+        </p:txBody>
+      </p:sp>
+      <p:sp>
+        <p:nvSpPr>
+          <p:cNvPr id="7" name="Rounded Rectangle 6"/>
+          <p:cNvSpPr/>
+          <p:nvPr/>
+        </p:nvSpPr>
+        <p:spPr>
+          <a:xfrm>
+            <a:off x="548640" y="1645920"/>
+            <a:ext cx="5486400" cy="4389120"/>
+          </a:xfrm>
+          <a:prstGeom prst="roundRect">
+            <a:avLst/>
+          </a:prstGeom>
+          <a:solidFill>
+            <a:srgbClr val="111C38"/>
+          </a:solidFill>
+          <a:ln w="12700">
+            <a:solidFill>
+              <a:srgbClr val="1E293B"/>
+            </a:solidFill>
+          </a:ln>
+        </p:spPr>
+        <p:style>
+          <a:lnRef idx="1">
+            <a:schemeClr val="accent1"/>
+          </a:lnRef>
+          <a:fillRef idx="3">
+            <a:schemeClr val="accent1"/>
+          </a:fillRef>
+          <a:effectRef idx="2">
+            <a:schemeClr val="accent1"/>
+          </a:effectRef>
+          <a:fontRef idx="minor">
+            <a:schemeClr val="lt1"/>
+          </a:fontRef>
+        </p:style>
+        <p:txBody>
+          <a:bodyPr rtlCol="0" anchor="ctr"/>
+          <a:lstStyle/>
+          <a:p>
+            <a:pPr algn="ctr"/>
+          </a:p>
+        </p:txBody>
+      </p:sp>
+      <p:sp>
+        <p:nvSpPr>
+          <p:cNvPr id="8" name="TextBox 7"/>
+          <p:cNvSpPr txBox="1"/>
+          <p:nvPr/>
+        </p:nvSpPr>
+        <p:spPr>
+          <a:xfrm>
+            <a:off x="731520" y="1828800"/>
+            <a:ext cx="5120640" cy="4023360"/>
+          </a:xfrm>
+          <a:prstGeom prst="rect">
+            <a:avLst/>
+          </a:prstGeom>
+          <a:noFill/>
+        </p:spPr>
+        <p:txBody>
+          <a:bodyPr wrap="square">
+            <a:spAutoFit/>
+          </a:bodyPr>
+          <a:lstStyle/>
+          <a:p>
+            <a:pPr>
+              <a:spcAft>
+                <a:spcPts val="1000"/>
+              </a:spcAft>
+              <a:defRPr sz="1600" b="1">
+                <a:solidFill>
+                  <a:srgbClr val="60A5FA"/>
+                </a:solidFill>
+                <a:latin typeface="Malgun Gothic"/>
+              </a:defRPr>
+            </a:pPr>
+            <a:r>
+              <a:t>평가 최종 검토 및 제출 확정</a:t>
+            </a:r>
+          </a:p>
+          <a:p>
+            <a:pPr>
+              <a:spcAft>
+                <a:spcPts val="600"/>
+              </a:spcAft>
+              <a:defRPr sz="1200">
+                <a:solidFill>
+                  <a:srgbClr val="E2E8F0"/>
+                </a:solidFill>
+                <a:latin typeface="Malgun Gothic"/>
+              </a:defRPr>
+            </a:pPr>
+            <a:r>
+              <a:t>평가 완료 및 전송 단계:</a:t>
+            </a:r>
+          </a:p>
+          <a:p>
+            <a:pPr>
+              <a:spcAft>
+                <a:spcPts val="600"/>
+              </a:spcAft>
+              <a:defRPr sz="1200">
+                <a:solidFill>
+                  <a:srgbClr val="FFFFFF"/>
+                </a:solidFill>
+                <a:latin typeface="Malgun Gothic"/>
+              </a:defRPr>
+            </a:pPr>
+            <a:r>
+              <a:t>• 1. 필수값 체크: 보안 체크박스 준수, 루브릭 점수 선택, 세부 의견 누락 여부 최종 갱신</a:t>
+            </a:r>
+          </a:p>
+          <a:p>
+            <a:pPr>
+              <a:spcAft>
+                <a:spcPts val="600"/>
+              </a:spcAft>
+              <a:defRPr sz="1200">
+                <a:solidFill>
+                  <a:srgbClr val="FFFFFF"/>
+                </a:solidFill>
+                <a:latin typeface="Malgun Gothic"/>
+              </a:defRPr>
+            </a:pPr>
+            <a:r>
+              <a:t>• 2. 타 위원 상태 검토: 타 위원의 점수 노출 없이 평가 진행률만 확인(독립적 판단 견지)</a:t>
+            </a:r>
+          </a:p>
+          <a:p>
+            <a:pPr>
+              <a:spcAft>
+                <a:spcPts val="600"/>
+              </a:spcAft>
+              <a:defRPr sz="1200">
+                <a:solidFill>
+                  <a:srgbClr val="FFFFFF"/>
+                </a:solidFill>
+                <a:latin typeface="Malgun Gothic"/>
+              </a:defRPr>
+            </a:pPr>
+            <a:r>
+              <a:t>• 3. 평가 제출: [평가 완료 및 제출] 버튼을 선택해 데이터베이스 기록 완료</a:t>
+            </a:r>
+          </a:p>
+          <a:p>
+            <a:pPr>
+              <a:spcAft>
+                <a:spcPts val="600"/>
+              </a:spcAft>
+              <a:defRPr sz="1200">
+                <a:solidFill>
+                  <a:srgbClr val="FFFFFF"/>
+                </a:solidFill>
+                <a:latin typeface="Malgun Gothic"/>
+              </a:defRPr>
+            </a:pPr>
+            <a:r>
+              <a:t>• 4. 상태 갱신 검증: 본인 대기 큐로 복귀 후 해당 과제 상태가 '완료'인지 확인</a:t>
+            </a:r>
+          </a:p>
+          <a:p>
+            <a:br/>
+            <a:pPr>
+              <a:spcAft>
+                <a:spcPts val="600"/>
+              </a:spcAft>
+              <a:defRPr sz="1200" b="1">
+                <a:solidFill>
+                  <a:srgbClr val="FACC15"/>
+                </a:solidFill>
+                <a:latin typeface="Malgun Gothic"/>
+              </a:defRPr>
+            </a:pPr>
+            <a:r>
+              <a:t>💡 최종 판정 계산: 3인의 패널 심사위원이 최종 제출을 모두 완료하는 즉시 파이어스토어에서 평균 점수와 판정을 계산합니다.</a:t>
+            </a:r>
+          </a:p>
+        </p:txBody>
+      </p:sp>
+      <p:sp>
+        <p:nvSpPr>
+          <p:cNvPr id="9" name="Rounded Rectangle 8"/>
+          <p:cNvSpPr/>
+          <p:nvPr/>
+        </p:nvSpPr>
+        <p:spPr>
+          <a:xfrm>
+            <a:off x="6309360" y="1645920"/>
+            <a:ext cx="5303520" cy="4389120"/>
+          </a:xfrm>
+          <a:prstGeom prst="roundRect">
+            <a:avLst/>
+          </a:prstGeom>
+          <a:solidFill>
+            <a:srgbClr val="111C38"/>
+          </a:solidFill>
+          <a:ln w="12700">
+            <a:solidFill>
+              <a:srgbClr val="1E293B"/>
+            </a:solidFill>
+          </a:ln>
+        </p:spPr>
+        <p:style>
+          <a:lnRef idx="1">
+            <a:schemeClr val="accent1"/>
+          </a:lnRef>
+          <a:fillRef idx="3">
+            <a:schemeClr val="accent1"/>
+          </a:fillRef>
+          <a:effectRef idx="2">
+            <a:schemeClr val="accent1"/>
+          </a:effectRef>
+          <a:fontRef idx="minor">
+            <a:schemeClr val="lt1"/>
+          </a:fontRef>
+        </p:style>
+        <p:txBody>
+          <a:bodyPr rtlCol="0" anchor="ctr"/>
+          <a:lstStyle/>
+          <a:p>
+            <a:pPr algn="ctr"/>
+          </a:p>
+        </p:txBody>
+      </p:sp>
+    </p:spTree>
+  </p:cSld>
+  <p:clrMapOvr>
+    <a:masterClrMapping/>
+  </p:clrMapOvr>
+</p:sld>
+</file>
+
+<file path=ppt/slides/slide19.xml><?xml version="1.0" encoding="utf-8"?>
+<p:sld xmlns:a="http://schemas.openxmlformats.org/drawingml/2006/main" xmlns:p="http://schemas.openxmlformats.org/presentationml/2006/main" xmlns:r="http://schemas.openxmlformats.org/officeDocument/2006/relationships">
+  <p:cSld>
+    <p:bg>
+      <p:bgPr>
+        <a:solidFill>
+          <a:srgbClr val="0B1329"/>
+        </a:solidFill>
+        <a:effectLst/>
+      </p:bgPr>
+    </p:bg>
+    <p:spTree>
+      <p:nvGrpSpPr>
+        <p:cNvPr id="1" name=""/>
+        <p:cNvGrpSpPr/>
+        <p:nvPr/>
+      </p:nvGrpSpPr>
+      <p:grpSpPr/>
+      <p:sp>
+        <p:nvSpPr>
+          <p:cNvPr id="2" name="TextBox 1"/>
+          <p:cNvSpPr txBox="1"/>
+          <p:nvPr/>
+        </p:nvSpPr>
+        <p:spPr>
+          <a:xfrm>
+            <a:off x="548640" y="365760"/>
+            <a:ext cx="7315200" cy="320040"/>
+          </a:xfrm>
+          <a:prstGeom prst="rect">
+            <a:avLst/>
+          </a:prstGeom>
+          <a:noFill/>
+        </p:spPr>
+        <p:txBody>
+          <a:bodyPr wrap="square">
+            <a:spAutoFit/>
+          </a:bodyPr>
+          <a:lstStyle/>
+          <a:p>
+            <a:pPr>
+              <a:defRPr sz="1300" b="1">
+                <a:solidFill>
+                  <a:srgbClr val="38BDF8"/>
+                </a:solidFill>
+                <a:latin typeface="Malgun Gothic"/>
+              </a:defRPr>
+            </a:pPr>
+            <a:r>
+              <a:t>공통</a:t>
+            </a:r>
+          </a:p>
+        </p:txBody>
+      </p:sp>
+      <p:sp>
+        <p:nvSpPr>
+          <p:cNvPr id="3" name="TextBox 2"/>
+          <p:cNvSpPr txBox="1"/>
+          <p:nvPr/>
+        </p:nvSpPr>
+        <p:spPr>
+          <a:xfrm>
+            <a:off x="548640" y="640080"/>
+            <a:ext cx="10058400" cy="640080"/>
+          </a:xfrm>
+          <a:prstGeom prst="rect">
+            <a:avLst/>
+          </a:prstGeom>
+          <a:noFill/>
+        </p:spPr>
+        <p:txBody>
+          <a:bodyPr wrap="square">
+            <a:spAutoFit/>
+          </a:bodyPr>
+          <a:lstStyle/>
+          <a:p>
+            <a:pPr>
+              <a:defRPr sz="2400" b="1">
+                <a:solidFill>
+                  <a:srgbClr val="FFFFFF"/>
+                </a:solidFill>
+                <a:latin typeface="Malgun Gothic"/>
+              </a:defRPr>
+            </a:pPr>
+            <a:r>
+              <a:t>문제가 생기면 상태·권한·필수값부터 확인하세요</a:t>
+            </a:r>
+          </a:p>
+        </p:txBody>
+      </p:sp>
+      <p:sp>
+        <p:nvSpPr>
+          <p:cNvPr id="4" name="Rectangle 3"/>
+          <p:cNvSpPr/>
+          <p:nvPr/>
+        </p:nvSpPr>
+        <p:spPr>
+          <a:xfrm>
+            <a:off x="548640" y="1371600"/>
+            <a:ext cx="11094415" cy="9144"/>
+          </a:xfrm>
+          <a:prstGeom prst="rect">
+            <a:avLst/>
+          </a:prstGeom>
+          <a:solidFill>
+            <a:srgbClr val="1E293B"/>
+          </a:solidFill>
+          <a:ln>
+            <a:solidFill>
+              <a:srgbClr val="1E293B"/>
+            </a:solidFill>
+          </a:ln>
+        </p:spPr>
+        <p:style>
+          <a:lnRef idx="1">
+            <a:schemeClr val="accent1"/>
+          </a:lnRef>
+          <a:fillRef idx="3">
+            <a:schemeClr val="accent1"/>
+          </a:fillRef>
+          <a:effectRef idx="2">
+            <a:schemeClr val="accent1"/>
+          </a:effectRef>
+          <a:fontRef idx="minor">
+            <a:schemeClr val="lt1"/>
+          </a:fontRef>
+        </p:style>
+        <p:txBody>
+          <a:bodyPr rtlCol="0" anchor="ctr"/>
+          <a:lstStyle/>
+          <a:p>
+            <a:pPr algn="ctr"/>
+          </a:p>
+        </p:txBody>
+      </p:sp>
+      <p:sp>
+        <p:nvSpPr>
+          <p:cNvPr id="5" name="TextBox 4"/>
+          <p:cNvSpPr txBox="1"/>
+          <p:nvPr/>
+        </p:nvSpPr>
+        <p:spPr>
+          <a:xfrm>
+            <a:off x="548640" y="6309360"/>
+            <a:ext cx="9144000" cy="365760"/>
+          </a:xfrm>
+          <a:prstGeom prst="rect">
+            <a:avLst/>
+          </a:prstGeom>
+          <a:noFill/>
+        </p:spPr>
+        <p:txBody>
+          <a:bodyPr wrap="none">
+            <a:spAutoFit/>
+          </a:bodyPr>
+          <a:lstStyle/>
+          <a:p>
+            <a:pPr>
+              <a:defRPr sz="1000">
+                <a:solidFill>
+                  <a:srgbClr val="94A3B8"/>
+                </a:solidFill>
+                <a:latin typeface="Malgun Gothic"/>
+              </a:defRPr>
+            </a:pPr>
+            <a:r>
+              <a:t>AICA 자격심사 시스템 사용자 매뉴얼 · 경영혁신실</a:t>
+            </a:r>
+          </a:p>
+        </p:txBody>
+      </p:sp>
+      <p:sp>
+        <p:nvSpPr>
+          <p:cNvPr id="6" name="TextBox 5"/>
+          <p:cNvSpPr txBox="1"/>
+          <p:nvPr/>
+        </p:nvSpPr>
+        <p:spPr>
+          <a:xfrm>
+            <a:off x="10820095" y="6309360"/>
+            <a:ext cx="822960" cy="365760"/>
+          </a:xfrm>
+          <a:prstGeom prst="rect">
+            <a:avLst/>
+          </a:prstGeom>
+          <a:noFill/>
+        </p:spPr>
+        <p:txBody>
+          <a:bodyPr wrap="none">
+            <a:spAutoFit/>
+          </a:bodyPr>
+          <a:lstStyle/>
+          <a:p>
+            <a:pPr algn="r">
+              <a:defRPr sz="1000">
+                <a:solidFill>
+                  <a:srgbClr val="94A3B8"/>
+                </a:solidFill>
+                <a:latin typeface="Malgun Gothic"/>
+              </a:defRPr>
+            </a:pPr>
+            <a:r>
+              <a:t>19</a:t>
+            </a:r>
+          </a:p>
+        </p:txBody>
+      </p:sp>
+      <p:sp>
+        <p:nvSpPr>
+          <p:cNvPr id="7" name="Rounded Rectangle 6"/>
+          <p:cNvSpPr/>
+          <p:nvPr/>
+        </p:nvSpPr>
+        <p:spPr>
+          <a:xfrm>
+            <a:off x="548640" y="1645920"/>
+            <a:ext cx="5486400" cy="4389120"/>
+          </a:xfrm>
+          <a:prstGeom prst="roundRect">
+            <a:avLst/>
+          </a:prstGeom>
+          <a:solidFill>
+            <a:srgbClr val="111C38"/>
+          </a:solidFill>
+          <a:ln w="12700">
+            <a:solidFill>
+              <a:srgbClr val="1E293B"/>
+            </a:solidFill>
+          </a:ln>
+        </p:spPr>
+        <p:style>
+          <a:lnRef idx="1">
+            <a:schemeClr val="accent1"/>
+          </a:lnRef>
+          <a:fillRef idx="3">
+            <a:schemeClr val="accent1"/>
+          </a:fillRef>
+          <a:effectRef idx="2">
+            <a:schemeClr val="accent1"/>
+          </a:effectRef>
+          <a:fontRef idx="minor">
+            <a:schemeClr val="lt1"/>
+          </a:fontRef>
+        </p:style>
+        <p:txBody>
+          <a:bodyPr rtlCol="0" anchor="ctr"/>
+          <a:lstStyle/>
+          <a:p>
+            <a:pPr algn="ctr"/>
+          </a:p>
+        </p:txBody>
+      </p:sp>
+      <p:sp>
+        <p:nvSpPr>
+          <p:cNvPr id="8" name="TextBox 7"/>
+          <p:cNvSpPr txBox="1"/>
+          <p:nvPr/>
+        </p:nvSpPr>
+        <p:spPr>
+          <a:xfrm>
+            <a:off x="731520" y="1828800"/>
+            <a:ext cx="5120640" cy="4023360"/>
+          </a:xfrm>
+          <a:prstGeom prst="rect">
+            <a:avLst/>
+          </a:prstGeom>
+          <a:noFill/>
+        </p:spPr>
+        <p:txBody>
+          <a:bodyPr wrap="square">
+            <a:spAutoFit/>
+          </a:bodyPr>
+          <a:lstStyle/>
+          <a:p>
+            <a:pPr>
+              <a:spcAft>
+                <a:spcPts val="1000"/>
+              </a:spcAft>
+              <a:defRPr sz="1600" b="1">
+                <a:solidFill>
+                  <a:srgbClr val="60A5FA"/>
+                </a:solidFill>
+                <a:latin typeface="Malgun Gothic"/>
+              </a:defRPr>
+            </a:pPr>
+            <a:r>
+              <a:t>자주 묻는 질문 및 트러블슈팅 조치법</a:t>
+            </a:r>
+          </a:p>
+          <a:p>
+            <a:pPr>
+              <a:spcAft>
+                <a:spcPts val="600"/>
+              </a:spcAft>
+              <a:defRPr sz="1200">
+                <a:solidFill>
+                  <a:srgbClr val="E2E8F0"/>
+                </a:solidFill>
+                <a:latin typeface="Malgun Gothic"/>
+              </a:defRPr>
+            </a:pPr>
+            <a:r>
+              <a:t>자주 발생하는 이슈 해결 방안:</a:t>
+            </a:r>
+          </a:p>
+          <a:p>
+            <a:pPr>
+              <a:spcAft>
+                <a:spcPts val="600"/>
+              </a:spcAft>
+              <a:defRPr sz="1200">
+                <a:solidFill>
+                  <a:srgbClr val="FFFFFF"/>
+                </a:solidFill>
+                <a:latin typeface="Malgun Gothic"/>
+              </a:defRPr>
+            </a:pPr>
+            <a:r>
+              <a:t>• 1. 로그인 실패: 등록된 사용자 성명과 사내 이메일 주소가 정확한지 대조해 보세요.</a:t>
+            </a:r>
+          </a:p>
+          <a:p>
+            <a:pPr>
+              <a:spcAft>
+                <a:spcPts val="600"/>
+              </a:spcAft>
+              <a:defRPr sz="1200">
+                <a:solidFill>
+                  <a:srgbClr val="FFFFFF"/>
+                </a:solidFill>
+                <a:latin typeface="Malgun Gothic"/>
+              </a:defRPr>
+            </a:pPr>
+            <a:r>
+              <a:t>• 2. 과제 등록 불가: 필수 항목(성명, 이메일, 과제설명 등) 누락 여부 및 심사위원 3인 배정 유무를 확인하세요.</a:t>
+            </a:r>
+          </a:p>
+          <a:p>
+            <a:pPr>
+              <a:spcAft>
+                <a:spcPts val="600"/>
+              </a:spcAft>
+              <a:defRPr sz="1200">
+                <a:solidFill>
+                  <a:srgbClr val="FFFFFF"/>
+                </a:solidFill>
+                <a:latin typeface="Malgun Gothic"/>
+              </a:defRPr>
+            </a:pPr>
+            <a:r>
+              <a:t>• 3. 점수·판정 미표시: 배정된 3인 패널 심사위원(현업, 기술, 보안) 전원이 최종 제출을 마쳤는지 확인하세요.</a:t>
+            </a:r>
+          </a:p>
+          <a:p>
+            <a:pPr>
+              <a:spcAft>
+                <a:spcPts val="600"/>
+              </a:spcAft>
+              <a:defRPr sz="1200">
+                <a:solidFill>
+                  <a:srgbClr val="FFFFFF"/>
+                </a:solidFill>
+                <a:latin typeface="Malgun Gothic"/>
+              </a:defRPr>
+            </a:pPr>
+            <a:r>
+              <a:t>• 4. 자료 링크 오류: 사내 보안 인트라넷 링크의 접근 권한 허용 여부 및 URL 정상 동작 여부를 사전에 검토하세요.</a:t>
+            </a:r>
+          </a:p>
+          <a:p>
+            <a:br/>
+            <a:pPr>
+              <a:spcAft>
+                <a:spcPts val="600"/>
+              </a:spcAft>
+              <a:defRPr sz="1200" b="1">
+                <a:solidFill>
+                  <a:srgbClr val="FACC15"/>
+                </a:solidFill>
+                <a:latin typeface="Malgun Gothic"/>
+              </a:defRPr>
+            </a:pPr>
+            <a:r>
+              <a:t>💡 완료 전 4대 필수 체크 사항: 정확한 후보자 정보, 이해상충이 없는 패널 매핑, 명확한 평가 근거 작성, 보안 결격 검증 완료</a:t>
+            </a:r>
+          </a:p>
+        </p:txBody>
+      </p:sp>
+      <p:sp>
+        <p:nvSpPr>
+          <p:cNvPr id="9" name="Rounded Rectangle 8"/>
+          <p:cNvSpPr/>
+          <p:nvPr/>
+        </p:nvSpPr>
+        <p:spPr>
+          <a:xfrm>
+            <a:off x="6309360" y="1645920"/>
+            <a:ext cx="5303520" cy="4389120"/>
+          </a:xfrm>
+          <a:prstGeom prst="roundRect">
+            <a:avLst/>
+          </a:prstGeom>
+          <a:solidFill>
+            <a:srgbClr val="111C38"/>
+          </a:solidFill>
+          <a:ln w="12700">
+            <a:solidFill>
+              <a:srgbClr val="1E293B"/>
+            </a:solidFill>
+          </a:ln>
+        </p:spPr>
+        <p:style>
+          <a:lnRef idx="1">
+            <a:schemeClr val="accent1"/>
+          </a:lnRef>
+          <a:fillRef idx="3">
+            <a:schemeClr val="accent1"/>
+          </a:fillRef>
+          <a:effectRef idx="2">
+            <a:schemeClr val="accent1"/>
+          </a:effectRef>
+          <a:fontRef idx="minor">
+            <a:schemeClr val="lt1"/>
+          </a:fontRef>
+        </p:style>
+        <p:txBody>
+          <a:bodyPr rtlCol="0" anchor="ctr"/>
+          <a:lstStyle/>
+          <a:p>
+            <a:pPr algn="ctr"/>
+          </a:p>
+        </p:txBody>
+      </p:sp>
     </p:spTree>
   </p:cSld>
   <p:clrMapOvr>
@@ -7287,7 +8011,7 @@
     <p:bg>
       <p:bgPr>
         <a:solidFill>
-          <a:srgbClr val="0F172A"/>
+          <a:srgbClr val="0B1329"/>
         </a:solidFill>
         <a:effectLst/>
       </p:bgPr>
@@ -7308,7 +8032,7 @@
         <p:spPr>
           <a:xfrm>
             <a:off x="548640" y="365760"/>
-            <a:ext cx="7315200" cy="365760"/>
+            <a:ext cx="7315200" cy="320040"/>
           </a:xfrm>
           <a:prstGeom prst="rect">
             <a:avLst/>
@@ -7316,17 +8040,17 @@
           <a:noFill/>
         </p:spPr>
         <p:txBody>
-          <a:bodyPr wrap="none">
+          <a:bodyPr wrap="square">
             <a:spAutoFit/>
           </a:bodyPr>
           <a:lstStyle/>
           <a:p>
             <a:pPr>
-              <a:defRPr sz="1100" b="1">
+              <a:defRPr sz="1300" b="1">
                 <a:solidFill>
                   <a:srgbClr val="38BDF8"/>
                 </a:solidFill>
-                <a:latin typeface="Noto Sans KR"/>
+                <a:latin typeface="Malgun Gothic"/>
               </a:defRPr>
             </a:pPr>
             <a:r>
@@ -7344,7 +8068,7 @@
         <p:spPr>
           <a:xfrm>
             <a:off x="548640" y="640080"/>
-            <a:ext cx="10058400" cy="731520"/>
+            <a:ext cx="10058400" cy="640080"/>
           </a:xfrm>
           <a:prstGeom prst="rect">
             <a:avLst/>
@@ -7352,17 +8076,17 @@
           <a:noFill/>
         </p:spPr>
         <p:txBody>
-          <a:bodyPr wrap="none">
+          <a:bodyPr wrap="square">
             <a:spAutoFit/>
           </a:bodyPr>
           <a:lstStyle/>
           <a:p>
             <a:pPr>
-              <a:defRPr sz="2600" b="1">
+              <a:defRPr sz="2400" b="1">
                 <a:solidFill>
                   <a:srgbClr val="FFFFFF"/>
                 </a:solidFill>
-                <a:latin typeface="Noto Sans KR"/>
+                <a:latin typeface="Malgun Gothic"/>
               </a:defRPr>
             </a:pPr>
             <a:r>
@@ -7386,10 +8110,12 @@
             <a:avLst/>
           </a:prstGeom>
           <a:solidFill>
-            <a:srgbClr val="334155"/>
+            <a:srgbClr val="1E293B"/>
           </a:solidFill>
           <a:ln>
-            <a:noFill/>
+            <a:solidFill>
+              <a:srgbClr val="1E293B"/>
+            </a:solidFill>
           </a:ln>
         </p:spPr>
         <p:style>
@@ -7437,15 +8163,15 @@
           <a:lstStyle/>
           <a:p>
             <a:pPr>
-              <a:defRPr sz="900">
+              <a:defRPr sz="1000">
                 <a:solidFill>
                   <a:srgbClr val="94A3B8"/>
                 </a:solidFill>
-                <a:latin typeface="Noto Sans KR"/>
-              </a:defRPr>
-            </a:pPr>
-            <a:r>
-              <a:t>AICA 자격심사 시스템 사용자 매뉴얼 · Web App Dark Theme</a:t>
+                <a:latin typeface="Malgun Gothic"/>
+              </a:defRPr>
+            </a:pPr>
+            <a:r>
+              <a:t>AICA 자격심사 시스템 사용자 매뉴얼 · 경영혁신실</a:t>
             </a:r>
           </a:p>
         </p:txBody>
@@ -7473,11 +8199,11 @@
           <a:lstStyle/>
           <a:p>
             <a:pPr algn="r">
-              <a:defRPr sz="900">
+              <a:defRPr sz="1000">
                 <a:solidFill>
                   <a:srgbClr val="94A3B8"/>
                 </a:solidFill>
-                <a:latin typeface="Noto Sans KR"/>
+                <a:latin typeface="Malgun Gothic"/>
               </a:defRPr>
             </a:pPr>
             <a:r>
@@ -7494,18 +8220,18 @@
         </p:nvSpPr>
         <p:spPr>
           <a:xfrm>
-            <a:off x="548640" y="1828800"/>
-            <a:ext cx="5486400" cy="4114800"/>
+            <a:off x="548640" y="1645920"/>
+            <a:ext cx="5486400" cy="4389120"/>
           </a:xfrm>
           <a:prstGeom prst="roundRect">
             <a:avLst/>
           </a:prstGeom>
           <a:solidFill>
-            <a:srgbClr val="1E293B"/>
+            <a:srgbClr val="111C38"/>
           </a:solidFill>
           <a:ln w="12700">
             <a:solidFill>
-              <a:srgbClr val="334155"/>
+              <a:srgbClr val="1E293B"/>
             </a:solidFill>
           </a:ln>
         </p:spPr>
@@ -7539,8 +8265,8 @@
         </p:nvSpPr>
         <p:spPr>
           <a:xfrm>
-            <a:off x="731520" y="2011680"/>
-            <a:ext cx="5120640" cy="3749040"/>
+            <a:off x="731520" y="1828800"/>
+            <a:ext cx="5120640" cy="4023360"/>
           </a:xfrm>
           <a:prstGeom prst="rect">
             <a:avLst/>
@@ -7555,33 +8281,83 @@
           <a:p>
             <a:pPr>
               <a:spcAft>
-                <a:spcPts val="1200"/>
-              </a:spcAft>
-              <a:defRPr sz="1500" b="1">
+                <a:spcPts val="1000"/>
+              </a:spcAft>
+              <a:defRPr sz="1600" b="1">
+                <a:solidFill>
+                  <a:srgbClr val="60A5FA"/>
+                </a:solidFill>
+                <a:latin typeface="Malgun Gothic"/>
+              </a:defRPr>
+            </a:pPr>
+            <a:r>
+              <a:t>자격 심사 전체 워크플로우</a:t>
+            </a:r>
+          </a:p>
+          <a:p>
+            <a:pPr>
+              <a:spcAft>
+                <a:spcPts val="600"/>
+              </a:spcAft>
+              <a:defRPr sz="1200">
+                <a:solidFill>
+                  <a:srgbClr val="E2E8F0"/>
+                </a:solidFill>
+                <a:latin typeface="Malgun Gothic"/>
+              </a:defRPr>
+            </a:pPr>
+            <a:r>
+              <a:t>운영간사와 심사위원 간의 원활한 업무 연계 흐름:</a:t>
+            </a:r>
+          </a:p>
+          <a:p>
+            <a:br/>
+            <a:pPr>
+              <a:spcAft>
+                <a:spcPts val="600"/>
+              </a:spcAft>
+              <a:defRPr sz="1200">
+                <a:solidFill>
+                  <a:srgbClr val="E2E8F0"/>
+                </a:solidFill>
+                <a:latin typeface="Malgun Gothic"/>
+              </a:defRPr>
+            </a:pPr>
+            <a:r>
+              <a:t>1. 과제 등록:</a:t>
+            </a:r>
+          </a:p>
+          <a:p>
+            <a:pPr>
+              <a:spcAft>
+                <a:spcPts val="600"/>
+              </a:spcAft>
+              <a:defRPr sz="1200">
                 <a:solidFill>
                   <a:srgbClr val="FFFFFF"/>
                 </a:solidFill>
-                <a:latin typeface="Noto Sans KR"/>
-              </a:defRPr>
-            </a:pPr>
-            <a:r>
-              <a:t>자격 심사 전체 워크플로우</a:t>
-            </a:r>
-          </a:p>
-          <a:p>
+                <a:latin typeface="Malgun Gothic"/>
+              </a:defRPr>
+            </a:pPr>
+            <a:r>
+              <a:t>• 간사가 지원자명, 과제설명, 증빙자료 링크 및 심사예정일 등록</a:t>
+            </a:r>
+          </a:p>
+          <a:p>
+            <a:br/>
             <a:pPr>
               <a:spcAft>
                 <a:spcPts val="600"/>
               </a:spcAft>
-              <a:defRPr sz="1100">
-                <a:solidFill>
-                  <a:srgbClr val="94A3B8"/>
-                </a:solidFill>
-                <a:latin typeface="Noto Sans KR"/>
-              </a:defRPr>
-            </a:pPr>
-            <a:r>
-              <a:t>운영간사와 심사위원 간의 원활한 업무 연계 흐름:</a:t>
+              <a:defRPr sz="1200">
+                <a:solidFill>
+                  <a:srgbClr val="E2E8F0"/>
+                </a:solidFill>
+                <a:latin typeface="Malgun Gothic"/>
+              </a:defRPr>
+            </a:pPr>
+            <a:r>
+              <a:t>2. 3인 패널 배정:</a:t>
             </a:r>
           </a:p>
           <a:p>
@@ -7589,31 +8365,32 @@
               <a:spcAft>
                 <a:spcPts val="600"/>
               </a:spcAft>
-              <a:defRPr sz="1100">
-                <a:solidFill>
-                  <a:srgbClr val="94A3B8"/>
-                </a:solidFill>
-                <a:latin typeface="Noto Sans KR"/>
-              </a:defRPr>
-            </a:pPr>
-            <a:r>
-              <a:t>• 1단계 (과제 등록): 간사가 지원자명, 과제설명, 증빙 자료 등록</a:t>
-            </a:r>
-          </a:p>
-          <a:p>
+              <a:defRPr sz="1200">
+                <a:solidFill>
+                  <a:srgbClr val="FFFFFF"/>
+                </a:solidFill>
+                <a:latin typeface="Malgun Gothic"/>
+              </a:defRPr>
+            </a:pPr>
+            <a:r>
+              <a:t>• 현업, 기술, 보안별 심사위원 자동 이해상충 검증 및 매핑</a:t>
+            </a:r>
+          </a:p>
+          <a:p>
+            <a:br/>
             <a:pPr>
               <a:spcAft>
                 <a:spcPts val="600"/>
               </a:spcAft>
-              <a:defRPr sz="1100">
-                <a:solidFill>
-                  <a:srgbClr val="94A3B8"/>
-                </a:solidFill>
-                <a:latin typeface="Noto Sans KR"/>
-              </a:defRPr>
-            </a:pPr>
-            <a:r>
-              <a:t>• 2단계 (3인 패널 배정): 현업, 기술, 보안별 심사위원 자동 매핑</a:t>
+              <a:defRPr sz="1200">
+                <a:solidFill>
+                  <a:srgbClr val="E2E8F0"/>
+                </a:solidFill>
+                <a:latin typeface="Malgun Gothic"/>
+              </a:defRPr>
+            </a:pPr>
+            <a:r>
+              <a:t>3. 독립 심사:</a:t>
             </a:r>
           </a:p>
           <a:p>
@@ -7621,48 +8398,48 @@
               <a:spcAft>
                 <a:spcPts val="600"/>
               </a:spcAft>
-              <a:defRPr sz="1100">
-                <a:solidFill>
-                  <a:srgbClr val="94A3B8"/>
-                </a:solidFill>
-                <a:latin typeface="Noto Sans KR"/>
-              </a:defRPr>
-            </a:pPr>
-            <a:r>
-              <a:t>• 3단계 (독립 심사): 각 위원이 증빙을 검증하고 5단계 평가 제출</a:t>
-            </a:r>
-          </a:p>
-          <a:p>
+              <a:defRPr sz="1200">
+                <a:solidFill>
+                  <a:srgbClr val="FFFFFF"/>
+                </a:solidFill>
+                <a:latin typeface="Malgun Gothic"/>
+              </a:defRPr>
+            </a:pPr>
+            <a:r>
+              <a:t>• 각 위원이 증빙을 다차원 검증하고 5단계 루브릭 평가 제출</a:t>
+            </a:r>
+          </a:p>
+          <a:p>
+            <a:br/>
             <a:pPr>
               <a:spcAft>
                 <a:spcPts val="600"/>
               </a:spcAft>
-              <a:defRPr sz="1100">
-                <a:solidFill>
-                  <a:srgbClr val="94A3B8"/>
-                </a:solidFill>
-                <a:latin typeface="Noto Sans KR"/>
-              </a:defRPr>
-            </a:pPr>
-            <a:r>
-              <a:t>• 4단계 (종합 판정): 3인 점수 평균 및 결격 검증 후 판정서 발급</a:t>
-            </a:r>
-          </a:p>
-          <a:p>
-            <a:br/>
+              <a:defRPr sz="1200">
+                <a:solidFill>
+                  <a:srgbClr val="E2E8F0"/>
+                </a:solidFill>
+                <a:latin typeface="Malgun Gothic"/>
+              </a:defRPr>
+            </a:pPr>
+            <a:r>
+              <a:t>4. 종합 판정:</a:t>
+            </a:r>
+          </a:p>
+          <a:p>
             <a:pPr>
               <a:spcAft>
                 <a:spcPts val="600"/>
               </a:spcAft>
-              <a:defRPr sz="1100">
-                <a:solidFill>
-                  <a:srgbClr val="94A3B8"/>
-                </a:solidFill>
-                <a:latin typeface="Noto Sans KR"/>
-              </a:defRPr>
-            </a:pPr>
-            <a:r>
-              <a:t>💡 우측 화면: 리액트 및 클라우드 파이어스토어(Firestore) 데이터베이스 기반 실시간 평가 시스템의 전체 구조</a:t>
+              <a:defRPr sz="1200">
+                <a:solidFill>
+                  <a:srgbClr val="FFFFFF"/>
+                </a:solidFill>
+                <a:latin typeface="Malgun Gothic"/>
+              </a:defRPr>
+            </a:pPr>
+            <a:r>
+              <a:t>• 3인 점수 평균 및 결격 검증 후 최종 판정서 발급 및 명패 동기화</a:t>
             </a:r>
           </a:p>
         </p:txBody>
@@ -7675,18 +8452,18 @@
         </p:nvSpPr>
         <p:spPr>
           <a:xfrm>
-            <a:off x="6400800" y="1828800"/>
-            <a:ext cx="5212080" cy="4114800"/>
+            <a:off x="6309360" y="1645920"/>
+            <a:ext cx="5303520" cy="4389120"/>
           </a:xfrm>
           <a:prstGeom prst="roundRect">
             <a:avLst/>
           </a:prstGeom>
           <a:solidFill>
-            <a:srgbClr val="1E293B"/>
+            <a:srgbClr val="111C38"/>
           </a:solidFill>
-          <a:ln w="19050">
+          <a:ln w="12700">
             <a:solidFill>
-              <a:srgbClr val="6366F1"/>
+              <a:srgbClr val="1E293B"/>
             </a:solidFill>
           </a:ln>
         </p:spPr>
@@ -7714,7 +8491,7 @@
       </p:sp>
       <p:pic>
         <p:nvPicPr>
-          <p:cNvPr id="10" name="Picture 9" descr="aica_evaluation_workspace_mockup_1784167999282.png"/>
+          <p:cNvPr id="10" name="Picture 9" descr="page_02.png"/>
           <p:cNvPicPr>
             <a:picLocks noChangeAspect="1"/>
           </p:cNvPicPr>
@@ -7728,14 +8505,92 @@
         </p:blipFill>
         <p:spPr>
           <a:xfrm>
-            <a:off x="7086600" y="1965960"/>
-            <a:ext cx="3840480" cy="3840480"/>
+            <a:off x="6400800" y="1737360"/>
+            <a:ext cx="5120640" cy="4206240"/>
           </a:xfrm>
           <a:prstGeom prst="rect">
             <a:avLst/>
           </a:prstGeom>
         </p:spPr>
       </p:pic>
+    </p:spTree>
+  </p:cSld>
+  <p:clrMapOvr>
+    <a:masterClrMapping/>
+  </p:clrMapOvr>
+</p:sld>
+</file>
+
+<file path=ppt/slides/slide20.xml><?xml version="1.0" encoding="utf-8"?>
+<p:sld xmlns:a="http://schemas.openxmlformats.org/drawingml/2006/main" xmlns:p="http://schemas.openxmlformats.org/presentationml/2006/main" xmlns:r="http://schemas.openxmlformats.org/officeDocument/2006/relationships">
+  <p:cSld>
+    <p:bg>
+      <p:bgPr>
+        <a:solidFill>
+          <a:srgbClr val="0B1329"/>
+        </a:solidFill>
+        <a:effectLst/>
+      </p:bgPr>
+    </p:bg>
+    <p:spTree>
+      <p:nvGrpSpPr>
+        <p:cNvPr id="1" name=""/>
+        <p:cNvGrpSpPr/>
+        <p:nvPr/>
+      </p:nvGrpSpPr>
+      <p:grpSpPr/>
+      <p:sp>
+        <p:nvSpPr>
+          <p:cNvPr id="2" name="TextBox 1"/>
+          <p:cNvSpPr txBox="1"/>
+          <p:nvPr/>
+        </p:nvSpPr>
+        <p:spPr>
+          <a:xfrm>
+            <a:off x="914400" y="2286000"/>
+            <a:ext cx="10362895" cy="2743200"/>
+          </a:xfrm>
+          <a:prstGeom prst="rect">
+            <a:avLst/>
+          </a:prstGeom>
+          <a:noFill/>
+        </p:spPr>
+        <p:txBody>
+          <a:bodyPr wrap="square">
+            <a:spAutoFit/>
+          </a:bodyPr>
+          <a:lstStyle/>
+          <a:p>
+            <a:pPr algn="ctr">
+              <a:spcAft>
+                <a:spcPts val="1600"/>
+              </a:spcAft>
+              <a:defRPr sz="3600" b="1">
+                <a:solidFill>
+                  <a:srgbClr val="FFFFFF"/>
+                </a:solidFill>
+                <a:latin typeface="Malgun Gothic"/>
+              </a:defRPr>
+            </a:pPr>
+            <a:r>
+              <a:t>End of Document</a:t>
+            </a:r>
+          </a:p>
+          <a:p>
+            <a:pPr algn="ctr">
+              <a:defRPr sz="1600">
+                <a:solidFill>
+                  <a:srgbClr val="38BDF8"/>
+                </a:solidFill>
+                <a:latin typeface="Malgun Gothic"/>
+              </a:defRPr>
+            </a:pPr>
+            <a:r>
+              <a:t>AICA 자격심사 시스템 사용자 매뉴얼 · 경영혁신실</a:t>
+            </a:r>
+          </a:p>
+        </p:txBody>
+      </p:sp>
     </p:spTree>
   </p:cSld>
   <p:clrMapOvr>
@@ -7750,7 +8605,7 @@
     <p:bg>
       <p:bgPr>
         <a:solidFill>
-          <a:srgbClr val="0F172A"/>
+          <a:srgbClr val="0B1329"/>
         </a:solidFill>
         <a:effectLst/>
       </p:bgPr>
@@ -7771,7 +8626,7 @@
         <p:spPr>
           <a:xfrm>
             <a:off x="548640" y="365760"/>
-            <a:ext cx="7315200" cy="365760"/>
+            <a:ext cx="7315200" cy="320040"/>
           </a:xfrm>
           <a:prstGeom prst="rect">
             <a:avLst/>
@@ -7779,17 +8634,17 @@
           <a:noFill/>
         </p:spPr>
         <p:txBody>
-          <a:bodyPr wrap="none">
+          <a:bodyPr wrap="square">
             <a:spAutoFit/>
           </a:bodyPr>
           <a:lstStyle/>
           <a:p>
             <a:pPr>
-              <a:defRPr sz="1100" b="1">
+              <a:defRPr sz="1300" b="1">
                 <a:solidFill>
                   <a:srgbClr val="38BDF8"/>
                 </a:solidFill>
-                <a:latin typeface="Noto Sans KR"/>
+                <a:latin typeface="Malgun Gothic"/>
               </a:defRPr>
             </a:pPr>
             <a:r>
@@ -7807,7 +8662,7 @@
         <p:spPr>
           <a:xfrm>
             <a:off x="548640" y="640080"/>
-            <a:ext cx="10058400" cy="731520"/>
+            <a:ext cx="10058400" cy="640080"/>
           </a:xfrm>
           <a:prstGeom prst="rect">
             <a:avLst/>
@@ -7815,17 +8670,17 @@
           <a:noFill/>
         </p:spPr>
         <p:txBody>
-          <a:bodyPr wrap="none">
+          <a:bodyPr wrap="square">
             <a:spAutoFit/>
           </a:bodyPr>
           <a:lstStyle/>
           <a:p>
             <a:pPr>
-              <a:defRPr sz="2600" b="1">
+              <a:defRPr sz="2400" b="1">
                 <a:solidFill>
                   <a:srgbClr val="FFFFFF"/>
                 </a:solidFill>
-                <a:latin typeface="Noto Sans KR"/>
+                <a:latin typeface="Malgun Gothic"/>
               </a:defRPr>
             </a:pPr>
             <a:r>
@@ -7849,10 +8704,12 @@
             <a:avLst/>
           </a:prstGeom>
           <a:solidFill>
-            <a:srgbClr val="334155"/>
+            <a:srgbClr val="1E293B"/>
           </a:solidFill>
           <a:ln>
-            <a:noFill/>
+            <a:solidFill>
+              <a:srgbClr val="1E293B"/>
+            </a:solidFill>
           </a:ln>
         </p:spPr>
         <p:style>
@@ -7900,15 +8757,15 @@
           <a:lstStyle/>
           <a:p>
             <a:pPr>
-              <a:defRPr sz="900">
+              <a:defRPr sz="1000">
                 <a:solidFill>
                   <a:srgbClr val="94A3B8"/>
                 </a:solidFill>
-                <a:latin typeface="Noto Sans KR"/>
-              </a:defRPr>
-            </a:pPr>
-            <a:r>
-              <a:t>AICA 자격심사 시스템 사용자 매뉴얼 · Web App Dark Theme</a:t>
+                <a:latin typeface="Malgun Gothic"/>
+              </a:defRPr>
+            </a:pPr>
+            <a:r>
+              <a:t>AICA 자격심사 시스템 사용자 매뉴얼 · 경영혁신실</a:t>
             </a:r>
           </a:p>
         </p:txBody>
@@ -7936,11 +8793,11 @@
           <a:lstStyle/>
           <a:p>
             <a:pPr algn="r">
-              <a:defRPr sz="900">
+              <a:defRPr sz="1000">
                 <a:solidFill>
                   <a:srgbClr val="94A3B8"/>
                 </a:solidFill>
-                <a:latin typeface="Noto Sans KR"/>
+                <a:latin typeface="Malgun Gothic"/>
               </a:defRPr>
             </a:pPr>
             <a:r>
@@ -7957,18 +8814,18 @@
         </p:nvSpPr>
         <p:spPr>
           <a:xfrm>
-            <a:off x="548640" y="1828800"/>
-            <a:ext cx="5486400" cy="4114800"/>
+            <a:off x="548640" y="1645920"/>
+            <a:ext cx="5486400" cy="4389120"/>
           </a:xfrm>
           <a:prstGeom prst="roundRect">
             <a:avLst/>
           </a:prstGeom>
           <a:solidFill>
-            <a:srgbClr val="1E293B"/>
+            <a:srgbClr val="111C38"/>
           </a:solidFill>
           <a:ln w="12700">
             <a:solidFill>
-              <a:srgbClr val="334155"/>
+              <a:srgbClr val="1E293B"/>
             </a:solidFill>
           </a:ln>
         </p:spPr>
@@ -8002,8 +8859,8 @@
         </p:nvSpPr>
         <p:spPr>
           <a:xfrm>
-            <a:off x="731520" y="2011680"/>
-            <a:ext cx="5120640" cy="3749040"/>
+            <a:off x="731520" y="1828800"/>
+            <a:ext cx="5120640" cy="4023360"/>
           </a:xfrm>
           <a:prstGeom prst="rect">
             <a:avLst/>
@@ -8018,17 +8875,33 @@
           <a:p>
             <a:pPr>
               <a:spcAft>
-                <a:spcPts val="1200"/>
-              </a:spcAft>
-              <a:defRPr sz="1500" b="1">
+                <a:spcPts val="1000"/>
+              </a:spcAft>
+              <a:defRPr sz="1600" b="1">
+                <a:solidFill>
+                  <a:srgbClr val="60A5FA"/>
+                </a:solidFill>
+                <a:latin typeface="Malgun Gothic"/>
+              </a:defRPr>
+            </a:pPr>
+            <a:r>
+              <a:t>로그인 순서 및 계정 인증</a:t>
+            </a:r>
+          </a:p>
+          <a:p>
+            <a:pPr>
+              <a:spcAft>
+                <a:spcPts val="600"/>
+              </a:spcAft>
+              <a:defRPr sz="1200">
                 <a:solidFill>
                   <a:srgbClr val="FFFFFF"/>
                 </a:solidFill>
-                <a:latin typeface="Noto Sans KR"/>
-              </a:defRPr>
-            </a:pPr>
-            <a:r>
-              <a:t>로그인 순서 및 계정 인증</a:t>
+                <a:latin typeface="Malgun Gothic"/>
+              </a:defRPr>
+            </a:pPr>
+            <a:r>
+              <a:t>1. 성명(ID)에 등록된 성명을 입력</a:t>
             </a:r>
           </a:p>
           <a:p>
@@ -8036,27 +8909,28 @@
               <a:spcAft>
                 <a:spcPts val="600"/>
               </a:spcAft>
-              <a:defRPr sz="1100">
-                <a:solidFill>
-                  <a:srgbClr val="94A3B8"/>
-                </a:solidFill>
-                <a:latin typeface="Noto Sans KR"/>
-              </a:defRPr>
-            </a:pPr>
-            <a:r>
-              <a:t>1. 성명(ID)에 등록된 성명을 입력</a:t>
-            </a:r>
-          </a:p>
-          <a:p>
+              <a:defRPr sz="1200">
+                <a:solidFill>
+                  <a:srgbClr val="FFFFFF"/>
+                </a:solidFill>
+                <a:latin typeface="Malgun Gothic"/>
+              </a:defRPr>
+            </a:pPr>
+            <a:r>
+              <a:t>• 예: 이동훈(간사), 이재윤(현업), 오찬환(기술), 이찬영(보안)</a:t>
+            </a:r>
+          </a:p>
+          <a:p>
+            <a:br/>
             <a:pPr>
               <a:spcAft>
                 <a:spcPts val="600"/>
               </a:spcAft>
-              <a:defRPr sz="1100">
-                <a:solidFill>
-                  <a:srgbClr val="94A3B8"/>
-                </a:solidFill>
-                <a:latin typeface="Noto Sans KR"/>
+              <a:defRPr sz="1200">
+                <a:solidFill>
+                  <a:srgbClr val="E2E8F0"/>
+                </a:solidFill>
+                <a:latin typeface="Malgun Gothic"/>
               </a:defRPr>
             </a:pPr>
             <a:r>
@@ -8068,11 +8942,28 @@
               <a:spcAft>
                 <a:spcPts val="600"/>
               </a:spcAft>
-              <a:defRPr sz="1100">
-                <a:solidFill>
-                  <a:srgbClr val="94A3B8"/>
-                </a:solidFill>
-                <a:latin typeface="Noto Sans KR"/>
+              <a:defRPr sz="1200">
+                <a:solidFill>
+                  <a:srgbClr val="FFFFFF"/>
+                </a:solidFill>
+                <a:latin typeface="Malgun Gothic"/>
+              </a:defRPr>
+            </a:pPr>
+            <a:r>
+              <a:t>• 사내 그룹웨어 이메일 주소를 입력합니다.</a:t>
+            </a:r>
+          </a:p>
+          <a:p>
+            <a:br/>
+            <a:pPr>
+              <a:spcAft>
+                <a:spcPts val="600"/>
+              </a:spcAft>
+              <a:defRPr sz="1200">
+                <a:solidFill>
+                  <a:srgbClr val="E2E8F0"/>
+                </a:solidFill>
+                <a:latin typeface="Malgun Gothic"/>
               </a:defRPr>
             </a:pPr>
             <a:r>
@@ -8080,15 +8971,16 @@
             </a:r>
           </a:p>
           <a:p>
+            <a:br/>
             <a:pPr>
               <a:spcAft>
                 <a:spcPts val="600"/>
               </a:spcAft>
-              <a:defRPr sz="1100">
-                <a:solidFill>
-                  <a:srgbClr val="94A3B8"/>
-                </a:solidFill>
-                <a:latin typeface="Noto Sans KR"/>
+              <a:defRPr sz="1200">
+                <a:solidFill>
+                  <a:srgbClr val="E2E8F0"/>
+                </a:solidFill>
+                <a:latin typeface="Malgun Gothic"/>
               </a:defRPr>
             </a:pPr>
             <a:r>
@@ -8101,32 +8993,15 @@
               <a:spcAft>
                 <a:spcPts val="600"/>
               </a:spcAft>
-              <a:defRPr sz="1100">
-                <a:solidFill>
-                  <a:srgbClr val="94A3B8"/>
-                </a:solidFill>
-                <a:latin typeface="Noto Sans KR"/>
-              </a:defRPr>
-            </a:pPr>
-            <a:r>
-              <a:t>* 입력이 없거나 일치하지 않으면 로그인 오류가 표시됩니다. 운영간사에게 등록 정보 확인을 요청하세요.</a:t>
-            </a:r>
-          </a:p>
-          <a:p>
-            <a:br/>
-            <a:pPr>
-              <a:spcAft>
-                <a:spcPts val="600"/>
-              </a:spcAft>
-              <a:defRPr sz="1100">
-                <a:solidFill>
-                  <a:srgbClr val="94A3B8"/>
-                </a:solidFill>
-                <a:latin typeface="Noto Sans KR"/>
-              </a:defRPr>
-            </a:pPr>
-            <a:r>
-              <a:t>오른쪽 화면: 실제 리액트 시스템 로그인 창 및 하단 테스트 계정 정보창 캡처 화면</a:t>
+              <a:defRPr sz="1200" b="1">
+                <a:solidFill>
+                  <a:srgbClr val="FACC15"/>
+                </a:solidFill>
+                <a:latin typeface="Malgun Gothic"/>
+              </a:defRPr>
+            </a:pPr>
+            <a:r>
+              <a:t>💡 입력이 없거나 일치하지 않으면 로그인 오류가 표시됩니다. 운영간사에게 등록 정보 확인을 요청하세요.</a:t>
             </a:r>
           </a:p>
         </p:txBody>
@@ -8139,18 +9014,18 @@
         </p:nvSpPr>
         <p:spPr>
           <a:xfrm>
-            <a:off x="6400800" y="1828800"/>
-            <a:ext cx="5212080" cy="4114800"/>
+            <a:off x="6309360" y="1645920"/>
+            <a:ext cx="5303520" cy="4389120"/>
           </a:xfrm>
           <a:prstGeom prst="roundRect">
             <a:avLst/>
           </a:prstGeom>
           <a:solidFill>
-            <a:srgbClr val="1E293B"/>
+            <a:srgbClr val="111C38"/>
           </a:solidFill>
-          <a:ln w="19050">
+          <a:ln w="12700">
             <a:solidFill>
-              <a:srgbClr val="6366F1"/>
+              <a:srgbClr val="1E293B"/>
             </a:solidFill>
           </a:ln>
         </p:spPr>
@@ -8178,7 +9053,7 @@
       </p:sp>
       <p:pic>
         <p:nvPicPr>
-          <p:cNvPr id="10" name="Picture 9" descr="media__1784176101924.png"/>
+          <p:cNvPr id="10" name="Picture 9" descr="page_03.png"/>
           <p:cNvPicPr>
             <a:picLocks noChangeAspect="1"/>
           </p:cNvPicPr>
@@ -8192,8 +9067,8 @@
         </p:blipFill>
         <p:spPr>
           <a:xfrm>
-            <a:off x="6537960" y="2398922"/>
-            <a:ext cx="4937760" cy="2974554"/>
+            <a:off x="6400800" y="1737360"/>
+            <a:ext cx="5120640" cy="4206240"/>
           </a:xfrm>
           <a:prstGeom prst="rect">
             <a:avLst/>
@@ -8214,7 +9089,7 @@
     <p:bg>
       <p:bgPr>
         <a:solidFill>
-          <a:srgbClr val="0F172A"/>
+          <a:srgbClr val="0B1329"/>
         </a:solidFill>
         <a:effectLst/>
       </p:bgPr>
@@ -8235,7 +9110,7 @@
         <p:spPr>
           <a:xfrm>
             <a:off x="548640" y="365760"/>
-            <a:ext cx="7315200" cy="365760"/>
+            <a:ext cx="7315200" cy="320040"/>
           </a:xfrm>
           <a:prstGeom prst="rect">
             <a:avLst/>
@@ -8243,17 +9118,17 @@
           <a:noFill/>
         </p:spPr>
         <p:txBody>
-          <a:bodyPr wrap="none">
+          <a:bodyPr wrap="square">
             <a:spAutoFit/>
           </a:bodyPr>
           <a:lstStyle/>
           <a:p>
             <a:pPr>
-              <a:defRPr sz="1100" b="1">
+              <a:defRPr sz="1300" b="1">
                 <a:solidFill>
                   <a:srgbClr val="38BDF8"/>
                 </a:solidFill>
-                <a:latin typeface="Noto Sans KR"/>
+                <a:latin typeface="Malgun Gothic"/>
               </a:defRPr>
             </a:pPr>
             <a:r>
@@ -8271,7 +9146,7 @@
         <p:spPr>
           <a:xfrm>
             <a:off x="548640" y="640080"/>
-            <a:ext cx="10058400" cy="731520"/>
+            <a:ext cx="10058400" cy="640080"/>
           </a:xfrm>
           <a:prstGeom prst="rect">
             <a:avLst/>
@@ -8279,17 +9154,17 @@
           <a:noFill/>
         </p:spPr>
         <p:txBody>
-          <a:bodyPr wrap="none">
+          <a:bodyPr wrap="square">
             <a:spAutoFit/>
           </a:bodyPr>
           <a:lstStyle/>
           <a:p>
             <a:pPr>
-              <a:defRPr sz="2600" b="1">
+              <a:defRPr sz="2400" b="1">
                 <a:solidFill>
                   <a:srgbClr val="FFFFFF"/>
                 </a:solidFill>
-                <a:latin typeface="Noto Sans KR"/>
+                <a:latin typeface="Malgun Gothic"/>
               </a:defRPr>
             </a:pPr>
             <a:r>
@@ -8313,10 +9188,12 @@
             <a:avLst/>
           </a:prstGeom>
           <a:solidFill>
-            <a:srgbClr val="334155"/>
+            <a:srgbClr val="1E293B"/>
           </a:solidFill>
           <a:ln>
-            <a:noFill/>
+            <a:solidFill>
+              <a:srgbClr val="1E293B"/>
+            </a:solidFill>
           </a:ln>
         </p:spPr>
         <p:style>
@@ -8364,15 +9241,15 @@
           <a:lstStyle/>
           <a:p>
             <a:pPr>
-              <a:defRPr sz="900">
+              <a:defRPr sz="1000">
                 <a:solidFill>
                   <a:srgbClr val="94A3B8"/>
                 </a:solidFill>
-                <a:latin typeface="Noto Sans KR"/>
-              </a:defRPr>
-            </a:pPr>
-            <a:r>
-              <a:t>AICA 자격심사 시스템 사용자 매뉴얼 · Web App Dark Theme</a:t>
+                <a:latin typeface="Malgun Gothic"/>
+              </a:defRPr>
+            </a:pPr>
+            <a:r>
+              <a:t>AICA 자격심사 시스템 사용자 매뉴얼 · 경영혁신실</a:t>
             </a:r>
           </a:p>
         </p:txBody>
@@ -8400,11 +9277,11 @@
           <a:lstStyle/>
           <a:p>
             <a:pPr algn="r">
-              <a:defRPr sz="900">
+              <a:defRPr sz="1000">
                 <a:solidFill>
                   <a:srgbClr val="94A3B8"/>
                 </a:solidFill>
-                <a:latin typeface="Noto Sans KR"/>
+                <a:latin typeface="Malgun Gothic"/>
               </a:defRPr>
             </a:pPr>
             <a:r>
@@ -8421,18 +9298,18 @@
         </p:nvSpPr>
         <p:spPr>
           <a:xfrm>
-            <a:off x="548640" y="1828800"/>
-            <a:ext cx="5486400" cy="4114800"/>
+            <a:off x="548640" y="1645920"/>
+            <a:ext cx="5486400" cy="4389120"/>
           </a:xfrm>
           <a:prstGeom prst="roundRect">
             <a:avLst/>
           </a:prstGeom>
           <a:solidFill>
-            <a:srgbClr val="1E293B"/>
+            <a:srgbClr val="111C38"/>
           </a:solidFill>
           <a:ln w="12700">
             <a:solidFill>
-              <a:srgbClr val="334155"/>
+              <a:srgbClr val="1E293B"/>
             </a:solidFill>
           </a:ln>
         </p:spPr>
@@ -8466,8 +9343,8 @@
         </p:nvSpPr>
         <p:spPr>
           <a:xfrm>
-            <a:off x="731520" y="2011680"/>
-            <a:ext cx="5120640" cy="3749040"/>
+            <a:off x="731520" y="1828800"/>
+            <a:ext cx="5120640" cy="4023360"/>
           </a:xfrm>
           <a:prstGeom prst="rect">
             <a:avLst/>
@@ -8482,17 +9359,49 @@
           <a:p>
             <a:pPr>
               <a:spcAft>
-                <a:spcPts val="1200"/>
-              </a:spcAft>
-              <a:defRPr sz="1500" b="1">
+                <a:spcPts val="1000"/>
+              </a:spcAft>
+              <a:defRPr sz="1600" b="1">
+                <a:solidFill>
+                  <a:srgbClr val="60A5FA"/>
+                </a:solidFill>
+                <a:latin typeface="Malgun Gothic"/>
+              </a:defRPr>
+            </a:pPr>
+            <a:r>
+              <a:t>사용자 역할 분리 및 완료 기준</a:t>
+            </a:r>
+          </a:p>
+          <a:p>
+            <a:pPr>
+              <a:spcAft>
+                <a:spcPts val="600"/>
+              </a:spcAft>
+              <a:defRPr sz="1200">
+                <a:solidFill>
+                  <a:srgbClr val="E2E8F0"/>
+                </a:solidFill>
+                <a:latin typeface="Malgun Gothic"/>
+              </a:defRPr>
+            </a:pPr>
+            <a:r>
+              <a:t>운영간사의 핵심 임무 및 완료 조건:</a:t>
+            </a:r>
+          </a:p>
+          <a:p>
+            <a:pPr>
+              <a:spcAft>
+                <a:spcPts val="600"/>
+              </a:spcAft>
+              <a:defRPr sz="1200">
                 <a:solidFill>
                   <a:srgbClr val="FFFFFF"/>
                 </a:solidFill>
-                <a:latin typeface="Noto Sans KR"/>
-              </a:defRPr>
-            </a:pPr>
-            <a:r>
-              <a:t>사용자 역할 분리 및 완료 기준</a:t>
+                <a:latin typeface="Malgun Gothic"/>
+              </a:defRPr>
+            </a:pPr>
+            <a:r>
+              <a:t>• 월별 자격심사 일정 관리 및 캘린더 연동</a:t>
             </a:r>
           </a:p>
           <a:p>
@@ -8500,15 +9409,15 @@
               <a:spcAft>
                 <a:spcPts val="600"/>
               </a:spcAft>
-              <a:defRPr sz="1100">
-                <a:solidFill>
-                  <a:srgbClr val="94A3B8"/>
-                </a:solidFill>
-                <a:latin typeface="Noto Sans KR"/>
-              </a:defRPr>
-            </a:pPr>
-            <a:r>
-              <a:t>운영간사의 핵심 임무 및 완료 조건:</a:t>
+              <a:defRPr sz="1200">
+                <a:solidFill>
+                  <a:srgbClr val="FFFFFF"/>
+                </a:solidFill>
+                <a:latin typeface="Malgun Gothic"/>
+              </a:defRPr>
+            </a:pPr>
+            <a:r>
+              <a:t>• 신규 평가과제 및 후보자 등록</a:t>
             </a:r>
           </a:p>
           <a:p>
@@ -8516,15 +9425,15 @@
               <a:spcAft>
                 <a:spcPts val="600"/>
               </a:spcAft>
-              <a:defRPr sz="1100">
-                <a:solidFill>
-                  <a:srgbClr val="94A3B8"/>
-                </a:solidFill>
-                <a:latin typeface="Noto Sans KR"/>
-              </a:defRPr>
-            </a:pPr>
-            <a:r>
-              <a:t>• 신규 평가과제 및 후보자 등록</a:t>
+              <a:defRPr sz="1200">
+                <a:solidFill>
+                  <a:srgbClr val="FFFFFF"/>
+                </a:solidFill>
+                <a:latin typeface="Malgun Gothic"/>
+              </a:defRPr>
+            </a:pPr>
+            <a:r>
+              <a:t>• 3인 패널 지정 및 이해상충 자가검증</a:t>
             </a:r>
           </a:p>
           <a:p>
@@ -8532,15 +9441,15 @@
               <a:spcAft>
                 <a:spcPts val="600"/>
               </a:spcAft>
-              <a:defRPr sz="1100">
-                <a:solidFill>
-                  <a:srgbClr val="94A3B8"/>
-                </a:solidFill>
-                <a:latin typeface="Noto Sans KR"/>
-              </a:defRPr>
-            </a:pPr>
-            <a:r>
-              <a:t>• 3인 패널 지정 및 이해상충 자가검증</a:t>
+              <a:defRPr sz="1200">
+                <a:solidFill>
+                  <a:srgbClr val="FFFFFF"/>
+                </a:solidFill>
+                <a:latin typeface="Malgun Gothic"/>
+              </a:defRPr>
+            </a:pPr>
+            <a:r>
+              <a:t>• 큐·상태·점수 진척도 실시간 모니터링</a:t>
             </a:r>
           </a:p>
           <a:p>
@@ -8548,48 +9457,48 @@
               <a:spcAft>
                 <a:spcPts val="600"/>
               </a:spcAft>
-              <a:defRPr sz="1100">
-                <a:solidFill>
-                  <a:srgbClr val="94A3B8"/>
-                </a:solidFill>
-                <a:latin typeface="Noto Sans KR"/>
-              </a:defRPr>
-            </a:pPr>
-            <a:r>
-              <a:t>• 큐·상태·점수 진척도 실시간 모니터링</a:t>
-            </a:r>
-          </a:p>
-          <a:p>
+              <a:defRPr sz="1200">
+                <a:solidFill>
+                  <a:srgbClr val="FFFFFF"/>
+                </a:solidFill>
+                <a:latin typeface="Malgun Gothic"/>
+              </a:defRPr>
+            </a:pPr>
+            <a:r>
+              <a:t>• 완료 신호: 3인의 심사가 완료되고 최종 판정서 생성</a:t>
+            </a:r>
+          </a:p>
+          <a:p>
+            <a:br/>
             <a:pPr>
               <a:spcAft>
                 <a:spcPts val="600"/>
               </a:spcAft>
-              <a:defRPr sz="1100">
-                <a:solidFill>
-                  <a:srgbClr val="94A3B8"/>
-                </a:solidFill>
-                <a:latin typeface="Noto Sans KR"/>
-              </a:defRPr>
-            </a:pPr>
-            <a:r>
-              <a:t>• 완료 신호: 3인의 심사가 완료되고 최종 판정서 생성</a:t>
-            </a:r>
-          </a:p>
-          <a:p>
-            <a:br/>
+              <a:defRPr sz="1200">
+                <a:solidFill>
+                  <a:srgbClr val="E2E8F0"/>
+                </a:solidFill>
+                <a:latin typeface="Malgun Gothic"/>
+              </a:defRPr>
+            </a:pPr>
+            <a:r>
+              <a:t>심사위원의 핵심 임무 및 완료 조건:</a:t>
+            </a:r>
+          </a:p>
+          <a:p>
             <a:pPr>
               <a:spcAft>
                 <a:spcPts val="600"/>
               </a:spcAft>
-              <a:defRPr sz="1100">
-                <a:solidFill>
-                  <a:srgbClr val="94A3B8"/>
-                </a:solidFill>
-                <a:latin typeface="Noto Sans KR"/>
-              </a:defRPr>
-            </a:pPr>
-            <a:r>
-              <a:t>심사위원의 핵심 임무 및 완료 조건:</a:t>
+              <a:defRPr sz="1200">
+                <a:solidFill>
+                  <a:srgbClr val="FFFFFF"/>
+                </a:solidFill>
+                <a:latin typeface="Malgun Gothic"/>
+              </a:defRPr>
+            </a:pPr>
+            <a:r>
+              <a:t>• 제출물·시연·링크 검토 및 공통 보안 체크리스트 확인</a:t>
             </a:r>
           </a:p>
           <a:p>
@@ -8597,15 +9506,15 @@
               <a:spcAft>
                 <a:spcPts val="600"/>
               </a:spcAft>
-              <a:defRPr sz="1100">
-                <a:solidFill>
-                  <a:srgbClr val="94A3B8"/>
-                </a:solidFill>
-                <a:latin typeface="Noto Sans KR"/>
-              </a:defRPr>
-            </a:pPr>
-            <a:r>
-              <a:t>• 제출물·시연·링크 검토 및 공통 보안 체크리스트 확인</a:t>
+              <a:defRPr sz="1200">
+                <a:solidFill>
+                  <a:srgbClr val="FFFFFF"/>
+                </a:solidFill>
+                <a:latin typeface="Malgun Gothic"/>
+              </a:defRPr>
+            </a:pPr>
+            <a:r>
+              <a:t>• Level 3 / Level 4 루브릭 평가 및 면접 질문 작성</a:t>
             </a:r>
           </a:p>
           <a:p>
@@ -8613,48 +9522,15 @@
               <a:spcAft>
                 <a:spcPts val="600"/>
               </a:spcAft>
-              <a:defRPr sz="1100">
-                <a:solidFill>
-                  <a:srgbClr val="94A3B8"/>
-                </a:solidFill>
-                <a:latin typeface="Noto Sans KR"/>
-              </a:defRPr>
-            </a:pPr>
-            <a:r>
-              <a:t>• Level 3 / Level 4 루브릭 평가 및 면접 질문 작성</a:t>
-            </a:r>
-          </a:p>
-          <a:p>
-            <a:pPr>
-              <a:spcAft>
-                <a:spcPts val="600"/>
-              </a:spcAft>
-              <a:defRPr sz="1100">
-                <a:solidFill>
-                  <a:srgbClr val="94A3B8"/>
-                </a:solidFill>
-                <a:latin typeface="Noto Sans KR"/>
+              <a:defRPr sz="1200">
+                <a:solidFill>
+                  <a:srgbClr val="FFFFFF"/>
+                </a:solidFill>
+                <a:latin typeface="Malgun Gothic"/>
               </a:defRPr>
             </a:pPr>
             <a:r>
               <a:t>• 완료 신호: 내 심사 상태 배지가 「완료」로 표시됨</a:t>
-            </a:r>
-          </a:p>
-          <a:p>
-            <a:br/>
-            <a:pPr>
-              <a:spcAft>
-                <a:spcPts val="600"/>
-              </a:spcAft>
-              <a:defRPr sz="1100">
-                <a:solidFill>
-                  <a:srgbClr val="94A3B8"/>
-                </a:solidFill>
-                <a:latin typeface="Noto Sans KR"/>
-              </a:defRPr>
-            </a:pPr>
-            <a:r>
-              <a:t>오른쪽 화면: 실시간 진행 상황을 요약하는 관리용 대시보드 인터페이스</a:t>
             </a:r>
           </a:p>
         </p:txBody>
@@ -8667,18 +9543,18 @@
         </p:nvSpPr>
         <p:spPr>
           <a:xfrm>
-            <a:off x="6400800" y="1828800"/>
-            <a:ext cx="5212080" cy="4114800"/>
+            <a:off x="6309360" y="1645920"/>
+            <a:ext cx="5303520" cy="4389120"/>
           </a:xfrm>
           <a:prstGeom prst="roundRect">
             <a:avLst/>
           </a:prstGeom>
           <a:solidFill>
-            <a:srgbClr val="1E293B"/>
+            <a:srgbClr val="111C38"/>
           </a:solidFill>
-          <a:ln w="19050">
+          <a:ln w="12700">
             <a:solidFill>
-              <a:srgbClr val="6366F1"/>
+              <a:srgbClr val="1E293B"/>
             </a:solidFill>
           </a:ln>
         </p:spPr>
@@ -8706,7 +9582,7 @@
       </p:sp>
       <p:pic>
         <p:nvPicPr>
-          <p:cNvPr id="10" name="Picture 9" descr="media__1784188798650.png"/>
+          <p:cNvPr id="10" name="Picture 9" descr="page_04.png"/>
           <p:cNvPicPr>
             <a:picLocks noChangeAspect="1"/>
           </p:cNvPicPr>
@@ -8720,8 +9596,8 @@
         </p:blipFill>
         <p:spPr>
           <a:xfrm>
-            <a:off x="7369320" y="1965960"/>
-            <a:ext cx="3275038" cy="3840480"/>
+            <a:off x="6400800" y="1737360"/>
+            <a:ext cx="5120640" cy="4206240"/>
           </a:xfrm>
           <a:prstGeom prst="rect">
             <a:avLst/>
@@ -8742,7 +9618,7 @@
     <p:bg>
       <p:bgPr>
         <a:solidFill>
-          <a:srgbClr val="0F172A"/>
+          <a:srgbClr val="0B1329"/>
         </a:solidFill>
         <a:effectLst/>
       </p:bgPr>
@@ -8763,7 +9639,7 @@
         <p:spPr>
           <a:xfrm>
             <a:off x="548640" y="365760"/>
-            <a:ext cx="7315200" cy="365760"/>
+            <a:ext cx="7315200" cy="320040"/>
           </a:xfrm>
           <a:prstGeom prst="rect">
             <a:avLst/>
@@ -8771,17 +9647,17 @@
           <a:noFill/>
         </p:spPr>
         <p:txBody>
-          <a:bodyPr wrap="none">
+          <a:bodyPr wrap="square">
             <a:spAutoFit/>
           </a:bodyPr>
           <a:lstStyle/>
           <a:p>
             <a:pPr>
-              <a:defRPr sz="1100" b="1">
+              <a:defRPr sz="1300" b="1">
                 <a:solidFill>
                   <a:srgbClr val="38BDF8"/>
                 </a:solidFill>
-                <a:latin typeface="Noto Sans KR"/>
+                <a:latin typeface="Malgun Gothic"/>
               </a:defRPr>
             </a:pPr>
             <a:r>
@@ -8799,7 +9675,7 @@
         <p:spPr>
           <a:xfrm>
             <a:off x="548640" y="640080"/>
-            <a:ext cx="10058400" cy="731520"/>
+            <a:ext cx="10058400" cy="640080"/>
           </a:xfrm>
           <a:prstGeom prst="rect">
             <a:avLst/>
@@ -8807,17 +9683,17 @@
           <a:noFill/>
         </p:spPr>
         <p:txBody>
-          <a:bodyPr wrap="none">
+          <a:bodyPr wrap="square">
             <a:spAutoFit/>
           </a:bodyPr>
           <a:lstStyle/>
           <a:p>
             <a:pPr>
-              <a:defRPr sz="2600" b="1">
+              <a:defRPr sz="2400" b="1">
                 <a:solidFill>
                   <a:srgbClr val="FFFFFF"/>
                 </a:solidFill>
-                <a:latin typeface="Noto Sans KR"/>
+                <a:latin typeface="Malgun Gothic"/>
               </a:defRPr>
             </a:pPr>
             <a:r>
@@ -8841,10 +9717,12 @@
             <a:avLst/>
           </a:prstGeom>
           <a:solidFill>
-            <a:srgbClr val="334155"/>
+            <a:srgbClr val="1E293B"/>
           </a:solidFill>
           <a:ln>
-            <a:noFill/>
+            <a:solidFill>
+              <a:srgbClr val="1E293B"/>
+            </a:solidFill>
           </a:ln>
         </p:spPr>
         <p:style>
@@ -8892,15 +9770,15 @@
           <a:lstStyle/>
           <a:p>
             <a:pPr>
-              <a:defRPr sz="900">
+              <a:defRPr sz="1000">
                 <a:solidFill>
                   <a:srgbClr val="94A3B8"/>
                 </a:solidFill>
-                <a:latin typeface="Noto Sans KR"/>
-              </a:defRPr>
-            </a:pPr>
-            <a:r>
-              <a:t>AICA 자격심사 시스템 사용자 매뉴얼 · Web App Dark Theme</a:t>
+                <a:latin typeface="Malgun Gothic"/>
+              </a:defRPr>
+            </a:pPr>
+            <a:r>
+              <a:t>AICA 자격심사 시스템 사용자 매뉴얼 · 경영혁신실</a:t>
             </a:r>
           </a:p>
         </p:txBody>
@@ -8928,11 +9806,11 @@
           <a:lstStyle/>
           <a:p>
             <a:pPr algn="r">
-              <a:defRPr sz="900">
+              <a:defRPr sz="1000">
                 <a:solidFill>
                   <a:srgbClr val="94A3B8"/>
                 </a:solidFill>
-                <a:latin typeface="Noto Sans KR"/>
+                <a:latin typeface="Malgun Gothic"/>
               </a:defRPr>
             </a:pPr>
             <a:r>
@@ -8949,18 +9827,18 @@
         </p:nvSpPr>
         <p:spPr>
           <a:xfrm>
-            <a:off x="548640" y="1828800"/>
-            <a:ext cx="5486400" cy="4114800"/>
+            <a:off x="548640" y="1645920"/>
+            <a:ext cx="5486400" cy="4389120"/>
           </a:xfrm>
           <a:prstGeom prst="roundRect">
             <a:avLst/>
           </a:prstGeom>
           <a:solidFill>
-            <a:srgbClr val="1E293B"/>
+            <a:srgbClr val="111C38"/>
           </a:solidFill>
           <a:ln w="12700">
             <a:solidFill>
-              <a:srgbClr val="334155"/>
+              <a:srgbClr val="1E293B"/>
             </a:solidFill>
           </a:ln>
         </p:spPr>
@@ -8994,8 +9872,8 @@
         </p:nvSpPr>
         <p:spPr>
           <a:xfrm>
-            <a:off x="731520" y="2011680"/>
-            <a:ext cx="5120640" cy="3749040"/>
+            <a:off x="731520" y="1828800"/>
+            <a:ext cx="5120640" cy="4023360"/>
           </a:xfrm>
           <a:prstGeom prst="rect">
             <a:avLst/>
@@ -9010,17 +9888,33 @@
           <a:p>
             <a:pPr>
               <a:spcAft>
-                <a:spcPts val="1200"/>
-              </a:spcAft>
-              <a:defRPr sz="1500" b="1">
+                <a:spcPts val="1000"/>
+              </a:spcAft>
+              <a:defRPr sz="1600" b="1">
+                <a:solidFill>
+                  <a:srgbClr val="60A5FA"/>
+                </a:solidFill>
+                <a:latin typeface="Malgun Gothic"/>
+              </a:defRPr>
+            </a:pPr>
+            <a:r>
+              <a:t>AICA 자격심사 관리 &amp; 대기 큐 구조</a:t>
+            </a:r>
+          </a:p>
+          <a:p>
+            <a:pPr>
+              <a:spcAft>
+                <a:spcPts val="600"/>
+              </a:spcAft>
+              <a:defRPr sz="1200">
                 <a:solidFill>
                   <a:srgbClr val="FFFFFF"/>
                 </a:solidFill>
-                <a:latin typeface="Noto Sans KR"/>
-              </a:defRPr>
-            </a:pPr>
-            <a:r>
-              <a:t>AICA 자격심사 관리 &amp; 대기 큐 구조</a:t>
+                <a:latin typeface="Malgun Gothic"/>
+              </a:defRPr>
+            </a:pPr>
+            <a:r>
+              <a:t>1. 월별 자격심사 일정: AICA L3/L4 심사일정을 캘린더로 한눈에 모니터링</a:t>
             </a:r>
           </a:p>
           <a:p>
@@ -9028,15 +9922,15 @@
               <a:spcAft>
                 <a:spcPts val="600"/>
               </a:spcAft>
-              <a:defRPr sz="1100">
-                <a:solidFill>
-                  <a:srgbClr val="94A3B8"/>
-                </a:solidFill>
-                <a:latin typeface="Noto Sans KR"/>
-              </a:defRPr>
-            </a:pPr>
-            <a:r>
-              <a:t>1. 월별 자격심사 일정: AICA L3/L4 심사일정을 캘린더로 한눈에 모니터링</a:t>
+              <a:defRPr sz="1200">
+                <a:solidFill>
+                  <a:srgbClr val="FFFFFF"/>
+                </a:solidFill>
+                <a:latin typeface="Malgun Gothic"/>
+              </a:defRPr>
+            </a:pPr>
+            <a:r>
+              <a:t>2. 시뮬레이션 데이터 불러오기: 가상의 테스트 데이터셋(후보자 9명 및 3인 평가 결과) 복원</a:t>
             </a:r>
           </a:p>
           <a:p>
@@ -9044,15 +9938,15 @@
               <a:spcAft>
                 <a:spcPts val="600"/>
               </a:spcAft>
-              <a:defRPr sz="1100">
-                <a:solidFill>
-                  <a:srgbClr val="94A3B8"/>
-                </a:solidFill>
-                <a:latin typeface="Noto Sans KR"/>
-              </a:defRPr>
-            </a:pPr>
-            <a:r>
-              <a:t>2. 시뮬레이션 데이터 불러오기: 가상의 테스트 데이터셋(후보자 9명 및 3인 평가 결과) 복원</a:t>
+              <a:defRPr sz="1200">
+                <a:solidFill>
+                  <a:srgbClr val="FFFFFF"/>
+                </a:solidFill>
+                <a:latin typeface="Malgun Gothic"/>
+              </a:defRPr>
+            </a:pPr>
+            <a:r>
+              <a:t>3. 데이터 초기화: 실무 운영 착수를 위해 전체 평가 과제 및 결과를 깨끗하게 초기화</a:t>
             </a:r>
           </a:p>
           <a:p>
@@ -9060,15 +9954,15 @@
               <a:spcAft>
                 <a:spcPts val="600"/>
               </a:spcAft>
-              <a:defRPr sz="1100">
-                <a:solidFill>
-                  <a:srgbClr val="94A3B8"/>
-                </a:solidFill>
-                <a:latin typeface="Noto Sans KR"/>
-              </a:defRPr>
-            </a:pPr>
-            <a:r>
-              <a:t>3. 데이터 초기화: 실무 운영 착수를 위해 전체 평가 과제 및 결과를 깨끗하게 초기화</a:t>
+              <a:defRPr sz="1200">
+                <a:solidFill>
+                  <a:srgbClr val="FFFFFF"/>
+                </a:solidFill>
+                <a:latin typeface="Malgun Gothic"/>
+              </a:defRPr>
+            </a:pPr>
+            <a:r>
+              <a:t>4. 요약 지표: 전체, 완료, 진행 중, 대기 인원을 실시간 확인 (클릭 시 명단 모달 팝업)</a:t>
             </a:r>
           </a:p>
           <a:p>
@@ -9076,15 +9970,15 @@
               <a:spcAft>
                 <a:spcPts val="600"/>
               </a:spcAft>
-              <a:defRPr sz="1100">
-                <a:solidFill>
-                  <a:srgbClr val="94A3B8"/>
-                </a:solidFill>
-                <a:latin typeface="Noto Sans KR"/>
-              </a:defRPr>
-            </a:pPr>
-            <a:r>
-              <a:t>4. 요약 지표: 전체, 완료, 진행 중, 대기 인원을 실시간 확인 (클릭 시 명단 모달 팝업)</a:t>
+              <a:defRPr sz="1200">
+                <a:solidFill>
+                  <a:srgbClr val="E2E8F0"/>
+                </a:solidFill>
+                <a:latin typeface="Malgun Gothic"/>
+              </a:defRPr>
+            </a:pPr>
+            <a:r>
+              <a:t>5. 관계사 평균: 완료된 심사를 기준으로 계열사별 평균 점수를 모니터링</a:t>
             </a:r>
           </a:p>
           <a:p>
@@ -9092,15 +9986,15 @@
               <a:spcAft>
                 <a:spcPts val="600"/>
               </a:spcAft>
-              <a:defRPr sz="1100">
-                <a:solidFill>
-                  <a:srgbClr val="94A3B8"/>
-                </a:solidFill>
-                <a:latin typeface="Noto Sans KR"/>
-              </a:defRPr>
-            </a:pPr>
-            <a:r>
-              <a:t>5. 전체 큐: 필터와 액션을 통한 개별 심사 통합 관리</a:t>
+              <a:defRPr sz="1200">
+                <a:solidFill>
+                  <a:srgbClr val="E2E8F0"/>
+                </a:solidFill>
+                <a:latin typeface="Malgun Gothic"/>
+              </a:defRPr>
+            </a:pPr>
+            <a:r>
+              <a:t>6. 전체 큐: 필터와 액션을 통한 개별 심사 통합 관리</a:t>
             </a:r>
           </a:p>
           <a:p>
@@ -9109,32 +10003,15 @@
               <a:spcAft>
                 <a:spcPts val="600"/>
               </a:spcAft>
-              <a:defRPr sz="1100">
-                <a:solidFill>
-                  <a:srgbClr val="94A3B8"/>
-                </a:solidFill>
-                <a:latin typeface="Noto Sans KR"/>
-              </a:defRPr>
-            </a:pPr>
-            <a:r>
-              <a:t>💡 대시보드 우측 상단 배지를 통해 시연용 가상 데이터 복원 및 실무용 초기화를 손쉽게 제어할 수 있습니다.</a:t>
-            </a:r>
-          </a:p>
-          <a:p>
-            <a:br/>
-            <a:pPr>
-              <a:spcAft>
-                <a:spcPts val="600"/>
-              </a:spcAft>
-              <a:defRPr sz="1100">
-                <a:solidFill>
-                  <a:srgbClr val="94A3B8"/>
-                </a:solidFill>
-                <a:latin typeface="Noto Sans KR"/>
-              </a:defRPr>
-            </a:pPr>
-            <a:r>
-              <a:t>오른쪽 화면: 운영간사용 메인 관리 대시보드 및 평가 큐 상세 화면</a:t>
+              <a:defRPr sz="1200" b="1">
+                <a:solidFill>
+                  <a:srgbClr val="FACC15"/>
+                </a:solidFill>
+                <a:latin typeface="Malgun Gothic"/>
+              </a:defRPr>
+            </a:pPr>
+            <a:r>
+              <a:t>💡 대시보드 우측 상단 배지를 통해 테스트 시연용 가상 데이터 복원 및 실무용 초기화를 손쉽게 제어할 수 있습니다.</a:t>
             </a:r>
           </a:p>
         </p:txBody>
@@ -9147,18 +10024,18 @@
         </p:nvSpPr>
         <p:spPr>
           <a:xfrm>
-            <a:off x="6400800" y="1828800"/>
-            <a:ext cx="5212080" cy="4114800"/>
+            <a:off x="6309360" y="1645920"/>
+            <a:ext cx="5303520" cy="4389120"/>
           </a:xfrm>
           <a:prstGeom prst="roundRect">
             <a:avLst/>
           </a:prstGeom>
           <a:solidFill>
-            <a:srgbClr val="1E293B"/>
+            <a:srgbClr val="111C38"/>
           </a:solidFill>
-          <a:ln w="19050">
+          <a:ln w="12700">
             <a:solidFill>
-              <a:srgbClr val="6366F1"/>
+              <a:srgbClr val="1E293B"/>
             </a:solidFill>
           </a:ln>
         </p:spPr>
@@ -9186,7 +10063,7 @@
       </p:sp>
       <p:pic>
         <p:nvPicPr>
-          <p:cNvPr id="10" name="Picture 9" descr="media__1784188798650.png"/>
+          <p:cNvPr id="10" name="Picture 9" descr="page_05.png"/>
           <p:cNvPicPr>
             <a:picLocks noChangeAspect="1"/>
           </p:cNvPicPr>
@@ -9200,8 +10077,8 @@
         </p:blipFill>
         <p:spPr>
           <a:xfrm>
-            <a:off x="7369320" y="1965960"/>
-            <a:ext cx="3275038" cy="3840480"/>
+            <a:off x="6400800" y="1737360"/>
+            <a:ext cx="5120640" cy="4206240"/>
           </a:xfrm>
           <a:prstGeom prst="rect">
             <a:avLst/>
@@ -9222,7 +10099,7 @@
     <p:bg>
       <p:bgPr>
         <a:solidFill>
-          <a:srgbClr val="0F172A"/>
+          <a:srgbClr val="0B1329"/>
         </a:solidFill>
         <a:effectLst/>
       </p:bgPr>
@@ -9243,7 +10120,7 @@
         <p:spPr>
           <a:xfrm>
             <a:off x="548640" y="365760"/>
-            <a:ext cx="7315200" cy="365760"/>
+            <a:ext cx="7315200" cy="320040"/>
           </a:xfrm>
           <a:prstGeom prst="rect">
             <a:avLst/>
@@ -9251,21 +10128,21 @@
           <a:noFill/>
         </p:spPr>
         <p:txBody>
-          <a:bodyPr wrap="none">
+          <a:bodyPr wrap="square">
             <a:spAutoFit/>
           </a:bodyPr>
           <a:lstStyle/>
           <a:p>
             <a:pPr>
-              <a:defRPr sz="1100" b="1">
+              <a:defRPr sz="1300" b="1">
                 <a:solidFill>
                   <a:srgbClr val="38BDF8"/>
                 </a:solidFill>
-                <a:latin typeface="Noto Sans KR"/>
-              </a:defRPr>
-            </a:pPr>
-            <a:r>
-              <a:t>공통</a:t>
+                <a:latin typeface="Malgun Gothic"/>
+              </a:defRPr>
+            </a:pPr>
+            <a:r>
+              <a:t>운영간사</a:t>
             </a:r>
           </a:p>
         </p:txBody>
@@ -9279,7 +10156,7 @@
         <p:spPr>
           <a:xfrm>
             <a:off x="548640" y="640080"/>
-            <a:ext cx="10058400" cy="731520"/>
+            <a:ext cx="10058400" cy="640080"/>
           </a:xfrm>
           <a:prstGeom prst="rect">
             <a:avLst/>
@@ -9287,21 +10164,21 @@
           <a:noFill/>
         </p:spPr>
         <p:txBody>
-          <a:bodyPr wrap="none">
+          <a:bodyPr wrap="square">
             <a:spAutoFit/>
           </a:bodyPr>
           <a:lstStyle/>
           <a:p>
             <a:pPr>
-              <a:defRPr sz="2600" b="1">
+              <a:defRPr sz="2400" b="1">
                 <a:solidFill>
                   <a:srgbClr val="FFFFFF"/>
                 </a:solidFill>
-                <a:latin typeface="Noto Sans KR"/>
-              </a:defRPr>
-            </a:pPr>
-            <a:r>
-              <a:t>월별 자격심사 일정과 산출물 날짜가 명확히 연동됩니다</a:t>
+                <a:latin typeface="Malgun Gothic"/>
+              </a:defRPr>
+            </a:pPr>
+            <a:r>
+              <a:t>대시보드에서 전체 심사 현황부터 확인합니다</a:t>
             </a:r>
           </a:p>
         </p:txBody>
@@ -9321,10 +10198,12 @@
             <a:avLst/>
           </a:prstGeom>
           <a:solidFill>
-            <a:srgbClr val="334155"/>
+            <a:srgbClr val="1E293B"/>
           </a:solidFill>
           <a:ln>
-            <a:noFill/>
+            <a:solidFill>
+              <a:srgbClr val="1E293B"/>
+            </a:solidFill>
           </a:ln>
         </p:spPr>
         <p:style>
@@ -9372,15 +10251,15 @@
           <a:lstStyle/>
           <a:p>
             <a:pPr>
-              <a:defRPr sz="900">
+              <a:defRPr sz="1000">
                 <a:solidFill>
                   <a:srgbClr val="94A3B8"/>
                 </a:solidFill>
-                <a:latin typeface="Noto Sans KR"/>
-              </a:defRPr>
-            </a:pPr>
-            <a:r>
-              <a:t>AICA 자격심사 시스템 사용자 매뉴얼 · Web App Dark Theme</a:t>
+                <a:latin typeface="Malgun Gothic"/>
+              </a:defRPr>
+            </a:pPr>
+            <a:r>
+              <a:t>AICA 자격심사 시스템 사용자 매뉴얼 · 경영혁신실</a:t>
             </a:r>
           </a:p>
         </p:txBody>
@@ -9408,15 +10287,15 @@
           <a:lstStyle/>
           <a:p>
             <a:pPr algn="r">
-              <a:defRPr sz="900">
+              <a:defRPr sz="1000">
                 <a:solidFill>
                   <a:srgbClr val="94A3B8"/>
                 </a:solidFill>
-                <a:latin typeface="Noto Sans KR"/>
-              </a:defRPr>
-            </a:pPr>
-            <a:r>
-              <a:t>05-B</a:t>
+                <a:latin typeface="Malgun Gothic"/>
+              </a:defRPr>
+            </a:pPr>
+            <a:r>
+              <a:t>06</a:t>
             </a:r>
           </a:p>
         </p:txBody>
@@ -9429,18 +10308,18 @@
         </p:nvSpPr>
         <p:spPr>
           <a:xfrm>
-            <a:off x="548640" y="1828800"/>
-            <a:ext cx="5486400" cy="4114800"/>
+            <a:off x="548640" y="1645920"/>
+            <a:ext cx="5486400" cy="4389120"/>
           </a:xfrm>
           <a:prstGeom prst="roundRect">
             <a:avLst/>
           </a:prstGeom>
           <a:solidFill>
-            <a:srgbClr val="1E293B"/>
+            <a:srgbClr val="111C38"/>
           </a:solidFill>
           <a:ln w="12700">
             <a:solidFill>
-              <a:srgbClr val="334155"/>
+              <a:srgbClr val="1E293B"/>
             </a:solidFill>
           </a:ln>
         </p:spPr>
@@ -9474,8 +10353,8 @@
         </p:nvSpPr>
         <p:spPr>
           <a:xfrm>
-            <a:off x="731520" y="2011680"/>
-            <a:ext cx="5120640" cy="3749040"/>
+            <a:off x="731520" y="1828800"/>
+            <a:ext cx="5120640" cy="4023360"/>
           </a:xfrm>
           <a:prstGeom prst="rect">
             <a:avLst/>
@@ -9490,17 +10369,82 @@
           <a:p>
             <a:pPr>
               <a:spcAft>
-                <a:spcPts val="1200"/>
-              </a:spcAft>
-              <a:defRPr sz="1500" b="1">
+                <a:spcPts val="1000"/>
+              </a:spcAft>
+              <a:defRPr sz="1600" b="1">
+                <a:solidFill>
+                  <a:srgbClr val="60A5FA"/>
+                </a:solidFill>
+                <a:latin typeface="Malgun Gothic"/>
+              </a:defRPr>
+            </a:pPr>
+            <a:r>
+              <a:t>명단 보기 기능 (통계 모달 팝업)</a:t>
+            </a:r>
+          </a:p>
+          <a:p>
+            <a:pPr>
+              <a:spcAft>
+                <a:spcPts val="600"/>
+              </a:spcAft>
+              <a:defRPr sz="1200" b="1">
+                <a:solidFill>
+                  <a:srgbClr val="FACC15"/>
+                </a:solidFill>
+                <a:latin typeface="Malgun Gothic"/>
+              </a:defRPr>
+            </a:pPr>
+            <a:r>
+              <a:t>💡 명단 보기 기능:</a:t>
+            </a:r>
+          </a:p>
+          <a:p>
+            <a:pPr>
+              <a:spcAft>
+                <a:spcPts val="600"/>
+              </a:spcAft>
+              <a:defRPr sz="1200">
+                <a:solidFill>
+                  <a:srgbClr val="E2E8F0"/>
+                </a:solidFill>
+                <a:latin typeface="Malgun Gothic"/>
+              </a:defRPr>
+            </a:pPr>
+            <a:r>
+              <a:t>각 지표(통계 카드) 클릭 시 해당 대상자 목록을 모달 팝업으로 즉시 확인할 수 있습니다.</a:t>
+            </a:r>
+          </a:p>
+          <a:p>
+            <a:br/>
+            <a:pPr>
+              <a:spcAft>
+                <a:spcPts val="600"/>
+              </a:spcAft>
+              <a:defRPr sz="1200">
+                <a:solidFill>
+                  <a:srgbClr val="E2E8F0"/>
+                </a:solidFill>
+                <a:latin typeface="Malgun Gothic"/>
+              </a:defRPr>
+            </a:pPr>
+            <a:r>
+              <a:t>• 1. 전체 지원자 세부 정보 모달 (총 9명)</a:t>
+            </a:r>
+          </a:p>
+          <a:p>
+            <a:pPr>
+              <a:spcAft>
+                <a:spcPts val="600"/>
+              </a:spcAft>
+              <a:defRPr sz="1200">
                 <a:solidFill>
                   <a:srgbClr val="FFFFFF"/>
                 </a:solidFill>
-                <a:latin typeface="Noto Sans KR"/>
-              </a:defRPr>
-            </a:pPr>
-            <a:r>
-              <a:t>월별 캘린더 연동 및 평가 산출물 일자 표기</a:t>
+                <a:latin typeface="Malgun Gothic"/>
+              </a:defRPr>
+            </a:pPr>
+            <a:r>
+              <a:t>• 2. 평가 완료 인원 세부 정보 모달 (2명)</a:t>
             </a:r>
           </a:p>
           <a:p>
@@ -9508,15 +10452,15 @@
               <a:spcAft>
                 <a:spcPts val="600"/>
               </a:spcAft>
-              <a:defRPr sz="1100">
-                <a:solidFill>
-                  <a:srgbClr val="94A3B8"/>
-                </a:solidFill>
-                <a:latin typeface="Noto Sans KR"/>
-              </a:defRPr>
-            </a:pPr>
-            <a:r>
-              <a:t>1. 로그인 초기화면 월별 캘린더:</a:t>
+              <a:defRPr sz="1200">
+                <a:solidFill>
+                  <a:srgbClr val="FFFFFF"/>
+                </a:solidFill>
+                <a:latin typeface="Malgun Gothic"/>
+              </a:defRPr>
+            </a:pPr>
+            <a:r>
+              <a:t>• 3. 평가 진행 중 인원 세부 정보 모달 (3명)</a:t>
             </a:r>
           </a:p>
           <a:p>
@@ -9524,130 +10468,32 @@
               <a:spcAft>
                 <a:spcPts val="600"/>
               </a:spcAft>
-              <a:defRPr sz="1100">
-                <a:solidFill>
-                  <a:srgbClr val="94A3B8"/>
-                </a:solidFill>
-                <a:latin typeface="Noto Sans KR"/>
-              </a:defRPr>
-            </a:pPr>
-            <a:r>
-              <a:t>• 운영간사 및 심사위원 로그인 시 메인 화면에 캘린더가 렌더링됩니다.</a:t>
-            </a:r>
-          </a:p>
-          <a:p>
+              <a:defRPr sz="1200">
+                <a:solidFill>
+                  <a:srgbClr val="FFFFFF"/>
+                </a:solidFill>
+                <a:latin typeface="Malgun Gothic"/>
+              </a:defRPr>
+            </a:pPr>
+            <a:r>
+              <a:t>• 4. 심사 대기 인원 세부 정보 모달 (4명)</a:t>
+            </a:r>
+          </a:p>
+          <a:p>
+            <a:br/>
             <a:pPr>
               <a:spcAft>
                 <a:spcPts val="600"/>
               </a:spcAft>
-              <a:defRPr sz="1100">
-                <a:solidFill>
-                  <a:srgbClr val="94A3B8"/>
-                </a:solidFill>
-                <a:latin typeface="Noto Sans KR"/>
-              </a:defRPr>
-            </a:pPr>
-            <a:r>
-              <a:t>• 심사일자에 [AICA L3 심사], [AICA L4 심사] 명칭으로 일정이 자동 기입됩니다.</a:t>
-            </a:r>
-          </a:p>
-          <a:p>
-            <a:br/>
-            <a:pPr>
-              <a:spcAft>
-                <a:spcPts val="600"/>
-              </a:spcAft>
-              <a:defRPr sz="1100">
-                <a:solidFill>
-                  <a:srgbClr val="94A3B8"/>
-                </a:solidFill>
-                <a:latin typeface="Noto Sans KR"/>
-              </a:defRPr>
-            </a:pPr>
-            <a:r>
-              <a:t>2. 일정 클릭 시 화면 자동 이동:</a:t>
-            </a:r>
-          </a:p>
-          <a:p>
-            <a:pPr>
-              <a:spcAft>
-                <a:spcPts val="600"/>
-              </a:spcAft>
-              <a:defRPr sz="1100">
-                <a:solidFill>
-                  <a:srgbClr val="94A3B8"/>
-                </a:solidFill>
-                <a:latin typeface="Noto Sans KR"/>
-              </a:defRPr>
-            </a:pPr>
-            <a:r>
-              <a:t>• 캘린더 내 심사 일정을 클릭하면 운영간사는 대시보드/종합판정서로, 심사위원은 해당 배정 과제 평가 화면으로 즉시 이동합니다.</a:t>
-            </a:r>
-          </a:p>
-          <a:p>
-            <a:br/>
-            <a:pPr>
-              <a:spcAft>
-                <a:spcPts val="600"/>
-              </a:spcAft>
-              <a:defRPr sz="1100">
-                <a:solidFill>
-                  <a:srgbClr val="94A3B8"/>
-                </a:solidFill>
-                <a:latin typeface="Noto Sans KR"/>
-              </a:defRPr>
-            </a:pPr>
-            <a:r>
-              <a:t>3. 평가 산출물 명확한 날짜 표기:</a:t>
-            </a:r>
-          </a:p>
-          <a:p>
-            <a:pPr>
-              <a:spcAft>
-                <a:spcPts val="600"/>
-              </a:spcAft>
-              <a:defRPr sz="1100">
-                <a:solidFill>
-                  <a:srgbClr val="94A3B8"/>
-                </a:solidFill>
-                <a:latin typeface="Noto Sans KR"/>
-              </a:defRPr>
-            </a:pPr>
-            <a:r>
-              <a:t>• 종합판정서: 심사 시행 일자, 과제 제출 일시, 최종 승인 일시, 위원별 채점 제출 일시, 판정서 발행 일자 명시</a:t>
-            </a:r>
-          </a:p>
-          <a:p>
-            <a:pPr>
-              <a:spcAft>
-                <a:spcPts val="600"/>
-              </a:spcAft>
-              <a:defRPr sz="1100">
-                <a:solidFill>
-                  <a:srgbClr val="94A3B8"/>
-                </a:solidFill>
-                <a:latin typeface="Noto Sans KR"/>
-              </a:defRPr>
-            </a:pPr>
-            <a:r>
-              <a:t>• 평가 워크스페이스: 과제 제출일 및 심사 시행 예정일 실시간 상단 노출</a:t>
-            </a:r>
-          </a:p>
-          <a:p>
-            <a:br/>
-            <a:pPr>
-              <a:spcAft>
-                <a:spcPts val="600"/>
-              </a:spcAft>
-              <a:defRPr sz="1100">
-                <a:solidFill>
-                  <a:srgbClr val="94A3B8"/>
-                </a:solidFill>
-                <a:latin typeface="Noto Sans KR"/>
-              </a:defRPr>
-            </a:pPr>
-            <a:r>
-              <a:t>오른쪽 화면: 실제 리액트 월별 캘린더 및 종합판정서 렌더링 화면</a:t>
+              <a:defRPr sz="1200">
+                <a:solidFill>
+                  <a:srgbClr val="E2E8F0"/>
+                </a:solidFill>
+                <a:latin typeface="Malgun Gothic"/>
+              </a:defRPr>
+            </a:pPr>
+            <a:r>
+              <a:t>모달 내에서 관계사, 부서, 인증레벨, 제출과제명, 배정패널 및 상태를 즉시 조망할 수 있습니다.</a:t>
             </a:r>
           </a:p>
         </p:txBody>
@@ -9660,18 +10506,18 @@
         </p:nvSpPr>
         <p:spPr>
           <a:xfrm>
-            <a:off x="6400800" y="1828800"/>
-            <a:ext cx="5212080" cy="4114800"/>
+            <a:off x="6309360" y="1645920"/>
+            <a:ext cx="5303520" cy="4389120"/>
           </a:xfrm>
           <a:prstGeom prst="roundRect">
             <a:avLst/>
           </a:prstGeom>
           <a:solidFill>
-            <a:srgbClr val="1E293B"/>
+            <a:srgbClr val="111C38"/>
           </a:solidFill>
-          <a:ln w="19050">
+          <a:ln w="12700">
             <a:solidFill>
-              <a:srgbClr val="6366F1"/>
+              <a:srgbClr val="1E293B"/>
             </a:solidFill>
           </a:ln>
         </p:spPr>
@@ -9699,7 +10545,7 @@
       </p:sp>
       <p:pic>
         <p:nvPicPr>
-          <p:cNvPr id="10" name="Picture 9" descr="media__1784188798650.png"/>
+          <p:cNvPr id="10" name="Picture 9" descr="page_06.png"/>
           <p:cNvPicPr>
             <a:picLocks noChangeAspect="1"/>
           </p:cNvPicPr>
@@ -9713,8 +10559,8 @@
         </p:blipFill>
         <p:spPr>
           <a:xfrm>
-            <a:off x="7369320" y="1965960"/>
-            <a:ext cx="3275038" cy="3840480"/>
+            <a:off x="6400800" y="1737360"/>
+            <a:ext cx="5120640" cy="4206240"/>
           </a:xfrm>
           <a:prstGeom prst="rect">
             <a:avLst/>
@@ -9735,7 +10581,7 @@
     <p:bg>
       <p:bgPr>
         <a:solidFill>
-          <a:srgbClr val="0F172A"/>
+          <a:srgbClr val="0B1329"/>
         </a:solidFill>
         <a:effectLst/>
       </p:bgPr>
@@ -9756,7 +10602,7 @@
         <p:spPr>
           <a:xfrm>
             <a:off x="548640" y="365760"/>
-            <a:ext cx="7315200" cy="365760"/>
+            <a:ext cx="7315200" cy="320040"/>
           </a:xfrm>
           <a:prstGeom prst="rect">
             <a:avLst/>
@@ -9764,17 +10610,17 @@
           <a:noFill/>
         </p:spPr>
         <p:txBody>
-          <a:bodyPr wrap="none">
+          <a:bodyPr wrap="square">
             <a:spAutoFit/>
           </a:bodyPr>
           <a:lstStyle/>
           <a:p>
             <a:pPr>
-              <a:defRPr sz="1100" b="1">
+              <a:defRPr sz="1300" b="1">
                 <a:solidFill>
                   <a:srgbClr val="38BDF8"/>
                 </a:solidFill>
-                <a:latin typeface="Noto Sans KR"/>
+                <a:latin typeface="Malgun Gothic"/>
               </a:defRPr>
             </a:pPr>
             <a:r>
@@ -9792,7 +10638,7 @@
         <p:spPr>
           <a:xfrm>
             <a:off x="548640" y="640080"/>
-            <a:ext cx="10058400" cy="731520"/>
+            <a:ext cx="10058400" cy="640080"/>
           </a:xfrm>
           <a:prstGeom prst="rect">
             <a:avLst/>
@@ -9800,17 +10646,17 @@
           <a:noFill/>
         </p:spPr>
         <p:txBody>
-          <a:bodyPr wrap="none">
+          <a:bodyPr wrap="square">
             <a:spAutoFit/>
           </a:bodyPr>
           <a:lstStyle/>
           <a:p>
             <a:pPr>
-              <a:defRPr sz="2600" b="1">
+              <a:defRPr sz="2400" b="1">
                 <a:solidFill>
                   <a:srgbClr val="FFFFFF"/>
                 </a:solidFill>
-                <a:latin typeface="Noto Sans KR"/>
+                <a:latin typeface="Malgun Gothic"/>
               </a:defRPr>
             </a:pPr>
             <a:r>
@@ -9834,10 +10680,12 @@
             <a:avLst/>
           </a:prstGeom>
           <a:solidFill>
-            <a:srgbClr val="334155"/>
+            <a:srgbClr val="1E293B"/>
           </a:solidFill>
           <a:ln>
-            <a:noFill/>
+            <a:solidFill>
+              <a:srgbClr val="1E293B"/>
+            </a:solidFill>
           </a:ln>
         </p:spPr>
         <p:style>
@@ -9885,15 +10733,15 @@
           <a:lstStyle/>
           <a:p>
             <a:pPr>
-              <a:defRPr sz="900">
+              <a:defRPr sz="1000">
                 <a:solidFill>
                   <a:srgbClr val="94A3B8"/>
                 </a:solidFill>
-                <a:latin typeface="Noto Sans KR"/>
-              </a:defRPr>
-            </a:pPr>
-            <a:r>
-              <a:t>AICA 자격심사 시스템 사용자 매뉴얼 · Web App Dark Theme</a:t>
+                <a:latin typeface="Malgun Gothic"/>
+              </a:defRPr>
+            </a:pPr>
+            <a:r>
+              <a:t>AICA 자격심사 시스템 사용자 매뉴얼 · 경영혁신실</a:t>
             </a:r>
           </a:p>
         </p:txBody>
@@ -9921,15 +10769,15 @@
           <a:lstStyle/>
           <a:p>
             <a:pPr algn="r">
-              <a:defRPr sz="900">
+              <a:defRPr sz="1000">
                 <a:solidFill>
                   <a:srgbClr val="94A3B8"/>
                 </a:solidFill>
-                <a:latin typeface="Noto Sans KR"/>
-              </a:defRPr>
-            </a:pPr>
-            <a:r>
-              <a:t>06</a:t>
+                <a:latin typeface="Malgun Gothic"/>
+              </a:defRPr>
+            </a:pPr>
+            <a:r>
+              <a:t>07</a:t>
             </a:r>
           </a:p>
         </p:txBody>
@@ -9942,18 +10790,18 @@
         </p:nvSpPr>
         <p:spPr>
           <a:xfrm>
-            <a:off x="548640" y="1828800"/>
-            <a:ext cx="5486400" cy="4114800"/>
+            <a:off x="548640" y="1645920"/>
+            <a:ext cx="5486400" cy="4389120"/>
           </a:xfrm>
           <a:prstGeom prst="roundRect">
             <a:avLst/>
           </a:prstGeom>
           <a:solidFill>
-            <a:srgbClr val="1E293B"/>
+            <a:srgbClr val="111C38"/>
           </a:solidFill>
           <a:ln w="12700">
             <a:solidFill>
-              <a:srgbClr val="334155"/>
+              <a:srgbClr val="1E293B"/>
             </a:solidFill>
           </a:ln>
         </p:spPr>
@@ -9987,8 +10835,8 @@
         </p:nvSpPr>
         <p:spPr>
           <a:xfrm>
-            <a:off x="731520" y="2011680"/>
-            <a:ext cx="5120640" cy="3749040"/>
+            <a:off x="731520" y="1828800"/>
+            <a:ext cx="5120640" cy="4023360"/>
           </a:xfrm>
           <a:prstGeom prst="rect">
             <a:avLst/>
@@ -10003,33 +10851,66 @@
           <a:p>
             <a:pPr>
               <a:spcAft>
-                <a:spcPts val="1200"/>
-              </a:spcAft>
-              <a:defRPr sz="1500" b="1">
+                <a:spcPts val="1000"/>
+              </a:spcAft>
+              <a:defRPr sz="1600" b="1">
+                <a:solidFill>
+                  <a:srgbClr val="60A5FA"/>
+                </a:solidFill>
+                <a:latin typeface="Malgun Gothic"/>
+              </a:defRPr>
+            </a:pPr>
+            <a:r>
+              <a:t>후보자 정보 및 증빙 링크 등록 폼</a:t>
+            </a:r>
+          </a:p>
+          <a:p>
+            <a:pPr>
+              <a:spcAft>
+                <a:spcPts val="600"/>
+              </a:spcAft>
+              <a:defRPr sz="1200">
+                <a:solidFill>
+                  <a:srgbClr val="E2E8F0"/>
+                </a:solidFill>
+                <a:latin typeface="Malgun Gothic"/>
+              </a:defRPr>
+            </a:pPr>
+            <a:r>
+              <a:t>01 지원자 정보:</a:t>
+            </a:r>
+          </a:p>
+          <a:p>
+            <a:pPr>
+              <a:spcAft>
+                <a:spcPts val="600"/>
+              </a:spcAft>
+              <a:defRPr sz="1200">
                 <a:solidFill>
                   <a:srgbClr val="FFFFFF"/>
                 </a:solidFill>
-                <a:latin typeface="Noto Sans KR"/>
-              </a:defRPr>
-            </a:pPr>
-            <a:r>
-              <a:t>후보자 정보 및 증빙 링크 등록 폼</a:t>
-            </a:r>
-          </a:p>
-          <a:p>
+                <a:latin typeface="Malgun Gothic"/>
+              </a:defRPr>
+            </a:pPr>
+            <a:r>
+              <a:t>• 성명, 사내 이메일, 소속 관계사/부서, 자격 레벨(L3/L4), 과제 유형, 심사 예정일자</a:t>
+            </a:r>
+          </a:p>
+          <a:p>
+            <a:br/>
             <a:pPr>
               <a:spcAft>
                 <a:spcPts val="600"/>
               </a:spcAft>
-              <a:defRPr sz="1100">
-                <a:solidFill>
-                  <a:srgbClr val="94A3B8"/>
-                </a:solidFill>
-                <a:latin typeface="Noto Sans KR"/>
-              </a:defRPr>
-            </a:pPr>
-            <a:r>
-              <a:t>01 지원자 정보:</a:t>
+              <a:defRPr sz="1200">
+                <a:solidFill>
+                  <a:srgbClr val="E2E8F0"/>
+                </a:solidFill>
+                <a:latin typeface="Malgun Gothic"/>
+              </a:defRPr>
+            </a:pPr>
+            <a:r>
+              <a:t>02 과제 내용 및 6S 요약:</a:t>
             </a:r>
           </a:p>
           <a:p>
@@ -10037,15 +10918,15 @@
               <a:spcAft>
                 <a:spcPts val="600"/>
               </a:spcAft>
-              <a:defRPr sz="1100">
-                <a:solidFill>
-                  <a:srgbClr val="94A3B8"/>
-                </a:solidFill>
-                <a:latin typeface="Noto Sans KR"/>
-              </a:defRPr>
-            </a:pPr>
-            <a:r>
-              <a:t>• 성명, 사내 이메일, 소속 관계사/부서, 자격 레벨(L3/L4), 과제 유형</a:t>
+              <a:defRPr sz="1200">
+                <a:solidFill>
+                  <a:srgbClr val="FFFFFF"/>
+                </a:solidFill>
+                <a:latin typeface="Malgun Gothic"/>
+              </a:defRPr>
+            </a:pPr>
+            <a:r>
+              <a:t>• 평가 대상 과제명, Pain Point, AI 해결 방안, 핵심 기대효과 기술</a:t>
             </a:r>
           </a:p>
           <a:p>
@@ -10054,15 +10935,15 @@
               <a:spcAft>
                 <a:spcPts val="600"/>
               </a:spcAft>
-              <a:defRPr sz="1100">
-                <a:solidFill>
-                  <a:srgbClr val="94A3B8"/>
-                </a:solidFill>
-                <a:latin typeface="Noto Sans KR"/>
-              </a:defRPr>
-            </a:pPr>
-            <a:r>
-              <a:t>02 과제 내용 및 6S 요약:</a:t>
+              <a:defRPr sz="1200">
+                <a:solidFill>
+                  <a:srgbClr val="E2E8F0"/>
+                </a:solidFill>
+                <a:latin typeface="Malgun Gothic"/>
+              </a:defRPr>
+            </a:pPr>
+            <a:r>
+              <a:t>03 증빙 파일 링크 등록:</a:t>
             </a:r>
           </a:p>
           <a:p>
@@ -10070,65 +10951,15 @@
               <a:spcAft>
                 <a:spcPts val="600"/>
               </a:spcAft>
-              <a:defRPr sz="1100">
-                <a:solidFill>
-                  <a:srgbClr val="94A3B8"/>
-                </a:solidFill>
-                <a:latin typeface="Noto Sans KR"/>
-              </a:defRPr>
-            </a:pPr>
-            <a:r>
-              <a:t>• 평가 대상 과제명, Pain Point, AI 해결 방안, 핵심 기대효과 기술</a:t>
-            </a:r>
-          </a:p>
-          <a:p>
-            <a:br/>
-            <a:pPr>
-              <a:spcAft>
-                <a:spcPts val="600"/>
-              </a:spcAft>
-              <a:defRPr sz="1100">
-                <a:solidFill>
-                  <a:srgbClr val="94A3B8"/>
-                </a:solidFill>
-                <a:latin typeface="Noto Sans KR"/>
-              </a:defRPr>
-            </a:pPr>
-            <a:r>
-              <a:t>03 증빙 파일 링크 등록:</a:t>
-            </a:r>
-          </a:p>
-          <a:p>
-            <a:pPr>
-              <a:spcAft>
-                <a:spcPts val="600"/>
-              </a:spcAft>
-              <a:defRPr sz="1100">
-                <a:solidFill>
-                  <a:srgbClr val="94A3B8"/>
-                </a:solidFill>
-                <a:latin typeface="Noto Sans KR"/>
+              <a:defRPr sz="1200">
+                <a:solidFill>
+                  <a:srgbClr val="FFFFFF"/>
+                </a:solidFill>
+                <a:latin typeface="Malgun Gothic"/>
               </a:defRPr>
             </a:pPr>
             <a:r>
               <a:t>• 디렉토리 구조 요약, 결과 보고서 PDF 주소, Git 소스코드 저장소, 시연 동영상 URL</a:t>
-            </a:r>
-          </a:p>
-          <a:p>
-            <a:br/>
-            <a:pPr>
-              <a:spcAft>
-                <a:spcPts val="600"/>
-              </a:spcAft>
-              <a:defRPr sz="1100">
-                <a:solidFill>
-                  <a:srgbClr val="94A3B8"/>
-                </a:solidFill>
-                <a:latin typeface="Noto Sans KR"/>
-              </a:defRPr>
-            </a:pPr>
-            <a:r>
-              <a:t>오른쪽 화면: 수동 과제 등록 및 패널 배정 기능이 활성화되는 대시보드 화면</a:t>
             </a:r>
           </a:p>
         </p:txBody>
@@ -10141,18 +10972,18 @@
         </p:nvSpPr>
         <p:spPr>
           <a:xfrm>
-            <a:off x="6400800" y="1828800"/>
-            <a:ext cx="5212080" cy="4114800"/>
+            <a:off x="6309360" y="1645920"/>
+            <a:ext cx="5303520" cy="4389120"/>
           </a:xfrm>
           <a:prstGeom prst="roundRect">
             <a:avLst/>
           </a:prstGeom>
           <a:solidFill>
-            <a:srgbClr val="1E293B"/>
+            <a:srgbClr val="111C38"/>
           </a:solidFill>
-          <a:ln w="19050">
+          <a:ln w="12700">
             <a:solidFill>
-              <a:srgbClr val="6366F1"/>
+              <a:srgbClr val="1E293B"/>
             </a:solidFill>
           </a:ln>
         </p:spPr>
@@ -10180,7 +11011,7 @@
       </p:sp>
       <p:pic>
         <p:nvPicPr>
-          <p:cNvPr id="10" name="Picture 9" descr="media__1784188798650.png"/>
+          <p:cNvPr id="10" name="Picture 9" descr="page_07.png"/>
           <p:cNvPicPr>
             <a:picLocks noChangeAspect="1"/>
           </p:cNvPicPr>
@@ -10194,8 +11025,8 @@
         </p:blipFill>
         <p:spPr>
           <a:xfrm>
-            <a:off x="7369320" y="1965960"/>
-            <a:ext cx="3275038" cy="3840480"/>
+            <a:off x="6400800" y="1737360"/>
+            <a:ext cx="5120640" cy="4206240"/>
           </a:xfrm>
           <a:prstGeom prst="rect">
             <a:avLst/>
@@ -10216,7 +11047,7 @@
     <p:bg>
       <p:bgPr>
         <a:solidFill>
-          <a:srgbClr val="0F172A"/>
+          <a:srgbClr val="0B1329"/>
         </a:solidFill>
         <a:effectLst/>
       </p:bgPr>
@@ -10237,7 +11068,7 @@
         <p:spPr>
           <a:xfrm>
             <a:off x="548640" y="365760"/>
-            <a:ext cx="7315200" cy="365760"/>
+            <a:ext cx="7315200" cy="320040"/>
           </a:xfrm>
           <a:prstGeom prst="rect">
             <a:avLst/>
@@ -10245,17 +11076,17 @@
           <a:noFill/>
         </p:spPr>
         <p:txBody>
-          <a:bodyPr wrap="none">
+          <a:bodyPr wrap="square">
             <a:spAutoFit/>
           </a:bodyPr>
           <a:lstStyle/>
           <a:p>
             <a:pPr>
-              <a:defRPr sz="1100" b="1">
+              <a:defRPr sz="1300" b="1">
                 <a:solidFill>
                   <a:srgbClr val="38BDF8"/>
                 </a:solidFill>
-                <a:latin typeface="Noto Sans KR"/>
+                <a:latin typeface="Malgun Gothic"/>
               </a:defRPr>
             </a:pPr>
             <a:r>
@@ -10273,7 +11104,7 @@
         <p:spPr>
           <a:xfrm>
             <a:off x="548640" y="640080"/>
-            <a:ext cx="10058400" cy="731520"/>
+            <a:ext cx="10058400" cy="640080"/>
           </a:xfrm>
           <a:prstGeom prst="rect">
             <a:avLst/>
@@ -10281,17 +11112,17 @@
           <a:noFill/>
         </p:spPr>
         <p:txBody>
-          <a:bodyPr wrap="none">
+          <a:bodyPr wrap="square">
             <a:spAutoFit/>
           </a:bodyPr>
           <a:lstStyle/>
           <a:p>
             <a:pPr>
-              <a:defRPr sz="2600" b="1">
+              <a:defRPr sz="2400" b="1">
                 <a:solidFill>
                   <a:srgbClr val="FFFFFF"/>
                 </a:solidFill>
-                <a:latin typeface="Noto Sans KR"/>
+                <a:latin typeface="Malgun Gothic"/>
               </a:defRPr>
             </a:pPr>
             <a:r>
@@ -10315,10 +11146,12 @@
             <a:avLst/>
           </a:prstGeom>
           <a:solidFill>
-            <a:srgbClr val="334155"/>
+            <a:srgbClr val="1E293B"/>
           </a:solidFill>
           <a:ln>
-            <a:noFill/>
+            <a:solidFill>
+              <a:srgbClr val="1E293B"/>
+            </a:solidFill>
           </a:ln>
         </p:spPr>
         <p:style>
@@ -10366,15 +11199,15 @@
           <a:lstStyle/>
           <a:p>
             <a:pPr>
-              <a:defRPr sz="900">
+              <a:defRPr sz="1000">
                 <a:solidFill>
                   <a:srgbClr val="94A3B8"/>
                 </a:solidFill>
-                <a:latin typeface="Noto Sans KR"/>
-              </a:defRPr>
-            </a:pPr>
-            <a:r>
-              <a:t>AICA 자격심사 시스템 사용자 매뉴얼 · Web App Dark Theme</a:t>
+                <a:latin typeface="Malgun Gothic"/>
+              </a:defRPr>
+            </a:pPr>
+            <a:r>
+              <a:t>AICA 자격심사 시스템 사용자 매뉴얼 · 경영혁신실</a:t>
             </a:r>
           </a:p>
         </p:txBody>
@@ -10402,15 +11235,15 @@
           <a:lstStyle/>
           <a:p>
             <a:pPr algn="r">
-              <a:defRPr sz="900">
+              <a:defRPr sz="1000">
                 <a:solidFill>
                   <a:srgbClr val="94A3B8"/>
                 </a:solidFill>
-                <a:latin typeface="Noto Sans KR"/>
-              </a:defRPr>
-            </a:pPr>
-            <a:r>
-              <a:t>07</a:t>
+                <a:latin typeface="Malgun Gothic"/>
+              </a:defRPr>
+            </a:pPr>
+            <a:r>
+              <a:t>08</a:t>
             </a:r>
           </a:p>
         </p:txBody>
@@ -10423,18 +11256,18 @@
         </p:nvSpPr>
         <p:spPr>
           <a:xfrm>
-            <a:off x="548640" y="1828800"/>
-            <a:ext cx="5486400" cy="4114800"/>
+            <a:off x="548640" y="1645920"/>
+            <a:ext cx="5486400" cy="4389120"/>
           </a:xfrm>
           <a:prstGeom prst="roundRect">
             <a:avLst/>
           </a:prstGeom>
           <a:solidFill>
-            <a:srgbClr val="1E293B"/>
+            <a:srgbClr val="111C38"/>
           </a:solidFill>
           <a:ln w="12700">
             <a:solidFill>
-              <a:srgbClr val="334155"/>
+              <a:srgbClr val="1E293B"/>
             </a:solidFill>
           </a:ln>
         </p:spPr>
@@ -10468,8 +11301,8 @@
         </p:nvSpPr>
         <p:spPr>
           <a:xfrm>
-            <a:off x="731520" y="2011680"/>
-            <a:ext cx="5120640" cy="3749040"/>
+            <a:off x="731520" y="1828800"/>
+            <a:ext cx="5120640" cy="4023360"/>
           </a:xfrm>
           <a:prstGeom prst="rect">
             <a:avLst/>
@@ -10484,17 +11317,33 @@
           <a:p>
             <a:pPr>
               <a:spcAft>
-                <a:spcPts val="1200"/>
-              </a:spcAft>
-              <a:defRPr sz="1500" b="1">
+                <a:spcPts val="1000"/>
+              </a:spcAft>
+              <a:defRPr sz="1600" b="1">
+                <a:solidFill>
+                  <a:srgbClr val="60A5FA"/>
+                </a:solidFill>
+                <a:latin typeface="Malgun Gothic"/>
+              </a:defRPr>
+            </a:pPr>
+            <a:r>
+              <a:t>심사위원회 패널 구성 및 최적 추천</a:t>
+            </a:r>
+          </a:p>
+          <a:p>
+            <a:pPr>
+              <a:spcAft>
+                <a:spcPts val="600"/>
+              </a:spcAft>
+              <a:defRPr sz="1200">
                 <a:solidFill>
                   <a:srgbClr val="FFFFFF"/>
                 </a:solidFill>
-                <a:latin typeface="Noto Sans KR"/>
-              </a:defRPr>
-            </a:pPr>
-            <a:r>
-              <a:t>심사 위원회 패널 구성 및 최적 추천</a:t>
+                <a:latin typeface="Malgun Gothic"/>
+              </a:defRPr>
+            </a:pPr>
+            <a:r>
+              <a:t>1. 현업·사업성 위원 (가치성 검증): 업무 프로세스 개선율 및 사업 효과성 채점</a:t>
             </a:r>
           </a:p>
           <a:p>
@@ -10502,15 +11351,15 @@
               <a:spcAft>
                 <a:spcPts val="600"/>
               </a:spcAft>
-              <a:defRPr sz="1100">
-                <a:solidFill>
-                  <a:srgbClr val="94A3B8"/>
-                </a:solidFill>
-                <a:latin typeface="Noto Sans KR"/>
-              </a:defRPr>
-            </a:pPr>
-            <a:r>
-              <a:t>1. 현업·사업성 위원 (가치성 검증): 업무 프로세스 개선율 및 사업 효과성 채점</a:t>
+              <a:defRPr sz="1200">
+                <a:solidFill>
+                  <a:srgbClr val="FFFFFF"/>
+                </a:solidFill>
+                <a:latin typeface="Malgun Gothic"/>
+              </a:defRPr>
+            </a:pPr>
+            <a:r>
+              <a:t>2. AI·기술 위원 (구현성 검증): 기술적 난이도 및 구현 완성도 채점</a:t>
             </a:r>
           </a:p>
           <a:p>
@@ -10518,31 +11367,48 @@
               <a:spcAft>
                 <a:spcPts val="600"/>
               </a:spcAft>
-              <a:defRPr sz="1100">
-                <a:solidFill>
-                  <a:srgbClr val="94A3B8"/>
-                </a:solidFill>
-                <a:latin typeface="Noto Sans KR"/>
-              </a:defRPr>
-            </a:pPr>
-            <a:r>
-              <a:t>2. AI·기술 위원 (구현성 검증): 기술적 난이도 및 구현 완성도 채점</a:t>
-            </a:r>
-          </a:p>
-          <a:p>
+              <a:defRPr sz="1200">
+                <a:solidFill>
+                  <a:srgbClr val="FFFFFF"/>
+                </a:solidFill>
+                <a:latin typeface="Malgun Gothic"/>
+              </a:defRPr>
+            </a:pPr>
+            <a:r>
+              <a:t>3. 보안·거버넌스 위원 (신뢰성 검증): 데이터 활용 보안 및 내부 가이드 채점</a:t>
+            </a:r>
+          </a:p>
+          <a:p>
+            <a:br/>
             <a:pPr>
               <a:spcAft>
                 <a:spcPts val="600"/>
               </a:spcAft>
-              <a:defRPr sz="1100">
-                <a:solidFill>
-                  <a:srgbClr val="94A3B8"/>
-                </a:solidFill>
-                <a:latin typeface="Noto Sans KR"/>
-              </a:defRPr>
-            </a:pPr>
-            <a:r>
-              <a:t>3. 보안·거버넌스 위원 (신뢰성 검증): 데이터 활용 보안 및 내부 가이드 채점</a:t>
+              <a:defRPr sz="1200" b="1">
+                <a:solidFill>
+                  <a:srgbClr val="38BDF8"/>
+                </a:solidFill>
+                <a:latin typeface="Malgun Gothic"/>
+              </a:defRPr>
+            </a:pPr>
+            <a:r>
+              <a:t>⚡ 최적 패널 자동 추천 로직:</a:t>
+            </a:r>
+          </a:p>
+          <a:p>
+            <a:pPr>
+              <a:spcAft>
+                <a:spcPts val="600"/>
+              </a:spcAft>
+              <a:defRPr sz="1200">
+                <a:solidFill>
+                  <a:srgbClr val="FFFFFF"/>
+                </a:solidFill>
+                <a:latin typeface="Malgun Gothic"/>
+              </a:defRPr>
+            </a:pPr>
+            <a:r>
+              <a:t>• 피평가자와 동일한 사명 소속 위원을 자동 배제하여 후보군을 우선 순위 정렬합니다.</a:t>
             </a:r>
           </a:p>
           <a:p>
@@ -10551,65 +11417,15 @@
               <a:spcAft>
                 <a:spcPts val="600"/>
               </a:spcAft>
-              <a:defRPr sz="1100">
-                <a:solidFill>
-                  <a:srgbClr val="94A3B8"/>
-                </a:solidFill>
-                <a:latin typeface="Noto Sans KR"/>
-              </a:defRPr>
-            </a:pPr>
-            <a:r>
-              <a:t>⚡ 최적 패널 자동 추천 로직:</a:t>
-            </a:r>
-          </a:p>
-          <a:p>
-            <a:pPr>
-              <a:spcAft>
-                <a:spcPts val="600"/>
-              </a:spcAft>
-              <a:defRPr sz="1100">
-                <a:solidFill>
-                  <a:srgbClr val="94A3B8"/>
-                </a:solidFill>
-                <a:latin typeface="Noto Sans KR"/>
-              </a:defRPr>
-            </a:pPr>
-            <a:r>
-              <a:t>• 피평가자와 동일한 사명 소속 위원을 자동 배제하여 후보군을 우선 순위 정렬합니다.</a:t>
-            </a:r>
-          </a:p>
-          <a:p>
-            <a:br/>
-            <a:pPr>
-              <a:spcAft>
-                <a:spcPts val="600"/>
-              </a:spcAft>
-              <a:defRPr sz="1100">
-                <a:solidFill>
-                  <a:srgbClr val="94A3B8"/>
-                </a:solidFill>
-                <a:latin typeface="Noto Sans KR"/>
+              <a:defRPr sz="1200" b="1">
+                <a:solidFill>
+                  <a:srgbClr val="F87171"/>
+                </a:solidFill>
+                <a:latin typeface="Malgun Gothic"/>
               </a:defRPr>
             </a:pPr>
             <a:r>
               <a:t>⚠️ 간사가 위원을 직접 수동 선택하는 경우, 소속이 일치하는 위원 옆에는 빨간색 [이해상충 주의] 레이블이 노출됩니다.</a:t>
-            </a:r>
-          </a:p>
-          <a:p>
-            <a:br/>
-            <a:pPr>
-              <a:spcAft>
-                <a:spcPts val="600"/>
-              </a:spcAft>
-              <a:defRPr sz="1100">
-                <a:solidFill>
-                  <a:srgbClr val="94A3B8"/>
-                </a:solidFill>
-                <a:latin typeface="Noto Sans KR"/>
-              </a:defRPr>
-            </a:pPr>
-            <a:r>
-              <a:t>오른쪽 화면: 대시보드 우측의 위원 배정 큐 영역</a:t>
             </a:r>
           </a:p>
         </p:txBody>
@@ -10622,18 +11438,18 @@
         </p:nvSpPr>
         <p:spPr>
           <a:xfrm>
-            <a:off x="6400800" y="1828800"/>
-            <a:ext cx="5212080" cy="4114800"/>
+            <a:off x="6309360" y="1645920"/>
+            <a:ext cx="5303520" cy="4389120"/>
           </a:xfrm>
           <a:prstGeom prst="roundRect">
             <a:avLst/>
           </a:prstGeom>
           <a:solidFill>
-            <a:srgbClr val="1E293B"/>
+            <a:srgbClr val="111C38"/>
           </a:solidFill>
-          <a:ln w="19050">
+          <a:ln w="12700">
             <a:solidFill>
-              <a:srgbClr val="6366F1"/>
+              <a:srgbClr val="1E293B"/>
             </a:solidFill>
           </a:ln>
         </p:spPr>
@@ -10661,7 +11477,7 @@
       </p:sp>
       <p:pic>
         <p:nvPicPr>
-          <p:cNvPr id="10" name="Picture 9" descr="media__1784188798650.png"/>
+          <p:cNvPr id="10" name="Picture 9" descr="page_08.png"/>
           <p:cNvPicPr>
             <a:picLocks noChangeAspect="1"/>
           </p:cNvPicPr>
@@ -10675,8 +11491,8 @@
         </p:blipFill>
         <p:spPr>
           <a:xfrm>
-            <a:off x="7369320" y="1965960"/>
-            <a:ext cx="3275038" cy="3840480"/>
+            <a:off x="6400800" y="1737360"/>
+            <a:ext cx="5120640" cy="4206240"/>
           </a:xfrm>
           <a:prstGeom prst="rect">
             <a:avLst/>
@@ -10697,7 +11513,7 @@
     <p:bg>
       <p:bgPr>
         <a:solidFill>
-          <a:srgbClr val="0F172A"/>
+          <a:srgbClr val="0B1329"/>
         </a:solidFill>
         <a:effectLst/>
       </p:bgPr>
@@ -10718,7 +11534,7 @@
         <p:spPr>
           <a:xfrm>
             <a:off x="548640" y="365760"/>
-            <a:ext cx="7315200" cy="365760"/>
+            <a:ext cx="7315200" cy="320040"/>
           </a:xfrm>
           <a:prstGeom prst="rect">
             <a:avLst/>
@@ -10726,17 +11542,17 @@
           <a:noFill/>
         </p:spPr>
         <p:txBody>
-          <a:bodyPr wrap="none">
+          <a:bodyPr wrap="square">
             <a:spAutoFit/>
           </a:bodyPr>
           <a:lstStyle/>
           <a:p>
             <a:pPr>
-              <a:defRPr sz="1100" b="1">
+              <a:defRPr sz="1300" b="1">
                 <a:solidFill>
                   <a:srgbClr val="38BDF8"/>
                 </a:solidFill>
-                <a:latin typeface="Noto Sans KR"/>
+                <a:latin typeface="Malgun Gothic"/>
               </a:defRPr>
             </a:pPr>
             <a:r>
@@ -10754,7 +11570,7 @@
         <p:spPr>
           <a:xfrm>
             <a:off x="548640" y="640080"/>
-            <a:ext cx="10058400" cy="731520"/>
+            <a:ext cx="10058400" cy="640080"/>
           </a:xfrm>
           <a:prstGeom prst="rect">
             <a:avLst/>
@@ -10762,17 +11578,17 @@
           <a:noFill/>
         </p:spPr>
         <p:txBody>
-          <a:bodyPr wrap="none">
+          <a:bodyPr wrap="square">
             <a:spAutoFit/>
           </a:bodyPr>
           <a:lstStyle/>
           <a:p>
             <a:pPr>
-              <a:defRPr sz="2600" b="1">
+              <a:defRPr sz="2400" b="1">
                 <a:solidFill>
                   <a:srgbClr val="FFFFFF"/>
                 </a:solidFill>
-                <a:latin typeface="Noto Sans KR"/>
+                <a:latin typeface="Malgun Gothic"/>
               </a:defRPr>
             </a:pPr>
             <a:r>
@@ -10796,10 +11612,12 @@
             <a:avLst/>
           </a:prstGeom>
           <a:solidFill>
-            <a:srgbClr val="334155"/>
+            <a:srgbClr val="1E293B"/>
           </a:solidFill>
           <a:ln>
-            <a:noFill/>
+            <a:solidFill>
+              <a:srgbClr val="1E293B"/>
+            </a:solidFill>
           </a:ln>
         </p:spPr>
         <p:style>
@@ -10847,15 +11665,15 @@
           <a:lstStyle/>
           <a:p>
             <a:pPr>
-              <a:defRPr sz="900">
+              <a:defRPr sz="1000">
                 <a:solidFill>
                   <a:srgbClr val="94A3B8"/>
                 </a:solidFill>
-                <a:latin typeface="Noto Sans KR"/>
-              </a:defRPr>
-            </a:pPr>
-            <a:r>
-              <a:t>AICA 자격심사 시스템 사용자 매뉴얼 · Web App Dark Theme</a:t>
+                <a:latin typeface="Malgun Gothic"/>
+              </a:defRPr>
+            </a:pPr>
+            <a:r>
+              <a:t>AICA 자격심사 시스템 사용자 매뉴얼 · 경영혁신실</a:t>
             </a:r>
           </a:p>
         </p:txBody>
@@ -10883,15 +11701,15 @@
           <a:lstStyle/>
           <a:p>
             <a:pPr algn="r">
-              <a:defRPr sz="900">
+              <a:defRPr sz="1000">
                 <a:solidFill>
                   <a:srgbClr val="94A3B8"/>
                 </a:solidFill>
-                <a:latin typeface="Noto Sans KR"/>
-              </a:defRPr>
-            </a:pPr>
-            <a:r>
-              <a:t>08</a:t>
+                <a:latin typeface="Malgun Gothic"/>
+              </a:defRPr>
+            </a:pPr>
+            <a:r>
+              <a:t>09</a:t>
             </a:r>
           </a:p>
         </p:txBody>
@@ -10904,18 +11722,18 @@
         </p:nvSpPr>
         <p:spPr>
           <a:xfrm>
-            <a:off x="548640" y="1828800"/>
-            <a:ext cx="5486400" cy="4114800"/>
+            <a:off x="548640" y="1645920"/>
+            <a:ext cx="5486400" cy="4389120"/>
           </a:xfrm>
           <a:prstGeom prst="roundRect">
             <a:avLst/>
           </a:prstGeom>
           <a:solidFill>
-            <a:srgbClr val="1E293B"/>
+            <a:srgbClr val="111C38"/>
           </a:solidFill>
           <a:ln w="12700">
             <a:solidFill>
-              <a:srgbClr val="334155"/>
+              <a:srgbClr val="1E293B"/>
             </a:solidFill>
           </a:ln>
         </p:spPr>
@@ -10949,8 +11767,8 @@
         </p:nvSpPr>
         <p:spPr>
           <a:xfrm>
-            <a:off x="731520" y="2011680"/>
-            <a:ext cx="5120640" cy="3749040"/>
+            <a:off x="731520" y="1828800"/>
+            <a:ext cx="5120640" cy="4023360"/>
           </a:xfrm>
           <a:prstGeom prst="rect">
             <a:avLst/>
@@ -10965,17 +11783,49 @@
           <a:p>
             <a:pPr>
               <a:spcAft>
-                <a:spcPts val="1200"/>
-              </a:spcAft>
-              <a:defRPr sz="1500" b="1">
+                <a:spcPts val="1000"/>
+              </a:spcAft>
+              <a:defRPr sz="1600" b="1">
+                <a:solidFill>
+                  <a:srgbClr val="60A5FA"/>
+                </a:solidFill>
+                <a:latin typeface="Malgun Gothic"/>
+              </a:defRPr>
+            </a:pPr>
+            <a:r>
+              <a:t>진행 상태 분기 및 필터 모니터링</a:t>
+            </a:r>
+          </a:p>
+          <a:p>
+            <a:pPr>
+              <a:spcAft>
+                <a:spcPts val="600"/>
+              </a:spcAft>
+              <a:defRPr sz="1200">
+                <a:solidFill>
+                  <a:srgbClr val="E2E8F0"/>
+                </a:solidFill>
+                <a:latin typeface="Malgun Gothic"/>
+              </a:defRPr>
+            </a:pPr>
+            <a:r>
+              <a:t>통합 대기 큐 및 필터 시스템 활용법:</a:t>
+            </a:r>
+          </a:p>
+          <a:p>
+            <a:pPr>
+              <a:spcAft>
+                <a:spcPts val="600"/>
+              </a:spcAft>
+              <a:defRPr sz="1200">
                 <a:solidFill>
                   <a:srgbClr val="FFFFFF"/>
                 </a:solidFill>
-                <a:latin typeface="Noto Sans KR"/>
-              </a:defRPr>
-            </a:pPr>
-            <a:r>
-              <a:t>진행 상태 분기 및 필터 모니터링</a:t>
+                <a:latin typeface="Malgun Gothic"/>
+              </a:defRPr>
+            </a:pPr>
+            <a:r>
+              <a:t>• 필터 종류: 관계사별, 인증 레벨별, 평가 진행 상태별 필터 제공</a:t>
             </a:r>
           </a:p>
           <a:p>
@@ -10983,15 +11833,15 @@
               <a:spcAft>
                 <a:spcPts val="600"/>
               </a:spcAft>
-              <a:defRPr sz="1100">
-                <a:solidFill>
-                  <a:srgbClr val="94A3B8"/>
-                </a:solidFill>
-                <a:latin typeface="Noto Sans KR"/>
-              </a:defRPr>
-            </a:pPr>
-            <a:r>
-              <a:t>통합 대기 큐 및 필터 시스템 활용법:</a:t>
+              <a:defRPr sz="1200">
+                <a:solidFill>
+                  <a:srgbClr val="FFFFFF"/>
+                </a:solidFill>
+                <a:latin typeface="Malgun Gothic"/>
+              </a:defRPr>
+            </a:pPr>
+            <a:r>
+              <a:t>• 1. 평가대기: 패널 배정 완료 후 아직 위원이 채점을 시작하지 않음</a:t>
             </a:r>
           </a:p>
           <a:p>
@@ -10999,15 +11849,15 @@
               <a:spcAft>
                 <a:spcPts val="600"/>
               </a:spcAft>
-              <a:defRPr sz="1100">
-                <a:solidFill>
-                  <a:srgbClr val="94A3B8"/>
-                </a:solidFill>
-                <a:latin typeface="Noto Sans KR"/>
-              </a:defRPr>
-            </a:pPr>
-            <a:r>
-              <a:t>• 필터 종류: 관계사별, 인증 레벨별, 평가 진행 상태별 필터 제공</a:t>
+              <a:defRPr sz="1200">
+                <a:solidFill>
+                  <a:srgbClr val="FFFFFF"/>
+                </a:solidFill>
+                <a:latin typeface="Malgun Gothic"/>
+              </a:defRPr>
+            </a:pPr>
+            <a:r>
+              <a:t>• 2. 심사중: 1명 이상의 위원이 부분 채점을 기록하거나 제출함</a:t>
             </a:r>
           </a:p>
           <a:p>
@@ -11015,15 +11865,15 @@
               <a:spcAft>
                 <a:spcPts val="600"/>
               </a:spcAft>
-              <a:defRPr sz="1100">
-                <a:solidFill>
-                  <a:srgbClr val="94A3B8"/>
-                </a:solidFill>
-                <a:latin typeface="Noto Sans KR"/>
-              </a:defRPr>
-            </a:pPr>
-            <a:r>
-              <a:t>• 1. 평가대기: 패널 배정 완료 후 아직 위원이 채점을 시작하지 않음</a:t>
+              <a:defRPr sz="1200">
+                <a:solidFill>
+                  <a:srgbClr val="FFFFFF"/>
+                </a:solidFill>
+                <a:latin typeface="Malgun Gothic"/>
+              </a:defRPr>
+            </a:pPr>
+            <a:r>
+              <a:t>• 3. 완료: 3인 패널이 모두 최종 평가를 제출하여 종합 평균이 집계됨</a:t>
             </a:r>
           </a:p>
           <a:p>
@@ -11031,81 +11881,32 @@
               <a:spcAft>
                 <a:spcPts val="600"/>
               </a:spcAft>
-              <a:defRPr sz="1100">
-                <a:solidFill>
-                  <a:srgbClr val="94A3B8"/>
-                </a:solidFill>
-                <a:latin typeface="Noto Sans KR"/>
-              </a:defRPr>
-            </a:pPr>
-            <a:r>
-              <a:t>• 2. 심사중: 1명 이상의 위원이 부분 채점을 기록하거나 제출함</a:t>
-            </a:r>
-          </a:p>
-          <a:p>
+              <a:defRPr sz="1200">
+                <a:solidFill>
+                  <a:srgbClr val="FFFFFF"/>
+                </a:solidFill>
+                <a:latin typeface="Malgun Gothic"/>
+              </a:defRPr>
+            </a:pPr>
+            <a:r>
+              <a:t>• 4. 보고서 보기: [결과 보기] 액션 버튼을 눌러 종합판정서 조회 및 인쇄</a:t>
+            </a:r>
+          </a:p>
+          <a:p>
+            <a:br/>
             <a:pPr>
               <a:spcAft>
                 <a:spcPts val="600"/>
               </a:spcAft>
-              <a:defRPr sz="1100">
-                <a:solidFill>
-                  <a:srgbClr val="94A3B8"/>
-                </a:solidFill>
-                <a:latin typeface="Noto Sans KR"/>
-              </a:defRPr>
-            </a:pPr>
-            <a:r>
-              <a:t>• 3. 완료: 3인 패널이 모두 최종 평가를 제출하여 종합 평균이 집계됨</a:t>
-            </a:r>
-          </a:p>
-          <a:p>
-            <a:pPr>
-              <a:spcAft>
-                <a:spcPts val="600"/>
-              </a:spcAft>
-              <a:defRPr sz="1100">
-                <a:solidFill>
-                  <a:srgbClr val="94A3B8"/>
-                </a:solidFill>
-                <a:latin typeface="Noto Sans KR"/>
-              </a:defRPr>
-            </a:pPr>
-            <a:r>
-              <a:t>• 4. 보고서 보기: [결과 보기] 액션 버튼을 눌러 종합판정서 조회 및 인쇄</a:t>
-            </a:r>
-          </a:p>
-          <a:p>
-            <a:br/>
-            <a:pPr>
-              <a:spcAft>
-                <a:spcPts val="600"/>
-              </a:spcAft>
-              <a:defRPr sz="1100">
-                <a:solidFill>
-                  <a:srgbClr val="94A3B8"/>
-                </a:solidFill>
-                <a:latin typeface="Noto Sans KR"/>
+              <a:defRPr sz="1200" b="1">
+                <a:solidFill>
+                  <a:srgbClr val="FACC15"/>
+                </a:solidFill>
+                <a:latin typeface="Malgun Gothic"/>
               </a:defRPr>
             </a:pPr>
             <a:r>
               <a:t>💡 팁: '타 위원 진척도' 항목에서 실시간 배지 도트를 확인해 미제출 위원을 즉시 판별할 수 있습니다.</a:t>
-            </a:r>
-          </a:p>
-          <a:p>
-            <a:br/>
-            <a:pPr>
-              <a:spcAft>
-                <a:spcPts val="600"/>
-              </a:spcAft>
-              <a:defRPr sz="1100">
-                <a:solidFill>
-                  <a:srgbClr val="94A3B8"/>
-                </a:solidFill>
-                <a:latin typeface="Noto Sans KR"/>
-              </a:defRPr>
-            </a:pPr>
-            <a:r>
-              <a:t>오른쪽 화면: 간사용 대기 큐 필터 및 위원 진척 표시 영역</a:t>
             </a:r>
           </a:p>
         </p:txBody>
@@ -11118,18 +11919,18 @@
         </p:nvSpPr>
         <p:spPr>
           <a:xfrm>
-            <a:off x="6400800" y="1828800"/>
-            <a:ext cx="5212080" cy="4114800"/>
+            <a:off x="6309360" y="1645920"/>
+            <a:ext cx="5303520" cy="4389120"/>
           </a:xfrm>
           <a:prstGeom prst="roundRect">
             <a:avLst/>
           </a:prstGeom>
           <a:solidFill>
-            <a:srgbClr val="1E293B"/>
+            <a:srgbClr val="111C38"/>
           </a:solidFill>
-          <a:ln w="19050">
+          <a:ln w="12700">
             <a:solidFill>
-              <a:srgbClr val="6366F1"/>
+              <a:srgbClr val="1E293B"/>
             </a:solidFill>
           </a:ln>
         </p:spPr>
@@ -11157,7 +11958,7 @@
       </p:sp>
       <p:pic>
         <p:nvPicPr>
-          <p:cNvPr id="10" name="Picture 9" descr="media__1784188798650.png"/>
+          <p:cNvPr id="10" name="Picture 9" descr="page_09.png"/>
           <p:cNvPicPr>
             <a:picLocks noChangeAspect="1"/>
           </p:cNvPicPr>
@@ -11171,8 +11972,8 @@
         </p:blipFill>
         <p:spPr>
           <a:xfrm>
-            <a:off x="7369320" y="1965960"/>
-            <a:ext cx="3275038" cy="3840480"/>
+            <a:off x="6400800" y="1737360"/>
+            <a:ext cx="5120640" cy="4206240"/>
           </a:xfrm>
           <a:prstGeom prst="rect">
             <a:avLst/>

--- a/AICA_System_User_Manual.pptx
+++ b/AICA_System_User_Manual.pptx
@@ -5510,7 +5510,7 @@
               </a:defRPr>
             </a:pPr>
             <a:r>
-              <a:t>시연 동영상 및 외부 링크 검증:</a:t>
+              <a:t>16:9 데모 샌드박스 플레이어 &amp; 라이브 미리보기:</a:t>
             </a:r>
           </a:p>
           <a:p>
@@ -5526,7 +5526,7 @@
               </a:defRPr>
             </a:pPr>
             <a:r>
-              <a:t>• 사내 데모 샌드박스 동영상 모의 플레이어 구동</a:t>
+              <a:t>• 16:9 표준 비율 창: 뷰포트 규격에 최적화된 16대9 디스플레이 플레이어 탑재</a:t>
             </a:r>
           </a:p>
           <a:p>
@@ -5542,7 +5542,7 @@
               </a:defRPr>
             </a:pPr>
             <a:r>
-              <a:t>• 과제 증빙용 하이퍼링크 3종 검증:</a:t>
+              <a:t>• 라이브 데모 연동 미리보기: 심사 창 내부 뷰포트(iframe)에서 데모 웹 앱을 직접 가동 및 미리보기</a:t>
             </a:r>
           </a:p>
           <a:p>
@@ -5552,13 +5552,30 @@
               </a:spcAft>
               <a:defRPr sz="1200">
                 <a:solidFill>
+                  <a:srgbClr val="FFFFFF"/>
+                </a:solidFill>
+                <a:latin typeface="Malgun Gothic"/>
+              </a:defRPr>
+            </a:pPr>
+            <a:r>
+              <a:t>• MP4 동영상 재생 모드: 시연 MP4 동영상 플레이어 및 타임라인 슬라이더 연동</a:t>
+            </a:r>
+          </a:p>
+          <a:p>
+            <a:br/>
+            <a:pPr>
+              <a:spcAft>
+                <a:spcPts val="600"/>
+              </a:spcAft>
+              <a:defRPr sz="1200">
+                <a:solidFill>
                   <a:srgbClr val="E2E8F0"/>
                 </a:solidFill>
                 <a:latin typeface="Malgun Gothic"/>
               </a:defRPr>
             </a:pPr>
             <a:r>
-              <a:t>  - 결과 보고서 원본 (그룹웨어 PDF)</a:t>
+              <a:t>과제 증빙용 하이퍼링크 3종 검증:</a:t>
             </a:r>
           </a:p>
           <a:p>
@@ -5568,13 +5585,13 @@
               </a:spcAft>
               <a:defRPr sz="1200">
                 <a:solidFill>
-                  <a:srgbClr val="E2E8F0"/>
-                </a:solidFill>
-                <a:latin typeface="Malgun Gothic"/>
-              </a:defRPr>
-            </a:pPr>
-            <a:r>
-              <a:t>  - 코드 저장소 (GitLab Repository)</a:t>
+                  <a:srgbClr val="FFFFFF"/>
+                </a:solidFill>
+                <a:latin typeface="Malgun Gothic"/>
+              </a:defRPr>
+            </a:pPr>
+            <a:r>
+              <a:t>• 1. 결과 보고서 원본 (그룹웨어 PDF)</a:t>
             </a:r>
           </a:p>
           <a:p>
@@ -5584,13 +5601,29 @@
               </a:spcAft>
               <a:defRPr sz="1200">
                 <a:solidFill>
-                  <a:srgbClr val="E2E8F0"/>
-                </a:solidFill>
-                <a:latin typeface="Malgun Gothic"/>
-              </a:defRPr>
-            </a:pPr>
-            <a:r>
-              <a:t>  - 실제 구동 데모 (사내 Sandbox URL)</a:t>
+                  <a:srgbClr val="FFFFFF"/>
+                </a:solidFill>
+                <a:latin typeface="Malgun Gothic"/>
+              </a:defRPr>
+            </a:pPr>
+            <a:r>
+              <a:t>• 2. 코드 저장소 (GitLab Repository)</a:t>
+            </a:r>
+          </a:p>
+          <a:p>
+            <a:pPr>
+              <a:spcAft>
+                <a:spcPts val="600"/>
+              </a:spcAft>
+              <a:defRPr sz="1200">
+                <a:solidFill>
+                  <a:srgbClr val="FFFFFF"/>
+                </a:solidFill>
+                <a:latin typeface="Malgun Gothic"/>
+              </a:defRPr>
+            </a:pPr>
+            <a:r>
+              <a:t>• 3. 실제 구동 데모 (사내 Sandbox URL)</a:t>
             </a:r>
           </a:p>
         </p:txBody>
